--- a/portfolio/expense-tracker-portfolio.pptx
+++ b/portfolio/expense-tracker-portfolio.pptx
@@ -5139,6 +5139,41 @@
                 <a:latin typeface="Malgun Gothic"/>
               </a:rPr>
               <a:t>     등록·조회·수정·삭제 — 기간·카테고리 필터 및 메모 검색 지원</a:t>
+            </a:r>
+          </a:p>
+          <a:p>
+            <a:pPr>
+              <a:lnSpc>
+                <a:spcPct val="120000"/>
+              </a:lnSpc>
+              <a:spcAft>
+                <a:spcPts val="1000"/>
+              </a:spcAft>
+            </a:pPr>
+            <a:r>
+              <a:rPr sz="1600" b="0">
+                <a:solidFill>
+                  <a:srgbClr val="1F2E2A"/>
+                </a:solidFill>
+                <a:latin typeface="Malgun Gothic"/>
+              </a:rPr>
+              <a:t>•  페이지네이션</a:t>
+            </a:r>
+          </a:p>
+          <a:p>
+            <a:pPr>
+              <a:spcAft>
+                <a:spcPts val="1000"/>
+              </a:spcAft>
+            </a:pPr>
+            <a:r>
+              <a:rPr sz="1300">
+                <a:solidFill>
+                  <a:srgbClr val="6E8880"/>
+                </a:solidFill>
+                <a:latin typeface="Malgun Gothic"/>
+              </a:rPr>
+              <a:t>     지출 내역이 쌓여도 페이지당 10건씩 표시, 필터 변경 시 1페이지로 자동 리셋</a:t>
             </a:r>
           </a:p>
           <a:p>

--- a/portfolio/expense-tracker-portfolio.pptx
+++ b/portfolio/expense-tracker-portfolio.pptx
@@ -16,6 +16,7 @@
     <p:sldId id="264" r:id="rId15"/>
     <p:sldId id="265" r:id="rId16"/>
     <p:sldId id="266" r:id="rId17"/>
+    <p:sldId id="267" r:id="rId18"/>
   </p:sldIdLst>
   <p:sldSz cx="12191695" cy="6858000" type="screen4x3"/>
   <p:notesSz cx="6858000" cy="9144000"/>
@@ -3313,7 +3314,272 @@
       </p:sp>
       <p:sp>
         <p:nvSpPr>
-          <p:cNvPr id="7" name="TextBox 6"/>
+          <p:cNvPr id="7" name="Rounded Rectangle 6"/>
+          <p:cNvSpPr/>
+          <p:nvPr/>
+        </p:nvSpPr>
+        <p:spPr>
+          <a:xfrm>
+            <a:off x="914400" y="4343400"/>
+            <a:ext cx="758952" cy="329184"/>
+          </a:xfrm>
+          <a:prstGeom prst="roundRect">
+            <a:avLst/>
+          </a:prstGeom>
+          <a:solidFill>
+            <a:srgbClr val="E34F26"/>
+          </a:solidFill>
+          <a:ln>
+            <a:noFill/>
+          </a:ln>
+          <a:effectLst/>
+        </p:spPr>
+        <p:style>
+          <a:lnRef idx="1">
+            <a:schemeClr val="accent1"/>
+          </a:lnRef>
+          <a:fillRef idx="3">
+            <a:schemeClr val="accent1"/>
+          </a:fillRef>
+          <a:effectRef idx="2">
+            <a:schemeClr val="accent1"/>
+          </a:effectRef>
+          <a:fontRef idx="minor">
+            <a:schemeClr val="lt1"/>
+          </a:fontRef>
+        </p:style>
+        <p:txBody>
+          <a:bodyPr rtlCol="0" anchor="ctr" wrap="none" lIns="50800" rIns="50800" tIns="25400" bIns="25400"/>
+          <a:lstStyle/>
+          <a:p>
+            <a:pPr algn="ctr"/>
+            <a:r>
+              <a:rPr sz="1100" b="1">
+                <a:solidFill>
+                  <a:srgbClr val="FFFFFF"/>
+                </a:solidFill>
+                <a:latin typeface="Malgun Gothic"/>
+              </a:rPr>
+              <a:t>HTML5</a:t>
+            </a:r>
+          </a:p>
+        </p:txBody>
+      </p:sp>
+      <p:sp>
+        <p:nvSpPr>
+          <p:cNvPr id="8" name="Rounded Rectangle 7"/>
+          <p:cNvSpPr/>
+          <p:nvPr/>
+        </p:nvSpPr>
+        <p:spPr>
+          <a:xfrm>
+            <a:off x="1810512" y="4343400"/>
+            <a:ext cx="658368" cy="329184"/>
+          </a:xfrm>
+          <a:prstGeom prst="roundRect">
+            <a:avLst/>
+          </a:prstGeom>
+          <a:solidFill>
+            <a:srgbClr val="1572B6"/>
+          </a:solidFill>
+          <a:ln>
+            <a:noFill/>
+          </a:ln>
+          <a:effectLst/>
+        </p:spPr>
+        <p:style>
+          <a:lnRef idx="1">
+            <a:schemeClr val="accent1"/>
+          </a:lnRef>
+          <a:fillRef idx="3">
+            <a:schemeClr val="accent1"/>
+          </a:fillRef>
+          <a:effectRef idx="2">
+            <a:schemeClr val="accent1"/>
+          </a:effectRef>
+          <a:fontRef idx="minor">
+            <a:schemeClr val="lt1"/>
+          </a:fontRef>
+        </p:style>
+        <p:txBody>
+          <a:bodyPr rtlCol="0" anchor="ctr" wrap="none" lIns="50800" rIns="50800" tIns="25400" bIns="25400"/>
+          <a:lstStyle/>
+          <a:p>
+            <a:pPr algn="ctr"/>
+            <a:r>
+              <a:rPr sz="1100" b="1">
+                <a:solidFill>
+                  <a:srgbClr val="FFFFFF"/>
+                </a:solidFill>
+                <a:latin typeface="Malgun Gothic"/>
+              </a:rPr>
+              <a:t>CSS3</a:t>
+            </a:r>
+          </a:p>
+        </p:txBody>
+      </p:sp>
+      <p:sp>
+        <p:nvSpPr>
+          <p:cNvPr id="9" name="Rounded Rectangle 8"/>
+          <p:cNvSpPr/>
+          <p:nvPr/>
+        </p:nvSpPr>
+        <p:spPr>
+          <a:xfrm>
+            <a:off x="2606040" y="4343400"/>
+            <a:ext cx="1261872" cy="329184"/>
+          </a:xfrm>
+          <a:prstGeom prst="roundRect">
+            <a:avLst/>
+          </a:prstGeom>
+          <a:solidFill>
+            <a:srgbClr val="8A7A00"/>
+          </a:solidFill>
+          <a:ln>
+            <a:noFill/>
+          </a:ln>
+          <a:effectLst/>
+        </p:spPr>
+        <p:style>
+          <a:lnRef idx="1">
+            <a:schemeClr val="accent1"/>
+          </a:lnRef>
+          <a:fillRef idx="3">
+            <a:schemeClr val="accent1"/>
+          </a:fillRef>
+          <a:effectRef idx="2">
+            <a:schemeClr val="accent1"/>
+          </a:effectRef>
+          <a:fontRef idx="minor">
+            <a:schemeClr val="lt1"/>
+          </a:fontRef>
+        </p:style>
+        <p:txBody>
+          <a:bodyPr rtlCol="0" anchor="ctr" wrap="none" lIns="50800" rIns="50800" tIns="25400" bIns="25400"/>
+          <a:lstStyle/>
+          <a:p>
+            <a:pPr algn="ctr"/>
+            <a:r>
+              <a:rPr sz="1100" b="1">
+                <a:solidFill>
+                  <a:srgbClr val="FFFFFF"/>
+                </a:solidFill>
+                <a:latin typeface="Malgun Gothic"/>
+              </a:rPr>
+              <a:t>JavaScript</a:t>
+            </a:r>
+          </a:p>
+        </p:txBody>
+      </p:sp>
+      <p:sp>
+        <p:nvSpPr>
+          <p:cNvPr id="10" name="Rounded Rectangle 9"/>
+          <p:cNvSpPr/>
+          <p:nvPr/>
+        </p:nvSpPr>
+        <p:spPr>
+          <a:xfrm>
+            <a:off x="4005072" y="4343400"/>
+            <a:ext cx="1060704" cy="329184"/>
+          </a:xfrm>
+          <a:prstGeom prst="roundRect">
+            <a:avLst/>
+          </a:prstGeom>
+          <a:solidFill>
+            <a:srgbClr val="1F8A5F"/>
+          </a:solidFill>
+          <a:ln>
+            <a:noFill/>
+          </a:ln>
+          <a:effectLst/>
+        </p:spPr>
+        <p:style>
+          <a:lnRef idx="1">
+            <a:schemeClr val="accent1"/>
+          </a:lnRef>
+          <a:fillRef idx="3">
+            <a:schemeClr val="accent1"/>
+          </a:fillRef>
+          <a:effectRef idx="2">
+            <a:schemeClr val="accent1"/>
+          </a:effectRef>
+          <a:fontRef idx="minor">
+            <a:schemeClr val="lt1"/>
+          </a:fontRef>
+        </p:style>
+        <p:txBody>
+          <a:bodyPr rtlCol="0" anchor="ctr" wrap="none" lIns="50800" rIns="50800" tIns="25400" bIns="25400"/>
+          <a:lstStyle/>
+          <a:p>
+            <a:pPr algn="ctr"/>
+            <a:r>
+              <a:rPr sz="1100" b="1">
+                <a:solidFill>
+                  <a:srgbClr val="FFFFFF"/>
+                </a:solidFill>
+                <a:latin typeface="Malgun Gothic"/>
+              </a:rPr>
+              <a:t>Supabase</a:t>
+            </a:r>
+          </a:p>
+        </p:txBody>
+      </p:sp>
+      <p:sp>
+        <p:nvSpPr>
+          <p:cNvPr id="11" name="Rounded Rectangle 10"/>
+          <p:cNvSpPr/>
+          <p:nvPr/>
+        </p:nvSpPr>
+        <p:spPr>
+          <a:xfrm>
+            <a:off x="5202936" y="4343400"/>
+            <a:ext cx="1261872" cy="329184"/>
+          </a:xfrm>
+          <a:prstGeom prst="roundRect">
+            <a:avLst/>
+          </a:prstGeom>
+          <a:solidFill>
+            <a:srgbClr val="2F4F8A"/>
+          </a:solidFill>
+          <a:ln>
+            <a:noFill/>
+          </a:ln>
+          <a:effectLst/>
+        </p:spPr>
+        <p:style>
+          <a:lnRef idx="1">
+            <a:schemeClr val="accent1"/>
+          </a:lnRef>
+          <a:fillRef idx="3">
+            <a:schemeClr val="accent1"/>
+          </a:fillRef>
+          <a:effectRef idx="2">
+            <a:schemeClr val="accent1"/>
+          </a:effectRef>
+          <a:fontRef idx="minor">
+            <a:schemeClr val="lt1"/>
+          </a:fontRef>
+        </p:style>
+        <p:txBody>
+          <a:bodyPr rtlCol="0" anchor="ctr" wrap="none" lIns="50800" rIns="50800" tIns="25400" bIns="25400"/>
+          <a:lstStyle/>
+          <a:p>
+            <a:pPr algn="ctr"/>
+            <a:r>
+              <a:rPr sz="1100" b="1">
+                <a:solidFill>
+                  <a:srgbClr val="FFFFFF"/>
+                </a:solidFill>
+                <a:latin typeface="Malgun Gothic"/>
+              </a:rPr>
+              <a:t>PostgreSQL</a:t>
+            </a:r>
+          </a:p>
+        </p:txBody>
+      </p:sp>
+      <p:sp>
+        <p:nvSpPr>
+          <p:cNvPr id="12" name="TextBox 11"/>
           <p:cNvSpPr txBox="1"/>
           <p:nvPr/>
         </p:nvSpPr>
@@ -3454,7 +3720,7 @@
                 </a:solidFill>
                 <a:latin typeface="Malgun Gothic"/>
               </a:rPr>
-              <a:t>RETROSPECTIVE</a:t>
+              <a:t>WORKFLOW</a:t>
             </a:r>
           </a:p>
         </p:txBody>
@@ -3493,7 +3759,7 @@
                 </a:solidFill>
                 <a:latin typeface="Malgun Gothic"/>
               </a:rPr>
-              <a:t>회고 &amp; 다음 단계</a:t>
+              <a:t>협업 워크플로우</a:t>
             </a:r>
           </a:p>
         </p:txBody>
@@ -3544,14 +3810,58 @@
       </p:sp>
       <p:sp>
         <p:nvSpPr>
-          <p:cNvPr id="6" name="TextBox 5"/>
+          <p:cNvPr id="6" name="Rounded Rectangle 5"/>
+          <p:cNvSpPr/>
+          <p:nvPr/>
+        </p:nvSpPr>
+        <p:spPr>
+          <a:xfrm>
+            <a:off x="822960" y="2377440"/>
+            <a:ext cx="2377440" cy="822960"/>
+          </a:xfrm>
+          <a:prstGeom prst="roundRect">
+            <a:avLst/>
+          </a:prstGeom>
+          <a:solidFill>
+            <a:srgbClr val="0F766E"/>
+          </a:solidFill>
+          <a:ln>
+            <a:noFill/>
+          </a:ln>
+          <a:effectLst/>
+        </p:spPr>
+        <p:style>
+          <a:lnRef idx="1">
+            <a:schemeClr val="accent1"/>
+          </a:lnRef>
+          <a:fillRef idx="3">
+            <a:schemeClr val="accent1"/>
+          </a:fillRef>
+          <a:effectRef idx="2">
+            <a:schemeClr val="accent1"/>
+          </a:effectRef>
+          <a:fontRef idx="minor">
+            <a:schemeClr val="lt1"/>
+          </a:fontRef>
+        </p:style>
+        <p:txBody>
+          <a:bodyPr rtlCol="0" anchor="ctr"/>
+          <a:lstStyle/>
+          <a:p>
+            <a:pPr algn="ctr"/>
+          </a:p>
+        </p:txBody>
+      </p:sp>
+      <p:sp>
+        <p:nvSpPr>
+          <p:cNvPr id="7" name="TextBox 6"/>
           <p:cNvSpPr txBox="1"/>
           <p:nvPr/>
         </p:nvSpPr>
         <p:spPr>
           <a:xfrm>
-            <a:off x="640080" y="1828800"/>
-            <a:ext cx="5303520" cy="365760"/>
+            <a:off x="822960" y="2624328"/>
+            <a:ext cx="2377440" cy="365760"/>
           </a:xfrm>
           <a:prstGeom prst="rect">
             <a:avLst/>
@@ -3564,7 +3874,7 @@
           </a:bodyPr>
           <a:lstStyle/>
           <a:p>
-            <a:pPr algn="l">
+            <a:pPr algn="ctr">
               <a:lnSpc>
                 <a:spcPct val="115000"/>
               </a:lnSpc>
@@ -3572,25 +3882,403 @@
             <a:r>
               <a:rPr sz="1600" b="1">
                 <a:solidFill>
-                  <a:srgbClr val="0F766E"/>
-                </a:solidFill>
-                <a:latin typeface="Malgun Gothic"/>
-              </a:rPr>
-              <a:t>배운 점</a:t>
-            </a:r>
-          </a:p>
-        </p:txBody>
-      </p:sp>
-      <p:sp>
-        <p:nvSpPr>
-          <p:cNvPr id="7" name="TextBox 6"/>
+                  <a:srgbClr val="FFFFFF"/>
+                </a:solidFill>
+                <a:latin typeface="Malgun Gothic"/>
+              </a:rPr>
+              <a:t>feat/shared</a:t>
+            </a:r>
+          </a:p>
+        </p:txBody>
+      </p:sp>
+      <p:sp>
+        <p:nvSpPr>
+          <p:cNvPr id="8" name="Right Arrow 7"/>
+          <p:cNvSpPr/>
+          <p:nvPr/>
+        </p:nvSpPr>
+        <p:spPr>
+          <a:xfrm>
+            <a:off x="3246120" y="2651760"/>
+            <a:ext cx="274320" cy="274320"/>
+          </a:xfrm>
+          <a:prstGeom prst="rightArrow">
+            <a:avLst/>
+          </a:prstGeom>
+          <a:solidFill>
+            <a:srgbClr val="34D399"/>
+          </a:solidFill>
+          <a:ln>
+            <a:noFill/>
+          </a:ln>
+        </p:spPr>
+        <p:style>
+          <a:lnRef idx="1">
+            <a:schemeClr val="accent1"/>
+          </a:lnRef>
+          <a:fillRef idx="3">
+            <a:schemeClr val="accent1"/>
+          </a:fillRef>
+          <a:effectRef idx="2">
+            <a:schemeClr val="accent1"/>
+          </a:effectRef>
+          <a:fontRef idx="minor">
+            <a:schemeClr val="lt1"/>
+          </a:fontRef>
+        </p:style>
+        <p:txBody>
+          <a:bodyPr rtlCol="0" anchor="ctr"/>
+          <a:lstStyle/>
+          <a:p>
+            <a:pPr algn="ctr"/>
+          </a:p>
+        </p:txBody>
+      </p:sp>
+      <p:sp>
+        <p:nvSpPr>
+          <p:cNvPr id="9" name="Rounded Rectangle 8"/>
+          <p:cNvSpPr/>
+          <p:nvPr/>
+        </p:nvSpPr>
+        <p:spPr>
+          <a:xfrm>
+            <a:off x="3520440" y="2377440"/>
+            <a:ext cx="2377440" cy="822960"/>
+          </a:xfrm>
+          <a:prstGeom prst="roundRect">
+            <a:avLst/>
+          </a:prstGeom>
+          <a:solidFill>
+            <a:srgbClr val="0F766E"/>
+          </a:solidFill>
+          <a:ln>
+            <a:noFill/>
+          </a:ln>
+          <a:effectLst/>
+        </p:spPr>
+        <p:style>
+          <a:lnRef idx="1">
+            <a:schemeClr val="accent1"/>
+          </a:lnRef>
+          <a:fillRef idx="3">
+            <a:schemeClr val="accent1"/>
+          </a:fillRef>
+          <a:effectRef idx="2">
+            <a:schemeClr val="accent1"/>
+          </a:effectRef>
+          <a:fontRef idx="minor">
+            <a:schemeClr val="lt1"/>
+          </a:fontRef>
+        </p:style>
+        <p:txBody>
+          <a:bodyPr rtlCol="0" anchor="ctr"/>
+          <a:lstStyle/>
+          <a:p>
+            <a:pPr algn="ctr"/>
+          </a:p>
+        </p:txBody>
+      </p:sp>
+      <p:sp>
+        <p:nvSpPr>
+          <p:cNvPr id="10" name="TextBox 9"/>
           <p:cNvSpPr txBox="1"/>
           <p:nvPr/>
         </p:nvSpPr>
         <p:spPr>
           <a:xfrm>
-            <a:off x="640080" y="2240280"/>
-            <a:ext cx="5303520" cy="3657600"/>
+            <a:off x="3520440" y="2624328"/>
+            <a:ext cx="2377440" cy="365760"/>
+          </a:xfrm>
+          <a:prstGeom prst="rect">
+            <a:avLst/>
+          </a:prstGeom>
+          <a:noFill/>
+        </p:spPr>
+        <p:txBody>
+          <a:bodyPr wrap="square" anchor="t">
+            <a:spAutoFit/>
+          </a:bodyPr>
+          <a:lstStyle/>
+          <a:p>
+            <a:pPr algn="ctr">
+              <a:lnSpc>
+                <a:spcPct val="115000"/>
+              </a:lnSpc>
+            </a:pPr>
+            <a:r>
+              <a:rPr sz="1600" b="1">
+                <a:solidFill>
+                  <a:srgbClr val="FFFFFF"/>
+                </a:solidFill>
+                <a:latin typeface="Malgun Gothic"/>
+              </a:rPr>
+              <a:t>feat/auth</a:t>
+            </a:r>
+          </a:p>
+        </p:txBody>
+      </p:sp>
+      <p:sp>
+        <p:nvSpPr>
+          <p:cNvPr id="11" name="Right Arrow 10"/>
+          <p:cNvSpPr/>
+          <p:nvPr/>
+        </p:nvSpPr>
+        <p:spPr>
+          <a:xfrm>
+            <a:off x="5943600" y="2651760"/>
+            <a:ext cx="274320" cy="274320"/>
+          </a:xfrm>
+          <a:prstGeom prst="rightArrow">
+            <a:avLst/>
+          </a:prstGeom>
+          <a:solidFill>
+            <a:srgbClr val="34D399"/>
+          </a:solidFill>
+          <a:ln>
+            <a:noFill/>
+          </a:ln>
+        </p:spPr>
+        <p:style>
+          <a:lnRef idx="1">
+            <a:schemeClr val="accent1"/>
+          </a:lnRef>
+          <a:fillRef idx="3">
+            <a:schemeClr val="accent1"/>
+          </a:fillRef>
+          <a:effectRef idx="2">
+            <a:schemeClr val="accent1"/>
+          </a:effectRef>
+          <a:fontRef idx="minor">
+            <a:schemeClr val="lt1"/>
+          </a:fontRef>
+        </p:style>
+        <p:txBody>
+          <a:bodyPr rtlCol="0" anchor="ctr"/>
+          <a:lstStyle/>
+          <a:p>
+            <a:pPr algn="ctr"/>
+          </a:p>
+        </p:txBody>
+      </p:sp>
+      <p:sp>
+        <p:nvSpPr>
+          <p:cNvPr id="12" name="Rounded Rectangle 11"/>
+          <p:cNvSpPr/>
+          <p:nvPr/>
+        </p:nvSpPr>
+        <p:spPr>
+          <a:xfrm>
+            <a:off x="6217920" y="2377440"/>
+            <a:ext cx="2377440" cy="822960"/>
+          </a:xfrm>
+          <a:prstGeom prst="roundRect">
+            <a:avLst/>
+          </a:prstGeom>
+          <a:solidFill>
+            <a:srgbClr val="0F766E"/>
+          </a:solidFill>
+          <a:ln>
+            <a:noFill/>
+          </a:ln>
+          <a:effectLst/>
+        </p:spPr>
+        <p:style>
+          <a:lnRef idx="1">
+            <a:schemeClr val="accent1"/>
+          </a:lnRef>
+          <a:fillRef idx="3">
+            <a:schemeClr val="accent1"/>
+          </a:fillRef>
+          <a:effectRef idx="2">
+            <a:schemeClr val="accent1"/>
+          </a:effectRef>
+          <a:fontRef idx="minor">
+            <a:schemeClr val="lt1"/>
+          </a:fontRef>
+        </p:style>
+        <p:txBody>
+          <a:bodyPr rtlCol="0" anchor="ctr"/>
+          <a:lstStyle/>
+          <a:p>
+            <a:pPr algn="ctr"/>
+          </a:p>
+        </p:txBody>
+      </p:sp>
+      <p:sp>
+        <p:nvSpPr>
+          <p:cNvPr id="13" name="TextBox 12"/>
+          <p:cNvSpPr txBox="1"/>
+          <p:nvPr/>
+        </p:nvSpPr>
+        <p:spPr>
+          <a:xfrm>
+            <a:off x="6217920" y="2624328"/>
+            <a:ext cx="2377440" cy="365760"/>
+          </a:xfrm>
+          <a:prstGeom prst="rect">
+            <a:avLst/>
+          </a:prstGeom>
+          <a:noFill/>
+        </p:spPr>
+        <p:txBody>
+          <a:bodyPr wrap="square" anchor="t">
+            <a:spAutoFit/>
+          </a:bodyPr>
+          <a:lstStyle/>
+          <a:p>
+            <a:pPr algn="ctr">
+              <a:lnSpc>
+                <a:spcPct val="115000"/>
+              </a:lnSpc>
+            </a:pPr>
+            <a:r>
+              <a:rPr sz="1600" b="1">
+                <a:solidFill>
+                  <a:srgbClr val="FFFFFF"/>
+                </a:solidFill>
+                <a:latin typeface="Malgun Gothic"/>
+              </a:rPr>
+              <a:t>feat/core</a:t>
+            </a:r>
+          </a:p>
+        </p:txBody>
+      </p:sp>
+      <p:sp>
+        <p:nvSpPr>
+          <p:cNvPr id="14" name="Right Arrow 13"/>
+          <p:cNvSpPr/>
+          <p:nvPr/>
+        </p:nvSpPr>
+        <p:spPr>
+          <a:xfrm>
+            <a:off x="8641080" y="2651760"/>
+            <a:ext cx="274320" cy="274320"/>
+          </a:xfrm>
+          <a:prstGeom prst="rightArrow">
+            <a:avLst/>
+          </a:prstGeom>
+          <a:solidFill>
+            <a:srgbClr val="34D399"/>
+          </a:solidFill>
+          <a:ln>
+            <a:noFill/>
+          </a:ln>
+        </p:spPr>
+        <p:style>
+          <a:lnRef idx="1">
+            <a:schemeClr val="accent1"/>
+          </a:lnRef>
+          <a:fillRef idx="3">
+            <a:schemeClr val="accent1"/>
+          </a:fillRef>
+          <a:effectRef idx="2">
+            <a:schemeClr val="accent1"/>
+          </a:effectRef>
+          <a:fontRef idx="minor">
+            <a:schemeClr val="lt1"/>
+          </a:fontRef>
+        </p:style>
+        <p:txBody>
+          <a:bodyPr rtlCol="0" anchor="ctr"/>
+          <a:lstStyle/>
+          <a:p>
+            <a:pPr algn="ctr"/>
+          </a:p>
+        </p:txBody>
+      </p:sp>
+      <p:sp>
+        <p:nvSpPr>
+          <p:cNvPr id="15" name="Rounded Rectangle 14"/>
+          <p:cNvSpPr/>
+          <p:nvPr/>
+        </p:nvSpPr>
+        <p:spPr>
+          <a:xfrm>
+            <a:off x="8915400" y="2377440"/>
+            <a:ext cx="2377440" cy="822960"/>
+          </a:xfrm>
+          <a:prstGeom prst="roundRect">
+            <a:avLst/>
+          </a:prstGeom>
+          <a:solidFill>
+            <a:srgbClr val="1E3A34"/>
+          </a:solidFill>
+          <a:ln>
+            <a:noFill/>
+          </a:ln>
+          <a:effectLst/>
+        </p:spPr>
+        <p:style>
+          <a:lnRef idx="1">
+            <a:schemeClr val="accent1"/>
+          </a:lnRef>
+          <a:fillRef idx="3">
+            <a:schemeClr val="accent1"/>
+          </a:fillRef>
+          <a:effectRef idx="2">
+            <a:schemeClr val="accent1"/>
+          </a:effectRef>
+          <a:fontRef idx="minor">
+            <a:schemeClr val="lt1"/>
+          </a:fontRef>
+        </p:style>
+        <p:txBody>
+          <a:bodyPr rtlCol="0" anchor="ctr"/>
+          <a:lstStyle/>
+          <a:p>
+            <a:pPr algn="ctr"/>
+          </a:p>
+        </p:txBody>
+      </p:sp>
+      <p:sp>
+        <p:nvSpPr>
+          <p:cNvPr id="16" name="TextBox 15"/>
+          <p:cNvSpPr txBox="1"/>
+          <p:nvPr/>
+        </p:nvSpPr>
+        <p:spPr>
+          <a:xfrm>
+            <a:off x="8915400" y="2624328"/>
+            <a:ext cx="2377440" cy="365760"/>
+          </a:xfrm>
+          <a:prstGeom prst="rect">
+            <a:avLst/>
+          </a:prstGeom>
+          <a:noFill/>
+        </p:spPr>
+        <p:txBody>
+          <a:bodyPr wrap="square" anchor="t">
+            <a:spAutoFit/>
+          </a:bodyPr>
+          <a:lstStyle/>
+          <a:p>
+            <a:pPr algn="ctr">
+              <a:lnSpc>
+                <a:spcPct val="115000"/>
+              </a:lnSpc>
+            </a:pPr>
+            <a:r>
+              <a:rPr sz="1600" b="1">
+                <a:solidFill>
+                  <a:srgbClr val="FFFFFF"/>
+                </a:solidFill>
+                <a:latin typeface="Malgun Gothic"/>
+              </a:rPr>
+              <a:t>main</a:t>
+            </a:r>
+          </a:p>
+        </p:txBody>
+      </p:sp>
+      <p:sp>
+        <p:nvSpPr>
+          <p:cNvPr id="17" name="TextBox 16"/>
+          <p:cNvSpPr txBox="1"/>
+          <p:nvPr/>
+        </p:nvSpPr>
+        <p:spPr>
+          <a:xfrm>
+            <a:off x="822960" y="3657600"/>
+            <a:ext cx="10515600" cy="2560320"/>
           </a:xfrm>
           <a:prstGeom prst="rect">
             <a:avLst/>
@@ -3612,32 +4300,29 @@
               </a:spcAft>
             </a:pPr>
             <a:r>
-              <a:rPr sz="1400" b="0">
+              <a:rPr sz="1500" b="0">
                 <a:solidFill>
                   <a:srgbClr val="1F2E2A"/>
                 </a:solidFill>
                 <a:latin typeface="Malgun Gothic"/>
               </a:rPr>
-              <a:t>•  정적 데모(localStorage)에서 실제 백엔드(Supabase)로 옮기며 인증·보안을 다시 설계하는 경험</a:t>
+              <a:t>•  PR 기반 병합</a:t>
             </a:r>
           </a:p>
           <a:p>
             <a:pPr>
-              <a:lnSpc>
-                <a:spcPct val="120000"/>
-              </a:lnSpc>
               <a:spcAft>
                 <a:spcPts val="1000"/>
               </a:spcAft>
             </a:pPr>
             <a:r>
-              <a:rPr sz="1400" b="0">
-                <a:solidFill>
-                  <a:srgbClr val="1F2E2A"/>
-                </a:solidFill>
-                <a:latin typeface="Malgun Gothic"/>
-              </a:rPr>
-              <a:t>•  RLS 정책의 재귀 문제를 SECURITY DEFINER 함수 패턴으로 해결</a:t>
+              <a:rPr sz="1200">
+                <a:solidFill>
+                  <a:srgbClr val="6E8880"/>
+                </a:solidFill>
+                <a:latin typeface="Malgun Gothic"/>
+              </a:rPr>
+              <a:t>     공통 자원 → 인증 → 핵심 기능 순으로 브랜치를 나눠 작업 후 Pull Request로 main에 병합</a:t>
             </a:r>
           </a:p>
           <a:p>
@@ -3650,27 +4335,43 @@
               </a:spcAft>
             </a:pPr>
             <a:r>
-              <a:rPr sz="1400" b="0">
+              <a:rPr sz="1500" b="0">
                 <a:solidFill>
                   <a:srgbClr val="1F2E2A"/>
                 </a:solidFill>
                 <a:latin typeface="Malgun Gothic"/>
               </a:rPr>
-              <a:t>•  Security Advisor로 보이지 않는 권한 노출까지 점검하는 습관</a:t>
-            </a:r>
-          </a:p>
-        </p:txBody>
-      </p:sp>
-      <p:sp>
-        <p:nvSpPr>
-          <p:cNvPr id="8" name="TextBox 7"/>
+              <a:t>•  병합 후 브랜치 정리</a:t>
+            </a:r>
+          </a:p>
+          <a:p>
+            <a:pPr>
+              <a:spcAft>
+                <a:spcPts val="1000"/>
+              </a:spcAft>
+            </a:pPr>
+            <a:r>
+              <a:rPr sz="1200">
+                <a:solidFill>
+                  <a:srgbClr val="6E8880"/>
+                </a:solidFill>
+                <a:latin typeface="Malgun Gothic"/>
+              </a:rPr>
+              <a:t>     머지가 끝난 feat/* 브랜치와 사용하지 않는 master 브랜치를 삭제해 원격 저장소를 깔끔하게 유지</a:t>
+            </a:r>
+          </a:p>
+        </p:txBody>
+      </p:sp>
+      <p:sp>
+        <p:nvSpPr>
+          <p:cNvPr id="18" name="TextBox 17"/>
           <p:cNvSpPr txBox="1"/>
           <p:nvPr/>
         </p:nvSpPr>
         <p:spPr>
           <a:xfrm>
-            <a:off x="6309360" y="1828800"/>
-            <a:ext cx="5303520" cy="365760"/>
+            <a:off x="457200" y="6446520"/>
+            <a:ext cx="7315200" cy="320040"/>
           </a:xfrm>
           <a:prstGeom prst="rect">
             <a:avLst/>
@@ -3689,125 +4390,6 @@
               </a:lnSpc>
             </a:pPr>
             <a:r>
-              <a:rPr sz="1600" b="1">
-                <a:solidFill>
-                  <a:srgbClr val="0F766E"/>
-                </a:solidFill>
-                <a:latin typeface="Malgun Gothic"/>
-              </a:rPr>
-              <a:t>다음 단계</a:t>
-            </a:r>
-          </a:p>
-        </p:txBody>
-      </p:sp>
-      <p:sp>
-        <p:nvSpPr>
-          <p:cNvPr id="9" name="TextBox 8"/>
-          <p:cNvSpPr txBox="1"/>
-          <p:nvPr/>
-        </p:nvSpPr>
-        <p:spPr>
-          <a:xfrm>
-            <a:off x="6309360" y="2240280"/>
-            <a:ext cx="5303520" cy="3657600"/>
-          </a:xfrm>
-          <a:prstGeom prst="rect">
-            <a:avLst/>
-          </a:prstGeom>
-          <a:noFill/>
-        </p:spPr>
-        <p:txBody>
-          <a:bodyPr wrap="square">
-            <a:spAutoFit/>
-          </a:bodyPr>
-          <a:lstStyle/>
-          <a:p>
-            <a:pPr>
-              <a:lnSpc>
-                <a:spcPct val="120000"/>
-              </a:lnSpc>
-              <a:spcAft>
-                <a:spcPts val="1000"/>
-              </a:spcAft>
-            </a:pPr>
-            <a:r>
-              <a:rPr sz="1400" b="0">
-                <a:solidFill>
-                  <a:srgbClr val="1F2E2A"/>
-                </a:solidFill>
-                <a:latin typeface="Malgun Gothic"/>
-              </a:rPr>
-              <a:t>•  관리자 계정도 Supabase Auth 기반으로 전환 검토</a:t>
-            </a:r>
-          </a:p>
-          <a:p>
-            <a:pPr>
-              <a:lnSpc>
-                <a:spcPct val="120000"/>
-              </a:lnSpc>
-              <a:spcAft>
-                <a:spcPts val="1000"/>
-              </a:spcAft>
-            </a:pPr>
-            <a:r>
-              <a:rPr sz="1400" b="0">
-                <a:solidFill>
-                  <a:srgbClr val="1F2E2A"/>
-                </a:solidFill>
-                <a:latin typeface="Malgun Gothic"/>
-              </a:rPr>
-              <a:t>•  프론트엔드(js/utils.js)를 Supabase 클라이언트 호출로 교체</a:t>
-            </a:r>
-          </a:p>
-          <a:p>
-            <a:pPr>
-              <a:lnSpc>
-                <a:spcPct val="120000"/>
-              </a:lnSpc>
-              <a:spcAft>
-                <a:spcPts val="1000"/>
-              </a:spcAft>
-            </a:pPr>
-            <a:r>
-              <a:rPr sz="1400" b="0">
-                <a:solidFill>
-                  <a:srgbClr val="1F2E2A"/>
-                </a:solidFill>
-                <a:latin typeface="Malgun Gothic"/>
-              </a:rPr>
-              <a:t>•  관리자 페이지에 실시간 통계·알림 기능 확장</a:t>
-            </a:r>
-          </a:p>
-        </p:txBody>
-      </p:sp>
-      <p:sp>
-        <p:nvSpPr>
-          <p:cNvPr id="10" name="TextBox 9"/>
-          <p:cNvSpPr txBox="1"/>
-          <p:nvPr/>
-        </p:nvSpPr>
-        <p:spPr>
-          <a:xfrm>
-            <a:off x="457200" y="6446520"/>
-            <a:ext cx="7315200" cy="320040"/>
-          </a:xfrm>
-          <a:prstGeom prst="rect">
-            <a:avLst/>
-          </a:prstGeom>
-          <a:noFill/>
-        </p:spPr>
-        <p:txBody>
-          <a:bodyPr wrap="square" anchor="t">
-            <a:spAutoFit/>
-          </a:bodyPr>
-          <a:lstStyle/>
-          <a:p>
-            <a:pPr algn="l">
-              <a:lnSpc>
-                <a:spcPct val="115000"/>
-              </a:lnSpc>
-            </a:pPr>
-            <a:r>
               <a:rPr sz="1000" b="0">
                 <a:solidFill>
                   <a:srgbClr val="6E8880"/>
@@ -3821,7 +4403,7 @@
       </p:sp>
       <p:sp>
         <p:nvSpPr>
-          <p:cNvPr id="11" name="TextBox 10"/>
+          <p:cNvPr id="19" name="TextBox 18"/>
           <p:cNvSpPr txBox="1"/>
           <p:nvPr/>
         </p:nvSpPr>
@@ -3867,6 +4449,514 @@
 </file>
 
 <file path=ppt/slides/slide11.xml><?xml version="1.0" encoding="utf-8"?>
+<p:sld xmlns:a="http://schemas.openxmlformats.org/drawingml/2006/main" xmlns:p="http://schemas.openxmlformats.org/presentationml/2006/main" xmlns:r="http://schemas.openxmlformats.org/officeDocument/2006/relationships">
+  <p:cSld>
+    <p:bg>
+      <p:bgPr>
+        <a:solidFill>
+          <a:srgbClr val="F3FBF8"/>
+        </a:solidFill>
+        <a:effectLst/>
+      </p:bgPr>
+    </p:bg>
+    <p:spTree>
+      <p:nvGrpSpPr>
+        <p:cNvPr id="1" name=""/>
+        <p:cNvGrpSpPr/>
+        <p:nvPr/>
+      </p:nvGrpSpPr>
+      <p:grpSpPr/>
+      <p:sp>
+        <p:nvSpPr>
+          <p:cNvPr id="2" name="Rectangle 1"/>
+          <p:cNvSpPr/>
+          <p:nvPr/>
+        </p:nvSpPr>
+        <p:spPr>
+          <a:xfrm>
+            <a:off x="457200" y="502920"/>
+            <a:ext cx="109728" cy="457200"/>
+          </a:xfrm>
+          <a:prstGeom prst="rect">
+            <a:avLst/>
+          </a:prstGeom>
+          <a:solidFill>
+            <a:srgbClr val="0F766E"/>
+          </a:solidFill>
+          <a:ln>
+            <a:noFill/>
+          </a:ln>
+          <a:effectLst/>
+        </p:spPr>
+        <p:style>
+          <a:lnRef idx="1">
+            <a:schemeClr val="accent1"/>
+          </a:lnRef>
+          <a:fillRef idx="3">
+            <a:schemeClr val="accent1"/>
+          </a:fillRef>
+          <a:effectRef idx="2">
+            <a:schemeClr val="accent1"/>
+          </a:effectRef>
+          <a:fontRef idx="minor">
+            <a:schemeClr val="lt1"/>
+          </a:fontRef>
+        </p:style>
+        <p:txBody>
+          <a:bodyPr rtlCol="0" anchor="ctr"/>
+          <a:lstStyle/>
+          <a:p>
+            <a:pPr algn="ctr"/>
+          </a:p>
+        </p:txBody>
+      </p:sp>
+      <p:sp>
+        <p:nvSpPr>
+          <p:cNvPr id="3" name="TextBox 2"/>
+          <p:cNvSpPr txBox="1"/>
+          <p:nvPr/>
+        </p:nvSpPr>
+        <p:spPr>
+          <a:xfrm>
+            <a:off x="685800" y="411480"/>
+            <a:ext cx="9144000" cy="365760"/>
+          </a:xfrm>
+          <a:prstGeom prst="rect">
+            <a:avLst/>
+          </a:prstGeom>
+          <a:noFill/>
+        </p:spPr>
+        <p:txBody>
+          <a:bodyPr wrap="square" anchor="t">
+            <a:spAutoFit/>
+          </a:bodyPr>
+          <a:lstStyle/>
+          <a:p>
+            <a:pPr algn="l">
+              <a:lnSpc>
+                <a:spcPct val="115000"/>
+              </a:lnSpc>
+            </a:pPr>
+            <a:r>
+              <a:rPr sz="1300" b="1">
+                <a:solidFill>
+                  <a:srgbClr val="0F766E"/>
+                </a:solidFill>
+                <a:latin typeface="Malgun Gothic"/>
+              </a:rPr>
+              <a:t>RETROSPECTIVE</a:t>
+            </a:r>
+          </a:p>
+        </p:txBody>
+      </p:sp>
+      <p:sp>
+        <p:nvSpPr>
+          <p:cNvPr id="4" name="TextBox 3"/>
+          <p:cNvSpPr txBox="1"/>
+          <p:nvPr/>
+        </p:nvSpPr>
+        <p:spPr>
+          <a:xfrm>
+            <a:off x="640080" y="777240"/>
+            <a:ext cx="10515600" cy="731520"/>
+          </a:xfrm>
+          <a:prstGeom prst="rect">
+            <a:avLst/>
+          </a:prstGeom>
+          <a:noFill/>
+        </p:spPr>
+        <p:txBody>
+          <a:bodyPr wrap="square" anchor="t">
+            <a:spAutoFit/>
+          </a:bodyPr>
+          <a:lstStyle/>
+          <a:p>
+            <a:pPr algn="l">
+              <a:lnSpc>
+                <a:spcPct val="115000"/>
+              </a:lnSpc>
+            </a:pPr>
+            <a:r>
+              <a:rPr sz="2800" b="1">
+                <a:solidFill>
+                  <a:srgbClr val="1F2E2A"/>
+                </a:solidFill>
+                <a:latin typeface="Malgun Gothic"/>
+              </a:rPr>
+              <a:t>회고 &amp; 다음 단계</a:t>
+            </a:r>
+          </a:p>
+        </p:txBody>
+      </p:sp>
+      <p:sp>
+        <p:nvSpPr>
+          <p:cNvPr id="5" name="Rectangle 4"/>
+          <p:cNvSpPr/>
+          <p:nvPr/>
+        </p:nvSpPr>
+        <p:spPr>
+          <a:xfrm>
+            <a:off x="640080" y="1508760"/>
+            <a:ext cx="10972800" cy="25400"/>
+          </a:xfrm>
+          <a:prstGeom prst="rect">
+            <a:avLst/>
+          </a:prstGeom>
+          <a:solidFill>
+            <a:srgbClr val="DCEEE7"/>
+          </a:solidFill>
+          <a:ln>
+            <a:noFill/>
+          </a:ln>
+          <a:effectLst/>
+        </p:spPr>
+        <p:style>
+          <a:lnRef idx="1">
+            <a:schemeClr val="accent1"/>
+          </a:lnRef>
+          <a:fillRef idx="3">
+            <a:schemeClr val="accent1"/>
+          </a:fillRef>
+          <a:effectRef idx="2">
+            <a:schemeClr val="accent1"/>
+          </a:effectRef>
+          <a:fontRef idx="minor">
+            <a:schemeClr val="lt1"/>
+          </a:fontRef>
+        </p:style>
+        <p:txBody>
+          <a:bodyPr rtlCol="0" anchor="ctr"/>
+          <a:lstStyle/>
+          <a:p>
+            <a:pPr algn="ctr"/>
+          </a:p>
+        </p:txBody>
+      </p:sp>
+      <p:sp>
+        <p:nvSpPr>
+          <p:cNvPr id="6" name="TextBox 5"/>
+          <p:cNvSpPr txBox="1"/>
+          <p:nvPr/>
+        </p:nvSpPr>
+        <p:spPr>
+          <a:xfrm>
+            <a:off x="640080" y="1828800"/>
+            <a:ext cx="5303520" cy="365760"/>
+          </a:xfrm>
+          <a:prstGeom prst="rect">
+            <a:avLst/>
+          </a:prstGeom>
+          <a:noFill/>
+        </p:spPr>
+        <p:txBody>
+          <a:bodyPr wrap="square" anchor="t">
+            <a:spAutoFit/>
+          </a:bodyPr>
+          <a:lstStyle/>
+          <a:p>
+            <a:pPr algn="l">
+              <a:lnSpc>
+                <a:spcPct val="115000"/>
+              </a:lnSpc>
+            </a:pPr>
+            <a:r>
+              <a:rPr sz="1600" b="1">
+                <a:solidFill>
+                  <a:srgbClr val="0F766E"/>
+                </a:solidFill>
+                <a:latin typeface="Malgun Gothic"/>
+              </a:rPr>
+              <a:t>배운 점</a:t>
+            </a:r>
+          </a:p>
+        </p:txBody>
+      </p:sp>
+      <p:sp>
+        <p:nvSpPr>
+          <p:cNvPr id="7" name="TextBox 6"/>
+          <p:cNvSpPr txBox="1"/>
+          <p:nvPr/>
+        </p:nvSpPr>
+        <p:spPr>
+          <a:xfrm>
+            <a:off x="640080" y="2240280"/>
+            <a:ext cx="5303520" cy="3657600"/>
+          </a:xfrm>
+          <a:prstGeom prst="rect">
+            <a:avLst/>
+          </a:prstGeom>
+          <a:noFill/>
+        </p:spPr>
+        <p:txBody>
+          <a:bodyPr wrap="square">
+            <a:spAutoFit/>
+          </a:bodyPr>
+          <a:lstStyle/>
+          <a:p>
+            <a:pPr>
+              <a:lnSpc>
+                <a:spcPct val="120000"/>
+              </a:lnSpc>
+              <a:spcAft>
+                <a:spcPts val="1000"/>
+              </a:spcAft>
+            </a:pPr>
+            <a:r>
+              <a:rPr sz="1400" b="0">
+                <a:solidFill>
+                  <a:srgbClr val="1F2E2A"/>
+                </a:solidFill>
+                <a:latin typeface="Malgun Gothic"/>
+              </a:rPr>
+              <a:t>•  정적 데모(localStorage)에서 실제 백엔드(Supabase)로 옮기며 인증·보안을 다시 설계하는 경험</a:t>
+            </a:r>
+          </a:p>
+          <a:p>
+            <a:pPr>
+              <a:lnSpc>
+                <a:spcPct val="120000"/>
+              </a:lnSpc>
+              <a:spcAft>
+                <a:spcPts val="1000"/>
+              </a:spcAft>
+            </a:pPr>
+            <a:r>
+              <a:rPr sz="1400" b="0">
+                <a:solidFill>
+                  <a:srgbClr val="1F2E2A"/>
+                </a:solidFill>
+                <a:latin typeface="Malgun Gothic"/>
+              </a:rPr>
+              <a:t>•  RLS 정책의 재귀 문제를 SECURITY DEFINER 함수 패턴으로 해결</a:t>
+            </a:r>
+          </a:p>
+          <a:p>
+            <a:pPr>
+              <a:lnSpc>
+                <a:spcPct val="120000"/>
+              </a:lnSpc>
+              <a:spcAft>
+                <a:spcPts val="1000"/>
+              </a:spcAft>
+            </a:pPr>
+            <a:r>
+              <a:rPr sz="1400" b="0">
+                <a:solidFill>
+                  <a:srgbClr val="1F2E2A"/>
+                </a:solidFill>
+                <a:latin typeface="Malgun Gothic"/>
+              </a:rPr>
+              <a:t>•  Security Advisor로 보이지 않는 권한 노출까지 점검하는 습관</a:t>
+            </a:r>
+          </a:p>
+        </p:txBody>
+      </p:sp>
+      <p:sp>
+        <p:nvSpPr>
+          <p:cNvPr id="8" name="TextBox 7"/>
+          <p:cNvSpPr txBox="1"/>
+          <p:nvPr/>
+        </p:nvSpPr>
+        <p:spPr>
+          <a:xfrm>
+            <a:off x="6309360" y="1828800"/>
+            <a:ext cx="5303520" cy="365760"/>
+          </a:xfrm>
+          <a:prstGeom prst="rect">
+            <a:avLst/>
+          </a:prstGeom>
+          <a:noFill/>
+        </p:spPr>
+        <p:txBody>
+          <a:bodyPr wrap="square" anchor="t">
+            <a:spAutoFit/>
+          </a:bodyPr>
+          <a:lstStyle/>
+          <a:p>
+            <a:pPr algn="l">
+              <a:lnSpc>
+                <a:spcPct val="115000"/>
+              </a:lnSpc>
+            </a:pPr>
+            <a:r>
+              <a:rPr sz="1600" b="1">
+                <a:solidFill>
+                  <a:srgbClr val="0F766E"/>
+                </a:solidFill>
+                <a:latin typeface="Malgun Gothic"/>
+              </a:rPr>
+              <a:t>다음 단계</a:t>
+            </a:r>
+          </a:p>
+        </p:txBody>
+      </p:sp>
+      <p:sp>
+        <p:nvSpPr>
+          <p:cNvPr id="9" name="TextBox 8"/>
+          <p:cNvSpPr txBox="1"/>
+          <p:nvPr/>
+        </p:nvSpPr>
+        <p:spPr>
+          <a:xfrm>
+            <a:off x="6309360" y="2240280"/>
+            <a:ext cx="5303520" cy="3657600"/>
+          </a:xfrm>
+          <a:prstGeom prst="rect">
+            <a:avLst/>
+          </a:prstGeom>
+          <a:noFill/>
+        </p:spPr>
+        <p:txBody>
+          <a:bodyPr wrap="square">
+            <a:spAutoFit/>
+          </a:bodyPr>
+          <a:lstStyle/>
+          <a:p>
+            <a:pPr>
+              <a:lnSpc>
+                <a:spcPct val="120000"/>
+              </a:lnSpc>
+              <a:spcAft>
+                <a:spcPts val="1000"/>
+              </a:spcAft>
+            </a:pPr>
+            <a:r>
+              <a:rPr sz="1400" b="0">
+                <a:solidFill>
+                  <a:srgbClr val="1F2E2A"/>
+                </a:solidFill>
+                <a:latin typeface="Malgun Gothic"/>
+              </a:rPr>
+              <a:t>•  관리자 계정도 Supabase Auth 기반으로 전환 검토</a:t>
+            </a:r>
+          </a:p>
+          <a:p>
+            <a:pPr>
+              <a:lnSpc>
+                <a:spcPct val="120000"/>
+              </a:lnSpc>
+              <a:spcAft>
+                <a:spcPts val="1000"/>
+              </a:spcAft>
+            </a:pPr>
+            <a:r>
+              <a:rPr sz="1400" b="0">
+                <a:solidFill>
+                  <a:srgbClr val="1F2E2A"/>
+                </a:solidFill>
+                <a:latin typeface="Malgun Gothic"/>
+              </a:rPr>
+              <a:t>•  프론트엔드(js/utils.js)를 Supabase 클라이언트 호출로 교체</a:t>
+            </a:r>
+          </a:p>
+          <a:p>
+            <a:pPr>
+              <a:lnSpc>
+                <a:spcPct val="120000"/>
+              </a:lnSpc>
+              <a:spcAft>
+                <a:spcPts val="1000"/>
+              </a:spcAft>
+            </a:pPr>
+            <a:r>
+              <a:rPr sz="1400" b="0">
+                <a:solidFill>
+                  <a:srgbClr val="1F2E2A"/>
+                </a:solidFill>
+                <a:latin typeface="Malgun Gothic"/>
+              </a:rPr>
+              <a:t>•  관리자 페이지에 실시간 통계·알림 기능 확장</a:t>
+            </a:r>
+          </a:p>
+        </p:txBody>
+      </p:sp>
+      <p:sp>
+        <p:nvSpPr>
+          <p:cNvPr id="10" name="TextBox 9"/>
+          <p:cNvSpPr txBox="1"/>
+          <p:nvPr/>
+        </p:nvSpPr>
+        <p:spPr>
+          <a:xfrm>
+            <a:off x="457200" y="6446520"/>
+            <a:ext cx="7315200" cy="320040"/>
+          </a:xfrm>
+          <a:prstGeom prst="rect">
+            <a:avLst/>
+          </a:prstGeom>
+          <a:noFill/>
+        </p:spPr>
+        <p:txBody>
+          <a:bodyPr wrap="square" anchor="t">
+            <a:spAutoFit/>
+          </a:bodyPr>
+          <a:lstStyle/>
+          <a:p>
+            <a:pPr algn="l">
+              <a:lnSpc>
+                <a:spcPct val="115000"/>
+              </a:lnSpc>
+            </a:pPr>
+            <a:r>
+              <a:rPr sz="1000" b="0">
+                <a:solidFill>
+                  <a:srgbClr val="6E8880"/>
+                </a:solidFill>
+                <a:latin typeface="Malgun Gothic"/>
+              </a:rPr>
+              <a:t>EXPENSE TRACKER · PORTFOLIO</a:t>
+            </a:r>
+          </a:p>
+        </p:txBody>
+      </p:sp>
+      <p:sp>
+        <p:nvSpPr>
+          <p:cNvPr id="11" name="TextBox 10"/>
+          <p:cNvSpPr txBox="1"/>
+          <p:nvPr/>
+        </p:nvSpPr>
+        <p:spPr>
+          <a:xfrm>
+            <a:off x="11002975" y="6446520"/>
+            <a:ext cx="822960" cy="320040"/>
+          </a:xfrm>
+          <a:prstGeom prst="rect">
+            <a:avLst/>
+          </a:prstGeom>
+          <a:noFill/>
+        </p:spPr>
+        <p:txBody>
+          <a:bodyPr wrap="square" anchor="t">
+            <a:spAutoFit/>
+          </a:bodyPr>
+          <a:lstStyle/>
+          <a:p>
+            <a:pPr algn="r">
+              <a:lnSpc>
+                <a:spcPct val="115000"/>
+              </a:lnSpc>
+            </a:pPr>
+            <a:r>
+              <a:rPr sz="1000" b="0">
+                <a:solidFill>
+                  <a:srgbClr val="6E8880"/>
+                </a:solidFill>
+                <a:latin typeface="Malgun Gothic"/>
+              </a:rPr>
+              <a:t>11</a:t>
+            </a:r>
+          </a:p>
+        </p:txBody>
+      </p:sp>
+    </p:spTree>
+  </p:cSld>
+  <p:clrMapOvr>
+    <a:masterClrMapping/>
+  </p:clrMapOvr>
+</p:sld>
+</file>
+
+<file path=ppt/slides/slide12.xml><?xml version="1.0" encoding="utf-8"?>
 <p:sld xmlns:a="http://schemas.openxmlformats.org/drawingml/2006/main" xmlns:p="http://schemas.openxmlformats.org/presentationml/2006/main" xmlns:r="http://schemas.openxmlformats.org/officeDocument/2006/relationships">
   <p:cSld>
     <p:bg>
@@ -4149,7 +5239,7 @@
                 </a:solidFill>
                 <a:latin typeface="Malgun Gothic"/>
               </a:rPr>
-              <a:t>OVERVIEW</a:t>
+              <a:t>SCREENSHOTS</a:t>
             </a:r>
           </a:p>
         </p:txBody>
@@ -4188,7 +5278,7 @@
                 </a:solidFill>
                 <a:latin typeface="Malgun Gothic"/>
               </a:rPr>
-              <a:t>프로젝트 개요</a:t>
+              <a:t>실제 화면</a:t>
             </a:r>
           </a:p>
         </p:txBody>
@@ -4246,7 +5336,7 @@
         <p:spPr>
           <a:xfrm>
             <a:off x="640080" y="1828800"/>
-            <a:ext cx="10789920" cy="731520"/>
+            <a:ext cx="5394960" cy="274320"/>
           </a:xfrm>
           <a:prstGeom prst="rect">
             <a:avLst/>
@@ -4265,117 +5355,56 @@
               </a:lnSpc>
             </a:pPr>
             <a:r>
-              <a:rPr sz="1700" b="0">
-                <a:solidFill>
-                  <a:srgbClr val="4B6259"/>
-                </a:solidFill>
-                <a:latin typeface="Malgun Gothic"/>
-              </a:rPr>
-              <a:t>개인의 지출을 손쉽게 기록하고, 카테고리별·기간별 통계로 소비 패턴을 파악할 수 있는 지출 관리 서비스</a:t>
-            </a:r>
-          </a:p>
-        </p:txBody>
-      </p:sp>
-      <p:sp>
-        <p:nvSpPr>
-          <p:cNvPr id="7" name="Rectangle 6"/>
-          <p:cNvSpPr/>
-          <p:nvPr/>
-        </p:nvSpPr>
-        <p:spPr>
-          <a:xfrm>
-            <a:off x="640080" y="2834640"/>
-            <a:ext cx="3520440" cy="3108960"/>
-          </a:xfrm>
-          <a:prstGeom prst="rect">
-            <a:avLst/>
-          </a:prstGeom>
-          <a:solidFill>
-            <a:srgbClr val="FFFFFF"/>
-          </a:solidFill>
+              <a:rPr sz="1300" b="1">
+                <a:solidFill>
+                  <a:srgbClr val="0F766E"/>
+                </a:solidFill>
+                <a:latin typeface="Malgun Gothic"/>
+              </a:rPr>
+              <a:t>고객 대시보드</a:t>
+            </a:r>
+          </a:p>
+        </p:txBody>
+      </p:sp>
+      <p:pic>
+        <p:nvPicPr>
+          <p:cNvPr id="7" name="Picture 6" descr="dashboard.png"/>
+          <p:cNvPicPr>
+            <a:picLocks noChangeAspect="1"/>
+          </p:cNvPicPr>
+          <p:nvPr/>
+        </p:nvPicPr>
+        <p:blipFill>
+          <a:blip r:embed="rId2"/>
+          <a:stretch>
+            <a:fillRect/>
+          </a:stretch>
+        </p:blipFill>
+        <p:spPr>
+          <a:xfrm>
+            <a:off x="1965960" y="2103120"/>
+            <a:ext cx="2743200" cy="1828800"/>
+          </a:xfrm>
+          <a:prstGeom prst="rect">
+            <a:avLst/>
+          </a:prstGeom>
           <a:ln w="12700">
             <a:solidFill>
               <a:srgbClr val="DCEEE7"/>
             </a:solidFill>
           </a:ln>
-          <a:effectLst/>
-        </p:spPr>
-        <p:style>
-          <a:lnRef idx="1">
-            <a:schemeClr val="accent1"/>
-          </a:lnRef>
-          <a:fillRef idx="3">
-            <a:schemeClr val="accent1"/>
-          </a:fillRef>
-          <a:effectRef idx="2">
-            <a:schemeClr val="accent1"/>
-          </a:effectRef>
-          <a:fontRef idx="minor">
-            <a:schemeClr val="lt1"/>
-          </a:fontRef>
-        </p:style>
-        <p:txBody>
-          <a:bodyPr rtlCol="0" anchor="ctr"/>
-          <a:lstStyle/>
-          <a:p>
-            <a:pPr algn="ctr"/>
-          </a:p>
-        </p:txBody>
-      </p:sp>
-      <p:sp>
-        <p:nvSpPr>
-          <p:cNvPr id="8" name="Rectangle 7"/>
-          <p:cNvSpPr/>
-          <p:nvPr/>
-        </p:nvSpPr>
-        <p:spPr>
-          <a:xfrm>
-            <a:off x="640080" y="2834640"/>
-            <a:ext cx="3520440" cy="109728"/>
-          </a:xfrm>
-          <a:prstGeom prst="rect">
-            <a:avLst/>
-          </a:prstGeom>
-          <a:solidFill>
-            <a:srgbClr val="34D399"/>
-          </a:solidFill>
-          <a:ln>
-            <a:noFill/>
-          </a:ln>
-          <a:effectLst/>
-        </p:spPr>
-        <p:style>
-          <a:lnRef idx="1">
-            <a:schemeClr val="accent1"/>
-          </a:lnRef>
-          <a:fillRef idx="3">
-            <a:schemeClr val="accent1"/>
-          </a:fillRef>
-          <a:effectRef idx="2">
-            <a:schemeClr val="accent1"/>
-          </a:effectRef>
-          <a:fontRef idx="minor">
-            <a:schemeClr val="lt1"/>
-          </a:fontRef>
-        </p:style>
-        <p:txBody>
-          <a:bodyPr rtlCol="0" anchor="ctr"/>
-          <a:lstStyle/>
-          <a:p>
-            <a:pPr algn="ctr"/>
-          </a:p>
-        </p:txBody>
-      </p:sp>
-      <p:sp>
-        <p:nvSpPr>
-          <p:cNvPr id="9" name="TextBox 8"/>
+        </p:spPr>
+      </p:pic>
+      <p:sp>
+        <p:nvSpPr>
+          <p:cNvPr id="8" name="TextBox 7"/>
           <p:cNvSpPr txBox="1"/>
           <p:nvPr/>
         </p:nvSpPr>
         <p:spPr>
           <a:xfrm>
-            <a:off x="914400" y="3200400"/>
-            <a:ext cx="2971800" cy="457200"/>
+            <a:off x="6217920" y="1828800"/>
+            <a:ext cx="5394960" cy="274320"/>
           </a:xfrm>
           <a:prstGeom prst="rect">
             <a:avLst/>
@@ -4394,156 +5423,56 @@
               </a:lnSpc>
             </a:pPr>
             <a:r>
-              <a:rPr sz="1800" b="1">
+              <a:rPr sz="1300" b="1">
                 <a:solidFill>
                   <a:srgbClr val="0F766E"/>
                 </a:solidFill>
                 <a:latin typeface="Malgun Gothic"/>
               </a:rPr>
-              <a:t>문제 정의</a:t>
-            </a:r>
-          </a:p>
-        </p:txBody>
-      </p:sp>
-      <p:sp>
-        <p:nvSpPr>
-          <p:cNvPr id="10" name="TextBox 9"/>
-          <p:cNvSpPr txBox="1"/>
-          <p:nvPr/>
-        </p:nvSpPr>
-        <p:spPr>
-          <a:xfrm>
-            <a:off x="914400" y="3703320"/>
-            <a:ext cx="2971800" cy="2011680"/>
-          </a:xfrm>
-          <a:prstGeom prst="rect">
-            <a:avLst/>
-          </a:prstGeom>
-          <a:noFill/>
-        </p:spPr>
-        <p:txBody>
-          <a:bodyPr wrap="square" anchor="t">
-            <a:spAutoFit/>
-          </a:bodyPr>
-          <a:lstStyle/>
-          <a:p>
-            <a:pPr algn="l">
-              <a:lnSpc>
-                <a:spcPct val="115000"/>
-              </a:lnSpc>
-            </a:pPr>
-            <a:r>
-              <a:rPr sz="1400" b="0">
-                <a:solidFill>
-                  <a:srgbClr val="4B6259"/>
-                </a:solidFill>
-                <a:latin typeface="Malgun Gothic"/>
-              </a:rPr>
-              <a:t>지출을 기록해도 흩어진 데이터라 카테고리별·월별 흐름을 한눈에 파악하기 어려움</a:t>
-            </a:r>
-          </a:p>
-        </p:txBody>
-      </p:sp>
-      <p:sp>
-        <p:nvSpPr>
-          <p:cNvPr id="11" name="Rectangle 10"/>
-          <p:cNvSpPr/>
-          <p:nvPr/>
-        </p:nvSpPr>
-        <p:spPr>
-          <a:xfrm>
-            <a:off x="4343400" y="2834640"/>
-            <a:ext cx="3520440" cy="3108960"/>
-          </a:xfrm>
-          <a:prstGeom prst="rect">
-            <a:avLst/>
-          </a:prstGeom>
-          <a:solidFill>
-            <a:srgbClr val="FFFFFF"/>
-          </a:solidFill>
+              <a:t>지출 내역 (페이지네이션)</a:t>
+            </a:r>
+          </a:p>
+        </p:txBody>
+      </p:sp>
+      <p:pic>
+        <p:nvPicPr>
+          <p:cNvPr id="9" name="Picture 8" descr="expenses.png"/>
+          <p:cNvPicPr>
+            <a:picLocks noChangeAspect="1"/>
+          </p:cNvPicPr>
+          <p:nvPr/>
+        </p:nvPicPr>
+        <p:blipFill>
+          <a:blip r:embed="rId3"/>
+          <a:stretch>
+            <a:fillRect/>
+          </a:stretch>
+        </p:blipFill>
+        <p:spPr>
+          <a:xfrm>
+            <a:off x="7715093" y="2103120"/>
+            <a:ext cx="2400612" cy="1828800"/>
+          </a:xfrm>
+          <a:prstGeom prst="rect">
+            <a:avLst/>
+          </a:prstGeom>
           <a:ln w="12700">
             <a:solidFill>
               <a:srgbClr val="DCEEE7"/>
             </a:solidFill>
           </a:ln>
-          <a:effectLst/>
-        </p:spPr>
-        <p:style>
-          <a:lnRef idx="1">
-            <a:schemeClr val="accent1"/>
-          </a:lnRef>
-          <a:fillRef idx="3">
-            <a:schemeClr val="accent1"/>
-          </a:fillRef>
-          <a:effectRef idx="2">
-            <a:schemeClr val="accent1"/>
-          </a:effectRef>
-          <a:fontRef idx="minor">
-            <a:schemeClr val="lt1"/>
-          </a:fontRef>
-        </p:style>
-        <p:txBody>
-          <a:bodyPr rtlCol="0" anchor="ctr"/>
-          <a:lstStyle/>
-          <a:p>
-            <a:pPr algn="ctr"/>
-          </a:p>
-        </p:txBody>
-      </p:sp>
-      <p:sp>
-        <p:nvSpPr>
-          <p:cNvPr id="12" name="Rectangle 11"/>
-          <p:cNvSpPr/>
-          <p:nvPr/>
-        </p:nvSpPr>
-        <p:spPr>
-          <a:xfrm>
-            <a:off x="4343400" y="2834640"/>
-            <a:ext cx="3520440" cy="109728"/>
-          </a:xfrm>
-          <a:prstGeom prst="rect">
-            <a:avLst/>
-          </a:prstGeom>
-          <a:solidFill>
-            <a:srgbClr val="34D399"/>
-          </a:solidFill>
-          <a:ln>
-            <a:noFill/>
-          </a:ln>
-          <a:effectLst/>
-        </p:spPr>
-        <p:style>
-          <a:lnRef idx="1">
-            <a:schemeClr val="accent1"/>
-          </a:lnRef>
-          <a:fillRef idx="3">
-            <a:schemeClr val="accent1"/>
-          </a:fillRef>
-          <a:effectRef idx="2">
-            <a:schemeClr val="accent1"/>
-          </a:effectRef>
-          <a:fontRef idx="minor">
-            <a:schemeClr val="lt1"/>
-          </a:fontRef>
-        </p:style>
-        <p:txBody>
-          <a:bodyPr rtlCol="0" anchor="ctr"/>
-          <a:lstStyle/>
-          <a:p>
-            <a:pPr algn="ctr"/>
-          </a:p>
-        </p:txBody>
-      </p:sp>
-      <p:sp>
-        <p:nvSpPr>
-          <p:cNvPr id="13" name="TextBox 12"/>
+        </p:spPr>
+      </p:pic>
+      <p:sp>
+        <p:nvSpPr>
+          <p:cNvPr id="10" name="TextBox 9"/>
           <p:cNvSpPr txBox="1"/>
           <p:nvPr/>
         </p:nvSpPr>
         <p:spPr>
           <a:xfrm>
-            <a:off x="4617720" y="3200400"/>
-            <a:ext cx="2971800" cy="457200"/>
+            <a:off x="640080" y="4114800"/>
+            <a:ext cx="5394960" cy="274320"/>
           </a:xfrm>
           <a:prstGeom prst="rect">
             <a:avLst/>
@@ -4562,156 +5491,56 @@
               </a:lnSpc>
             </a:pPr>
             <a:r>
-              <a:rPr sz="1800" b="1">
+              <a:rPr sz="1300" b="1">
                 <a:solidFill>
                   <a:srgbClr val="0F766E"/>
                 </a:solidFill>
                 <a:latin typeface="Malgun Gothic"/>
               </a:rPr>
-              <a:t>핵심 가치</a:t>
-            </a:r>
-          </a:p>
-        </p:txBody>
-      </p:sp>
-      <p:sp>
-        <p:nvSpPr>
-          <p:cNvPr id="14" name="TextBox 13"/>
-          <p:cNvSpPr txBox="1"/>
-          <p:nvPr/>
-        </p:nvSpPr>
-        <p:spPr>
-          <a:xfrm>
-            <a:off x="4617720" y="3703320"/>
-            <a:ext cx="2971800" cy="2011680"/>
-          </a:xfrm>
-          <a:prstGeom prst="rect">
-            <a:avLst/>
-          </a:prstGeom>
-          <a:noFill/>
-        </p:spPr>
-        <p:txBody>
-          <a:bodyPr wrap="square" anchor="t">
-            <a:spAutoFit/>
-          </a:bodyPr>
-          <a:lstStyle/>
-          <a:p>
-            <a:pPr algn="l">
-              <a:lnSpc>
-                <a:spcPct val="115000"/>
-              </a:lnSpc>
-            </a:pPr>
-            <a:r>
-              <a:rPr sz="1400" b="0">
-                <a:solidFill>
-                  <a:srgbClr val="4B6259"/>
-                </a:solidFill>
-                <a:latin typeface="Malgun Gothic"/>
-              </a:rPr>
-              <a:t>간편한 등록 흐름 + 시각적 통계(도넛/막대 차트)로 소비 패턴을 즉시 인지</a:t>
-            </a:r>
-          </a:p>
-        </p:txBody>
-      </p:sp>
-      <p:sp>
-        <p:nvSpPr>
-          <p:cNvPr id="15" name="Rectangle 14"/>
-          <p:cNvSpPr/>
-          <p:nvPr/>
-        </p:nvSpPr>
-        <p:spPr>
-          <a:xfrm>
-            <a:off x="8046720" y="2834640"/>
-            <a:ext cx="3520440" cy="3108960"/>
-          </a:xfrm>
-          <a:prstGeom prst="rect">
-            <a:avLst/>
-          </a:prstGeom>
-          <a:solidFill>
-            <a:srgbClr val="FFFFFF"/>
-          </a:solidFill>
+              <a:t>통계</a:t>
+            </a:r>
+          </a:p>
+        </p:txBody>
+      </p:sp>
+      <p:pic>
+        <p:nvPicPr>
+          <p:cNvPr id="11" name="Picture 10" descr="stats.png"/>
+          <p:cNvPicPr>
+            <a:picLocks noChangeAspect="1"/>
+          </p:cNvPicPr>
+          <p:nvPr/>
+        </p:nvPicPr>
+        <p:blipFill>
+          <a:blip r:embed="rId4"/>
+          <a:stretch>
+            <a:fillRect/>
+          </a:stretch>
+        </p:blipFill>
+        <p:spPr>
+          <a:xfrm>
+            <a:off x="1965960" y="4389120"/>
+            <a:ext cx="2743200" cy="1828800"/>
+          </a:xfrm>
+          <a:prstGeom prst="rect">
+            <a:avLst/>
+          </a:prstGeom>
           <a:ln w="12700">
             <a:solidFill>
               <a:srgbClr val="DCEEE7"/>
             </a:solidFill>
           </a:ln>
-          <a:effectLst/>
-        </p:spPr>
-        <p:style>
-          <a:lnRef idx="1">
-            <a:schemeClr val="accent1"/>
-          </a:lnRef>
-          <a:fillRef idx="3">
-            <a:schemeClr val="accent1"/>
-          </a:fillRef>
-          <a:effectRef idx="2">
-            <a:schemeClr val="accent1"/>
-          </a:effectRef>
-          <a:fontRef idx="minor">
-            <a:schemeClr val="lt1"/>
-          </a:fontRef>
-        </p:style>
-        <p:txBody>
-          <a:bodyPr rtlCol="0" anchor="ctr"/>
-          <a:lstStyle/>
-          <a:p>
-            <a:pPr algn="ctr"/>
-          </a:p>
-        </p:txBody>
-      </p:sp>
-      <p:sp>
-        <p:nvSpPr>
-          <p:cNvPr id="16" name="Rectangle 15"/>
-          <p:cNvSpPr/>
-          <p:nvPr/>
-        </p:nvSpPr>
-        <p:spPr>
-          <a:xfrm>
-            <a:off x="8046720" y="2834640"/>
-            <a:ext cx="3520440" cy="109728"/>
-          </a:xfrm>
-          <a:prstGeom prst="rect">
-            <a:avLst/>
-          </a:prstGeom>
-          <a:solidFill>
-            <a:srgbClr val="34D399"/>
-          </a:solidFill>
-          <a:ln>
-            <a:noFill/>
-          </a:ln>
-          <a:effectLst/>
-        </p:spPr>
-        <p:style>
-          <a:lnRef idx="1">
-            <a:schemeClr val="accent1"/>
-          </a:lnRef>
-          <a:fillRef idx="3">
-            <a:schemeClr val="accent1"/>
-          </a:fillRef>
-          <a:effectRef idx="2">
-            <a:schemeClr val="accent1"/>
-          </a:effectRef>
-          <a:fontRef idx="minor">
-            <a:schemeClr val="lt1"/>
-          </a:fontRef>
-        </p:style>
-        <p:txBody>
-          <a:bodyPr rtlCol="0" anchor="ctr"/>
-          <a:lstStyle/>
-          <a:p>
-            <a:pPr algn="ctr"/>
-          </a:p>
-        </p:txBody>
-      </p:sp>
-      <p:sp>
-        <p:nvSpPr>
-          <p:cNvPr id="17" name="TextBox 16"/>
+        </p:spPr>
+      </p:pic>
+      <p:sp>
+        <p:nvSpPr>
+          <p:cNvPr id="12" name="TextBox 11"/>
           <p:cNvSpPr txBox="1"/>
           <p:nvPr/>
         </p:nvSpPr>
         <p:spPr>
           <a:xfrm>
-            <a:off x="8321040" y="3200400"/>
-            <a:ext cx="2971800" cy="457200"/>
+            <a:off x="6217920" y="4114800"/>
+            <a:ext cx="5394960" cy="274320"/>
           </a:xfrm>
           <a:prstGeom prst="rect">
             <a:avLst/>
@@ -4730,27 +5559,56 @@
               </a:lnSpc>
             </a:pPr>
             <a:r>
-              <a:rPr sz="1800" b="1">
+              <a:rPr sz="1300" b="1">
                 <a:solidFill>
                   <a:srgbClr val="0F766E"/>
                 </a:solidFill>
                 <a:latin typeface="Malgun Gothic"/>
               </a:rPr>
-              <a:t>두 가지 역할</a:t>
-            </a:r>
-          </a:p>
-        </p:txBody>
-      </p:sp>
-      <p:sp>
-        <p:nvSpPr>
-          <p:cNvPr id="18" name="TextBox 17"/>
+              <a:t>관리자 대시보드</a:t>
+            </a:r>
+          </a:p>
+        </p:txBody>
+      </p:sp>
+      <p:pic>
+        <p:nvPicPr>
+          <p:cNvPr id="13" name="Picture 12" descr="admin.png"/>
+          <p:cNvPicPr>
+            <a:picLocks noChangeAspect="1"/>
+          </p:cNvPicPr>
+          <p:nvPr/>
+        </p:nvPicPr>
+        <p:blipFill>
+          <a:blip r:embed="rId5"/>
+          <a:stretch>
+            <a:fillRect/>
+          </a:stretch>
+        </p:blipFill>
+        <p:spPr>
+          <a:xfrm>
+            <a:off x="7543800" y="4389120"/>
+            <a:ext cx="2743200" cy="1828800"/>
+          </a:xfrm>
+          <a:prstGeom prst="rect">
+            <a:avLst/>
+          </a:prstGeom>
+          <a:ln w="12700">
+            <a:solidFill>
+              <a:srgbClr val="DCEEE7"/>
+            </a:solidFill>
+          </a:ln>
+        </p:spPr>
+      </p:pic>
+      <p:sp>
+        <p:nvSpPr>
+          <p:cNvPr id="14" name="TextBox 13"/>
           <p:cNvSpPr txBox="1"/>
           <p:nvPr/>
         </p:nvSpPr>
         <p:spPr>
           <a:xfrm>
-            <a:off x="8321040" y="3703320"/>
-            <a:ext cx="2971800" cy="2011680"/>
+            <a:off x="457200" y="6446520"/>
+            <a:ext cx="7315200" cy="320040"/>
           </a:xfrm>
           <a:prstGeom prst="rect">
             <a:avLst/>
@@ -4769,45 +5627,6 @@
               </a:lnSpc>
             </a:pPr>
             <a:r>
-              <a:rPr sz="1400" b="0">
-                <a:solidFill>
-                  <a:srgbClr val="4B6259"/>
-                </a:solidFill>
-                <a:latin typeface="Malgun Gothic"/>
-              </a:rPr>
-              <a:t>고객은 본인 지출을 기록·조회, 관리자는 회원과 전체 서비스 통계를 관리</a:t>
-            </a:r>
-          </a:p>
-        </p:txBody>
-      </p:sp>
-      <p:sp>
-        <p:nvSpPr>
-          <p:cNvPr id="19" name="TextBox 18"/>
-          <p:cNvSpPr txBox="1"/>
-          <p:nvPr/>
-        </p:nvSpPr>
-        <p:spPr>
-          <a:xfrm>
-            <a:off x="457200" y="6446520"/>
-            <a:ext cx="7315200" cy="320040"/>
-          </a:xfrm>
-          <a:prstGeom prst="rect">
-            <a:avLst/>
-          </a:prstGeom>
-          <a:noFill/>
-        </p:spPr>
-        <p:txBody>
-          <a:bodyPr wrap="square" anchor="t">
-            <a:spAutoFit/>
-          </a:bodyPr>
-          <a:lstStyle/>
-          <a:p>
-            <a:pPr algn="l">
-              <a:lnSpc>
-                <a:spcPct val="115000"/>
-              </a:lnSpc>
-            </a:pPr>
-            <a:r>
               <a:rPr sz="1000" b="0">
                 <a:solidFill>
                   <a:srgbClr val="6E8880"/>
@@ -4821,7 +5640,7 @@
       </p:sp>
       <p:sp>
         <p:nvSpPr>
-          <p:cNvPr id="20" name="TextBox 19"/>
+          <p:cNvPr id="15" name="TextBox 14"/>
           <p:cNvSpPr txBox="1"/>
           <p:nvPr/>
         </p:nvSpPr>
@@ -4962,7 +5781,7 @@
                 </a:solidFill>
                 <a:latin typeface="Malgun Gothic"/>
               </a:rPr>
-              <a:t>FEATURES · CUSTOMER</a:t>
+              <a:t>OVERVIEW</a:t>
             </a:r>
           </a:p>
         </p:txBody>
@@ -5001,7 +5820,7 @@
                 </a:solidFill>
                 <a:latin typeface="Malgun Gothic"/>
               </a:rPr>
-              <a:t>핵심 기능 — 고객</a:t>
+              <a:t>프로젝트 개요</a:t>
             </a:r>
           </a:p>
         </p:txBody>
@@ -5059,7 +5878,7 @@
         <p:spPr>
           <a:xfrm>
             <a:off x="640080" y="1828800"/>
-            <a:ext cx="5486400" cy="4572000"/>
+            <a:ext cx="10789920" cy="731520"/>
           </a:xfrm>
           <a:prstGeom prst="rect">
             <a:avLst/>
@@ -5067,183 +5886,24 @@
           <a:noFill/>
         </p:spPr>
         <p:txBody>
-          <a:bodyPr wrap="square">
+          <a:bodyPr wrap="square" anchor="t">
             <a:spAutoFit/>
           </a:bodyPr>
           <a:lstStyle/>
           <a:p>
-            <a:pPr>
-              <a:lnSpc>
-                <a:spcPct val="120000"/>
-              </a:lnSpc>
-              <a:spcAft>
-                <a:spcPts val="1000"/>
-              </a:spcAft>
-            </a:pPr>
-            <a:r>
-              <a:rPr sz="1600" b="0">
-                <a:solidFill>
-                  <a:srgbClr val="1F2E2A"/>
-                </a:solidFill>
-                <a:latin typeface="Malgun Gothic"/>
-              </a:rPr>
-              <a:t>•  회원가입 / 로그인</a:t>
-            </a:r>
-          </a:p>
-          <a:p>
-            <a:pPr>
-              <a:spcAft>
-                <a:spcPts val="1000"/>
-              </a:spcAft>
-            </a:pPr>
-            <a:r>
-              <a:rPr sz="1300">
-                <a:solidFill>
-                  <a:srgbClr val="6E8880"/>
-                </a:solidFill>
-                <a:latin typeface="Malgun Gothic"/>
-              </a:rPr>
-              <a:t>     이메일·비밀번호 기반, 가입 즉시 자동 로그인</a:t>
-            </a:r>
-          </a:p>
-          <a:p>
-            <a:pPr>
-              <a:lnSpc>
-                <a:spcPct val="120000"/>
-              </a:lnSpc>
-              <a:spcAft>
-                <a:spcPts val="1000"/>
-              </a:spcAft>
-            </a:pPr>
-            <a:r>
-              <a:rPr sz="1600" b="0">
-                <a:solidFill>
-                  <a:srgbClr val="1F2E2A"/>
-                </a:solidFill>
-                <a:latin typeface="Malgun Gothic"/>
-              </a:rPr>
-              <a:t>•  지출 CRUD</a:t>
-            </a:r>
-          </a:p>
-          <a:p>
-            <a:pPr>
-              <a:spcAft>
-                <a:spcPts val="1000"/>
-              </a:spcAft>
-            </a:pPr>
-            <a:r>
-              <a:rPr sz="1300">
-                <a:solidFill>
-                  <a:srgbClr val="6E8880"/>
-                </a:solidFill>
-                <a:latin typeface="Malgun Gothic"/>
-              </a:rPr>
-              <a:t>     등록·조회·수정·삭제 — 기간·카테고리 필터 및 메모 검색 지원</a:t>
-            </a:r>
-          </a:p>
-          <a:p>
-            <a:pPr>
-              <a:lnSpc>
-                <a:spcPct val="120000"/>
-              </a:lnSpc>
-              <a:spcAft>
-                <a:spcPts val="1000"/>
-              </a:spcAft>
-            </a:pPr>
-            <a:r>
-              <a:rPr sz="1600" b="0">
-                <a:solidFill>
-                  <a:srgbClr val="1F2E2A"/>
-                </a:solidFill>
-                <a:latin typeface="Malgun Gothic"/>
-              </a:rPr>
-              <a:t>•  페이지네이션</a:t>
-            </a:r>
-          </a:p>
-          <a:p>
-            <a:pPr>
-              <a:spcAft>
-                <a:spcPts val="1000"/>
-              </a:spcAft>
-            </a:pPr>
-            <a:r>
-              <a:rPr sz="1300">
-                <a:solidFill>
-                  <a:srgbClr val="6E8880"/>
-                </a:solidFill>
-                <a:latin typeface="Malgun Gothic"/>
-              </a:rPr>
-              <a:t>     지출 내역이 쌓여도 페이지당 10건씩 표시, 필터 변경 시 1페이지로 자동 리셋</a:t>
-            </a:r>
-          </a:p>
-          <a:p>
-            <a:pPr>
-              <a:lnSpc>
-                <a:spcPct val="120000"/>
-              </a:lnSpc>
-              <a:spcAft>
-                <a:spcPts val="1000"/>
-              </a:spcAft>
-            </a:pPr>
-            <a:r>
-              <a:rPr sz="1600" b="0">
-                <a:solidFill>
-                  <a:srgbClr val="1F2E2A"/>
-                </a:solidFill>
-                <a:latin typeface="Malgun Gothic"/>
-              </a:rPr>
-              <a:t>•  개인 통계 대시보드</a:t>
-            </a:r>
-          </a:p>
-          <a:p>
-            <a:pPr>
-              <a:spcAft>
-                <a:spcPts val="1000"/>
-              </a:spcAft>
-            </a:pPr>
-            <a:r>
-              <a:rPr sz="1300">
-                <a:solidFill>
-                  <a:srgbClr val="6E8880"/>
-                </a:solidFill>
-                <a:latin typeface="Malgun Gothic"/>
-              </a:rPr>
-              <a:t>     월별/연별 합계, 카테고리 비중을 도넛·막대 차트 토글로 시각화</a:t>
-            </a:r>
-          </a:p>
-          <a:p>
-            <a:pPr>
-              <a:lnSpc>
-                <a:spcPct val="120000"/>
-              </a:lnSpc>
-              <a:spcAft>
-                <a:spcPts val="1000"/>
-              </a:spcAft>
-            </a:pPr>
-            <a:r>
-              <a:rPr sz="1600" b="0">
-                <a:solidFill>
-                  <a:srgbClr val="1F2E2A"/>
-                </a:solidFill>
-                <a:latin typeface="Malgun Gothic"/>
-              </a:rPr>
-              <a:t>•  고정 카테고리 8종</a:t>
-            </a:r>
-          </a:p>
-          <a:p>
-            <a:pPr>
-              <a:spcAft>
-                <a:spcPts val="1000"/>
-              </a:spcAft>
-            </a:pPr>
-            <a:r>
-              <a:rPr sz="1300">
-                <a:solidFill>
-                  <a:srgbClr val="6E8880"/>
-                </a:solidFill>
-                <a:latin typeface="Malgun Gothic"/>
-              </a:rPr>
-              <a:t>     식비·교통·주거·문화/여가·쇼핑·의료·교육·기타 — 모든 사용자 공용</a:t>
+            <a:pPr algn="l">
+              <a:lnSpc>
+                <a:spcPct val="115000"/>
+              </a:lnSpc>
+            </a:pPr>
+            <a:r>
+              <a:rPr sz="1700" b="0">
+                <a:solidFill>
+                  <a:srgbClr val="4B6259"/>
+                </a:solidFill>
+                <a:latin typeface="Malgun Gothic"/>
+              </a:rPr>
+              <a:t>개인의 지출을 손쉽게 기록하고, 카테고리별·기간별 통계로 소비 패턴을 파악할 수 있는 지출 관리 서비스</a:t>
             </a:r>
           </a:p>
         </p:txBody>
@@ -5256,8 +5916,8 @@
         </p:nvSpPr>
         <p:spPr>
           <a:xfrm>
-            <a:off x="6492240" y="1828800"/>
-            <a:ext cx="5029200" cy="4206240"/>
+            <a:off x="640080" y="2834640"/>
+            <a:ext cx="3520440" cy="3108960"/>
           </a:xfrm>
           <a:prstGeom prst="rect">
             <a:avLst/>
@@ -5296,137 +5956,20 @@
       </p:sp>
       <p:sp>
         <p:nvSpPr>
-          <p:cNvPr id="8" name="TextBox 7"/>
-          <p:cNvSpPr txBox="1"/>
-          <p:nvPr/>
-        </p:nvSpPr>
-        <p:spPr>
-          <a:xfrm>
-            <a:off x="6766560" y="2011680"/>
-            <a:ext cx="4572000" cy="365760"/>
-          </a:xfrm>
-          <a:prstGeom prst="rect">
-            <a:avLst/>
-          </a:prstGeom>
-          <a:noFill/>
-        </p:spPr>
-        <p:txBody>
-          <a:bodyPr wrap="square" anchor="t">
-            <a:spAutoFit/>
-          </a:bodyPr>
-          <a:lstStyle/>
-          <a:p>
-            <a:pPr algn="l">
-              <a:lnSpc>
-                <a:spcPct val="115000"/>
-              </a:lnSpc>
-            </a:pPr>
-            <a:r>
-              <a:rPr sz="1400" b="0">
-                <a:solidFill>
-                  <a:srgbClr val="6E8880"/>
-                </a:solidFill>
-                <a:latin typeface="Malgun Gothic"/>
-              </a:rPr>
-              <a:t>이번 달 지출</a:t>
-            </a:r>
-          </a:p>
-        </p:txBody>
-      </p:sp>
-      <p:sp>
-        <p:nvSpPr>
-          <p:cNvPr id="9" name="TextBox 8"/>
-          <p:cNvSpPr txBox="1"/>
-          <p:nvPr/>
-        </p:nvSpPr>
-        <p:spPr>
-          <a:xfrm>
-            <a:off x="6766560" y="2331720"/>
-            <a:ext cx="4572000" cy="548640"/>
-          </a:xfrm>
-          <a:prstGeom prst="rect">
-            <a:avLst/>
-          </a:prstGeom>
-          <a:noFill/>
-        </p:spPr>
-        <p:txBody>
-          <a:bodyPr wrap="square" anchor="t">
-            <a:spAutoFit/>
-          </a:bodyPr>
-          <a:lstStyle/>
-          <a:p>
-            <a:pPr algn="l">
-              <a:lnSpc>
-                <a:spcPct val="115000"/>
-              </a:lnSpc>
-            </a:pPr>
-            <a:r>
-              <a:rPr sz="3000" b="1">
-                <a:solidFill>
-                  <a:srgbClr val="0F766E"/>
-                </a:solidFill>
-                <a:latin typeface="Malgun Gothic"/>
-              </a:rPr>
-              <a:t>1,284,000원</a:t>
-            </a:r>
-          </a:p>
-        </p:txBody>
-      </p:sp>
-      <p:sp>
-        <p:nvSpPr>
-          <p:cNvPr id="10" name="TextBox 9"/>
-          <p:cNvSpPr txBox="1"/>
-          <p:nvPr/>
-        </p:nvSpPr>
-        <p:spPr>
-          <a:xfrm>
-            <a:off x="6766560" y="3200400"/>
-            <a:ext cx="822960" cy="365760"/>
-          </a:xfrm>
-          <a:prstGeom prst="rect">
-            <a:avLst/>
-          </a:prstGeom>
-          <a:noFill/>
-        </p:spPr>
-        <p:txBody>
-          <a:bodyPr wrap="square" anchor="t">
-            <a:spAutoFit/>
-          </a:bodyPr>
-          <a:lstStyle/>
-          <a:p>
-            <a:pPr algn="l">
-              <a:lnSpc>
-                <a:spcPct val="115000"/>
-              </a:lnSpc>
-            </a:pPr>
-            <a:r>
-              <a:rPr sz="1300" b="0">
-                <a:solidFill>
-                  <a:srgbClr val="4B6259"/>
-                </a:solidFill>
-                <a:latin typeface="Malgun Gothic"/>
-              </a:rPr>
-              <a:t>식비</a:t>
-            </a:r>
-          </a:p>
-        </p:txBody>
-      </p:sp>
-      <p:sp>
-        <p:nvSpPr>
-          <p:cNvPr id="11" name="Rectangle 10"/>
+          <p:cNvPr id="8" name="Rectangle 7"/>
           <p:cNvSpPr/>
           <p:nvPr/>
         </p:nvSpPr>
         <p:spPr>
           <a:xfrm>
-            <a:off x="7680960" y="3255264"/>
-            <a:ext cx="3291840" cy="256032"/>
+            <a:off x="640080" y="2834640"/>
+            <a:ext cx="3520440" cy="109728"/>
           </a:xfrm>
           <a:prstGeom prst="rect">
             <a:avLst/>
           </a:prstGeom>
           <a:solidFill>
-            <a:srgbClr val="E8F6F1"/>
+            <a:srgbClr val="34D399"/>
           </a:solidFill>
           <a:ln>
             <a:noFill/>
@@ -5457,20 +6000,144 @@
       </p:sp>
       <p:sp>
         <p:nvSpPr>
+          <p:cNvPr id="9" name="TextBox 8"/>
+          <p:cNvSpPr txBox="1"/>
+          <p:nvPr/>
+        </p:nvSpPr>
+        <p:spPr>
+          <a:xfrm>
+            <a:off x="914400" y="3200400"/>
+            <a:ext cx="2971800" cy="457200"/>
+          </a:xfrm>
+          <a:prstGeom prst="rect">
+            <a:avLst/>
+          </a:prstGeom>
+          <a:noFill/>
+        </p:spPr>
+        <p:txBody>
+          <a:bodyPr wrap="square" anchor="t">
+            <a:spAutoFit/>
+          </a:bodyPr>
+          <a:lstStyle/>
+          <a:p>
+            <a:pPr algn="l">
+              <a:lnSpc>
+                <a:spcPct val="115000"/>
+              </a:lnSpc>
+            </a:pPr>
+            <a:r>
+              <a:rPr sz="1800" b="1">
+                <a:solidFill>
+                  <a:srgbClr val="0F766E"/>
+                </a:solidFill>
+                <a:latin typeface="Malgun Gothic"/>
+              </a:rPr>
+              <a:t>문제 정의</a:t>
+            </a:r>
+          </a:p>
+        </p:txBody>
+      </p:sp>
+      <p:sp>
+        <p:nvSpPr>
+          <p:cNvPr id="10" name="TextBox 9"/>
+          <p:cNvSpPr txBox="1"/>
+          <p:nvPr/>
+        </p:nvSpPr>
+        <p:spPr>
+          <a:xfrm>
+            <a:off x="914400" y="3703320"/>
+            <a:ext cx="2971800" cy="2011680"/>
+          </a:xfrm>
+          <a:prstGeom prst="rect">
+            <a:avLst/>
+          </a:prstGeom>
+          <a:noFill/>
+        </p:spPr>
+        <p:txBody>
+          <a:bodyPr wrap="square" anchor="t">
+            <a:spAutoFit/>
+          </a:bodyPr>
+          <a:lstStyle/>
+          <a:p>
+            <a:pPr algn="l">
+              <a:lnSpc>
+                <a:spcPct val="115000"/>
+              </a:lnSpc>
+            </a:pPr>
+            <a:r>
+              <a:rPr sz="1400" b="0">
+                <a:solidFill>
+                  <a:srgbClr val="4B6259"/>
+                </a:solidFill>
+                <a:latin typeface="Malgun Gothic"/>
+              </a:rPr>
+              <a:t>지출을 기록해도 흩어진 데이터라 카테고리별·월별 흐름을 한눈에 파악하기 어려움</a:t>
+            </a:r>
+          </a:p>
+        </p:txBody>
+      </p:sp>
+      <p:sp>
+        <p:nvSpPr>
+          <p:cNvPr id="11" name="Rectangle 10"/>
+          <p:cNvSpPr/>
+          <p:nvPr/>
+        </p:nvSpPr>
+        <p:spPr>
+          <a:xfrm>
+            <a:off x="4343400" y="2834640"/>
+            <a:ext cx="3520440" cy="3108960"/>
+          </a:xfrm>
+          <a:prstGeom prst="rect">
+            <a:avLst/>
+          </a:prstGeom>
+          <a:solidFill>
+            <a:srgbClr val="FFFFFF"/>
+          </a:solidFill>
+          <a:ln w="12700">
+            <a:solidFill>
+              <a:srgbClr val="DCEEE7"/>
+            </a:solidFill>
+          </a:ln>
+          <a:effectLst/>
+        </p:spPr>
+        <p:style>
+          <a:lnRef idx="1">
+            <a:schemeClr val="accent1"/>
+          </a:lnRef>
+          <a:fillRef idx="3">
+            <a:schemeClr val="accent1"/>
+          </a:fillRef>
+          <a:effectRef idx="2">
+            <a:schemeClr val="accent1"/>
+          </a:effectRef>
+          <a:fontRef idx="minor">
+            <a:schemeClr val="lt1"/>
+          </a:fontRef>
+        </p:style>
+        <p:txBody>
+          <a:bodyPr rtlCol="0" anchor="ctr"/>
+          <a:lstStyle/>
+          <a:p>
+            <a:pPr algn="ctr"/>
+          </a:p>
+        </p:txBody>
+      </p:sp>
+      <p:sp>
+        <p:nvSpPr>
           <p:cNvPr id="12" name="Rectangle 11"/>
           <p:cNvSpPr/>
           <p:nvPr/>
         </p:nvSpPr>
         <p:spPr>
           <a:xfrm>
-            <a:off x="7680960" y="3255264"/>
-            <a:ext cx="2798064" cy="256032"/>
+            <a:off x="4343400" y="2834640"/>
+            <a:ext cx="3520440" cy="109728"/>
           </a:xfrm>
           <a:prstGeom prst="rect">
             <a:avLst/>
           </a:prstGeom>
           <a:solidFill>
-            <a:srgbClr val="2DD4BF"/>
+            <a:srgbClr val="34D399"/>
           </a:solidFill>
           <a:ln>
             <a:noFill/>
@@ -5507,8 +6174,8 @@
         </p:nvSpPr>
         <p:spPr>
           <a:xfrm>
-            <a:off x="6766560" y="3822192"/>
-            <a:ext cx="822960" cy="365760"/>
+            <a:off x="4617720" y="3200400"/>
+            <a:ext cx="2971800" cy="457200"/>
           </a:xfrm>
           <a:prstGeom prst="rect">
             <a:avLst/>
@@ -5527,33 +6194,118 @@
               </a:lnSpc>
             </a:pPr>
             <a:r>
-              <a:rPr sz="1300" b="0">
+              <a:rPr sz="1800" b="1">
+                <a:solidFill>
+                  <a:srgbClr val="0F766E"/>
+                </a:solidFill>
+                <a:latin typeface="Malgun Gothic"/>
+              </a:rPr>
+              <a:t>핵심 가치</a:t>
+            </a:r>
+          </a:p>
+        </p:txBody>
+      </p:sp>
+      <p:sp>
+        <p:nvSpPr>
+          <p:cNvPr id="14" name="TextBox 13"/>
+          <p:cNvSpPr txBox="1"/>
+          <p:nvPr/>
+        </p:nvSpPr>
+        <p:spPr>
+          <a:xfrm>
+            <a:off x="4617720" y="3703320"/>
+            <a:ext cx="2971800" cy="2011680"/>
+          </a:xfrm>
+          <a:prstGeom prst="rect">
+            <a:avLst/>
+          </a:prstGeom>
+          <a:noFill/>
+        </p:spPr>
+        <p:txBody>
+          <a:bodyPr wrap="square" anchor="t">
+            <a:spAutoFit/>
+          </a:bodyPr>
+          <a:lstStyle/>
+          <a:p>
+            <a:pPr algn="l">
+              <a:lnSpc>
+                <a:spcPct val="115000"/>
+              </a:lnSpc>
+            </a:pPr>
+            <a:r>
+              <a:rPr sz="1400" b="0">
                 <a:solidFill>
                   <a:srgbClr val="4B6259"/>
                 </a:solidFill>
                 <a:latin typeface="Malgun Gothic"/>
               </a:rPr>
-              <a:t>교통</a:t>
-            </a:r>
-          </a:p>
-        </p:txBody>
-      </p:sp>
-      <p:sp>
-        <p:nvSpPr>
-          <p:cNvPr id="14" name="Rectangle 13"/>
+              <a:t>간편한 등록 흐름 + 시각적 통계(도넛/막대 차트)로 소비 패턴을 즉시 인지</a:t>
+            </a:r>
+          </a:p>
+        </p:txBody>
+      </p:sp>
+      <p:sp>
+        <p:nvSpPr>
+          <p:cNvPr id="15" name="Rectangle 14"/>
           <p:cNvSpPr/>
           <p:nvPr/>
         </p:nvSpPr>
         <p:spPr>
           <a:xfrm>
-            <a:off x="7680960" y="3877056"/>
-            <a:ext cx="3291840" cy="256032"/>
+            <a:off x="8046720" y="2834640"/>
+            <a:ext cx="3520440" cy="3108960"/>
           </a:xfrm>
           <a:prstGeom prst="rect">
             <a:avLst/>
           </a:prstGeom>
           <a:solidFill>
-            <a:srgbClr val="E8F6F1"/>
+            <a:srgbClr val="FFFFFF"/>
+          </a:solidFill>
+          <a:ln w="12700">
+            <a:solidFill>
+              <a:srgbClr val="DCEEE7"/>
+            </a:solidFill>
+          </a:ln>
+          <a:effectLst/>
+        </p:spPr>
+        <p:style>
+          <a:lnRef idx="1">
+            <a:schemeClr val="accent1"/>
+          </a:lnRef>
+          <a:fillRef idx="3">
+            <a:schemeClr val="accent1"/>
+          </a:fillRef>
+          <a:effectRef idx="2">
+            <a:schemeClr val="accent1"/>
+          </a:effectRef>
+          <a:fontRef idx="minor">
+            <a:schemeClr val="lt1"/>
+          </a:fontRef>
+        </p:style>
+        <p:txBody>
+          <a:bodyPr rtlCol="0" anchor="ctr"/>
+          <a:lstStyle/>
+          <a:p>
+            <a:pPr algn="ctr"/>
+          </a:p>
+        </p:txBody>
+      </p:sp>
+      <p:sp>
+        <p:nvSpPr>
+          <p:cNvPr id="16" name="Rectangle 15"/>
+          <p:cNvSpPr/>
+          <p:nvPr/>
+        </p:nvSpPr>
+        <p:spPr>
+          <a:xfrm>
+            <a:off x="8046720" y="2834640"/>
+            <a:ext cx="3520440" cy="109728"/>
+          </a:xfrm>
+          <a:prstGeom prst="rect">
+            <a:avLst/>
+          </a:prstGeom>
+          <a:solidFill>
+            <a:srgbClr val="34D399"/>
           </a:solidFill>
           <a:ln>
             <a:noFill/>
@@ -5584,58 +6336,14 @@
       </p:sp>
       <p:sp>
         <p:nvSpPr>
-          <p:cNvPr id="15" name="Rectangle 14"/>
-          <p:cNvSpPr/>
-          <p:nvPr/>
-        </p:nvSpPr>
-        <p:spPr>
-          <a:xfrm>
-            <a:off x="7680960" y="3877056"/>
-            <a:ext cx="1481328" cy="256032"/>
-          </a:xfrm>
-          <a:prstGeom prst="rect">
-            <a:avLst/>
-          </a:prstGeom>
-          <a:solidFill>
-            <a:srgbClr val="60A5FA"/>
-          </a:solidFill>
-          <a:ln>
-            <a:noFill/>
-          </a:ln>
-          <a:effectLst/>
-        </p:spPr>
-        <p:style>
-          <a:lnRef idx="1">
-            <a:schemeClr val="accent1"/>
-          </a:lnRef>
-          <a:fillRef idx="3">
-            <a:schemeClr val="accent1"/>
-          </a:fillRef>
-          <a:effectRef idx="2">
-            <a:schemeClr val="accent1"/>
-          </a:effectRef>
-          <a:fontRef idx="minor">
-            <a:schemeClr val="lt1"/>
-          </a:fontRef>
-        </p:style>
-        <p:txBody>
-          <a:bodyPr rtlCol="0" anchor="ctr"/>
-          <a:lstStyle/>
-          <a:p>
-            <a:pPr algn="ctr"/>
-          </a:p>
-        </p:txBody>
-      </p:sp>
-      <p:sp>
-        <p:nvSpPr>
-          <p:cNvPr id="16" name="TextBox 15"/>
+          <p:cNvPr id="17" name="TextBox 16"/>
           <p:cNvSpPr txBox="1"/>
           <p:nvPr/>
         </p:nvSpPr>
         <p:spPr>
           <a:xfrm>
-            <a:off x="6766560" y="4443984"/>
-            <a:ext cx="822960" cy="365760"/>
+            <a:off x="8321040" y="3200400"/>
+            <a:ext cx="2971800" cy="457200"/>
           </a:xfrm>
           <a:prstGeom prst="rect">
             <a:avLst/>
@@ -5654,115 +6362,27 @@
               </a:lnSpc>
             </a:pPr>
             <a:r>
-              <a:rPr sz="1300" b="0">
-                <a:solidFill>
-                  <a:srgbClr val="4B6259"/>
-                </a:solidFill>
-                <a:latin typeface="Malgun Gothic"/>
-              </a:rPr>
-              <a:t>주거</a:t>
-            </a:r>
-          </a:p>
-        </p:txBody>
-      </p:sp>
-      <p:sp>
-        <p:nvSpPr>
-          <p:cNvPr id="17" name="Rectangle 16"/>
-          <p:cNvSpPr/>
-          <p:nvPr/>
-        </p:nvSpPr>
-        <p:spPr>
-          <a:xfrm>
-            <a:off x="7680960" y="4498848"/>
-            <a:ext cx="3291840" cy="256032"/>
-          </a:xfrm>
-          <a:prstGeom prst="rect">
-            <a:avLst/>
-          </a:prstGeom>
-          <a:solidFill>
-            <a:srgbClr val="E8F6F1"/>
-          </a:solidFill>
-          <a:ln>
-            <a:noFill/>
-          </a:ln>
-          <a:effectLst/>
-        </p:spPr>
-        <p:style>
-          <a:lnRef idx="1">
-            <a:schemeClr val="accent1"/>
-          </a:lnRef>
-          <a:fillRef idx="3">
-            <a:schemeClr val="accent1"/>
-          </a:fillRef>
-          <a:effectRef idx="2">
-            <a:schemeClr val="accent1"/>
-          </a:effectRef>
-          <a:fontRef idx="minor">
-            <a:schemeClr val="lt1"/>
-          </a:fontRef>
-        </p:style>
-        <p:txBody>
-          <a:bodyPr rtlCol="0" anchor="ctr"/>
-          <a:lstStyle/>
-          <a:p>
-            <a:pPr algn="ctr"/>
-          </a:p>
-        </p:txBody>
-      </p:sp>
-      <p:sp>
-        <p:nvSpPr>
-          <p:cNvPr id="18" name="Rectangle 17"/>
-          <p:cNvSpPr/>
-          <p:nvPr/>
-        </p:nvSpPr>
-        <p:spPr>
-          <a:xfrm>
-            <a:off x="7680960" y="4498848"/>
-            <a:ext cx="3127248" cy="256032"/>
-          </a:xfrm>
-          <a:prstGeom prst="rect">
-            <a:avLst/>
-          </a:prstGeom>
-          <a:solidFill>
-            <a:srgbClr val="A78BFA"/>
-          </a:solidFill>
-          <a:ln>
-            <a:noFill/>
-          </a:ln>
-          <a:effectLst/>
-        </p:spPr>
-        <p:style>
-          <a:lnRef idx="1">
-            <a:schemeClr val="accent1"/>
-          </a:lnRef>
-          <a:fillRef idx="3">
-            <a:schemeClr val="accent1"/>
-          </a:fillRef>
-          <a:effectRef idx="2">
-            <a:schemeClr val="accent1"/>
-          </a:effectRef>
-          <a:fontRef idx="minor">
-            <a:schemeClr val="lt1"/>
-          </a:fontRef>
-        </p:style>
-        <p:txBody>
-          <a:bodyPr rtlCol="0" anchor="ctr"/>
-          <a:lstStyle/>
-          <a:p>
-            <a:pPr algn="ctr"/>
-          </a:p>
-        </p:txBody>
-      </p:sp>
-      <p:sp>
-        <p:nvSpPr>
-          <p:cNvPr id="19" name="TextBox 18"/>
+              <a:rPr sz="1800" b="1">
+                <a:solidFill>
+                  <a:srgbClr val="0F766E"/>
+                </a:solidFill>
+                <a:latin typeface="Malgun Gothic"/>
+              </a:rPr>
+              <a:t>두 가지 역할</a:t>
+            </a:r>
+          </a:p>
+        </p:txBody>
+      </p:sp>
+      <p:sp>
+        <p:nvSpPr>
+          <p:cNvPr id="18" name="TextBox 17"/>
           <p:cNvSpPr txBox="1"/>
           <p:nvPr/>
         </p:nvSpPr>
         <p:spPr>
           <a:xfrm>
-            <a:off x="6766560" y="5065776"/>
-            <a:ext cx="822960" cy="365760"/>
+            <a:off x="8321040" y="3703320"/>
+            <a:ext cx="2971800" cy="2011680"/>
           </a:xfrm>
           <a:prstGeom prst="rect">
             <a:avLst/>
@@ -5781,108 +6401,20 @@
               </a:lnSpc>
             </a:pPr>
             <a:r>
-              <a:rPr sz="1300" b="0">
+              <a:rPr sz="1400" b="0">
                 <a:solidFill>
                   <a:srgbClr val="4B6259"/>
                 </a:solidFill>
                 <a:latin typeface="Malgun Gothic"/>
               </a:rPr>
-              <a:t>쇼핑</a:t>
-            </a:r>
-          </a:p>
-        </p:txBody>
-      </p:sp>
-      <p:sp>
-        <p:nvSpPr>
-          <p:cNvPr id="20" name="Rectangle 19"/>
-          <p:cNvSpPr/>
-          <p:nvPr/>
-        </p:nvSpPr>
-        <p:spPr>
-          <a:xfrm>
-            <a:off x="7680960" y="5120640"/>
-            <a:ext cx="3291840" cy="256032"/>
-          </a:xfrm>
-          <a:prstGeom prst="rect">
-            <a:avLst/>
-          </a:prstGeom>
-          <a:solidFill>
-            <a:srgbClr val="E8F6F1"/>
-          </a:solidFill>
-          <a:ln>
-            <a:noFill/>
-          </a:ln>
-          <a:effectLst/>
-        </p:spPr>
-        <p:style>
-          <a:lnRef idx="1">
-            <a:schemeClr val="accent1"/>
-          </a:lnRef>
-          <a:fillRef idx="3">
-            <a:schemeClr val="accent1"/>
-          </a:fillRef>
-          <a:effectRef idx="2">
-            <a:schemeClr val="accent1"/>
-          </a:effectRef>
-          <a:fontRef idx="minor">
-            <a:schemeClr val="lt1"/>
-          </a:fontRef>
-        </p:style>
-        <p:txBody>
-          <a:bodyPr rtlCol="0" anchor="ctr"/>
-          <a:lstStyle/>
-          <a:p>
-            <a:pPr algn="ctr"/>
-          </a:p>
-        </p:txBody>
-      </p:sp>
-      <p:sp>
-        <p:nvSpPr>
-          <p:cNvPr id="21" name="Rectangle 20"/>
-          <p:cNvSpPr/>
-          <p:nvPr/>
-        </p:nvSpPr>
-        <p:spPr>
-          <a:xfrm>
-            <a:off x="7680960" y="5120640"/>
-            <a:ext cx="1152144" cy="256032"/>
-          </a:xfrm>
-          <a:prstGeom prst="rect">
-            <a:avLst/>
-          </a:prstGeom>
-          <a:solidFill>
-            <a:srgbClr val="FBBF24"/>
-          </a:solidFill>
-          <a:ln>
-            <a:noFill/>
-          </a:ln>
-          <a:effectLst/>
-        </p:spPr>
-        <p:style>
-          <a:lnRef idx="1">
-            <a:schemeClr val="accent1"/>
-          </a:lnRef>
-          <a:fillRef idx="3">
-            <a:schemeClr val="accent1"/>
-          </a:fillRef>
-          <a:effectRef idx="2">
-            <a:schemeClr val="accent1"/>
-          </a:effectRef>
-          <a:fontRef idx="minor">
-            <a:schemeClr val="lt1"/>
-          </a:fontRef>
-        </p:style>
-        <p:txBody>
-          <a:bodyPr rtlCol="0" anchor="ctr"/>
-          <a:lstStyle/>
-          <a:p>
-            <a:pPr algn="ctr"/>
-          </a:p>
-        </p:txBody>
-      </p:sp>
-      <p:sp>
-        <p:nvSpPr>
-          <p:cNvPr id="22" name="TextBox 21"/>
+              <a:t>고객은 본인 지출을 기록·조회, 관리자는 회원과 전체 서비스 통계를 관리</a:t>
+            </a:r>
+          </a:p>
+        </p:txBody>
+      </p:sp>
+      <p:sp>
+        <p:nvSpPr>
+          <p:cNvPr id="19" name="TextBox 18"/>
           <p:cNvSpPr txBox="1"/>
           <p:nvPr/>
         </p:nvSpPr>
@@ -5921,7 +6453,7 @@
       </p:sp>
       <p:sp>
         <p:nvSpPr>
-          <p:cNvPr id="23" name="TextBox 22"/>
+          <p:cNvPr id="20" name="TextBox 19"/>
           <p:cNvSpPr txBox="1"/>
           <p:nvPr/>
         </p:nvSpPr>
@@ -5999,7 +6531,7 @@
             <a:avLst/>
           </a:prstGeom>
           <a:solidFill>
-            <a:srgbClr val="1E3A34"/>
+            <a:srgbClr val="0F766E"/>
           </a:solidFill>
           <a:ln>
             <a:noFill/>
@@ -6058,11 +6590,11 @@
             <a:r>
               <a:rPr sz="1300" b="1">
                 <a:solidFill>
-                  <a:srgbClr val="1E3A34"/>
-                </a:solidFill>
-                <a:latin typeface="Malgun Gothic"/>
-              </a:rPr>
-              <a:t>FEATURES · ADMIN</a:t>
+                  <a:srgbClr val="0F766E"/>
+                </a:solidFill>
+                <a:latin typeface="Malgun Gothic"/>
+              </a:rPr>
+              <a:t>FEATURES · CUSTOMER</a:t>
             </a:r>
           </a:p>
         </p:txBody>
@@ -6101,7 +6633,7 @@
                 </a:solidFill>
                 <a:latin typeface="Malgun Gothic"/>
               </a:rPr>
-              <a:t>핵심 기능 — 관리자</a:t>
+              <a:t>핵심 기능 — 고객</a:t>
             </a:r>
           </a:p>
         </p:txBody>
@@ -6187,7 +6719,7 @@
                 </a:solidFill>
                 <a:latin typeface="Malgun Gothic"/>
               </a:rPr>
-              <a:t>•  고정 계정 로그인</a:t>
+              <a:t>•  회원가입 / 로그인</a:t>
             </a:r>
           </a:p>
           <a:p>
@@ -6203,7 +6735,7 @@
                 </a:solidFill>
                 <a:latin typeface="Malgun Gothic"/>
               </a:rPr>
-              <a:t>     회원가입 없이 지정된 관리자 계정으로만 접근</a:t>
+              <a:t>     이메일·비밀번호 기반, 가입 즉시 자동 로그인</a:t>
             </a:r>
           </a:p>
           <a:p>
@@ -6222,7 +6754,7 @@
                 </a:solidFill>
                 <a:latin typeface="Malgun Gothic"/>
               </a:rPr>
-              <a:t>•  전체 통계 대시보드</a:t>
+              <a:t>•  지출 CRUD</a:t>
             </a:r>
           </a:p>
           <a:p>
@@ -6238,7 +6770,7 @@
                 </a:solidFill>
                 <a:latin typeface="Malgun Gothic"/>
               </a:rPr>
-              <a:t>     전체 회원 수 · 총 지출액 · 이번 달 지출 · 인기 카테고리 TOP 5</a:t>
+              <a:t>     등록·조회·수정·삭제 — 기간·카테고리 필터 및 메모 검색 지원</a:t>
             </a:r>
           </a:p>
           <a:p>
@@ -6257,7 +6789,7 @@
                 </a:solidFill>
                 <a:latin typeface="Malgun Gothic"/>
               </a:rPr>
-              <a:t>•  회원 관리</a:t>
+              <a:t>•  페이지네이션</a:t>
             </a:r>
           </a:p>
           <a:p>
@@ -6273,7 +6805,7 @@
                 </a:solidFill>
                 <a:latin typeface="Malgun Gothic"/>
               </a:rPr>
-              <a:t>     이름/이메일 검색, 계정 정지·해제, 상세 화면에서 최근 지출 5건 확인</a:t>
+              <a:t>     지출 내역이 쌓여도 페이지당 10건씩 표시, 필터 변경 시 1페이지로 자동 리셋</a:t>
             </a:r>
           </a:p>
           <a:p>
@@ -6292,7 +6824,7 @@
                 </a:solidFill>
                 <a:latin typeface="Malgun Gothic"/>
               </a:rPr>
-              <a:t>•  역할 분리</a:t>
+              <a:t>•  개인 통계 대시보드</a:t>
             </a:r>
           </a:p>
           <a:p>
@@ -6308,55 +6840,75 @@
                 </a:solidFill>
                 <a:latin typeface="Malgun Gothic"/>
               </a:rPr>
-              <a:t>     관리자는 지출 데이터를 직접 등록하지 않고 조회·관리만 수행</a:t>
-            </a:r>
-          </a:p>
-        </p:txBody>
-      </p:sp>
-      <p:sp>
-        <p:nvSpPr>
-          <p:cNvPr id="7" name="Rectangle 6"/>
-          <p:cNvSpPr/>
-          <p:nvPr/>
-        </p:nvSpPr>
-        <p:spPr>
-          <a:xfrm>
-            <a:off x="6492240" y="1828800"/>
-            <a:ext cx="5029200" cy="4206240"/>
-          </a:xfrm>
-          <a:prstGeom prst="rect">
-            <a:avLst/>
-          </a:prstGeom>
-          <a:solidFill>
-            <a:srgbClr val="1E3A34"/>
-          </a:solidFill>
-          <a:ln>
-            <a:noFill/>
+              <a:t>     월별/연별 합계, 카테고리 비중을 도넛·막대 차트 토글로 시각화</a:t>
+            </a:r>
+          </a:p>
+          <a:p>
+            <a:pPr>
+              <a:lnSpc>
+                <a:spcPct val="120000"/>
+              </a:lnSpc>
+              <a:spcAft>
+                <a:spcPts val="1000"/>
+              </a:spcAft>
+            </a:pPr>
+            <a:r>
+              <a:rPr sz="1600" b="0">
+                <a:solidFill>
+                  <a:srgbClr val="1F2E2A"/>
+                </a:solidFill>
+                <a:latin typeface="Malgun Gothic"/>
+              </a:rPr>
+              <a:t>•  고정 카테고리 8종</a:t>
+            </a:r>
+          </a:p>
+          <a:p>
+            <a:pPr>
+              <a:spcAft>
+                <a:spcPts val="1000"/>
+              </a:spcAft>
+            </a:pPr>
+            <a:r>
+              <a:rPr sz="1300">
+                <a:solidFill>
+                  <a:srgbClr val="6E8880"/>
+                </a:solidFill>
+                <a:latin typeface="Malgun Gothic"/>
+              </a:rPr>
+              <a:t>     식비·교통·주거·문화/여가·쇼핑·의료·교육·기타 — 모든 사용자 공용</a:t>
+            </a:r>
+          </a:p>
+        </p:txBody>
+      </p:sp>
+      <p:pic>
+        <p:nvPicPr>
+          <p:cNvPr id="7" name="Picture 6" descr="dashboard.png"/>
+          <p:cNvPicPr>
+            <a:picLocks noChangeAspect="1"/>
+          </p:cNvPicPr>
+          <p:nvPr/>
+        </p:nvPicPr>
+        <p:blipFill>
+          <a:blip r:embed="rId2"/>
+          <a:stretch>
+            <a:fillRect/>
+          </a:stretch>
+        </p:blipFill>
+        <p:spPr>
+          <a:xfrm>
+            <a:off x="6492240" y="2255520"/>
+            <a:ext cx="5029200" cy="3352800"/>
+          </a:xfrm>
+          <a:prstGeom prst="rect">
+            <a:avLst/>
+          </a:prstGeom>
+          <a:ln w="12700">
+            <a:solidFill>
+              <a:srgbClr val="DCEEE7"/>
+            </a:solidFill>
           </a:ln>
-          <a:effectLst/>
-        </p:spPr>
-        <p:style>
-          <a:lnRef idx="1">
-            <a:schemeClr val="accent1"/>
-          </a:lnRef>
-          <a:fillRef idx="3">
-            <a:schemeClr val="accent1"/>
-          </a:fillRef>
-          <a:effectRef idx="2">
-            <a:schemeClr val="accent1"/>
-          </a:effectRef>
-          <a:fontRef idx="minor">
-            <a:schemeClr val="lt1"/>
-          </a:fontRef>
-        </p:style>
-        <p:txBody>
-          <a:bodyPr rtlCol="0" anchor="ctr"/>
-          <a:lstStyle/>
-          <a:p>
-            <a:pPr algn="ctr"/>
-          </a:p>
-        </p:txBody>
-      </p:sp>
+        </p:spPr>
+      </p:pic>
       <p:sp>
         <p:nvSpPr>
           <p:cNvPr id="8" name="TextBox 7"/>
@@ -6365,8 +6917,8 @@
         </p:nvSpPr>
         <p:spPr>
           <a:xfrm>
-            <a:off x="6766560" y="2057400"/>
-            <a:ext cx="4572000" cy="365760"/>
+            <a:off x="457200" y="6446520"/>
+            <a:ext cx="7315200" cy="320040"/>
           </a:xfrm>
           <a:prstGeom prst="rect">
             <a:avLst/>
@@ -6385,411 +6937,6 @@
               </a:lnSpc>
             </a:pPr>
             <a:r>
-              <a:rPr sz="1300" b="1">
-                <a:solidFill>
-                  <a:srgbClr val="34D399"/>
-                </a:solidFill>
-                <a:latin typeface="Malgun Gothic"/>
-              </a:rPr>
-              <a:t>ADMIN DASHBOARD</a:t>
-            </a:r>
-          </a:p>
-        </p:txBody>
-      </p:sp>
-      <p:sp>
-        <p:nvSpPr>
-          <p:cNvPr id="9" name="Rectangle 8"/>
-          <p:cNvSpPr/>
-          <p:nvPr/>
-        </p:nvSpPr>
-        <p:spPr>
-          <a:xfrm>
-            <a:off x="6766560" y="2606040"/>
-            <a:ext cx="4480560" cy="868680"/>
-          </a:xfrm>
-          <a:prstGeom prst="rect">
-            <a:avLst/>
-          </a:prstGeom>
-          <a:solidFill>
-            <a:srgbClr val="274A43"/>
-          </a:solidFill>
-          <a:ln>
-            <a:noFill/>
-          </a:ln>
-          <a:effectLst/>
-        </p:spPr>
-        <p:style>
-          <a:lnRef idx="1">
-            <a:schemeClr val="accent1"/>
-          </a:lnRef>
-          <a:fillRef idx="3">
-            <a:schemeClr val="accent1"/>
-          </a:fillRef>
-          <a:effectRef idx="2">
-            <a:schemeClr val="accent1"/>
-          </a:effectRef>
-          <a:fontRef idx="minor">
-            <a:schemeClr val="lt1"/>
-          </a:fontRef>
-        </p:style>
-        <p:txBody>
-          <a:bodyPr rtlCol="0" anchor="ctr"/>
-          <a:lstStyle/>
-          <a:p>
-            <a:pPr algn="ctr"/>
-          </a:p>
-        </p:txBody>
-      </p:sp>
-      <p:sp>
-        <p:nvSpPr>
-          <p:cNvPr id="10" name="TextBox 9"/>
-          <p:cNvSpPr txBox="1"/>
-          <p:nvPr/>
-        </p:nvSpPr>
-        <p:spPr>
-          <a:xfrm>
-            <a:off x="6995160" y="2715768"/>
-            <a:ext cx="2743200" cy="320040"/>
-          </a:xfrm>
-          <a:prstGeom prst="rect">
-            <a:avLst/>
-          </a:prstGeom>
-          <a:noFill/>
-        </p:spPr>
-        <p:txBody>
-          <a:bodyPr wrap="square" anchor="t">
-            <a:spAutoFit/>
-          </a:bodyPr>
-          <a:lstStyle/>
-          <a:p>
-            <a:pPr algn="l">
-              <a:lnSpc>
-                <a:spcPct val="115000"/>
-              </a:lnSpc>
-            </a:pPr>
-            <a:r>
-              <a:rPr sz="1300" b="0">
-                <a:solidFill>
-                  <a:srgbClr val="E8F6F1"/>
-                </a:solidFill>
-                <a:latin typeface="Malgun Gothic"/>
-              </a:rPr>
-              <a:t>회원 수</a:t>
-            </a:r>
-          </a:p>
-        </p:txBody>
-      </p:sp>
-      <p:sp>
-        <p:nvSpPr>
-          <p:cNvPr id="11" name="TextBox 10"/>
-          <p:cNvSpPr txBox="1"/>
-          <p:nvPr/>
-        </p:nvSpPr>
-        <p:spPr>
-          <a:xfrm>
-            <a:off x="6995160" y="2990088"/>
-            <a:ext cx="3657600" cy="457200"/>
-          </a:xfrm>
-          <a:prstGeom prst="rect">
-            <a:avLst/>
-          </a:prstGeom>
-          <a:noFill/>
-        </p:spPr>
-        <p:txBody>
-          <a:bodyPr wrap="square" anchor="t">
-            <a:spAutoFit/>
-          </a:bodyPr>
-          <a:lstStyle/>
-          <a:p>
-            <a:pPr algn="l">
-              <a:lnSpc>
-                <a:spcPct val="115000"/>
-              </a:lnSpc>
-            </a:pPr>
-            <a:r>
-              <a:rPr sz="2000" b="1">
-                <a:solidFill>
-                  <a:srgbClr val="FFFFFF"/>
-                </a:solidFill>
-                <a:latin typeface="Malgun Gothic"/>
-              </a:rPr>
-              <a:t>128명</a:t>
-            </a:r>
-          </a:p>
-        </p:txBody>
-      </p:sp>
-      <p:sp>
-        <p:nvSpPr>
-          <p:cNvPr id="12" name="Rectangle 11"/>
-          <p:cNvSpPr/>
-          <p:nvPr/>
-        </p:nvSpPr>
-        <p:spPr>
-          <a:xfrm>
-            <a:off x="6766560" y="3657600"/>
-            <a:ext cx="4480560" cy="868680"/>
-          </a:xfrm>
-          <a:prstGeom prst="rect">
-            <a:avLst/>
-          </a:prstGeom>
-          <a:solidFill>
-            <a:srgbClr val="274A43"/>
-          </a:solidFill>
-          <a:ln>
-            <a:noFill/>
-          </a:ln>
-          <a:effectLst/>
-        </p:spPr>
-        <p:style>
-          <a:lnRef idx="1">
-            <a:schemeClr val="accent1"/>
-          </a:lnRef>
-          <a:fillRef idx="3">
-            <a:schemeClr val="accent1"/>
-          </a:fillRef>
-          <a:effectRef idx="2">
-            <a:schemeClr val="accent1"/>
-          </a:effectRef>
-          <a:fontRef idx="minor">
-            <a:schemeClr val="lt1"/>
-          </a:fontRef>
-        </p:style>
-        <p:txBody>
-          <a:bodyPr rtlCol="0" anchor="ctr"/>
-          <a:lstStyle/>
-          <a:p>
-            <a:pPr algn="ctr"/>
-          </a:p>
-        </p:txBody>
-      </p:sp>
-      <p:sp>
-        <p:nvSpPr>
-          <p:cNvPr id="13" name="TextBox 12"/>
-          <p:cNvSpPr txBox="1"/>
-          <p:nvPr/>
-        </p:nvSpPr>
-        <p:spPr>
-          <a:xfrm>
-            <a:off x="6995160" y="3767328"/>
-            <a:ext cx="2743200" cy="320040"/>
-          </a:xfrm>
-          <a:prstGeom prst="rect">
-            <a:avLst/>
-          </a:prstGeom>
-          <a:noFill/>
-        </p:spPr>
-        <p:txBody>
-          <a:bodyPr wrap="square" anchor="t">
-            <a:spAutoFit/>
-          </a:bodyPr>
-          <a:lstStyle/>
-          <a:p>
-            <a:pPr algn="l">
-              <a:lnSpc>
-                <a:spcPct val="115000"/>
-              </a:lnSpc>
-            </a:pPr>
-            <a:r>
-              <a:rPr sz="1300" b="0">
-                <a:solidFill>
-                  <a:srgbClr val="E8F6F1"/>
-                </a:solidFill>
-                <a:latin typeface="Malgun Gothic"/>
-              </a:rPr>
-              <a:t>총 지출액</a:t>
-            </a:r>
-          </a:p>
-        </p:txBody>
-      </p:sp>
-      <p:sp>
-        <p:nvSpPr>
-          <p:cNvPr id="14" name="TextBox 13"/>
-          <p:cNvSpPr txBox="1"/>
-          <p:nvPr/>
-        </p:nvSpPr>
-        <p:spPr>
-          <a:xfrm>
-            <a:off x="6995160" y="4041648"/>
-            <a:ext cx="3657600" cy="457200"/>
-          </a:xfrm>
-          <a:prstGeom prst="rect">
-            <a:avLst/>
-          </a:prstGeom>
-          <a:noFill/>
-        </p:spPr>
-        <p:txBody>
-          <a:bodyPr wrap="square" anchor="t">
-            <a:spAutoFit/>
-          </a:bodyPr>
-          <a:lstStyle/>
-          <a:p>
-            <a:pPr algn="l">
-              <a:lnSpc>
-                <a:spcPct val="115000"/>
-              </a:lnSpc>
-            </a:pPr>
-            <a:r>
-              <a:rPr sz="2000" b="1">
-                <a:solidFill>
-                  <a:srgbClr val="FFFFFF"/>
-                </a:solidFill>
-                <a:latin typeface="Malgun Gothic"/>
-              </a:rPr>
-              <a:t>42,830,000원</a:t>
-            </a:r>
-          </a:p>
-        </p:txBody>
-      </p:sp>
-      <p:sp>
-        <p:nvSpPr>
-          <p:cNvPr id="15" name="Rectangle 14"/>
-          <p:cNvSpPr/>
-          <p:nvPr/>
-        </p:nvSpPr>
-        <p:spPr>
-          <a:xfrm>
-            <a:off x="6766560" y="4709160"/>
-            <a:ext cx="4480560" cy="868680"/>
-          </a:xfrm>
-          <a:prstGeom prst="rect">
-            <a:avLst/>
-          </a:prstGeom>
-          <a:solidFill>
-            <a:srgbClr val="274A43"/>
-          </a:solidFill>
-          <a:ln>
-            <a:noFill/>
-          </a:ln>
-          <a:effectLst/>
-        </p:spPr>
-        <p:style>
-          <a:lnRef idx="1">
-            <a:schemeClr val="accent1"/>
-          </a:lnRef>
-          <a:fillRef idx="3">
-            <a:schemeClr val="accent1"/>
-          </a:fillRef>
-          <a:effectRef idx="2">
-            <a:schemeClr val="accent1"/>
-          </a:effectRef>
-          <a:fontRef idx="minor">
-            <a:schemeClr val="lt1"/>
-          </a:fontRef>
-        </p:style>
-        <p:txBody>
-          <a:bodyPr rtlCol="0" anchor="ctr"/>
-          <a:lstStyle/>
-          <a:p>
-            <a:pPr algn="ctr"/>
-          </a:p>
-        </p:txBody>
-      </p:sp>
-      <p:sp>
-        <p:nvSpPr>
-          <p:cNvPr id="16" name="TextBox 15"/>
-          <p:cNvSpPr txBox="1"/>
-          <p:nvPr/>
-        </p:nvSpPr>
-        <p:spPr>
-          <a:xfrm>
-            <a:off x="6995160" y="4818888"/>
-            <a:ext cx="2743200" cy="320040"/>
-          </a:xfrm>
-          <a:prstGeom prst="rect">
-            <a:avLst/>
-          </a:prstGeom>
-          <a:noFill/>
-        </p:spPr>
-        <p:txBody>
-          <a:bodyPr wrap="square" anchor="t">
-            <a:spAutoFit/>
-          </a:bodyPr>
-          <a:lstStyle/>
-          <a:p>
-            <a:pPr algn="l">
-              <a:lnSpc>
-                <a:spcPct val="115000"/>
-              </a:lnSpc>
-            </a:pPr>
-            <a:r>
-              <a:rPr sz="1300" b="0">
-                <a:solidFill>
-                  <a:srgbClr val="E8F6F1"/>
-                </a:solidFill>
-                <a:latin typeface="Malgun Gothic"/>
-              </a:rPr>
-              <a:t>이번 달</a:t>
-            </a:r>
-          </a:p>
-        </p:txBody>
-      </p:sp>
-      <p:sp>
-        <p:nvSpPr>
-          <p:cNvPr id="17" name="TextBox 16"/>
-          <p:cNvSpPr txBox="1"/>
-          <p:nvPr/>
-        </p:nvSpPr>
-        <p:spPr>
-          <a:xfrm>
-            <a:off x="6995160" y="5093208"/>
-            <a:ext cx="3657600" cy="457200"/>
-          </a:xfrm>
-          <a:prstGeom prst="rect">
-            <a:avLst/>
-          </a:prstGeom>
-          <a:noFill/>
-        </p:spPr>
-        <p:txBody>
-          <a:bodyPr wrap="square" anchor="t">
-            <a:spAutoFit/>
-          </a:bodyPr>
-          <a:lstStyle/>
-          <a:p>
-            <a:pPr algn="l">
-              <a:lnSpc>
-                <a:spcPct val="115000"/>
-              </a:lnSpc>
-            </a:pPr>
-            <a:r>
-              <a:rPr sz="2000" b="1">
-                <a:solidFill>
-                  <a:srgbClr val="FFFFFF"/>
-                </a:solidFill>
-                <a:latin typeface="Malgun Gothic"/>
-              </a:rPr>
-              <a:t>3,150,000원</a:t>
-            </a:r>
-          </a:p>
-        </p:txBody>
-      </p:sp>
-      <p:sp>
-        <p:nvSpPr>
-          <p:cNvPr id="18" name="TextBox 17"/>
-          <p:cNvSpPr txBox="1"/>
-          <p:nvPr/>
-        </p:nvSpPr>
-        <p:spPr>
-          <a:xfrm>
-            <a:off x="457200" y="6446520"/>
-            <a:ext cx="7315200" cy="320040"/>
-          </a:xfrm>
-          <a:prstGeom prst="rect">
-            <a:avLst/>
-          </a:prstGeom>
-          <a:noFill/>
-        </p:spPr>
-        <p:txBody>
-          <a:bodyPr wrap="square" anchor="t">
-            <a:spAutoFit/>
-          </a:bodyPr>
-          <a:lstStyle/>
-          <a:p>
-            <a:pPr algn="l">
-              <a:lnSpc>
-                <a:spcPct val="115000"/>
-              </a:lnSpc>
-            </a:pPr>
-            <a:r>
               <a:rPr sz="1000" b="0">
                 <a:solidFill>
                   <a:srgbClr val="6E8880"/>
@@ -6803,7 +6950,7 @@
       </p:sp>
       <p:sp>
         <p:nvSpPr>
-          <p:cNvPr id="19" name="TextBox 18"/>
+          <p:cNvPr id="9" name="TextBox 8"/>
           <p:cNvSpPr txBox="1"/>
           <p:nvPr/>
         </p:nvSpPr>
@@ -6881,7 +7028,7 @@
             <a:avLst/>
           </a:prstGeom>
           <a:solidFill>
-            <a:srgbClr val="0F766E"/>
+            <a:srgbClr val="1E3A34"/>
           </a:solidFill>
           <a:ln>
             <a:noFill/>
@@ -6940,11 +7087,11 @@
             <a:r>
               <a:rPr sz="1300" b="1">
                 <a:solidFill>
-                  <a:srgbClr val="0F766E"/>
-                </a:solidFill>
-                <a:latin typeface="Malgun Gothic"/>
-              </a:rPr>
-              <a:t>ARCHITECTURE</a:t>
+                  <a:srgbClr val="1E3A34"/>
+                </a:solidFill>
+                <a:latin typeface="Malgun Gothic"/>
+              </a:rPr>
+              <a:t>FEATURES · ADMIN</a:t>
             </a:r>
           </a:p>
         </p:txBody>
@@ -6983,7 +7130,7 @@
                 </a:solidFill>
                 <a:latin typeface="Malgun Gothic"/>
               </a:rPr>
-              <a:t>설계 원칙</a:t>
+              <a:t>핵심 기능 — 관리자</a:t>
             </a:r>
           </a:p>
         </p:txBody>
@@ -7034,58 +7181,206 @@
       </p:sp>
       <p:sp>
         <p:nvSpPr>
-          <p:cNvPr id="6" name="Oval 5"/>
-          <p:cNvSpPr/>
-          <p:nvPr/>
-        </p:nvSpPr>
-        <p:spPr>
-          <a:xfrm>
-            <a:off x="640080" y="1874519"/>
-            <a:ext cx="411480" cy="411480"/>
-          </a:xfrm>
-          <a:prstGeom prst="ellipse">
-            <a:avLst/>
-          </a:prstGeom>
-          <a:solidFill>
-            <a:srgbClr val="34D399"/>
-          </a:solidFill>
-          <a:ln>
-            <a:noFill/>
+          <p:cNvPr id="6" name="TextBox 5"/>
+          <p:cNvSpPr txBox="1"/>
+          <p:nvPr/>
+        </p:nvSpPr>
+        <p:spPr>
+          <a:xfrm>
+            <a:off x="640080" y="1828800"/>
+            <a:ext cx="5486400" cy="4572000"/>
+          </a:xfrm>
+          <a:prstGeom prst="rect">
+            <a:avLst/>
+          </a:prstGeom>
+          <a:noFill/>
+        </p:spPr>
+        <p:txBody>
+          <a:bodyPr wrap="square">
+            <a:spAutoFit/>
+          </a:bodyPr>
+          <a:lstStyle/>
+          <a:p>
+            <a:pPr>
+              <a:lnSpc>
+                <a:spcPct val="120000"/>
+              </a:lnSpc>
+              <a:spcAft>
+                <a:spcPts val="1000"/>
+              </a:spcAft>
+            </a:pPr>
+            <a:r>
+              <a:rPr sz="1600" b="0">
+                <a:solidFill>
+                  <a:srgbClr val="1F2E2A"/>
+                </a:solidFill>
+                <a:latin typeface="Malgun Gothic"/>
+              </a:rPr>
+              <a:t>•  고정 계정 로그인</a:t>
+            </a:r>
+          </a:p>
+          <a:p>
+            <a:pPr>
+              <a:spcAft>
+                <a:spcPts val="1000"/>
+              </a:spcAft>
+            </a:pPr>
+            <a:r>
+              <a:rPr sz="1300">
+                <a:solidFill>
+                  <a:srgbClr val="6E8880"/>
+                </a:solidFill>
+                <a:latin typeface="Malgun Gothic"/>
+              </a:rPr>
+              <a:t>     회원가입 없이 지정된 관리자 계정으로만 접근</a:t>
+            </a:r>
+          </a:p>
+          <a:p>
+            <a:pPr>
+              <a:lnSpc>
+                <a:spcPct val="120000"/>
+              </a:lnSpc>
+              <a:spcAft>
+                <a:spcPts val="1000"/>
+              </a:spcAft>
+            </a:pPr>
+            <a:r>
+              <a:rPr sz="1600" b="0">
+                <a:solidFill>
+                  <a:srgbClr val="1F2E2A"/>
+                </a:solidFill>
+                <a:latin typeface="Malgun Gothic"/>
+              </a:rPr>
+              <a:t>•  전체 통계 대시보드</a:t>
+            </a:r>
+          </a:p>
+          <a:p>
+            <a:pPr>
+              <a:spcAft>
+                <a:spcPts val="1000"/>
+              </a:spcAft>
+            </a:pPr>
+            <a:r>
+              <a:rPr sz="1300">
+                <a:solidFill>
+                  <a:srgbClr val="6E8880"/>
+                </a:solidFill>
+                <a:latin typeface="Malgun Gothic"/>
+              </a:rPr>
+              <a:t>     전체 회원 수 · 총 지출액 · 이번 달 지출 · 인기 카테고리 TOP 5</a:t>
+            </a:r>
+          </a:p>
+          <a:p>
+            <a:pPr>
+              <a:lnSpc>
+                <a:spcPct val="120000"/>
+              </a:lnSpc>
+              <a:spcAft>
+                <a:spcPts val="1000"/>
+              </a:spcAft>
+            </a:pPr>
+            <a:r>
+              <a:rPr sz="1600" b="0">
+                <a:solidFill>
+                  <a:srgbClr val="1F2E2A"/>
+                </a:solidFill>
+                <a:latin typeface="Malgun Gothic"/>
+              </a:rPr>
+              <a:t>•  회원 관리</a:t>
+            </a:r>
+          </a:p>
+          <a:p>
+            <a:pPr>
+              <a:spcAft>
+                <a:spcPts val="1000"/>
+              </a:spcAft>
+            </a:pPr>
+            <a:r>
+              <a:rPr sz="1300">
+                <a:solidFill>
+                  <a:srgbClr val="6E8880"/>
+                </a:solidFill>
+                <a:latin typeface="Malgun Gothic"/>
+              </a:rPr>
+              <a:t>     이름/이메일 검색, 계정 정지·해제, 상세 화면에서 최근 지출 5건 확인</a:t>
+            </a:r>
+          </a:p>
+          <a:p>
+            <a:pPr>
+              <a:lnSpc>
+                <a:spcPct val="120000"/>
+              </a:lnSpc>
+              <a:spcAft>
+                <a:spcPts val="1000"/>
+              </a:spcAft>
+            </a:pPr>
+            <a:r>
+              <a:rPr sz="1600" b="0">
+                <a:solidFill>
+                  <a:srgbClr val="1F2E2A"/>
+                </a:solidFill>
+                <a:latin typeface="Malgun Gothic"/>
+              </a:rPr>
+              <a:t>•  역할 분리</a:t>
+            </a:r>
+          </a:p>
+          <a:p>
+            <a:pPr>
+              <a:spcAft>
+                <a:spcPts val="1000"/>
+              </a:spcAft>
+            </a:pPr>
+            <a:r>
+              <a:rPr sz="1300">
+                <a:solidFill>
+                  <a:srgbClr val="6E8880"/>
+                </a:solidFill>
+                <a:latin typeface="Malgun Gothic"/>
+              </a:rPr>
+              <a:t>     관리자는 지출 데이터를 직접 등록하지 않고 조회·관리만 수행</a:t>
+            </a:r>
+          </a:p>
+        </p:txBody>
+      </p:sp>
+      <p:pic>
+        <p:nvPicPr>
+          <p:cNvPr id="7" name="Picture 6" descr="admin.png"/>
+          <p:cNvPicPr>
+            <a:picLocks noChangeAspect="1"/>
+          </p:cNvPicPr>
+          <p:nvPr/>
+        </p:nvPicPr>
+        <p:blipFill>
+          <a:blip r:embed="rId2"/>
+          <a:stretch>
+            <a:fillRect/>
+          </a:stretch>
+        </p:blipFill>
+        <p:spPr>
+          <a:xfrm>
+            <a:off x="6492240" y="2255520"/>
+            <a:ext cx="5029200" cy="3352800"/>
+          </a:xfrm>
+          <a:prstGeom prst="rect">
+            <a:avLst/>
+          </a:prstGeom>
+          <a:ln w="12700">
+            <a:solidFill>
+              <a:srgbClr val="DCEEE7"/>
+            </a:solidFill>
           </a:ln>
-          <a:effectLst/>
-        </p:spPr>
-        <p:style>
-          <a:lnRef idx="1">
-            <a:schemeClr val="accent1"/>
-          </a:lnRef>
-          <a:fillRef idx="3">
-            <a:schemeClr val="accent1"/>
-          </a:fillRef>
-          <a:effectRef idx="2">
-            <a:schemeClr val="accent1"/>
-          </a:effectRef>
-          <a:fontRef idx="minor">
-            <a:schemeClr val="lt1"/>
-          </a:fontRef>
-        </p:style>
-        <p:txBody>
-          <a:bodyPr rtlCol="0" anchor="ctr"/>
-          <a:lstStyle/>
-          <a:p>
-            <a:pPr algn="ctr"/>
-          </a:p>
-        </p:txBody>
-      </p:sp>
-      <p:sp>
-        <p:nvSpPr>
-          <p:cNvPr id="7" name="TextBox 6"/>
+        </p:spPr>
+      </p:pic>
+      <p:sp>
+        <p:nvSpPr>
+          <p:cNvPr id="8" name="TextBox 7"/>
           <p:cNvSpPr txBox="1"/>
           <p:nvPr/>
         </p:nvSpPr>
         <p:spPr>
           <a:xfrm>
-            <a:off x="640080" y="1892807"/>
-            <a:ext cx="411480" cy="365760"/>
+            <a:off x="457200" y="6446520"/>
+            <a:ext cx="7315200" cy="320040"/>
           </a:xfrm>
           <a:prstGeom prst="rect">
             <a:avLst/>
@@ -7098,58 +7393,19 @@
           </a:bodyPr>
           <a:lstStyle/>
           <a:p>
-            <a:pPr algn="ctr">
+            <a:pPr algn="l">
               <a:lnSpc>
                 <a:spcPct val="115000"/>
               </a:lnSpc>
             </a:pPr>
             <a:r>
-              <a:rPr sz="1600" b="1">
-                <a:solidFill>
-                  <a:srgbClr val="FFFFFF"/>
-                </a:solidFill>
-                <a:latin typeface="Malgun Gothic"/>
-              </a:rPr>
-              <a:t>1</a:t>
-            </a:r>
-          </a:p>
-        </p:txBody>
-      </p:sp>
-      <p:sp>
-        <p:nvSpPr>
-          <p:cNvPr id="8" name="TextBox 7"/>
-          <p:cNvSpPr txBox="1"/>
-          <p:nvPr/>
-        </p:nvSpPr>
-        <p:spPr>
-          <a:xfrm>
-            <a:off x="1234440" y="1847087"/>
-            <a:ext cx="3840480" cy="457200"/>
-          </a:xfrm>
-          <a:prstGeom prst="rect">
-            <a:avLst/>
-          </a:prstGeom>
-          <a:noFill/>
-        </p:spPr>
-        <p:txBody>
-          <a:bodyPr wrap="square" anchor="t">
-            <a:spAutoFit/>
-          </a:bodyPr>
-          <a:lstStyle/>
-          <a:p>
-            <a:pPr algn="l">
-              <a:lnSpc>
-                <a:spcPct val="115000"/>
-              </a:lnSpc>
-            </a:pPr>
-            <a:r>
-              <a:rPr sz="1600" b="1">
-                <a:solidFill>
-                  <a:srgbClr val="0F766E"/>
-                </a:solidFill>
-                <a:latin typeface="Malgun Gothic"/>
-              </a:rPr>
-              <a:t>코로케이션 (Colocation)</a:t>
+              <a:rPr sz="1000" b="0">
+                <a:solidFill>
+                  <a:srgbClr val="6E8880"/>
+                </a:solidFill>
+                <a:latin typeface="Malgun Gothic"/>
+              </a:rPr>
+              <a:t>EXPENSE TRACKER · PORTFOLIO</a:t>
             </a:r>
           </a:p>
         </p:txBody>
@@ -7157,567 +7413,6 @@
       <p:sp>
         <p:nvSpPr>
           <p:cNvPr id="9" name="TextBox 8"/>
-          <p:cNvSpPr txBox="1"/>
-          <p:nvPr/>
-        </p:nvSpPr>
-        <p:spPr>
-          <a:xfrm>
-            <a:off x="1234440" y="2258567"/>
-            <a:ext cx="10241280" cy="640080"/>
-          </a:xfrm>
-          <a:prstGeom prst="rect">
-            <a:avLst/>
-          </a:prstGeom>
-          <a:noFill/>
-        </p:spPr>
-        <p:txBody>
-          <a:bodyPr wrap="square" anchor="t">
-            <a:spAutoFit/>
-          </a:bodyPr>
-          <a:lstStyle/>
-          <a:p>
-            <a:pPr algn="l">
-              <a:lnSpc>
-                <a:spcPct val="115000"/>
-              </a:lnSpc>
-            </a:pPr>
-            <a:r>
-              <a:rPr sz="1300" b="0">
-                <a:solidFill>
-                  <a:srgbClr val="4B6259"/>
-                </a:solidFill>
-                <a:latin typeface="Malgun Gothic"/>
-              </a:rPr>
-              <a:t>각 페이지의 HTML·CSS·JS를 같은 디렉토리에 평탄하게 배치 — "이 기능을 고치려면 어느 폴더를 보면 되는가?"에 즉시 답할 수 있는 구조</a:t>
-            </a:r>
-          </a:p>
-        </p:txBody>
-      </p:sp>
-      <p:sp>
-        <p:nvSpPr>
-          <p:cNvPr id="10" name="Oval 9"/>
-          <p:cNvSpPr/>
-          <p:nvPr/>
-        </p:nvSpPr>
-        <p:spPr>
-          <a:xfrm>
-            <a:off x="640080" y="2990087"/>
-            <a:ext cx="411480" cy="411480"/>
-          </a:xfrm>
-          <a:prstGeom prst="ellipse">
-            <a:avLst/>
-          </a:prstGeom>
-          <a:solidFill>
-            <a:srgbClr val="34D399"/>
-          </a:solidFill>
-          <a:ln>
-            <a:noFill/>
-          </a:ln>
-          <a:effectLst/>
-        </p:spPr>
-        <p:style>
-          <a:lnRef idx="1">
-            <a:schemeClr val="accent1"/>
-          </a:lnRef>
-          <a:fillRef idx="3">
-            <a:schemeClr val="accent1"/>
-          </a:fillRef>
-          <a:effectRef idx="2">
-            <a:schemeClr val="accent1"/>
-          </a:effectRef>
-          <a:fontRef idx="minor">
-            <a:schemeClr val="lt1"/>
-          </a:fontRef>
-        </p:style>
-        <p:txBody>
-          <a:bodyPr rtlCol="0" anchor="ctr"/>
-          <a:lstStyle/>
-          <a:p>
-            <a:pPr algn="ctr"/>
-          </a:p>
-        </p:txBody>
-      </p:sp>
-      <p:sp>
-        <p:nvSpPr>
-          <p:cNvPr id="11" name="TextBox 10"/>
-          <p:cNvSpPr txBox="1"/>
-          <p:nvPr/>
-        </p:nvSpPr>
-        <p:spPr>
-          <a:xfrm>
-            <a:off x="640080" y="3008375"/>
-            <a:ext cx="411480" cy="365760"/>
-          </a:xfrm>
-          <a:prstGeom prst="rect">
-            <a:avLst/>
-          </a:prstGeom>
-          <a:noFill/>
-        </p:spPr>
-        <p:txBody>
-          <a:bodyPr wrap="square" anchor="t">
-            <a:spAutoFit/>
-          </a:bodyPr>
-          <a:lstStyle/>
-          <a:p>
-            <a:pPr algn="ctr">
-              <a:lnSpc>
-                <a:spcPct val="115000"/>
-              </a:lnSpc>
-            </a:pPr>
-            <a:r>
-              <a:rPr sz="1600" b="1">
-                <a:solidFill>
-                  <a:srgbClr val="FFFFFF"/>
-                </a:solidFill>
-                <a:latin typeface="Malgun Gothic"/>
-              </a:rPr>
-              <a:t>2</a:t>
-            </a:r>
-          </a:p>
-        </p:txBody>
-      </p:sp>
-      <p:sp>
-        <p:nvSpPr>
-          <p:cNvPr id="12" name="TextBox 11"/>
-          <p:cNvSpPr txBox="1"/>
-          <p:nvPr/>
-        </p:nvSpPr>
-        <p:spPr>
-          <a:xfrm>
-            <a:off x="1234440" y="2962655"/>
-            <a:ext cx="3840480" cy="457200"/>
-          </a:xfrm>
-          <a:prstGeom prst="rect">
-            <a:avLst/>
-          </a:prstGeom>
-          <a:noFill/>
-        </p:spPr>
-        <p:txBody>
-          <a:bodyPr wrap="square" anchor="t">
-            <a:spAutoFit/>
-          </a:bodyPr>
-          <a:lstStyle/>
-          <a:p>
-            <a:pPr algn="l">
-              <a:lnSpc>
-                <a:spcPct val="115000"/>
-              </a:lnSpc>
-            </a:pPr>
-            <a:r>
-              <a:rPr sz="1600" b="1">
-                <a:solidFill>
-                  <a:srgbClr val="0F766E"/>
-                </a:solidFill>
-                <a:latin typeface="Malgun Gothic"/>
-              </a:rPr>
-              <a:t>역할별 분리</a:t>
-            </a:r>
-          </a:p>
-        </p:txBody>
-      </p:sp>
-      <p:sp>
-        <p:nvSpPr>
-          <p:cNvPr id="13" name="TextBox 12"/>
-          <p:cNvSpPr txBox="1"/>
-          <p:nvPr/>
-        </p:nvSpPr>
-        <p:spPr>
-          <a:xfrm>
-            <a:off x="1234440" y="3374135"/>
-            <a:ext cx="10241280" cy="640080"/>
-          </a:xfrm>
-          <a:prstGeom prst="rect">
-            <a:avLst/>
-          </a:prstGeom>
-          <a:noFill/>
-        </p:spPr>
-        <p:txBody>
-          <a:bodyPr wrap="square" anchor="t">
-            <a:spAutoFit/>
-          </a:bodyPr>
-          <a:lstStyle/>
-          <a:p>
-            <a:pPr algn="l">
-              <a:lnSpc>
-                <a:spcPct val="115000"/>
-              </a:lnSpc>
-            </a:pPr>
-            <a:r>
-              <a:rPr sz="1300" b="0">
-                <a:solidFill>
-                  <a:srgbClr val="4B6259"/>
-                </a:solidFill>
-                <a:latin typeface="Malgun Gothic"/>
-              </a:rPr>
-              <a:t>고객은 루트(/, /auth, /expenses, /stats), 관리자는 /admin 하위로 완전히 분리하되 동일한 데이터 계층(js/utils.js)을 공유</a:t>
-            </a:r>
-          </a:p>
-        </p:txBody>
-      </p:sp>
-      <p:sp>
-        <p:nvSpPr>
-          <p:cNvPr id="14" name="Oval 13"/>
-          <p:cNvSpPr/>
-          <p:nvPr/>
-        </p:nvSpPr>
-        <p:spPr>
-          <a:xfrm>
-            <a:off x="640080" y="4105655"/>
-            <a:ext cx="411480" cy="411480"/>
-          </a:xfrm>
-          <a:prstGeom prst="ellipse">
-            <a:avLst/>
-          </a:prstGeom>
-          <a:solidFill>
-            <a:srgbClr val="34D399"/>
-          </a:solidFill>
-          <a:ln>
-            <a:noFill/>
-          </a:ln>
-          <a:effectLst/>
-        </p:spPr>
-        <p:style>
-          <a:lnRef idx="1">
-            <a:schemeClr val="accent1"/>
-          </a:lnRef>
-          <a:fillRef idx="3">
-            <a:schemeClr val="accent1"/>
-          </a:fillRef>
-          <a:effectRef idx="2">
-            <a:schemeClr val="accent1"/>
-          </a:effectRef>
-          <a:fontRef idx="minor">
-            <a:schemeClr val="lt1"/>
-          </a:fontRef>
-        </p:style>
-        <p:txBody>
-          <a:bodyPr rtlCol="0" anchor="ctr"/>
-          <a:lstStyle/>
-          <a:p>
-            <a:pPr algn="ctr"/>
-          </a:p>
-        </p:txBody>
-      </p:sp>
-      <p:sp>
-        <p:nvSpPr>
-          <p:cNvPr id="15" name="TextBox 14"/>
-          <p:cNvSpPr txBox="1"/>
-          <p:nvPr/>
-        </p:nvSpPr>
-        <p:spPr>
-          <a:xfrm>
-            <a:off x="640080" y="4123943"/>
-            <a:ext cx="411480" cy="365760"/>
-          </a:xfrm>
-          <a:prstGeom prst="rect">
-            <a:avLst/>
-          </a:prstGeom>
-          <a:noFill/>
-        </p:spPr>
-        <p:txBody>
-          <a:bodyPr wrap="square" anchor="t">
-            <a:spAutoFit/>
-          </a:bodyPr>
-          <a:lstStyle/>
-          <a:p>
-            <a:pPr algn="ctr">
-              <a:lnSpc>
-                <a:spcPct val="115000"/>
-              </a:lnSpc>
-            </a:pPr>
-            <a:r>
-              <a:rPr sz="1600" b="1">
-                <a:solidFill>
-                  <a:srgbClr val="FFFFFF"/>
-                </a:solidFill>
-                <a:latin typeface="Malgun Gothic"/>
-              </a:rPr>
-              <a:t>3</a:t>
-            </a:r>
-          </a:p>
-        </p:txBody>
-      </p:sp>
-      <p:sp>
-        <p:nvSpPr>
-          <p:cNvPr id="16" name="TextBox 15"/>
-          <p:cNvSpPr txBox="1"/>
-          <p:nvPr/>
-        </p:nvSpPr>
-        <p:spPr>
-          <a:xfrm>
-            <a:off x="1234440" y="4078223"/>
-            <a:ext cx="3840480" cy="457200"/>
-          </a:xfrm>
-          <a:prstGeom prst="rect">
-            <a:avLst/>
-          </a:prstGeom>
-          <a:noFill/>
-        </p:spPr>
-        <p:txBody>
-          <a:bodyPr wrap="square" anchor="t">
-            <a:spAutoFit/>
-          </a:bodyPr>
-          <a:lstStyle/>
-          <a:p>
-            <a:pPr algn="l">
-              <a:lnSpc>
-                <a:spcPct val="115000"/>
-              </a:lnSpc>
-            </a:pPr>
-            <a:r>
-              <a:rPr sz="1600" b="1">
-                <a:solidFill>
-                  <a:srgbClr val="0F766E"/>
-                </a:solidFill>
-                <a:latin typeface="Malgun Gothic"/>
-              </a:rPr>
-              <a:t>클린 URL</a:t>
-            </a:r>
-          </a:p>
-        </p:txBody>
-      </p:sp>
-      <p:sp>
-        <p:nvSpPr>
-          <p:cNvPr id="17" name="TextBox 16"/>
-          <p:cNvSpPr txBox="1"/>
-          <p:nvPr/>
-        </p:nvSpPr>
-        <p:spPr>
-          <a:xfrm>
-            <a:off x="1234440" y="4489703"/>
-            <a:ext cx="10241280" cy="640080"/>
-          </a:xfrm>
-          <a:prstGeom prst="rect">
-            <a:avLst/>
-          </a:prstGeom>
-          <a:noFill/>
-        </p:spPr>
-        <p:txBody>
-          <a:bodyPr wrap="square" anchor="t">
-            <a:spAutoFit/>
-          </a:bodyPr>
-          <a:lstStyle/>
-          <a:p>
-            <a:pPr algn="l">
-              <a:lnSpc>
-                <a:spcPct val="115000"/>
-              </a:lnSpc>
-            </a:pPr>
-            <a:r>
-              <a:rPr sz="1300" b="0">
-                <a:solidFill>
-                  <a:srgbClr val="4B6259"/>
-                </a:solidFill>
-                <a:latin typeface="Malgun Gothic"/>
-              </a:rPr>
-              <a:t>list / create / edit / index 등 목적이 드러나는 명확한 경로 설계</a:t>
-            </a:r>
-          </a:p>
-        </p:txBody>
-      </p:sp>
-      <p:sp>
-        <p:nvSpPr>
-          <p:cNvPr id="18" name="Oval 17"/>
-          <p:cNvSpPr/>
-          <p:nvPr/>
-        </p:nvSpPr>
-        <p:spPr>
-          <a:xfrm>
-            <a:off x="640080" y="5221223"/>
-            <a:ext cx="411480" cy="411480"/>
-          </a:xfrm>
-          <a:prstGeom prst="ellipse">
-            <a:avLst/>
-          </a:prstGeom>
-          <a:solidFill>
-            <a:srgbClr val="34D399"/>
-          </a:solidFill>
-          <a:ln>
-            <a:noFill/>
-          </a:ln>
-          <a:effectLst/>
-        </p:spPr>
-        <p:style>
-          <a:lnRef idx="1">
-            <a:schemeClr val="accent1"/>
-          </a:lnRef>
-          <a:fillRef idx="3">
-            <a:schemeClr val="accent1"/>
-          </a:fillRef>
-          <a:effectRef idx="2">
-            <a:schemeClr val="accent1"/>
-          </a:effectRef>
-          <a:fontRef idx="minor">
-            <a:schemeClr val="lt1"/>
-          </a:fontRef>
-        </p:style>
-        <p:txBody>
-          <a:bodyPr rtlCol="0" anchor="ctr"/>
-          <a:lstStyle/>
-          <a:p>
-            <a:pPr algn="ctr"/>
-          </a:p>
-        </p:txBody>
-      </p:sp>
-      <p:sp>
-        <p:nvSpPr>
-          <p:cNvPr id="19" name="TextBox 18"/>
-          <p:cNvSpPr txBox="1"/>
-          <p:nvPr/>
-        </p:nvSpPr>
-        <p:spPr>
-          <a:xfrm>
-            <a:off x="640080" y="5239511"/>
-            <a:ext cx="411480" cy="365760"/>
-          </a:xfrm>
-          <a:prstGeom prst="rect">
-            <a:avLst/>
-          </a:prstGeom>
-          <a:noFill/>
-        </p:spPr>
-        <p:txBody>
-          <a:bodyPr wrap="square" anchor="t">
-            <a:spAutoFit/>
-          </a:bodyPr>
-          <a:lstStyle/>
-          <a:p>
-            <a:pPr algn="ctr">
-              <a:lnSpc>
-                <a:spcPct val="115000"/>
-              </a:lnSpc>
-            </a:pPr>
-            <a:r>
-              <a:rPr sz="1600" b="1">
-                <a:solidFill>
-                  <a:srgbClr val="FFFFFF"/>
-                </a:solidFill>
-                <a:latin typeface="Malgun Gothic"/>
-              </a:rPr>
-              <a:t>4</a:t>
-            </a:r>
-          </a:p>
-        </p:txBody>
-      </p:sp>
-      <p:sp>
-        <p:nvSpPr>
-          <p:cNvPr id="20" name="TextBox 19"/>
-          <p:cNvSpPr txBox="1"/>
-          <p:nvPr/>
-        </p:nvSpPr>
-        <p:spPr>
-          <a:xfrm>
-            <a:off x="1234440" y="5193791"/>
-            <a:ext cx="3840480" cy="457200"/>
-          </a:xfrm>
-          <a:prstGeom prst="rect">
-            <a:avLst/>
-          </a:prstGeom>
-          <a:noFill/>
-        </p:spPr>
-        <p:txBody>
-          <a:bodyPr wrap="square" anchor="t">
-            <a:spAutoFit/>
-          </a:bodyPr>
-          <a:lstStyle/>
-          <a:p>
-            <a:pPr algn="l">
-              <a:lnSpc>
-                <a:spcPct val="115000"/>
-              </a:lnSpc>
-            </a:pPr>
-            <a:r>
-              <a:rPr sz="1600" b="1">
-                <a:solidFill>
-                  <a:srgbClr val="0F766E"/>
-                </a:solidFill>
-                <a:latin typeface="Malgun Gothic"/>
-              </a:rPr>
-              <a:t>고정 공통 데이터</a:t>
-            </a:r>
-          </a:p>
-        </p:txBody>
-      </p:sp>
-      <p:sp>
-        <p:nvSpPr>
-          <p:cNvPr id="21" name="TextBox 20"/>
-          <p:cNvSpPr txBox="1"/>
-          <p:nvPr/>
-        </p:nvSpPr>
-        <p:spPr>
-          <a:xfrm>
-            <a:off x="1234440" y="5605271"/>
-            <a:ext cx="10241280" cy="640080"/>
-          </a:xfrm>
-          <a:prstGeom prst="rect">
-            <a:avLst/>
-          </a:prstGeom>
-          <a:noFill/>
-        </p:spPr>
-        <p:txBody>
-          <a:bodyPr wrap="square" anchor="t">
-            <a:spAutoFit/>
-          </a:bodyPr>
-          <a:lstStyle/>
-          <a:p>
-            <a:pPr algn="l">
-              <a:lnSpc>
-                <a:spcPct val="115000"/>
-              </a:lnSpc>
-            </a:pPr>
-            <a:r>
-              <a:rPr sz="1300" b="0">
-                <a:solidFill>
-                  <a:srgbClr val="4B6259"/>
-                </a:solidFill>
-                <a:latin typeface="Malgun Gothic"/>
-              </a:rPr>
-              <a:t>카테고리는 CRUD 대상이 아닌 고정 참조 데이터로 취급해 데이터 일관성 보장</a:t>
-            </a:r>
-          </a:p>
-        </p:txBody>
-      </p:sp>
-      <p:sp>
-        <p:nvSpPr>
-          <p:cNvPr id="22" name="TextBox 21"/>
-          <p:cNvSpPr txBox="1"/>
-          <p:nvPr/>
-        </p:nvSpPr>
-        <p:spPr>
-          <a:xfrm>
-            <a:off x="457200" y="6446520"/>
-            <a:ext cx="7315200" cy="320040"/>
-          </a:xfrm>
-          <a:prstGeom prst="rect">
-            <a:avLst/>
-          </a:prstGeom>
-          <a:noFill/>
-        </p:spPr>
-        <p:txBody>
-          <a:bodyPr wrap="square" anchor="t">
-            <a:spAutoFit/>
-          </a:bodyPr>
-          <a:lstStyle/>
-          <a:p>
-            <a:pPr algn="l">
-              <a:lnSpc>
-                <a:spcPct val="115000"/>
-              </a:lnSpc>
-            </a:pPr>
-            <a:r>
-              <a:rPr sz="1000" b="0">
-                <a:solidFill>
-                  <a:srgbClr val="6E8880"/>
-                </a:solidFill>
-                <a:latin typeface="Malgun Gothic"/>
-              </a:rPr>
-              <a:t>EXPENSE TRACKER · PORTFOLIO</a:t>
-            </a:r>
-          </a:p>
-        </p:txBody>
-      </p:sp>
-      <p:sp>
-        <p:nvSpPr>
-          <p:cNvPr id="23" name="TextBox 22"/>
           <p:cNvSpPr txBox="1"/>
           <p:nvPr/>
         </p:nvSpPr>
@@ -7858,7 +7553,7 @@
                 </a:solidFill>
                 <a:latin typeface="Malgun Gothic"/>
               </a:rPr>
-              <a:t>DATA MODEL</a:t>
+              <a:t>ARCHITECTURE</a:t>
             </a:r>
           </a:p>
         </p:txBody>
@@ -7897,7 +7592,7 @@
                 </a:solidFill>
                 <a:latin typeface="Malgun Gothic"/>
               </a:rPr>
-              <a:t>데이터 모델 (ERD)</a:t>
+              <a:t>설계 원칙</a:t>
             </a:r>
           </a:p>
         </p:txBody>
@@ -7948,25 +7643,23 @@
       </p:sp>
       <p:sp>
         <p:nvSpPr>
-          <p:cNvPr id="6" name="Rectangle 5"/>
+          <p:cNvPr id="6" name="Oval 5"/>
           <p:cNvSpPr/>
           <p:nvPr/>
         </p:nvSpPr>
         <p:spPr>
           <a:xfrm>
-            <a:off x="640080" y="1920240"/>
-            <a:ext cx="3291840" cy="2651760"/>
-          </a:xfrm>
-          <a:prstGeom prst="rect">
+            <a:off x="640080" y="1874519"/>
+            <a:ext cx="411480" cy="411480"/>
+          </a:xfrm>
+          <a:prstGeom prst="ellipse">
             <a:avLst/>
           </a:prstGeom>
           <a:solidFill>
-            <a:srgbClr val="FFFFFF"/>
+            <a:srgbClr val="34D399"/>
           </a:solidFill>
-          <a:ln w="12700">
-            <a:solidFill>
-              <a:srgbClr val="DCEEE7"/>
-            </a:solidFill>
+          <a:ln>
+            <a:noFill/>
           </a:ln>
           <a:effectLst/>
         </p:spPr>
@@ -7994,20 +7687,137 @@
       </p:sp>
       <p:sp>
         <p:nvSpPr>
-          <p:cNvPr id="7" name="Rectangle 6"/>
+          <p:cNvPr id="7" name="TextBox 6"/>
+          <p:cNvSpPr txBox="1"/>
+          <p:nvPr/>
+        </p:nvSpPr>
+        <p:spPr>
+          <a:xfrm>
+            <a:off x="640080" y="1892807"/>
+            <a:ext cx="411480" cy="365760"/>
+          </a:xfrm>
+          <a:prstGeom prst="rect">
+            <a:avLst/>
+          </a:prstGeom>
+          <a:noFill/>
+        </p:spPr>
+        <p:txBody>
+          <a:bodyPr wrap="square" anchor="t">
+            <a:spAutoFit/>
+          </a:bodyPr>
+          <a:lstStyle/>
+          <a:p>
+            <a:pPr algn="ctr">
+              <a:lnSpc>
+                <a:spcPct val="115000"/>
+              </a:lnSpc>
+            </a:pPr>
+            <a:r>
+              <a:rPr sz="1600" b="1">
+                <a:solidFill>
+                  <a:srgbClr val="FFFFFF"/>
+                </a:solidFill>
+                <a:latin typeface="Malgun Gothic"/>
+              </a:rPr>
+              <a:t>1</a:t>
+            </a:r>
+          </a:p>
+        </p:txBody>
+      </p:sp>
+      <p:sp>
+        <p:nvSpPr>
+          <p:cNvPr id="8" name="TextBox 7"/>
+          <p:cNvSpPr txBox="1"/>
+          <p:nvPr/>
+        </p:nvSpPr>
+        <p:spPr>
+          <a:xfrm>
+            <a:off x="1234440" y="1847087"/>
+            <a:ext cx="3840480" cy="457200"/>
+          </a:xfrm>
+          <a:prstGeom prst="rect">
+            <a:avLst/>
+          </a:prstGeom>
+          <a:noFill/>
+        </p:spPr>
+        <p:txBody>
+          <a:bodyPr wrap="square" anchor="t">
+            <a:spAutoFit/>
+          </a:bodyPr>
+          <a:lstStyle/>
+          <a:p>
+            <a:pPr algn="l">
+              <a:lnSpc>
+                <a:spcPct val="115000"/>
+              </a:lnSpc>
+            </a:pPr>
+            <a:r>
+              <a:rPr sz="1600" b="1">
+                <a:solidFill>
+                  <a:srgbClr val="0F766E"/>
+                </a:solidFill>
+                <a:latin typeface="Malgun Gothic"/>
+              </a:rPr>
+              <a:t>코로케이션 (Colocation)</a:t>
+            </a:r>
+          </a:p>
+        </p:txBody>
+      </p:sp>
+      <p:sp>
+        <p:nvSpPr>
+          <p:cNvPr id="9" name="TextBox 8"/>
+          <p:cNvSpPr txBox="1"/>
+          <p:nvPr/>
+        </p:nvSpPr>
+        <p:spPr>
+          <a:xfrm>
+            <a:off x="1234440" y="2258567"/>
+            <a:ext cx="10241280" cy="640080"/>
+          </a:xfrm>
+          <a:prstGeom prst="rect">
+            <a:avLst/>
+          </a:prstGeom>
+          <a:noFill/>
+        </p:spPr>
+        <p:txBody>
+          <a:bodyPr wrap="square" anchor="t">
+            <a:spAutoFit/>
+          </a:bodyPr>
+          <a:lstStyle/>
+          <a:p>
+            <a:pPr algn="l">
+              <a:lnSpc>
+                <a:spcPct val="115000"/>
+              </a:lnSpc>
+            </a:pPr>
+            <a:r>
+              <a:rPr sz="1300" b="0">
+                <a:solidFill>
+                  <a:srgbClr val="4B6259"/>
+                </a:solidFill>
+                <a:latin typeface="Malgun Gothic"/>
+              </a:rPr>
+              <a:t>각 페이지의 HTML·CSS·JS를 같은 디렉토리에 평탄하게 배치 — "이 기능을 고치려면 어느 폴더를 보면 되는가?"에 즉시 답할 수 있는 구조</a:t>
+            </a:r>
+          </a:p>
+        </p:txBody>
+      </p:sp>
+      <p:sp>
+        <p:nvSpPr>
+          <p:cNvPr id="10" name="Oval 9"/>
           <p:cNvSpPr/>
           <p:nvPr/>
         </p:nvSpPr>
         <p:spPr>
           <a:xfrm>
-            <a:off x="640080" y="1920240"/>
-            <a:ext cx="3291840" cy="457200"/>
-          </a:xfrm>
-          <a:prstGeom prst="rect">
+            <a:off x="640080" y="2990087"/>
+            <a:ext cx="411480" cy="411480"/>
+          </a:xfrm>
+          <a:prstGeom prst="ellipse">
             <a:avLst/>
           </a:prstGeom>
           <a:solidFill>
-            <a:srgbClr val="0F766E"/>
+            <a:srgbClr val="34D399"/>
           </a:solidFill>
           <a:ln>
             <a:noFill/>
@@ -8038,14 +7848,14 @@
       </p:sp>
       <p:sp>
         <p:nvSpPr>
-          <p:cNvPr id="8" name="TextBox 7"/>
+          <p:cNvPr id="11" name="TextBox 10"/>
           <p:cNvSpPr txBox="1"/>
           <p:nvPr/>
         </p:nvSpPr>
         <p:spPr>
           <a:xfrm>
-            <a:off x="640080" y="1993392"/>
-            <a:ext cx="3291840" cy="365760"/>
+            <a:off x="640080" y="3008375"/>
+            <a:ext cx="411480" cy="365760"/>
           </a:xfrm>
           <a:prstGeom prst="rect">
             <a:avLst/>
@@ -8064,27 +7874,27 @@
               </a:lnSpc>
             </a:pPr>
             <a:r>
-              <a:rPr sz="1500" b="1">
+              <a:rPr sz="1600" b="1">
                 <a:solidFill>
                   <a:srgbClr val="FFFFFF"/>
                 </a:solidFill>
                 <a:latin typeface="Malgun Gothic"/>
               </a:rPr>
-              <a:t>profiles</a:t>
-            </a:r>
-          </a:p>
-        </p:txBody>
-      </p:sp>
-      <p:sp>
-        <p:nvSpPr>
-          <p:cNvPr id="9" name="TextBox 8"/>
+              <a:t>2</a:t>
+            </a:r>
+          </a:p>
+        </p:txBody>
+      </p:sp>
+      <p:sp>
+        <p:nvSpPr>
+          <p:cNvPr id="12" name="TextBox 11"/>
           <p:cNvSpPr txBox="1"/>
           <p:nvPr/>
         </p:nvSpPr>
         <p:spPr>
           <a:xfrm>
-            <a:off x="868680" y="2514600"/>
-            <a:ext cx="2834640" cy="292608"/>
+            <a:off x="1234440" y="2962655"/>
+            <a:ext cx="3840480" cy="457200"/>
           </a:xfrm>
           <a:prstGeom prst="rect">
             <a:avLst/>
@@ -8103,27 +7913,27 @@
               </a:lnSpc>
             </a:pPr>
             <a:r>
-              <a:rPr sz="1250" b="0">
-                <a:solidFill>
-                  <a:srgbClr val="4B6259"/>
-                </a:solidFill>
-                <a:latin typeface="Malgun Gothic"/>
-              </a:rPr>
-              <a:t>id (uuid, PK → auth.users)</a:t>
-            </a:r>
-          </a:p>
-        </p:txBody>
-      </p:sp>
-      <p:sp>
-        <p:nvSpPr>
-          <p:cNvPr id="10" name="TextBox 9"/>
+              <a:rPr sz="1600" b="1">
+                <a:solidFill>
+                  <a:srgbClr val="0F766E"/>
+                </a:solidFill>
+                <a:latin typeface="Malgun Gothic"/>
+              </a:rPr>
+              <a:t>역할별 분리</a:t>
+            </a:r>
+          </a:p>
+        </p:txBody>
+      </p:sp>
+      <p:sp>
+        <p:nvSpPr>
+          <p:cNvPr id="13" name="TextBox 12"/>
           <p:cNvSpPr txBox="1"/>
           <p:nvPr/>
         </p:nvSpPr>
         <p:spPr>
           <a:xfrm>
-            <a:off x="868680" y="2825496"/>
-            <a:ext cx="2834640" cy="292608"/>
+            <a:off x="1234440" y="3374135"/>
+            <a:ext cx="10241280" cy="640080"/>
           </a:xfrm>
           <a:prstGeom prst="rect">
             <a:avLst/>
@@ -8142,194 +7952,36 @@
               </a:lnSpc>
             </a:pPr>
             <a:r>
-              <a:rPr sz="1250" b="0">
+              <a:rPr sz="1300" b="0">
                 <a:solidFill>
                   <a:srgbClr val="4B6259"/>
                 </a:solidFill>
                 <a:latin typeface="Malgun Gothic"/>
               </a:rPr>
-              <a:t>name</a:t>
-            </a:r>
-          </a:p>
-        </p:txBody>
-      </p:sp>
-      <p:sp>
-        <p:nvSpPr>
-          <p:cNvPr id="11" name="TextBox 10"/>
-          <p:cNvSpPr txBox="1"/>
-          <p:nvPr/>
-        </p:nvSpPr>
-        <p:spPr>
-          <a:xfrm>
-            <a:off x="868680" y="3136392"/>
-            <a:ext cx="2834640" cy="292608"/>
-          </a:xfrm>
-          <a:prstGeom prst="rect">
-            <a:avLst/>
-          </a:prstGeom>
-          <a:noFill/>
-        </p:spPr>
-        <p:txBody>
-          <a:bodyPr wrap="square" anchor="t">
-            <a:spAutoFit/>
-          </a:bodyPr>
-          <a:lstStyle/>
-          <a:p>
-            <a:pPr algn="l">
-              <a:lnSpc>
-                <a:spcPct val="115000"/>
-              </a:lnSpc>
-            </a:pPr>
-            <a:r>
-              <a:rPr sz="1250" b="0">
-                <a:solidFill>
-                  <a:srgbClr val="4B6259"/>
-                </a:solidFill>
-                <a:latin typeface="Malgun Gothic"/>
-              </a:rPr>
-              <a:t>email (unique)</a:t>
-            </a:r>
-          </a:p>
-        </p:txBody>
-      </p:sp>
-      <p:sp>
-        <p:nvSpPr>
-          <p:cNvPr id="12" name="TextBox 11"/>
-          <p:cNvSpPr txBox="1"/>
-          <p:nvPr/>
-        </p:nvSpPr>
-        <p:spPr>
-          <a:xfrm>
-            <a:off x="868680" y="3447288"/>
-            <a:ext cx="2834640" cy="292608"/>
-          </a:xfrm>
-          <a:prstGeom prst="rect">
-            <a:avLst/>
-          </a:prstGeom>
-          <a:noFill/>
-        </p:spPr>
-        <p:txBody>
-          <a:bodyPr wrap="square" anchor="t">
-            <a:spAutoFit/>
-          </a:bodyPr>
-          <a:lstStyle/>
-          <a:p>
-            <a:pPr algn="l">
-              <a:lnSpc>
-                <a:spcPct val="115000"/>
-              </a:lnSpc>
-            </a:pPr>
-            <a:r>
-              <a:rPr sz="1250" b="0">
-                <a:solidFill>
-                  <a:srgbClr val="4B6259"/>
-                </a:solidFill>
-                <a:latin typeface="Malgun Gothic"/>
-              </a:rPr>
-              <a:t>role: customer | admin</a:t>
-            </a:r>
-          </a:p>
-        </p:txBody>
-      </p:sp>
-      <p:sp>
-        <p:nvSpPr>
-          <p:cNvPr id="13" name="TextBox 12"/>
-          <p:cNvSpPr txBox="1"/>
-          <p:nvPr/>
-        </p:nvSpPr>
-        <p:spPr>
-          <a:xfrm>
-            <a:off x="868680" y="3758184"/>
-            <a:ext cx="2834640" cy="292608"/>
-          </a:xfrm>
-          <a:prstGeom prst="rect">
-            <a:avLst/>
-          </a:prstGeom>
-          <a:noFill/>
-        </p:spPr>
-        <p:txBody>
-          <a:bodyPr wrap="square" anchor="t">
-            <a:spAutoFit/>
-          </a:bodyPr>
-          <a:lstStyle/>
-          <a:p>
-            <a:pPr algn="l">
-              <a:lnSpc>
-                <a:spcPct val="115000"/>
-              </a:lnSpc>
-            </a:pPr>
-            <a:r>
-              <a:rPr sz="1250" b="0">
-                <a:solidFill>
-                  <a:srgbClr val="4B6259"/>
-                </a:solidFill>
-                <a:latin typeface="Malgun Gothic"/>
-              </a:rPr>
-              <a:t>status: active | suspended</a:t>
-            </a:r>
-          </a:p>
-        </p:txBody>
-      </p:sp>
-      <p:sp>
-        <p:nvSpPr>
-          <p:cNvPr id="14" name="TextBox 13"/>
-          <p:cNvSpPr txBox="1"/>
-          <p:nvPr/>
-        </p:nvSpPr>
-        <p:spPr>
-          <a:xfrm>
-            <a:off x="868680" y="4069080"/>
-            <a:ext cx="2834640" cy="292608"/>
-          </a:xfrm>
-          <a:prstGeom prst="rect">
-            <a:avLst/>
-          </a:prstGeom>
-          <a:noFill/>
-        </p:spPr>
-        <p:txBody>
-          <a:bodyPr wrap="square" anchor="t">
-            <a:spAutoFit/>
-          </a:bodyPr>
-          <a:lstStyle/>
-          <a:p>
-            <a:pPr algn="l">
-              <a:lnSpc>
-                <a:spcPct val="115000"/>
-              </a:lnSpc>
-            </a:pPr>
-            <a:r>
-              <a:rPr sz="1250" b="0">
-                <a:solidFill>
-                  <a:srgbClr val="4B6259"/>
-                </a:solidFill>
-                <a:latin typeface="Malgun Gothic"/>
-              </a:rPr>
-              <a:t>created_at</a:t>
-            </a:r>
-          </a:p>
-        </p:txBody>
-      </p:sp>
-      <p:sp>
-        <p:nvSpPr>
-          <p:cNvPr id="15" name="Rectangle 14"/>
+              <a:t>고객은 루트(/, /auth, /expenses, /stats), 관리자는 /admin 하위로 완전히 분리하되 동일한 데이터 계층(js/utils.js)을 공유</a:t>
+            </a:r>
+          </a:p>
+        </p:txBody>
+      </p:sp>
+      <p:sp>
+        <p:nvSpPr>
+          <p:cNvPr id="14" name="Oval 13"/>
           <p:cNvSpPr/>
           <p:nvPr/>
         </p:nvSpPr>
         <p:spPr>
           <a:xfrm>
-            <a:off x="4480560" y="1920240"/>
-            <a:ext cx="3291840" cy="2651760"/>
-          </a:xfrm>
-          <a:prstGeom prst="rect">
+            <a:off x="640080" y="4105655"/>
+            <a:ext cx="411480" cy="411480"/>
+          </a:xfrm>
+          <a:prstGeom prst="ellipse">
             <a:avLst/>
           </a:prstGeom>
           <a:solidFill>
-            <a:srgbClr val="FFFFFF"/>
+            <a:srgbClr val="34D399"/>
           </a:solidFill>
-          <a:ln w="12700">
-            <a:solidFill>
-              <a:srgbClr val="DCEEE7"/>
-            </a:solidFill>
+          <a:ln>
+            <a:noFill/>
           </a:ln>
           <a:effectLst/>
         </p:spPr>
@@ -8357,20 +8009,137 @@
       </p:sp>
       <p:sp>
         <p:nvSpPr>
-          <p:cNvPr id="16" name="Rectangle 15"/>
+          <p:cNvPr id="15" name="TextBox 14"/>
+          <p:cNvSpPr txBox="1"/>
+          <p:nvPr/>
+        </p:nvSpPr>
+        <p:spPr>
+          <a:xfrm>
+            <a:off x="640080" y="4123943"/>
+            <a:ext cx="411480" cy="365760"/>
+          </a:xfrm>
+          <a:prstGeom prst="rect">
+            <a:avLst/>
+          </a:prstGeom>
+          <a:noFill/>
+        </p:spPr>
+        <p:txBody>
+          <a:bodyPr wrap="square" anchor="t">
+            <a:spAutoFit/>
+          </a:bodyPr>
+          <a:lstStyle/>
+          <a:p>
+            <a:pPr algn="ctr">
+              <a:lnSpc>
+                <a:spcPct val="115000"/>
+              </a:lnSpc>
+            </a:pPr>
+            <a:r>
+              <a:rPr sz="1600" b="1">
+                <a:solidFill>
+                  <a:srgbClr val="FFFFFF"/>
+                </a:solidFill>
+                <a:latin typeface="Malgun Gothic"/>
+              </a:rPr>
+              <a:t>3</a:t>
+            </a:r>
+          </a:p>
+        </p:txBody>
+      </p:sp>
+      <p:sp>
+        <p:nvSpPr>
+          <p:cNvPr id="16" name="TextBox 15"/>
+          <p:cNvSpPr txBox="1"/>
+          <p:nvPr/>
+        </p:nvSpPr>
+        <p:spPr>
+          <a:xfrm>
+            <a:off x="1234440" y="4078223"/>
+            <a:ext cx="3840480" cy="457200"/>
+          </a:xfrm>
+          <a:prstGeom prst="rect">
+            <a:avLst/>
+          </a:prstGeom>
+          <a:noFill/>
+        </p:spPr>
+        <p:txBody>
+          <a:bodyPr wrap="square" anchor="t">
+            <a:spAutoFit/>
+          </a:bodyPr>
+          <a:lstStyle/>
+          <a:p>
+            <a:pPr algn="l">
+              <a:lnSpc>
+                <a:spcPct val="115000"/>
+              </a:lnSpc>
+            </a:pPr>
+            <a:r>
+              <a:rPr sz="1600" b="1">
+                <a:solidFill>
+                  <a:srgbClr val="0F766E"/>
+                </a:solidFill>
+                <a:latin typeface="Malgun Gothic"/>
+              </a:rPr>
+              <a:t>클린 URL</a:t>
+            </a:r>
+          </a:p>
+        </p:txBody>
+      </p:sp>
+      <p:sp>
+        <p:nvSpPr>
+          <p:cNvPr id="17" name="TextBox 16"/>
+          <p:cNvSpPr txBox="1"/>
+          <p:nvPr/>
+        </p:nvSpPr>
+        <p:spPr>
+          <a:xfrm>
+            <a:off x="1234440" y="4489703"/>
+            <a:ext cx="10241280" cy="640080"/>
+          </a:xfrm>
+          <a:prstGeom prst="rect">
+            <a:avLst/>
+          </a:prstGeom>
+          <a:noFill/>
+        </p:spPr>
+        <p:txBody>
+          <a:bodyPr wrap="square" anchor="t">
+            <a:spAutoFit/>
+          </a:bodyPr>
+          <a:lstStyle/>
+          <a:p>
+            <a:pPr algn="l">
+              <a:lnSpc>
+                <a:spcPct val="115000"/>
+              </a:lnSpc>
+            </a:pPr>
+            <a:r>
+              <a:rPr sz="1300" b="0">
+                <a:solidFill>
+                  <a:srgbClr val="4B6259"/>
+                </a:solidFill>
+                <a:latin typeface="Malgun Gothic"/>
+              </a:rPr>
+              <a:t>list / create / edit / index 등 목적이 드러나는 명확한 경로 설계</a:t>
+            </a:r>
+          </a:p>
+        </p:txBody>
+      </p:sp>
+      <p:sp>
+        <p:nvSpPr>
+          <p:cNvPr id="18" name="Oval 17"/>
           <p:cNvSpPr/>
           <p:nvPr/>
         </p:nvSpPr>
         <p:spPr>
           <a:xfrm>
-            <a:off x="4480560" y="1920240"/>
-            <a:ext cx="3291840" cy="457200"/>
-          </a:xfrm>
-          <a:prstGeom prst="rect">
+            <a:off x="640080" y="5221223"/>
+            <a:ext cx="411480" cy="411480"/>
+          </a:xfrm>
+          <a:prstGeom prst="ellipse">
             <a:avLst/>
           </a:prstGeom>
           <a:solidFill>
-            <a:srgbClr val="0F766E"/>
+            <a:srgbClr val="34D399"/>
           </a:solidFill>
           <a:ln>
             <a:noFill/>
@@ -8401,14 +8170,14 @@
       </p:sp>
       <p:sp>
         <p:nvSpPr>
-          <p:cNvPr id="17" name="TextBox 16"/>
+          <p:cNvPr id="19" name="TextBox 18"/>
           <p:cNvSpPr txBox="1"/>
           <p:nvPr/>
         </p:nvSpPr>
         <p:spPr>
           <a:xfrm>
-            <a:off x="4480560" y="1993392"/>
-            <a:ext cx="3291840" cy="365760"/>
+            <a:off x="640080" y="5239511"/>
+            <a:ext cx="411480" cy="365760"/>
           </a:xfrm>
           <a:prstGeom prst="rect">
             <a:avLst/>
@@ -8427,27 +8196,27 @@
               </a:lnSpc>
             </a:pPr>
             <a:r>
-              <a:rPr sz="1500" b="1">
+              <a:rPr sz="1600" b="1">
                 <a:solidFill>
                   <a:srgbClr val="FFFFFF"/>
                 </a:solidFill>
                 <a:latin typeface="Malgun Gothic"/>
               </a:rPr>
-              <a:t>expenses</a:t>
-            </a:r>
-          </a:p>
-        </p:txBody>
-      </p:sp>
-      <p:sp>
-        <p:nvSpPr>
-          <p:cNvPr id="18" name="TextBox 17"/>
+              <a:t>4</a:t>
+            </a:r>
+          </a:p>
+        </p:txBody>
+      </p:sp>
+      <p:sp>
+        <p:nvSpPr>
+          <p:cNvPr id="20" name="TextBox 19"/>
           <p:cNvSpPr txBox="1"/>
           <p:nvPr/>
         </p:nvSpPr>
         <p:spPr>
           <a:xfrm>
-            <a:off x="4709160" y="2514600"/>
-            <a:ext cx="2834640" cy="292608"/>
+            <a:off x="1234440" y="5193791"/>
+            <a:ext cx="3840480" cy="457200"/>
           </a:xfrm>
           <a:prstGeom prst="rect">
             <a:avLst/>
@@ -8466,27 +8235,27 @@
               </a:lnSpc>
             </a:pPr>
             <a:r>
-              <a:rPr sz="1250" b="0">
-                <a:solidFill>
-                  <a:srgbClr val="4B6259"/>
-                </a:solidFill>
-                <a:latin typeface="Malgun Gothic"/>
-              </a:rPr>
-              <a:t>id (uuid, PK)</a:t>
-            </a:r>
-          </a:p>
-        </p:txBody>
-      </p:sp>
-      <p:sp>
-        <p:nvSpPr>
-          <p:cNvPr id="19" name="TextBox 18"/>
+              <a:rPr sz="1600" b="1">
+                <a:solidFill>
+                  <a:srgbClr val="0F766E"/>
+                </a:solidFill>
+                <a:latin typeface="Malgun Gothic"/>
+              </a:rPr>
+              <a:t>고정 공통 데이터</a:t>
+            </a:r>
+          </a:p>
+        </p:txBody>
+      </p:sp>
+      <p:sp>
+        <p:nvSpPr>
+          <p:cNvPr id="21" name="TextBox 20"/>
           <p:cNvSpPr txBox="1"/>
           <p:nvPr/>
         </p:nvSpPr>
         <p:spPr>
           <a:xfrm>
-            <a:off x="4709160" y="2825496"/>
-            <a:ext cx="2834640" cy="292608"/>
+            <a:off x="1234440" y="5605271"/>
+            <a:ext cx="10241280" cy="640080"/>
           </a:xfrm>
           <a:prstGeom prst="rect">
             <a:avLst/>
@@ -8505,27 +8274,27 @@
               </a:lnSpc>
             </a:pPr>
             <a:r>
-              <a:rPr sz="1250" b="0">
+              <a:rPr sz="1300" b="0">
                 <a:solidFill>
                   <a:srgbClr val="4B6259"/>
                 </a:solidFill>
                 <a:latin typeface="Malgun Gothic"/>
               </a:rPr>
-              <a:t>user_id (FK → profiles)</a:t>
-            </a:r>
-          </a:p>
-        </p:txBody>
-      </p:sp>
-      <p:sp>
-        <p:nvSpPr>
-          <p:cNvPr id="20" name="TextBox 19"/>
+              <a:t>카테고리는 CRUD 대상이 아닌 고정 참조 데이터로 취급해 데이터 일관성 보장</a:t>
+            </a:r>
+          </a:p>
+        </p:txBody>
+      </p:sp>
+      <p:sp>
+        <p:nvSpPr>
+          <p:cNvPr id="22" name="TextBox 21"/>
           <p:cNvSpPr txBox="1"/>
           <p:nvPr/>
         </p:nvSpPr>
         <p:spPr>
           <a:xfrm>
-            <a:off x="4709160" y="3136392"/>
-            <a:ext cx="2834640" cy="292608"/>
+            <a:off x="457200" y="6446520"/>
+            <a:ext cx="7315200" cy="320040"/>
           </a:xfrm>
           <a:prstGeom prst="rect">
             <a:avLst/>
@@ -8544,91 +8313,13 @@
               </a:lnSpc>
             </a:pPr>
             <a:r>
-              <a:rPr sz="1250" b="0">
-                <a:solidFill>
-                  <a:srgbClr val="4B6259"/>
-                </a:solidFill>
-                <a:latin typeface="Malgun Gothic"/>
-              </a:rPr>
-              <a:t>category_id (FK → categories)</a:t>
-            </a:r>
-          </a:p>
-        </p:txBody>
-      </p:sp>
-      <p:sp>
-        <p:nvSpPr>
-          <p:cNvPr id="21" name="TextBox 20"/>
-          <p:cNvSpPr txBox="1"/>
-          <p:nvPr/>
-        </p:nvSpPr>
-        <p:spPr>
-          <a:xfrm>
-            <a:off x="4709160" y="3447288"/>
-            <a:ext cx="2834640" cy="292608"/>
-          </a:xfrm>
-          <a:prstGeom prst="rect">
-            <a:avLst/>
-          </a:prstGeom>
-          <a:noFill/>
-        </p:spPr>
-        <p:txBody>
-          <a:bodyPr wrap="square" anchor="t">
-            <a:spAutoFit/>
-          </a:bodyPr>
-          <a:lstStyle/>
-          <a:p>
-            <a:pPr algn="l">
-              <a:lnSpc>
-                <a:spcPct val="115000"/>
-              </a:lnSpc>
-            </a:pPr>
-            <a:r>
-              <a:rPr sz="1250" b="0">
-                <a:solidFill>
-                  <a:srgbClr val="4B6259"/>
-                </a:solidFill>
-                <a:latin typeface="Malgun Gothic"/>
-              </a:rPr>
-              <a:t>amount (numeric, &gt;0)</a:t>
-            </a:r>
-          </a:p>
-        </p:txBody>
-      </p:sp>
-      <p:sp>
-        <p:nvSpPr>
-          <p:cNvPr id="22" name="TextBox 21"/>
-          <p:cNvSpPr txBox="1"/>
-          <p:nvPr/>
-        </p:nvSpPr>
-        <p:spPr>
-          <a:xfrm>
-            <a:off x="4709160" y="3758184"/>
-            <a:ext cx="2834640" cy="292608"/>
-          </a:xfrm>
-          <a:prstGeom prst="rect">
-            <a:avLst/>
-          </a:prstGeom>
-          <a:noFill/>
-        </p:spPr>
-        <p:txBody>
-          <a:bodyPr wrap="square" anchor="t">
-            <a:spAutoFit/>
-          </a:bodyPr>
-          <a:lstStyle/>
-          <a:p>
-            <a:pPr algn="l">
-              <a:lnSpc>
-                <a:spcPct val="115000"/>
-              </a:lnSpc>
-            </a:pPr>
-            <a:r>
-              <a:rPr sz="1250" b="0">
-                <a:solidFill>
-                  <a:srgbClr val="4B6259"/>
-                </a:solidFill>
-                <a:latin typeface="Malgun Gothic"/>
-              </a:rPr>
-              <a:t>date</a:t>
+              <a:rPr sz="1000" b="0">
+                <a:solidFill>
+                  <a:srgbClr val="6E8880"/>
+                </a:solidFill>
+                <a:latin typeface="Malgun Gothic"/>
+              </a:rPr>
+              <a:t>EXPENSE TRACKER · PORTFOLIO</a:t>
             </a:r>
           </a:p>
         </p:txBody>
@@ -8636,447 +8327,6 @@
       <p:sp>
         <p:nvSpPr>
           <p:cNvPr id="23" name="TextBox 22"/>
-          <p:cNvSpPr txBox="1"/>
-          <p:nvPr/>
-        </p:nvSpPr>
-        <p:spPr>
-          <a:xfrm>
-            <a:off x="4709160" y="4069080"/>
-            <a:ext cx="2834640" cy="292608"/>
-          </a:xfrm>
-          <a:prstGeom prst="rect">
-            <a:avLst/>
-          </a:prstGeom>
-          <a:noFill/>
-        </p:spPr>
-        <p:txBody>
-          <a:bodyPr wrap="square" anchor="t">
-            <a:spAutoFit/>
-          </a:bodyPr>
-          <a:lstStyle/>
-          <a:p>
-            <a:pPr algn="l">
-              <a:lnSpc>
-                <a:spcPct val="115000"/>
-              </a:lnSpc>
-            </a:pPr>
-            <a:r>
-              <a:rPr sz="1250" b="0">
-                <a:solidFill>
-                  <a:srgbClr val="4B6259"/>
-                </a:solidFill>
-                <a:latin typeface="Malgun Gothic"/>
-              </a:rPr>
-              <a:t>memo · created_at</a:t>
-            </a:r>
-          </a:p>
-        </p:txBody>
-      </p:sp>
-      <p:sp>
-        <p:nvSpPr>
-          <p:cNvPr id="24" name="Rectangle 23"/>
-          <p:cNvSpPr/>
-          <p:nvPr/>
-        </p:nvSpPr>
-        <p:spPr>
-          <a:xfrm>
-            <a:off x="8321040" y="1920240"/>
-            <a:ext cx="3246120" cy="2651760"/>
-          </a:xfrm>
-          <a:prstGeom prst="rect">
-            <a:avLst/>
-          </a:prstGeom>
-          <a:solidFill>
-            <a:srgbClr val="FFFFFF"/>
-          </a:solidFill>
-          <a:ln w="12700">
-            <a:solidFill>
-              <a:srgbClr val="DCEEE7"/>
-            </a:solidFill>
-          </a:ln>
-          <a:effectLst/>
-        </p:spPr>
-        <p:style>
-          <a:lnRef idx="1">
-            <a:schemeClr val="accent1"/>
-          </a:lnRef>
-          <a:fillRef idx="3">
-            <a:schemeClr val="accent1"/>
-          </a:fillRef>
-          <a:effectRef idx="2">
-            <a:schemeClr val="accent1"/>
-          </a:effectRef>
-          <a:fontRef idx="minor">
-            <a:schemeClr val="lt1"/>
-          </a:fontRef>
-        </p:style>
-        <p:txBody>
-          <a:bodyPr rtlCol="0" anchor="ctr"/>
-          <a:lstStyle/>
-          <a:p>
-            <a:pPr algn="ctr"/>
-          </a:p>
-        </p:txBody>
-      </p:sp>
-      <p:sp>
-        <p:nvSpPr>
-          <p:cNvPr id="25" name="Rectangle 24"/>
-          <p:cNvSpPr/>
-          <p:nvPr/>
-        </p:nvSpPr>
-        <p:spPr>
-          <a:xfrm>
-            <a:off x="8321040" y="1920240"/>
-            <a:ext cx="3246120" cy="457200"/>
-          </a:xfrm>
-          <a:prstGeom prst="rect">
-            <a:avLst/>
-          </a:prstGeom>
-          <a:solidFill>
-            <a:srgbClr val="0F766E"/>
-          </a:solidFill>
-          <a:ln>
-            <a:noFill/>
-          </a:ln>
-          <a:effectLst/>
-        </p:spPr>
-        <p:style>
-          <a:lnRef idx="1">
-            <a:schemeClr val="accent1"/>
-          </a:lnRef>
-          <a:fillRef idx="3">
-            <a:schemeClr val="accent1"/>
-          </a:fillRef>
-          <a:effectRef idx="2">
-            <a:schemeClr val="accent1"/>
-          </a:effectRef>
-          <a:fontRef idx="minor">
-            <a:schemeClr val="lt1"/>
-          </a:fontRef>
-        </p:style>
-        <p:txBody>
-          <a:bodyPr rtlCol="0" anchor="ctr"/>
-          <a:lstStyle/>
-          <a:p>
-            <a:pPr algn="ctr"/>
-          </a:p>
-        </p:txBody>
-      </p:sp>
-      <p:sp>
-        <p:nvSpPr>
-          <p:cNvPr id="26" name="TextBox 25"/>
-          <p:cNvSpPr txBox="1"/>
-          <p:nvPr/>
-        </p:nvSpPr>
-        <p:spPr>
-          <a:xfrm>
-            <a:off x="8321040" y="1993392"/>
-            <a:ext cx="3246120" cy="365760"/>
-          </a:xfrm>
-          <a:prstGeom prst="rect">
-            <a:avLst/>
-          </a:prstGeom>
-          <a:noFill/>
-        </p:spPr>
-        <p:txBody>
-          <a:bodyPr wrap="square" anchor="t">
-            <a:spAutoFit/>
-          </a:bodyPr>
-          <a:lstStyle/>
-          <a:p>
-            <a:pPr algn="ctr">
-              <a:lnSpc>
-                <a:spcPct val="115000"/>
-              </a:lnSpc>
-            </a:pPr>
-            <a:r>
-              <a:rPr sz="1500" b="1">
-                <a:solidFill>
-                  <a:srgbClr val="FFFFFF"/>
-                </a:solidFill>
-                <a:latin typeface="Malgun Gothic"/>
-              </a:rPr>
-              <a:t>categories</a:t>
-            </a:r>
-          </a:p>
-        </p:txBody>
-      </p:sp>
-      <p:sp>
-        <p:nvSpPr>
-          <p:cNvPr id="27" name="TextBox 26"/>
-          <p:cNvSpPr txBox="1"/>
-          <p:nvPr/>
-        </p:nvSpPr>
-        <p:spPr>
-          <a:xfrm>
-            <a:off x="8549640" y="2514600"/>
-            <a:ext cx="2788920" cy="292608"/>
-          </a:xfrm>
-          <a:prstGeom prst="rect">
-            <a:avLst/>
-          </a:prstGeom>
-          <a:noFill/>
-        </p:spPr>
-        <p:txBody>
-          <a:bodyPr wrap="square" anchor="t">
-            <a:spAutoFit/>
-          </a:bodyPr>
-          <a:lstStyle/>
-          <a:p>
-            <a:pPr algn="l">
-              <a:lnSpc>
-                <a:spcPct val="115000"/>
-              </a:lnSpc>
-            </a:pPr>
-            <a:r>
-              <a:rPr sz="1250" b="0">
-                <a:solidFill>
-                  <a:srgbClr val="4B6259"/>
-                </a:solidFill>
-                <a:latin typeface="Malgun Gothic"/>
-              </a:rPr>
-              <a:t>id (text, PK)</a:t>
-            </a:r>
-          </a:p>
-        </p:txBody>
-      </p:sp>
-      <p:sp>
-        <p:nvSpPr>
-          <p:cNvPr id="28" name="TextBox 27"/>
-          <p:cNvSpPr txBox="1"/>
-          <p:nvPr/>
-        </p:nvSpPr>
-        <p:spPr>
-          <a:xfrm>
-            <a:off x="8549640" y="2825496"/>
-            <a:ext cx="2788920" cy="292608"/>
-          </a:xfrm>
-          <a:prstGeom prst="rect">
-            <a:avLst/>
-          </a:prstGeom>
-          <a:noFill/>
-        </p:spPr>
-        <p:txBody>
-          <a:bodyPr wrap="square" anchor="t">
-            <a:spAutoFit/>
-          </a:bodyPr>
-          <a:lstStyle/>
-          <a:p>
-            <a:pPr algn="l">
-              <a:lnSpc>
-                <a:spcPct val="115000"/>
-              </a:lnSpc>
-            </a:pPr>
-            <a:r>
-              <a:rPr sz="1250" b="0">
-                <a:solidFill>
-                  <a:srgbClr val="4B6259"/>
-                </a:solidFill>
-                <a:latin typeface="Malgun Gothic"/>
-              </a:rPr>
-              <a:t>name / icon / color</a:t>
-            </a:r>
-          </a:p>
-        </p:txBody>
-      </p:sp>
-      <p:sp>
-        <p:nvSpPr>
-          <p:cNvPr id="29" name="TextBox 28"/>
-          <p:cNvSpPr txBox="1"/>
-          <p:nvPr/>
-        </p:nvSpPr>
-        <p:spPr>
-          <a:xfrm>
-            <a:off x="8549640" y="3136392"/>
-            <a:ext cx="2788920" cy="292608"/>
-          </a:xfrm>
-          <a:prstGeom prst="rect">
-            <a:avLst/>
-          </a:prstGeom>
-          <a:noFill/>
-        </p:spPr>
-        <p:txBody>
-          <a:bodyPr wrap="square" anchor="t">
-            <a:spAutoFit/>
-          </a:bodyPr>
-          <a:lstStyle/>
-          <a:p>
-            <a:pPr algn="l">
-              <a:lnSpc>
-                <a:spcPct val="115000"/>
-              </a:lnSpc>
-            </a:pPr>
-            <a:r>
-              <a:rPr sz="1250" b="0">
-                <a:solidFill>
-                  <a:srgbClr val="4B6259"/>
-                </a:solidFill>
-                <a:latin typeface="Malgun Gothic"/>
-              </a:rPr>
-              <a:t>고정 8종 · 읽기 전용</a:t>
-            </a:r>
-          </a:p>
-        </p:txBody>
-      </p:sp>
-      <p:sp>
-        <p:nvSpPr>
-          <p:cNvPr id="30" name="TextBox 29"/>
-          <p:cNvSpPr txBox="1"/>
-          <p:nvPr/>
-        </p:nvSpPr>
-        <p:spPr>
-          <a:xfrm>
-            <a:off x="8549640" y="3447288"/>
-            <a:ext cx="2788920" cy="292608"/>
-          </a:xfrm>
-          <a:prstGeom prst="rect">
-            <a:avLst/>
-          </a:prstGeom>
-          <a:noFill/>
-        </p:spPr>
-        <p:txBody>
-          <a:bodyPr wrap="square" anchor="t">
-            <a:spAutoFit/>
-          </a:bodyPr>
-          <a:lstStyle/>
-          <a:p>
-            <a:pPr algn="l">
-              <a:lnSpc>
-                <a:spcPct val="115000"/>
-              </a:lnSpc>
-            </a:pPr>
-            <a:r>
-              <a:rPr sz="1250" b="0">
-                <a:solidFill>
-                  <a:srgbClr val="4B6259"/>
-                </a:solidFill>
-                <a:latin typeface="Malgun Gothic"/>
-              </a:rPr>
-              <a:t>(CRUD 없음, seed 데이터)</a:t>
-            </a:r>
-          </a:p>
-        </p:txBody>
-      </p:sp>
-      <p:sp>
-        <p:nvSpPr>
-          <p:cNvPr id="31" name="TextBox 30"/>
-          <p:cNvSpPr txBox="1"/>
-          <p:nvPr/>
-        </p:nvSpPr>
-        <p:spPr>
-          <a:xfrm>
-            <a:off x="3977639" y="2926080"/>
-            <a:ext cx="548640" cy="365760"/>
-          </a:xfrm>
-          <a:prstGeom prst="rect">
-            <a:avLst/>
-          </a:prstGeom>
-          <a:noFill/>
-        </p:spPr>
-        <p:txBody>
-          <a:bodyPr wrap="square" anchor="t">
-            <a:spAutoFit/>
-          </a:bodyPr>
-          <a:lstStyle/>
-          <a:p>
-            <a:pPr algn="ctr">
-              <a:lnSpc>
-                <a:spcPct val="115000"/>
-              </a:lnSpc>
-            </a:pPr>
-            <a:r>
-              <a:rPr sz="1200" b="0">
-                <a:solidFill>
-                  <a:srgbClr val="6E8880"/>
-                </a:solidFill>
-                <a:latin typeface="Malgun Gothic"/>
-              </a:rPr>
-              <a:t>1:N</a:t>
-            </a:r>
-          </a:p>
-        </p:txBody>
-      </p:sp>
-      <p:sp>
-        <p:nvSpPr>
-          <p:cNvPr id="32" name="TextBox 31"/>
-          <p:cNvSpPr txBox="1"/>
-          <p:nvPr/>
-        </p:nvSpPr>
-        <p:spPr>
-          <a:xfrm>
-            <a:off x="7818120" y="2926080"/>
-            <a:ext cx="548640" cy="365760"/>
-          </a:xfrm>
-          <a:prstGeom prst="rect">
-            <a:avLst/>
-          </a:prstGeom>
-          <a:noFill/>
-        </p:spPr>
-        <p:txBody>
-          <a:bodyPr wrap="square" anchor="t">
-            <a:spAutoFit/>
-          </a:bodyPr>
-          <a:lstStyle/>
-          <a:p>
-            <a:pPr algn="ctr">
-              <a:lnSpc>
-                <a:spcPct val="115000"/>
-              </a:lnSpc>
-            </a:pPr>
-            <a:r>
-              <a:rPr sz="1200" b="0">
-                <a:solidFill>
-                  <a:srgbClr val="6E8880"/>
-                </a:solidFill>
-                <a:latin typeface="Malgun Gothic"/>
-              </a:rPr>
-              <a:t>N:1</a:t>
-            </a:r>
-          </a:p>
-        </p:txBody>
-      </p:sp>
-      <p:sp>
-        <p:nvSpPr>
-          <p:cNvPr id="33" name="TextBox 32"/>
-          <p:cNvSpPr txBox="1"/>
-          <p:nvPr/>
-        </p:nvSpPr>
-        <p:spPr>
-          <a:xfrm>
-            <a:off x="457200" y="6446520"/>
-            <a:ext cx="7315200" cy="320040"/>
-          </a:xfrm>
-          <a:prstGeom prst="rect">
-            <a:avLst/>
-          </a:prstGeom>
-          <a:noFill/>
-        </p:spPr>
-        <p:txBody>
-          <a:bodyPr wrap="square" anchor="t">
-            <a:spAutoFit/>
-          </a:bodyPr>
-          <a:lstStyle/>
-          <a:p>
-            <a:pPr algn="l">
-              <a:lnSpc>
-                <a:spcPct val="115000"/>
-              </a:lnSpc>
-            </a:pPr>
-            <a:r>
-              <a:rPr sz="1000" b="0">
-                <a:solidFill>
-                  <a:srgbClr val="6E8880"/>
-                </a:solidFill>
-                <a:latin typeface="Malgun Gothic"/>
-              </a:rPr>
-              <a:t>EXPENSE TRACKER · PORTFOLIO</a:t>
-            </a:r>
-          </a:p>
-        </p:txBody>
-      </p:sp>
-      <p:sp>
-        <p:nvSpPr>
-          <p:cNvPr id="34" name="TextBox 33"/>
           <p:cNvSpPr txBox="1"/>
           <p:nvPr/>
         </p:nvSpPr>
@@ -9217,7 +8467,7 @@
                 </a:solidFill>
                 <a:latin typeface="Malgun Gothic"/>
               </a:rPr>
-              <a:t>TECH EVOLUTION</a:t>
+              <a:t>DATA MODEL</a:t>
             </a:r>
           </a:p>
         </p:txBody>
@@ -9256,7 +8506,7 @@
                 </a:solidFill>
                 <a:latin typeface="Malgun Gothic"/>
               </a:rPr>
-              <a:t>localStorage → Supabase</a:t>
+              <a:t>데이터 모델 (ERD)</a:t>
             </a:r>
           </a:p>
         </p:txBody>
@@ -9313,8 +8563,8 @@
         </p:nvSpPr>
         <p:spPr>
           <a:xfrm>
-            <a:off x="640080" y="2011680"/>
-            <a:ext cx="4937760" cy="3291840"/>
+            <a:off x="640080" y="1920240"/>
+            <a:ext cx="3291840" cy="2651760"/>
           </a:xfrm>
           <a:prstGeom prst="rect">
             <a:avLst/>
@@ -9353,172 +8603,14 @@
       </p:sp>
       <p:sp>
         <p:nvSpPr>
-          <p:cNvPr id="7" name="TextBox 6"/>
-          <p:cNvSpPr txBox="1"/>
-          <p:nvPr/>
-        </p:nvSpPr>
-        <p:spPr>
-          <a:xfrm>
-            <a:off x="914400" y="2240280"/>
-            <a:ext cx="4389120" cy="365760"/>
-          </a:xfrm>
-          <a:prstGeom prst="rect">
-            <a:avLst/>
-          </a:prstGeom>
-          <a:noFill/>
-        </p:spPr>
-        <p:txBody>
-          <a:bodyPr wrap="square" anchor="t">
-            <a:spAutoFit/>
-          </a:bodyPr>
-          <a:lstStyle/>
-          <a:p>
-            <a:pPr algn="l">
-              <a:lnSpc>
-                <a:spcPct val="115000"/>
-              </a:lnSpc>
-            </a:pPr>
-            <a:r>
-              <a:rPr sz="1300" b="1">
-                <a:solidFill>
-                  <a:srgbClr val="6E8880"/>
-                </a:solidFill>
-                <a:latin typeface="Malgun Gothic"/>
-              </a:rPr>
-              <a:t>BEFORE</a:t>
-            </a:r>
-          </a:p>
-        </p:txBody>
-      </p:sp>
-      <p:sp>
-        <p:nvSpPr>
-          <p:cNvPr id="8" name="TextBox 7"/>
-          <p:cNvSpPr txBox="1"/>
-          <p:nvPr/>
-        </p:nvSpPr>
-        <p:spPr>
-          <a:xfrm>
-            <a:off x="914400" y="2606040"/>
-            <a:ext cx="4389120" cy="457200"/>
-          </a:xfrm>
-          <a:prstGeom prst="rect">
-            <a:avLst/>
-          </a:prstGeom>
-          <a:noFill/>
-        </p:spPr>
-        <p:txBody>
-          <a:bodyPr wrap="square" anchor="t">
-            <a:spAutoFit/>
-          </a:bodyPr>
-          <a:lstStyle/>
-          <a:p>
-            <a:pPr algn="l">
-              <a:lnSpc>
-                <a:spcPct val="115000"/>
-              </a:lnSpc>
-            </a:pPr>
-            <a:r>
-              <a:rPr sz="1800" b="1">
-                <a:solidFill>
-                  <a:srgbClr val="1F2E2A"/>
-                </a:solidFill>
-                <a:latin typeface="Malgun Gothic"/>
-              </a:rPr>
-              <a:t>정적 사이트 + localStorage</a:t>
-            </a:r>
-          </a:p>
-        </p:txBody>
-      </p:sp>
-      <p:sp>
-        <p:nvSpPr>
-          <p:cNvPr id="9" name="TextBox 8"/>
-          <p:cNvSpPr txBox="1"/>
-          <p:nvPr/>
-        </p:nvSpPr>
-        <p:spPr>
-          <a:xfrm>
-            <a:off x="914400" y="3154680"/>
-            <a:ext cx="4389120" cy="2011680"/>
-          </a:xfrm>
-          <a:prstGeom prst="rect">
-            <a:avLst/>
-          </a:prstGeom>
-          <a:noFill/>
-        </p:spPr>
-        <p:txBody>
-          <a:bodyPr wrap="square">
-            <a:spAutoFit/>
-          </a:bodyPr>
-          <a:lstStyle/>
-          <a:p>
-            <a:pPr>
-              <a:lnSpc>
-                <a:spcPct val="120000"/>
-              </a:lnSpc>
-              <a:spcAft>
-                <a:spcPts val="1000"/>
-              </a:spcAft>
-            </a:pPr>
-            <a:r>
-              <a:rPr sz="1400" b="0">
-                <a:solidFill>
-                  <a:srgbClr val="1F2E2A"/>
-                </a:solidFill>
-                <a:latin typeface="Malgun Gothic"/>
-              </a:rPr>
-              <a:t>•  백엔드 서버 없이 브라우저에 데이터 저장</a:t>
-            </a:r>
-          </a:p>
-          <a:p>
-            <a:pPr>
-              <a:lnSpc>
-                <a:spcPct val="120000"/>
-              </a:lnSpc>
-              <a:spcAft>
-                <a:spcPts val="1000"/>
-              </a:spcAft>
-            </a:pPr>
-            <a:r>
-              <a:rPr sz="1400" b="0">
-                <a:solidFill>
-                  <a:srgbClr val="1F2E2A"/>
-                </a:solidFill>
-                <a:latin typeface="Malgun Gothic"/>
-              </a:rPr>
-              <a:t>•  비밀번호까지 평문으로 저장 (데모 목적)</a:t>
-            </a:r>
-          </a:p>
-          <a:p>
-            <a:pPr>
-              <a:lnSpc>
-                <a:spcPct val="120000"/>
-              </a:lnSpc>
-              <a:spcAft>
-                <a:spcPts val="1000"/>
-              </a:spcAft>
-            </a:pPr>
-            <a:r>
-              <a:rPr sz="1400" b="0">
-                <a:solidFill>
-                  <a:srgbClr val="1F2E2A"/>
-                </a:solidFill>
-                <a:latin typeface="Malgun Gothic"/>
-              </a:rPr>
-              <a:t>•  브라우저·기기 간 데이터 공유 불가</a:t>
-            </a:r>
-          </a:p>
-        </p:txBody>
-      </p:sp>
-      <p:sp>
-        <p:nvSpPr>
-          <p:cNvPr id="10" name="Rectangle 9"/>
+          <p:cNvPr id="7" name="Rectangle 6"/>
           <p:cNvSpPr/>
           <p:nvPr/>
         </p:nvSpPr>
         <p:spPr>
           <a:xfrm>
-            <a:off x="6583680" y="2011680"/>
-            <a:ext cx="4937760" cy="3291840"/>
+            <a:off x="640080" y="1920240"/>
+            <a:ext cx="3291840" cy="457200"/>
           </a:xfrm>
           <a:prstGeom prst="rect">
             <a:avLst/>
@@ -9555,14 +8647,14 @@
       </p:sp>
       <p:sp>
         <p:nvSpPr>
-          <p:cNvPr id="11" name="TextBox 10"/>
+          <p:cNvPr id="8" name="TextBox 7"/>
           <p:cNvSpPr txBox="1"/>
           <p:nvPr/>
         </p:nvSpPr>
         <p:spPr>
           <a:xfrm>
-            <a:off x="6858000" y="2240280"/>
-            <a:ext cx="4389120" cy="365760"/>
+            <a:off x="640080" y="1993392"/>
+            <a:ext cx="3291840" cy="365760"/>
           </a:xfrm>
           <a:prstGeom prst="rect">
             <a:avLst/>
@@ -9575,33 +8667,33 @@
           </a:bodyPr>
           <a:lstStyle/>
           <a:p>
-            <a:pPr algn="l">
+            <a:pPr algn="ctr">
               <a:lnSpc>
                 <a:spcPct val="115000"/>
               </a:lnSpc>
             </a:pPr>
             <a:r>
-              <a:rPr sz="1300" b="1">
-                <a:solidFill>
-                  <a:srgbClr val="34D399"/>
-                </a:solidFill>
-                <a:latin typeface="Malgun Gothic"/>
-              </a:rPr>
-              <a:t>AFTER</a:t>
-            </a:r>
-          </a:p>
-        </p:txBody>
-      </p:sp>
-      <p:sp>
-        <p:nvSpPr>
-          <p:cNvPr id="12" name="TextBox 11"/>
+              <a:rPr sz="1500" b="1">
+                <a:solidFill>
+                  <a:srgbClr val="FFFFFF"/>
+                </a:solidFill>
+                <a:latin typeface="Malgun Gothic"/>
+              </a:rPr>
+              <a:t>profiles</a:t>
+            </a:r>
+          </a:p>
+        </p:txBody>
+      </p:sp>
+      <p:sp>
+        <p:nvSpPr>
+          <p:cNvPr id="9" name="TextBox 8"/>
           <p:cNvSpPr txBox="1"/>
           <p:nvPr/>
         </p:nvSpPr>
         <p:spPr>
           <a:xfrm>
-            <a:off x="6858000" y="2606040"/>
-            <a:ext cx="4389120" cy="457200"/>
+            <a:off x="868680" y="2514600"/>
+            <a:ext cx="2834640" cy="292608"/>
           </a:xfrm>
           <a:prstGeom prst="rect">
             <a:avLst/>
@@ -9620,13 +8712,130 @@
               </a:lnSpc>
             </a:pPr>
             <a:r>
-              <a:rPr sz="1800" b="1">
-                <a:solidFill>
-                  <a:srgbClr val="FFFFFF"/>
-                </a:solidFill>
-                <a:latin typeface="Malgun Gothic"/>
-              </a:rPr>
-              <a:t>Supabase (PostgreSQL)</a:t>
+              <a:rPr sz="1250" b="0">
+                <a:solidFill>
+                  <a:srgbClr val="4B6259"/>
+                </a:solidFill>
+                <a:latin typeface="Malgun Gothic"/>
+              </a:rPr>
+              <a:t>id (uuid, PK → auth.users)</a:t>
+            </a:r>
+          </a:p>
+        </p:txBody>
+      </p:sp>
+      <p:sp>
+        <p:nvSpPr>
+          <p:cNvPr id="10" name="TextBox 9"/>
+          <p:cNvSpPr txBox="1"/>
+          <p:nvPr/>
+        </p:nvSpPr>
+        <p:spPr>
+          <a:xfrm>
+            <a:off x="868680" y="2825496"/>
+            <a:ext cx="2834640" cy="292608"/>
+          </a:xfrm>
+          <a:prstGeom prst="rect">
+            <a:avLst/>
+          </a:prstGeom>
+          <a:noFill/>
+        </p:spPr>
+        <p:txBody>
+          <a:bodyPr wrap="square" anchor="t">
+            <a:spAutoFit/>
+          </a:bodyPr>
+          <a:lstStyle/>
+          <a:p>
+            <a:pPr algn="l">
+              <a:lnSpc>
+                <a:spcPct val="115000"/>
+              </a:lnSpc>
+            </a:pPr>
+            <a:r>
+              <a:rPr sz="1250" b="0">
+                <a:solidFill>
+                  <a:srgbClr val="4B6259"/>
+                </a:solidFill>
+                <a:latin typeface="Malgun Gothic"/>
+              </a:rPr>
+              <a:t>name</a:t>
+            </a:r>
+          </a:p>
+        </p:txBody>
+      </p:sp>
+      <p:sp>
+        <p:nvSpPr>
+          <p:cNvPr id="11" name="TextBox 10"/>
+          <p:cNvSpPr txBox="1"/>
+          <p:nvPr/>
+        </p:nvSpPr>
+        <p:spPr>
+          <a:xfrm>
+            <a:off x="868680" y="3136392"/>
+            <a:ext cx="2834640" cy="292608"/>
+          </a:xfrm>
+          <a:prstGeom prst="rect">
+            <a:avLst/>
+          </a:prstGeom>
+          <a:noFill/>
+        </p:spPr>
+        <p:txBody>
+          <a:bodyPr wrap="square" anchor="t">
+            <a:spAutoFit/>
+          </a:bodyPr>
+          <a:lstStyle/>
+          <a:p>
+            <a:pPr algn="l">
+              <a:lnSpc>
+                <a:spcPct val="115000"/>
+              </a:lnSpc>
+            </a:pPr>
+            <a:r>
+              <a:rPr sz="1250" b="0">
+                <a:solidFill>
+                  <a:srgbClr val="4B6259"/>
+                </a:solidFill>
+                <a:latin typeface="Malgun Gothic"/>
+              </a:rPr>
+              <a:t>email (unique)</a:t>
+            </a:r>
+          </a:p>
+        </p:txBody>
+      </p:sp>
+      <p:sp>
+        <p:nvSpPr>
+          <p:cNvPr id="12" name="TextBox 11"/>
+          <p:cNvSpPr txBox="1"/>
+          <p:nvPr/>
+        </p:nvSpPr>
+        <p:spPr>
+          <a:xfrm>
+            <a:off x="868680" y="3447288"/>
+            <a:ext cx="2834640" cy="292608"/>
+          </a:xfrm>
+          <a:prstGeom prst="rect">
+            <a:avLst/>
+          </a:prstGeom>
+          <a:noFill/>
+        </p:spPr>
+        <p:txBody>
+          <a:bodyPr wrap="square" anchor="t">
+            <a:spAutoFit/>
+          </a:bodyPr>
+          <a:lstStyle/>
+          <a:p>
+            <a:pPr algn="l">
+              <a:lnSpc>
+                <a:spcPct val="115000"/>
+              </a:lnSpc>
+            </a:pPr>
+            <a:r>
+              <a:rPr sz="1250" b="0">
+                <a:solidFill>
+                  <a:srgbClr val="4B6259"/>
+                </a:solidFill>
+                <a:latin typeface="Malgun Gothic"/>
+              </a:rPr>
+              <a:t>role: customer | admin</a:t>
             </a:r>
           </a:p>
         </p:txBody>
@@ -9639,8 +8848,8 @@
         </p:nvSpPr>
         <p:spPr>
           <a:xfrm>
-            <a:off x="6858000" y="3154680"/>
-            <a:ext cx="4389120" cy="2011680"/>
+            <a:off x="868680" y="3758184"/>
+            <a:ext cx="2834640" cy="292608"/>
           </a:xfrm>
           <a:prstGeom prst="rect">
             <a:avLst/>
@@ -9648,89 +8857,90 @@
           <a:noFill/>
         </p:spPr>
         <p:txBody>
-          <a:bodyPr wrap="square">
+          <a:bodyPr wrap="square" anchor="t">
             <a:spAutoFit/>
           </a:bodyPr>
           <a:lstStyle/>
           <a:p>
-            <a:pPr>
-              <a:lnSpc>
-                <a:spcPct val="120000"/>
-              </a:lnSpc>
-              <a:spcAft>
-                <a:spcPts val="1000"/>
-              </a:spcAft>
-            </a:pPr>
-            <a:r>
-              <a:rPr sz="1400" b="0">
-                <a:solidFill>
-                  <a:srgbClr val="E8F6F1"/>
-                </a:solidFill>
-                <a:latin typeface="Malgun Gothic"/>
-              </a:rPr>
-              <a:t>•  Supabase Auth로 인증 위임 (평문 비밀번호 제거)</a:t>
-            </a:r>
-          </a:p>
-          <a:p>
-            <a:pPr>
-              <a:lnSpc>
-                <a:spcPct val="120000"/>
-              </a:lnSpc>
-              <a:spcAft>
-                <a:spcPts val="1000"/>
-              </a:spcAft>
-            </a:pPr>
-            <a:r>
-              <a:rPr sz="1400" b="0">
-                <a:solidFill>
-                  <a:srgbClr val="E8F6F1"/>
-                </a:solidFill>
-                <a:latin typeface="Malgun Gothic"/>
-              </a:rPr>
-              <a:t>•  profiles / categories / expenses 3개 테이블 설계</a:t>
-            </a:r>
-          </a:p>
-          <a:p>
-            <a:pPr>
-              <a:lnSpc>
-                <a:spcPct val="120000"/>
-              </a:lnSpc>
-              <a:spcAft>
-                <a:spcPts val="1000"/>
-              </a:spcAft>
-            </a:pPr>
-            <a:r>
-              <a:rPr sz="1400" b="0">
-                <a:solidFill>
-                  <a:srgbClr val="E8F6F1"/>
-                </a:solidFill>
-                <a:latin typeface="Malgun Gothic"/>
-              </a:rPr>
-              <a:t>•  Row Level Security로 행 단위 접근 제어</a:t>
-            </a:r>
-          </a:p>
-        </p:txBody>
-      </p:sp>
-      <p:sp>
-        <p:nvSpPr>
-          <p:cNvPr id="14" name="Chevron 13"/>
+            <a:pPr algn="l">
+              <a:lnSpc>
+                <a:spcPct val="115000"/>
+              </a:lnSpc>
+            </a:pPr>
+            <a:r>
+              <a:rPr sz="1250" b="0">
+                <a:solidFill>
+                  <a:srgbClr val="4B6259"/>
+                </a:solidFill>
+                <a:latin typeface="Malgun Gothic"/>
+              </a:rPr>
+              <a:t>status: active | suspended</a:t>
+            </a:r>
+          </a:p>
+        </p:txBody>
+      </p:sp>
+      <p:sp>
+        <p:nvSpPr>
+          <p:cNvPr id="14" name="TextBox 13"/>
+          <p:cNvSpPr txBox="1"/>
+          <p:nvPr/>
+        </p:nvSpPr>
+        <p:spPr>
+          <a:xfrm>
+            <a:off x="868680" y="4069080"/>
+            <a:ext cx="2834640" cy="292608"/>
+          </a:xfrm>
+          <a:prstGeom prst="rect">
+            <a:avLst/>
+          </a:prstGeom>
+          <a:noFill/>
+        </p:spPr>
+        <p:txBody>
+          <a:bodyPr wrap="square" anchor="t">
+            <a:spAutoFit/>
+          </a:bodyPr>
+          <a:lstStyle/>
+          <a:p>
+            <a:pPr algn="l">
+              <a:lnSpc>
+                <a:spcPct val="115000"/>
+              </a:lnSpc>
+            </a:pPr>
+            <a:r>
+              <a:rPr sz="1250" b="0">
+                <a:solidFill>
+                  <a:srgbClr val="4B6259"/>
+                </a:solidFill>
+                <a:latin typeface="Malgun Gothic"/>
+              </a:rPr>
+              <a:t>created_at</a:t>
+            </a:r>
+          </a:p>
+        </p:txBody>
+      </p:sp>
+      <p:sp>
+        <p:nvSpPr>
+          <p:cNvPr id="15" name="Rectangle 14"/>
           <p:cNvSpPr/>
           <p:nvPr/>
         </p:nvSpPr>
         <p:spPr>
           <a:xfrm>
-            <a:off x="5715000" y="3291840"/>
-            <a:ext cx="731520" cy="548640"/>
-          </a:xfrm>
-          <a:prstGeom prst="chevron">
+            <a:off x="4480560" y="1920240"/>
+            <a:ext cx="3291840" cy="2651760"/>
+          </a:xfrm>
+          <a:prstGeom prst="rect">
             <a:avLst/>
           </a:prstGeom>
           <a:solidFill>
-            <a:srgbClr val="34D399"/>
+            <a:srgbClr val="FFFFFF"/>
           </a:solidFill>
-          <a:ln>
-            <a:noFill/>
+          <a:ln w="12700">
+            <a:solidFill>
+              <a:srgbClr val="DCEEE7"/>
+            </a:solidFill>
           </a:ln>
+          <a:effectLst/>
         </p:spPr>
         <p:style>
           <a:lnRef idx="1">
@@ -9756,14 +8966,58 @@
       </p:sp>
       <p:sp>
         <p:nvSpPr>
-          <p:cNvPr id="15" name="TextBox 14"/>
+          <p:cNvPr id="16" name="Rectangle 15"/>
+          <p:cNvSpPr/>
+          <p:nvPr/>
+        </p:nvSpPr>
+        <p:spPr>
+          <a:xfrm>
+            <a:off x="4480560" y="1920240"/>
+            <a:ext cx="3291840" cy="457200"/>
+          </a:xfrm>
+          <a:prstGeom prst="rect">
+            <a:avLst/>
+          </a:prstGeom>
+          <a:solidFill>
+            <a:srgbClr val="0F766E"/>
+          </a:solidFill>
+          <a:ln>
+            <a:noFill/>
+          </a:ln>
+          <a:effectLst/>
+        </p:spPr>
+        <p:style>
+          <a:lnRef idx="1">
+            <a:schemeClr val="accent1"/>
+          </a:lnRef>
+          <a:fillRef idx="3">
+            <a:schemeClr val="accent1"/>
+          </a:fillRef>
+          <a:effectRef idx="2">
+            <a:schemeClr val="accent1"/>
+          </a:effectRef>
+          <a:fontRef idx="minor">
+            <a:schemeClr val="lt1"/>
+          </a:fontRef>
+        </p:style>
+        <p:txBody>
+          <a:bodyPr rtlCol="0" anchor="ctr"/>
+          <a:lstStyle/>
+          <a:p>
+            <a:pPr algn="ctr"/>
+          </a:p>
+        </p:txBody>
+      </p:sp>
+      <p:sp>
+        <p:nvSpPr>
+          <p:cNvPr id="17" name="TextBox 16"/>
           <p:cNvSpPr txBox="1"/>
           <p:nvPr/>
         </p:nvSpPr>
         <p:spPr>
           <a:xfrm>
-            <a:off x="457200" y="6446520"/>
-            <a:ext cx="7315200" cy="320040"/>
+            <a:off x="4480560" y="1993392"/>
+            <a:ext cx="3291840" cy="365760"/>
           </a:xfrm>
           <a:prstGeom prst="rect">
             <a:avLst/>
@@ -9776,12 +9030,648 @@
           </a:bodyPr>
           <a:lstStyle/>
           <a:p>
+            <a:pPr algn="ctr">
+              <a:lnSpc>
+                <a:spcPct val="115000"/>
+              </a:lnSpc>
+            </a:pPr>
+            <a:r>
+              <a:rPr sz="1500" b="1">
+                <a:solidFill>
+                  <a:srgbClr val="FFFFFF"/>
+                </a:solidFill>
+                <a:latin typeface="Malgun Gothic"/>
+              </a:rPr>
+              <a:t>expenses</a:t>
+            </a:r>
+          </a:p>
+        </p:txBody>
+      </p:sp>
+      <p:sp>
+        <p:nvSpPr>
+          <p:cNvPr id="18" name="TextBox 17"/>
+          <p:cNvSpPr txBox="1"/>
+          <p:nvPr/>
+        </p:nvSpPr>
+        <p:spPr>
+          <a:xfrm>
+            <a:off x="4709160" y="2514600"/>
+            <a:ext cx="2834640" cy="292608"/>
+          </a:xfrm>
+          <a:prstGeom prst="rect">
+            <a:avLst/>
+          </a:prstGeom>
+          <a:noFill/>
+        </p:spPr>
+        <p:txBody>
+          <a:bodyPr wrap="square" anchor="t">
+            <a:spAutoFit/>
+          </a:bodyPr>
+          <a:lstStyle/>
+          <a:p>
             <a:pPr algn="l">
               <a:lnSpc>
                 <a:spcPct val="115000"/>
               </a:lnSpc>
             </a:pPr>
             <a:r>
+              <a:rPr sz="1250" b="0">
+                <a:solidFill>
+                  <a:srgbClr val="4B6259"/>
+                </a:solidFill>
+                <a:latin typeface="Malgun Gothic"/>
+              </a:rPr>
+              <a:t>id (uuid, PK)</a:t>
+            </a:r>
+          </a:p>
+        </p:txBody>
+      </p:sp>
+      <p:sp>
+        <p:nvSpPr>
+          <p:cNvPr id="19" name="TextBox 18"/>
+          <p:cNvSpPr txBox="1"/>
+          <p:nvPr/>
+        </p:nvSpPr>
+        <p:spPr>
+          <a:xfrm>
+            <a:off x="4709160" y="2825496"/>
+            <a:ext cx="2834640" cy="292608"/>
+          </a:xfrm>
+          <a:prstGeom prst="rect">
+            <a:avLst/>
+          </a:prstGeom>
+          <a:noFill/>
+        </p:spPr>
+        <p:txBody>
+          <a:bodyPr wrap="square" anchor="t">
+            <a:spAutoFit/>
+          </a:bodyPr>
+          <a:lstStyle/>
+          <a:p>
+            <a:pPr algn="l">
+              <a:lnSpc>
+                <a:spcPct val="115000"/>
+              </a:lnSpc>
+            </a:pPr>
+            <a:r>
+              <a:rPr sz="1250" b="0">
+                <a:solidFill>
+                  <a:srgbClr val="4B6259"/>
+                </a:solidFill>
+                <a:latin typeface="Malgun Gothic"/>
+              </a:rPr>
+              <a:t>user_id (FK → profiles)</a:t>
+            </a:r>
+          </a:p>
+        </p:txBody>
+      </p:sp>
+      <p:sp>
+        <p:nvSpPr>
+          <p:cNvPr id="20" name="TextBox 19"/>
+          <p:cNvSpPr txBox="1"/>
+          <p:nvPr/>
+        </p:nvSpPr>
+        <p:spPr>
+          <a:xfrm>
+            <a:off x="4709160" y="3136392"/>
+            <a:ext cx="2834640" cy="292608"/>
+          </a:xfrm>
+          <a:prstGeom prst="rect">
+            <a:avLst/>
+          </a:prstGeom>
+          <a:noFill/>
+        </p:spPr>
+        <p:txBody>
+          <a:bodyPr wrap="square" anchor="t">
+            <a:spAutoFit/>
+          </a:bodyPr>
+          <a:lstStyle/>
+          <a:p>
+            <a:pPr algn="l">
+              <a:lnSpc>
+                <a:spcPct val="115000"/>
+              </a:lnSpc>
+            </a:pPr>
+            <a:r>
+              <a:rPr sz="1250" b="0">
+                <a:solidFill>
+                  <a:srgbClr val="4B6259"/>
+                </a:solidFill>
+                <a:latin typeface="Malgun Gothic"/>
+              </a:rPr>
+              <a:t>category_id (FK → categories)</a:t>
+            </a:r>
+          </a:p>
+        </p:txBody>
+      </p:sp>
+      <p:sp>
+        <p:nvSpPr>
+          <p:cNvPr id="21" name="TextBox 20"/>
+          <p:cNvSpPr txBox="1"/>
+          <p:nvPr/>
+        </p:nvSpPr>
+        <p:spPr>
+          <a:xfrm>
+            <a:off x="4709160" y="3447288"/>
+            <a:ext cx="2834640" cy="292608"/>
+          </a:xfrm>
+          <a:prstGeom prst="rect">
+            <a:avLst/>
+          </a:prstGeom>
+          <a:noFill/>
+        </p:spPr>
+        <p:txBody>
+          <a:bodyPr wrap="square" anchor="t">
+            <a:spAutoFit/>
+          </a:bodyPr>
+          <a:lstStyle/>
+          <a:p>
+            <a:pPr algn="l">
+              <a:lnSpc>
+                <a:spcPct val="115000"/>
+              </a:lnSpc>
+            </a:pPr>
+            <a:r>
+              <a:rPr sz="1250" b="0">
+                <a:solidFill>
+                  <a:srgbClr val="4B6259"/>
+                </a:solidFill>
+                <a:latin typeface="Malgun Gothic"/>
+              </a:rPr>
+              <a:t>amount (numeric, &gt;0)</a:t>
+            </a:r>
+          </a:p>
+        </p:txBody>
+      </p:sp>
+      <p:sp>
+        <p:nvSpPr>
+          <p:cNvPr id="22" name="TextBox 21"/>
+          <p:cNvSpPr txBox="1"/>
+          <p:nvPr/>
+        </p:nvSpPr>
+        <p:spPr>
+          <a:xfrm>
+            <a:off x="4709160" y="3758184"/>
+            <a:ext cx="2834640" cy="292608"/>
+          </a:xfrm>
+          <a:prstGeom prst="rect">
+            <a:avLst/>
+          </a:prstGeom>
+          <a:noFill/>
+        </p:spPr>
+        <p:txBody>
+          <a:bodyPr wrap="square" anchor="t">
+            <a:spAutoFit/>
+          </a:bodyPr>
+          <a:lstStyle/>
+          <a:p>
+            <a:pPr algn="l">
+              <a:lnSpc>
+                <a:spcPct val="115000"/>
+              </a:lnSpc>
+            </a:pPr>
+            <a:r>
+              <a:rPr sz="1250" b="0">
+                <a:solidFill>
+                  <a:srgbClr val="4B6259"/>
+                </a:solidFill>
+                <a:latin typeface="Malgun Gothic"/>
+              </a:rPr>
+              <a:t>date</a:t>
+            </a:r>
+          </a:p>
+        </p:txBody>
+      </p:sp>
+      <p:sp>
+        <p:nvSpPr>
+          <p:cNvPr id="23" name="TextBox 22"/>
+          <p:cNvSpPr txBox="1"/>
+          <p:nvPr/>
+        </p:nvSpPr>
+        <p:spPr>
+          <a:xfrm>
+            <a:off x="4709160" y="4069080"/>
+            <a:ext cx="2834640" cy="292608"/>
+          </a:xfrm>
+          <a:prstGeom prst="rect">
+            <a:avLst/>
+          </a:prstGeom>
+          <a:noFill/>
+        </p:spPr>
+        <p:txBody>
+          <a:bodyPr wrap="square" anchor="t">
+            <a:spAutoFit/>
+          </a:bodyPr>
+          <a:lstStyle/>
+          <a:p>
+            <a:pPr algn="l">
+              <a:lnSpc>
+                <a:spcPct val="115000"/>
+              </a:lnSpc>
+            </a:pPr>
+            <a:r>
+              <a:rPr sz="1250" b="0">
+                <a:solidFill>
+                  <a:srgbClr val="4B6259"/>
+                </a:solidFill>
+                <a:latin typeface="Malgun Gothic"/>
+              </a:rPr>
+              <a:t>memo · created_at</a:t>
+            </a:r>
+          </a:p>
+        </p:txBody>
+      </p:sp>
+      <p:sp>
+        <p:nvSpPr>
+          <p:cNvPr id="24" name="Rectangle 23"/>
+          <p:cNvSpPr/>
+          <p:nvPr/>
+        </p:nvSpPr>
+        <p:spPr>
+          <a:xfrm>
+            <a:off x="8321040" y="1920240"/>
+            <a:ext cx="3246120" cy="2651760"/>
+          </a:xfrm>
+          <a:prstGeom prst="rect">
+            <a:avLst/>
+          </a:prstGeom>
+          <a:solidFill>
+            <a:srgbClr val="FFFFFF"/>
+          </a:solidFill>
+          <a:ln w="12700">
+            <a:solidFill>
+              <a:srgbClr val="DCEEE7"/>
+            </a:solidFill>
+          </a:ln>
+          <a:effectLst/>
+        </p:spPr>
+        <p:style>
+          <a:lnRef idx="1">
+            <a:schemeClr val="accent1"/>
+          </a:lnRef>
+          <a:fillRef idx="3">
+            <a:schemeClr val="accent1"/>
+          </a:fillRef>
+          <a:effectRef idx="2">
+            <a:schemeClr val="accent1"/>
+          </a:effectRef>
+          <a:fontRef idx="minor">
+            <a:schemeClr val="lt1"/>
+          </a:fontRef>
+        </p:style>
+        <p:txBody>
+          <a:bodyPr rtlCol="0" anchor="ctr"/>
+          <a:lstStyle/>
+          <a:p>
+            <a:pPr algn="ctr"/>
+          </a:p>
+        </p:txBody>
+      </p:sp>
+      <p:sp>
+        <p:nvSpPr>
+          <p:cNvPr id="25" name="Rectangle 24"/>
+          <p:cNvSpPr/>
+          <p:nvPr/>
+        </p:nvSpPr>
+        <p:spPr>
+          <a:xfrm>
+            <a:off x="8321040" y="1920240"/>
+            <a:ext cx="3246120" cy="457200"/>
+          </a:xfrm>
+          <a:prstGeom prst="rect">
+            <a:avLst/>
+          </a:prstGeom>
+          <a:solidFill>
+            <a:srgbClr val="0F766E"/>
+          </a:solidFill>
+          <a:ln>
+            <a:noFill/>
+          </a:ln>
+          <a:effectLst/>
+        </p:spPr>
+        <p:style>
+          <a:lnRef idx="1">
+            <a:schemeClr val="accent1"/>
+          </a:lnRef>
+          <a:fillRef idx="3">
+            <a:schemeClr val="accent1"/>
+          </a:fillRef>
+          <a:effectRef idx="2">
+            <a:schemeClr val="accent1"/>
+          </a:effectRef>
+          <a:fontRef idx="minor">
+            <a:schemeClr val="lt1"/>
+          </a:fontRef>
+        </p:style>
+        <p:txBody>
+          <a:bodyPr rtlCol="0" anchor="ctr"/>
+          <a:lstStyle/>
+          <a:p>
+            <a:pPr algn="ctr"/>
+          </a:p>
+        </p:txBody>
+      </p:sp>
+      <p:sp>
+        <p:nvSpPr>
+          <p:cNvPr id="26" name="TextBox 25"/>
+          <p:cNvSpPr txBox="1"/>
+          <p:nvPr/>
+        </p:nvSpPr>
+        <p:spPr>
+          <a:xfrm>
+            <a:off x="8321040" y="1993392"/>
+            <a:ext cx="3246120" cy="365760"/>
+          </a:xfrm>
+          <a:prstGeom prst="rect">
+            <a:avLst/>
+          </a:prstGeom>
+          <a:noFill/>
+        </p:spPr>
+        <p:txBody>
+          <a:bodyPr wrap="square" anchor="t">
+            <a:spAutoFit/>
+          </a:bodyPr>
+          <a:lstStyle/>
+          <a:p>
+            <a:pPr algn="ctr">
+              <a:lnSpc>
+                <a:spcPct val="115000"/>
+              </a:lnSpc>
+            </a:pPr>
+            <a:r>
+              <a:rPr sz="1500" b="1">
+                <a:solidFill>
+                  <a:srgbClr val="FFFFFF"/>
+                </a:solidFill>
+                <a:latin typeface="Malgun Gothic"/>
+              </a:rPr>
+              <a:t>categories</a:t>
+            </a:r>
+          </a:p>
+        </p:txBody>
+      </p:sp>
+      <p:sp>
+        <p:nvSpPr>
+          <p:cNvPr id="27" name="TextBox 26"/>
+          <p:cNvSpPr txBox="1"/>
+          <p:nvPr/>
+        </p:nvSpPr>
+        <p:spPr>
+          <a:xfrm>
+            <a:off x="8549640" y="2514600"/>
+            <a:ext cx="2788920" cy="292608"/>
+          </a:xfrm>
+          <a:prstGeom prst="rect">
+            <a:avLst/>
+          </a:prstGeom>
+          <a:noFill/>
+        </p:spPr>
+        <p:txBody>
+          <a:bodyPr wrap="square" anchor="t">
+            <a:spAutoFit/>
+          </a:bodyPr>
+          <a:lstStyle/>
+          <a:p>
+            <a:pPr algn="l">
+              <a:lnSpc>
+                <a:spcPct val="115000"/>
+              </a:lnSpc>
+            </a:pPr>
+            <a:r>
+              <a:rPr sz="1250" b="0">
+                <a:solidFill>
+                  <a:srgbClr val="4B6259"/>
+                </a:solidFill>
+                <a:latin typeface="Malgun Gothic"/>
+              </a:rPr>
+              <a:t>id (text, PK)</a:t>
+            </a:r>
+          </a:p>
+        </p:txBody>
+      </p:sp>
+      <p:sp>
+        <p:nvSpPr>
+          <p:cNvPr id="28" name="TextBox 27"/>
+          <p:cNvSpPr txBox="1"/>
+          <p:nvPr/>
+        </p:nvSpPr>
+        <p:spPr>
+          <a:xfrm>
+            <a:off x="8549640" y="2825496"/>
+            <a:ext cx="2788920" cy="292608"/>
+          </a:xfrm>
+          <a:prstGeom prst="rect">
+            <a:avLst/>
+          </a:prstGeom>
+          <a:noFill/>
+        </p:spPr>
+        <p:txBody>
+          <a:bodyPr wrap="square" anchor="t">
+            <a:spAutoFit/>
+          </a:bodyPr>
+          <a:lstStyle/>
+          <a:p>
+            <a:pPr algn="l">
+              <a:lnSpc>
+                <a:spcPct val="115000"/>
+              </a:lnSpc>
+            </a:pPr>
+            <a:r>
+              <a:rPr sz="1250" b="0">
+                <a:solidFill>
+                  <a:srgbClr val="4B6259"/>
+                </a:solidFill>
+                <a:latin typeface="Malgun Gothic"/>
+              </a:rPr>
+              <a:t>name / icon / color</a:t>
+            </a:r>
+          </a:p>
+        </p:txBody>
+      </p:sp>
+      <p:sp>
+        <p:nvSpPr>
+          <p:cNvPr id="29" name="TextBox 28"/>
+          <p:cNvSpPr txBox="1"/>
+          <p:nvPr/>
+        </p:nvSpPr>
+        <p:spPr>
+          <a:xfrm>
+            <a:off x="8549640" y="3136392"/>
+            <a:ext cx="2788920" cy="292608"/>
+          </a:xfrm>
+          <a:prstGeom prst="rect">
+            <a:avLst/>
+          </a:prstGeom>
+          <a:noFill/>
+        </p:spPr>
+        <p:txBody>
+          <a:bodyPr wrap="square" anchor="t">
+            <a:spAutoFit/>
+          </a:bodyPr>
+          <a:lstStyle/>
+          <a:p>
+            <a:pPr algn="l">
+              <a:lnSpc>
+                <a:spcPct val="115000"/>
+              </a:lnSpc>
+            </a:pPr>
+            <a:r>
+              <a:rPr sz="1250" b="0">
+                <a:solidFill>
+                  <a:srgbClr val="4B6259"/>
+                </a:solidFill>
+                <a:latin typeface="Malgun Gothic"/>
+              </a:rPr>
+              <a:t>고정 8종 · 읽기 전용</a:t>
+            </a:r>
+          </a:p>
+        </p:txBody>
+      </p:sp>
+      <p:sp>
+        <p:nvSpPr>
+          <p:cNvPr id="30" name="TextBox 29"/>
+          <p:cNvSpPr txBox="1"/>
+          <p:nvPr/>
+        </p:nvSpPr>
+        <p:spPr>
+          <a:xfrm>
+            <a:off x="8549640" y="3447288"/>
+            <a:ext cx="2788920" cy="292608"/>
+          </a:xfrm>
+          <a:prstGeom prst="rect">
+            <a:avLst/>
+          </a:prstGeom>
+          <a:noFill/>
+        </p:spPr>
+        <p:txBody>
+          <a:bodyPr wrap="square" anchor="t">
+            <a:spAutoFit/>
+          </a:bodyPr>
+          <a:lstStyle/>
+          <a:p>
+            <a:pPr algn="l">
+              <a:lnSpc>
+                <a:spcPct val="115000"/>
+              </a:lnSpc>
+            </a:pPr>
+            <a:r>
+              <a:rPr sz="1250" b="0">
+                <a:solidFill>
+                  <a:srgbClr val="4B6259"/>
+                </a:solidFill>
+                <a:latin typeface="Malgun Gothic"/>
+              </a:rPr>
+              <a:t>(CRUD 없음, seed 데이터)</a:t>
+            </a:r>
+          </a:p>
+        </p:txBody>
+      </p:sp>
+      <p:sp>
+        <p:nvSpPr>
+          <p:cNvPr id="31" name="TextBox 30"/>
+          <p:cNvSpPr txBox="1"/>
+          <p:nvPr/>
+        </p:nvSpPr>
+        <p:spPr>
+          <a:xfrm>
+            <a:off x="3977639" y="2926080"/>
+            <a:ext cx="548640" cy="365760"/>
+          </a:xfrm>
+          <a:prstGeom prst="rect">
+            <a:avLst/>
+          </a:prstGeom>
+          <a:noFill/>
+        </p:spPr>
+        <p:txBody>
+          <a:bodyPr wrap="square" anchor="t">
+            <a:spAutoFit/>
+          </a:bodyPr>
+          <a:lstStyle/>
+          <a:p>
+            <a:pPr algn="ctr">
+              <a:lnSpc>
+                <a:spcPct val="115000"/>
+              </a:lnSpc>
+            </a:pPr>
+            <a:r>
+              <a:rPr sz="1200" b="0">
+                <a:solidFill>
+                  <a:srgbClr val="6E8880"/>
+                </a:solidFill>
+                <a:latin typeface="Malgun Gothic"/>
+              </a:rPr>
+              <a:t>1:N</a:t>
+            </a:r>
+          </a:p>
+        </p:txBody>
+      </p:sp>
+      <p:sp>
+        <p:nvSpPr>
+          <p:cNvPr id="32" name="TextBox 31"/>
+          <p:cNvSpPr txBox="1"/>
+          <p:nvPr/>
+        </p:nvSpPr>
+        <p:spPr>
+          <a:xfrm>
+            <a:off x="7818120" y="2926080"/>
+            <a:ext cx="548640" cy="365760"/>
+          </a:xfrm>
+          <a:prstGeom prst="rect">
+            <a:avLst/>
+          </a:prstGeom>
+          <a:noFill/>
+        </p:spPr>
+        <p:txBody>
+          <a:bodyPr wrap="square" anchor="t">
+            <a:spAutoFit/>
+          </a:bodyPr>
+          <a:lstStyle/>
+          <a:p>
+            <a:pPr algn="ctr">
+              <a:lnSpc>
+                <a:spcPct val="115000"/>
+              </a:lnSpc>
+            </a:pPr>
+            <a:r>
+              <a:rPr sz="1200" b="0">
+                <a:solidFill>
+                  <a:srgbClr val="6E8880"/>
+                </a:solidFill>
+                <a:latin typeface="Malgun Gothic"/>
+              </a:rPr>
+              <a:t>N:1</a:t>
+            </a:r>
+          </a:p>
+        </p:txBody>
+      </p:sp>
+      <p:sp>
+        <p:nvSpPr>
+          <p:cNvPr id="33" name="TextBox 32"/>
+          <p:cNvSpPr txBox="1"/>
+          <p:nvPr/>
+        </p:nvSpPr>
+        <p:spPr>
+          <a:xfrm>
+            <a:off x="457200" y="6446520"/>
+            <a:ext cx="7315200" cy="320040"/>
+          </a:xfrm>
+          <a:prstGeom prst="rect">
+            <a:avLst/>
+          </a:prstGeom>
+          <a:noFill/>
+        </p:spPr>
+        <p:txBody>
+          <a:bodyPr wrap="square" anchor="t">
+            <a:spAutoFit/>
+          </a:bodyPr>
+          <a:lstStyle/>
+          <a:p>
+            <a:pPr algn="l">
+              <a:lnSpc>
+                <a:spcPct val="115000"/>
+              </a:lnSpc>
+            </a:pPr>
+            <a:r>
               <a:rPr sz="1000" b="0">
                 <a:solidFill>
                   <a:srgbClr val="6E8880"/>
@@ -9795,7 +9685,7 @@
       </p:sp>
       <p:sp>
         <p:nvSpPr>
-          <p:cNvPr id="16" name="TextBox 15"/>
+          <p:cNvPr id="34" name="TextBox 33"/>
           <p:cNvSpPr txBox="1"/>
           <p:nvPr/>
         </p:nvSpPr>
@@ -9936,7 +9826,7 @@
                 </a:solidFill>
                 <a:latin typeface="Malgun Gothic"/>
               </a:rPr>
-              <a:t>SECURITY</a:t>
+              <a:t>TECH EVOLUTION</a:t>
             </a:r>
           </a:p>
         </p:txBody>
@@ -9975,7 +9865,7 @@
                 </a:solidFill>
                 <a:latin typeface="Malgun Gothic"/>
               </a:rPr>
-              <a:t>보안 &amp; 데이터 무결성</a:t>
+              <a:t>localStorage → Supabase</a:t>
             </a:r>
           </a:p>
         </p:txBody>
@@ -10026,14 +9916,138 @@
       </p:sp>
       <p:sp>
         <p:nvSpPr>
-          <p:cNvPr id="6" name="TextBox 5"/>
+          <p:cNvPr id="6" name="Rectangle 5"/>
+          <p:cNvSpPr/>
+          <p:nvPr/>
+        </p:nvSpPr>
+        <p:spPr>
+          <a:xfrm>
+            <a:off x="640080" y="2011680"/>
+            <a:ext cx="4937760" cy="3291840"/>
+          </a:xfrm>
+          <a:prstGeom prst="rect">
+            <a:avLst/>
+          </a:prstGeom>
+          <a:solidFill>
+            <a:srgbClr val="FFFFFF"/>
+          </a:solidFill>
+          <a:ln w="12700">
+            <a:solidFill>
+              <a:srgbClr val="DCEEE7"/>
+            </a:solidFill>
+          </a:ln>
+          <a:effectLst/>
+        </p:spPr>
+        <p:style>
+          <a:lnRef idx="1">
+            <a:schemeClr val="accent1"/>
+          </a:lnRef>
+          <a:fillRef idx="3">
+            <a:schemeClr val="accent1"/>
+          </a:fillRef>
+          <a:effectRef idx="2">
+            <a:schemeClr val="accent1"/>
+          </a:effectRef>
+          <a:fontRef idx="minor">
+            <a:schemeClr val="lt1"/>
+          </a:fontRef>
+        </p:style>
+        <p:txBody>
+          <a:bodyPr rtlCol="0" anchor="ctr"/>
+          <a:lstStyle/>
+          <a:p>
+            <a:pPr algn="ctr"/>
+          </a:p>
+        </p:txBody>
+      </p:sp>
+      <p:sp>
+        <p:nvSpPr>
+          <p:cNvPr id="7" name="TextBox 6"/>
           <p:cNvSpPr txBox="1"/>
           <p:nvPr/>
         </p:nvSpPr>
         <p:spPr>
           <a:xfrm>
-            <a:off x="640080" y="1828800"/>
-            <a:ext cx="10789920" cy="4572000"/>
+            <a:off x="914400" y="2240280"/>
+            <a:ext cx="4389120" cy="365760"/>
+          </a:xfrm>
+          <a:prstGeom prst="rect">
+            <a:avLst/>
+          </a:prstGeom>
+          <a:noFill/>
+        </p:spPr>
+        <p:txBody>
+          <a:bodyPr wrap="square" anchor="t">
+            <a:spAutoFit/>
+          </a:bodyPr>
+          <a:lstStyle/>
+          <a:p>
+            <a:pPr algn="l">
+              <a:lnSpc>
+                <a:spcPct val="115000"/>
+              </a:lnSpc>
+            </a:pPr>
+            <a:r>
+              <a:rPr sz="1300" b="1">
+                <a:solidFill>
+                  <a:srgbClr val="6E8880"/>
+                </a:solidFill>
+                <a:latin typeface="Malgun Gothic"/>
+              </a:rPr>
+              <a:t>BEFORE</a:t>
+            </a:r>
+          </a:p>
+        </p:txBody>
+      </p:sp>
+      <p:sp>
+        <p:nvSpPr>
+          <p:cNvPr id="8" name="TextBox 7"/>
+          <p:cNvSpPr txBox="1"/>
+          <p:nvPr/>
+        </p:nvSpPr>
+        <p:spPr>
+          <a:xfrm>
+            <a:off x="914400" y="2606040"/>
+            <a:ext cx="4389120" cy="457200"/>
+          </a:xfrm>
+          <a:prstGeom prst="rect">
+            <a:avLst/>
+          </a:prstGeom>
+          <a:noFill/>
+        </p:spPr>
+        <p:txBody>
+          <a:bodyPr wrap="square" anchor="t">
+            <a:spAutoFit/>
+          </a:bodyPr>
+          <a:lstStyle/>
+          <a:p>
+            <a:pPr algn="l">
+              <a:lnSpc>
+                <a:spcPct val="115000"/>
+              </a:lnSpc>
+            </a:pPr>
+            <a:r>
+              <a:rPr sz="1800" b="1">
+                <a:solidFill>
+                  <a:srgbClr val="1F2E2A"/>
+                </a:solidFill>
+                <a:latin typeface="Malgun Gothic"/>
+              </a:rPr>
+              <a:t>정적 사이트 + localStorage</a:t>
+            </a:r>
+          </a:p>
+        </p:txBody>
+      </p:sp>
+      <p:sp>
+        <p:nvSpPr>
+          <p:cNvPr id="9" name="TextBox 8"/>
+          <p:cNvSpPr txBox="1"/>
+          <p:nvPr/>
+        </p:nvSpPr>
+        <p:spPr>
+          <a:xfrm>
+            <a:off x="914400" y="3154680"/>
+            <a:ext cx="4389120" cy="2011680"/>
           </a:xfrm>
           <a:prstGeom prst="rect">
             <a:avLst/>
@@ -10055,29 +10069,32 @@
               </a:spcAft>
             </a:pPr>
             <a:r>
-              <a:rPr sz="1600" b="0">
+              <a:rPr sz="1400" b="0">
                 <a:solidFill>
                   <a:srgbClr val="1F2E2A"/>
                 </a:solidFill>
                 <a:latin typeface="Malgun Gothic"/>
               </a:rPr>
-              <a:t>•  Row Level Security (RLS)</a:t>
+              <a:t>•  백엔드 서버 없이 브라우저에 데이터 저장</a:t>
             </a:r>
           </a:p>
           <a:p>
             <a:pPr>
+              <a:lnSpc>
+                <a:spcPct val="120000"/>
+              </a:lnSpc>
               <a:spcAft>
                 <a:spcPts val="1000"/>
               </a:spcAft>
             </a:pPr>
             <a:r>
-              <a:rPr sz="1300">
-                <a:solidFill>
-                  <a:srgbClr val="6E8880"/>
-                </a:solidFill>
-                <a:latin typeface="Malgun Gothic"/>
-              </a:rPr>
-              <a:t>     고객은 본인 소유 데이터(profiles/expenses)만 조회·수정 가능, 관리자는 role 기반으로 전체 접근</a:t>
+              <a:rPr sz="1400" b="0">
+                <a:solidFill>
+                  <a:srgbClr val="1F2E2A"/>
+                </a:solidFill>
+                <a:latin typeface="Malgun Gothic"/>
+              </a:rPr>
+              <a:t>•  비밀번호까지 평문으로 저장 (데모 목적)</a:t>
             </a:r>
           </a:p>
           <a:p>
@@ -10090,29 +10107,177 @@
               </a:spcAft>
             </a:pPr>
             <a:r>
-              <a:rPr sz="1600" b="0">
+              <a:rPr sz="1400" b="0">
                 <a:solidFill>
                   <a:srgbClr val="1F2E2A"/>
                 </a:solidFill>
                 <a:latin typeface="Malgun Gothic"/>
               </a:rPr>
-              <a:t>•  재귀 없는 관리자 판별</a:t>
-            </a:r>
-          </a:p>
+              <a:t>•  브라우저·기기 간 데이터 공유 불가</a:t>
+            </a:r>
+          </a:p>
+        </p:txBody>
+      </p:sp>
+      <p:sp>
+        <p:nvSpPr>
+          <p:cNvPr id="10" name="Rectangle 9"/>
+          <p:cNvSpPr/>
+          <p:nvPr/>
+        </p:nvSpPr>
+        <p:spPr>
+          <a:xfrm>
+            <a:off x="6583680" y="2011680"/>
+            <a:ext cx="4937760" cy="3291840"/>
+          </a:xfrm>
+          <a:prstGeom prst="rect">
+            <a:avLst/>
+          </a:prstGeom>
+          <a:solidFill>
+            <a:srgbClr val="0F766E"/>
+          </a:solidFill>
+          <a:ln>
+            <a:noFill/>
+          </a:ln>
+          <a:effectLst/>
+        </p:spPr>
+        <p:style>
+          <a:lnRef idx="1">
+            <a:schemeClr val="accent1"/>
+          </a:lnRef>
+          <a:fillRef idx="3">
+            <a:schemeClr val="accent1"/>
+          </a:fillRef>
+          <a:effectRef idx="2">
+            <a:schemeClr val="accent1"/>
+          </a:effectRef>
+          <a:fontRef idx="minor">
+            <a:schemeClr val="lt1"/>
+          </a:fontRef>
+        </p:style>
+        <p:txBody>
+          <a:bodyPr rtlCol="0" anchor="ctr"/>
+          <a:lstStyle/>
+          <a:p>
+            <a:pPr algn="ctr"/>
+          </a:p>
+        </p:txBody>
+      </p:sp>
+      <p:sp>
+        <p:nvSpPr>
+          <p:cNvPr id="11" name="TextBox 10"/>
+          <p:cNvSpPr txBox="1"/>
+          <p:nvPr/>
+        </p:nvSpPr>
+        <p:spPr>
+          <a:xfrm>
+            <a:off x="6858000" y="2240280"/>
+            <a:ext cx="4389120" cy="365760"/>
+          </a:xfrm>
+          <a:prstGeom prst="rect">
+            <a:avLst/>
+          </a:prstGeom>
+          <a:noFill/>
+        </p:spPr>
+        <p:txBody>
+          <a:bodyPr wrap="square" anchor="t">
+            <a:spAutoFit/>
+          </a:bodyPr>
+          <a:lstStyle/>
+          <a:p>
+            <a:pPr algn="l">
+              <a:lnSpc>
+                <a:spcPct val="115000"/>
+              </a:lnSpc>
+            </a:pPr>
+            <a:r>
+              <a:rPr sz="1300" b="1">
+                <a:solidFill>
+                  <a:srgbClr val="34D399"/>
+                </a:solidFill>
+                <a:latin typeface="Malgun Gothic"/>
+              </a:rPr>
+              <a:t>AFTER</a:t>
+            </a:r>
+          </a:p>
+        </p:txBody>
+      </p:sp>
+      <p:sp>
+        <p:nvSpPr>
+          <p:cNvPr id="12" name="TextBox 11"/>
+          <p:cNvSpPr txBox="1"/>
+          <p:nvPr/>
+        </p:nvSpPr>
+        <p:spPr>
+          <a:xfrm>
+            <a:off x="6858000" y="2606040"/>
+            <a:ext cx="4389120" cy="457200"/>
+          </a:xfrm>
+          <a:prstGeom prst="rect">
+            <a:avLst/>
+          </a:prstGeom>
+          <a:noFill/>
+        </p:spPr>
+        <p:txBody>
+          <a:bodyPr wrap="square" anchor="t">
+            <a:spAutoFit/>
+          </a:bodyPr>
+          <a:lstStyle/>
+          <a:p>
+            <a:pPr algn="l">
+              <a:lnSpc>
+                <a:spcPct val="115000"/>
+              </a:lnSpc>
+            </a:pPr>
+            <a:r>
+              <a:rPr sz="1800" b="1">
+                <a:solidFill>
+                  <a:srgbClr val="FFFFFF"/>
+                </a:solidFill>
+                <a:latin typeface="Malgun Gothic"/>
+              </a:rPr>
+              <a:t>Supabase (PostgreSQL)</a:t>
+            </a:r>
+          </a:p>
+        </p:txBody>
+      </p:sp>
+      <p:sp>
+        <p:nvSpPr>
+          <p:cNvPr id="13" name="TextBox 12"/>
+          <p:cNvSpPr txBox="1"/>
+          <p:nvPr/>
+        </p:nvSpPr>
+        <p:spPr>
+          <a:xfrm>
+            <a:off x="6858000" y="3154680"/>
+            <a:ext cx="4389120" cy="2011680"/>
+          </a:xfrm>
+          <a:prstGeom prst="rect">
+            <a:avLst/>
+          </a:prstGeom>
+          <a:noFill/>
+        </p:spPr>
+        <p:txBody>
+          <a:bodyPr wrap="square">
+            <a:spAutoFit/>
+          </a:bodyPr>
+          <a:lstStyle/>
           <a:p>
             <a:pPr>
+              <a:lnSpc>
+                <a:spcPct val="120000"/>
+              </a:lnSpc>
               <a:spcAft>
                 <a:spcPts val="1000"/>
               </a:spcAft>
             </a:pPr>
             <a:r>
-              <a:rPr sz="1300">
-                <a:solidFill>
-                  <a:srgbClr val="6E8880"/>
-                </a:solidFill>
-                <a:latin typeface="Malgun Gothic"/>
-              </a:rPr>
-              <a:t>     profiles.role을 정책 안에서 직접 조회하면 무한 재귀가 발생 → SECURITY DEFINER 함수(is_admin())로 우회</a:t>
+              <a:rPr sz="1400" b="0">
+                <a:solidFill>
+                  <a:srgbClr val="E8F6F1"/>
+                </a:solidFill>
+                <a:latin typeface="Malgun Gothic"/>
+              </a:rPr>
+              <a:t>•  Supabase Auth로 인증 위임 (평문 비밀번호 제거)</a:t>
             </a:r>
           </a:p>
           <a:p>
@@ -10125,71 +10290,82 @@
               </a:spcAft>
             </a:pPr>
             <a:r>
-              <a:rPr sz="1600" b="0">
-                <a:solidFill>
-                  <a:srgbClr val="1F2E2A"/>
-                </a:solidFill>
-                <a:latin typeface="Malgun Gothic"/>
-              </a:rPr>
-              <a:t>•  최소 권한 원칙</a:t>
+              <a:rPr sz="1400" b="0">
+                <a:solidFill>
+                  <a:srgbClr val="E8F6F1"/>
+                </a:solidFill>
+                <a:latin typeface="Malgun Gothic"/>
+              </a:rPr>
+              <a:t>•  profiles / categories / expenses 3개 테이블 설계</a:t>
             </a:r>
           </a:p>
           <a:p>
             <a:pPr>
+              <a:lnSpc>
+                <a:spcPct val="120000"/>
+              </a:lnSpc>
               <a:spcAft>
                 <a:spcPts val="1000"/>
               </a:spcAft>
             </a:pPr>
             <a:r>
-              <a:rPr sz="1300">
-                <a:solidFill>
-                  <a:srgbClr val="6E8880"/>
-                </a:solidFill>
-                <a:latin typeface="Malgun Gothic"/>
-              </a:rPr>
-              <a:t>     Supabase Advisor로 내부 함수의 불필요한 RPC 노출을 점검 → anon/authenticated의 불필요한 EXECUTE 권한 회수</a:t>
-            </a:r>
-          </a:p>
-          <a:p>
-            <a:pPr>
-              <a:lnSpc>
-                <a:spcPct val="120000"/>
-              </a:lnSpc>
-              <a:spcAft>
-                <a:spcPts val="1000"/>
-              </a:spcAft>
-            </a:pPr>
-            <a:r>
-              <a:rPr sz="1600" b="0">
-                <a:solidFill>
-                  <a:srgbClr val="1F2E2A"/>
-                </a:solidFill>
-                <a:latin typeface="Malgun Gothic"/>
-              </a:rPr>
-              <a:t>•  인증 위임</a:t>
-            </a:r>
-          </a:p>
-          <a:p>
-            <a:pPr>
-              <a:spcAft>
-                <a:spcPts val="1000"/>
-              </a:spcAft>
-            </a:pPr>
-            <a:r>
-              <a:rPr sz="1300">
-                <a:solidFill>
-                  <a:srgbClr val="6E8880"/>
-                </a:solidFill>
-                <a:latin typeface="Malgun Gothic"/>
-              </a:rPr>
-              <a:t>     비밀번호 저장·검증을 직접 구현하지 않고 Supabase Auth에 위임해 자체 구현 리스크 제거</a:t>
-            </a:r>
-          </a:p>
-        </p:txBody>
-      </p:sp>
-      <p:sp>
-        <p:nvSpPr>
-          <p:cNvPr id="7" name="TextBox 6"/>
+              <a:rPr sz="1400" b="0">
+                <a:solidFill>
+                  <a:srgbClr val="E8F6F1"/>
+                </a:solidFill>
+                <a:latin typeface="Malgun Gothic"/>
+              </a:rPr>
+              <a:t>•  Row Level Security로 행 단위 접근 제어</a:t>
+            </a:r>
+          </a:p>
+        </p:txBody>
+      </p:sp>
+      <p:sp>
+        <p:nvSpPr>
+          <p:cNvPr id="14" name="Chevron 13"/>
+          <p:cNvSpPr/>
+          <p:nvPr/>
+        </p:nvSpPr>
+        <p:spPr>
+          <a:xfrm>
+            <a:off x="5715000" y="3291840"/>
+            <a:ext cx="731520" cy="548640"/>
+          </a:xfrm>
+          <a:prstGeom prst="chevron">
+            <a:avLst/>
+          </a:prstGeom>
+          <a:solidFill>
+            <a:srgbClr val="34D399"/>
+          </a:solidFill>
+          <a:ln>
+            <a:noFill/>
+          </a:ln>
+        </p:spPr>
+        <p:style>
+          <a:lnRef idx="1">
+            <a:schemeClr val="accent1"/>
+          </a:lnRef>
+          <a:fillRef idx="3">
+            <a:schemeClr val="accent1"/>
+          </a:fillRef>
+          <a:effectRef idx="2">
+            <a:schemeClr val="accent1"/>
+          </a:effectRef>
+          <a:fontRef idx="minor">
+            <a:schemeClr val="lt1"/>
+          </a:fontRef>
+        </p:style>
+        <p:txBody>
+          <a:bodyPr rtlCol="0" anchor="ctr"/>
+          <a:lstStyle/>
+          <a:p>
+            <a:pPr algn="ctr"/>
+          </a:p>
+        </p:txBody>
+      </p:sp>
+      <p:sp>
+        <p:nvSpPr>
+          <p:cNvPr id="15" name="TextBox 14"/>
           <p:cNvSpPr txBox="1"/>
           <p:nvPr/>
         </p:nvSpPr>
@@ -10228,7 +10404,7 @@
       </p:sp>
       <p:sp>
         <p:nvSpPr>
-          <p:cNvPr id="8" name="TextBox 7"/>
+          <p:cNvPr id="16" name="TextBox 15"/>
           <p:cNvSpPr txBox="1"/>
           <p:nvPr/>
         </p:nvSpPr>
@@ -10369,7 +10545,7 @@
                 </a:solidFill>
                 <a:latin typeface="Malgun Gothic"/>
               </a:rPr>
-              <a:t>WORKFLOW</a:t>
+              <a:t>SECURITY</a:t>
             </a:r>
           </a:p>
         </p:txBody>
@@ -10408,7 +10584,7 @@
                 </a:solidFill>
                 <a:latin typeface="Malgun Gothic"/>
               </a:rPr>
-              <a:t>협업 워크플로우</a:t>
+              <a:t>보안 &amp; 데이터 무결성</a:t>
             </a:r>
           </a:p>
         </p:txBody>
@@ -10459,475 +10635,14 @@
       </p:sp>
       <p:sp>
         <p:nvSpPr>
-          <p:cNvPr id="6" name="Rounded Rectangle 5"/>
-          <p:cNvSpPr/>
-          <p:nvPr/>
-        </p:nvSpPr>
-        <p:spPr>
-          <a:xfrm>
-            <a:off x="822960" y="2377440"/>
-            <a:ext cx="2377440" cy="822960"/>
-          </a:xfrm>
-          <a:prstGeom prst="roundRect">
-            <a:avLst/>
-          </a:prstGeom>
-          <a:solidFill>
-            <a:srgbClr val="0F766E"/>
-          </a:solidFill>
-          <a:ln>
-            <a:noFill/>
-          </a:ln>
-          <a:effectLst/>
-        </p:spPr>
-        <p:style>
-          <a:lnRef idx="1">
-            <a:schemeClr val="accent1"/>
-          </a:lnRef>
-          <a:fillRef idx="3">
-            <a:schemeClr val="accent1"/>
-          </a:fillRef>
-          <a:effectRef idx="2">
-            <a:schemeClr val="accent1"/>
-          </a:effectRef>
-          <a:fontRef idx="minor">
-            <a:schemeClr val="lt1"/>
-          </a:fontRef>
-        </p:style>
-        <p:txBody>
-          <a:bodyPr rtlCol="0" anchor="ctr"/>
-          <a:lstStyle/>
-          <a:p>
-            <a:pPr algn="ctr"/>
-          </a:p>
-        </p:txBody>
-      </p:sp>
-      <p:sp>
-        <p:nvSpPr>
-          <p:cNvPr id="7" name="TextBox 6"/>
+          <p:cNvPr id="6" name="TextBox 5"/>
           <p:cNvSpPr txBox="1"/>
           <p:nvPr/>
         </p:nvSpPr>
         <p:spPr>
           <a:xfrm>
-            <a:off x="822960" y="2624328"/>
-            <a:ext cx="2377440" cy="365760"/>
-          </a:xfrm>
-          <a:prstGeom prst="rect">
-            <a:avLst/>
-          </a:prstGeom>
-          <a:noFill/>
-        </p:spPr>
-        <p:txBody>
-          <a:bodyPr wrap="square" anchor="t">
-            <a:spAutoFit/>
-          </a:bodyPr>
-          <a:lstStyle/>
-          <a:p>
-            <a:pPr algn="ctr">
-              <a:lnSpc>
-                <a:spcPct val="115000"/>
-              </a:lnSpc>
-            </a:pPr>
-            <a:r>
-              <a:rPr sz="1600" b="1">
-                <a:solidFill>
-                  <a:srgbClr val="FFFFFF"/>
-                </a:solidFill>
-                <a:latin typeface="Malgun Gothic"/>
-              </a:rPr>
-              <a:t>feat/shared</a:t>
-            </a:r>
-          </a:p>
-        </p:txBody>
-      </p:sp>
-      <p:sp>
-        <p:nvSpPr>
-          <p:cNvPr id="8" name="Right Arrow 7"/>
-          <p:cNvSpPr/>
-          <p:nvPr/>
-        </p:nvSpPr>
-        <p:spPr>
-          <a:xfrm>
-            <a:off x="3246120" y="2651760"/>
-            <a:ext cx="274320" cy="274320"/>
-          </a:xfrm>
-          <a:prstGeom prst="rightArrow">
-            <a:avLst/>
-          </a:prstGeom>
-          <a:solidFill>
-            <a:srgbClr val="34D399"/>
-          </a:solidFill>
-          <a:ln>
-            <a:noFill/>
-          </a:ln>
-        </p:spPr>
-        <p:style>
-          <a:lnRef idx="1">
-            <a:schemeClr val="accent1"/>
-          </a:lnRef>
-          <a:fillRef idx="3">
-            <a:schemeClr val="accent1"/>
-          </a:fillRef>
-          <a:effectRef idx="2">
-            <a:schemeClr val="accent1"/>
-          </a:effectRef>
-          <a:fontRef idx="minor">
-            <a:schemeClr val="lt1"/>
-          </a:fontRef>
-        </p:style>
-        <p:txBody>
-          <a:bodyPr rtlCol="0" anchor="ctr"/>
-          <a:lstStyle/>
-          <a:p>
-            <a:pPr algn="ctr"/>
-          </a:p>
-        </p:txBody>
-      </p:sp>
-      <p:sp>
-        <p:nvSpPr>
-          <p:cNvPr id="9" name="Rounded Rectangle 8"/>
-          <p:cNvSpPr/>
-          <p:nvPr/>
-        </p:nvSpPr>
-        <p:spPr>
-          <a:xfrm>
-            <a:off x="3520440" y="2377440"/>
-            <a:ext cx="2377440" cy="822960"/>
-          </a:xfrm>
-          <a:prstGeom prst="roundRect">
-            <a:avLst/>
-          </a:prstGeom>
-          <a:solidFill>
-            <a:srgbClr val="0F766E"/>
-          </a:solidFill>
-          <a:ln>
-            <a:noFill/>
-          </a:ln>
-          <a:effectLst/>
-        </p:spPr>
-        <p:style>
-          <a:lnRef idx="1">
-            <a:schemeClr val="accent1"/>
-          </a:lnRef>
-          <a:fillRef idx="3">
-            <a:schemeClr val="accent1"/>
-          </a:fillRef>
-          <a:effectRef idx="2">
-            <a:schemeClr val="accent1"/>
-          </a:effectRef>
-          <a:fontRef idx="minor">
-            <a:schemeClr val="lt1"/>
-          </a:fontRef>
-        </p:style>
-        <p:txBody>
-          <a:bodyPr rtlCol="0" anchor="ctr"/>
-          <a:lstStyle/>
-          <a:p>
-            <a:pPr algn="ctr"/>
-          </a:p>
-        </p:txBody>
-      </p:sp>
-      <p:sp>
-        <p:nvSpPr>
-          <p:cNvPr id="10" name="TextBox 9"/>
-          <p:cNvSpPr txBox="1"/>
-          <p:nvPr/>
-        </p:nvSpPr>
-        <p:spPr>
-          <a:xfrm>
-            <a:off x="3520440" y="2624328"/>
-            <a:ext cx="2377440" cy="365760"/>
-          </a:xfrm>
-          <a:prstGeom prst="rect">
-            <a:avLst/>
-          </a:prstGeom>
-          <a:noFill/>
-        </p:spPr>
-        <p:txBody>
-          <a:bodyPr wrap="square" anchor="t">
-            <a:spAutoFit/>
-          </a:bodyPr>
-          <a:lstStyle/>
-          <a:p>
-            <a:pPr algn="ctr">
-              <a:lnSpc>
-                <a:spcPct val="115000"/>
-              </a:lnSpc>
-            </a:pPr>
-            <a:r>
-              <a:rPr sz="1600" b="1">
-                <a:solidFill>
-                  <a:srgbClr val="FFFFFF"/>
-                </a:solidFill>
-                <a:latin typeface="Malgun Gothic"/>
-              </a:rPr>
-              <a:t>feat/auth</a:t>
-            </a:r>
-          </a:p>
-        </p:txBody>
-      </p:sp>
-      <p:sp>
-        <p:nvSpPr>
-          <p:cNvPr id="11" name="Right Arrow 10"/>
-          <p:cNvSpPr/>
-          <p:nvPr/>
-        </p:nvSpPr>
-        <p:spPr>
-          <a:xfrm>
-            <a:off x="5943600" y="2651760"/>
-            <a:ext cx="274320" cy="274320"/>
-          </a:xfrm>
-          <a:prstGeom prst="rightArrow">
-            <a:avLst/>
-          </a:prstGeom>
-          <a:solidFill>
-            <a:srgbClr val="34D399"/>
-          </a:solidFill>
-          <a:ln>
-            <a:noFill/>
-          </a:ln>
-        </p:spPr>
-        <p:style>
-          <a:lnRef idx="1">
-            <a:schemeClr val="accent1"/>
-          </a:lnRef>
-          <a:fillRef idx="3">
-            <a:schemeClr val="accent1"/>
-          </a:fillRef>
-          <a:effectRef idx="2">
-            <a:schemeClr val="accent1"/>
-          </a:effectRef>
-          <a:fontRef idx="minor">
-            <a:schemeClr val="lt1"/>
-          </a:fontRef>
-        </p:style>
-        <p:txBody>
-          <a:bodyPr rtlCol="0" anchor="ctr"/>
-          <a:lstStyle/>
-          <a:p>
-            <a:pPr algn="ctr"/>
-          </a:p>
-        </p:txBody>
-      </p:sp>
-      <p:sp>
-        <p:nvSpPr>
-          <p:cNvPr id="12" name="Rounded Rectangle 11"/>
-          <p:cNvSpPr/>
-          <p:nvPr/>
-        </p:nvSpPr>
-        <p:spPr>
-          <a:xfrm>
-            <a:off x="6217920" y="2377440"/>
-            <a:ext cx="2377440" cy="822960"/>
-          </a:xfrm>
-          <a:prstGeom prst="roundRect">
-            <a:avLst/>
-          </a:prstGeom>
-          <a:solidFill>
-            <a:srgbClr val="0F766E"/>
-          </a:solidFill>
-          <a:ln>
-            <a:noFill/>
-          </a:ln>
-          <a:effectLst/>
-        </p:spPr>
-        <p:style>
-          <a:lnRef idx="1">
-            <a:schemeClr val="accent1"/>
-          </a:lnRef>
-          <a:fillRef idx="3">
-            <a:schemeClr val="accent1"/>
-          </a:fillRef>
-          <a:effectRef idx="2">
-            <a:schemeClr val="accent1"/>
-          </a:effectRef>
-          <a:fontRef idx="minor">
-            <a:schemeClr val="lt1"/>
-          </a:fontRef>
-        </p:style>
-        <p:txBody>
-          <a:bodyPr rtlCol="0" anchor="ctr"/>
-          <a:lstStyle/>
-          <a:p>
-            <a:pPr algn="ctr"/>
-          </a:p>
-        </p:txBody>
-      </p:sp>
-      <p:sp>
-        <p:nvSpPr>
-          <p:cNvPr id="13" name="TextBox 12"/>
-          <p:cNvSpPr txBox="1"/>
-          <p:nvPr/>
-        </p:nvSpPr>
-        <p:spPr>
-          <a:xfrm>
-            <a:off x="6217920" y="2624328"/>
-            <a:ext cx="2377440" cy="365760"/>
-          </a:xfrm>
-          <a:prstGeom prst="rect">
-            <a:avLst/>
-          </a:prstGeom>
-          <a:noFill/>
-        </p:spPr>
-        <p:txBody>
-          <a:bodyPr wrap="square" anchor="t">
-            <a:spAutoFit/>
-          </a:bodyPr>
-          <a:lstStyle/>
-          <a:p>
-            <a:pPr algn="ctr">
-              <a:lnSpc>
-                <a:spcPct val="115000"/>
-              </a:lnSpc>
-            </a:pPr>
-            <a:r>
-              <a:rPr sz="1600" b="1">
-                <a:solidFill>
-                  <a:srgbClr val="FFFFFF"/>
-                </a:solidFill>
-                <a:latin typeface="Malgun Gothic"/>
-              </a:rPr>
-              <a:t>feat/core</a:t>
-            </a:r>
-          </a:p>
-        </p:txBody>
-      </p:sp>
-      <p:sp>
-        <p:nvSpPr>
-          <p:cNvPr id="14" name="Right Arrow 13"/>
-          <p:cNvSpPr/>
-          <p:nvPr/>
-        </p:nvSpPr>
-        <p:spPr>
-          <a:xfrm>
-            <a:off x="8641080" y="2651760"/>
-            <a:ext cx="274320" cy="274320"/>
-          </a:xfrm>
-          <a:prstGeom prst="rightArrow">
-            <a:avLst/>
-          </a:prstGeom>
-          <a:solidFill>
-            <a:srgbClr val="34D399"/>
-          </a:solidFill>
-          <a:ln>
-            <a:noFill/>
-          </a:ln>
-        </p:spPr>
-        <p:style>
-          <a:lnRef idx="1">
-            <a:schemeClr val="accent1"/>
-          </a:lnRef>
-          <a:fillRef idx="3">
-            <a:schemeClr val="accent1"/>
-          </a:fillRef>
-          <a:effectRef idx="2">
-            <a:schemeClr val="accent1"/>
-          </a:effectRef>
-          <a:fontRef idx="minor">
-            <a:schemeClr val="lt1"/>
-          </a:fontRef>
-        </p:style>
-        <p:txBody>
-          <a:bodyPr rtlCol="0" anchor="ctr"/>
-          <a:lstStyle/>
-          <a:p>
-            <a:pPr algn="ctr"/>
-          </a:p>
-        </p:txBody>
-      </p:sp>
-      <p:sp>
-        <p:nvSpPr>
-          <p:cNvPr id="15" name="Rounded Rectangle 14"/>
-          <p:cNvSpPr/>
-          <p:nvPr/>
-        </p:nvSpPr>
-        <p:spPr>
-          <a:xfrm>
-            <a:off x="8915400" y="2377440"/>
-            <a:ext cx="2377440" cy="822960"/>
-          </a:xfrm>
-          <a:prstGeom prst="roundRect">
-            <a:avLst/>
-          </a:prstGeom>
-          <a:solidFill>
-            <a:srgbClr val="1E3A34"/>
-          </a:solidFill>
-          <a:ln>
-            <a:noFill/>
-          </a:ln>
-          <a:effectLst/>
-        </p:spPr>
-        <p:style>
-          <a:lnRef idx="1">
-            <a:schemeClr val="accent1"/>
-          </a:lnRef>
-          <a:fillRef idx="3">
-            <a:schemeClr val="accent1"/>
-          </a:fillRef>
-          <a:effectRef idx="2">
-            <a:schemeClr val="accent1"/>
-          </a:effectRef>
-          <a:fontRef idx="minor">
-            <a:schemeClr val="lt1"/>
-          </a:fontRef>
-        </p:style>
-        <p:txBody>
-          <a:bodyPr rtlCol="0" anchor="ctr"/>
-          <a:lstStyle/>
-          <a:p>
-            <a:pPr algn="ctr"/>
-          </a:p>
-        </p:txBody>
-      </p:sp>
-      <p:sp>
-        <p:nvSpPr>
-          <p:cNvPr id="16" name="TextBox 15"/>
-          <p:cNvSpPr txBox="1"/>
-          <p:nvPr/>
-        </p:nvSpPr>
-        <p:spPr>
-          <a:xfrm>
-            <a:off x="8915400" y="2624328"/>
-            <a:ext cx="2377440" cy="365760"/>
-          </a:xfrm>
-          <a:prstGeom prst="rect">
-            <a:avLst/>
-          </a:prstGeom>
-          <a:noFill/>
-        </p:spPr>
-        <p:txBody>
-          <a:bodyPr wrap="square" anchor="t">
-            <a:spAutoFit/>
-          </a:bodyPr>
-          <a:lstStyle/>
-          <a:p>
-            <a:pPr algn="ctr">
-              <a:lnSpc>
-                <a:spcPct val="115000"/>
-              </a:lnSpc>
-            </a:pPr>
-            <a:r>
-              <a:rPr sz="1600" b="1">
-                <a:solidFill>
-                  <a:srgbClr val="FFFFFF"/>
-                </a:solidFill>
-                <a:latin typeface="Malgun Gothic"/>
-              </a:rPr>
-              <a:t>main</a:t>
-            </a:r>
-          </a:p>
-        </p:txBody>
-      </p:sp>
-      <p:sp>
-        <p:nvSpPr>
-          <p:cNvPr id="17" name="TextBox 16"/>
-          <p:cNvSpPr txBox="1"/>
-          <p:nvPr/>
-        </p:nvSpPr>
-        <p:spPr>
-          <a:xfrm>
-            <a:off x="822960" y="3657600"/>
-            <a:ext cx="10515600" cy="2560320"/>
+            <a:off x="640080" y="1828800"/>
+            <a:ext cx="10789920" cy="4572000"/>
           </a:xfrm>
           <a:prstGeom prst="rect">
             <a:avLst/>
@@ -10949,13 +10664,13 @@
               </a:spcAft>
             </a:pPr>
             <a:r>
-              <a:rPr sz="1500" b="0">
+              <a:rPr sz="1600" b="0">
                 <a:solidFill>
                   <a:srgbClr val="1F2E2A"/>
                 </a:solidFill>
                 <a:latin typeface="Malgun Gothic"/>
               </a:rPr>
-              <a:t>•  PR 기반 병합</a:t>
+              <a:t>•  Row Level Security (RLS)</a:t>
             </a:r>
           </a:p>
           <a:p>
@@ -10965,13 +10680,13 @@
               </a:spcAft>
             </a:pPr>
             <a:r>
-              <a:rPr sz="1200">
+              <a:rPr sz="1300">
                 <a:solidFill>
                   <a:srgbClr val="6E8880"/>
                 </a:solidFill>
                 <a:latin typeface="Malgun Gothic"/>
               </a:rPr>
-              <a:t>     공통 자원 → 인증 → 핵심 기능 순으로 브랜치를 나눠 작업 후 Pull Request로 main에 병합</a:t>
+              <a:t>     고객은 본인 소유 데이터(profiles/expenses)만 조회·수정 가능, 관리자는 role 기반으로 전체 접근</a:t>
             </a:r>
           </a:p>
           <a:p>
@@ -10984,13 +10699,13 @@
               </a:spcAft>
             </a:pPr>
             <a:r>
-              <a:rPr sz="1500" b="0">
+              <a:rPr sz="1600" b="0">
                 <a:solidFill>
                   <a:srgbClr val="1F2E2A"/>
                 </a:solidFill>
                 <a:latin typeface="Malgun Gothic"/>
               </a:rPr>
-              <a:t>•  병합 후 브랜치 정리</a:t>
+              <a:t>•  재귀 없는 관리자 판별</a:t>
             </a:r>
           </a:p>
           <a:p>
@@ -11000,20 +10715,90 @@
               </a:spcAft>
             </a:pPr>
             <a:r>
-              <a:rPr sz="1200">
+              <a:rPr sz="1300">
                 <a:solidFill>
                   <a:srgbClr val="6E8880"/>
                 </a:solidFill>
                 <a:latin typeface="Malgun Gothic"/>
               </a:rPr>
-              <a:t>     머지가 끝난 feat/* 브랜치와 사용하지 않는 master 브랜치를 삭제해 원격 저장소를 깔끔하게 유지</a:t>
-            </a:r>
-          </a:p>
-        </p:txBody>
-      </p:sp>
-      <p:sp>
-        <p:nvSpPr>
-          <p:cNvPr id="18" name="TextBox 17"/>
+              <a:t>     profiles.role을 정책 안에서 직접 조회하면 무한 재귀가 발생 → SECURITY DEFINER 함수(is_admin())로 우회</a:t>
+            </a:r>
+          </a:p>
+          <a:p>
+            <a:pPr>
+              <a:lnSpc>
+                <a:spcPct val="120000"/>
+              </a:lnSpc>
+              <a:spcAft>
+                <a:spcPts val="1000"/>
+              </a:spcAft>
+            </a:pPr>
+            <a:r>
+              <a:rPr sz="1600" b="0">
+                <a:solidFill>
+                  <a:srgbClr val="1F2E2A"/>
+                </a:solidFill>
+                <a:latin typeface="Malgun Gothic"/>
+              </a:rPr>
+              <a:t>•  최소 권한 원칙</a:t>
+            </a:r>
+          </a:p>
+          <a:p>
+            <a:pPr>
+              <a:spcAft>
+                <a:spcPts val="1000"/>
+              </a:spcAft>
+            </a:pPr>
+            <a:r>
+              <a:rPr sz="1300">
+                <a:solidFill>
+                  <a:srgbClr val="6E8880"/>
+                </a:solidFill>
+                <a:latin typeface="Malgun Gothic"/>
+              </a:rPr>
+              <a:t>     Supabase Advisor로 내부 함수의 불필요한 RPC 노출을 점검 → anon/authenticated의 불필요한 EXECUTE 권한 회수</a:t>
+            </a:r>
+          </a:p>
+          <a:p>
+            <a:pPr>
+              <a:lnSpc>
+                <a:spcPct val="120000"/>
+              </a:lnSpc>
+              <a:spcAft>
+                <a:spcPts val="1000"/>
+              </a:spcAft>
+            </a:pPr>
+            <a:r>
+              <a:rPr sz="1600" b="0">
+                <a:solidFill>
+                  <a:srgbClr val="1F2E2A"/>
+                </a:solidFill>
+                <a:latin typeface="Malgun Gothic"/>
+              </a:rPr>
+              <a:t>•  인증 위임</a:t>
+            </a:r>
+          </a:p>
+          <a:p>
+            <a:pPr>
+              <a:spcAft>
+                <a:spcPts val="1000"/>
+              </a:spcAft>
+            </a:pPr>
+            <a:r>
+              <a:rPr sz="1300">
+                <a:solidFill>
+                  <a:srgbClr val="6E8880"/>
+                </a:solidFill>
+                <a:latin typeface="Malgun Gothic"/>
+              </a:rPr>
+              <a:t>     비밀번호 저장·검증을 직접 구현하지 않고 Supabase Auth에 위임해 자체 구현 리스크 제거</a:t>
+            </a:r>
+          </a:p>
+        </p:txBody>
+      </p:sp>
+      <p:sp>
+        <p:nvSpPr>
+          <p:cNvPr id="7" name="TextBox 6"/>
           <p:cNvSpPr txBox="1"/>
           <p:nvPr/>
         </p:nvSpPr>
@@ -11052,7 +10837,7 @@
       </p:sp>
       <p:sp>
         <p:nvSpPr>
-          <p:cNvPr id="19" name="TextBox 18"/>
+          <p:cNvPr id="8" name="TextBox 7"/>
           <p:cNvSpPr txBox="1"/>
           <p:nvPr/>
         </p:nvSpPr>

--- a/portfolio/expense-tracker-portfolio.pptx
+++ b/portfolio/expense-tracker-portfolio.pptx
@@ -6713,7 +6713,7 @@
               </a:spcAft>
             </a:pPr>
             <a:r>
-              <a:rPr sz="1600" b="0">
+              <a:rPr sz="1500" b="0">
                 <a:solidFill>
                   <a:srgbClr val="1F2E2A"/>
                 </a:solidFill>
@@ -6729,7 +6729,7 @@
               </a:spcAft>
             </a:pPr>
             <a:r>
-              <a:rPr sz="1300">
+              <a:rPr sz="1200">
                 <a:solidFill>
                   <a:srgbClr val="6E8880"/>
                 </a:solidFill>
@@ -6748,7 +6748,7 @@
               </a:spcAft>
             </a:pPr>
             <a:r>
-              <a:rPr sz="1600" b="0">
+              <a:rPr sz="1500" b="0">
                 <a:solidFill>
                   <a:srgbClr val="1F2E2A"/>
                 </a:solidFill>
@@ -6764,7 +6764,7 @@
               </a:spcAft>
             </a:pPr>
             <a:r>
-              <a:rPr sz="1300">
+              <a:rPr sz="1200">
                 <a:solidFill>
                   <a:srgbClr val="6E8880"/>
                 </a:solidFill>
@@ -6783,7 +6783,7 @@
               </a:spcAft>
             </a:pPr>
             <a:r>
-              <a:rPr sz="1600" b="0">
+              <a:rPr sz="1500" b="0">
                 <a:solidFill>
                   <a:srgbClr val="1F2E2A"/>
                 </a:solidFill>
@@ -6799,7 +6799,7 @@
               </a:spcAft>
             </a:pPr>
             <a:r>
-              <a:rPr sz="1300">
+              <a:rPr sz="1200">
                 <a:solidFill>
                   <a:srgbClr val="6E8880"/>
                 </a:solidFill>
@@ -6818,7 +6818,7 @@
               </a:spcAft>
             </a:pPr>
             <a:r>
-              <a:rPr sz="1600" b="0">
+              <a:rPr sz="1500" b="0">
                 <a:solidFill>
                   <a:srgbClr val="1F2E2A"/>
                 </a:solidFill>
@@ -6834,7 +6834,7 @@
               </a:spcAft>
             </a:pPr>
             <a:r>
-              <a:rPr sz="1300">
+              <a:rPr sz="1200">
                 <a:solidFill>
                   <a:srgbClr val="6E8880"/>
                 </a:solidFill>
@@ -6853,7 +6853,7 @@
               </a:spcAft>
             </a:pPr>
             <a:r>
-              <a:rPr sz="1600" b="0">
+              <a:rPr sz="1500" b="0">
                 <a:solidFill>
                   <a:srgbClr val="1F2E2A"/>
                 </a:solidFill>
@@ -6869,13 +6869,48 @@
               </a:spcAft>
             </a:pPr>
             <a:r>
-              <a:rPr sz="1300">
+              <a:rPr sz="1200">
                 <a:solidFill>
                   <a:srgbClr val="6E8880"/>
                 </a:solidFill>
                 <a:latin typeface="Malgun Gothic"/>
               </a:rPr>
               <a:t>     식비·교통·주거·문화/여가·쇼핑·의료·교육·기타 — 모든 사용자 공용</a:t>
+            </a:r>
+          </a:p>
+          <a:p>
+            <a:pPr>
+              <a:lnSpc>
+                <a:spcPct val="120000"/>
+              </a:lnSpc>
+              <a:spcAft>
+                <a:spcPts val="1000"/>
+              </a:spcAft>
+            </a:pPr>
+            <a:r>
+              <a:rPr sz="1500" b="0">
+                <a:solidFill>
+                  <a:srgbClr val="1F2E2A"/>
+                </a:solidFill>
+                <a:latin typeface="Malgun Gothic"/>
+              </a:rPr>
+              <a:t>•  게시판</a:t>
+            </a:r>
+          </a:p>
+          <a:p>
+            <a:pPr>
+              <a:spcAft>
+                <a:spcPts val="1000"/>
+              </a:spcAft>
+            </a:pPr>
+            <a:r>
+              <a:rPr sz="1200">
+                <a:solidFill>
+                  <a:srgbClr val="6E8880"/>
+                </a:solidFill>
+                <a:latin typeface="Malgun Gothic"/>
+              </a:rPr>
+              <a:t>     절약 팁을 자유롭게 작성·검색하고 댓글로 소통, 본인 글/댓글만 삭제 가능</a:t>
             </a:r>
           </a:p>
         </p:txBody>
@@ -7303,6 +7338,41 @@
                 <a:latin typeface="Malgun Gothic"/>
               </a:rPr>
               <a:t>     이름/이메일 검색, 계정 정지·해제, 상세 화면에서 최근 지출 5건 확인</a:t>
+            </a:r>
+          </a:p>
+          <a:p>
+            <a:pPr>
+              <a:lnSpc>
+                <a:spcPct val="120000"/>
+              </a:lnSpc>
+              <a:spcAft>
+                <a:spcPts val="1000"/>
+              </a:spcAft>
+            </a:pPr>
+            <a:r>
+              <a:rPr sz="1600" b="0">
+                <a:solidFill>
+                  <a:srgbClr val="1F2E2A"/>
+                </a:solidFill>
+                <a:latin typeface="Malgun Gothic"/>
+              </a:rPr>
+              <a:t>•  게시판 관리</a:t>
+            </a:r>
+          </a:p>
+          <a:p>
+            <a:pPr>
+              <a:spcAft>
+                <a:spcPts val="1000"/>
+              </a:spcAft>
+            </a:pPr>
+            <a:r>
+              <a:rPr sz="1300">
+                <a:solidFill>
+                  <a:srgbClr val="6E8880"/>
+                </a:solidFill>
+                <a:latin typeface="Malgun Gothic"/>
+              </a:rPr>
+              <a:t>     게시글 검색, 부적절한 글 삭제 (모더레이션)</a:t>
             </a:r>
           </a:p>
           <a:p>

--- a/portfolio/expense-tracker-portfolio.pptx
+++ b/portfolio/expense-tracker-portfolio.pptx
@@ -8625,106 +8625,40 @@
           </a:p>
         </p:txBody>
       </p:sp>
-      <p:sp>
-        <p:nvSpPr>
-          <p:cNvPr id="6" name="Rectangle 5"/>
-          <p:cNvSpPr/>
-          <p:nvPr/>
-        </p:nvSpPr>
-        <p:spPr>
-          <a:xfrm>
-            <a:off x="640080" y="1920240"/>
-            <a:ext cx="3291840" cy="2651760"/>
-          </a:xfrm>
-          <a:prstGeom prst="rect">
-            <a:avLst/>
-          </a:prstGeom>
-          <a:solidFill>
-            <a:srgbClr val="FFFFFF"/>
-          </a:solidFill>
-          <a:ln w="12700">
-            <a:solidFill>
-              <a:srgbClr val="DCEEE7"/>
-            </a:solidFill>
-          </a:ln>
-          <a:effectLst/>
-        </p:spPr>
-        <p:style>
-          <a:lnRef idx="1">
-            <a:schemeClr val="accent1"/>
-          </a:lnRef>
-          <a:fillRef idx="3">
-            <a:schemeClr val="accent1"/>
-          </a:fillRef>
-          <a:effectRef idx="2">
-            <a:schemeClr val="accent1"/>
-          </a:effectRef>
-          <a:fontRef idx="minor">
-            <a:schemeClr val="lt1"/>
-          </a:fontRef>
-        </p:style>
-        <p:txBody>
-          <a:bodyPr rtlCol="0" anchor="ctr"/>
-          <a:lstStyle/>
-          <a:p>
-            <a:pPr algn="ctr"/>
-          </a:p>
-        </p:txBody>
-      </p:sp>
-      <p:sp>
-        <p:nvSpPr>
-          <p:cNvPr id="7" name="Rectangle 6"/>
-          <p:cNvSpPr/>
-          <p:nvPr/>
-        </p:nvSpPr>
-        <p:spPr>
-          <a:xfrm>
-            <a:off x="640080" y="1920240"/>
-            <a:ext cx="3291840" cy="457200"/>
-          </a:xfrm>
-          <a:prstGeom prst="rect">
-            <a:avLst/>
-          </a:prstGeom>
-          <a:solidFill>
-            <a:srgbClr val="0F766E"/>
-          </a:solidFill>
-          <a:ln>
-            <a:noFill/>
-          </a:ln>
-          <a:effectLst/>
-        </p:spPr>
-        <p:style>
-          <a:lnRef idx="1">
-            <a:schemeClr val="accent1"/>
-          </a:lnRef>
-          <a:fillRef idx="3">
-            <a:schemeClr val="accent1"/>
-          </a:fillRef>
-          <a:effectRef idx="2">
-            <a:schemeClr val="accent1"/>
-          </a:effectRef>
-          <a:fontRef idx="minor">
-            <a:schemeClr val="lt1"/>
-          </a:fontRef>
-        </p:style>
-        <p:txBody>
-          <a:bodyPr rtlCol="0" anchor="ctr"/>
-          <a:lstStyle/>
-          <a:p>
-            <a:pPr algn="ctr"/>
-          </a:p>
-        </p:txBody>
-      </p:sp>
-      <p:sp>
-        <p:nvSpPr>
-          <p:cNvPr id="8" name="TextBox 7"/>
+      <p:pic>
+        <p:nvPicPr>
+          <p:cNvPr id="6" name="Picture 5" descr="erd.png"/>
+          <p:cNvPicPr>
+            <a:picLocks noChangeAspect="1"/>
+          </p:cNvPicPr>
+          <p:nvPr/>
+        </p:nvPicPr>
+        <p:blipFill>
+          <a:blip r:embed="rId2"/>
+          <a:stretch>
+            <a:fillRect/>
+          </a:stretch>
+        </p:blipFill>
+        <p:spPr>
+          <a:xfrm>
+            <a:off x="4352544" y="1783080"/>
+            <a:ext cx="3547872" cy="4434840"/>
+          </a:xfrm>
+          <a:prstGeom prst="rect">
+            <a:avLst/>
+          </a:prstGeom>
+        </p:spPr>
+      </p:pic>
+      <p:sp>
+        <p:nvSpPr>
+          <p:cNvPr id="7" name="TextBox 6"/>
           <p:cNvSpPr txBox="1"/>
           <p:nvPr/>
         </p:nvSpPr>
         <p:spPr>
           <a:xfrm>
-            <a:off x="640080" y="1993392"/>
-            <a:ext cx="3291840" cy="365760"/>
+            <a:off x="457200" y="6446520"/>
+            <a:ext cx="7315200" cy="320040"/>
           </a:xfrm>
           <a:prstGeom prst="rect">
             <a:avLst/>
@@ -8737,1017 +8671,18 @@
           </a:bodyPr>
           <a:lstStyle/>
           <a:p>
-            <a:pPr algn="ctr">
+            <a:pPr algn="l">
               <a:lnSpc>
                 <a:spcPct val="115000"/>
               </a:lnSpc>
             </a:pPr>
             <a:r>
-              <a:rPr sz="1500" b="1">
-                <a:solidFill>
-                  <a:srgbClr val="FFFFFF"/>
-                </a:solidFill>
-                <a:latin typeface="Malgun Gothic"/>
-              </a:rPr>
-              <a:t>profiles</a:t>
-            </a:r>
-          </a:p>
-        </p:txBody>
-      </p:sp>
-      <p:sp>
-        <p:nvSpPr>
-          <p:cNvPr id="9" name="TextBox 8"/>
-          <p:cNvSpPr txBox="1"/>
-          <p:nvPr/>
-        </p:nvSpPr>
-        <p:spPr>
-          <a:xfrm>
-            <a:off x="868680" y="2514600"/>
-            <a:ext cx="2834640" cy="292608"/>
-          </a:xfrm>
-          <a:prstGeom prst="rect">
-            <a:avLst/>
-          </a:prstGeom>
-          <a:noFill/>
-        </p:spPr>
-        <p:txBody>
-          <a:bodyPr wrap="square" anchor="t">
-            <a:spAutoFit/>
-          </a:bodyPr>
-          <a:lstStyle/>
-          <a:p>
-            <a:pPr algn="l">
-              <a:lnSpc>
-                <a:spcPct val="115000"/>
-              </a:lnSpc>
-            </a:pPr>
-            <a:r>
-              <a:rPr sz="1250" b="0">
-                <a:solidFill>
-                  <a:srgbClr val="4B6259"/>
-                </a:solidFill>
-                <a:latin typeface="Malgun Gothic"/>
-              </a:rPr>
-              <a:t>id (uuid, PK → auth.users)</a:t>
-            </a:r>
-          </a:p>
-        </p:txBody>
-      </p:sp>
-      <p:sp>
-        <p:nvSpPr>
-          <p:cNvPr id="10" name="TextBox 9"/>
-          <p:cNvSpPr txBox="1"/>
-          <p:nvPr/>
-        </p:nvSpPr>
-        <p:spPr>
-          <a:xfrm>
-            <a:off x="868680" y="2825496"/>
-            <a:ext cx="2834640" cy="292608"/>
-          </a:xfrm>
-          <a:prstGeom prst="rect">
-            <a:avLst/>
-          </a:prstGeom>
-          <a:noFill/>
-        </p:spPr>
-        <p:txBody>
-          <a:bodyPr wrap="square" anchor="t">
-            <a:spAutoFit/>
-          </a:bodyPr>
-          <a:lstStyle/>
-          <a:p>
-            <a:pPr algn="l">
-              <a:lnSpc>
-                <a:spcPct val="115000"/>
-              </a:lnSpc>
-            </a:pPr>
-            <a:r>
-              <a:rPr sz="1250" b="0">
-                <a:solidFill>
-                  <a:srgbClr val="4B6259"/>
-                </a:solidFill>
-                <a:latin typeface="Malgun Gothic"/>
-              </a:rPr>
-              <a:t>name</a:t>
-            </a:r>
-          </a:p>
-        </p:txBody>
-      </p:sp>
-      <p:sp>
-        <p:nvSpPr>
-          <p:cNvPr id="11" name="TextBox 10"/>
-          <p:cNvSpPr txBox="1"/>
-          <p:nvPr/>
-        </p:nvSpPr>
-        <p:spPr>
-          <a:xfrm>
-            <a:off x="868680" y="3136392"/>
-            <a:ext cx="2834640" cy="292608"/>
-          </a:xfrm>
-          <a:prstGeom prst="rect">
-            <a:avLst/>
-          </a:prstGeom>
-          <a:noFill/>
-        </p:spPr>
-        <p:txBody>
-          <a:bodyPr wrap="square" anchor="t">
-            <a:spAutoFit/>
-          </a:bodyPr>
-          <a:lstStyle/>
-          <a:p>
-            <a:pPr algn="l">
-              <a:lnSpc>
-                <a:spcPct val="115000"/>
-              </a:lnSpc>
-            </a:pPr>
-            <a:r>
-              <a:rPr sz="1250" b="0">
-                <a:solidFill>
-                  <a:srgbClr val="4B6259"/>
-                </a:solidFill>
-                <a:latin typeface="Malgun Gothic"/>
-              </a:rPr>
-              <a:t>email (unique)</a:t>
-            </a:r>
-          </a:p>
-        </p:txBody>
-      </p:sp>
-      <p:sp>
-        <p:nvSpPr>
-          <p:cNvPr id="12" name="TextBox 11"/>
-          <p:cNvSpPr txBox="1"/>
-          <p:nvPr/>
-        </p:nvSpPr>
-        <p:spPr>
-          <a:xfrm>
-            <a:off x="868680" y="3447288"/>
-            <a:ext cx="2834640" cy="292608"/>
-          </a:xfrm>
-          <a:prstGeom prst="rect">
-            <a:avLst/>
-          </a:prstGeom>
-          <a:noFill/>
-        </p:spPr>
-        <p:txBody>
-          <a:bodyPr wrap="square" anchor="t">
-            <a:spAutoFit/>
-          </a:bodyPr>
-          <a:lstStyle/>
-          <a:p>
-            <a:pPr algn="l">
-              <a:lnSpc>
-                <a:spcPct val="115000"/>
-              </a:lnSpc>
-            </a:pPr>
-            <a:r>
-              <a:rPr sz="1250" b="0">
-                <a:solidFill>
-                  <a:srgbClr val="4B6259"/>
-                </a:solidFill>
-                <a:latin typeface="Malgun Gothic"/>
-              </a:rPr>
-              <a:t>role: customer | admin</a:t>
-            </a:r>
-          </a:p>
-        </p:txBody>
-      </p:sp>
-      <p:sp>
-        <p:nvSpPr>
-          <p:cNvPr id="13" name="TextBox 12"/>
-          <p:cNvSpPr txBox="1"/>
-          <p:nvPr/>
-        </p:nvSpPr>
-        <p:spPr>
-          <a:xfrm>
-            <a:off x="868680" y="3758184"/>
-            <a:ext cx="2834640" cy="292608"/>
-          </a:xfrm>
-          <a:prstGeom prst="rect">
-            <a:avLst/>
-          </a:prstGeom>
-          <a:noFill/>
-        </p:spPr>
-        <p:txBody>
-          <a:bodyPr wrap="square" anchor="t">
-            <a:spAutoFit/>
-          </a:bodyPr>
-          <a:lstStyle/>
-          <a:p>
-            <a:pPr algn="l">
-              <a:lnSpc>
-                <a:spcPct val="115000"/>
-              </a:lnSpc>
-            </a:pPr>
-            <a:r>
-              <a:rPr sz="1250" b="0">
-                <a:solidFill>
-                  <a:srgbClr val="4B6259"/>
-                </a:solidFill>
-                <a:latin typeface="Malgun Gothic"/>
-              </a:rPr>
-              <a:t>status: active | suspended</a:t>
-            </a:r>
-          </a:p>
-        </p:txBody>
-      </p:sp>
-      <p:sp>
-        <p:nvSpPr>
-          <p:cNvPr id="14" name="TextBox 13"/>
-          <p:cNvSpPr txBox="1"/>
-          <p:nvPr/>
-        </p:nvSpPr>
-        <p:spPr>
-          <a:xfrm>
-            <a:off x="868680" y="4069080"/>
-            <a:ext cx="2834640" cy="292608"/>
-          </a:xfrm>
-          <a:prstGeom prst="rect">
-            <a:avLst/>
-          </a:prstGeom>
-          <a:noFill/>
-        </p:spPr>
-        <p:txBody>
-          <a:bodyPr wrap="square" anchor="t">
-            <a:spAutoFit/>
-          </a:bodyPr>
-          <a:lstStyle/>
-          <a:p>
-            <a:pPr algn="l">
-              <a:lnSpc>
-                <a:spcPct val="115000"/>
-              </a:lnSpc>
-            </a:pPr>
-            <a:r>
-              <a:rPr sz="1250" b="0">
-                <a:solidFill>
-                  <a:srgbClr val="4B6259"/>
-                </a:solidFill>
-                <a:latin typeface="Malgun Gothic"/>
-              </a:rPr>
-              <a:t>created_at</a:t>
-            </a:r>
-          </a:p>
-        </p:txBody>
-      </p:sp>
-      <p:sp>
-        <p:nvSpPr>
-          <p:cNvPr id="15" name="Rectangle 14"/>
-          <p:cNvSpPr/>
-          <p:nvPr/>
-        </p:nvSpPr>
-        <p:spPr>
-          <a:xfrm>
-            <a:off x="4480560" y="1920240"/>
-            <a:ext cx="3291840" cy="2651760"/>
-          </a:xfrm>
-          <a:prstGeom prst="rect">
-            <a:avLst/>
-          </a:prstGeom>
-          <a:solidFill>
-            <a:srgbClr val="FFFFFF"/>
-          </a:solidFill>
-          <a:ln w="12700">
-            <a:solidFill>
-              <a:srgbClr val="DCEEE7"/>
-            </a:solidFill>
-          </a:ln>
-          <a:effectLst/>
-        </p:spPr>
-        <p:style>
-          <a:lnRef idx="1">
-            <a:schemeClr val="accent1"/>
-          </a:lnRef>
-          <a:fillRef idx="3">
-            <a:schemeClr val="accent1"/>
-          </a:fillRef>
-          <a:effectRef idx="2">
-            <a:schemeClr val="accent1"/>
-          </a:effectRef>
-          <a:fontRef idx="minor">
-            <a:schemeClr val="lt1"/>
-          </a:fontRef>
-        </p:style>
-        <p:txBody>
-          <a:bodyPr rtlCol="0" anchor="ctr"/>
-          <a:lstStyle/>
-          <a:p>
-            <a:pPr algn="ctr"/>
-          </a:p>
-        </p:txBody>
-      </p:sp>
-      <p:sp>
-        <p:nvSpPr>
-          <p:cNvPr id="16" name="Rectangle 15"/>
-          <p:cNvSpPr/>
-          <p:nvPr/>
-        </p:nvSpPr>
-        <p:spPr>
-          <a:xfrm>
-            <a:off x="4480560" y="1920240"/>
-            <a:ext cx="3291840" cy="457200"/>
-          </a:xfrm>
-          <a:prstGeom prst="rect">
-            <a:avLst/>
-          </a:prstGeom>
-          <a:solidFill>
-            <a:srgbClr val="0F766E"/>
-          </a:solidFill>
-          <a:ln>
-            <a:noFill/>
-          </a:ln>
-          <a:effectLst/>
-        </p:spPr>
-        <p:style>
-          <a:lnRef idx="1">
-            <a:schemeClr val="accent1"/>
-          </a:lnRef>
-          <a:fillRef idx="3">
-            <a:schemeClr val="accent1"/>
-          </a:fillRef>
-          <a:effectRef idx="2">
-            <a:schemeClr val="accent1"/>
-          </a:effectRef>
-          <a:fontRef idx="minor">
-            <a:schemeClr val="lt1"/>
-          </a:fontRef>
-        </p:style>
-        <p:txBody>
-          <a:bodyPr rtlCol="0" anchor="ctr"/>
-          <a:lstStyle/>
-          <a:p>
-            <a:pPr algn="ctr"/>
-          </a:p>
-        </p:txBody>
-      </p:sp>
-      <p:sp>
-        <p:nvSpPr>
-          <p:cNvPr id="17" name="TextBox 16"/>
-          <p:cNvSpPr txBox="1"/>
-          <p:nvPr/>
-        </p:nvSpPr>
-        <p:spPr>
-          <a:xfrm>
-            <a:off x="4480560" y="1993392"/>
-            <a:ext cx="3291840" cy="365760"/>
-          </a:xfrm>
-          <a:prstGeom prst="rect">
-            <a:avLst/>
-          </a:prstGeom>
-          <a:noFill/>
-        </p:spPr>
-        <p:txBody>
-          <a:bodyPr wrap="square" anchor="t">
-            <a:spAutoFit/>
-          </a:bodyPr>
-          <a:lstStyle/>
-          <a:p>
-            <a:pPr algn="ctr">
-              <a:lnSpc>
-                <a:spcPct val="115000"/>
-              </a:lnSpc>
-            </a:pPr>
-            <a:r>
-              <a:rPr sz="1500" b="1">
-                <a:solidFill>
-                  <a:srgbClr val="FFFFFF"/>
-                </a:solidFill>
-                <a:latin typeface="Malgun Gothic"/>
-              </a:rPr>
-              <a:t>expenses</a:t>
-            </a:r>
-          </a:p>
-        </p:txBody>
-      </p:sp>
-      <p:sp>
-        <p:nvSpPr>
-          <p:cNvPr id="18" name="TextBox 17"/>
-          <p:cNvSpPr txBox="1"/>
-          <p:nvPr/>
-        </p:nvSpPr>
-        <p:spPr>
-          <a:xfrm>
-            <a:off x="4709160" y="2514600"/>
-            <a:ext cx="2834640" cy="292608"/>
-          </a:xfrm>
-          <a:prstGeom prst="rect">
-            <a:avLst/>
-          </a:prstGeom>
-          <a:noFill/>
-        </p:spPr>
-        <p:txBody>
-          <a:bodyPr wrap="square" anchor="t">
-            <a:spAutoFit/>
-          </a:bodyPr>
-          <a:lstStyle/>
-          <a:p>
-            <a:pPr algn="l">
-              <a:lnSpc>
-                <a:spcPct val="115000"/>
-              </a:lnSpc>
-            </a:pPr>
-            <a:r>
-              <a:rPr sz="1250" b="0">
-                <a:solidFill>
-                  <a:srgbClr val="4B6259"/>
-                </a:solidFill>
-                <a:latin typeface="Malgun Gothic"/>
-              </a:rPr>
-              <a:t>id (uuid, PK)</a:t>
-            </a:r>
-          </a:p>
-        </p:txBody>
-      </p:sp>
-      <p:sp>
-        <p:nvSpPr>
-          <p:cNvPr id="19" name="TextBox 18"/>
-          <p:cNvSpPr txBox="1"/>
-          <p:nvPr/>
-        </p:nvSpPr>
-        <p:spPr>
-          <a:xfrm>
-            <a:off x="4709160" y="2825496"/>
-            <a:ext cx="2834640" cy="292608"/>
-          </a:xfrm>
-          <a:prstGeom prst="rect">
-            <a:avLst/>
-          </a:prstGeom>
-          <a:noFill/>
-        </p:spPr>
-        <p:txBody>
-          <a:bodyPr wrap="square" anchor="t">
-            <a:spAutoFit/>
-          </a:bodyPr>
-          <a:lstStyle/>
-          <a:p>
-            <a:pPr algn="l">
-              <a:lnSpc>
-                <a:spcPct val="115000"/>
-              </a:lnSpc>
-            </a:pPr>
-            <a:r>
-              <a:rPr sz="1250" b="0">
-                <a:solidFill>
-                  <a:srgbClr val="4B6259"/>
-                </a:solidFill>
-                <a:latin typeface="Malgun Gothic"/>
-              </a:rPr>
-              <a:t>user_id (FK → profiles)</a:t>
-            </a:r>
-          </a:p>
-        </p:txBody>
-      </p:sp>
-      <p:sp>
-        <p:nvSpPr>
-          <p:cNvPr id="20" name="TextBox 19"/>
-          <p:cNvSpPr txBox="1"/>
-          <p:nvPr/>
-        </p:nvSpPr>
-        <p:spPr>
-          <a:xfrm>
-            <a:off x="4709160" y="3136392"/>
-            <a:ext cx="2834640" cy="292608"/>
-          </a:xfrm>
-          <a:prstGeom prst="rect">
-            <a:avLst/>
-          </a:prstGeom>
-          <a:noFill/>
-        </p:spPr>
-        <p:txBody>
-          <a:bodyPr wrap="square" anchor="t">
-            <a:spAutoFit/>
-          </a:bodyPr>
-          <a:lstStyle/>
-          <a:p>
-            <a:pPr algn="l">
-              <a:lnSpc>
-                <a:spcPct val="115000"/>
-              </a:lnSpc>
-            </a:pPr>
-            <a:r>
-              <a:rPr sz="1250" b="0">
-                <a:solidFill>
-                  <a:srgbClr val="4B6259"/>
-                </a:solidFill>
-                <a:latin typeface="Malgun Gothic"/>
-              </a:rPr>
-              <a:t>category_id (FK → categories)</a:t>
-            </a:r>
-          </a:p>
-        </p:txBody>
-      </p:sp>
-      <p:sp>
-        <p:nvSpPr>
-          <p:cNvPr id="21" name="TextBox 20"/>
-          <p:cNvSpPr txBox="1"/>
-          <p:nvPr/>
-        </p:nvSpPr>
-        <p:spPr>
-          <a:xfrm>
-            <a:off x="4709160" y="3447288"/>
-            <a:ext cx="2834640" cy="292608"/>
-          </a:xfrm>
-          <a:prstGeom prst="rect">
-            <a:avLst/>
-          </a:prstGeom>
-          <a:noFill/>
-        </p:spPr>
-        <p:txBody>
-          <a:bodyPr wrap="square" anchor="t">
-            <a:spAutoFit/>
-          </a:bodyPr>
-          <a:lstStyle/>
-          <a:p>
-            <a:pPr algn="l">
-              <a:lnSpc>
-                <a:spcPct val="115000"/>
-              </a:lnSpc>
-            </a:pPr>
-            <a:r>
-              <a:rPr sz="1250" b="0">
-                <a:solidFill>
-                  <a:srgbClr val="4B6259"/>
-                </a:solidFill>
-                <a:latin typeface="Malgun Gothic"/>
-              </a:rPr>
-              <a:t>amount (numeric, &gt;0)</a:t>
-            </a:r>
-          </a:p>
-        </p:txBody>
-      </p:sp>
-      <p:sp>
-        <p:nvSpPr>
-          <p:cNvPr id="22" name="TextBox 21"/>
-          <p:cNvSpPr txBox="1"/>
-          <p:nvPr/>
-        </p:nvSpPr>
-        <p:spPr>
-          <a:xfrm>
-            <a:off x="4709160" y="3758184"/>
-            <a:ext cx="2834640" cy="292608"/>
-          </a:xfrm>
-          <a:prstGeom prst="rect">
-            <a:avLst/>
-          </a:prstGeom>
-          <a:noFill/>
-        </p:spPr>
-        <p:txBody>
-          <a:bodyPr wrap="square" anchor="t">
-            <a:spAutoFit/>
-          </a:bodyPr>
-          <a:lstStyle/>
-          <a:p>
-            <a:pPr algn="l">
-              <a:lnSpc>
-                <a:spcPct val="115000"/>
-              </a:lnSpc>
-            </a:pPr>
-            <a:r>
-              <a:rPr sz="1250" b="0">
-                <a:solidFill>
-                  <a:srgbClr val="4B6259"/>
-                </a:solidFill>
-                <a:latin typeface="Malgun Gothic"/>
-              </a:rPr>
-              <a:t>date</a:t>
-            </a:r>
-          </a:p>
-        </p:txBody>
-      </p:sp>
-      <p:sp>
-        <p:nvSpPr>
-          <p:cNvPr id="23" name="TextBox 22"/>
-          <p:cNvSpPr txBox="1"/>
-          <p:nvPr/>
-        </p:nvSpPr>
-        <p:spPr>
-          <a:xfrm>
-            <a:off x="4709160" y="4069080"/>
-            <a:ext cx="2834640" cy="292608"/>
-          </a:xfrm>
-          <a:prstGeom prst="rect">
-            <a:avLst/>
-          </a:prstGeom>
-          <a:noFill/>
-        </p:spPr>
-        <p:txBody>
-          <a:bodyPr wrap="square" anchor="t">
-            <a:spAutoFit/>
-          </a:bodyPr>
-          <a:lstStyle/>
-          <a:p>
-            <a:pPr algn="l">
-              <a:lnSpc>
-                <a:spcPct val="115000"/>
-              </a:lnSpc>
-            </a:pPr>
-            <a:r>
-              <a:rPr sz="1250" b="0">
-                <a:solidFill>
-                  <a:srgbClr val="4B6259"/>
-                </a:solidFill>
-                <a:latin typeface="Malgun Gothic"/>
-              </a:rPr>
-              <a:t>memo · created_at</a:t>
-            </a:r>
-          </a:p>
-        </p:txBody>
-      </p:sp>
-      <p:sp>
-        <p:nvSpPr>
-          <p:cNvPr id="24" name="Rectangle 23"/>
-          <p:cNvSpPr/>
-          <p:nvPr/>
-        </p:nvSpPr>
-        <p:spPr>
-          <a:xfrm>
-            <a:off x="8321040" y="1920240"/>
-            <a:ext cx="3246120" cy="2651760"/>
-          </a:xfrm>
-          <a:prstGeom prst="rect">
-            <a:avLst/>
-          </a:prstGeom>
-          <a:solidFill>
-            <a:srgbClr val="FFFFFF"/>
-          </a:solidFill>
-          <a:ln w="12700">
-            <a:solidFill>
-              <a:srgbClr val="DCEEE7"/>
-            </a:solidFill>
-          </a:ln>
-          <a:effectLst/>
-        </p:spPr>
-        <p:style>
-          <a:lnRef idx="1">
-            <a:schemeClr val="accent1"/>
-          </a:lnRef>
-          <a:fillRef idx="3">
-            <a:schemeClr val="accent1"/>
-          </a:fillRef>
-          <a:effectRef idx="2">
-            <a:schemeClr val="accent1"/>
-          </a:effectRef>
-          <a:fontRef idx="minor">
-            <a:schemeClr val="lt1"/>
-          </a:fontRef>
-        </p:style>
-        <p:txBody>
-          <a:bodyPr rtlCol="0" anchor="ctr"/>
-          <a:lstStyle/>
-          <a:p>
-            <a:pPr algn="ctr"/>
-          </a:p>
-        </p:txBody>
-      </p:sp>
-      <p:sp>
-        <p:nvSpPr>
-          <p:cNvPr id="25" name="Rectangle 24"/>
-          <p:cNvSpPr/>
-          <p:nvPr/>
-        </p:nvSpPr>
-        <p:spPr>
-          <a:xfrm>
-            <a:off x="8321040" y="1920240"/>
-            <a:ext cx="3246120" cy="457200"/>
-          </a:xfrm>
-          <a:prstGeom prst="rect">
-            <a:avLst/>
-          </a:prstGeom>
-          <a:solidFill>
-            <a:srgbClr val="0F766E"/>
-          </a:solidFill>
-          <a:ln>
-            <a:noFill/>
-          </a:ln>
-          <a:effectLst/>
-        </p:spPr>
-        <p:style>
-          <a:lnRef idx="1">
-            <a:schemeClr val="accent1"/>
-          </a:lnRef>
-          <a:fillRef idx="3">
-            <a:schemeClr val="accent1"/>
-          </a:fillRef>
-          <a:effectRef idx="2">
-            <a:schemeClr val="accent1"/>
-          </a:effectRef>
-          <a:fontRef idx="minor">
-            <a:schemeClr val="lt1"/>
-          </a:fontRef>
-        </p:style>
-        <p:txBody>
-          <a:bodyPr rtlCol="0" anchor="ctr"/>
-          <a:lstStyle/>
-          <a:p>
-            <a:pPr algn="ctr"/>
-          </a:p>
-        </p:txBody>
-      </p:sp>
-      <p:sp>
-        <p:nvSpPr>
-          <p:cNvPr id="26" name="TextBox 25"/>
-          <p:cNvSpPr txBox="1"/>
-          <p:nvPr/>
-        </p:nvSpPr>
-        <p:spPr>
-          <a:xfrm>
-            <a:off x="8321040" y="1993392"/>
-            <a:ext cx="3246120" cy="365760"/>
-          </a:xfrm>
-          <a:prstGeom prst="rect">
-            <a:avLst/>
-          </a:prstGeom>
-          <a:noFill/>
-        </p:spPr>
-        <p:txBody>
-          <a:bodyPr wrap="square" anchor="t">
-            <a:spAutoFit/>
-          </a:bodyPr>
-          <a:lstStyle/>
-          <a:p>
-            <a:pPr algn="ctr">
-              <a:lnSpc>
-                <a:spcPct val="115000"/>
-              </a:lnSpc>
-            </a:pPr>
-            <a:r>
-              <a:rPr sz="1500" b="1">
-                <a:solidFill>
-                  <a:srgbClr val="FFFFFF"/>
-                </a:solidFill>
-                <a:latin typeface="Malgun Gothic"/>
-              </a:rPr>
-              <a:t>categories</a:t>
-            </a:r>
-          </a:p>
-        </p:txBody>
-      </p:sp>
-      <p:sp>
-        <p:nvSpPr>
-          <p:cNvPr id="27" name="TextBox 26"/>
-          <p:cNvSpPr txBox="1"/>
-          <p:nvPr/>
-        </p:nvSpPr>
-        <p:spPr>
-          <a:xfrm>
-            <a:off x="8549640" y="2514600"/>
-            <a:ext cx="2788920" cy="292608"/>
-          </a:xfrm>
-          <a:prstGeom prst="rect">
-            <a:avLst/>
-          </a:prstGeom>
-          <a:noFill/>
-        </p:spPr>
-        <p:txBody>
-          <a:bodyPr wrap="square" anchor="t">
-            <a:spAutoFit/>
-          </a:bodyPr>
-          <a:lstStyle/>
-          <a:p>
-            <a:pPr algn="l">
-              <a:lnSpc>
-                <a:spcPct val="115000"/>
-              </a:lnSpc>
-            </a:pPr>
-            <a:r>
-              <a:rPr sz="1250" b="0">
-                <a:solidFill>
-                  <a:srgbClr val="4B6259"/>
-                </a:solidFill>
-                <a:latin typeface="Malgun Gothic"/>
-              </a:rPr>
-              <a:t>id (text, PK)</a:t>
-            </a:r>
-          </a:p>
-        </p:txBody>
-      </p:sp>
-      <p:sp>
-        <p:nvSpPr>
-          <p:cNvPr id="28" name="TextBox 27"/>
-          <p:cNvSpPr txBox="1"/>
-          <p:nvPr/>
-        </p:nvSpPr>
-        <p:spPr>
-          <a:xfrm>
-            <a:off x="8549640" y="2825496"/>
-            <a:ext cx="2788920" cy="292608"/>
-          </a:xfrm>
-          <a:prstGeom prst="rect">
-            <a:avLst/>
-          </a:prstGeom>
-          <a:noFill/>
-        </p:spPr>
-        <p:txBody>
-          <a:bodyPr wrap="square" anchor="t">
-            <a:spAutoFit/>
-          </a:bodyPr>
-          <a:lstStyle/>
-          <a:p>
-            <a:pPr algn="l">
-              <a:lnSpc>
-                <a:spcPct val="115000"/>
-              </a:lnSpc>
-            </a:pPr>
-            <a:r>
-              <a:rPr sz="1250" b="0">
-                <a:solidFill>
-                  <a:srgbClr val="4B6259"/>
-                </a:solidFill>
-                <a:latin typeface="Malgun Gothic"/>
-              </a:rPr>
-              <a:t>name / icon / color</a:t>
-            </a:r>
-          </a:p>
-        </p:txBody>
-      </p:sp>
-      <p:sp>
-        <p:nvSpPr>
-          <p:cNvPr id="29" name="TextBox 28"/>
-          <p:cNvSpPr txBox="1"/>
-          <p:nvPr/>
-        </p:nvSpPr>
-        <p:spPr>
-          <a:xfrm>
-            <a:off x="8549640" y="3136392"/>
-            <a:ext cx="2788920" cy="292608"/>
-          </a:xfrm>
-          <a:prstGeom prst="rect">
-            <a:avLst/>
-          </a:prstGeom>
-          <a:noFill/>
-        </p:spPr>
-        <p:txBody>
-          <a:bodyPr wrap="square" anchor="t">
-            <a:spAutoFit/>
-          </a:bodyPr>
-          <a:lstStyle/>
-          <a:p>
-            <a:pPr algn="l">
-              <a:lnSpc>
-                <a:spcPct val="115000"/>
-              </a:lnSpc>
-            </a:pPr>
-            <a:r>
-              <a:rPr sz="1250" b="0">
-                <a:solidFill>
-                  <a:srgbClr val="4B6259"/>
-                </a:solidFill>
-                <a:latin typeface="Malgun Gothic"/>
-              </a:rPr>
-              <a:t>고정 8종 · 읽기 전용</a:t>
-            </a:r>
-          </a:p>
-        </p:txBody>
-      </p:sp>
-      <p:sp>
-        <p:nvSpPr>
-          <p:cNvPr id="30" name="TextBox 29"/>
-          <p:cNvSpPr txBox="1"/>
-          <p:nvPr/>
-        </p:nvSpPr>
-        <p:spPr>
-          <a:xfrm>
-            <a:off x="8549640" y="3447288"/>
-            <a:ext cx="2788920" cy="292608"/>
-          </a:xfrm>
-          <a:prstGeom prst="rect">
-            <a:avLst/>
-          </a:prstGeom>
-          <a:noFill/>
-        </p:spPr>
-        <p:txBody>
-          <a:bodyPr wrap="square" anchor="t">
-            <a:spAutoFit/>
-          </a:bodyPr>
-          <a:lstStyle/>
-          <a:p>
-            <a:pPr algn="l">
-              <a:lnSpc>
-                <a:spcPct val="115000"/>
-              </a:lnSpc>
-            </a:pPr>
-            <a:r>
-              <a:rPr sz="1250" b="0">
-                <a:solidFill>
-                  <a:srgbClr val="4B6259"/>
-                </a:solidFill>
-                <a:latin typeface="Malgun Gothic"/>
-              </a:rPr>
-              <a:t>(CRUD 없음, seed 데이터)</a:t>
-            </a:r>
-          </a:p>
-        </p:txBody>
-      </p:sp>
-      <p:sp>
-        <p:nvSpPr>
-          <p:cNvPr id="31" name="TextBox 30"/>
-          <p:cNvSpPr txBox="1"/>
-          <p:nvPr/>
-        </p:nvSpPr>
-        <p:spPr>
-          <a:xfrm>
-            <a:off x="3977639" y="2926080"/>
-            <a:ext cx="548640" cy="365760"/>
-          </a:xfrm>
-          <a:prstGeom prst="rect">
-            <a:avLst/>
-          </a:prstGeom>
-          <a:noFill/>
-        </p:spPr>
-        <p:txBody>
-          <a:bodyPr wrap="square" anchor="t">
-            <a:spAutoFit/>
-          </a:bodyPr>
-          <a:lstStyle/>
-          <a:p>
-            <a:pPr algn="ctr">
-              <a:lnSpc>
-                <a:spcPct val="115000"/>
-              </a:lnSpc>
-            </a:pPr>
-            <a:r>
-              <a:rPr sz="1200" b="0">
+              <a:rPr sz="1000" b="0">
                 <a:solidFill>
                   <a:srgbClr val="6E8880"/>
                 </a:solidFill>
                 <a:latin typeface="Malgun Gothic"/>
               </a:rPr>
-              <a:t>1:N</a:t>
-            </a:r>
-          </a:p>
-        </p:txBody>
-      </p:sp>
-      <p:sp>
-        <p:nvSpPr>
-          <p:cNvPr id="32" name="TextBox 31"/>
-          <p:cNvSpPr txBox="1"/>
-          <p:nvPr/>
-        </p:nvSpPr>
-        <p:spPr>
-          <a:xfrm>
-            <a:off x="7818120" y="2926080"/>
-            <a:ext cx="548640" cy="365760"/>
-          </a:xfrm>
-          <a:prstGeom prst="rect">
-            <a:avLst/>
-          </a:prstGeom>
-          <a:noFill/>
-        </p:spPr>
-        <p:txBody>
-          <a:bodyPr wrap="square" anchor="t">
-            <a:spAutoFit/>
-          </a:bodyPr>
-          <a:lstStyle/>
-          <a:p>
-            <a:pPr algn="ctr">
-              <a:lnSpc>
-                <a:spcPct val="115000"/>
-              </a:lnSpc>
-            </a:pPr>
-            <a:r>
-              <a:rPr sz="1200" b="0">
-                <a:solidFill>
-                  <a:srgbClr val="6E8880"/>
-                </a:solidFill>
-                <a:latin typeface="Malgun Gothic"/>
-              </a:rPr>
-              <a:t>N:1</a:t>
-            </a:r>
-          </a:p>
-        </p:txBody>
-      </p:sp>
-      <p:sp>
-        <p:nvSpPr>
-          <p:cNvPr id="33" name="TextBox 32"/>
-          <p:cNvSpPr txBox="1"/>
-          <p:nvPr/>
-        </p:nvSpPr>
-        <p:spPr>
-          <a:xfrm>
-            <a:off x="457200" y="6446520"/>
-            <a:ext cx="7315200" cy="320040"/>
-          </a:xfrm>
-          <a:prstGeom prst="rect">
-            <a:avLst/>
-          </a:prstGeom>
-          <a:noFill/>
-        </p:spPr>
-        <p:txBody>
-          <a:bodyPr wrap="square" anchor="t">
-            <a:spAutoFit/>
-          </a:bodyPr>
-          <a:lstStyle/>
-          <a:p>
-            <a:pPr algn="l">
-              <a:lnSpc>
-                <a:spcPct val="115000"/>
-              </a:lnSpc>
-            </a:pPr>
-            <a:r>
-              <a:rPr sz="1000" b="0">
-                <a:solidFill>
-                  <a:srgbClr val="6E8880"/>
-                </a:solidFill>
-                <a:latin typeface="Malgun Gothic"/>
-              </a:rPr>
               <a:t>EXPENSE TRACKER · PORTFOLIO</a:t>
             </a:r>
           </a:p>
@@ -9755,7 +8690,7 @@
       </p:sp>
       <p:sp>
         <p:nvSpPr>
-          <p:cNvPr id="34" name="TextBox 33"/>
+          <p:cNvPr id="8" name="TextBox 7"/>
           <p:cNvSpPr txBox="1"/>
           <p:nvPr/>
         </p:nvSpPr>

--- a/portfolio/expense-tracker-portfolio.pptx
+++ b/portfolio/expense-tracker-portfolio.pptx
@@ -17,6 +17,7 @@
     <p:sldId id="265" r:id="rId16"/>
     <p:sldId id="266" r:id="rId17"/>
     <p:sldId id="267" r:id="rId18"/>
+    <p:sldId id="268" r:id="rId19"/>
   </p:sldIdLst>
   <p:sldSz cx="12191695" cy="6858000" type="screen4x3"/>
   <p:notesSz cx="6858000" cy="9144000"/>
@@ -3720,7 +3721,7 @@
                 </a:solidFill>
                 <a:latin typeface="Malgun Gothic"/>
               </a:rPr>
-              <a:t>WORKFLOW</a:t>
+              <a:t>SECURITY</a:t>
             </a:r>
           </a:p>
         </p:txBody>
@@ -3759,7 +3760,7 @@
                 </a:solidFill>
                 <a:latin typeface="Malgun Gothic"/>
               </a:rPr>
-              <a:t>협업 워크플로우</a:t>
+              <a:t>보안 &amp; 데이터 무결성</a:t>
             </a:r>
           </a:p>
         </p:txBody>
@@ -3810,475 +3811,14 @@
       </p:sp>
       <p:sp>
         <p:nvSpPr>
-          <p:cNvPr id="6" name="Rounded Rectangle 5"/>
-          <p:cNvSpPr/>
-          <p:nvPr/>
-        </p:nvSpPr>
-        <p:spPr>
-          <a:xfrm>
-            <a:off x="822960" y="2377440"/>
-            <a:ext cx="2377440" cy="822960"/>
-          </a:xfrm>
-          <a:prstGeom prst="roundRect">
-            <a:avLst/>
-          </a:prstGeom>
-          <a:solidFill>
-            <a:srgbClr val="0F766E"/>
-          </a:solidFill>
-          <a:ln>
-            <a:noFill/>
-          </a:ln>
-          <a:effectLst/>
-        </p:spPr>
-        <p:style>
-          <a:lnRef idx="1">
-            <a:schemeClr val="accent1"/>
-          </a:lnRef>
-          <a:fillRef idx="3">
-            <a:schemeClr val="accent1"/>
-          </a:fillRef>
-          <a:effectRef idx="2">
-            <a:schemeClr val="accent1"/>
-          </a:effectRef>
-          <a:fontRef idx="minor">
-            <a:schemeClr val="lt1"/>
-          </a:fontRef>
-        </p:style>
-        <p:txBody>
-          <a:bodyPr rtlCol="0" anchor="ctr"/>
-          <a:lstStyle/>
-          <a:p>
-            <a:pPr algn="ctr"/>
-          </a:p>
-        </p:txBody>
-      </p:sp>
-      <p:sp>
-        <p:nvSpPr>
-          <p:cNvPr id="7" name="TextBox 6"/>
+          <p:cNvPr id="6" name="TextBox 5"/>
           <p:cNvSpPr txBox="1"/>
           <p:nvPr/>
         </p:nvSpPr>
         <p:spPr>
           <a:xfrm>
-            <a:off x="822960" y="2624328"/>
-            <a:ext cx="2377440" cy="365760"/>
-          </a:xfrm>
-          <a:prstGeom prst="rect">
-            <a:avLst/>
-          </a:prstGeom>
-          <a:noFill/>
-        </p:spPr>
-        <p:txBody>
-          <a:bodyPr wrap="square" anchor="t">
-            <a:spAutoFit/>
-          </a:bodyPr>
-          <a:lstStyle/>
-          <a:p>
-            <a:pPr algn="ctr">
-              <a:lnSpc>
-                <a:spcPct val="115000"/>
-              </a:lnSpc>
-            </a:pPr>
-            <a:r>
-              <a:rPr sz="1600" b="1">
-                <a:solidFill>
-                  <a:srgbClr val="FFFFFF"/>
-                </a:solidFill>
-                <a:latin typeface="Malgun Gothic"/>
-              </a:rPr>
-              <a:t>feat/shared</a:t>
-            </a:r>
-          </a:p>
-        </p:txBody>
-      </p:sp>
-      <p:sp>
-        <p:nvSpPr>
-          <p:cNvPr id="8" name="Right Arrow 7"/>
-          <p:cNvSpPr/>
-          <p:nvPr/>
-        </p:nvSpPr>
-        <p:spPr>
-          <a:xfrm>
-            <a:off x="3246120" y="2651760"/>
-            <a:ext cx="274320" cy="274320"/>
-          </a:xfrm>
-          <a:prstGeom prst="rightArrow">
-            <a:avLst/>
-          </a:prstGeom>
-          <a:solidFill>
-            <a:srgbClr val="34D399"/>
-          </a:solidFill>
-          <a:ln>
-            <a:noFill/>
-          </a:ln>
-        </p:spPr>
-        <p:style>
-          <a:lnRef idx="1">
-            <a:schemeClr val="accent1"/>
-          </a:lnRef>
-          <a:fillRef idx="3">
-            <a:schemeClr val="accent1"/>
-          </a:fillRef>
-          <a:effectRef idx="2">
-            <a:schemeClr val="accent1"/>
-          </a:effectRef>
-          <a:fontRef idx="minor">
-            <a:schemeClr val="lt1"/>
-          </a:fontRef>
-        </p:style>
-        <p:txBody>
-          <a:bodyPr rtlCol="0" anchor="ctr"/>
-          <a:lstStyle/>
-          <a:p>
-            <a:pPr algn="ctr"/>
-          </a:p>
-        </p:txBody>
-      </p:sp>
-      <p:sp>
-        <p:nvSpPr>
-          <p:cNvPr id="9" name="Rounded Rectangle 8"/>
-          <p:cNvSpPr/>
-          <p:nvPr/>
-        </p:nvSpPr>
-        <p:spPr>
-          <a:xfrm>
-            <a:off x="3520440" y="2377440"/>
-            <a:ext cx="2377440" cy="822960"/>
-          </a:xfrm>
-          <a:prstGeom prst="roundRect">
-            <a:avLst/>
-          </a:prstGeom>
-          <a:solidFill>
-            <a:srgbClr val="0F766E"/>
-          </a:solidFill>
-          <a:ln>
-            <a:noFill/>
-          </a:ln>
-          <a:effectLst/>
-        </p:spPr>
-        <p:style>
-          <a:lnRef idx="1">
-            <a:schemeClr val="accent1"/>
-          </a:lnRef>
-          <a:fillRef idx="3">
-            <a:schemeClr val="accent1"/>
-          </a:fillRef>
-          <a:effectRef idx="2">
-            <a:schemeClr val="accent1"/>
-          </a:effectRef>
-          <a:fontRef idx="minor">
-            <a:schemeClr val="lt1"/>
-          </a:fontRef>
-        </p:style>
-        <p:txBody>
-          <a:bodyPr rtlCol="0" anchor="ctr"/>
-          <a:lstStyle/>
-          <a:p>
-            <a:pPr algn="ctr"/>
-          </a:p>
-        </p:txBody>
-      </p:sp>
-      <p:sp>
-        <p:nvSpPr>
-          <p:cNvPr id="10" name="TextBox 9"/>
-          <p:cNvSpPr txBox="1"/>
-          <p:nvPr/>
-        </p:nvSpPr>
-        <p:spPr>
-          <a:xfrm>
-            <a:off x="3520440" y="2624328"/>
-            <a:ext cx="2377440" cy="365760"/>
-          </a:xfrm>
-          <a:prstGeom prst="rect">
-            <a:avLst/>
-          </a:prstGeom>
-          <a:noFill/>
-        </p:spPr>
-        <p:txBody>
-          <a:bodyPr wrap="square" anchor="t">
-            <a:spAutoFit/>
-          </a:bodyPr>
-          <a:lstStyle/>
-          <a:p>
-            <a:pPr algn="ctr">
-              <a:lnSpc>
-                <a:spcPct val="115000"/>
-              </a:lnSpc>
-            </a:pPr>
-            <a:r>
-              <a:rPr sz="1600" b="1">
-                <a:solidFill>
-                  <a:srgbClr val="FFFFFF"/>
-                </a:solidFill>
-                <a:latin typeface="Malgun Gothic"/>
-              </a:rPr>
-              <a:t>feat/auth</a:t>
-            </a:r>
-          </a:p>
-        </p:txBody>
-      </p:sp>
-      <p:sp>
-        <p:nvSpPr>
-          <p:cNvPr id="11" name="Right Arrow 10"/>
-          <p:cNvSpPr/>
-          <p:nvPr/>
-        </p:nvSpPr>
-        <p:spPr>
-          <a:xfrm>
-            <a:off x="5943600" y="2651760"/>
-            <a:ext cx="274320" cy="274320"/>
-          </a:xfrm>
-          <a:prstGeom prst="rightArrow">
-            <a:avLst/>
-          </a:prstGeom>
-          <a:solidFill>
-            <a:srgbClr val="34D399"/>
-          </a:solidFill>
-          <a:ln>
-            <a:noFill/>
-          </a:ln>
-        </p:spPr>
-        <p:style>
-          <a:lnRef idx="1">
-            <a:schemeClr val="accent1"/>
-          </a:lnRef>
-          <a:fillRef idx="3">
-            <a:schemeClr val="accent1"/>
-          </a:fillRef>
-          <a:effectRef idx="2">
-            <a:schemeClr val="accent1"/>
-          </a:effectRef>
-          <a:fontRef idx="minor">
-            <a:schemeClr val="lt1"/>
-          </a:fontRef>
-        </p:style>
-        <p:txBody>
-          <a:bodyPr rtlCol="0" anchor="ctr"/>
-          <a:lstStyle/>
-          <a:p>
-            <a:pPr algn="ctr"/>
-          </a:p>
-        </p:txBody>
-      </p:sp>
-      <p:sp>
-        <p:nvSpPr>
-          <p:cNvPr id="12" name="Rounded Rectangle 11"/>
-          <p:cNvSpPr/>
-          <p:nvPr/>
-        </p:nvSpPr>
-        <p:spPr>
-          <a:xfrm>
-            <a:off x="6217920" y="2377440"/>
-            <a:ext cx="2377440" cy="822960"/>
-          </a:xfrm>
-          <a:prstGeom prst="roundRect">
-            <a:avLst/>
-          </a:prstGeom>
-          <a:solidFill>
-            <a:srgbClr val="0F766E"/>
-          </a:solidFill>
-          <a:ln>
-            <a:noFill/>
-          </a:ln>
-          <a:effectLst/>
-        </p:spPr>
-        <p:style>
-          <a:lnRef idx="1">
-            <a:schemeClr val="accent1"/>
-          </a:lnRef>
-          <a:fillRef idx="3">
-            <a:schemeClr val="accent1"/>
-          </a:fillRef>
-          <a:effectRef idx="2">
-            <a:schemeClr val="accent1"/>
-          </a:effectRef>
-          <a:fontRef idx="minor">
-            <a:schemeClr val="lt1"/>
-          </a:fontRef>
-        </p:style>
-        <p:txBody>
-          <a:bodyPr rtlCol="0" anchor="ctr"/>
-          <a:lstStyle/>
-          <a:p>
-            <a:pPr algn="ctr"/>
-          </a:p>
-        </p:txBody>
-      </p:sp>
-      <p:sp>
-        <p:nvSpPr>
-          <p:cNvPr id="13" name="TextBox 12"/>
-          <p:cNvSpPr txBox="1"/>
-          <p:nvPr/>
-        </p:nvSpPr>
-        <p:spPr>
-          <a:xfrm>
-            <a:off x="6217920" y="2624328"/>
-            <a:ext cx="2377440" cy="365760"/>
-          </a:xfrm>
-          <a:prstGeom prst="rect">
-            <a:avLst/>
-          </a:prstGeom>
-          <a:noFill/>
-        </p:spPr>
-        <p:txBody>
-          <a:bodyPr wrap="square" anchor="t">
-            <a:spAutoFit/>
-          </a:bodyPr>
-          <a:lstStyle/>
-          <a:p>
-            <a:pPr algn="ctr">
-              <a:lnSpc>
-                <a:spcPct val="115000"/>
-              </a:lnSpc>
-            </a:pPr>
-            <a:r>
-              <a:rPr sz="1600" b="1">
-                <a:solidFill>
-                  <a:srgbClr val="FFFFFF"/>
-                </a:solidFill>
-                <a:latin typeface="Malgun Gothic"/>
-              </a:rPr>
-              <a:t>feat/core</a:t>
-            </a:r>
-          </a:p>
-        </p:txBody>
-      </p:sp>
-      <p:sp>
-        <p:nvSpPr>
-          <p:cNvPr id="14" name="Right Arrow 13"/>
-          <p:cNvSpPr/>
-          <p:nvPr/>
-        </p:nvSpPr>
-        <p:spPr>
-          <a:xfrm>
-            <a:off x="8641080" y="2651760"/>
-            <a:ext cx="274320" cy="274320"/>
-          </a:xfrm>
-          <a:prstGeom prst="rightArrow">
-            <a:avLst/>
-          </a:prstGeom>
-          <a:solidFill>
-            <a:srgbClr val="34D399"/>
-          </a:solidFill>
-          <a:ln>
-            <a:noFill/>
-          </a:ln>
-        </p:spPr>
-        <p:style>
-          <a:lnRef idx="1">
-            <a:schemeClr val="accent1"/>
-          </a:lnRef>
-          <a:fillRef idx="3">
-            <a:schemeClr val="accent1"/>
-          </a:fillRef>
-          <a:effectRef idx="2">
-            <a:schemeClr val="accent1"/>
-          </a:effectRef>
-          <a:fontRef idx="minor">
-            <a:schemeClr val="lt1"/>
-          </a:fontRef>
-        </p:style>
-        <p:txBody>
-          <a:bodyPr rtlCol="0" anchor="ctr"/>
-          <a:lstStyle/>
-          <a:p>
-            <a:pPr algn="ctr"/>
-          </a:p>
-        </p:txBody>
-      </p:sp>
-      <p:sp>
-        <p:nvSpPr>
-          <p:cNvPr id="15" name="Rounded Rectangle 14"/>
-          <p:cNvSpPr/>
-          <p:nvPr/>
-        </p:nvSpPr>
-        <p:spPr>
-          <a:xfrm>
-            <a:off x="8915400" y="2377440"/>
-            <a:ext cx="2377440" cy="822960"/>
-          </a:xfrm>
-          <a:prstGeom prst="roundRect">
-            <a:avLst/>
-          </a:prstGeom>
-          <a:solidFill>
-            <a:srgbClr val="1E3A34"/>
-          </a:solidFill>
-          <a:ln>
-            <a:noFill/>
-          </a:ln>
-          <a:effectLst/>
-        </p:spPr>
-        <p:style>
-          <a:lnRef idx="1">
-            <a:schemeClr val="accent1"/>
-          </a:lnRef>
-          <a:fillRef idx="3">
-            <a:schemeClr val="accent1"/>
-          </a:fillRef>
-          <a:effectRef idx="2">
-            <a:schemeClr val="accent1"/>
-          </a:effectRef>
-          <a:fontRef idx="minor">
-            <a:schemeClr val="lt1"/>
-          </a:fontRef>
-        </p:style>
-        <p:txBody>
-          <a:bodyPr rtlCol="0" anchor="ctr"/>
-          <a:lstStyle/>
-          <a:p>
-            <a:pPr algn="ctr"/>
-          </a:p>
-        </p:txBody>
-      </p:sp>
-      <p:sp>
-        <p:nvSpPr>
-          <p:cNvPr id="16" name="TextBox 15"/>
-          <p:cNvSpPr txBox="1"/>
-          <p:nvPr/>
-        </p:nvSpPr>
-        <p:spPr>
-          <a:xfrm>
-            <a:off x="8915400" y="2624328"/>
-            <a:ext cx="2377440" cy="365760"/>
-          </a:xfrm>
-          <a:prstGeom prst="rect">
-            <a:avLst/>
-          </a:prstGeom>
-          <a:noFill/>
-        </p:spPr>
-        <p:txBody>
-          <a:bodyPr wrap="square" anchor="t">
-            <a:spAutoFit/>
-          </a:bodyPr>
-          <a:lstStyle/>
-          <a:p>
-            <a:pPr algn="ctr">
-              <a:lnSpc>
-                <a:spcPct val="115000"/>
-              </a:lnSpc>
-            </a:pPr>
-            <a:r>
-              <a:rPr sz="1600" b="1">
-                <a:solidFill>
-                  <a:srgbClr val="FFFFFF"/>
-                </a:solidFill>
-                <a:latin typeface="Malgun Gothic"/>
-              </a:rPr>
-              <a:t>main</a:t>
-            </a:r>
-          </a:p>
-        </p:txBody>
-      </p:sp>
-      <p:sp>
-        <p:nvSpPr>
-          <p:cNvPr id="17" name="TextBox 16"/>
-          <p:cNvSpPr txBox="1"/>
-          <p:nvPr/>
-        </p:nvSpPr>
-        <p:spPr>
-          <a:xfrm>
-            <a:off x="822960" y="3657600"/>
-            <a:ext cx="10515600" cy="2560320"/>
+            <a:off x="640080" y="1828800"/>
+            <a:ext cx="10789920" cy="4572000"/>
           </a:xfrm>
           <a:prstGeom prst="rect">
             <a:avLst/>
@@ -4300,13 +3840,13 @@
               </a:spcAft>
             </a:pPr>
             <a:r>
-              <a:rPr sz="1500" b="0">
+              <a:rPr sz="1600" b="0">
                 <a:solidFill>
                   <a:srgbClr val="1F2E2A"/>
                 </a:solidFill>
                 <a:latin typeface="Malgun Gothic"/>
               </a:rPr>
-              <a:t>•  PR 기반 병합</a:t>
+              <a:t>•  Row Level Security (RLS)</a:t>
             </a:r>
           </a:p>
           <a:p>
@@ -4316,13 +3856,13 @@
               </a:spcAft>
             </a:pPr>
             <a:r>
-              <a:rPr sz="1200">
+              <a:rPr sz="1300">
                 <a:solidFill>
                   <a:srgbClr val="6E8880"/>
                 </a:solidFill>
                 <a:latin typeface="Malgun Gothic"/>
               </a:rPr>
-              <a:t>     공통 자원 → 인증 → 핵심 기능 순으로 브랜치를 나눠 작업 후 Pull Request로 main에 병합</a:t>
+              <a:t>     고객은 본인 소유 데이터(profiles/expenses)만 조회·수정 가능, 관리자는 role 기반으로 전체 접근</a:t>
             </a:r>
           </a:p>
           <a:p>
@@ -4335,13 +3875,13 @@
               </a:spcAft>
             </a:pPr>
             <a:r>
-              <a:rPr sz="1500" b="0">
+              <a:rPr sz="1600" b="0">
                 <a:solidFill>
                   <a:srgbClr val="1F2E2A"/>
                 </a:solidFill>
                 <a:latin typeface="Malgun Gothic"/>
               </a:rPr>
-              <a:t>•  병합 후 브랜치 정리</a:t>
+              <a:t>•  재귀 없는 관리자 판별</a:t>
             </a:r>
           </a:p>
           <a:p>
@@ -4351,20 +3891,90 @@
               </a:spcAft>
             </a:pPr>
             <a:r>
-              <a:rPr sz="1200">
+              <a:rPr sz="1300">
                 <a:solidFill>
                   <a:srgbClr val="6E8880"/>
                 </a:solidFill>
                 <a:latin typeface="Malgun Gothic"/>
               </a:rPr>
-              <a:t>     머지가 끝난 feat/* 브랜치와 사용하지 않는 master 브랜치를 삭제해 원격 저장소를 깔끔하게 유지</a:t>
-            </a:r>
-          </a:p>
-        </p:txBody>
-      </p:sp>
-      <p:sp>
-        <p:nvSpPr>
-          <p:cNvPr id="18" name="TextBox 17"/>
+              <a:t>     profiles.role을 정책 안에서 직접 조회하면 무한 재귀가 발생 → SECURITY DEFINER 함수(is_admin())로 우회</a:t>
+            </a:r>
+          </a:p>
+          <a:p>
+            <a:pPr>
+              <a:lnSpc>
+                <a:spcPct val="120000"/>
+              </a:lnSpc>
+              <a:spcAft>
+                <a:spcPts val="1000"/>
+              </a:spcAft>
+            </a:pPr>
+            <a:r>
+              <a:rPr sz="1600" b="0">
+                <a:solidFill>
+                  <a:srgbClr val="1F2E2A"/>
+                </a:solidFill>
+                <a:latin typeface="Malgun Gothic"/>
+              </a:rPr>
+              <a:t>•  최소 권한 원칙</a:t>
+            </a:r>
+          </a:p>
+          <a:p>
+            <a:pPr>
+              <a:spcAft>
+                <a:spcPts val="1000"/>
+              </a:spcAft>
+            </a:pPr>
+            <a:r>
+              <a:rPr sz="1300">
+                <a:solidFill>
+                  <a:srgbClr val="6E8880"/>
+                </a:solidFill>
+                <a:latin typeface="Malgun Gothic"/>
+              </a:rPr>
+              <a:t>     Supabase Advisor로 내부 함수의 불필요한 RPC 노출을 점검 → anon/authenticated의 불필요한 EXECUTE 권한 회수</a:t>
+            </a:r>
+          </a:p>
+          <a:p>
+            <a:pPr>
+              <a:lnSpc>
+                <a:spcPct val="120000"/>
+              </a:lnSpc>
+              <a:spcAft>
+                <a:spcPts val="1000"/>
+              </a:spcAft>
+            </a:pPr>
+            <a:r>
+              <a:rPr sz="1600" b="0">
+                <a:solidFill>
+                  <a:srgbClr val="1F2E2A"/>
+                </a:solidFill>
+                <a:latin typeface="Malgun Gothic"/>
+              </a:rPr>
+              <a:t>•  인증 위임</a:t>
+            </a:r>
+          </a:p>
+          <a:p>
+            <a:pPr>
+              <a:spcAft>
+                <a:spcPts val="1000"/>
+              </a:spcAft>
+            </a:pPr>
+            <a:r>
+              <a:rPr sz="1300">
+                <a:solidFill>
+                  <a:srgbClr val="6E8880"/>
+                </a:solidFill>
+                <a:latin typeface="Malgun Gothic"/>
+              </a:rPr>
+              <a:t>     비밀번호 저장·검증을 직접 구현하지 않고 Supabase Auth에 위임해 자체 구현 리스크 제거</a:t>
+            </a:r>
+          </a:p>
+        </p:txBody>
+      </p:sp>
+      <p:sp>
+        <p:nvSpPr>
+          <p:cNvPr id="7" name="TextBox 6"/>
           <p:cNvSpPr txBox="1"/>
           <p:nvPr/>
         </p:nvSpPr>
@@ -4403,7 +4013,7 @@
       </p:sp>
       <p:sp>
         <p:nvSpPr>
-          <p:cNvPr id="19" name="TextBox 18"/>
+          <p:cNvPr id="8" name="TextBox 7"/>
           <p:cNvSpPr txBox="1"/>
           <p:nvPr/>
         </p:nvSpPr>
@@ -4544,7 +4154,7 @@
                 </a:solidFill>
                 <a:latin typeface="Malgun Gothic"/>
               </a:rPr>
-              <a:t>RETROSPECTIVE</a:t>
+              <a:t>WORKFLOW</a:t>
             </a:r>
           </a:p>
         </p:txBody>
@@ -4583,7 +4193,7 @@
                 </a:solidFill>
                 <a:latin typeface="Malgun Gothic"/>
               </a:rPr>
-              <a:t>회고 &amp; 다음 단계</a:t>
+              <a:t>협업 워크플로우</a:t>
             </a:r>
           </a:p>
         </p:txBody>
@@ -4634,14 +4244,58 @@
       </p:sp>
       <p:sp>
         <p:nvSpPr>
-          <p:cNvPr id="6" name="TextBox 5"/>
+          <p:cNvPr id="6" name="Rounded Rectangle 5"/>
+          <p:cNvSpPr/>
+          <p:nvPr/>
+        </p:nvSpPr>
+        <p:spPr>
+          <a:xfrm>
+            <a:off x="822960" y="2377440"/>
+            <a:ext cx="2377440" cy="822960"/>
+          </a:xfrm>
+          <a:prstGeom prst="roundRect">
+            <a:avLst/>
+          </a:prstGeom>
+          <a:solidFill>
+            <a:srgbClr val="0F766E"/>
+          </a:solidFill>
+          <a:ln>
+            <a:noFill/>
+          </a:ln>
+          <a:effectLst/>
+        </p:spPr>
+        <p:style>
+          <a:lnRef idx="1">
+            <a:schemeClr val="accent1"/>
+          </a:lnRef>
+          <a:fillRef idx="3">
+            <a:schemeClr val="accent1"/>
+          </a:fillRef>
+          <a:effectRef idx="2">
+            <a:schemeClr val="accent1"/>
+          </a:effectRef>
+          <a:fontRef idx="minor">
+            <a:schemeClr val="lt1"/>
+          </a:fontRef>
+        </p:style>
+        <p:txBody>
+          <a:bodyPr rtlCol="0" anchor="ctr"/>
+          <a:lstStyle/>
+          <a:p>
+            <a:pPr algn="ctr"/>
+          </a:p>
+        </p:txBody>
+      </p:sp>
+      <p:sp>
+        <p:nvSpPr>
+          <p:cNvPr id="7" name="TextBox 6"/>
           <p:cNvSpPr txBox="1"/>
           <p:nvPr/>
         </p:nvSpPr>
         <p:spPr>
           <a:xfrm>
-            <a:off x="640080" y="1828800"/>
-            <a:ext cx="5303520" cy="365760"/>
+            <a:off x="822960" y="2624328"/>
+            <a:ext cx="2377440" cy="365760"/>
           </a:xfrm>
           <a:prstGeom prst="rect">
             <a:avLst/>
@@ -4654,7 +4308,7 @@
           </a:bodyPr>
           <a:lstStyle/>
           <a:p>
-            <a:pPr algn="l">
+            <a:pPr algn="ctr">
               <a:lnSpc>
                 <a:spcPct val="115000"/>
               </a:lnSpc>
@@ -4662,25 +4316,403 @@
             <a:r>
               <a:rPr sz="1600" b="1">
                 <a:solidFill>
-                  <a:srgbClr val="0F766E"/>
-                </a:solidFill>
-                <a:latin typeface="Malgun Gothic"/>
-              </a:rPr>
-              <a:t>배운 점</a:t>
-            </a:r>
-          </a:p>
-        </p:txBody>
-      </p:sp>
-      <p:sp>
-        <p:nvSpPr>
-          <p:cNvPr id="7" name="TextBox 6"/>
+                  <a:srgbClr val="FFFFFF"/>
+                </a:solidFill>
+                <a:latin typeface="Malgun Gothic"/>
+              </a:rPr>
+              <a:t>feat/shared</a:t>
+            </a:r>
+          </a:p>
+        </p:txBody>
+      </p:sp>
+      <p:sp>
+        <p:nvSpPr>
+          <p:cNvPr id="8" name="Right Arrow 7"/>
+          <p:cNvSpPr/>
+          <p:nvPr/>
+        </p:nvSpPr>
+        <p:spPr>
+          <a:xfrm>
+            <a:off x="3246120" y="2651760"/>
+            <a:ext cx="274320" cy="274320"/>
+          </a:xfrm>
+          <a:prstGeom prst="rightArrow">
+            <a:avLst/>
+          </a:prstGeom>
+          <a:solidFill>
+            <a:srgbClr val="34D399"/>
+          </a:solidFill>
+          <a:ln>
+            <a:noFill/>
+          </a:ln>
+        </p:spPr>
+        <p:style>
+          <a:lnRef idx="1">
+            <a:schemeClr val="accent1"/>
+          </a:lnRef>
+          <a:fillRef idx="3">
+            <a:schemeClr val="accent1"/>
+          </a:fillRef>
+          <a:effectRef idx="2">
+            <a:schemeClr val="accent1"/>
+          </a:effectRef>
+          <a:fontRef idx="minor">
+            <a:schemeClr val="lt1"/>
+          </a:fontRef>
+        </p:style>
+        <p:txBody>
+          <a:bodyPr rtlCol="0" anchor="ctr"/>
+          <a:lstStyle/>
+          <a:p>
+            <a:pPr algn="ctr"/>
+          </a:p>
+        </p:txBody>
+      </p:sp>
+      <p:sp>
+        <p:nvSpPr>
+          <p:cNvPr id="9" name="Rounded Rectangle 8"/>
+          <p:cNvSpPr/>
+          <p:nvPr/>
+        </p:nvSpPr>
+        <p:spPr>
+          <a:xfrm>
+            <a:off x="3520440" y="2377440"/>
+            <a:ext cx="2377440" cy="822960"/>
+          </a:xfrm>
+          <a:prstGeom prst="roundRect">
+            <a:avLst/>
+          </a:prstGeom>
+          <a:solidFill>
+            <a:srgbClr val="0F766E"/>
+          </a:solidFill>
+          <a:ln>
+            <a:noFill/>
+          </a:ln>
+          <a:effectLst/>
+        </p:spPr>
+        <p:style>
+          <a:lnRef idx="1">
+            <a:schemeClr val="accent1"/>
+          </a:lnRef>
+          <a:fillRef idx="3">
+            <a:schemeClr val="accent1"/>
+          </a:fillRef>
+          <a:effectRef idx="2">
+            <a:schemeClr val="accent1"/>
+          </a:effectRef>
+          <a:fontRef idx="minor">
+            <a:schemeClr val="lt1"/>
+          </a:fontRef>
+        </p:style>
+        <p:txBody>
+          <a:bodyPr rtlCol="0" anchor="ctr"/>
+          <a:lstStyle/>
+          <a:p>
+            <a:pPr algn="ctr"/>
+          </a:p>
+        </p:txBody>
+      </p:sp>
+      <p:sp>
+        <p:nvSpPr>
+          <p:cNvPr id="10" name="TextBox 9"/>
           <p:cNvSpPr txBox="1"/>
           <p:nvPr/>
         </p:nvSpPr>
         <p:spPr>
           <a:xfrm>
-            <a:off x="640080" y="2240280"/>
-            <a:ext cx="5303520" cy="3657600"/>
+            <a:off x="3520440" y="2624328"/>
+            <a:ext cx="2377440" cy="365760"/>
+          </a:xfrm>
+          <a:prstGeom prst="rect">
+            <a:avLst/>
+          </a:prstGeom>
+          <a:noFill/>
+        </p:spPr>
+        <p:txBody>
+          <a:bodyPr wrap="square" anchor="t">
+            <a:spAutoFit/>
+          </a:bodyPr>
+          <a:lstStyle/>
+          <a:p>
+            <a:pPr algn="ctr">
+              <a:lnSpc>
+                <a:spcPct val="115000"/>
+              </a:lnSpc>
+            </a:pPr>
+            <a:r>
+              <a:rPr sz="1600" b="1">
+                <a:solidFill>
+                  <a:srgbClr val="FFFFFF"/>
+                </a:solidFill>
+                <a:latin typeface="Malgun Gothic"/>
+              </a:rPr>
+              <a:t>feat/auth</a:t>
+            </a:r>
+          </a:p>
+        </p:txBody>
+      </p:sp>
+      <p:sp>
+        <p:nvSpPr>
+          <p:cNvPr id="11" name="Right Arrow 10"/>
+          <p:cNvSpPr/>
+          <p:nvPr/>
+        </p:nvSpPr>
+        <p:spPr>
+          <a:xfrm>
+            <a:off x="5943600" y="2651760"/>
+            <a:ext cx="274320" cy="274320"/>
+          </a:xfrm>
+          <a:prstGeom prst="rightArrow">
+            <a:avLst/>
+          </a:prstGeom>
+          <a:solidFill>
+            <a:srgbClr val="34D399"/>
+          </a:solidFill>
+          <a:ln>
+            <a:noFill/>
+          </a:ln>
+        </p:spPr>
+        <p:style>
+          <a:lnRef idx="1">
+            <a:schemeClr val="accent1"/>
+          </a:lnRef>
+          <a:fillRef idx="3">
+            <a:schemeClr val="accent1"/>
+          </a:fillRef>
+          <a:effectRef idx="2">
+            <a:schemeClr val="accent1"/>
+          </a:effectRef>
+          <a:fontRef idx="minor">
+            <a:schemeClr val="lt1"/>
+          </a:fontRef>
+        </p:style>
+        <p:txBody>
+          <a:bodyPr rtlCol="0" anchor="ctr"/>
+          <a:lstStyle/>
+          <a:p>
+            <a:pPr algn="ctr"/>
+          </a:p>
+        </p:txBody>
+      </p:sp>
+      <p:sp>
+        <p:nvSpPr>
+          <p:cNvPr id="12" name="Rounded Rectangle 11"/>
+          <p:cNvSpPr/>
+          <p:nvPr/>
+        </p:nvSpPr>
+        <p:spPr>
+          <a:xfrm>
+            <a:off x="6217920" y="2377440"/>
+            <a:ext cx="2377440" cy="822960"/>
+          </a:xfrm>
+          <a:prstGeom prst="roundRect">
+            <a:avLst/>
+          </a:prstGeom>
+          <a:solidFill>
+            <a:srgbClr val="0F766E"/>
+          </a:solidFill>
+          <a:ln>
+            <a:noFill/>
+          </a:ln>
+          <a:effectLst/>
+        </p:spPr>
+        <p:style>
+          <a:lnRef idx="1">
+            <a:schemeClr val="accent1"/>
+          </a:lnRef>
+          <a:fillRef idx="3">
+            <a:schemeClr val="accent1"/>
+          </a:fillRef>
+          <a:effectRef idx="2">
+            <a:schemeClr val="accent1"/>
+          </a:effectRef>
+          <a:fontRef idx="minor">
+            <a:schemeClr val="lt1"/>
+          </a:fontRef>
+        </p:style>
+        <p:txBody>
+          <a:bodyPr rtlCol="0" anchor="ctr"/>
+          <a:lstStyle/>
+          <a:p>
+            <a:pPr algn="ctr"/>
+          </a:p>
+        </p:txBody>
+      </p:sp>
+      <p:sp>
+        <p:nvSpPr>
+          <p:cNvPr id="13" name="TextBox 12"/>
+          <p:cNvSpPr txBox="1"/>
+          <p:nvPr/>
+        </p:nvSpPr>
+        <p:spPr>
+          <a:xfrm>
+            <a:off x="6217920" y="2624328"/>
+            <a:ext cx="2377440" cy="365760"/>
+          </a:xfrm>
+          <a:prstGeom prst="rect">
+            <a:avLst/>
+          </a:prstGeom>
+          <a:noFill/>
+        </p:spPr>
+        <p:txBody>
+          <a:bodyPr wrap="square" anchor="t">
+            <a:spAutoFit/>
+          </a:bodyPr>
+          <a:lstStyle/>
+          <a:p>
+            <a:pPr algn="ctr">
+              <a:lnSpc>
+                <a:spcPct val="115000"/>
+              </a:lnSpc>
+            </a:pPr>
+            <a:r>
+              <a:rPr sz="1600" b="1">
+                <a:solidFill>
+                  <a:srgbClr val="FFFFFF"/>
+                </a:solidFill>
+                <a:latin typeface="Malgun Gothic"/>
+              </a:rPr>
+              <a:t>feat/core</a:t>
+            </a:r>
+          </a:p>
+        </p:txBody>
+      </p:sp>
+      <p:sp>
+        <p:nvSpPr>
+          <p:cNvPr id="14" name="Right Arrow 13"/>
+          <p:cNvSpPr/>
+          <p:nvPr/>
+        </p:nvSpPr>
+        <p:spPr>
+          <a:xfrm>
+            <a:off x="8641080" y="2651760"/>
+            <a:ext cx="274320" cy="274320"/>
+          </a:xfrm>
+          <a:prstGeom prst="rightArrow">
+            <a:avLst/>
+          </a:prstGeom>
+          <a:solidFill>
+            <a:srgbClr val="34D399"/>
+          </a:solidFill>
+          <a:ln>
+            <a:noFill/>
+          </a:ln>
+        </p:spPr>
+        <p:style>
+          <a:lnRef idx="1">
+            <a:schemeClr val="accent1"/>
+          </a:lnRef>
+          <a:fillRef idx="3">
+            <a:schemeClr val="accent1"/>
+          </a:fillRef>
+          <a:effectRef idx="2">
+            <a:schemeClr val="accent1"/>
+          </a:effectRef>
+          <a:fontRef idx="minor">
+            <a:schemeClr val="lt1"/>
+          </a:fontRef>
+        </p:style>
+        <p:txBody>
+          <a:bodyPr rtlCol="0" anchor="ctr"/>
+          <a:lstStyle/>
+          <a:p>
+            <a:pPr algn="ctr"/>
+          </a:p>
+        </p:txBody>
+      </p:sp>
+      <p:sp>
+        <p:nvSpPr>
+          <p:cNvPr id="15" name="Rounded Rectangle 14"/>
+          <p:cNvSpPr/>
+          <p:nvPr/>
+        </p:nvSpPr>
+        <p:spPr>
+          <a:xfrm>
+            <a:off x="8915400" y="2377440"/>
+            <a:ext cx="2377440" cy="822960"/>
+          </a:xfrm>
+          <a:prstGeom prst="roundRect">
+            <a:avLst/>
+          </a:prstGeom>
+          <a:solidFill>
+            <a:srgbClr val="1E3A34"/>
+          </a:solidFill>
+          <a:ln>
+            <a:noFill/>
+          </a:ln>
+          <a:effectLst/>
+        </p:spPr>
+        <p:style>
+          <a:lnRef idx="1">
+            <a:schemeClr val="accent1"/>
+          </a:lnRef>
+          <a:fillRef idx="3">
+            <a:schemeClr val="accent1"/>
+          </a:fillRef>
+          <a:effectRef idx="2">
+            <a:schemeClr val="accent1"/>
+          </a:effectRef>
+          <a:fontRef idx="minor">
+            <a:schemeClr val="lt1"/>
+          </a:fontRef>
+        </p:style>
+        <p:txBody>
+          <a:bodyPr rtlCol="0" anchor="ctr"/>
+          <a:lstStyle/>
+          <a:p>
+            <a:pPr algn="ctr"/>
+          </a:p>
+        </p:txBody>
+      </p:sp>
+      <p:sp>
+        <p:nvSpPr>
+          <p:cNvPr id="16" name="TextBox 15"/>
+          <p:cNvSpPr txBox="1"/>
+          <p:nvPr/>
+        </p:nvSpPr>
+        <p:spPr>
+          <a:xfrm>
+            <a:off x="8915400" y="2624328"/>
+            <a:ext cx="2377440" cy="365760"/>
+          </a:xfrm>
+          <a:prstGeom prst="rect">
+            <a:avLst/>
+          </a:prstGeom>
+          <a:noFill/>
+        </p:spPr>
+        <p:txBody>
+          <a:bodyPr wrap="square" anchor="t">
+            <a:spAutoFit/>
+          </a:bodyPr>
+          <a:lstStyle/>
+          <a:p>
+            <a:pPr algn="ctr">
+              <a:lnSpc>
+                <a:spcPct val="115000"/>
+              </a:lnSpc>
+            </a:pPr>
+            <a:r>
+              <a:rPr sz="1600" b="1">
+                <a:solidFill>
+                  <a:srgbClr val="FFFFFF"/>
+                </a:solidFill>
+                <a:latin typeface="Malgun Gothic"/>
+              </a:rPr>
+              <a:t>main</a:t>
+            </a:r>
+          </a:p>
+        </p:txBody>
+      </p:sp>
+      <p:sp>
+        <p:nvSpPr>
+          <p:cNvPr id="17" name="TextBox 16"/>
+          <p:cNvSpPr txBox="1"/>
+          <p:nvPr/>
+        </p:nvSpPr>
+        <p:spPr>
+          <a:xfrm>
+            <a:off x="822960" y="3657600"/>
+            <a:ext cx="10515600" cy="2560320"/>
           </a:xfrm>
           <a:prstGeom prst="rect">
             <a:avLst/>
@@ -4702,32 +4734,29 @@
               </a:spcAft>
             </a:pPr>
             <a:r>
-              <a:rPr sz="1400" b="0">
+              <a:rPr sz="1500" b="0">
                 <a:solidFill>
                   <a:srgbClr val="1F2E2A"/>
                 </a:solidFill>
                 <a:latin typeface="Malgun Gothic"/>
               </a:rPr>
-              <a:t>•  정적 데모(localStorage)에서 실제 백엔드(Supabase)로 옮기며 인증·보안을 다시 설계하는 경험</a:t>
+              <a:t>•  PR 기반 병합</a:t>
             </a:r>
           </a:p>
           <a:p>
             <a:pPr>
-              <a:lnSpc>
-                <a:spcPct val="120000"/>
-              </a:lnSpc>
               <a:spcAft>
                 <a:spcPts val="1000"/>
               </a:spcAft>
             </a:pPr>
             <a:r>
-              <a:rPr sz="1400" b="0">
-                <a:solidFill>
-                  <a:srgbClr val="1F2E2A"/>
-                </a:solidFill>
-                <a:latin typeface="Malgun Gothic"/>
-              </a:rPr>
-              <a:t>•  RLS 정책의 재귀 문제를 SECURITY DEFINER 함수 패턴으로 해결</a:t>
+              <a:rPr sz="1200">
+                <a:solidFill>
+                  <a:srgbClr val="6E8880"/>
+                </a:solidFill>
+                <a:latin typeface="Malgun Gothic"/>
+              </a:rPr>
+              <a:t>     공통 자원 → 인증 → 핵심 기능 순으로 브랜치를 나눠 작업 후 Pull Request로 main에 병합</a:t>
             </a:r>
           </a:p>
           <a:p>
@@ -4740,27 +4769,43 @@
               </a:spcAft>
             </a:pPr>
             <a:r>
-              <a:rPr sz="1400" b="0">
+              <a:rPr sz="1500" b="0">
                 <a:solidFill>
                   <a:srgbClr val="1F2E2A"/>
                 </a:solidFill>
                 <a:latin typeface="Malgun Gothic"/>
               </a:rPr>
-              <a:t>•  Security Advisor로 보이지 않는 권한 노출까지 점검하는 습관</a:t>
-            </a:r>
-          </a:p>
-        </p:txBody>
-      </p:sp>
-      <p:sp>
-        <p:nvSpPr>
-          <p:cNvPr id="8" name="TextBox 7"/>
+              <a:t>•  병합 후 브랜치 정리</a:t>
+            </a:r>
+          </a:p>
+          <a:p>
+            <a:pPr>
+              <a:spcAft>
+                <a:spcPts val="1000"/>
+              </a:spcAft>
+            </a:pPr>
+            <a:r>
+              <a:rPr sz="1200">
+                <a:solidFill>
+                  <a:srgbClr val="6E8880"/>
+                </a:solidFill>
+                <a:latin typeface="Malgun Gothic"/>
+              </a:rPr>
+              <a:t>     머지가 끝난 feat/* 브랜치와 사용하지 않는 master 브랜치를 삭제해 원격 저장소를 깔끔하게 유지</a:t>
+            </a:r>
+          </a:p>
+        </p:txBody>
+      </p:sp>
+      <p:sp>
+        <p:nvSpPr>
+          <p:cNvPr id="18" name="TextBox 17"/>
           <p:cNvSpPr txBox="1"/>
           <p:nvPr/>
         </p:nvSpPr>
         <p:spPr>
           <a:xfrm>
-            <a:off x="6309360" y="1828800"/>
-            <a:ext cx="5303520" cy="365760"/>
+            <a:off x="457200" y="6446520"/>
+            <a:ext cx="7315200" cy="320040"/>
           </a:xfrm>
           <a:prstGeom prst="rect">
             <a:avLst/>
@@ -4779,125 +4824,6 @@
               </a:lnSpc>
             </a:pPr>
             <a:r>
-              <a:rPr sz="1600" b="1">
-                <a:solidFill>
-                  <a:srgbClr val="0F766E"/>
-                </a:solidFill>
-                <a:latin typeface="Malgun Gothic"/>
-              </a:rPr>
-              <a:t>다음 단계</a:t>
-            </a:r>
-          </a:p>
-        </p:txBody>
-      </p:sp>
-      <p:sp>
-        <p:nvSpPr>
-          <p:cNvPr id="9" name="TextBox 8"/>
-          <p:cNvSpPr txBox="1"/>
-          <p:nvPr/>
-        </p:nvSpPr>
-        <p:spPr>
-          <a:xfrm>
-            <a:off x="6309360" y="2240280"/>
-            <a:ext cx="5303520" cy="3657600"/>
-          </a:xfrm>
-          <a:prstGeom prst="rect">
-            <a:avLst/>
-          </a:prstGeom>
-          <a:noFill/>
-        </p:spPr>
-        <p:txBody>
-          <a:bodyPr wrap="square">
-            <a:spAutoFit/>
-          </a:bodyPr>
-          <a:lstStyle/>
-          <a:p>
-            <a:pPr>
-              <a:lnSpc>
-                <a:spcPct val="120000"/>
-              </a:lnSpc>
-              <a:spcAft>
-                <a:spcPts val="1000"/>
-              </a:spcAft>
-            </a:pPr>
-            <a:r>
-              <a:rPr sz="1400" b="0">
-                <a:solidFill>
-                  <a:srgbClr val="1F2E2A"/>
-                </a:solidFill>
-                <a:latin typeface="Malgun Gothic"/>
-              </a:rPr>
-              <a:t>•  관리자 계정도 Supabase Auth 기반으로 전환 검토</a:t>
-            </a:r>
-          </a:p>
-          <a:p>
-            <a:pPr>
-              <a:lnSpc>
-                <a:spcPct val="120000"/>
-              </a:lnSpc>
-              <a:spcAft>
-                <a:spcPts val="1000"/>
-              </a:spcAft>
-            </a:pPr>
-            <a:r>
-              <a:rPr sz="1400" b="0">
-                <a:solidFill>
-                  <a:srgbClr val="1F2E2A"/>
-                </a:solidFill>
-                <a:latin typeface="Malgun Gothic"/>
-              </a:rPr>
-              <a:t>•  프론트엔드(js/utils.js)를 Supabase 클라이언트 호출로 교체</a:t>
-            </a:r>
-          </a:p>
-          <a:p>
-            <a:pPr>
-              <a:lnSpc>
-                <a:spcPct val="120000"/>
-              </a:lnSpc>
-              <a:spcAft>
-                <a:spcPts val="1000"/>
-              </a:spcAft>
-            </a:pPr>
-            <a:r>
-              <a:rPr sz="1400" b="0">
-                <a:solidFill>
-                  <a:srgbClr val="1F2E2A"/>
-                </a:solidFill>
-                <a:latin typeface="Malgun Gothic"/>
-              </a:rPr>
-              <a:t>•  관리자 페이지에 실시간 통계·알림 기능 확장</a:t>
-            </a:r>
-          </a:p>
-        </p:txBody>
-      </p:sp>
-      <p:sp>
-        <p:nvSpPr>
-          <p:cNvPr id="10" name="TextBox 9"/>
-          <p:cNvSpPr txBox="1"/>
-          <p:nvPr/>
-        </p:nvSpPr>
-        <p:spPr>
-          <a:xfrm>
-            <a:off x="457200" y="6446520"/>
-            <a:ext cx="7315200" cy="320040"/>
-          </a:xfrm>
-          <a:prstGeom prst="rect">
-            <a:avLst/>
-          </a:prstGeom>
-          <a:noFill/>
-        </p:spPr>
-        <p:txBody>
-          <a:bodyPr wrap="square" anchor="t">
-            <a:spAutoFit/>
-          </a:bodyPr>
-          <a:lstStyle/>
-          <a:p>
-            <a:pPr algn="l">
-              <a:lnSpc>
-                <a:spcPct val="115000"/>
-              </a:lnSpc>
-            </a:pPr>
-            <a:r>
               <a:rPr sz="1000" b="0">
                 <a:solidFill>
                   <a:srgbClr val="6E8880"/>
@@ -4911,7 +4837,7 @@
       </p:sp>
       <p:sp>
         <p:nvSpPr>
-          <p:cNvPr id="11" name="TextBox 10"/>
+          <p:cNvPr id="19" name="TextBox 18"/>
           <p:cNvSpPr txBox="1"/>
           <p:nvPr/>
         </p:nvSpPr>
@@ -4957,6 +4883,514 @@
 </file>
 
 <file path=ppt/slides/slide12.xml><?xml version="1.0" encoding="utf-8"?>
+<p:sld xmlns:a="http://schemas.openxmlformats.org/drawingml/2006/main" xmlns:p="http://schemas.openxmlformats.org/presentationml/2006/main" xmlns:r="http://schemas.openxmlformats.org/officeDocument/2006/relationships">
+  <p:cSld>
+    <p:bg>
+      <p:bgPr>
+        <a:solidFill>
+          <a:srgbClr val="F3FBF8"/>
+        </a:solidFill>
+        <a:effectLst/>
+      </p:bgPr>
+    </p:bg>
+    <p:spTree>
+      <p:nvGrpSpPr>
+        <p:cNvPr id="1" name=""/>
+        <p:cNvGrpSpPr/>
+        <p:nvPr/>
+      </p:nvGrpSpPr>
+      <p:grpSpPr/>
+      <p:sp>
+        <p:nvSpPr>
+          <p:cNvPr id="2" name="Rectangle 1"/>
+          <p:cNvSpPr/>
+          <p:nvPr/>
+        </p:nvSpPr>
+        <p:spPr>
+          <a:xfrm>
+            <a:off x="457200" y="502920"/>
+            <a:ext cx="109728" cy="457200"/>
+          </a:xfrm>
+          <a:prstGeom prst="rect">
+            <a:avLst/>
+          </a:prstGeom>
+          <a:solidFill>
+            <a:srgbClr val="0F766E"/>
+          </a:solidFill>
+          <a:ln>
+            <a:noFill/>
+          </a:ln>
+          <a:effectLst/>
+        </p:spPr>
+        <p:style>
+          <a:lnRef idx="1">
+            <a:schemeClr val="accent1"/>
+          </a:lnRef>
+          <a:fillRef idx="3">
+            <a:schemeClr val="accent1"/>
+          </a:fillRef>
+          <a:effectRef idx="2">
+            <a:schemeClr val="accent1"/>
+          </a:effectRef>
+          <a:fontRef idx="minor">
+            <a:schemeClr val="lt1"/>
+          </a:fontRef>
+        </p:style>
+        <p:txBody>
+          <a:bodyPr rtlCol="0" anchor="ctr"/>
+          <a:lstStyle/>
+          <a:p>
+            <a:pPr algn="ctr"/>
+          </a:p>
+        </p:txBody>
+      </p:sp>
+      <p:sp>
+        <p:nvSpPr>
+          <p:cNvPr id="3" name="TextBox 2"/>
+          <p:cNvSpPr txBox="1"/>
+          <p:nvPr/>
+        </p:nvSpPr>
+        <p:spPr>
+          <a:xfrm>
+            <a:off x="685800" y="411480"/>
+            <a:ext cx="9144000" cy="365760"/>
+          </a:xfrm>
+          <a:prstGeom prst="rect">
+            <a:avLst/>
+          </a:prstGeom>
+          <a:noFill/>
+        </p:spPr>
+        <p:txBody>
+          <a:bodyPr wrap="square" anchor="t">
+            <a:spAutoFit/>
+          </a:bodyPr>
+          <a:lstStyle/>
+          <a:p>
+            <a:pPr algn="l">
+              <a:lnSpc>
+                <a:spcPct val="115000"/>
+              </a:lnSpc>
+            </a:pPr>
+            <a:r>
+              <a:rPr sz="1300" b="1">
+                <a:solidFill>
+                  <a:srgbClr val="0F766E"/>
+                </a:solidFill>
+                <a:latin typeface="Malgun Gothic"/>
+              </a:rPr>
+              <a:t>RETROSPECTIVE</a:t>
+            </a:r>
+          </a:p>
+        </p:txBody>
+      </p:sp>
+      <p:sp>
+        <p:nvSpPr>
+          <p:cNvPr id="4" name="TextBox 3"/>
+          <p:cNvSpPr txBox="1"/>
+          <p:nvPr/>
+        </p:nvSpPr>
+        <p:spPr>
+          <a:xfrm>
+            <a:off x="640080" y="777240"/>
+            <a:ext cx="10515600" cy="731520"/>
+          </a:xfrm>
+          <a:prstGeom prst="rect">
+            <a:avLst/>
+          </a:prstGeom>
+          <a:noFill/>
+        </p:spPr>
+        <p:txBody>
+          <a:bodyPr wrap="square" anchor="t">
+            <a:spAutoFit/>
+          </a:bodyPr>
+          <a:lstStyle/>
+          <a:p>
+            <a:pPr algn="l">
+              <a:lnSpc>
+                <a:spcPct val="115000"/>
+              </a:lnSpc>
+            </a:pPr>
+            <a:r>
+              <a:rPr sz="2800" b="1">
+                <a:solidFill>
+                  <a:srgbClr val="1F2E2A"/>
+                </a:solidFill>
+                <a:latin typeface="Malgun Gothic"/>
+              </a:rPr>
+              <a:t>회고 &amp; 다음 단계</a:t>
+            </a:r>
+          </a:p>
+        </p:txBody>
+      </p:sp>
+      <p:sp>
+        <p:nvSpPr>
+          <p:cNvPr id="5" name="Rectangle 4"/>
+          <p:cNvSpPr/>
+          <p:nvPr/>
+        </p:nvSpPr>
+        <p:spPr>
+          <a:xfrm>
+            <a:off x="640080" y="1508760"/>
+            <a:ext cx="10972800" cy="25400"/>
+          </a:xfrm>
+          <a:prstGeom prst="rect">
+            <a:avLst/>
+          </a:prstGeom>
+          <a:solidFill>
+            <a:srgbClr val="DCEEE7"/>
+          </a:solidFill>
+          <a:ln>
+            <a:noFill/>
+          </a:ln>
+          <a:effectLst/>
+        </p:spPr>
+        <p:style>
+          <a:lnRef idx="1">
+            <a:schemeClr val="accent1"/>
+          </a:lnRef>
+          <a:fillRef idx="3">
+            <a:schemeClr val="accent1"/>
+          </a:fillRef>
+          <a:effectRef idx="2">
+            <a:schemeClr val="accent1"/>
+          </a:effectRef>
+          <a:fontRef idx="minor">
+            <a:schemeClr val="lt1"/>
+          </a:fontRef>
+        </p:style>
+        <p:txBody>
+          <a:bodyPr rtlCol="0" anchor="ctr"/>
+          <a:lstStyle/>
+          <a:p>
+            <a:pPr algn="ctr"/>
+          </a:p>
+        </p:txBody>
+      </p:sp>
+      <p:sp>
+        <p:nvSpPr>
+          <p:cNvPr id="6" name="TextBox 5"/>
+          <p:cNvSpPr txBox="1"/>
+          <p:nvPr/>
+        </p:nvSpPr>
+        <p:spPr>
+          <a:xfrm>
+            <a:off x="640080" y="1828800"/>
+            <a:ext cx="5303520" cy="365760"/>
+          </a:xfrm>
+          <a:prstGeom prst="rect">
+            <a:avLst/>
+          </a:prstGeom>
+          <a:noFill/>
+        </p:spPr>
+        <p:txBody>
+          <a:bodyPr wrap="square" anchor="t">
+            <a:spAutoFit/>
+          </a:bodyPr>
+          <a:lstStyle/>
+          <a:p>
+            <a:pPr algn="l">
+              <a:lnSpc>
+                <a:spcPct val="115000"/>
+              </a:lnSpc>
+            </a:pPr>
+            <a:r>
+              <a:rPr sz="1600" b="1">
+                <a:solidFill>
+                  <a:srgbClr val="0F766E"/>
+                </a:solidFill>
+                <a:latin typeface="Malgun Gothic"/>
+              </a:rPr>
+              <a:t>배운 점</a:t>
+            </a:r>
+          </a:p>
+        </p:txBody>
+      </p:sp>
+      <p:sp>
+        <p:nvSpPr>
+          <p:cNvPr id="7" name="TextBox 6"/>
+          <p:cNvSpPr txBox="1"/>
+          <p:nvPr/>
+        </p:nvSpPr>
+        <p:spPr>
+          <a:xfrm>
+            <a:off x="640080" y="2240280"/>
+            <a:ext cx="5303520" cy="3657600"/>
+          </a:xfrm>
+          <a:prstGeom prst="rect">
+            <a:avLst/>
+          </a:prstGeom>
+          <a:noFill/>
+        </p:spPr>
+        <p:txBody>
+          <a:bodyPr wrap="square">
+            <a:spAutoFit/>
+          </a:bodyPr>
+          <a:lstStyle/>
+          <a:p>
+            <a:pPr>
+              <a:lnSpc>
+                <a:spcPct val="120000"/>
+              </a:lnSpc>
+              <a:spcAft>
+                <a:spcPts val="1000"/>
+              </a:spcAft>
+            </a:pPr>
+            <a:r>
+              <a:rPr sz="1400" b="0">
+                <a:solidFill>
+                  <a:srgbClr val="1F2E2A"/>
+                </a:solidFill>
+                <a:latin typeface="Malgun Gothic"/>
+              </a:rPr>
+              <a:t>•  정적 데모(localStorage)에서 실제 백엔드(Supabase)로 옮기며 인증·보안을 다시 설계하는 경험</a:t>
+            </a:r>
+          </a:p>
+          <a:p>
+            <a:pPr>
+              <a:lnSpc>
+                <a:spcPct val="120000"/>
+              </a:lnSpc>
+              <a:spcAft>
+                <a:spcPts val="1000"/>
+              </a:spcAft>
+            </a:pPr>
+            <a:r>
+              <a:rPr sz="1400" b="0">
+                <a:solidFill>
+                  <a:srgbClr val="1F2E2A"/>
+                </a:solidFill>
+                <a:latin typeface="Malgun Gothic"/>
+              </a:rPr>
+              <a:t>•  RLS 정책의 재귀 문제를 SECURITY DEFINER 함수 패턴으로 해결</a:t>
+            </a:r>
+          </a:p>
+          <a:p>
+            <a:pPr>
+              <a:lnSpc>
+                <a:spcPct val="120000"/>
+              </a:lnSpc>
+              <a:spcAft>
+                <a:spcPts val="1000"/>
+              </a:spcAft>
+            </a:pPr>
+            <a:r>
+              <a:rPr sz="1400" b="0">
+                <a:solidFill>
+                  <a:srgbClr val="1F2E2A"/>
+                </a:solidFill>
+                <a:latin typeface="Malgun Gothic"/>
+              </a:rPr>
+              <a:t>•  Security Advisor로 보이지 않는 권한 노출까지 점검하는 습관</a:t>
+            </a:r>
+          </a:p>
+        </p:txBody>
+      </p:sp>
+      <p:sp>
+        <p:nvSpPr>
+          <p:cNvPr id="8" name="TextBox 7"/>
+          <p:cNvSpPr txBox="1"/>
+          <p:nvPr/>
+        </p:nvSpPr>
+        <p:spPr>
+          <a:xfrm>
+            <a:off x="6309360" y="1828800"/>
+            <a:ext cx="5303520" cy="365760"/>
+          </a:xfrm>
+          <a:prstGeom prst="rect">
+            <a:avLst/>
+          </a:prstGeom>
+          <a:noFill/>
+        </p:spPr>
+        <p:txBody>
+          <a:bodyPr wrap="square" anchor="t">
+            <a:spAutoFit/>
+          </a:bodyPr>
+          <a:lstStyle/>
+          <a:p>
+            <a:pPr algn="l">
+              <a:lnSpc>
+                <a:spcPct val="115000"/>
+              </a:lnSpc>
+            </a:pPr>
+            <a:r>
+              <a:rPr sz="1600" b="1">
+                <a:solidFill>
+                  <a:srgbClr val="0F766E"/>
+                </a:solidFill>
+                <a:latin typeface="Malgun Gothic"/>
+              </a:rPr>
+              <a:t>다음 단계</a:t>
+            </a:r>
+          </a:p>
+        </p:txBody>
+      </p:sp>
+      <p:sp>
+        <p:nvSpPr>
+          <p:cNvPr id="9" name="TextBox 8"/>
+          <p:cNvSpPr txBox="1"/>
+          <p:nvPr/>
+        </p:nvSpPr>
+        <p:spPr>
+          <a:xfrm>
+            <a:off x="6309360" y="2240280"/>
+            <a:ext cx="5303520" cy="3657600"/>
+          </a:xfrm>
+          <a:prstGeom prst="rect">
+            <a:avLst/>
+          </a:prstGeom>
+          <a:noFill/>
+        </p:spPr>
+        <p:txBody>
+          <a:bodyPr wrap="square">
+            <a:spAutoFit/>
+          </a:bodyPr>
+          <a:lstStyle/>
+          <a:p>
+            <a:pPr>
+              <a:lnSpc>
+                <a:spcPct val="120000"/>
+              </a:lnSpc>
+              <a:spcAft>
+                <a:spcPts val="1000"/>
+              </a:spcAft>
+            </a:pPr>
+            <a:r>
+              <a:rPr sz="1400" b="0">
+                <a:solidFill>
+                  <a:srgbClr val="1F2E2A"/>
+                </a:solidFill>
+                <a:latin typeface="Malgun Gothic"/>
+              </a:rPr>
+              <a:t>•  관리자 계정도 Supabase Auth 기반으로 전환 검토</a:t>
+            </a:r>
+          </a:p>
+          <a:p>
+            <a:pPr>
+              <a:lnSpc>
+                <a:spcPct val="120000"/>
+              </a:lnSpc>
+              <a:spcAft>
+                <a:spcPts val="1000"/>
+              </a:spcAft>
+            </a:pPr>
+            <a:r>
+              <a:rPr sz="1400" b="0">
+                <a:solidFill>
+                  <a:srgbClr val="1F2E2A"/>
+                </a:solidFill>
+                <a:latin typeface="Malgun Gothic"/>
+              </a:rPr>
+              <a:t>•  프론트엔드(js/utils.js)를 Supabase 클라이언트 호출로 교체</a:t>
+            </a:r>
+          </a:p>
+          <a:p>
+            <a:pPr>
+              <a:lnSpc>
+                <a:spcPct val="120000"/>
+              </a:lnSpc>
+              <a:spcAft>
+                <a:spcPts val="1000"/>
+              </a:spcAft>
+            </a:pPr>
+            <a:r>
+              <a:rPr sz="1400" b="0">
+                <a:solidFill>
+                  <a:srgbClr val="1F2E2A"/>
+                </a:solidFill>
+                <a:latin typeface="Malgun Gothic"/>
+              </a:rPr>
+              <a:t>•  관리자 페이지에 실시간 통계·알림 기능 확장</a:t>
+            </a:r>
+          </a:p>
+        </p:txBody>
+      </p:sp>
+      <p:sp>
+        <p:nvSpPr>
+          <p:cNvPr id="10" name="TextBox 9"/>
+          <p:cNvSpPr txBox="1"/>
+          <p:nvPr/>
+        </p:nvSpPr>
+        <p:spPr>
+          <a:xfrm>
+            <a:off x="457200" y="6446520"/>
+            <a:ext cx="7315200" cy="320040"/>
+          </a:xfrm>
+          <a:prstGeom prst="rect">
+            <a:avLst/>
+          </a:prstGeom>
+          <a:noFill/>
+        </p:spPr>
+        <p:txBody>
+          <a:bodyPr wrap="square" anchor="t">
+            <a:spAutoFit/>
+          </a:bodyPr>
+          <a:lstStyle/>
+          <a:p>
+            <a:pPr algn="l">
+              <a:lnSpc>
+                <a:spcPct val="115000"/>
+              </a:lnSpc>
+            </a:pPr>
+            <a:r>
+              <a:rPr sz="1000" b="0">
+                <a:solidFill>
+                  <a:srgbClr val="6E8880"/>
+                </a:solidFill>
+                <a:latin typeface="Malgun Gothic"/>
+              </a:rPr>
+              <a:t>EXPENSE TRACKER · PORTFOLIO</a:t>
+            </a:r>
+          </a:p>
+        </p:txBody>
+      </p:sp>
+      <p:sp>
+        <p:nvSpPr>
+          <p:cNvPr id="11" name="TextBox 10"/>
+          <p:cNvSpPr txBox="1"/>
+          <p:nvPr/>
+        </p:nvSpPr>
+        <p:spPr>
+          <a:xfrm>
+            <a:off x="11002975" y="6446520"/>
+            <a:ext cx="822960" cy="320040"/>
+          </a:xfrm>
+          <a:prstGeom prst="rect">
+            <a:avLst/>
+          </a:prstGeom>
+          <a:noFill/>
+        </p:spPr>
+        <p:txBody>
+          <a:bodyPr wrap="square" anchor="t">
+            <a:spAutoFit/>
+          </a:bodyPr>
+          <a:lstStyle/>
+          <a:p>
+            <a:pPr algn="r">
+              <a:lnSpc>
+                <a:spcPct val="115000"/>
+              </a:lnSpc>
+            </a:pPr>
+            <a:r>
+              <a:rPr sz="1000" b="0">
+                <a:solidFill>
+                  <a:srgbClr val="6E8880"/>
+                </a:solidFill>
+                <a:latin typeface="Malgun Gothic"/>
+              </a:rPr>
+              <a:t>12</a:t>
+            </a:r>
+          </a:p>
+        </p:txBody>
+      </p:sp>
+    </p:spTree>
+  </p:cSld>
+  <p:clrMapOvr>
+    <a:masterClrMapping/>
+  </p:clrMapOvr>
+</p:sld>
+</file>
+
+<file path=ppt/slides/slide13.xml><?xml version="1.0" encoding="utf-8"?>
 <p:sld xmlns:a="http://schemas.openxmlformats.org/drawingml/2006/main" xmlns:p="http://schemas.openxmlformats.org/presentationml/2006/main" xmlns:r="http://schemas.openxmlformats.org/officeDocument/2006/relationships">
   <p:cSld>
     <p:bg>
@@ -8576,7 +9010,7 @@
                 </a:solidFill>
                 <a:latin typeface="Malgun Gothic"/>
               </a:rPr>
-              <a:t>데이터 모델 (ERD)</a:t>
+              <a:t>데이터 모델 (ERD) — 핵심 지출</a:t>
             </a:r>
           </a:p>
         </p:txBody>
@@ -8627,7 +9061,7 @@
       </p:sp>
       <p:pic>
         <p:nvPicPr>
-          <p:cNvPr id="6" name="Picture 5" descr="erd.png"/>
+          <p:cNvPr id="6" name="Picture 5" descr="erd_core.png"/>
           <p:cNvPicPr>
             <a:picLocks noChangeAspect="1"/>
           </p:cNvPicPr>
@@ -8641,8 +9075,8 @@
         </p:blipFill>
         <p:spPr>
           <a:xfrm>
-            <a:off x="4352544" y="1783080"/>
-            <a:ext cx="3547872" cy="4434840"/>
+            <a:off x="3939314" y="1645920"/>
+            <a:ext cx="4374331" cy="4663440"/>
           </a:xfrm>
           <a:prstGeom prst="rect">
             <a:avLst/>
@@ -8831,7 +9265,7 @@
                 </a:solidFill>
                 <a:latin typeface="Malgun Gothic"/>
               </a:rPr>
-              <a:t>TECH EVOLUTION</a:t>
+              <a:t>DATA MODEL</a:t>
             </a:r>
           </a:p>
         </p:txBody>
@@ -8870,7 +9304,7 @@
                 </a:solidFill>
                 <a:latin typeface="Malgun Gothic"/>
               </a:rPr>
-              <a:t>localStorage → Supabase</a:t>
+              <a:t>데이터 모델 (ERD) — 게시판</a:t>
             </a:r>
           </a:p>
         </p:txBody>
@@ -8919,52 +9353,30 @@
           </a:p>
         </p:txBody>
       </p:sp>
-      <p:sp>
-        <p:nvSpPr>
-          <p:cNvPr id="6" name="Rectangle 5"/>
-          <p:cNvSpPr/>
-          <p:nvPr/>
-        </p:nvSpPr>
-        <p:spPr>
-          <a:xfrm>
-            <a:off x="640080" y="2011680"/>
-            <a:ext cx="4937760" cy="3291840"/>
-          </a:xfrm>
-          <a:prstGeom prst="rect">
-            <a:avLst/>
-          </a:prstGeom>
-          <a:solidFill>
-            <a:srgbClr val="FFFFFF"/>
-          </a:solidFill>
-          <a:ln w="12700">
-            <a:solidFill>
-              <a:srgbClr val="DCEEE7"/>
-            </a:solidFill>
-          </a:ln>
-          <a:effectLst/>
-        </p:spPr>
-        <p:style>
-          <a:lnRef idx="1">
-            <a:schemeClr val="accent1"/>
-          </a:lnRef>
-          <a:fillRef idx="3">
-            <a:schemeClr val="accent1"/>
-          </a:fillRef>
-          <a:effectRef idx="2">
-            <a:schemeClr val="accent1"/>
-          </a:effectRef>
-          <a:fontRef idx="minor">
-            <a:schemeClr val="lt1"/>
-          </a:fontRef>
-        </p:style>
-        <p:txBody>
-          <a:bodyPr rtlCol="0" anchor="ctr"/>
-          <a:lstStyle/>
-          <a:p>
-            <a:pPr algn="ctr"/>
-          </a:p>
-        </p:txBody>
-      </p:sp>
+      <p:pic>
+        <p:nvPicPr>
+          <p:cNvPr id="6" name="Picture 5" descr="erd_board.png"/>
+          <p:cNvPicPr>
+            <a:picLocks noChangeAspect="1"/>
+          </p:cNvPicPr>
+          <p:nvPr/>
+        </p:nvPicPr>
+        <p:blipFill>
+          <a:blip r:embed="rId2"/>
+          <a:stretch>
+            <a:fillRect/>
+          </a:stretch>
+        </p:blipFill>
+        <p:spPr>
+          <a:xfrm>
+            <a:off x="4876189" y="1645920"/>
+            <a:ext cx="2500581" cy="4663440"/>
+          </a:xfrm>
+          <a:prstGeom prst="rect">
+            <a:avLst/>
+          </a:prstGeom>
+        </p:spPr>
+      </p:pic>
       <p:sp>
         <p:nvSpPr>
           <p:cNvPr id="7" name="TextBox 6"/>
@@ -8973,8 +9385,8 @@
         </p:nvSpPr>
         <p:spPr>
           <a:xfrm>
-            <a:off x="914400" y="2240280"/>
-            <a:ext cx="4389120" cy="365760"/>
+            <a:off x="457200" y="6446520"/>
+            <a:ext cx="7315200" cy="320040"/>
           </a:xfrm>
           <a:prstGeom prst="rect">
             <a:avLst/>
@@ -8993,13 +9405,13 @@
               </a:lnSpc>
             </a:pPr>
             <a:r>
-              <a:rPr sz="1300" b="1">
+              <a:rPr sz="1000" b="0">
                 <a:solidFill>
                   <a:srgbClr val="6E8880"/>
                 </a:solidFill>
                 <a:latin typeface="Malgun Gothic"/>
               </a:rPr>
-              <a:t>BEFORE</a:t>
+              <a:t>EXPENSE TRACKER · PORTFOLIO</a:t>
             </a:r>
           </a:p>
         </p:txBody>
@@ -9007,409 +9419,6 @@
       <p:sp>
         <p:nvSpPr>
           <p:cNvPr id="8" name="TextBox 7"/>
-          <p:cNvSpPr txBox="1"/>
-          <p:nvPr/>
-        </p:nvSpPr>
-        <p:spPr>
-          <a:xfrm>
-            <a:off x="914400" y="2606040"/>
-            <a:ext cx="4389120" cy="457200"/>
-          </a:xfrm>
-          <a:prstGeom prst="rect">
-            <a:avLst/>
-          </a:prstGeom>
-          <a:noFill/>
-        </p:spPr>
-        <p:txBody>
-          <a:bodyPr wrap="square" anchor="t">
-            <a:spAutoFit/>
-          </a:bodyPr>
-          <a:lstStyle/>
-          <a:p>
-            <a:pPr algn="l">
-              <a:lnSpc>
-                <a:spcPct val="115000"/>
-              </a:lnSpc>
-            </a:pPr>
-            <a:r>
-              <a:rPr sz="1800" b="1">
-                <a:solidFill>
-                  <a:srgbClr val="1F2E2A"/>
-                </a:solidFill>
-                <a:latin typeface="Malgun Gothic"/>
-              </a:rPr>
-              <a:t>정적 사이트 + localStorage</a:t>
-            </a:r>
-          </a:p>
-        </p:txBody>
-      </p:sp>
-      <p:sp>
-        <p:nvSpPr>
-          <p:cNvPr id="9" name="TextBox 8"/>
-          <p:cNvSpPr txBox="1"/>
-          <p:nvPr/>
-        </p:nvSpPr>
-        <p:spPr>
-          <a:xfrm>
-            <a:off x="914400" y="3154680"/>
-            <a:ext cx="4389120" cy="2011680"/>
-          </a:xfrm>
-          <a:prstGeom prst="rect">
-            <a:avLst/>
-          </a:prstGeom>
-          <a:noFill/>
-        </p:spPr>
-        <p:txBody>
-          <a:bodyPr wrap="square">
-            <a:spAutoFit/>
-          </a:bodyPr>
-          <a:lstStyle/>
-          <a:p>
-            <a:pPr>
-              <a:lnSpc>
-                <a:spcPct val="120000"/>
-              </a:lnSpc>
-              <a:spcAft>
-                <a:spcPts val="1000"/>
-              </a:spcAft>
-            </a:pPr>
-            <a:r>
-              <a:rPr sz="1400" b="0">
-                <a:solidFill>
-                  <a:srgbClr val="1F2E2A"/>
-                </a:solidFill>
-                <a:latin typeface="Malgun Gothic"/>
-              </a:rPr>
-              <a:t>•  백엔드 서버 없이 브라우저에 데이터 저장</a:t>
-            </a:r>
-          </a:p>
-          <a:p>
-            <a:pPr>
-              <a:lnSpc>
-                <a:spcPct val="120000"/>
-              </a:lnSpc>
-              <a:spcAft>
-                <a:spcPts val="1000"/>
-              </a:spcAft>
-            </a:pPr>
-            <a:r>
-              <a:rPr sz="1400" b="0">
-                <a:solidFill>
-                  <a:srgbClr val="1F2E2A"/>
-                </a:solidFill>
-                <a:latin typeface="Malgun Gothic"/>
-              </a:rPr>
-              <a:t>•  비밀번호까지 평문으로 저장 (데모 목적)</a:t>
-            </a:r>
-          </a:p>
-          <a:p>
-            <a:pPr>
-              <a:lnSpc>
-                <a:spcPct val="120000"/>
-              </a:lnSpc>
-              <a:spcAft>
-                <a:spcPts val="1000"/>
-              </a:spcAft>
-            </a:pPr>
-            <a:r>
-              <a:rPr sz="1400" b="0">
-                <a:solidFill>
-                  <a:srgbClr val="1F2E2A"/>
-                </a:solidFill>
-                <a:latin typeface="Malgun Gothic"/>
-              </a:rPr>
-              <a:t>•  브라우저·기기 간 데이터 공유 불가</a:t>
-            </a:r>
-          </a:p>
-        </p:txBody>
-      </p:sp>
-      <p:sp>
-        <p:nvSpPr>
-          <p:cNvPr id="10" name="Rectangle 9"/>
-          <p:cNvSpPr/>
-          <p:nvPr/>
-        </p:nvSpPr>
-        <p:spPr>
-          <a:xfrm>
-            <a:off x="6583680" y="2011680"/>
-            <a:ext cx="4937760" cy="3291840"/>
-          </a:xfrm>
-          <a:prstGeom prst="rect">
-            <a:avLst/>
-          </a:prstGeom>
-          <a:solidFill>
-            <a:srgbClr val="0F766E"/>
-          </a:solidFill>
-          <a:ln>
-            <a:noFill/>
-          </a:ln>
-          <a:effectLst/>
-        </p:spPr>
-        <p:style>
-          <a:lnRef idx="1">
-            <a:schemeClr val="accent1"/>
-          </a:lnRef>
-          <a:fillRef idx="3">
-            <a:schemeClr val="accent1"/>
-          </a:fillRef>
-          <a:effectRef idx="2">
-            <a:schemeClr val="accent1"/>
-          </a:effectRef>
-          <a:fontRef idx="minor">
-            <a:schemeClr val="lt1"/>
-          </a:fontRef>
-        </p:style>
-        <p:txBody>
-          <a:bodyPr rtlCol="0" anchor="ctr"/>
-          <a:lstStyle/>
-          <a:p>
-            <a:pPr algn="ctr"/>
-          </a:p>
-        </p:txBody>
-      </p:sp>
-      <p:sp>
-        <p:nvSpPr>
-          <p:cNvPr id="11" name="TextBox 10"/>
-          <p:cNvSpPr txBox="1"/>
-          <p:nvPr/>
-        </p:nvSpPr>
-        <p:spPr>
-          <a:xfrm>
-            <a:off x="6858000" y="2240280"/>
-            <a:ext cx="4389120" cy="365760"/>
-          </a:xfrm>
-          <a:prstGeom prst="rect">
-            <a:avLst/>
-          </a:prstGeom>
-          <a:noFill/>
-        </p:spPr>
-        <p:txBody>
-          <a:bodyPr wrap="square" anchor="t">
-            <a:spAutoFit/>
-          </a:bodyPr>
-          <a:lstStyle/>
-          <a:p>
-            <a:pPr algn="l">
-              <a:lnSpc>
-                <a:spcPct val="115000"/>
-              </a:lnSpc>
-            </a:pPr>
-            <a:r>
-              <a:rPr sz="1300" b="1">
-                <a:solidFill>
-                  <a:srgbClr val="34D399"/>
-                </a:solidFill>
-                <a:latin typeface="Malgun Gothic"/>
-              </a:rPr>
-              <a:t>AFTER</a:t>
-            </a:r>
-          </a:p>
-        </p:txBody>
-      </p:sp>
-      <p:sp>
-        <p:nvSpPr>
-          <p:cNvPr id="12" name="TextBox 11"/>
-          <p:cNvSpPr txBox="1"/>
-          <p:nvPr/>
-        </p:nvSpPr>
-        <p:spPr>
-          <a:xfrm>
-            <a:off x="6858000" y="2606040"/>
-            <a:ext cx="4389120" cy="457200"/>
-          </a:xfrm>
-          <a:prstGeom prst="rect">
-            <a:avLst/>
-          </a:prstGeom>
-          <a:noFill/>
-        </p:spPr>
-        <p:txBody>
-          <a:bodyPr wrap="square" anchor="t">
-            <a:spAutoFit/>
-          </a:bodyPr>
-          <a:lstStyle/>
-          <a:p>
-            <a:pPr algn="l">
-              <a:lnSpc>
-                <a:spcPct val="115000"/>
-              </a:lnSpc>
-            </a:pPr>
-            <a:r>
-              <a:rPr sz="1800" b="1">
-                <a:solidFill>
-                  <a:srgbClr val="FFFFFF"/>
-                </a:solidFill>
-                <a:latin typeface="Malgun Gothic"/>
-              </a:rPr>
-              <a:t>Supabase (PostgreSQL)</a:t>
-            </a:r>
-          </a:p>
-        </p:txBody>
-      </p:sp>
-      <p:sp>
-        <p:nvSpPr>
-          <p:cNvPr id="13" name="TextBox 12"/>
-          <p:cNvSpPr txBox="1"/>
-          <p:nvPr/>
-        </p:nvSpPr>
-        <p:spPr>
-          <a:xfrm>
-            <a:off x="6858000" y="3154680"/>
-            <a:ext cx="4389120" cy="2011680"/>
-          </a:xfrm>
-          <a:prstGeom prst="rect">
-            <a:avLst/>
-          </a:prstGeom>
-          <a:noFill/>
-        </p:spPr>
-        <p:txBody>
-          <a:bodyPr wrap="square">
-            <a:spAutoFit/>
-          </a:bodyPr>
-          <a:lstStyle/>
-          <a:p>
-            <a:pPr>
-              <a:lnSpc>
-                <a:spcPct val="120000"/>
-              </a:lnSpc>
-              <a:spcAft>
-                <a:spcPts val="1000"/>
-              </a:spcAft>
-            </a:pPr>
-            <a:r>
-              <a:rPr sz="1400" b="0">
-                <a:solidFill>
-                  <a:srgbClr val="E8F6F1"/>
-                </a:solidFill>
-                <a:latin typeface="Malgun Gothic"/>
-              </a:rPr>
-              <a:t>•  Supabase Auth로 인증 위임 (평문 비밀번호 제거)</a:t>
-            </a:r>
-          </a:p>
-          <a:p>
-            <a:pPr>
-              <a:lnSpc>
-                <a:spcPct val="120000"/>
-              </a:lnSpc>
-              <a:spcAft>
-                <a:spcPts val="1000"/>
-              </a:spcAft>
-            </a:pPr>
-            <a:r>
-              <a:rPr sz="1400" b="0">
-                <a:solidFill>
-                  <a:srgbClr val="E8F6F1"/>
-                </a:solidFill>
-                <a:latin typeface="Malgun Gothic"/>
-              </a:rPr>
-              <a:t>•  profiles / categories / expenses 3개 테이블 설계</a:t>
-            </a:r>
-          </a:p>
-          <a:p>
-            <a:pPr>
-              <a:lnSpc>
-                <a:spcPct val="120000"/>
-              </a:lnSpc>
-              <a:spcAft>
-                <a:spcPts val="1000"/>
-              </a:spcAft>
-            </a:pPr>
-            <a:r>
-              <a:rPr sz="1400" b="0">
-                <a:solidFill>
-                  <a:srgbClr val="E8F6F1"/>
-                </a:solidFill>
-                <a:latin typeface="Malgun Gothic"/>
-              </a:rPr>
-              <a:t>•  Row Level Security로 행 단위 접근 제어</a:t>
-            </a:r>
-          </a:p>
-        </p:txBody>
-      </p:sp>
-      <p:sp>
-        <p:nvSpPr>
-          <p:cNvPr id="14" name="Chevron 13"/>
-          <p:cNvSpPr/>
-          <p:nvPr/>
-        </p:nvSpPr>
-        <p:spPr>
-          <a:xfrm>
-            <a:off x="5715000" y="3291840"/>
-            <a:ext cx="731520" cy="548640"/>
-          </a:xfrm>
-          <a:prstGeom prst="chevron">
-            <a:avLst/>
-          </a:prstGeom>
-          <a:solidFill>
-            <a:srgbClr val="34D399"/>
-          </a:solidFill>
-          <a:ln>
-            <a:noFill/>
-          </a:ln>
-        </p:spPr>
-        <p:style>
-          <a:lnRef idx="1">
-            <a:schemeClr val="accent1"/>
-          </a:lnRef>
-          <a:fillRef idx="3">
-            <a:schemeClr val="accent1"/>
-          </a:fillRef>
-          <a:effectRef idx="2">
-            <a:schemeClr val="accent1"/>
-          </a:effectRef>
-          <a:fontRef idx="minor">
-            <a:schemeClr val="lt1"/>
-          </a:fontRef>
-        </p:style>
-        <p:txBody>
-          <a:bodyPr rtlCol="0" anchor="ctr"/>
-          <a:lstStyle/>
-          <a:p>
-            <a:pPr algn="ctr"/>
-          </a:p>
-        </p:txBody>
-      </p:sp>
-      <p:sp>
-        <p:nvSpPr>
-          <p:cNvPr id="15" name="TextBox 14"/>
-          <p:cNvSpPr txBox="1"/>
-          <p:nvPr/>
-        </p:nvSpPr>
-        <p:spPr>
-          <a:xfrm>
-            <a:off x="457200" y="6446520"/>
-            <a:ext cx="7315200" cy="320040"/>
-          </a:xfrm>
-          <a:prstGeom prst="rect">
-            <a:avLst/>
-          </a:prstGeom>
-          <a:noFill/>
-        </p:spPr>
-        <p:txBody>
-          <a:bodyPr wrap="square" anchor="t">
-            <a:spAutoFit/>
-          </a:bodyPr>
-          <a:lstStyle/>
-          <a:p>
-            <a:pPr algn="l">
-              <a:lnSpc>
-                <a:spcPct val="115000"/>
-              </a:lnSpc>
-            </a:pPr>
-            <a:r>
-              <a:rPr sz="1000" b="0">
-                <a:solidFill>
-                  <a:srgbClr val="6E8880"/>
-                </a:solidFill>
-                <a:latin typeface="Malgun Gothic"/>
-              </a:rPr>
-              <a:t>EXPENSE TRACKER · PORTFOLIO</a:t>
-            </a:r>
-          </a:p>
-        </p:txBody>
-      </p:sp>
-      <p:sp>
-        <p:nvSpPr>
-          <p:cNvPr id="16" name="TextBox 15"/>
           <p:cNvSpPr txBox="1"/>
           <p:nvPr/>
         </p:nvSpPr>
@@ -9550,7 +9559,7 @@
                 </a:solidFill>
                 <a:latin typeface="Malgun Gothic"/>
               </a:rPr>
-              <a:t>SECURITY</a:t>
+              <a:t>TECH EVOLUTION</a:t>
             </a:r>
           </a:p>
         </p:txBody>
@@ -9589,7 +9598,7 @@
                 </a:solidFill>
                 <a:latin typeface="Malgun Gothic"/>
               </a:rPr>
-              <a:t>보안 &amp; 데이터 무결성</a:t>
+              <a:t>localStorage → Supabase</a:t>
             </a:r>
           </a:p>
         </p:txBody>
@@ -9640,14 +9649,138 @@
       </p:sp>
       <p:sp>
         <p:nvSpPr>
-          <p:cNvPr id="6" name="TextBox 5"/>
+          <p:cNvPr id="6" name="Rectangle 5"/>
+          <p:cNvSpPr/>
+          <p:nvPr/>
+        </p:nvSpPr>
+        <p:spPr>
+          <a:xfrm>
+            <a:off x="640080" y="2011680"/>
+            <a:ext cx="4937760" cy="3291840"/>
+          </a:xfrm>
+          <a:prstGeom prst="rect">
+            <a:avLst/>
+          </a:prstGeom>
+          <a:solidFill>
+            <a:srgbClr val="FFFFFF"/>
+          </a:solidFill>
+          <a:ln w="12700">
+            <a:solidFill>
+              <a:srgbClr val="DCEEE7"/>
+            </a:solidFill>
+          </a:ln>
+          <a:effectLst/>
+        </p:spPr>
+        <p:style>
+          <a:lnRef idx="1">
+            <a:schemeClr val="accent1"/>
+          </a:lnRef>
+          <a:fillRef idx="3">
+            <a:schemeClr val="accent1"/>
+          </a:fillRef>
+          <a:effectRef idx="2">
+            <a:schemeClr val="accent1"/>
+          </a:effectRef>
+          <a:fontRef idx="minor">
+            <a:schemeClr val="lt1"/>
+          </a:fontRef>
+        </p:style>
+        <p:txBody>
+          <a:bodyPr rtlCol="0" anchor="ctr"/>
+          <a:lstStyle/>
+          <a:p>
+            <a:pPr algn="ctr"/>
+          </a:p>
+        </p:txBody>
+      </p:sp>
+      <p:sp>
+        <p:nvSpPr>
+          <p:cNvPr id="7" name="TextBox 6"/>
           <p:cNvSpPr txBox="1"/>
           <p:nvPr/>
         </p:nvSpPr>
         <p:spPr>
           <a:xfrm>
-            <a:off x="640080" y="1828800"/>
-            <a:ext cx="10789920" cy="4572000"/>
+            <a:off x="914400" y="2240280"/>
+            <a:ext cx="4389120" cy="365760"/>
+          </a:xfrm>
+          <a:prstGeom prst="rect">
+            <a:avLst/>
+          </a:prstGeom>
+          <a:noFill/>
+        </p:spPr>
+        <p:txBody>
+          <a:bodyPr wrap="square" anchor="t">
+            <a:spAutoFit/>
+          </a:bodyPr>
+          <a:lstStyle/>
+          <a:p>
+            <a:pPr algn="l">
+              <a:lnSpc>
+                <a:spcPct val="115000"/>
+              </a:lnSpc>
+            </a:pPr>
+            <a:r>
+              <a:rPr sz="1300" b="1">
+                <a:solidFill>
+                  <a:srgbClr val="6E8880"/>
+                </a:solidFill>
+                <a:latin typeface="Malgun Gothic"/>
+              </a:rPr>
+              <a:t>BEFORE</a:t>
+            </a:r>
+          </a:p>
+        </p:txBody>
+      </p:sp>
+      <p:sp>
+        <p:nvSpPr>
+          <p:cNvPr id="8" name="TextBox 7"/>
+          <p:cNvSpPr txBox="1"/>
+          <p:nvPr/>
+        </p:nvSpPr>
+        <p:spPr>
+          <a:xfrm>
+            <a:off x="914400" y="2606040"/>
+            <a:ext cx="4389120" cy="457200"/>
+          </a:xfrm>
+          <a:prstGeom prst="rect">
+            <a:avLst/>
+          </a:prstGeom>
+          <a:noFill/>
+        </p:spPr>
+        <p:txBody>
+          <a:bodyPr wrap="square" anchor="t">
+            <a:spAutoFit/>
+          </a:bodyPr>
+          <a:lstStyle/>
+          <a:p>
+            <a:pPr algn="l">
+              <a:lnSpc>
+                <a:spcPct val="115000"/>
+              </a:lnSpc>
+            </a:pPr>
+            <a:r>
+              <a:rPr sz="1800" b="1">
+                <a:solidFill>
+                  <a:srgbClr val="1F2E2A"/>
+                </a:solidFill>
+                <a:latin typeface="Malgun Gothic"/>
+              </a:rPr>
+              <a:t>정적 사이트 + localStorage</a:t>
+            </a:r>
+          </a:p>
+        </p:txBody>
+      </p:sp>
+      <p:sp>
+        <p:nvSpPr>
+          <p:cNvPr id="9" name="TextBox 8"/>
+          <p:cNvSpPr txBox="1"/>
+          <p:nvPr/>
+        </p:nvSpPr>
+        <p:spPr>
+          <a:xfrm>
+            <a:off x="914400" y="3154680"/>
+            <a:ext cx="4389120" cy="2011680"/>
           </a:xfrm>
           <a:prstGeom prst="rect">
             <a:avLst/>
@@ -9669,29 +9802,32 @@
               </a:spcAft>
             </a:pPr>
             <a:r>
-              <a:rPr sz="1600" b="0">
+              <a:rPr sz="1400" b="0">
                 <a:solidFill>
                   <a:srgbClr val="1F2E2A"/>
                 </a:solidFill>
                 <a:latin typeface="Malgun Gothic"/>
               </a:rPr>
-              <a:t>•  Row Level Security (RLS)</a:t>
+              <a:t>•  백엔드 서버 없이 브라우저에 데이터 저장</a:t>
             </a:r>
           </a:p>
           <a:p>
             <a:pPr>
+              <a:lnSpc>
+                <a:spcPct val="120000"/>
+              </a:lnSpc>
               <a:spcAft>
                 <a:spcPts val="1000"/>
               </a:spcAft>
             </a:pPr>
             <a:r>
-              <a:rPr sz="1300">
-                <a:solidFill>
-                  <a:srgbClr val="6E8880"/>
-                </a:solidFill>
-                <a:latin typeface="Malgun Gothic"/>
-              </a:rPr>
-              <a:t>     고객은 본인 소유 데이터(profiles/expenses)만 조회·수정 가능, 관리자는 role 기반으로 전체 접근</a:t>
+              <a:rPr sz="1400" b="0">
+                <a:solidFill>
+                  <a:srgbClr val="1F2E2A"/>
+                </a:solidFill>
+                <a:latin typeface="Malgun Gothic"/>
+              </a:rPr>
+              <a:t>•  비밀번호까지 평문으로 저장 (데모 목적)</a:t>
             </a:r>
           </a:p>
           <a:p>
@@ -9704,29 +9840,177 @@
               </a:spcAft>
             </a:pPr>
             <a:r>
-              <a:rPr sz="1600" b="0">
+              <a:rPr sz="1400" b="0">
                 <a:solidFill>
                   <a:srgbClr val="1F2E2A"/>
                 </a:solidFill>
                 <a:latin typeface="Malgun Gothic"/>
               </a:rPr>
-              <a:t>•  재귀 없는 관리자 판별</a:t>
-            </a:r>
-          </a:p>
+              <a:t>•  브라우저·기기 간 데이터 공유 불가</a:t>
+            </a:r>
+          </a:p>
+        </p:txBody>
+      </p:sp>
+      <p:sp>
+        <p:nvSpPr>
+          <p:cNvPr id="10" name="Rectangle 9"/>
+          <p:cNvSpPr/>
+          <p:nvPr/>
+        </p:nvSpPr>
+        <p:spPr>
+          <a:xfrm>
+            <a:off x="6583680" y="2011680"/>
+            <a:ext cx="4937760" cy="3291840"/>
+          </a:xfrm>
+          <a:prstGeom prst="rect">
+            <a:avLst/>
+          </a:prstGeom>
+          <a:solidFill>
+            <a:srgbClr val="0F766E"/>
+          </a:solidFill>
+          <a:ln>
+            <a:noFill/>
+          </a:ln>
+          <a:effectLst/>
+        </p:spPr>
+        <p:style>
+          <a:lnRef idx="1">
+            <a:schemeClr val="accent1"/>
+          </a:lnRef>
+          <a:fillRef idx="3">
+            <a:schemeClr val="accent1"/>
+          </a:fillRef>
+          <a:effectRef idx="2">
+            <a:schemeClr val="accent1"/>
+          </a:effectRef>
+          <a:fontRef idx="minor">
+            <a:schemeClr val="lt1"/>
+          </a:fontRef>
+        </p:style>
+        <p:txBody>
+          <a:bodyPr rtlCol="0" anchor="ctr"/>
+          <a:lstStyle/>
+          <a:p>
+            <a:pPr algn="ctr"/>
+          </a:p>
+        </p:txBody>
+      </p:sp>
+      <p:sp>
+        <p:nvSpPr>
+          <p:cNvPr id="11" name="TextBox 10"/>
+          <p:cNvSpPr txBox="1"/>
+          <p:nvPr/>
+        </p:nvSpPr>
+        <p:spPr>
+          <a:xfrm>
+            <a:off x="6858000" y="2240280"/>
+            <a:ext cx="4389120" cy="365760"/>
+          </a:xfrm>
+          <a:prstGeom prst="rect">
+            <a:avLst/>
+          </a:prstGeom>
+          <a:noFill/>
+        </p:spPr>
+        <p:txBody>
+          <a:bodyPr wrap="square" anchor="t">
+            <a:spAutoFit/>
+          </a:bodyPr>
+          <a:lstStyle/>
+          <a:p>
+            <a:pPr algn="l">
+              <a:lnSpc>
+                <a:spcPct val="115000"/>
+              </a:lnSpc>
+            </a:pPr>
+            <a:r>
+              <a:rPr sz="1300" b="1">
+                <a:solidFill>
+                  <a:srgbClr val="34D399"/>
+                </a:solidFill>
+                <a:latin typeface="Malgun Gothic"/>
+              </a:rPr>
+              <a:t>AFTER</a:t>
+            </a:r>
+          </a:p>
+        </p:txBody>
+      </p:sp>
+      <p:sp>
+        <p:nvSpPr>
+          <p:cNvPr id="12" name="TextBox 11"/>
+          <p:cNvSpPr txBox="1"/>
+          <p:nvPr/>
+        </p:nvSpPr>
+        <p:spPr>
+          <a:xfrm>
+            <a:off x="6858000" y="2606040"/>
+            <a:ext cx="4389120" cy="457200"/>
+          </a:xfrm>
+          <a:prstGeom prst="rect">
+            <a:avLst/>
+          </a:prstGeom>
+          <a:noFill/>
+        </p:spPr>
+        <p:txBody>
+          <a:bodyPr wrap="square" anchor="t">
+            <a:spAutoFit/>
+          </a:bodyPr>
+          <a:lstStyle/>
+          <a:p>
+            <a:pPr algn="l">
+              <a:lnSpc>
+                <a:spcPct val="115000"/>
+              </a:lnSpc>
+            </a:pPr>
+            <a:r>
+              <a:rPr sz="1800" b="1">
+                <a:solidFill>
+                  <a:srgbClr val="FFFFFF"/>
+                </a:solidFill>
+                <a:latin typeface="Malgun Gothic"/>
+              </a:rPr>
+              <a:t>Supabase (PostgreSQL)</a:t>
+            </a:r>
+          </a:p>
+        </p:txBody>
+      </p:sp>
+      <p:sp>
+        <p:nvSpPr>
+          <p:cNvPr id="13" name="TextBox 12"/>
+          <p:cNvSpPr txBox="1"/>
+          <p:nvPr/>
+        </p:nvSpPr>
+        <p:spPr>
+          <a:xfrm>
+            <a:off x="6858000" y="3154680"/>
+            <a:ext cx="4389120" cy="2011680"/>
+          </a:xfrm>
+          <a:prstGeom prst="rect">
+            <a:avLst/>
+          </a:prstGeom>
+          <a:noFill/>
+        </p:spPr>
+        <p:txBody>
+          <a:bodyPr wrap="square">
+            <a:spAutoFit/>
+          </a:bodyPr>
+          <a:lstStyle/>
           <a:p>
             <a:pPr>
+              <a:lnSpc>
+                <a:spcPct val="120000"/>
+              </a:lnSpc>
               <a:spcAft>
                 <a:spcPts val="1000"/>
               </a:spcAft>
             </a:pPr>
             <a:r>
-              <a:rPr sz="1300">
-                <a:solidFill>
-                  <a:srgbClr val="6E8880"/>
-                </a:solidFill>
-                <a:latin typeface="Malgun Gothic"/>
-              </a:rPr>
-              <a:t>     profiles.role을 정책 안에서 직접 조회하면 무한 재귀가 발생 → SECURITY DEFINER 함수(is_admin())로 우회</a:t>
+              <a:rPr sz="1400" b="0">
+                <a:solidFill>
+                  <a:srgbClr val="E8F6F1"/>
+                </a:solidFill>
+                <a:latin typeface="Malgun Gothic"/>
+              </a:rPr>
+              <a:t>•  Supabase Auth로 인증 위임 (평문 비밀번호 제거)</a:t>
             </a:r>
           </a:p>
           <a:p>
@@ -9739,71 +10023,82 @@
               </a:spcAft>
             </a:pPr>
             <a:r>
-              <a:rPr sz="1600" b="0">
-                <a:solidFill>
-                  <a:srgbClr val="1F2E2A"/>
-                </a:solidFill>
-                <a:latin typeface="Malgun Gothic"/>
-              </a:rPr>
-              <a:t>•  최소 권한 원칙</a:t>
+              <a:rPr sz="1400" b="0">
+                <a:solidFill>
+                  <a:srgbClr val="E8F6F1"/>
+                </a:solidFill>
+                <a:latin typeface="Malgun Gothic"/>
+              </a:rPr>
+              <a:t>•  profiles / categories / expenses 3개 테이블 설계</a:t>
             </a:r>
           </a:p>
           <a:p>
             <a:pPr>
+              <a:lnSpc>
+                <a:spcPct val="120000"/>
+              </a:lnSpc>
               <a:spcAft>
                 <a:spcPts val="1000"/>
               </a:spcAft>
             </a:pPr>
             <a:r>
-              <a:rPr sz="1300">
-                <a:solidFill>
-                  <a:srgbClr val="6E8880"/>
-                </a:solidFill>
-                <a:latin typeface="Malgun Gothic"/>
-              </a:rPr>
-              <a:t>     Supabase Advisor로 내부 함수의 불필요한 RPC 노출을 점검 → anon/authenticated의 불필요한 EXECUTE 권한 회수</a:t>
-            </a:r>
-          </a:p>
-          <a:p>
-            <a:pPr>
-              <a:lnSpc>
-                <a:spcPct val="120000"/>
-              </a:lnSpc>
-              <a:spcAft>
-                <a:spcPts val="1000"/>
-              </a:spcAft>
-            </a:pPr>
-            <a:r>
-              <a:rPr sz="1600" b="0">
-                <a:solidFill>
-                  <a:srgbClr val="1F2E2A"/>
-                </a:solidFill>
-                <a:latin typeface="Malgun Gothic"/>
-              </a:rPr>
-              <a:t>•  인증 위임</a:t>
-            </a:r>
-          </a:p>
-          <a:p>
-            <a:pPr>
-              <a:spcAft>
-                <a:spcPts val="1000"/>
-              </a:spcAft>
-            </a:pPr>
-            <a:r>
-              <a:rPr sz="1300">
-                <a:solidFill>
-                  <a:srgbClr val="6E8880"/>
-                </a:solidFill>
-                <a:latin typeface="Malgun Gothic"/>
-              </a:rPr>
-              <a:t>     비밀번호 저장·검증을 직접 구현하지 않고 Supabase Auth에 위임해 자체 구현 리스크 제거</a:t>
-            </a:r>
-          </a:p>
-        </p:txBody>
-      </p:sp>
-      <p:sp>
-        <p:nvSpPr>
-          <p:cNvPr id="7" name="TextBox 6"/>
+              <a:rPr sz="1400" b="0">
+                <a:solidFill>
+                  <a:srgbClr val="E8F6F1"/>
+                </a:solidFill>
+                <a:latin typeface="Malgun Gothic"/>
+              </a:rPr>
+              <a:t>•  Row Level Security로 행 단위 접근 제어</a:t>
+            </a:r>
+          </a:p>
+        </p:txBody>
+      </p:sp>
+      <p:sp>
+        <p:nvSpPr>
+          <p:cNvPr id="14" name="Chevron 13"/>
+          <p:cNvSpPr/>
+          <p:nvPr/>
+        </p:nvSpPr>
+        <p:spPr>
+          <a:xfrm>
+            <a:off x="5715000" y="3291840"/>
+            <a:ext cx="731520" cy="548640"/>
+          </a:xfrm>
+          <a:prstGeom prst="chevron">
+            <a:avLst/>
+          </a:prstGeom>
+          <a:solidFill>
+            <a:srgbClr val="34D399"/>
+          </a:solidFill>
+          <a:ln>
+            <a:noFill/>
+          </a:ln>
+        </p:spPr>
+        <p:style>
+          <a:lnRef idx="1">
+            <a:schemeClr val="accent1"/>
+          </a:lnRef>
+          <a:fillRef idx="3">
+            <a:schemeClr val="accent1"/>
+          </a:fillRef>
+          <a:effectRef idx="2">
+            <a:schemeClr val="accent1"/>
+          </a:effectRef>
+          <a:fontRef idx="minor">
+            <a:schemeClr val="lt1"/>
+          </a:fontRef>
+        </p:style>
+        <p:txBody>
+          <a:bodyPr rtlCol="0" anchor="ctr"/>
+          <a:lstStyle/>
+          <a:p>
+            <a:pPr algn="ctr"/>
+          </a:p>
+        </p:txBody>
+      </p:sp>
+      <p:sp>
+        <p:nvSpPr>
+          <p:cNvPr id="15" name="TextBox 14"/>
           <p:cNvSpPr txBox="1"/>
           <p:nvPr/>
         </p:nvSpPr>
@@ -9842,7 +10137,7 @@
       </p:sp>
       <p:sp>
         <p:nvSpPr>
-          <p:cNvPr id="8" name="TextBox 7"/>
+          <p:cNvPr id="16" name="TextBox 15"/>
           <p:cNvSpPr txBox="1"/>
           <p:nvPr/>
         </p:nvSpPr>

--- a/portfolio/expense-tracker-portfolio.pptx
+++ b/portfolio/expense-tracker-portfolio.pptx
@@ -17,7 +17,6 @@
     <p:sldId id="265" r:id="rId16"/>
     <p:sldId id="266" r:id="rId17"/>
     <p:sldId id="267" r:id="rId18"/>
-    <p:sldId id="268" r:id="rId19"/>
   </p:sldIdLst>
   <p:sldSz cx="12191695" cy="6858000" type="screen4x3"/>
   <p:notesSz cx="6858000" cy="9144000"/>
@@ -3721,7 +3720,7 @@
                 </a:solidFill>
                 <a:latin typeface="Malgun Gothic"/>
               </a:rPr>
-              <a:t>SECURITY</a:t>
+              <a:t>WORKFLOW</a:t>
             </a:r>
           </a:p>
         </p:txBody>
@@ -3760,7 +3759,7 @@
                 </a:solidFill>
                 <a:latin typeface="Malgun Gothic"/>
               </a:rPr>
-              <a:t>보안 &amp; 데이터 무결성</a:t>
+              <a:t>협업 워크플로우</a:t>
             </a:r>
           </a:p>
         </p:txBody>
@@ -3811,14 +3810,475 @@
       </p:sp>
       <p:sp>
         <p:nvSpPr>
-          <p:cNvPr id="6" name="TextBox 5"/>
+          <p:cNvPr id="6" name="Rounded Rectangle 5"/>
+          <p:cNvSpPr/>
+          <p:nvPr/>
+        </p:nvSpPr>
+        <p:spPr>
+          <a:xfrm>
+            <a:off x="822960" y="2377440"/>
+            <a:ext cx="2377440" cy="822960"/>
+          </a:xfrm>
+          <a:prstGeom prst="roundRect">
+            <a:avLst/>
+          </a:prstGeom>
+          <a:solidFill>
+            <a:srgbClr val="0F766E"/>
+          </a:solidFill>
+          <a:ln>
+            <a:noFill/>
+          </a:ln>
+          <a:effectLst/>
+        </p:spPr>
+        <p:style>
+          <a:lnRef idx="1">
+            <a:schemeClr val="accent1"/>
+          </a:lnRef>
+          <a:fillRef idx="3">
+            <a:schemeClr val="accent1"/>
+          </a:fillRef>
+          <a:effectRef idx="2">
+            <a:schemeClr val="accent1"/>
+          </a:effectRef>
+          <a:fontRef idx="minor">
+            <a:schemeClr val="lt1"/>
+          </a:fontRef>
+        </p:style>
+        <p:txBody>
+          <a:bodyPr rtlCol="0" anchor="ctr"/>
+          <a:lstStyle/>
+          <a:p>
+            <a:pPr algn="ctr"/>
+          </a:p>
+        </p:txBody>
+      </p:sp>
+      <p:sp>
+        <p:nvSpPr>
+          <p:cNvPr id="7" name="TextBox 6"/>
           <p:cNvSpPr txBox="1"/>
           <p:nvPr/>
         </p:nvSpPr>
         <p:spPr>
           <a:xfrm>
-            <a:off x="640080" y="1828800"/>
-            <a:ext cx="10789920" cy="4572000"/>
+            <a:off x="822960" y="2624328"/>
+            <a:ext cx="2377440" cy="365760"/>
+          </a:xfrm>
+          <a:prstGeom prst="rect">
+            <a:avLst/>
+          </a:prstGeom>
+          <a:noFill/>
+        </p:spPr>
+        <p:txBody>
+          <a:bodyPr wrap="square" anchor="t">
+            <a:spAutoFit/>
+          </a:bodyPr>
+          <a:lstStyle/>
+          <a:p>
+            <a:pPr algn="ctr">
+              <a:lnSpc>
+                <a:spcPct val="115000"/>
+              </a:lnSpc>
+            </a:pPr>
+            <a:r>
+              <a:rPr sz="1600" b="1">
+                <a:solidFill>
+                  <a:srgbClr val="FFFFFF"/>
+                </a:solidFill>
+                <a:latin typeface="Malgun Gothic"/>
+              </a:rPr>
+              <a:t>feat/shared</a:t>
+            </a:r>
+          </a:p>
+        </p:txBody>
+      </p:sp>
+      <p:sp>
+        <p:nvSpPr>
+          <p:cNvPr id="8" name="Right Arrow 7"/>
+          <p:cNvSpPr/>
+          <p:nvPr/>
+        </p:nvSpPr>
+        <p:spPr>
+          <a:xfrm>
+            <a:off x="3246120" y="2651760"/>
+            <a:ext cx="274320" cy="274320"/>
+          </a:xfrm>
+          <a:prstGeom prst="rightArrow">
+            <a:avLst/>
+          </a:prstGeom>
+          <a:solidFill>
+            <a:srgbClr val="34D399"/>
+          </a:solidFill>
+          <a:ln>
+            <a:noFill/>
+          </a:ln>
+        </p:spPr>
+        <p:style>
+          <a:lnRef idx="1">
+            <a:schemeClr val="accent1"/>
+          </a:lnRef>
+          <a:fillRef idx="3">
+            <a:schemeClr val="accent1"/>
+          </a:fillRef>
+          <a:effectRef idx="2">
+            <a:schemeClr val="accent1"/>
+          </a:effectRef>
+          <a:fontRef idx="minor">
+            <a:schemeClr val="lt1"/>
+          </a:fontRef>
+        </p:style>
+        <p:txBody>
+          <a:bodyPr rtlCol="0" anchor="ctr"/>
+          <a:lstStyle/>
+          <a:p>
+            <a:pPr algn="ctr"/>
+          </a:p>
+        </p:txBody>
+      </p:sp>
+      <p:sp>
+        <p:nvSpPr>
+          <p:cNvPr id="9" name="Rounded Rectangle 8"/>
+          <p:cNvSpPr/>
+          <p:nvPr/>
+        </p:nvSpPr>
+        <p:spPr>
+          <a:xfrm>
+            <a:off x="3520440" y="2377440"/>
+            <a:ext cx="2377440" cy="822960"/>
+          </a:xfrm>
+          <a:prstGeom prst="roundRect">
+            <a:avLst/>
+          </a:prstGeom>
+          <a:solidFill>
+            <a:srgbClr val="0F766E"/>
+          </a:solidFill>
+          <a:ln>
+            <a:noFill/>
+          </a:ln>
+          <a:effectLst/>
+        </p:spPr>
+        <p:style>
+          <a:lnRef idx="1">
+            <a:schemeClr val="accent1"/>
+          </a:lnRef>
+          <a:fillRef idx="3">
+            <a:schemeClr val="accent1"/>
+          </a:fillRef>
+          <a:effectRef idx="2">
+            <a:schemeClr val="accent1"/>
+          </a:effectRef>
+          <a:fontRef idx="minor">
+            <a:schemeClr val="lt1"/>
+          </a:fontRef>
+        </p:style>
+        <p:txBody>
+          <a:bodyPr rtlCol="0" anchor="ctr"/>
+          <a:lstStyle/>
+          <a:p>
+            <a:pPr algn="ctr"/>
+          </a:p>
+        </p:txBody>
+      </p:sp>
+      <p:sp>
+        <p:nvSpPr>
+          <p:cNvPr id="10" name="TextBox 9"/>
+          <p:cNvSpPr txBox="1"/>
+          <p:nvPr/>
+        </p:nvSpPr>
+        <p:spPr>
+          <a:xfrm>
+            <a:off x="3520440" y="2624328"/>
+            <a:ext cx="2377440" cy="365760"/>
+          </a:xfrm>
+          <a:prstGeom prst="rect">
+            <a:avLst/>
+          </a:prstGeom>
+          <a:noFill/>
+        </p:spPr>
+        <p:txBody>
+          <a:bodyPr wrap="square" anchor="t">
+            <a:spAutoFit/>
+          </a:bodyPr>
+          <a:lstStyle/>
+          <a:p>
+            <a:pPr algn="ctr">
+              <a:lnSpc>
+                <a:spcPct val="115000"/>
+              </a:lnSpc>
+            </a:pPr>
+            <a:r>
+              <a:rPr sz="1600" b="1">
+                <a:solidFill>
+                  <a:srgbClr val="FFFFFF"/>
+                </a:solidFill>
+                <a:latin typeface="Malgun Gothic"/>
+              </a:rPr>
+              <a:t>feat/auth</a:t>
+            </a:r>
+          </a:p>
+        </p:txBody>
+      </p:sp>
+      <p:sp>
+        <p:nvSpPr>
+          <p:cNvPr id="11" name="Right Arrow 10"/>
+          <p:cNvSpPr/>
+          <p:nvPr/>
+        </p:nvSpPr>
+        <p:spPr>
+          <a:xfrm>
+            <a:off x="5943600" y="2651760"/>
+            <a:ext cx="274320" cy="274320"/>
+          </a:xfrm>
+          <a:prstGeom prst="rightArrow">
+            <a:avLst/>
+          </a:prstGeom>
+          <a:solidFill>
+            <a:srgbClr val="34D399"/>
+          </a:solidFill>
+          <a:ln>
+            <a:noFill/>
+          </a:ln>
+        </p:spPr>
+        <p:style>
+          <a:lnRef idx="1">
+            <a:schemeClr val="accent1"/>
+          </a:lnRef>
+          <a:fillRef idx="3">
+            <a:schemeClr val="accent1"/>
+          </a:fillRef>
+          <a:effectRef idx="2">
+            <a:schemeClr val="accent1"/>
+          </a:effectRef>
+          <a:fontRef idx="minor">
+            <a:schemeClr val="lt1"/>
+          </a:fontRef>
+        </p:style>
+        <p:txBody>
+          <a:bodyPr rtlCol="0" anchor="ctr"/>
+          <a:lstStyle/>
+          <a:p>
+            <a:pPr algn="ctr"/>
+          </a:p>
+        </p:txBody>
+      </p:sp>
+      <p:sp>
+        <p:nvSpPr>
+          <p:cNvPr id="12" name="Rounded Rectangle 11"/>
+          <p:cNvSpPr/>
+          <p:nvPr/>
+        </p:nvSpPr>
+        <p:spPr>
+          <a:xfrm>
+            <a:off x="6217920" y="2377440"/>
+            <a:ext cx="2377440" cy="822960"/>
+          </a:xfrm>
+          <a:prstGeom prst="roundRect">
+            <a:avLst/>
+          </a:prstGeom>
+          <a:solidFill>
+            <a:srgbClr val="0F766E"/>
+          </a:solidFill>
+          <a:ln>
+            <a:noFill/>
+          </a:ln>
+          <a:effectLst/>
+        </p:spPr>
+        <p:style>
+          <a:lnRef idx="1">
+            <a:schemeClr val="accent1"/>
+          </a:lnRef>
+          <a:fillRef idx="3">
+            <a:schemeClr val="accent1"/>
+          </a:fillRef>
+          <a:effectRef idx="2">
+            <a:schemeClr val="accent1"/>
+          </a:effectRef>
+          <a:fontRef idx="minor">
+            <a:schemeClr val="lt1"/>
+          </a:fontRef>
+        </p:style>
+        <p:txBody>
+          <a:bodyPr rtlCol="0" anchor="ctr"/>
+          <a:lstStyle/>
+          <a:p>
+            <a:pPr algn="ctr"/>
+          </a:p>
+        </p:txBody>
+      </p:sp>
+      <p:sp>
+        <p:nvSpPr>
+          <p:cNvPr id="13" name="TextBox 12"/>
+          <p:cNvSpPr txBox="1"/>
+          <p:nvPr/>
+        </p:nvSpPr>
+        <p:spPr>
+          <a:xfrm>
+            <a:off x="6217920" y="2624328"/>
+            <a:ext cx="2377440" cy="365760"/>
+          </a:xfrm>
+          <a:prstGeom prst="rect">
+            <a:avLst/>
+          </a:prstGeom>
+          <a:noFill/>
+        </p:spPr>
+        <p:txBody>
+          <a:bodyPr wrap="square" anchor="t">
+            <a:spAutoFit/>
+          </a:bodyPr>
+          <a:lstStyle/>
+          <a:p>
+            <a:pPr algn="ctr">
+              <a:lnSpc>
+                <a:spcPct val="115000"/>
+              </a:lnSpc>
+            </a:pPr>
+            <a:r>
+              <a:rPr sz="1600" b="1">
+                <a:solidFill>
+                  <a:srgbClr val="FFFFFF"/>
+                </a:solidFill>
+                <a:latin typeface="Malgun Gothic"/>
+              </a:rPr>
+              <a:t>feat/core</a:t>
+            </a:r>
+          </a:p>
+        </p:txBody>
+      </p:sp>
+      <p:sp>
+        <p:nvSpPr>
+          <p:cNvPr id="14" name="Right Arrow 13"/>
+          <p:cNvSpPr/>
+          <p:nvPr/>
+        </p:nvSpPr>
+        <p:spPr>
+          <a:xfrm>
+            <a:off x="8641080" y="2651760"/>
+            <a:ext cx="274320" cy="274320"/>
+          </a:xfrm>
+          <a:prstGeom prst="rightArrow">
+            <a:avLst/>
+          </a:prstGeom>
+          <a:solidFill>
+            <a:srgbClr val="34D399"/>
+          </a:solidFill>
+          <a:ln>
+            <a:noFill/>
+          </a:ln>
+        </p:spPr>
+        <p:style>
+          <a:lnRef idx="1">
+            <a:schemeClr val="accent1"/>
+          </a:lnRef>
+          <a:fillRef idx="3">
+            <a:schemeClr val="accent1"/>
+          </a:fillRef>
+          <a:effectRef idx="2">
+            <a:schemeClr val="accent1"/>
+          </a:effectRef>
+          <a:fontRef idx="minor">
+            <a:schemeClr val="lt1"/>
+          </a:fontRef>
+        </p:style>
+        <p:txBody>
+          <a:bodyPr rtlCol="0" anchor="ctr"/>
+          <a:lstStyle/>
+          <a:p>
+            <a:pPr algn="ctr"/>
+          </a:p>
+        </p:txBody>
+      </p:sp>
+      <p:sp>
+        <p:nvSpPr>
+          <p:cNvPr id="15" name="Rounded Rectangle 14"/>
+          <p:cNvSpPr/>
+          <p:nvPr/>
+        </p:nvSpPr>
+        <p:spPr>
+          <a:xfrm>
+            <a:off x="8915400" y="2377440"/>
+            <a:ext cx="2377440" cy="822960"/>
+          </a:xfrm>
+          <a:prstGeom prst="roundRect">
+            <a:avLst/>
+          </a:prstGeom>
+          <a:solidFill>
+            <a:srgbClr val="1E3A34"/>
+          </a:solidFill>
+          <a:ln>
+            <a:noFill/>
+          </a:ln>
+          <a:effectLst/>
+        </p:spPr>
+        <p:style>
+          <a:lnRef idx="1">
+            <a:schemeClr val="accent1"/>
+          </a:lnRef>
+          <a:fillRef idx="3">
+            <a:schemeClr val="accent1"/>
+          </a:fillRef>
+          <a:effectRef idx="2">
+            <a:schemeClr val="accent1"/>
+          </a:effectRef>
+          <a:fontRef idx="minor">
+            <a:schemeClr val="lt1"/>
+          </a:fontRef>
+        </p:style>
+        <p:txBody>
+          <a:bodyPr rtlCol="0" anchor="ctr"/>
+          <a:lstStyle/>
+          <a:p>
+            <a:pPr algn="ctr"/>
+          </a:p>
+        </p:txBody>
+      </p:sp>
+      <p:sp>
+        <p:nvSpPr>
+          <p:cNvPr id="16" name="TextBox 15"/>
+          <p:cNvSpPr txBox="1"/>
+          <p:nvPr/>
+        </p:nvSpPr>
+        <p:spPr>
+          <a:xfrm>
+            <a:off x="8915400" y="2624328"/>
+            <a:ext cx="2377440" cy="365760"/>
+          </a:xfrm>
+          <a:prstGeom prst="rect">
+            <a:avLst/>
+          </a:prstGeom>
+          <a:noFill/>
+        </p:spPr>
+        <p:txBody>
+          <a:bodyPr wrap="square" anchor="t">
+            <a:spAutoFit/>
+          </a:bodyPr>
+          <a:lstStyle/>
+          <a:p>
+            <a:pPr algn="ctr">
+              <a:lnSpc>
+                <a:spcPct val="115000"/>
+              </a:lnSpc>
+            </a:pPr>
+            <a:r>
+              <a:rPr sz="1600" b="1">
+                <a:solidFill>
+                  <a:srgbClr val="FFFFFF"/>
+                </a:solidFill>
+                <a:latin typeface="Malgun Gothic"/>
+              </a:rPr>
+              <a:t>main</a:t>
+            </a:r>
+          </a:p>
+        </p:txBody>
+      </p:sp>
+      <p:sp>
+        <p:nvSpPr>
+          <p:cNvPr id="17" name="TextBox 16"/>
+          <p:cNvSpPr txBox="1"/>
+          <p:nvPr/>
+        </p:nvSpPr>
+        <p:spPr>
+          <a:xfrm>
+            <a:off x="822960" y="3657600"/>
+            <a:ext cx="10515600" cy="2560320"/>
           </a:xfrm>
           <a:prstGeom prst="rect">
             <a:avLst/>
@@ -3840,13 +4300,13 @@
               </a:spcAft>
             </a:pPr>
             <a:r>
-              <a:rPr sz="1600" b="0">
+              <a:rPr sz="1500" b="0">
                 <a:solidFill>
                   <a:srgbClr val="1F2E2A"/>
                 </a:solidFill>
                 <a:latin typeface="Malgun Gothic"/>
               </a:rPr>
-              <a:t>•  Row Level Security (RLS)</a:t>
+              <a:t>•  PR 기반 병합</a:t>
             </a:r>
           </a:p>
           <a:p>
@@ -3856,13 +4316,13 @@
               </a:spcAft>
             </a:pPr>
             <a:r>
-              <a:rPr sz="1300">
+              <a:rPr sz="1200">
                 <a:solidFill>
                   <a:srgbClr val="6E8880"/>
                 </a:solidFill>
                 <a:latin typeface="Malgun Gothic"/>
               </a:rPr>
-              <a:t>     고객은 본인 소유 데이터(profiles/expenses)만 조회·수정 가능, 관리자는 role 기반으로 전체 접근</a:t>
+              <a:t>     공통 자원 → 인증 → 핵심 기능 순으로 브랜치를 나눠 작업 후 Pull Request로 main에 병합</a:t>
             </a:r>
           </a:p>
           <a:p>
@@ -3875,13 +4335,13 @@
               </a:spcAft>
             </a:pPr>
             <a:r>
-              <a:rPr sz="1600" b="0">
+              <a:rPr sz="1500" b="0">
                 <a:solidFill>
                   <a:srgbClr val="1F2E2A"/>
                 </a:solidFill>
                 <a:latin typeface="Malgun Gothic"/>
               </a:rPr>
-              <a:t>•  재귀 없는 관리자 판별</a:t>
+              <a:t>•  병합 후 브랜치 정리</a:t>
             </a:r>
           </a:p>
           <a:p>
@@ -3891,90 +4351,20 @@
               </a:spcAft>
             </a:pPr>
             <a:r>
-              <a:rPr sz="1300">
+              <a:rPr sz="1200">
                 <a:solidFill>
                   <a:srgbClr val="6E8880"/>
                 </a:solidFill>
                 <a:latin typeface="Malgun Gothic"/>
               </a:rPr>
-              <a:t>     profiles.role을 정책 안에서 직접 조회하면 무한 재귀가 발생 → SECURITY DEFINER 함수(is_admin())로 우회</a:t>
-            </a:r>
-          </a:p>
-          <a:p>
-            <a:pPr>
-              <a:lnSpc>
-                <a:spcPct val="120000"/>
-              </a:lnSpc>
-              <a:spcAft>
-                <a:spcPts val="1000"/>
-              </a:spcAft>
-            </a:pPr>
-            <a:r>
-              <a:rPr sz="1600" b="0">
-                <a:solidFill>
-                  <a:srgbClr val="1F2E2A"/>
-                </a:solidFill>
-                <a:latin typeface="Malgun Gothic"/>
-              </a:rPr>
-              <a:t>•  최소 권한 원칙</a:t>
-            </a:r>
-          </a:p>
-          <a:p>
-            <a:pPr>
-              <a:spcAft>
-                <a:spcPts val="1000"/>
-              </a:spcAft>
-            </a:pPr>
-            <a:r>
-              <a:rPr sz="1300">
-                <a:solidFill>
-                  <a:srgbClr val="6E8880"/>
-                </a:solidFill>
-                <a:latin typeface="Malgun Gothic"/>
-              </a:rPr>
-              <a:t>     Supabase Advisor로 내부 함수의 불필요한 RPC 노출을 점검 → anon/authenticated의 불필요한 EXECUTE 권한 회수</a:t>
-            </a:r>
-          </a:p>
-          <a:p>
-            <a:pPr>
-              <a:lnSpc>
-                <a:spcPct val="120000"/>
-              </a:lnSpc>
-              <a:spcAft>
-                <a:spcPts val="1000"/>
-              </a:spcAft>
-            </a:pPr>
-            <a:r>
-              <a:rPr sz="1600" b="0">
-                <a:solidFill>
-                  <a:srgbClr val="1F2E2A"/>
-                </a:solidFill>
-                <a:latin typeface="Malgun Gothic"/>
-              </a:rPr>
-              <a:t>•  인증 위임</a:t>
-            </a:r>
-          </a:p>
-          <a:p>
-            <a:pPr>
-              <a:spcAft>
-                <a:spcPts val="1000"/>
-              </a:spcAft>
-            </a:pPr>
-            <a:r>
-              <a:rPr sz="1300">
-                <a:solidFill>
-                  <a:srgbClr val="6E8880"/>
-                </a:solidFill>
-                <a:latin typeface="Malgun Gothic"/>
-              </a:rPr>
-              <a:t>     비밀번호 저장·검증을 직접 구현하지 않고 Supabase Auth에 위임해 자체 구현 리스크 제거</a:t>
-            </a:r>
-          </a:p>
-        </p:txBody>
-      </p:sp>
-      <p:sp>
-        <p:nvSpPr>
-          <p:cNvPr id="7" name="TextBox 6"/>
+              <a:t>     머지가 끝난 feat/* 브랜치와 사용하지 않는 master 브랜치를 삭제해 원격 저장소를 깔끔하게 유지</a:t>
+            </a:r>
+          </a:p>
+        </p:txBody>
+      </p:sp>
+      <p:sp>
+        <p:nvSpPr>
+          <p:cNvPr id="18" name="TextBox 17"/>
           <p:cNvSpPr txBox="1"/>
           <p:nvPr/>
         </p:nvSpPr>
@@ -4013,7 +4403,7 @@
       </p:sp>
       <p:sp>
         <p:nvSpPr>
-          <p:cNvPr id="8" name="TextBox 7"/>
+          <p:cNvPr id="19" name="TextBox 18"/>
           <p:cNvSpPr txBox="1"/>
           <p:nvPr/>
         </p:nvSpPr>
@@ -4154,7 +4544,7 @@
                 </a:solidFill>
                 <a:latin typeface="Malgun Gothic"/>
               </a:rPr>
-              <a:t>WORKFLOW</a:t>
+              <a:t>RETROSPECTIVE</a:t>
             </a:r>
           </a:p>
         </p:txBody>
@@ -4193,7 +4583,7 @@
                 </a:solidFill>
                 <a:latin typeface="Malgun Gothic"/>
               </a:rPr>
-              <a:t>협업 워크플로우</a:t>
+              <a:t>회고 &amp; 다음 단계</a:t>
             </a:r>
           </a:p>
         </p:txBody>
@@ -4244,58 +4634,14 @@
       </p:sp>
       <p:sp>
         <p:nvSpPr>
-          <p:cNvPr id="6" name="Rounded Rectangle 5"/>
-          <p:cNvSpPr/>
-          <p:nvPr/>
-        </p:nvSpPr>
-        <p:spPr>
-          <a:xfrm>
-            <a:off x="822960" y="2377440"/>
-            <a:ext cx="2377440" cy="822960"/>
-          </a:xfrm>
-          <a:prstGeom prst="roundRect">
-            <a:avLst/>
-          </a:prstGeom>
-          <a:solidFill>
-            <a:srgbClr val="0F766E"/>
-          </a:solidFill>
-          <a:ln>
-            <a:noFill/>
-          </a:ln>
-          <a:effectLst/>
-        </p:spPr>
-        <p:style>
-          <a:lnRef idx="1">
-            <a:schemeClr val="accent1"/>
-          </a:lnRef>
-          <a:fillRef idx="3">
-            <a:schemeClr val="accent1"/>
-          </a:fillRef>
-          <a:effectRef idx="2">
-            <a:schemeClr val="accent1"/>
-          </a:effectRef>
-          <a:fontRef idx="minor">
-            <a:schemeClr val="lt1"/>
-          </a:fontRef>
-        </p:style>
-        <p:txBody>
-          <a:bodyPr rtlCol="0" anchor="ctr"/>
-          <a:lstStyle/>
-          <a:p>
-            <a:pPr algn="ctr"/>
-          </a:p>
-        </p:txBody>
-      </p:sp>
-      <p:sp>
-        <p:nvSpPr>
-          <p:cNvPr id="7" name="TextBox 6"/>
+          <p:cNvPr id="6" name="TextBox 5"/>
           <p:cNvSpPr txBox="1"/>
           <p:nvPr/>
         </p:nvSpPr>
         <p:spPr>
           <a:xfrm>
-            <a:off x="822960" y="2624328"/>
-            <a:ext cx="2377440" cy="365760"/>
+            <a:off x="640080" y="1828800"/>
+            <a:ext cx="5303520" cy="365760"/>
           </a:xfrm>
           <a:prstGeom prst="rect">
             <a:avLst/>
@@ -4308,7 +4654,7 @@
           </a:bodyPr>
           <a:lstStyle/>
           <a:p>
-            <a:pPr algn="ctr">
+            <a:pPr algn="l">
               <a:lnSpc>
                 <a:spcPct val="115000"/>
               </a:lnSpc>
@@ -4316,112 +4662,105 @@
             <a:r>
               <a:rPr sz="1600" b="1">
                 <a:solidFill>
-                  <a:srgbClr val="FFFFFF"/>
-                </a:solidFill>
-                <a:latin typeface="Malgun Gothic"/>
-              </a:rPr>
-              <a:t>feat/shared</a:t>
-            </a:r>
-          </a:p>
-        </p:txBody>
-      </p:sp>
-      <p:sp>
-        <p:nvSpPr>
-          <p:cNvPr id="8" name="Right Arrow 7"/>
-          <p:cNvSpPr/>
-          <p:nvPr/>
-        </p:nvSpPr>
-        <p:spPr>
-          <a:xfrm>
-            <a:off x="3246120" y="2651760"/>
-            <a:ext cx="274320" cy="274320"/>
-          </a:xfrm>
-          <a:prstGeom prst="rightArrow">
-            <a:avLst/>
-          </a:prstGeom>
-          <a:solidFill>
-            <a:srgbClr val="34D399"/>
-          </a:solidFill>
-          <a:ln>
-            <a:noFill/>
-          </a:ln>
-        </p:spPr>
-        <p:style>
-          <a:lnRef idx="1">
-            <a:schemeClr val="accent1"/>
-          </a:lnRef>
-          <a:fillRef idx="3">
-            <a:schemeClr val="accent1"/>
-          </a:fillRef>
-          <a:effectRef idx="2">
-            <a:schemeClr val="accent1"/>
-          </a:effectRef>
-          <a:fontRef idx="minor">
-            <a:schemeClr val="lt1"/>
-          </a:fontRef>
-        </p:style>
-        <p:txBody>
-          <a:bodyPr rtlCol="0" anchor="ctr"/>
-          <a:lstStyle/>
-          <a:p>
-            <a:pPr algn="ctr"/>
-          </a:p>
-        </p:txBody>
-      </p:sp>
-      <p:sp>
-        <p:nvSpPr>
-          <p:cNvPr id="9" name="Rounded Rectangle 8"/>
-          <p:cNvSpPr/>
-          <p:nvPr/>
-        </p:nvSpPr>
-        <p:spPr>
-          <a:xfrm>
-            <a:off x="3520440" y="2377440"/>
-            <a:ext cx="2377440" cy="822960"/>
-          </a:xfrm>
-          <a:prstGeom prst="roundRect">
-            <a:avLst/>
-          </a:prstGeom>
-          <a:solidFill>
-            <a:srgbClr val="0F766E"/>
-          </a:solidFill>
-          <a:ln>
-            <a:noFill/>
-          </a:ln>
-          <a:effectLst/>
-        </p:spPr>
-        <p:style>
-          <a:lnRef idx="1">
-            <a:schemeClr val="accent1"/>
-          </a:lnRef>
-          <a:fillRef idx="3">
-            <a:schemeClr val="accent1"/>
-          </a:fillRef>
-          <a:effectRef idx="2">
-            <a:schemeClr val="accent1"/>
-          </a:effectRef>
-          <a:fontRef idx="minor">
-            <a:schemeClr val="lt1"/>
-          </a:fontRef>
-        </p:style>
-        <p:txBody>
-          <a:bodyPr rtlCol="0" anchor="ctr"/>
-          <a:lstStyle/>
-          <a:p>
-            <a:pPr algn="ctr"/>
-          </a:p>
-        </p:txBody>
-      </p:sp>
-      <p:sp>
-        <p:nvSpPr>
-          <p:cNvPr id="10" name="TextBox 9"/>
+                  <a:srgbClr val="0F766E"/>
+                </a:solidFill>
+                <a:latin typeface="Malgun Gothic"/>
+              </a:rPr>
+              <a:t>배운 점</a:t>
+            </a:r>
+          </a:p>
+        </p:txBody>
+      </p:sp>
+      <p:sp>
+        <p:nvSpPr>
+          <p:cNvPr id="7" name="TextBox 6"/>
           <p:cNvSpPr txBox="1"/>
           <p:nvPr/>
         </p:nvSpPr>
         <p:spPr>
           <a:xfrm>
-            <a:off x="3520440" y="2624328"/>
-            <a:ext cx="2377440" cy="365760"/>
+            <a:off x="640080" y="2240280"/>
+            <a:ext cx="5303520" cy="3657600"/>
+          </a:xfrm>
+          <a:prstGeom prst="rect">
+            <a:avLst/>
+          </a:prstGeom>
+          <a:noFill/>
+        </p:spPr>
+        <p:txBody>
+          <a:bodyPr wrap="square">
+            <a:spAutoFit/>
+          </a:bodyPr>
+          <a:lstStyle/>
+          <a:p>
+            <a:pPr>
+              <a:lnSpc>
+                <a:spcPct val="120000"/>
+              </a:lnSpc>
+              <a:spcAft>
+                <a:spcPts val="1000"/>
+              </a:spcAft>
+            </a:pPr>
+            <a:r>
+              <a:rPr sz="1400" b="0">
+                <a:solidFill>
+                  <a:srgbClr val="1F2E2A"/>
+                </a:solidFill>
+                <a:latin typeface="Malgun Gothic"/>
+              </a:rPr>
+              <a:t>•  정적 데모(localStorage)에서 실제 백엔드(Supabase)로 옮기며 인증·보안을 다시 설계하는 경험</a:t>
+            </a:r>
+          </a:p>
+          <a:p>
+            <a:pPr>
+              <a:lnSpc>
+                <a:spcPct val="120000"/>
+              </a:lnSpc>
+              <a:spcAft>
+                <a:spcPts val="1000"/>
+              </a:spcAft>
+            </a:pPr>
+            <a:r>
+              <a:rPr sz="1400" b="0">
+                <a:solidFill>
+                  <a:srgbClr val="1F2E2A"/>
+                </a:solidFill>
+                <a:latin typeface="Malgun Gothic"/>
+              </a:rPr>
+              <a:t>•  RLS 정책의 재귀 문제를 SECURITY DEFINER 함수 패턴으로 해결</a:t>
+            </a:r>
+          </a:p>
+          <a:p>
+            <a:pPr>
+              <a:lnSpc>
+                <a:spcPct val="120000"/>
+              </a:lnSpc>
+              <a:spcAft>
+                <a:spcPts val="1000"/>
+              </a:spcAft>
+            </a:pPr>
+            <a:r>
+              <a:rPr sz="1400" b="0">
+                <a:solidFill>
+                  <a:srgbClr val="1F2E2A"/>
+                </a:solidFill>
+                <a:latin typeface="Malgun Gothic"/>
+              </a:rPr>
+              <a:t>•  Security Advisor로 보이지 않는 권한 노출까지 점검하는 습관</a:t>
+            </a:r>
+          </a:p>
+        </p:txBody>
+      </p:sp>
+      <p:sp>
+        <p:nvSpPr>
+          <p:cNvPr id="8" name="TextBox 7"/>
+          <p:cNvSpPr txBox="1"/>
+          <p:nvPr/>
+        </p:nvSpPr>
+        <p:spPr>
+          <a:xfrm>
+            <a:off x="6309360" y="1828800"/>
+            <a:ext cx="5303520" cy="365760"/>
           </a:xfrm>
           <a:prstGeom prst="rect">
             <a:avLst/>
@@ -4434,7 +4773,7 @@
           </a:bodyPr>
           <a:lstStyle/>
           <a:p>
-            <a:pPr algn="ctr">
+            <a:pPr algn="l">
               <a:lnSpc>
                 <a:spcPct val="115000"/>
               </a:lnSpc>
@@ -4442,112 +4781,105 @@
             <a:r>
               <a:rPr sz="1600" b="1">
                 <a:solidFill>
-                  <a:srgbClr val="FFFFFF"/>
-                </a:solidFill>
-                <a:latin typeface="Malgun Gothic"/>
-              </a:rPr>
-              <a:t>feat/auth</a:t>
-            </a:r>
-          </a:p>
-        </p:txBody>
-      </p:sp>
-      <p:sp>
-        <p:nvSpPr>
-          <p:cNvPr id="11" name="Right Arrow 10"/>
-          <p:cNvSpPr/>
-          <p:nvPr/>
-        </p:nvSpPr>
-        <p:spPr>
-          <a:xfrm>
-            <a:off x="5943600" y="2651760"/>
-            <a:ext cx="274320" cy="274320"/>
-          </a:xfrm>
-          <a:prstGeom prst="rightArrow">
-            <a:avLst/>
-          </a:prstGeom>
-          <a:solidFill>
-            <a:srgbClr val="34D399"/>
-          </a:solidFill>
-          <a:ln>
-            <a:noFill/>
-          </a:ln>
-        </p:spPr>
-        <p:style>
-          <a:lnRef idx="1">
-            <a:schemeClr val="accent1"/>
-          </a:lnRef>
-          <a:fillRef idx="3">
-            <a:schemeClr val="accent1"/>
-          </a:fillRef>
-          <a:effectRef idx="2">
-            <a:schemeClr val="accent1"/>
-          </a:effectRef>
-          <a:fontRef idx="minor">
-            <a:schemeClr val="lt1"/>
-          </a:fontRef>
-        </p:style>
-        <p:txBody>
-          <a:bodyPr rtlCol="0" anchor="ctr"/>
-          <a:lstStyle/>
-          <a:p>
-            <a:pPr algn="ctr"/>
-          </a:p>
-        </p:txBody>
-      </p:sp>
-      <p:sp>
-        <p:nvSpPr>
-          <p:cNvPr id="12" name="Rounded Rectangle 11"/>
-          <p:cNvSpPr/>
-          <p:nvPr/>
-        </p:nvSpPr>
-        <p:spPr>
-          <a:xfrm>
-            <a:off x="6217920" y="2377440"/>
-            <a:ext cx="2377440" cy="822960"/>
-          </a:xfrm>
-          <a:prstGeom prst="roundRect">
-            <a:avLst/>
-          </a:prstGeom>
-          <a:solidFill>
-            <a:srgbClr val="0F766E"/>
-          </a:solidFill>
-          <a:ln>
-            <a:noFill/>
-          </a:ln>
-          <a:effectLst/>
-        </p:spPr>
-        <p:style>
-          <a:lnRef idx="1">
-            <a:schemeClr val="accent1"/>
-          </a:lnRef>
-          <a:fillRef idx="3">
-            <a:schemeClr val="accent1"/>
-          </a:fillRef>
-          <a:effectRef idx="2">
-            <a:schemeClr val="accent1"/>
-          </a:effectRef>
-          <a:fontRef idx="minor">
-            <a:schemeClr val="lt1"/>
-          </a:fontRef>
-        </p:style>
-        <p:txBody>
-          <a:bodyPr rtlCol="0" anchor="ctr"/>
-          <a:lstStyle/>
-          <a:p>
-            <a:pPr algn="ctr"/>
-          </a:p>
-        </p:txBody>
-      </p:sp>
-      <p:sp>
-        <p:nvSpPr>
-          <p:cNvPr id="13" name="TextBox 12"/>
+                  <a:srgbClr val="0F766E"/>
+                </a:solidFill>
+                <a:latin typeface="Malgun Gothic"/>
+              </a:rPr>
+              <a:t>다음 단계</a:t>
+            </a:r>
+          </a:p>
+        </p:txBody>
+      </p:sp>
+      <p:sp>
+        <p:nvSpPr>
+          <p:cNvPr id="9" name="TextBox 8"/>
           <p:cNvSpPr txBox="1"/>
           <p:nvPr/>
         </p:nvSpPr>
         <p:spPr>
           <a:xfrm>
-            <a:off x="6217920" y="2624328"/>
-            <a:ext cx="2377440" cy="365760"/>
+            <a:off x="6309360" y="2240280"/>
+            <a:ext cx="5303520" cy="3657600"/>
+          </a:xfrm>
+          <a:prstGeom prst="rect">
+            <a:avLst/>
+          </a:prstGeom>
+          <a:noFill/>
+        </p:spPr>
+        <p:txBody>
+          <a:bodyPr wrap="square">
+            <a:spAutoFit/>
+          </a:bodyPr>
+          <a:lstStyle/>
+          <a:p>
+            <a:pPr>
+              <a:lnSpc>
+                <a:spcPct val="120000"/>
+              </a:lnSpc>
+              <a:spcAft>
+                <a:spcPts val="1000"/>
+              </a:spcAft>
+            </a:pPr>
+            <a:r>
+              <a:rPr sz="1400" b="0">
+                <a:solidFill>
+                  <a:srgbClr val="1F2E2A"/>
+                </a:solidFill>
+                <a:latin typeface="Malgun Gothic"/>
+              </a:rPr>
+              <a:t>•  관리자 계정도 Supabase Auth 기반으로 전환 검토</a:t>
+            </a:r>
+          </a:p>
+          <a:p>
+            <a:pPr>
+              <a:lnSpc>
+                <a:spcPct val="120000"/>
+              </a:lnSpc>
+              <a:spcAft>
+                <a:spcPts val="1000"/>
+              </a:spcAft>
+            </a:pPr>
+            <a:r>
+              <a:rPr sz="1400" b="0">
+                <a:solidFill>
+                  <a:srgbClr val="1F2E2A"/>
+                </a:solidFill>
+                <a:latin typeface="Malgun Gothic"/>
+              </a:rPr>
+              <a:t>•  프론트엔드(js/utils.js)를 Supabase 클라이언트 호출로 교체</a:t>
+            </a:r>
+          </a:p>
+          <a:p>
+            <a:pPr>
+              <a:lnSpc>
+                <a:spcPct val="120000"/>
+              </a:lnSpc>
+              <a:spcAft>
+                <a:spcPts val="1000"/>
+              </a:spcAft>
+            </a:pPr>
+            <a:r>
+              <a:rPr sz="1400" b="0">
+                <a:solidFill>
+                  <a:srgbClr val="1F2E2A"/>
+                </a:solidFill>
+                <a:latin typeface="Malgun Gothic"/>
+              </a:rPr>
+              <a:t>•  관리자 페이지에 실시간 통계·알림 기능 확장</a:t>
+            </a:r>
+          </a:p>
+        </p:txBody>
+      </p:sp>
+      <p:sp>
+        <p:nvSpPr>
+          <p:cNvPr id="10" name="TextBox 9"/>
+          <p:cNvSpPr txBox="1"/>
+          <p:nvPr/>
+        </p:nvSpPr>
+        <p:spPr>
+          <a:xfrm>
+            <a:off x="457200" y="6446520"/>
+            <a:ext cx="7315200" cy="320040"/>
           </a:xfrm>
           <a:prstGeom prst="rect">
             <a:avLst/>
@@ -4560,276 +4892,18 @@
           </a:bodyPr>
           <a:lstStyle/>
           <a:p>
-            <a:pPr algn="ctr">
+            <a:pPr algn="l">
               <a:lnSpc>
                 <a:spcPct val="115000"/>
               </a:lnSpc>
             </a:pPr>
             <a:r>
-              <a:rPr sz="1600" b="1">
-                <a:solidFill>
-                  <a:srgbClr val="FFFFFF"/>
-                </a:solidFill>
-                <a:latin typeface="Malgun Gothic"/>
-              </a:rPr>
-              <a:t>feat/core</a:t>
-            </a:r>
-          </a:p>
-        </p:txBody>
-      </p:sp>
-      <p:sp>
-        <p:nvSpPr>
-          <p:cNvPr id="14" name="Right Arrow 13"/>
-          <p:cNvSpPr/>
-          <p:nvPr/>
-        </p:nvSpPr>
-        <p:spPr>
-          <a:xfrm>
-            <a:off x="8641080" y="2651760"/>
-            <a:ext cx="274320" cy="274320"/>
-          </a:xfrm>
-          <a:prstGeom prst="rightArrow">
-            <a:avLst/>
-          </a:prstGeom>
-          <a:solidFill>
-            <a:srgbClr val="34D399"/>
-          </a:solidFill>
-          <a:ln>
-            <a:noFill/>
-          </a:ln>
-        </p:spPr>
-        <p:style>
-          <a:lnRef idx="1">
-            <a:schemeClr val="accent1"/>
-          </a:lnRef>
-          <a:fillRef idx="3">
-            <a:schemeClr val="accent1"/>
-          </a:fillRef>
-          <a:effectRef idx="2">
-            <a:schemeClr val="accent1"/>
-          </a:effectRef>
-          <a:fontRef idx="minor">
-            <a:schemeClr val="lt1"/>
-          </a:fontRef>
-        </p:style>
-        <p:txBody>
-          <a:bodyPr rtlCol="0" anchor="ctr"/>
-          <a:lstStyle/>
-          <a:p>
-            <a:pPr algn="ctr"/>
-          </a:p>
-        </p:txBody>
-      </p:sp>
-      <p:sp>
-        <p:nvSpPr>
-          <p:cNvPr id="15" name="Rounded Rectangle 14"/>
-          <p:cNvSpPr/>
-          <p:nvPr/>
-        </p:nvSpPr>
-        <p:spPr>
-          <a:xfrm>
-            <a:off x="8915400" y="2377440"/>
-            <a:ext cx="2377440" cy="822960"/>
-          </a:xfrm>
-          <a:prstGeom prst="roundRect">
-            <a:avLst/>
-          </a:prstGeom>
-          <a:solidFill>
-            <a:srgbClr val="1E3A34"/>
-          </a:solidFill>
-          <a:ln>
-            <a:noFill/>
-          </a:ln>
-          <a:effectLst/>
-        </p:spPr>
-        <p:style>
-          <a:lnRef idx="1">
-            <a:schemeClr val="accent1"/>
-          </a:lnRef>
-          <a:fillRef idx="3">
-            <a:schemeClr val="accent1"/>
-          </a:fillRef>
-          <a:effectRef idx="2">
-            <a:schemeClr val="accent1"/>
-          </a:effectRef>
-          <a:fontRef idx="minor">
-            <a:schemeClr val="lt1"/>
-          </a:fontRef>
-        </p:style>
-        <p:txBody>
-          <a:bodyPr rtlCol="0" anchor="ctr"/>
-          <a:lstStyle/>
-          <a:p>
-            <a:pPr algn="ctr"/>
-          </a:p>
-        </p:txBody>
-      </p:sp>
-      <p:sp>
-        <p:nvSpPr>
-          <p:cNvPr id="16" name="TextBox 15"/>
-          <p:cNvSpPr txBox="1"/>
-          <p:nvPr/>
-        </p:nvSpPr>
-        <p:spPr>
-          <a:xfrm>
-            <a:off x="8915400" y="2624328"/>
-            <a:ext cx="2377440" cy="365760"/>
-          </a:xfrm>
-          <a:prstGeom prst="rect">
-            <a:avLst/>
-          </a:prstGeom>
-          <a:noFill/>
-        </p:spPr>
-        <p:txBody>
-          <a:bodyPr wrap="square" anchor="t">
-            <a:spAutoFit/>
-          </a:bodyPr>
-          <a:lstStyle/>
-          <a:p>
-            <a:pPr algn="ctr">
-              <a:lnSpc>
-                <a:spcPct val="115000"/>
-              </a:lnSpc>
-            </a:pPr>
-            <a:r>
-              <a:rPr sz="1600" b="1">
-                <a:solidFill>
-                  <a:srgbClr val="FFFFFF"/>
-                </a:solidFill>
-                <a:latin typeface="Malgun Gothic"/>
-              </a:rPr>
-              <a:t>main</a:t>
-            </a:r>
-          </a:p>
-        </p:txBody>
-      </p:sp>
-      <p:sp>
-        <p:nvSpPr>
-          <p:cNvPr id="17" name="TextBox 16"/>
-          <p:cNvSpPr txBox="1"/>
-          <p:nvPr/>
-        </p:nvSpPr>
-        <p:spPr>
-          <a:xfrm>
-            <a:off x="822960" y="3657600"/>
-            <a:ext cx="10515600" cy="2560320"/>
-          </a:xfrm>
-          <a:prstGeom prst="rect">
-            <a:avLst/>
-          </a:prstGeom>
-          <a:noFill/>
-        </p:spPr>
-        <p:txBody>
-          <a:bodyPr wrap="square">
-            <a:spAutoFit/>
-          </a:bodyPr>
-          <a:lstStyle/>
-          <a:p>
-            <a:pPr>
-              <a:lnSpc>
-                <a:spcPct val="120000"/>
-              </a:lnSpc>
-              <a:spcAft>
-                <a:spcPts val="1000"/>
-              </a:spcAft>
-            </a:pPr>
-            <a:r>
-              <a:rPr sz="1500" b="0">
-                <a:solidFill>
-                  <a:srgbClr val="1F2E2A"/>
-                </a:solidFill>
-                <a:latin typeface="Malgun Gothic"/>
-              </a:rPr>
-              <a:t>•  PR 기반 병합</a:t>
-            </a:r>
-          </a:p>
-          <a:p>
-            <a:pPr>
-              <a:spcAft>
-                <a:spcPts val="1000"/>
-              </a:spcAft>
-            </a:pPr>
-            <a:r>
-              <a:rPr sz="1200">
+              <a:rPr sz="1000" b="0">
                 <a:solidFill>
                   <a:srgbClr val="6E8880"/>
                 </a:solidFill>
                 <a:latin typeface="Malgun Gothic"/>
               </a:rPr>
-              <a:t>     공통 자원 → 인증 → 핵심 기능 순으로 브랜치를 나눠 작업 후 Pull Request로 main에 병합</a:t>
-            </a:r>
-          </a:p>
-          <a:p>
-            <a:pPr>
-              <a:lnSpc>
-                <a:spcPct val="120000"/>
-              </a:lnSpc>
-              <a:spcAft>
-                <a:spcPts val="1000"/>
-              </a:spcAft>
-            </a:pPr>
-            <a:r>
-              <a:rPr sz="1500" b="0">
-                <a:solidFill>
-                  <a:srgbClr val="1F2E2A"/>
-                </a:solidFill>
-                <a:latin typeface="Malgun Gothic"/>
-              </a:rPr>
-              <a:t>•  병합 후 브랜치 정리</a:t>
-            </a:r>
-          </a:p>
-          <a:p>
-            <a:pPr>
-              <a:spcAft>
-                <a:spcPts val="1000"/>
-              </a:spcAft>
-            </a:pPr>
-            <a:r>
-              <a:rPr sz="1200">
-                <a:solidFill>
-                  <a:srgbClr val="6E8880"/>
-                </a:solidFill>
-                <a:latin typeface="Malgun Gothic"/>
-              </a:rPr>
-              <a:t>     머지가 끝난 feat/* 브랜치와 사용하지 않는 master 브랜치를 삭제해 원격 저장소를 깔끔하게 유지</a:t>
-            </a:r>
-          </a:p>
-        </p:txBody>
-      </p:sp>
-      <p:sp>
-        <p:nvSpPr>
-          <p:cNvPr id="18" name="TextBox 17"/>
-          <p:cNvSpPr txBox="1"/>
-          <p:nvPr/>
-        </p:nvSpPr>
-        <p:spPr>
-          <a:xfrm>
-            <a:off x="457200" y="6446520"/>
-            <a:ext cx="7315200" cy="320040"/>
-          </a:xfrm>
-          <a:prstGeom prst="rect">
-            <a:avLst/>
-          </a:prstGeom>
-          <a:noFill/>
-        </p:spPr>
-        <p:txBody>
-          <a:bodyPr wrap="square" anchor="t">
-            <a:spAutoFit/>
-          </a:bodyPr>
-          <a:lstStyle/>
-          <a:p>
-            <a:pPr algn="l">
-              <a:lnSpc>
-                <a:spcPct val="115000"/>
-              </a:lnSpc>
-            </a:pPr>
-            <a:r>
-              <a:rPr sz="1000" b="0">
-                <a:solidFill>
-                  <a:srgbClr val="6E8880"/>
-                </a:solidFill>
-                <a:latin typeface="Malgun Gothic"/>
-              </a:rPr>
               <a:t>EXPENSE TRACKER · PORTFOLIO</a:t>
             </a:r>
           </a:p>
@@ -4837,7 +4911,7 @@
       </p:sp>
       <p:sp>
         <p:nvSpPr>
-          <p:cNvPr id="19" name="TextBox 18"/>
+          <p:cNvPr id="11" name="TextBox 10"/>
           <p:cNvSpPr txBox="1"/>
           <p:nvPr/>
         </p:nvSpPr>
@@ -4883,514 +4957,6 @@
 </file>
 
 <file path=ppt/slides/slide12.xml><?xml version="1.0" encoding="utf-8"?>
-<p:sld xmlns:a="http://schemas.openxmlformats.org/drawingml/2006/main" xmlns:p="http://schemas.openxmlformats.org/presentationml/2006/main" xmlns:r="http://schemas.openxmlformats.org/officeDocument/2006/relationships">
-  <p:cSld>
-    <p:bg>
-      <p:bgPr>
-        <a:solidFill>
-          <a:srgbClr val="F3FBF8"/>
-        </a:solidFill>
-        <a:effectLst/>
-      </p:bgPr>
-    </p:bg>
-    <p:spTree>
-      <p:nvGrpSpPr>
-        <p:cNvPr id="1" name=""/>
-        <p:cNvGrpSpPr/>
-        <p:nvPr/>
-      </p:nvGrpSpPr>
-      <p:grpSpPr/>
-      <p:sp>
-        <p:nvSpPr>
-          <p:cNvPr id="2" name="Rectangle 1"/>
-          <p:cNvSpPr/>
-          <p:nvPr/>
-        </p:nvSpPr>
-        <p:spPr>
-          <a:xfrm>
-            <a:off x="457200" y="502920"/>
-            <a:ext cx="109728" cy="457200"/>
-          </a:xfrm>
-          <a:prstGeom prst="rect">
-            <a:avLst/>
-          </a:prstGeom>
-          <a:solidFill>
-            <a:srgbClr val="0F766E"/>
-          </a:solidFill>
-          <a:ln>
-            <a:noFill/>
-          </a:ln>
-          <a:effectLst/>
-        </p:spPr>
-        <p:style>
-          <a:lnRef idx="1">
-            <a:schemeClr val="accent1"/>
-          </a:lnRef>
-          <a:fillRef idx="3">
-            <a:schemeClr val="accent1"/>
-          </a:fillRef>
-          <a:effectRef idx="2">
-            <a:schemeClr val="accent1"/>
-          </a:effectRef>
-          <a:fontRef idx="minor">
-            <a:schemeClr val="lt1"/>
-          </a:fontRef>
-        </p:style>
-        <p:txBody>
-          <a:bodyPr rtlCol="0" anchor="ctr"/>
-          <a:lstStyle/>
-          <a:p>
-            <a:pPr algn="ctr"/>
-          </a:p>
-        </p:txBody>
-      </p:sp>
-      <p:sp>
-        <p:nvSpPr>
-          <p:cNvPr id="3" name="TextBox 2"/>
-          <p:cNvSpPr txBox="1"/>
-          <p:nvPr/>
-        </p:nvSpPr>
-        <p:spPr>
-          <a:xfrm>
-            <a:off x="685800" y="411480"/>
-            <a:ext cx="9144000" cy="365760"/>
-          </a:xfrm>
-          <a:prstGeom prst="rect">
-            <a:avLst/>
-          </a:prstGeom>
-          <a:noFill/>
-        </p:spPr>
-        <p:txBody>
-          <a:bodyPr wrap="square" anchor="t">
-            <a:spAutoFit/>
-          </a:bodyPr>
-          <a:lstStyle/>
-          <a:p>
-            <a:pPr algn="l">
-              <a:lnSpc>
-                <a:spcPct val="115000"/>
-              </a:lnSpc>
-            </a:pPr>
-            <a:r>
-              <a:rPr sz="1300" b="1">
-                <a:solidFill>
-                  <a:srgbClr val="0F766E"/>
-                </a:solidFill>
-                <a:latin typeface="Malgun Gothic"/>
-              </a:rPr>
-              <a:t>RETROSPECTIVE</a:t>
-            </a:r>
-          </a:p>
-        </p:txBody>
-      </p:sp>
-      <p:sp>
-        <p:nvSpPr>
-          <p:cNvPr id="4" name="TextBox 3"/>
-          <p:cNvSpPr txBox="1"/>
-          <p:nvPr/>
-        </p:nvSpPr>
-        <p:spPr>
-          <a:xfrm>
-            <a:off x="640080" y="777240"/>
-            <a:ext cx="10515600" cy="731520"/>
-          </a:xfrm>
-          <a:prstGeom prst="rect">
-            <a:avLst/>
-          </a:prstGeom>
-          <a:noFill/>
-        </p:spPr>
-        <p:txBody>
-          <a:bodyPr wrap="square" anchor="t">
-            <a:spAutoFit/>
-          </a:bodyPr>
-          <a:lstStyle/>
-          <a:p>
-            <a:pPr algn="l">
-              <a:lnSpc>
-                <a:spcPct val="115000"/>
-              </a:lnSpc>
-            </a:pPr>
-            <a:r>
-              <a:rPr sz="2800" b="1">
-                <a:solidFill>
-                  <a:srgbClr val="1F2E2A"/>
-                </a:solidFill>
-                <a:latin typeface="Malgun Gothic"/>
-              </a:rPr>
-              <a:t>회고 &amp; 다음 단계</a:t>
-            </a:r>
-          </a:p>
-        </p:txBody>
-      </p:sp>
-      <p:sp>
-        <p:nvSpPr>
-          <p:cNvPr id="5" name="Rectangle 4"/>
-          <p:cNvSpPr/>
-          <p:nvPr/>
-        </p:nvSpPr>
-        <p:spPr>
-          <a:xfrm>
-            <a:off x="640080" y="1508760"/>
-            <a:ext cx="10972800" cy="25400"/>
-          </a:xfrm>
-          <a:prstGeom prst="rect">
-            <a:avLst/>
-          </a:prstGeom>
-          <a:solidFill>
-            <a:srgbClr val="DCEEE7"/>
-          </a:solidFill>
-          <a:ln>
-            <a:noFill/>
-          </a:ln>
-          <a:effectLst/>
-        </p:spPr>
-        <p:style>
-          <a:lnRef idx="1">
-            <a:schemeClr val="accent1"/>
-          </a:lnRef>
-          <a:fillRef idx="3">
-            <a:schemeClr val="accent1"/>
-          </a:fillRef>
-          <a:effectRef idx="2">
-            <a:schemeClr val="accent1"/>
-          </a:effectRef>
-          <a:fontRef idx="minor">
-            <a:schemeClr val="lt1"/>
-          </a:fontRef>
-        </p:style>
-        <p:txBody>
-          <a:bodyPr rtlCol="0" anchor="ctr"/>
-          <a:lstStyle/>
-          <a:p>
-            <a:pPr algn="ctr"/>
-          </a:p>
-        </p:txBody>
-      </p:sp>
-      <p:sp>
-        <p:nvSpPr>
-          <p:cNvPr id="6" name="TextBox 5"/>
-          <p:cNvSpPr txBox="1"/>
-          <p:nvPr/>
-        </p:nvSpPr>
-        <p:spPr>
-          <a:xfrm>
-            <a:off x="640080" y="1828800"/>
-            <a:ext cx="5303520" cy="365760"/>
-          </a:xfrm>
-          <a:prstGeom prst="rect">
-            <a:avLst/>
-          </a:prstGeom>
-          <a:noFill/>
-        </p:spPr>
-        <p:txBody>
-          <a:bodyPr wrap="square" anchor="t">
-            <a:spAutoFit/>
-          </a:bodyPr>
-          <a:lstStyle/>
-          <a:p>
-            <a:pPr algn="l">
-              <a:lnSpc>
-                <a:spcPct val="115000"/>
-              </a:lnSpc>
-            </a:pPr>
-            <a:r>
-              <a:rPr sz="1600" b="1">
-                <a:solidFill>
-                  <a:srgbClr val="0F766E"/>
-                </a:solidFill>
-                <a:latin typeface="Malgun Gothic"/>
-              </a:rPr>
-              <a:t>배운 점</a:t>
-            </a:r>
-          </a:p>
-        </p:txBody>
-      </p:sp>
-      <p:sp>
-        <p:nvSpPr>
-          <p:cNvPr id="7" name="TextBox 6"/>
-          <p:cNvSpPr txBox="1"/>
-          <p:nvPr/>
-        </p:nvSpPr>
-        <p:spPr>
-          <a:xfrm>
-            <a:off x="640080" y="2240280"/>
-            <a:ext cx="5303520" cy="3657600"/>
-          </a:xfrm>
-          <a:prstGeom prst="rect">
-            <a:avLst/>
-          </a:prstGeom>
-          <a:noFill/>
-        </p:spPr>
-        <p:txBody>
-          <a:bodyPr wrap="square">
-            <a:spAutoFit/>
-          </a:bodyPr>
-          <a:lstStyle/>
-          <a:p>
-            <a:pPr>
-              <a:lnSpc>
-                <a:spcPct val="120000"/>
-              </a:lnSpc>
-              <a:spcAft>
-                <a:spcPts val="1000"/>
-              </a:spcAft>
-            </a:pPr>
-            <a:r>
-              <a:rPr sz="1400" b="0">
-                <a:solidFill>
-                  <a:srgbClr val="1F2E2A"/>
-                </a:solidFill>
-                <a:latin typeface="Malgun Gothic"/>
-              </a:rPr>
-              <a:t>•  정적 데모(localStorage)에서 실제 백엔드(Supabase)로 옮기며 인증·보안을 다시 설계하는 경험</a:t>
-            </a:r>
-          </a:p>
-          <a:p>
-            <a:pPr>
-              <a:lnSpc>
-                <a:spcPct val="120000"/>
-              </a:lnSpc>
-              <a:spcAft>
-                <a:spcPts val="1000"/>
-              </a:spcAft>
-            </a:pPr>
-            <a:r>
-              <a:rPr sz="1400" b="0">
-                <a:solidFill>
-                  <a:srgbClr val="1F2E2A"/>
-                </a:solidFill>
-                <a:latin typeface="Malgun Gothic"/>
-              </a:rPr>
-              <a:t>•  RLS 정책의 재귀 문제를 SECURITY DEFINER 함수 패턴으로 해결</a:t>
-            </a:r>
-          </a:p>
-          <a:p>
-            <a:pPr>
-              <a:lnSpc>
-                <a:spcPct val="120000"/>
-              </a:lnSpc>
-              <a:spcAft>
-                <a:spcPts val="1000"/>
-              </a:spcAft>
-            </a:pPr>
-            <a:r>
-              <a:rPr sz="1400" b="0">
-                <a:solidFill>
-                  <a:srgbClr val="1F2E2A"/>
-                </a:solidFill>
-                <a:latin typeface="Malgun Gothic"/>
-              </a:rPr>
-              <a:t>•  Security Advisor로 보이지 않는 권한 노출까지 점검하는 습관</a:t>
-            </a:r>
-          </a:p>
-        </p:txBody>
-      </p:sp>
-      <p:sp>
-        <p:nvSpPr>
-          <p:cNvPr id="8" name="TextBox 7"/>
-          <p:cNvSpPr txBox="1"/>
-          <p:nvPr/>
-        </p:nvSpPr>
-        <p:spPr>
-          <a:xfrm>
-            <a:off x="6309360" y="1828800"/>
-            <a:ext cx="5303520" cy="365760"/>
-          </a:xfrm>
-          <a:prstGeom prst="rect">
-            <a:avLst/>
-          </a:prstGeom>
-          <a:noFill/>
-        </p:spPr>
-        <p:txBody>
-          <a:bodyPr wrap="square" anchor="t">
-            <a:spAutoFit/>
-          </a:bodyPr>
-          <a:lstStyle/>
-          <a:p>
-            <a:pPr algn="l">
-              <a:lnSpc>
-                <a:spcPct val="115000"/>
-              </a:lnSpc>
-            </a:pPr>
-            <a:r>
-              <a:rPr sz="1600" b="1">
-                <a:solidFill>
-                  <a:srgbClr val="0F766E"/>
-                </a:solidFill>
-                <a:latin typeface="Malgun Gothic"/>
-              </a:rPr>
-              <a:t>다음 단계</a:t>
-            </a:r>
-          </a:p>
-        </p:txBody>
-      </p:sp>
-      <p:sp>
-        <p:nvSpPr>
-          <p:cNvPr id="9" name="TextBox 8"/>
-          <p:cNvSpPr txBox="1"/>
-          <p:nvPr/>
-        </p:nvSpPr>
-        <p:spPr>
-          <a:xfrm>
-            <a:off x="6309360" y="2240280"/>
-            <a:ext cx="5303520" cy="3657600"/>
-          </a:xfrm>
-          <a:prstGeom prst="rect">
-            <a:avLst/>
-          </a:prstGeom>
-          <a:noFill/>
-        </p:spPr>
-        <p:txBody>
-          <a:bodyPr wrap="square">
-            <a:spAutoFit/>
-          </a:bodyPr>
-          <a:lstStyle/>
-          <a:p>
-            <a:pPr>
-              <a:lnSpc>
-                <a:spcPct val="120000"/>
-              </a:lnSpc>
-              <a:spcAft>
-                <a:spcPts val="1000"/>
-              </a:spcAft>
-            </a:pPr>
-            <a:r>
-              <a:rPr sz="1400" b="0">
-                <a:solidFill>
-                  <a:srgbClr val="1F2E2A"/>
-                </a:solidFill>
-                <a:latin typeface="Malgun Gothic"/>
-              </a:rPr>
-              <a:t>•  관리자 계정도 Supabase Auth 기반으로 전환 검토</a:t>
-            </a:r>
-          </a:p>
-          <a:p>
-            <a:pPr>
-              <a:lnSpc>
-                <a:spcPct val="120000"/>
-              </a:lnSpc>
-              <a:spcAft>
-                <a:spcPts val="1000"/>
-              </a:spcAft>
-            </a:pPr>
-            <a:r>
-              <a:rPr sz="1400" b="0">
-                <a:solidFill>
-                  <a:srgbClr val="1F2E2A"/>
-                </a:solidFill>
-                <a:latin typeface="Malgun Gothic"/>
-              </a:rPr>
-              <a:t>•  프론트엔드(js/utils.js)를 Supabase 클라이언트 호출로 교체</a:t>
-            </a:r>
-          </a:p>
-          <a:p>
-            <a:pPr>
-              <a:lnSpc>
-                <a:spcPct val="120000"/>
-              </a:lnSpc>
-              <a:spcAft>
-                <a:spcPts val="1000"/>
-              </a:spcAft>
-            </a:pPr>
-            <a:r>
-              <a:rPr sz="1400" b="0">
-                <a:solidFill>
-                  <a:srgbClr val="1F2E2A"/>
-                </a:solidFill>
-                <a:latin typeface="Malgun Gothic"/>
-              </a:rPr>
-              <a:t>•  관리자 페이지에 실시간 통계·알림 기능 확장</a:t>
-            </a:r>
-          </a:p>
-        </p:txBody>
-      </p:sp>
-      <p:sp>
-        <p:nvSpPr>
-          <p:cNvPr id="10" name="TextBox 9"/>
-          <p:cNvSpPr txBox="1"/>
-          <p:nvPr/>
-        </p:nvSpPr>
-        <p:spPr>
-          <a:xfrm>
-            <a:off x="457200" y="6446520"/>
-            <a:ext cx="7315200" cy="320040"/>
-          </a:xfrm>
-          <a:prstGeom prst="rect">
-            <a:avLst/>
-          </a:prstGeom>
-          <a:noFill/>
-        </p:spPr>
-        <p:txBody>
-          <a:bodyPr wrap="square" anchor="t">
-            <a:spAutoFit/>
-          </a:bodyPr>
-          <a:lstStyle/>
-          <a:p>
-            <a:pPr algn="l">
-              <a:lnSpc>
-                <a:spcPct val="115000"/>
-              </a:lnSpc>
-            </a:pPr>
-            <a:r>
-              <a:rPr sz="1000" b="0">
-                <a:solidFill>
-                  <a:srgbClr val="6E8880"/>
-                </a:solidFill>
-                <a:latin typeface="Malgun Gothic"/>
-              </a:rPr>
-              <a:t>EXPENSE TRACKER · PORTFOLIO</a:t>
-            </a:r>
-          </a:p>
-        </p:txBody>
-      </p:sp>
-      <p:sp>
-        <p:nvSpPr>
-          <p:cNvPr id="11" name="TextBox 10"/>
-          <p:cNvSpPr txBox="1"/>
-          <p:nvPr/>
-        </p:nvSpPr>
-        <p:spPr>
-          <a:xfrm>
-            <a:off x="11002975" y="6446520"/>
-            <a:ext cx="822960" cy="320040"/>
-          </a:xfrm>
-          <a:prstGeom prst="rect">
-            <a:avLst/>
-          </a:prstGeom>
-          <a:noFill/>
-        </p:spPr>
-        <p:txBody>
-          <a:bodyPr wrap="square" anchor="t">
-            <a:spAutoFit/>
-          </a:bodyPr>
-          <a:lstStyle/>
-          <a:p>
-            <a:pPr algn="r">
-              <a:lnSpc>
-                <a:spcPct val="115000"/>
-              </a:lnSpc>
-            </a:pPr>
-            <a:r>
-              <a:rPr sz="1000" b="0">
-                <a:solidFill>
-                  <a:srgbClr val="6E8880"/>
-                </a:solidFill>
-                <a:latin typeface="Malgun Gothic"/>
-              </a:rPr>
-              <a:t>12</a:t>
-            </a:r>
-          </a:p>
-        </p:txBody>
-      </p:sp>
-    </p:spTree>
-  </p:cSld>
-  <p:clrMapOvr>
-    <a:masterClrMapping/>
-  </p:clrMapOvr>
-</p:sld>
-</file>
-
-<file path=ppt/slides/slide13.xml><?xml version="1.0" encoding="utf-8"?>
 <p:sld xmlns:a="http://schemas.openxmlformats.org/drawingml/2006/main" xmlns:p="http://schemas.openxmlformats.org/presentationml/2006/main" xmlns:r="http://schemas.openxmlformats.org/officeDocument/2006/relationships">
   <p:cSld>
     <p:bg>
@@ -9010,7 +8576,7 @@
                 </a:solidFill>
                 <a:latin typeface="Malgun Gothic"/>
               </a:rPr>
-              <a:t>데이터 모델 (ERD) — 핵심 지출</a:t>
+              <a:t>데이터 모델 (ERD)</a:t>
             </a:r>
           </a:p>
         </p:txBody>
@@ -9061,7 +8627,7 @@
       </p:sp>
       <p:pic>
         <p:nvPicPr>
-          <p:cNvPr id="6" name="Picture 5" descr="erd_core.png"/>
+          <p:cNvPr id="6" name="Picture 5" descr="erd.png"/>
           <p:cNvPicPr>
             <a:picLocks noChangeAspect="1"/>
           </p:cNvPicPr>
@@ -9075,8 +8641,8 @@
         </p:blipFill>
         <p:spPr>
           <a:xfrm>
-            <a:off x="3939314" y="1645920"/>
-            <a:ext cx="4374331" cy="4663440"/>
+            <a:off x="4198494" y="1600200"/>
+            <a:ext cx="3855971" cy="4709160"/>
           </a:xfrm>
           <a:prstGeom prst="rect">
             <a:avLst/>
@@ -9265,7 +8831,7 @@
                 </a:solidFill>
                 <a:latin typeface="Malgun Gothic"/>
               </a:rPr>
-              <a:t>DATA MODEL</a:t>
+              <a:t>TECH EVOLUTION</a:t>
             </a:r>
           </a:p>
         </p:txBody>
@@ -9304,7 +8870,7 @@
                 </a:solidFill>
                 <a:latin typeface="Malgun Gothic"/>
               </a:rPr>
-              <a:t>데이터 모델 (ERD) — 게시판</a:t>
+              <a:t>localStorage → Supabase</a:t>
             </a:r>
           </a:p>
         </p:txBody>
@@ -9353,30 +8919,52 @@
           </a:p>
         </p:txBody>
       </p:sp>
-      <p:pic>
-        <p:nvPicPr>
-          <p:cNvPr id="6" name="Picture 5" descr="erd_board.png"/>
-          <p:cNvPicPr>
-            <a:picLocks noChangeAspect="1"/>
-          </p:cNvPicPr>
-          <p:nvPr/>
-        </p:nvPicPr>
-        <p:blipFill>
-          <a:blip r:embed="rId2"/>
-          <a:stretch>
-            <a:fillRect/>
-          </a:stretch>
-        </p:blipFill>
-        <p:spPr>
-          <a:xfrm>
-            <a:off x="4876189" y="1645920"/>
-            <a:ext cx="2500581" cy="4663440"/>
-          </a:xfrm>
-          <a:prstGeom prst="rect">
-            <a:avLst/>
-          </a:prstGeom>
-        </p:spPr>
-      </p:pic>
+      <p:sp>
+        <p:nvSpPr>
+          <p:cNvPr id="6" name="Rectangle 5"/>
+          <p:cNvSpPr/>
+          <p:nvPr/>
+        </p:nvSpPr>
+        <p:spPr>
+          <a:xfrm>
+            <a:off x="640080" y="2011680"/>
+            <a:ext cx="4937760" cy="3291840"/>
+          </a:xfrm>
+          <a:prstGeom prst="rect">
+            <a:avLst/>
+          </a:prstGeom>
+          <a:solidFill>
+            <a:srgbClr val="FFFFFF"/>
+          </a:solidFill>
+          <a:ln w="12700">
+            <a:solidFill>
+              <a:srgbClr val="DCEEE7"/>
+            </a:solidFill>
+          </a:ln>
+          <a:effectLst/>
+        </p:spPr>
+        <p:style>
+          <a:lnRef idx="1">
+            <a:schemeClr val="accent1"/>
+          </a:lnRef>
+          <a:fillRef idx="3">
+            <a:schemeClr val="accent1"/>
+          </a:fillRef>
+          <a:effectRef idx="2">
+            <a:schemeClr val="accent1"/>
+          </a:effectRef>
+          <a:fontRef idx="minor">
+            <a:schemeClr val="lt1"/>
+          </a:fontRef>
+        </p:style>
+        <p:txBody>
+          <a:bodyPr rtlCol="0" anchor="ctr"/>
+          <a:lstStyle/>
+          <a:p>
+            <a:pPr algn="ctr"/>
+          </a:p>
+        </p:txBody>
+      </p:sp>
       <p:sp>
         <p:nvSpPr>
           <p:cNvPr id="7" name="TextBox 6"/>
@@ -9385,8 +8973,8 @@
         </p:nvSpPr>
         <p:spPr>
           <a:xfrm>
-            <a:off x="457200" y="6446520"/>
-            <a:ext cx="7315200" cy="320040"/>
+            <a:off x="914400" y="2240280"/>
+            <a:ext cx="4389120" cy="365760"/>
           </a:xfrm>
           <a:prstGeom prst="rect">
             <a:avLst/>
@@ -9405,6 +8993,409 @@
               </a:lnSpc>
             </a:pPr>
             <a:r>
+              <a:rPr sz="1300" b="1">
+                <a:solidFill>
+                  <a:srgbClr val="6E8880"/>
+                </a:solidFill>
+                <a:latin typeface="Malgun Gothic"/>
+              </a:rPr>
+              <a:t>BEFORE</a:t>
+            </a:r>
+          </a:p>
+        </p:txBody>
+      </p:sp>
+      <p:sp>
+        <p:nvSpPr>
+          <p:cNvPr id="8" name="TextBox 7"/>
+          <p:cNvSpPr txBox="1"/>
+          <p:nvPr/>
+        </p:nvSpPr>
+        <p:spPr>
+          <a:xfrm>
+            <a:off x="914400" y="2606040"/>
+            <a:ext cx="4389120" cy="457200"/>
+          </a:xfrm>
+          <a:prstGeom prst="rect">
+            <a:avLst/>
+          </a:prstGeom>
+          <a:noFill/>
+        </p:spPr>
+        <p:txBody>
+          <a:bodyPr wrap="square" anchor="t">
+            <a:spAutoFit/>
+          </a:bodyPr>
+          <a:lstStyle/>
+          <a:p>
+            <a:pPr algn="l">
+              <a:lnSpc>
+                <a:spcPct val="115000"/>
+              </a:lnSpc>
+            </a:pPr>
+            <a:r>
+              <a:rPr sz="1800" b="1">
+                <a:solidFill>
+                  <a:srgbClr val="1F2E2A"/>
+                </a:solidFill>
+                <a:latin typeface="Malgun Gothic"/>
+              </a:rPr>
+              <a:t>정적 사이트 + localStorage</a:t>
+            </a:r>
+          </a:p>
+        </p:txBody>
+      </p:sp>
+      <p:sp>
+        <p:nvSpPr>
+          <p:cNvPr id="9" name="TextBox 8"/>
+          <p:cNvSpPr txBox="1"/>
+          <p:nvPr/>
+        </p:nvSpPr>
+        <p:spPr>
+          <a:xfrm>
+            <a:off x="914400" y="3154680"/>
+            <a:ext cx="4389120" cy="2011680"/>
+          </a:xfrm>
+          <a:prstGeom prst="rect">
+            <a:avLst/>
+          </a:prstGeom>
+          <a:noFill/>
+        </p:spPr>
+        <p:txBody>
+          <a:bodyPr wrap="square">
+            <a:spAutoFit/>
+          </a:bodyPr>
+          <a:lstStyle/>
+          <a:p>
+            <a:pPr>
+              <a:lnSpc>
+                <a:spcPct val="120000"/>
+              </a:lnSpc>
+              <a:spcAft>
+                <a:spcPts val="1000"/>
+              </a:spcAft>
+            </a:pPr>
+            <a:r>
+              <a:rPr sz="1400" b="0">
+                <a:solidFill>
+                  <a:srgbClr val="1F2E2A"/>
+                </a:solidFill>
+                <a:latin typeface="Malgun Gothic"/>
+              </a:rPr>
+              <a:t>•  백엔드 서버 없이 브라우저에 데이터 저장</a:t>
+            </a:r>
+          </a:p>
+          <a:p>
+            <a:pPr>
+              <a:lnSpc>
+                <a:spcPct val="120000"/>
+              </a:lnSpc>
+              <a:spcAft>
+                <a:spcPts val="1000"/>
+              </a:spcAft>
+            </a:pPr>
+            <a:r>
+              <a:rPr sz="1400" b="0">
+                <a:solidFill>
+                  <a:srgbClr val="1F2E2A"/>
+                </a:solidFill>
+                <a:latin typeface="Malgun Gothic"/>
+              </a:rPr>
+              <a:t>•  비밀번호까지 평문으로 저장 (데모 목적)</a:t>
+            </a:r>
+          </a:p>
+          <a:p>
+            <a:pPr>
+              <a:lnSpc>
+                <a:spcPct val="120000"/>
+              </a:lnSpc>
+              <a:spcAft>
+                <a:spcPts val="1000"/>
+              </a:spcAft>
+            </a:pPr>
+            <a:r>
+              <a:rPr sz="1400" b="0">
+                <a:solidFill>
+                  <a:srgbClr val="1F2E2A"/>
+                </a:solidFill>
+                <a:latin typeface="Malgun Gothic"/>
+              </a:rPr>
+              <a:t>•  브라우저·기기 간 데이터 공유 불가</a:t>
+            </a:r>
+          </a:p>
+        </p:txBody>
+      </p:sp>
+      <p:sp>
+        <p:nvSpPr>
+          <p:cNvPr id="10" name="Rectangle 9"/>
+          <p:cNvSpPr/>
+          <p:nvPr/>
+        </p:nvSpPr>
+        <p:spPr>
+          <a:xfrm>
+            <a:off x="6583680" y="2011680"/>
+            <a:ext cx="4937760" cy="3291840"/>
+          </a:xfrm>
+          <a:prstGeom prst="rect">
+            <a:avLst/>
+          </a:prstGeom>
+          <a:solidFill>
+            <a:srgbClr val="0F766E"/>
+          </a:solidFill>
+          <a:ln>
+            <a:noFill/>
+          </a:ln>
+          <a:effectLst/>
+        </p:spPr>
+        <p:style>
+          <a:lnRef idx="1">
+            <a:schemeClr val="accent1"/>
+          </a:lnRef>
+          <a:fillRef idx="3">
+            <a:schemeClr val="accent1"/>
+          </a:fillRef>
+          <a:effectRef idx="2">
+            <a:schemeClr val="accent1"/>
+          </a:effectRef>
+          <a:fontRef idx="minor">
+            <a:schemeClr val="lt1"/>
+          </a:fontRef>
+        </p:style>
+        <p:txBody>
+          <a:bodyPr rtlCol="0" anchor="ctr"/>
+          <a:lstStyle/>
+          <a:p>
+            <a:pPr algn="ctr"/>
+          </a:p>
+        </p:txBody>
+      </p:sp>
+      <p:sp>
+        <p:nvSpPr>
+          <p:cNvPr id="11" name="TextBox 10"/>
+          <p:cNvSpPr txBox="1"/>
+          <p:nvPr/>
+        </p:nvSpPr>
+        <p:spPr>
+          <a:xfrm>
+            <a:off x="6858000" y="2240280"/>
+            <a:ext cx="4389120" cy="365760"/>
+          </a:xfrm>
+          <a:prstGeom prst="rect">
+            <a:avLst/>
+          </a:prstGeom>
+          <a:noFill/>
+        </p:spPr>
+        <p:txBody>
+          <a:bodyPr wrap="square" anchor="t">
+            <a:spAutoFit/>
+          </a:bodyPr>
+          <a:lstStyle/>
+          <a:p>
+            <a:pPr algn="l">
+              <a:lnSpc>
+                <a:spcPct val="115000"/>
+              </a:lnSpc>
+            </a:pPr>
+            <a:r>
+              <a:rPr sz="1300" b="1">
+                <a:solidFill>
+                  <a:srgbClr val="34D399"/>
+                </a:solidFill>
+                <a:latin typeface="Malgun Gothic"/>
+              </a:rPr>
+              <a:t>AFTER</a:t>
+            </a:r>
+          </a:p>
+        </p:txBody>
+      </p:sp>
+      <p:sp>
+        <p:nvSpPr>
+          <p:cNvPr id="12" name="TextBox 11"/>
+          <p:cNvSpPr txBox="1"/>
+          <p:nvPr/>
+        </p:nvSpPr>
+        <p:spPr>
+          <a:xfrm>
+            <a:off x="6858000" y="2606040"/>
+            <a:ext cx="4389120" cy="457200"/>
+          </a:xfrm>
+          <a:prstGeom prst="rect">
+            <a:avLst/>
+          </a:prstGeom>
+          <a:noFill/>
+        </p:spPr>
+        <p:txBody>
+          <a:bodyPr wrap="square" anchor="t">
+            <a:spAutoFit/>
+          </a:bodyPr>
+          <a:lstStyle/>
+          <a:p>
+            <a:pPr algn="l">
+              <a:lnSpc>
+                <a:spcPct val="115000"/>
+              </a:lnSpc>
+            </a:pPr>
+            <a:r>
+              <a:rPr sz="1800" b="1">
+                <a:solidFill>
+                  <a:srgbClr val="FFFFFF"/>
+                </a:solidFill>
+                <a:latin typeface="Malgun Gothic"/>
+              </a:rPr>
+              <a:t>Supabase (PostgreSQL)</a:t>
+            </a:r>
+          </a:p>
+        </p:txBody>
+      </p:sp>
+      <p:sp>
+        <p:nvSpPr>
+          <p:cNvPr id="13" name="TextBox 12"/>
+          <p:cNvSpPr txBox="1"/>
+          <p:nvPr/>
+        </p:nvSpPr>
+        <p:spPr>
+          <a:xfrm>
+            <a:off x="6858000" y="3154680"/>
+            <a:ext cx="4389120" cy="2011680"/>
+          </a:xfrm>
+          <a:prstGeom prst="rect">
+            <a:avLst/>
+          </a:prstGeom>
+          <a:noFill/>
+        </p:spPr>
+        <p:txBody>
+          <a:bodyPr wrap="square">
+            <a:spAutoFit/>
+          </a:bodyPr>
+          <a:lstStyle/>
+          <a:p>
+            <a:pPr>
+              <a:lnSpc>
+                <a:spcPct val="120000"/>
+              </a:lnSpc>
+              <a:spcAft>
+                <a:spcPts val="1000"/>
+              </a:spcAft>
+            </a:pPr>
+            <a:r>
+              <a:rPr sz="1400" b="0">
+                <a:solidFill>
+                  <a:srgbClr val="E8F6F1"/>
+                </a:solidFill>
+                <a:latin typeface="Malgun Gothic"/>
+              </a:rPr>
+              <a:t>•  Supabase Auth로 인증 위임 (평문 비밀번호 제거)</a:t>
+            </a:r>
+          </a:p>
+          <a:p>
+            <a:pPr>
+              <a:lnSpc>
+                <a:spcPct val="120000"/>
+              </a:lnSpc>
+              <a:spcAft>
+                <a:spcPts val="1000"/>
+              </a:spcAft>
+            </a:pPr>
+            <a:r>
+              <a:rPr sz="1400" b="0">
+                <a:solidFill>
+                  <a:srgbClr val="E8F6F1"/>
+                </a:solidFill>
+                <a:latin typeface="Malgun Gothic"/>
+              </a:rPr>
+              <a:t>•  profiles / categories / expenses 3개 테이블 설계</a:t>
+            </a:r>
+          </a:p>
+          <a:p>
+            <a:pPr>
+              <a:lnSpc>
+                <a:spcPct val="120000"/>
+              </a:lnSpc>
+              <a:spcAft>
+                <a:spcPts val="1000"/>
+              </a:spcAft>
+            </a:pPr>
+            <a:r>
+              <a:rPr sz="1400" b="0">
+                <a:solidFill>
+                  <a:srgbClr val="E8F6F1"/>
+                </a:solidFill>
+                <a:latin typeface="Malgun Gothic"/>
+              </a:rPr>
+              <a:t>•  Row Level Security로 행 단위 접근 제어</a:t>
+            </a:r>
+          </a:p>
+        </p:txBody>
+      </p:sp>
+      <p:sp>
+        <p:nvSpPr>
+          <p:cNvPr id="14" name="Chevron 13"/>
+          <p:cNvSpPr/>
+          <p:nvPr/>
+        </p:nvSpPr>
+        <p:spPr>
+          <a:xfrm>
+            <a:off x="5715000" y="3291840"/>
+            <a:ext cx="731520" cy="548640"/>
+          </a:xfrm>
+          <a:prstGeom prst="chevron">
+            <a:avLst/>
+          </a:prstGeom>
+          <a:solidFill>
+            <a:srgbClr val="34D399"/>
+          </a:solidFill>
+          <a:ln>
+            <a:noFill/>
+          </a:ln>
+        </p:spPr>
+        <p:style>
+          <a:lnRef idx="1">
+            <a:schemeClr val="accent1"/>
+          </a:lnRef>
+          <a:fillRef idx="3">
+            <a:schemeClr val="accent1"/>
+          </a:fillRef>
+          <a:effectRef idx="2">
+            <a:schemeClr val="accent1"/>
+          </a:effectRef>
+          <a:fontRef idx="minor">
+            <a:schemeClr val="lt1"/>
+          </a:fontRef>
+        </p:style>
+        <p:txBody>
+          <a:bodyPr rtlCol="0" anchor="ctr"/>
+          <a:lstStyle/>
+          <a:p>
+            <a:pPr algn="ctr"/>
+          </a:p>
+        </p:txBody>
+      </p:sp>
+      <p:sp>
+        <p:nvSpPr>
+          <p:cNvPr id="15" name="TextBox 14"/>
+          <p:cNvSpPr txBox="1"/>
+          <p:nvPr/>
+        </p:nvSpPr>
+        <p:spPr>
+          <a:xfrm>
+            <a:off x="457200" y="6446520"/>
+            <a:ext cx="7315200" cy="320040"/>
+          </a:xfrm>
+          <a:prstGeom prst="rect">
+            <a:avLst/>
+          </a:prstGeom>
+          <a:noFill/>
+        </p:spPr>
+        <p:txBody>
+          <a:bodyPr wrap="square" anchor="t">
+            <a:spAutoFit/>
+          </a:bodyPr>
+          <a:lstStyle/>
+          <a:p>
+            <a:pPr algn="l">
+              <a:lnSpc>
+                <a:spcPct val="115000"/>
+              </a:lnSpc>
+            </a:pPr>
+            <a:r>
               <a:rPr sz="1000" b="0">
                 <a:solidFill>
                   <a:srgbClr val="6E8880"/>
@@ -9418,7 +9409,7 @@
       </p:sp>
       <p:sp>
         <p:nvSpPr>
-          <p:cNvPr id="8" name="TextBox 7"/>
+          <p:cNvPr id="16" name="TextBox 15"/>
           <p:cNvSpPr txBox="1"/>
           <p:nvPr/>
         </p:nvSpPr>
@@ -9559,7 +9550,7 @@
                 </a:solidFill>
                 <a:latin typeface="Malgun Gothic"/>
               </a:rPr>
-              <a:t>TECH EVOLUTION</a:t>
+              <a:t>SECURITY</a:t>
             </a:r>
           </a:p>
         </p:txBody>
@@ -9598,7 +9589,7 @@
                 </a:solidFill>
                 <a:latin typeface="Malgun Gothic"/>
               </a:rPr>
-              <a:t>localStorage → Supabase</a:t>
+              <a:t>보안 &amp; 데이터 무결성</a:t>
             </a:r>
           </a:p>
         </p:txBody>
@@ -9649,47 +9640,164 @@
       </p:sp>
       <p:sp>
         <p:nvSpPr>
-          <p:cNvPr id="6" name="Rectangle 5"/>
-          <p:cNvSpPr/>
-          <p:nvPr/>
-        </p:nvSpPr>
-        <p:spPr>
-          <a:xfrm>
-            <a:off x="640080" y="2011680"/>
-            <a:ext cx="4937760" cy="3291840"/>
-          </a:xfrm>
-          <a:prstGeom prst="rect">
-            <a:avLst/>
-          </a:prstGeom>
-          <a:solidFill>
-            <a:srgbClr val="FFFFFF"/>
-          </a:solidFill>
-          <a:ln w="12700">
-            <a:solidFill>
-              <a:srgbClr val="DCEEE7"/>
-            </a:solidFill>
-          </a:ln>
-          <a:effectLst/>
-        </p:spPr>
-        <p:style>
-          <a:lnRef idx="1">
-            <a:schemeClr val="accent1"/>
-          </a:lnRef>
-          <a:fillRef idx="3">
-            <a:schemeClr val="accent1"/>
-          </a:fillRef>
-          <a:effectRef idx="2">
-            <a:schemeClr val="accent1"/>
-          </a:effectRef>
-          <a:fontRef idx="minor">
-            <a:schemeClr val="lt1"/>
-          </a:fontRef>
-        </p:style>
-        <p:txBody>
-          <a:bodyPr rtlCol="0" anchor="ctr"/>
-          <a:lstStyle/>
-          <a:p>
-            <a:pPr algn="ctr"/>
+          <p:cNvPr id="6" name="TextBox 5"/>
+          <p:cNvSpPr txBox="1"/>
+          <p:nvPr/>
+        </p:nvSpPr>
+        <p:spPr>
+          <a:xfrm>
+            <a:off x="640080" y="1828800"/>
+            <a:ext cx="10789920" cy="4572000"/>
+          </a:xfrm>
+          <a:prstGeom prst="rect">
+            <a:avLst/>
+          </a:prstGeom>
+          <a:noFill/>
+        </p:spPr>
+        <p:txBody>
+          <a:bodyPr wrap="square">
+            <a:spAutoFit/>
+          </a:bodyPr>
+          <a:lstStyle/>
+          <a:p>
+            <a:pPr>
+              <a:lnSpc>
+                <a:spcPct val="120000"/>
+              </a:lnSpc>
+              <a:spcAft>
+                <a:spcPts val="1000"/>
+              </a:spcAft>
+            </a:pPr>
+            <a:r>
+              <a:rPr sz="1600" b="0">
+                <a:solidFill>
+                  <a:srgbClr val="1F2E2A"/>
+                </a:solidFill>
+                <a:latin typeface="Malgun Gothic"/>
+              </a:rPr>
+              <a:t>•  Row Level Security (RLS)</a:t>
+            </a:r>
+          </a:p>
+          <a:p>
+            <a:pPr>
+              <a:spcAft>
+                <a:spcPts val="1000"/>
+              </a:spcAft>
+            </a:pPr>
+            <a:r>
+              <a:rPr sz="1300">
+                <a:solidFill>
+                  <a:srgbClr val="6E8880"/>
+                </a:solidFill>
+                <a:latin typeface="Malgun Gothic"/>
+              </a:rPr>
+              <a:t>     고객은 본인 소유 데이터(profiles/expenses)만 조회·수정 가능, 관리자는 role 기반으로 전체 접근</a:t>
+            </a:r>
+          </a:p>
+          <a:p>
+            <a:pPr>
+              <a:lnSpc>
+                <a:spcPct val="120000"/>
+              </a:lnSpc>
+              <a:spcAft>
+                <a:spcPts val="1000"/>
+              </a:spcAft>
+            </a:pPr>
+            <a:r>
+              <a:rPr sz="1600" b="0">
+                <a:solidFill>
+                  <a:srgbClr val="1F2E2A"/>
+                </a:solidFill>
+                <a:latin typeface="Malgun Gothic"/>
+              </a:rPr>
+              <a:t>•  재귀 없는 관리자 판별</a:t>
+            </a:r>
+          </a:p>
+          <a:p>
+            <a:pPr>
+              <a:spcAft>
+                <a:spcPts val="1000"/>
+              </a:spcAft>
+            </a:pPr>
+            <a:r>
+              <a:rPr sz="1300">
+                <a:solidFill>
+                  <a:srgbClr val="6E8880"/>
+                </a:solidFill>
+                <a:latin typeface="Malgun Gothic"/>
+              </a:rPr>
+              <a:t>     profiles.role을 정책 안에서 직접 조회하면 무한 재귀가 발생 → SECURITY DEFINER 함수(is_admin())로 우회</a:t>
+            </a:r>
+          </a:p>
+          <a:p>
+            <a:pPr>
+              <a:lnSpc>
+                <a:spcPct val="120000"/>
+              </a:lnSpc>
+              <a:spcAft>
+                <a:spcPts val="1000"/>
+              </a:spcAft>
+            </a:pPr>
+            <a:r>
+              <a:rPr sz="1600" b="0">
+                <a:solidFill>
+                  <a:srgbClr val="1F2E2A"/>
+                </a:solidFill>
+                <a:latin typeface="Malgun Gothic"/>
+              </a:rPr>
+              <a:t>•  최소 권한 원칙</a:t>
+            </a:r>
+          </a:p>
+          <a:p>
+            <a:pPr>
+              <a:spcAft>
+                <a:spcPts val="1000"/>
+              </a:spcAft>
+            </a:pPr>
+            <a:r>
+              <a:rPr sz="1300">
+                <a:solidFill>
+                  <a:srgbClr val="6E8880"/>
+                </a:solidFill>
+                <a:latin typeface="Malgun Gothic"/>
+              </a:rPr>
+              <a:t>     Supabase Advisor로 내부 함수의 불필요한 RPC 노출을 점검 → anon/authenticated의 불필요한 EXECUTE 권한 회수</a:t>
+            </a:r>
+          </a:p>
+          <a:p>
+            <a:pPr>
+              <a:lnSpc>
+                <a:spcPct val="120000"/>
+              </a:lnSpc>
+              <a:spcAft>
+                <a:spcPts val="1000"/>
+              </a:spcAft>
+            </a:pPr>
+            <a:r>
+              <a:rPr sz="1600" b="0">
+                <a:solidFill>
+                  <a:srgbClr val="1F2E2A"/>
+                </a:solidFill>
+                <a:latin typeface="Malgun Gothic"/>
+              </a:rPr>
+              <a:t>•  인증 위임</a:t>
+            </a:r>
+          </a:p>
+          <a:p>
+            <a:pPr>
+              <a:spcAft>
+                <a:spcPts val="1000"/>
+              </a:spcAft>
+            </a:pPr>
+            <a:r>
+              <a:rPr sz="1300">
+                <a:solidFill>
+                  <a:srgbClr val="6E8880"/>
+                </a:solidFill>
+                <a:latin typeface="Malgun Gothic"/>
+              </a:rPr>
+              <a:t>     비밀번호 저장·검증을 직접 구현하지 않고 Supabase Auth에 위임해 자체 구현 리스크 제거</a:t>
+            </a:r>
           </a:p>
         </p:txBody>
       </p:sp>
@@ -9701,8 +9809,8 @@
         </p:nvSpPr>
         <p:spPr>
           <a:xfrm>
-            <a:off x="914400" y="2240280"/>
-            <a:ext cx="4389120" cy="365760"/>
+            <a:off x="457200" y="6446520"/>
+            <a:ext cx="7315200" cy="320040"/>
           </a:xfrm>
           <a:prstGeom prst="rect">
             <a:avLst/>
@@ -9721,13 +9829,13 @@
               </a:lnSpc>
             </a:pPr>
             <a:r>
-              <a:rPr sz="1300" b="1">
+              <a:rPr sz="1000" b="0">
                 <a:solidFill>
                   <a:srgbClr val="6E8880"/>
                 </a:solidFill>
                 <a:latin typeface="Malgun Gothic"/>
               </a:rPr>
-              <a:t>BEFORE</a:t>
+              <a:t>EXPENSE TRACKER · PORTFOLIO</a:t>
             </a:r>
           </a:p>
         </p:txBody>
@@ -9735,409 +9843,6 @@
       <p:sp>
         <p:nvSpPr>
           <p:cNvPr id="8" name="TextBox 7"/>
-          <p:cNvSpPr txBox="1"/>
-          <p:nvPr/>
-        </p:nvSpPr>
-        <p:spPr>
-          <a:xfrm>
-            <a:off x="914400" y="2606040"/>
-            <a:ext cx="4389120" cy="457200"/>
-          </a:xfrm>
-          <a:prstGeom prst="rect">
-            <a:avLst/>
-          </a:prstGeom>
-          <a:noFill/>
-        </p:spPr>
-        <p:txBody>
-          <a:bodyPr wrap="square" anchor="t">
-            <a:spAutoFit/>
-          </a:bodyPr>
-          <a:lstStyle/>
-          <a:p>
-            <a:pPr algn="l">
-              <a:lnSpc>
-                <a:spcPct val="115000"/>
-              </a:lnSpc>
-            </a:pPr>
-            <a:r>
-              <a:rPr sz="1800" b="1">
-                <a:solidFill>
-                  <a:srgbClr val="1F2E2A"/>
-                </a:solidFill>
-                <a:latin typeface="Malgun Gothic"/>
-              </a:rPr>
-              <a:t>정적 사이트 + localStorage</a:t>
-            </a:r>
-          </a:p>
-        </p:txBody>
-      </p:sp>
-      <p:sp>
-        <p:nvSpPr>
-          <p:cNvPr id="9" name="TextBox 8"/>
-          <p:cNvSpPr txBox="1"/>
-          <p:nvPr/>
-        </p:nvSpPr>
-        <p:spPr>
-          <a:xfrm>
-            <a:off x="914400" y="3154680"/>
-            <a:ext cx="4389120" cy="2011680"/>
-          </a:xfrm>
-          <a:prstGeom prst="rect">
-            <a:avLst/>
-          </a:prstGeom>
-          <a:noFill/>
-        </p:spPr>
-        <p:txBody>
-          <a:bodyPr wrap="square">
-            <a:spAutoFit/>
-          </a:bodyPr>
-          <a:lstStyle/>
-          <a:p>
-            <a:pPr>
-              <a:lnSpc>
-                <a:spcPct val="120000"/>
-              </a:lnSpc>
-              <a:spcAft>
-                <a:spcPts val="1000"/>
-              </a:spcAft>
-            </a:pPr>
-            <a:r>
-              <a:rPr sz="1400" b="0">
-                <a:solidFill>
-                  <a:srgbClr val="1F2E2A"/>
-                </a:solidFill>
-                <a:latin typeface="Malgun Gothic"/>
-              </a:rPr>
-              <a:t>•  백엔드 서버 없이 브라우저에 데이터 저장</a:t>
-            </a:r>
-          </a:p>
-          <a:p>
-            <a:pPr>
-              <a:lnSpc>
-                <a:spcPct val="120000"/>
-              </a:lnSpc>
-              <a:spcAft>
-                <a:spcPts val="1000"/>
-              </a:spcAft>
-            </a:pPr>
-            <a:r>
-              <a:rPr sz="1400" b="0">
-                <a:solidFill>
-                  <a:srgbClr val="1F2E2A"/>
-                </a:solidFill>
-                <a:latin typeface="Malgun Gothic"/>
-              </a:rPr>
-              <a:t>•  비밀번호까지 평문으로 저장 (데모 목적)</a:t>
-            </a:r>
-          </a:p>
-          <a:p>
-            <a:pPr>
-              <a:lnSpc>
-                <a:spcPct val="120000"/>
-              </a:lnSpc>
-              <a:spcAft>
-                <a:spcPts val="1000"/>
-              </a:spcAft>
-            </a:pPr>
-            <a:r>
-              <a:rPr sz="1400" b="0">
-                <a:solidFill>
-                  <a:srgbClr val="1F2E2A"/>
-                </a:solidFill>
-                <a:latin typeface="Malgun Gothic"/>
-              </a:rPr>
-              <a:t>•  브라우저·기기 간 데이터 공유 불가</a:t>
-            </a:r>
-          </a:p>
-        </p:txBody>
-      </p:sp>
-      <p:sp>
-        <p:nvSpPr>
-          <p:cNvPr id="10" name="Rectangle 9"/>
-          <p:cNvSpPr/>
-          <p:nvPr/>
-        </p:nvSpPr>
-        <p:spPr>
-          <a:xfrm>
-            <a:off x="6583680" y="2011680"/>
-            <a:ext cx="4937760" cy="3291840"/>
-          </a:xfrm>
-          <a:prstGeom prst="rect">
-            <a:avLst/>
-          </a:prstGeom>
-          <a:solidFill>
-            <a:srgbClr val="0F766E"/>
-          </a:solidFill>
-          <a:ln>
-            <a:noFill/>
-          </a:ln>
-          <a:effectLst/>
-        </p:spPr>
-        <p:style>
-          <a:lnRef idx="1">
-            <a:schemeClr val="accent1"/>
-          </a:lnRef>
-          <a:fillRef idx="3">
-            <a:schemeClr val="accent1"/>
-          </a:fillRef>
-          <a:effectRef idx="2">
-            <a:schemeClr val="accent1"/>
-          </a:effectRef>
-          <a:fontRef idx="minor">
-            <a:schemeClr val="lt1"/>
-          </a:fontRef>
-        </p:style>
-        <p:txBody>
-          <a:bodyPr rtlCol="0" anchor="ctr"/>
-          <a:lstStyle/>
-          <a:p>
-            <a:pPr algn="ctr"/>
-          </a:p>
-        </p:txBody>
-      </p:sp>
-      <p:sp>
-        <p:nvSpPr>
-          <p:cNvPr id="11" name="TextBox 10"/>
-          <p:cNvSpPr txBox="1"/>
-          <p:nvPr/>
-        </p:nvSpPr>
-        <p:spPr>
-          <a:xfrm>
-            <a:off x="6858000" y="2240280"/>
-            <a:ext cx="4389120" cy="365760"/>
-          </a:xfrm>
-          <a:prstGeom prst="rect">
-            <a:avLst/>
-          </a:prstGeom>
-          <a:noFill/>
-        </p:spPr>
-        <p:txBody>
-          <a:bodyPr wrap="square" anchor="t">
-            <a:spAutoFit/>
-          </a:bodyPr>
-          <a:lstStyle/>
-          <a:p>
-            <a:pPr algn="l">
-              <a:lnSpc>
-                <a:spcPct val="115000"/>
-              </a:lnSpc>
-            </a:pPr>
-            <a:r>
-              <a:rPr sz="1300" b="1">
-                <a:solidFill>
-                  <a:srgbClr val="34D399"/>
-                </a:solidFill>
-                <a:latin typeface="Malgun Gothic"/>
-              </a:rPr>
-              <a:t>AFTER</a:t>
-            </a:r>
-          </a:p>
-        </p:txBody>
-      </p:sp>
-      <p:sp>
-        <p:nvSpPr>
-          <p:cNvPr id="12" name="TextBox 11"/>
-          <p:cNvSpPr txBox="1"/>
-          <p:nvPr/>
-        </p:nvSpPr>
-        <p:spPr>
-          <a:xfrm>
-            <a:off x="6858000" y="2606040"/>
-            <a:ext cx="4389120" cy="457200"/>
-          </a:xfrm>
-          <a:prstGeom prst="rect">
-            <a:avLst/>
-          </a:prstGeom>
-          <a:noFill/>
-        </p:spPr>
-        <p:txBody>
-          <a:bodyPr wrap="square" anchor="t">
-            <a:spAutoFit/>
-          </a:bodyPr>
-          <a:lstStyle/>
-          <a:p>
-            <a:pPr algn="l">
-              <a:lnSpc>
-                <a:spcPct val="115000"/>
-              </a:lnSpc>
-            </a:pPr>
-            <a:r>
-              <a:rPr sz="1800" b="1">
-                <a:solidFill>
-                  <a:srgbClr val="FFFFFF"/>
-                </a:solidFill>
-                <a:latin typeface="Malgun Gothic"/>
-              </a:rPr>
-              <a:t>Supabase (PostgreSQL)</a:t>
-            </a:r>
-          </a:p>
-        </p:txBody>
-      </p:sp>
-      <p:sp>
-        <p:nvSpPr>
-          <p:cNvPr id="13" name="TextBox 12"/>
-          <p:cNvSpPr txBox="1"/>
-          <p:nvPr/>
-        </p:nvSpPr>
-        <p:spPr>
-          <a:xfrm>
-            <a:off x="6858000" y="3154680"/>
-            <a:ext cx="4389120" cy="2011680"/>
-          </a:xfrm>
-          <a:prstGeom prst="rect">
-            <a:avLst/>
-          </a:prstGeom>
-          <a:noFill/>
-        </p:spPr>
-        <p:txBody>
-          <a:bodyPr wrap="square">
-            <a:spAutoFit/>
-          </a:bodyPr>
-          <a:lstStyle/>
-          <a:p>
-            <a:pPr>
-              <a:lnSpc>
-                <a:spcPct val="120000"/>
-              </a:lnSpc>
-              <a:spcAft>
-                <a:spcPts val="1000"/>
-              </a:spcAft>
-            </a:pPr>
-            <a:r>
-              <a:rPr sz="1400" b="0">
-                <a:solidFill>
-                  <a:srgbClr val="E8F6F1"/>
-                </a:solidFill>
-                <a:latin typeface="Malgun Gothic"/>
-              </a:rPr>
-              <a:t>•  Supabase Auth로 인증 위임 (평문 비밀번호 제거)</a:t>
-            </a:r>
-          </a:p>
-          <a:p>
-            <a:pPr>
-              <a:lnSpc>
-                <a:spcPct val="120000"/>
-              </a:lnSpc>
-              <a:spcAft>
-                <a:spcPts val="1000"/>
-              </a:spcAft>
-            </a:pPr>
-            <a:r>
-              <a:rPr sz="1400" b="0">
-                <a:solidFill>
-                  <a:srgbClr val="E8F6F1"/>
-                </a:solidFill>
-                <a:latin typeface="Malgun Gothic"/>
-              </a:rPr>
-              <a:t>•  profiles / categories / expenses 3개 테이블 설계</a:t>
-            </a:r>
-          </a:p>
-          <a:p>
-            <a:pPr>
-              <a:lnSpc>
-                <a:spcPct val="120000"/>
-              </a:lnSpc>
-              <a:spcAft>
-                <a:spcPts val="1000"/>
-              </a:spcAft>
-            </a:pPr>
-            <a:r>
-              <a:rPr sz="1400" b="0">
-                <a:solidFill>
-                  <a:srgbClr val="E8F6F1"/>
-                </a:solidFill>
-                <a:latin typeface="Malgun Gothic"/>
-              </a:rPr>
-              <a:t>•  Row Level Security로 행 단위 접근 제어</a:t>
-            </a:r>
-          </a:p>
-        </p:txBody>
-      </p:sp>
-      <p:sp>
-        <p:nvSpPr>
-          <p:cNvPr id="14" name="Chevron 13"/>
-          <p:cNvSpPr/>
-          <p:nvPr/>
-        </p:nvSpPr>
-        <p:spPr>
-          <a:xfrm>
-            <a:off x="5715000" y="3291840"/>
-            <a:ext cx="731520" cy="548640"/>
-          </a:xfrm>
-          <a:prstGeom prst="chevron">
-            <a:avLst/>
-          </a:prstGeom>
-          <a:solidFill>
-            <a:srgbClr val="34D399"/>
-          </a:solidFill>
-          <a:ln>
-            <a:noFill/>
-          </a:ln>
-        </p:spPr>
-        <p:style>
-          <a:lnRef idx="1">
-            <a:schemeClr val="accent1"/>
-          </a:lnRef>
-          <a:fillRef idx="3">
-            <a:schemeClr val="accent1"/>
-          </a:fillRef>
-          <a:effectRef idx="2">
-            <a:schemeClr val="accent1"/>
-          </a:effectRef>
-          <a:fontRef idx="minor">
-            <a:schemeClr val="lt1"/>
-          </a:fontRef>
-        </p:style>
-        <p:txBody>
-          <a:bodyPr rtlCol="0" anchor="ctr"/>
-          <a:lstStyle/>
-          <a:p>
-            <a:pPr algn="ctr"/>
-          </a:p>
-        </p:txBody>
-      </p:sp>
-      <p:sp>
-        <p:nvSpPr>
-          <p:cNvPr id="15" name="TextBox 14"/>
-          <p:cNvSpPr txBox="1"/>
-          <p:nvPr/>
-        </p:nvSpPr>
-        <p:spPr>
-          <a:xfrm>
-            <a:off x="457200" y="6446520"/>
-            <a:ext cx="7315200" cy="320040"/>
-          </a:xfrm>
-          <a:prstGeom prst="rect">
-            <a:avLst/>
-          </a:prstGeom>
-          <a:noFill/>
-        </p:spPr>
-        <p:txBody>
-          <a:bodyPr wrap="square" anchor="t">
-            <a:spAutoFit/>
-          </a:bodyPr>
-          <a:lstStyle/>
-          <a:p>
-            <a:pPr algn="l">
-              <a:lnSpc>
-                <a:spcPct val="115000"/>
-              </a:lnSpc>
-            </a:pPr>
-            <a:r>
-              <a:rPr sz="1000" b="0">
-                <a:solidFill>
-                  <a:srgbClr val="6E8880"/>
-                </a:solidFill>
-                <a:latin typeface="Malgun Gothic"/>
-              </a:rPr>
-              <a:t>EXPENSE TRACKER · PORTFOLIO</a:t>
-            </a:r>
-          </a:p>
-        </p:txBody>
-      </p:sp>
-      <p:sp>
-        <p:nvSpPr>
-          <p:cNvPr id="16" name="TextBox 15"/>
           <p:cNvSpPr txBox="1"/>
           <p:nvPr/>
         </p:nvSpPr>

--- a/portfolio/expense-tracker-portfolio.pptx
+++ b/portfolio/expense-tracker-portfolio.pptx
@@ -5239,7 +5239,7 @@
                 </a:solidFill>
                 <a:latin typeface="Malgun Gothic"/>
               </a:rPr>
-              <a:t>SCREENSHOTS</a:t>
+              <a:t>OVERVIEW</a:t>
             </a:r>
           </a:p>
         </p:txBody>
@@ -5278,7 +5278,7 @@
                 </a:solidFill>
                 <a:latin typeface="Malgun Gothic"/>
               </a:rPr>
-              <a:t>실제 화면</a:t>
+              <a:t>프로젝트 개요</a:t>
             </a:r>
           </a:p>
         </p:txBody>
@@ -5336,7 +5336,7 @@
         <p:spPr>
           <a:xfrm>
             <a:off x="640080" y="1828800"/>
-            <a:ext cx="5394960" cy="274320"/>
+            <a:ext cx="10789920" cy="731520"/>
           </a:xfrm>
           <a:prstGeom prst="rect">
             <a:avLst/>
@@ -5355,56 +5355,117 @@
               </a:lnSpc>
             </a:pPr>
             <a:r>
-              <a:rPr sz="1300" b="1">
-                <a:solidFill>
-                  <a:srgbClr val="0F766E"/>
-                </a:solidFill>
-                <a:latin typeface="Malgun Gothic"/>
-              </a:rPr>
-              <a:t>고객 대시보드</a:t>
-            </a:r>
-          </a:p>
-        </p:txBody>
-      </p:sp>
-      <p:pic>
-        <p:nvPicPr>
-          <p:cNvPr id="7" name="Picture 6" descr="dashboard.png"/>
-          <p:cNvPicPr>
-            <a:picLocks noChangeAspect="1"/>
-          </p:cNvPicPr>
-          <p:nvPr/>
-        </p:nvPicPr>
-        <p:blipFill>
-          <a:blip r:embed="rId2"/>
-          <a:stretch>
-            <a:fillRect/>
-          </a:stretch>
-        </p:blipFill>
-        <p:spPr>
-          <a:xfrm>
-            <a:off x="1965960" y="2103120"/>
-            <a:ext cx="2743200" cy="1828800"/>
-          </a:xfrm>
-          <a:prstGeom prst="rect">
-            <a:avLst/>
-          </a:prstGeom>
+              <a:rPr sz="1700" b="0">
+                <a:solidFill>
+                  <a:srgbClr val="4B6259"/>
+                </a:solidFill>
+                <a:latin typeface="Malgun Gothic"/>
+              </a:rPr>
+              <a:t>개인의 지출을 손쉽게 기록하고, 카테고리별·기간별 통계로 소비 패턴을 파악할 수 있는 지출 관리 서비스</a:t>
+            </a:r>
+          </a:p>
+        </p:txBody>
+      </p:sp>
+      <p:sp>
+        <p:nvSpPr>
+          <p:cNvPr id="7" name="Rectangle 6"/>
+          <p:cNvSpPr/>
+          <p:nvPr/>
+        </p:nvSpPr>
+        <p:spPr>
+          <a:xfrm>
+            <a:off x="640080" y="2834640"/>
+            <a:ext cx="3520440" cy="3108960"/>
+          </a:xfrm>
+          <a:prstGeom prst="rect">
+            <a:avLst/>
+          </a:prstGeom>
+          <a:solidFill>
+            <a:srgbClr val="FFFFFF"/>
+          </a:solidFill>
           <a:ln w="12700">
             <a:solidFill>
               <a:srgbClr val="DCEEE7"/>
             </a:solidFill>
           </a:ln>
-        </p:spPr>
-      </p:pic>
-      <p:sp>
-        <p:nvSpPr>
-          <p:cNvPr id="8" name="TextBox 7"/>
+          <a:effectLst/>
+        </p:spPr>
+        <p:style>
+          <a:lnRef idx="1">
+            <a:schemeClr val="accent1"/>
+          </a:lnRef>
+          <a:fillRef idx="3">
+            <a:schemeClr val="accent1"/>
+          </a:fillRef>
+          <a:effectRef idx="2">
+            <a:schemeClr val="accent1"/>
+          </a:effectRef>
+          <a:fontRef idx="minor">
+            <a:schemeClr val="lt1"/>
+          </a:fontRef>
+        </p:style>
+        <p:txBody>
+          <a:bodyPr rtlCol="0" anchor="ctr"/>
+          <a:lstStyle/>
+          <a:p>
+            <a:pPr algn="ctr"/>
+          </a:p>
+        </p:txBody>
+      </p:sp>
+      <p:sp>
+        <p:nvSpPr>
+          <p:cNvPr id="8" name="Rectangle 7"/>
+          <p:cNvSpPr/>
+          <p:nvPr/>
+        </p:nvSpPr>
+        <p:spPr>
+          <a:xfrm>
+            <a:off x="640080" y="2834640"/>
+            <a:ext cx="3520440" cy="109728"/>
+          </a:xfrm>
+          <a:prstGeom prst="rect">
+            <a:avLst/>
+          </a:prstGeom>
+          <a:solidFill>
+            <a:srgbClr val="34D399"/>
+          </a:solidFill>
+          <a:ln>
+            <a:noFill/>
+          </a:ln>
+          <a:effectLst/>
+        </p:spPr>
+        <p:style>
+          <a:lnRef idx="1">
+            <a:schemeClr val="accent1"/>
+          </a:lnRef>
+          <a:fillRef idx="3">
+            <a:schemeClr val="accent1"/>
+          </a:fillRef>
+          <a:effectRef idx="2">
+            <a:schemeClr val="accent1"/>
+          </a:effectRef>
+          <a:fontRef idx="minor">
+            <a:schemeClr val="lt1"/>
+          </a:fontRef>
+        </p:style>
+        <p:txBody>
+          <a:bodyPr rtlCol="0" anchor="ctr"/>
+          <a:lstStyle/>
+          <a:p>
+            <a:pPr algn="ctr"/>
+          </a:p>
+        </p:txBody>
+      </p:sp>
+      <p:sp>
+        <p:nvSpPr>
+          <p:cNvPr id="9" name="TextBox 8"/>
           <p:cNvSpPr txBox="1"/>
           <p:nvPr/>
         </p:nvSpPr>
         <p:spPr>
           <a:xfrm>
-            <a:off x="6217920" y="1828800"/>
-            <a:ext cx="5394960" cy="274320"/>
+            <a:off x="914400" y="3200400"/>
+            <a:ext cx="2971800" cy="457200"/>
           </a:xfrm>
           <a:prstGeom prst="rect">
             <a:avLst/>
@@ -5423,56 +5484,156 @@
               </a:lnSpc>
             </a:pPr>
             <a:r>
-              <a:rPr sz="1300" b="1">
+              <a:rPr sz="1800" b="1">
                 <a:solidFill>
                   <a:srgbClr val="0F766E"/>
                 </a:solidFill>
                 <a:latin typeface="Malgun Gothic"/>
               </a:rPr>
-              <a:t>지출 내역 (페이지네이션)</a:t>
-            </a:r>
-          </a:p>
-        </p:txBody>
-      </p:sp>
-      <p:pic>
-        <p:nvPicPr>
-          <p:cNvPr id="9" name="Picture 8" descr="expenses.png"/>
-          <p:cNvPicPr>
-            <a:picLocks noChangeAspect="1"/>
-          </p:cNvPicPr>
-          <p:nvPr/>
-        </p:nvPicPr>
-        <p:blipFill>
-          <a:blip r:embed="rId3"/>
-          <a:stretch>
-            <a:fillRect/>
-          </a:stretch>
-        </p:blipFill>
-        <p:spPr>
-          <a:xfrm>
-            <a:off x="7715093" y="2103120"/>
-            <a:ext cx="2400612" cy="1828800"/>
-          </a:xfrm>
-          <a:prstGeom prst="rect">
-            <a:avLst/>
-          </a:prstGeom>
+              <a:t>문제 정의</a:t>
+            </a:r>
+          </a:p>
+        </p:txBody>
+      </p:sp>
+      <p:sp>
+        <p:nvSpPr>
+          <p:cNvPr id="10" name="TextBox 9"/>
+          <p:cNvSpPr txBox="1"/>
+          <p:nvPr/>
+        </p:nvSpPr>
+        <p:spPr>
+          <a:xfrm>
+            <a:off x="914400" y="3703320"/>
+            <a:ext cx="2971800" cy="2011680"/>
+          </a:xfrm>
+          <a:prstGeom prst="rect">
+            <a:avLst/>
+          </a:prstGeom>
+          <a:noFill/>
+        </p:spPr>
+        <p:txBody>
+          <a:bodyPr wrap="square" anchor="t">
+            <a:spAutoFit/>
+          </a:bodyPr>
+          <a:lstStyle/>
+          <a:p>
+            <a:pPr algn="l">
+              <a:lnSpc>
+                <a:spcPct val="115000"/>
+              </a:lnSpc>
+            </a:pPr>
+            <a:r>
+              <a:rPr sz="1400" b="0">
+                <a:solidFill>
+                  <a:srgbClr val="4B6259"/>
+                </a:solidFill>
+                <a:latin typeface="Malgun Gothic"/>
+              </a:rPr>
+              <a:t>지출을 기록해도 흩어진 데이터라 카테고리별·월별 흐름을 한눈에 파악하기 어려움</a:t>
+            </a:r>
+          </a:p>
+        </p:txBody>
+      </p:sp>
+      <p:sp>
+        <p:nvSpPr>
+          <p:cNvPr id="11" name="Rectangle 10"/>
+          <p:cNvSpPr/>
+          <p:nvPr/>
+        </p:nvSpPr>
+        <p:spPr>
+          <a:xfrm>
+            <a:off x="4343400" y="2834640"/>
+            <a:ext cx="3520440" cy="3108960"/>
+          </a:xfrm>
+          <a:prstGeom prst="rect">
+            <a:avLst/>
+          </a:prstGeom>
+          <a:solidFill>
+            <a:srgbClr val="FFFFFF"/>
+          </a:solidFill>
           <a:ln w="12700">
             <a:solidFill>
               <a:srgbClr val="DCEEE7"/>
             </a:solidFill>
           </a:ln>
-        </p:spPr>
-      </p:pic>
-      <p:sp>
-        <p:nvSpPr>
-          <p:cNvPr id="10" name="TextBox 9"/>
+          <a:effectLst/>
+        </p:spPr>
+        <p:style>
+          <a:lnRef idx="1">
+            <a:schemeClr val="accent1"/>
+          </a:lnRef>
+          <a:fillRef idx="3">
+            <a:schemeClr val="accent1"/>
+          </a:fillRef>
+          <a:effectRef idx="2">
+            <a:schemeClr val="accent1"/>
+          </a:effectRef>
+          <a:fontRef idx="minor">
+            <a:schemeClr val="lt1"/>
+          </a:fontRef>
+        </p:style>
+        <p:txBody>
+          <a:bodyPr rtlCol="0" anchor="ctr"/>
+          <a:lstStyle/>
+          <a:p>
+            <a:pPr algn="ctr"/>
+          </a:p>
+        </p:txBody>
+      </p:sp>
+      <p:sp>
+        <p:nvSpPr>
+          <p:cNvPr id="12" name="Rectangle 11"/>
+          <p:cNvSpPr/>
+          <p:nvPr/>
+        </p:nvSpPr>
+        <p:spPr>
+          <a:xfrm>
+            <a:off x="4343400" y="2834640"/>
+            <a:ext cx="3520440" cy="109728"/>
+          </a:xfrm>
+          <a:prstGeom prst="rect">
+            <a:avLst/>
+          </a:prstGeom>
+          <a:solidFill>
+            <a:srgbClr val="34D399"/>
+          </a:solidFill>
+          <a:ln>
+            <a:noFill/>
+          </a:ln>
+          <a:effectLst/>
+        </p:spPr>
+        <p:style>
+          <a:lnRef idx="1">
+            <a:schemeClr val="accent1"/>
+          </a:lnRef>
+          <a:fillRef idx="3">
+            <a:schemeClr val="accent1"/>
+          </a:fillRef>
+          <a:effectRef idx="2">
+            <a:schemeClr val="accent1"/>
+          </a:effectRef>
+          <a:fontRef idx="minor">
+            <a:schemeClr val="lt1"/>
+          </a:fontRef>
+        </p:style>
+        <p:txBody>
+          <a:bodyPr rtlCol="0" anchor="ctr"/>
+          <a:lstStyle/>
+          <a:p>
+            <a:pPr algn="ctr"/>
+          </a:p>
+        </p:txBody>
+      </p:sp>
+      <p:sp>
+        <p:nvSpPr>
+          <p:cNvPr id="13" name="TextBox 12"/>
           <p:cNvSpPr txBox="1"/>
           <p:nvPr/>
         </p:nvSpPr>
         <p:spPr>
           <a:xfrm>
-            <a:off x="640080" y="4114800"/>
-            <a:ext cx="5394960" cy="274320"/>
+            <a:off x="4617720" y="3200400"/>
+            <a:ext cx="2971800" cy="457200"/>
           </a:xfrm>
           <a:prstGeom prst="rect">
             <a:avLst/>
@@ -5491,56 +5652,156 @@
               </a:lnSpc>
             </a:pPr>
             <a:r>
-              <a:rPr sz="1300" b="1">
+              <a:rPr sz="1800" b="1">
                 <a:solidFill>
                   <a:srgbClr val="0F766E"/>
                 </a:solidFill>
                 <a:latin typeface="Malgun Gothic"/>
               </a:rPr>
-              <a:t>통계</a:t>
-            </a:r>
-          </a:p>
-        </p:txBody>
-      </p:sp>
-      <p:pic>
-        <p:nvPicPr>
-          <p:cNvPr id="11" name="Picture 10" descr="stats.png"/>
-          <p:cNvPicPr>
-            <a:picLocks noChangeAspect="1"/>
-          </p:cNvPicPr>
-          <p:nvPr/>
-        </p:nvPicPr>
-        <p:blipFill>
-          <a:blip r:embed="rId4"/>
-          <a:stretch>
-            <a:fillRect/>
-          </a:stretch>
-        </p:blipFill>
-        <p:spPr>
-          <a:xfrm>
-            <a:off x="1965960" y="4389120"/>
-            <a:ext cx="2743200" cy="1828800"/>
-          </a:xfrm>
-          <a:prstGeom prst="rect">
-            <a:avLst/>
-          </a:prstGeom>
+              <a:t>핵심 가치</a:t>
+            </a:r>
+          </a:p>
+        </p:txBody>
+      </p:sp>
+      <p:sp>
+        <p:nvSpPr>
+          <p:cNvPr id="14" name="TextBox 13"/>
+          <p:cNvSpPr txBox="1"/>
+          <p:nvPr/>
+        </p:nvSpPr>
+        <p:spPr>
+          <a:xfrm>
+            <a:off x="4617720" y="3703320"/>
+            <a:ext cx="2971800" cy="2011680"/>
+          </a:xfrm>
+          <a:prstGeom prst="rect">
+            <a:avLst/>
+          </a:prstGeom>
+          <a:noFill/>
+        </p:spPr>
+        <p:txBody>
+          <a:bodyPr wrap="square" anchor="t">
+            <a:spAutoFit/>
+          </a:bodyPr>
+          <a:lstStyle/>
+          <a:p>
+            <a:pPr algn="l">
+              <a:lnSpc>
+                <a:spcPct val="115000"/>
+              </a:lnSpc>
+            </a:pPr>
+            <a:r>
+              <a:rPr sz="1400" b="0">
+                <a:solidFill>
+                  <a:srgbClr val="4B6259"/>
+                </a:solidFill>
+                <a:latin typeface="Malgun Gothic"/>
+              </a:rPr>
+              <a:t>간편한 등록 흐름 + 시각적 통계(도넛/막대 차트)로 소비 패턴을 즉시 인지</a:t>
+            </a:r>
+          </a:p>
+        </p:txBody>
+      </p:sp>
+      <p:sp>
+        <p:nvSpPr>
+          <p:cNvPr id="15" name="Rectangle 14"/>
+          <p:cNvSpPr/>
+          <p:nvPr/>
+        </p:nvSpPr>
+        <p:spPr>
+          <a:xfrm>
+            <a:off x="8046720" y="2834640"/>
+            <a:ext cx="3520440" cy="3108960"/>
+          </a:xfrm>
+          <a:prstGeom prst="rect">
+            <a:avLst/>
+          </a:prstGeom>
+          <a:solidFill>
+            <a:srgbClr val="FFFFFF"/>
+          </a:solidFill>
           <a:ln w="12700">
             <a:solidFill>
               <a:srgbClr val="DCEEE7"/>
             </a:solidFill>
           </a:ln>
-        </p:spPr>
-      </p:pic>
-      <p:sp>
-        <p:nvSpPr>
-          <p:cNvPr id="12" name="TextBox 11"/>
+          <a:effectLst/>
+        </p:spPr>
+        <p:style>
+          <a:lnRef idx="1">
+            <a:schemeClr val="accent1"/>
+          </a:lnRef>
+          <a:fillRef idx="3">
+            <a:schemeClr val="accent1"/>
+          </a:fillRef>
+          <a:effectRef idx="2">
+            <a:schemeClr val="accent1"/>
+          </a:effectRef>
+          <a:fontRef idx="minor">
+            <a:schemeClr val="lt1"/>
+          </a:fontRef>
+        </p:style>
+        <p:txBody>
+          <a:bodyPr rtlCol="0" anchor="ctr"/>
+          <a:lstStyle/>
+          <a:p>
+            <a:pPr algn="ctr"/>
+          </a:p>
+        </p:txBody>
+      </p:sp>
+      <p:sp>
+        <p:nvSpPr>
+          <p:cNvPr id="16" name="Rectangle 15"/>
+          <p:cNvSpPr/>
+          <p:nvPr/>
+        </p:nvSpPr>
+        <p:spPr>
+          <a:xfrm>
+            <a:off x="8046720" y="2834640"/>
+            <a:ext cx="3520440" cy="109728"/>
+          </a:xfrm>
+          <a:prstGeom prst="rect">
+            <a:avLst/>
+          </a:prstGeom>
+          <a:solidFill>
+            <a:srgbClr val="34D399"/>
+          </a:solidFill>
+          <a:ln>
+            <a:noFill/>
+          </a:ln>
+          <a:effectLst/>
+        </p:spPr>
+        <p:style>
+          <a:lnRef idx="1">
+            <a:schemeClr val="accent1"/>
+          </a:lnRef>
+          <a:fillRef idx="3">
+            <a:schemeClr val="accent1"/>
+          </a:fillRef>
+          <a:effectRef idx="2">
+            <a:schemeClr val="accent1"/>
+          </a:effectRef>
+          <a:fontRef idx="minor">
+            <a:schemeClr val="lt1"/>
+          </a:fontRef>
+        </p:style>
+        <p:txBody>
+          <a:bodyPr rtlCol="0" anchor="ctr"/>
+          <a:lstStyle/>
+          <a:p>
+            <a:pPr algn="ctr"/>
+          </a:p>
+        </p:txBody>
+      </p:sp>
+      <p:sp>
+        <p:nvSpPr>
+          <p:cNvPr id="17" name="TextBox 16"/>
           <p:cNvSpPr txBox="1"/>
           <p:nvPr/>
         </p:nvSpPr>
         <p:spPr>
           <a:xfrm>
-            <a:off x="6217920" y="4114800"/>
-            <a:ext cx="5394960" cy="274320"/>
+            <a:off x="8321040" y="3200400"/>
+            <a:ext cx="2971800" cy="457200"/>
           </a:xfrm>
           <a:prstGeom prst="rect">
             <a:avLst/>
@@ -5559,56 +5820,27 @@
               </a:lnSpc>
             </a:pPr>
             <a:r>
-              <a:rPr sz="1300" b="1">
+              <a:rPr sz="1800" b="1">
                 <a:solidFill>
                   <a:srgbClr val="0F766E"/>
                 </a:solidFill>
                 <a:latin typeface="Malgun Gothic"/>
               </a:rPr>
-              <a:t>관리자 대시보드</a:t>
-            </a:r>
-          </a:p>
-        </p:txBody>
-      </p:sp>
-      <p:pic>
-        <p:nvPicPr>
-          <p:cNvPr id="13" name="Picture 12" descr="admin.png"/>
-          <p:cNvPicPr>
-            <a:picLocks noChangeAspect="1"/>
-          </p:cNvPicPr>
-          <p:nvPr/>
-        </p:nvPicPr>
-        <p:blipFill>
-          <a:blip r:embed="rId5"/>
-          <a:stretch>
-            <a:fillRect/>
-          </a:stretch>
-        </p:blipFill>
-        <p:spPr>
-          <a:xfrm>
-            <a:off x="7543800" y="4389120"/>
-            <a:ext cx="2743200" cy="1828800"/>
-          </a:xfrm>
-          <a:prstGeom prst="rect">
-            <a:avLst/>
-          </a:prstGeom>
-          <a:ln w="12700">
-            <a:solidFill>
-              <a:srgbClr val="DCEEE7"/>
-            </a:solidFill>
-          </a:ln>
-        </p:spPr>
-      </p:pic>
-      <p:sp>
-        <p:nvSpPr>
-          <p:cNvPr id="14" name="TextBox 13"/>
+              <a:t>두 가지 역할</a:t>
+            </a:r>
+          </a:p>
+        </p:txBody>
+      </p:sp>
+      <p:sp>
+        <p:nvSpPr>
+          <p:cNvPr id="18" name="TextBox 17"/>
           <p:cNvSpPr txBox="1"/>
           <p:nvPr/>
         </p:nvSpPr>
         <p:spPr>
           <a:xfrm>
-            <a:off x="457200" y="6446520"/>
-            <a:ext cx="7315200" cy="320040"/>
+            <a:off x="8321040" y="3703320"/>
+            <a:ext cx="2971800" cy="2011680"/>
           </a:xfrm>
           <a:prstGeom prst="rect">
             <a:avLst/>
@@ -5627,6 +5859,45 @@
               </a:lnSpc>
             </a:pPr>
             <a:r>
+              <a:rPr sz="1400" b="0">
+                <a:solidFill>
+                  <a:srgbClr val="4B6259"/>
+                </a:solidFill>
+                <a:latin typeface="Malgun Gothic"/>
+              </a:rPr>
+              <a:t>고객은 본인 지출을 기록·조회, 관리자는 회원과 전체 서비스 통계를 관리</a:t>
+            </a:r>
+          </a:p>
+        </p:txBody>
+      </p:sp>
+      <p:sp>
+        <p:nvSpPr>
+          <p:cNvPr id="19" name="TextBox 18"/>
+          <p:cNvSpPr txBox="1"/>
+          <p:nvPr/>
+        </p:nvSpPr>
+        <p:spPr>
+          <a:xfrm>
+            <a:off x="457200" y="6446520"/>
+            <a:ext cx="7315200" cy="320040"/>
+          </a:xfrm>
+          <a:prstGeom prst="rect">
+            <a:avLst/>
+          </a:prstGeom>
+          <a:noFill/>
+        </p:spPr>
+        <p:txBody>
+          <a:bodyPr wrap="square" anchor="t">
+            <a:spAutoFit/>
+          </a:bodyPr>
+          <a:lstStyle/>
+          <a:p>
+            <a:pPr algn="l">
+              <a:lnSpc>
+                <a:spcPct val="115000"/>
+              </a:lnSpc>
+            </a:pPr>
+            <a:r>
               <a:rPr sz="1000" b="0">
                 <a:solidFill>
                   <a:srgbClr val="6E8880"/>
@@ -5640,7 +5911,7 @@
       </p:sp>
       <p:sp>
         <p:nvSpPr>
-          <p:cNvPr id="15" name="TextBox 14"/>
+          <p:cNvPr id="20" name="TextBox 19"/>
           <p:cNvSpPr txBox="1"/>
           <p:nvPr/>
         </p:nvSpPr>
@@ -5781,7 +6052,7 @@
                 </a:solidFill>
                 <a:latin typeface="Malgun Gothic"/>
               </a:rPr>
-              <a:t>OVERVIEW</a:t>
+              <a:t>FEATURES · CUSTOMER</a:t>
             </a:r>
           </a:p>
         </p:txBody>
@@ -5820,7 +6091,7 @@
                 </a:solidFill>
                 <a:latin typeface="Malgun Gothic"/>
               </a:rPr>
-              <a:t>프로젝트 개요</a:t>
+              <a:t>핵심 기능 — 고객</a:t>
             </a:r>
           </a:p>
         </p:txBody>
@@ -5878,7 +6149,7 @@
         <p:spPr>
           <a:xfrm>
             <a:off x="640080" y="1828800"/>
-            <a:ext cx="10789920" cy="731520"/>
+            <a:ext cx="5486400" cy="4572000"/>
           </a:xfrm>
           <a:prstGeom prst="rect">
             <a:avLst/>
@@ -5886,128 +6157,261 @@
           <a:noFill/>
         </p:spPr>
         <p:txBody>
-          <a:bodyPr wrap="square" anchor="t">
+          <a:bodyPr wrap="square">
             <a:spAutoFit/>
           </a:bodyPr>
           <a:lstStyle/>
           <a:p>
-            <a:pPr algn="l">
-              <a:lnSpc>
-                <a:spcPct val="115000"/>
-              </a:lnSpc>
-            </a:pPr>
-            <a:r>
-              <a:rPr sz="1700" b="0">
-                <a:solidFill>
-                  <a:srgbClr val="4B6259"/>
-                </a:solidFill>
-                <a:latin typeface="Malgun Gothic"/>
-              </a:rPr>
-              <a:t>개인의 지출을 손쉽게 기록하고, 카테고리별·기간별 통계로 소비 패턴을 파악할 수 있는 지출 관리 서비스</a:t>
-            </a:r>
-          </a:p>
-        </p:txBody>
-      </p:sp>
-      <p:sp>
-        <p:nvSpPr>
-          <p:cNvPr id="7" name="Rectangle 6"/>
-          <p:cNvSpPr/>
-          <p:nvPr/>
-        </p:nvSpPr>
-        <p:spPr>
-          <a:xfrm>
-            <a:off x="640080" y="2834640"/>
-            <a:ext cx="3520440" cy="3108960"/>
-          </a:xfrm>
-          <a:prstGeom prst="rect">
-            <a:avLst/>
-          </a:prstGeom>
-          <a:solidFill>
-            <a:srgbClr val="FFFFFF"/>
-          </a:solidFill>
+            <a:pPr>
+              <a:lnSpc>
+                <a:spcPct val="120000"/>
+              </a:lnSpc>
+              <a:spcAft>
+                <a:spcPts val="1000"/>
+              </a:spcAft>
+            </a:pPr>
+            <a:r>
+              <a:rPr sz="1500" b="0">
+                <a:solidFill>
+                  <a:srgbClr val="1F2E2A"/>
+                </a:solidFill>
+                <a:latin typeface="Malgun Gothic"/>
+              </a:rPr>
+              <a:t>•  회원가입 / 로그인</a:t>
+            </a:r>
+          </a:p>
+          <a:p>
+            <a:pPr>
+              <a:spcAft>
+                <a:spcPts val="1000"/>
+              </a:spcAft>
+            </a:pPr>
+            <a:r>
+              <a:rPr sz="1200">
+                <a:solidFill>
+                  <a:srgbClr val="6E8880"/>
+                </a:solidFill>
+                <a:latin typeface="Malgun Gothic"/>
+              </a:rPr>
+              <a:t>     이메일·비밀번호 기반, 가입 즉시 자동 로그인</a:t>
+            </a:r>
+          </a:p>
+          <a:p>
+            <a:pPr>
+              <a:lnSpc>
+                <a:spcPct val="120000"/>
+              </a:lnSpc>
+              <a:spcAft>
+                <a:spcPts val="1000"/>
+              </a:spcAft>
+            </a:pPr>
+            <a:r>
+              <a:rPr sz="1500" b="0">
+                <a:solidFill>
+                  <a:srgbClr val="1F2E2A"/>
+                </a:solidFill>
+                <a:latin typeface="Malgun Gothic"/>
+              </a:rPr>
+              <a:t>•  지출 CRUD</a:t>
+            </a:r>
+          </a:p>
+          <a:p>
+            <a:pPr>
+              <a:spcAft>
+                <a:spcPts val="1000"/>
+              </a:spcAft>
+            </a:pPr>
+            <a:r>
+              <a:rPr sz="1200">
+                <a:solidFill>
+                  <a:srgbClr val="6E8880"/>
+                </a:solidFill>
+                <a:latin typeface="Malgun Gothic"/>
+              </a:rPr>
+              <a:t>     등록·조회·수정·삭제 — 기간·카테고리 필터 및 메모 검색 지원</a:t>
+            </a:r>
+          </a:p>
+          <a:p>
+            <a:pPr>
+              <a:lnSpc>
+                <a:spcPct val="120000"/>
+              </a:lnSpc>
+              <a:spcAft>
+                <a:spcPts val="1000"/>
+              </a:spcAft>
+            </a:pPr>
+            <a:r>
+              <a:rPr sz="1500" b="0">
+                <a:solidFill>
+                  <a:srgbClr val="1F2E2A"/>
+                </a:solidFill>
+                <a:latin typeface="Malgun Gothic"/>
+              </a:rPr>
+              <a:t>•  페이지네이션</a:t>
+            </a:r>
+          </a:p>
+          <a:p>
+            <a:pPr>
+              <a:spcAft>
+                <a:spcPts val="1000"/>
+              </a:spcAft>
+            </a:pPr>
+            <a:r>
+              <a:rPr sz="1200">
+                <a:solidFill>
+                  <a:srgbClr val="6E8880"/>
+                </a:solidFill>
+                <a:latin typeface="Malgun Gothic"/>
+              </a:rPr>
+              <a:t>     지출 내역이 쌓여도 페이지당 10건씩 표시, 필터 변경 시 1페이지로 자동 리셋</a:t>
+            </a:r>
+          </a:p>
+          <a:p>
+            <a:pPr>
+              <a:lnSpc>
+                <a:spcPct val="120000"/>
+              </a:lnSpc>
+              <a:spcAft>
+                <a:spcPts val="1000"/>
+              </a:spcAft>
+            </a:pPr>
+            <a:r>
+              <a:rPr sz="1500" b="0">
+                <a:solidFill>
+                  <a:srgbClr val="1F2E2A"/>
+                </a:solidFill>
+                <a:latin typeface="Malgun Gothic"/>
+              </a:rPr>
+              <a:t>•  개인 통계 대시보드</a:t>
+            </a:r>
+          </a:p>
+          <a:p>
+            <a:pPr>
+              <a:spcAft>
+                <a:spcPts val="1000"/>
+              </a:spcAft>
+            </a:pPr>
+            <a:r>
+              <a:rPr sz="1200">
+                <a:solidFill>
+                  <a:srgbClr val="6E8880"/>
+                </a:solidFill>
+                <a:latin typeface="Malgun Gothic"/>
+              </a:rPr>
+              <a:t>     월별/연별 합계, 카테고리 비중을 도넛·막대 차트 토글로 시각화</a:t>
+            </a:r>
+          </a:p>
+          <a:p>
+            <a:pPr>
+              <a:lnSpc>
+                <a:spcPct val="120000"/>
+              </a:lnSpc>
+              <a:spcAft>
+                <a:spcPts val="1000"/>
+              </a:spcAft>
+            </a:pPr>
+            <a:r>
+              <a:rPr sz="1500" b="0">
+                <a:solidFill>
+                  <a:srgbClr val="1F2E2A"/>
+                </a:solidFill>
+                <a:latin typeface="Malgun Gothic"/>
+              </a:rPr>
+              <a:t>•  고정 카테고리 8종</a:t>
+            </a:r>
+          </a:p>
+          <a:p>
+            <a:pPr>
+              <a:spcAft>
+                <a:spcPts val="1000"/>
+              </a:spcAft>
+            </a:pPr>
+            <a:r>
+              <a:rPr sz="1200">
+                <a:solidFill>
+                  <a:srgbClr val="6E8880"/>
+                </a:solidFill>
+                <a:latin typeface="Malgun Gothic"/>
+              </a:rPr>
+              <a:t>     식비·교통·주거·문화/여가·쇼핑·의료·교육·기타 — 모든 사용자 공용</a:t>
+            </a:r>
+          </a:p>
+          <a:p>
+            <a:pPr>
+              <a:lnSpc>
+                <a:spcPct val="120000"/>
+              </a:lnSpc>
+              <a:spcAft>
+                <a:spcPts val="1000"/>
+              </a:spcAft>
+            </a:pPr>
+            <a:r>
+              <a:rPr sz="1500" b="0">
+                <a:solidFill>
+                  <a:srgbClr val="1F2E2A"/>
+                </a:solidFill>
+                <a:latin typeface="Malgun Gothic"/>
+              </a:rPr>
+              <a:t>•  게시판</a:t>
+            </a:r>
+          </a:p>
+          <a:p>
+            <a:pPr>
+              <a:spcAft>
+                <a:spcPts val="1000"/>
+              </a:spcAft>
+            </a:pPr>
+            <a:r>
+              <a:rPr sz="1200">
+                <a:solidFill>
+                  <a:srgbClr val="6E8880"/>
+                </a:solidFill>
+                <a:latin typeface="Malgun Gothic"/>
+              </a:rPr>
+              <a:t>     절약 팁을 자유롭게 작성·검색하고 댓글로 소통, 본인 글/댓글만 삭제 가능</a:t>
+            </a:r>
+          </a:p>
+        </p:txBody>
+      </p:sp>
+      <p:pic>
+        <p:nvPicPr>
+          <p:cNvPr id="7" name="Picture 6" descr="dashboard.png"/>
+          <p:cNvPicPr>
+            <a:picLocks noChangeAspect="1"/>
+          </p:cNvPicPr>
+          <p:nvPr/>
+        </p:nvPicPr>
+        <p:blipFill>
+          <a:blip r:embed="rId2"/>
+          <a:stretch>
+            <a:fillRect/>
+          </a:stretch>
+        </p:blipFill>
+        <p:spPr>
+          <a:xfrm>
+            <a:off x="6492240" y="2255520"/>
+            <a:ext cx="5029200" cy="3352800"/>
+          </a:xfrm>
+          <a:prstGeom prst="rect">
+            <a:avLst/>
+          </a:prstGeom>
           <a:ln w="12700">
             <a:solidFill>
               <a:srgbClr val="DCEEE7"/>
             </a:solidFill>
           </a:ln>
-          <a:effectLst/>
-        </p:spPr>
-        <p:style>
-          <a:lnRef idx="1">
-            <a:schemeClr val="accent1"/>
-          </a:lnRef>
-          <a:fillRef idx="3">
-            <a:schemeClr val="accent1"/>
-          </a:fillRef>
-          <a:effectRef idx="2">
-            <a:schemeClr val="accent1"/>
-          </a:effectRef>
-          <a:fontRef idx="minor">
-            <a:schemeClr val="lt1"/>
-          </a:fontRef>
-        </p:style>
-        <p:txBody>
-          <a:bodyPr rtlCol="0" anchor="ctr"/>
-          <a:lstStyle/>
-          <a:p>
-            <a:pPr algn="ctr"/>
-          </a:p>
-        </p:txBody>
-      </p:sp>
-      <p:sp>
-        <p:nvSpPr>
-          <p:cNvPr id="8" name="Rectangle 7"/>
-          <p:cNvSpPr/>
-          <p:nvPr/>
-        </p:nvSpPr>
-        <p:spPr>
-          <a:xfrm>
-            <a:off x="640080" y="2834640"/>
-            <a:ext cx="3520440" cy="109728"/>
-          </a:xfrm>
-          <a:prstGeom prst="rect">
-            <a:avLst/>
-          </a:prstGeom>
-          <a:solidFill>
-            <a:srgbClr val="34D399"/>
-          </a:solidFill>
-          <a:ln>
-            <a:noFill/>
-          </a:ln>
-          <a:effectLst/>
-        </p:spPr>
-        <p:style>
-          <a:lnRef idx="1">
-            <a:schemeClr val="accent1"/>
-          </a:lnRef>
-          <a:fillRef idx="3">
-            <a:schemeClr val="accent1"/>
-          </a:fillRef>
-          <a:effectRef idx="2">
-            <a:schemeClr val="accent1"/>
-          </a:effectRef>
-          <a:fontRef idx="minor">
-            <a:schemeClr val="lt1"/>
-          </a:fontRef>
-        </p:style>
-        <p:txBody>
-          <a:bodyPr rtlCol="0" anchor="ctr"/>
-          <a:lstStyle/>
-          <a:p>
-            <a:pPr algn="ctr"/>
-          </a:p>
-        </p:txBody>
-      </p:sp>
-      <p:sp>
-        <p:nvSpPr>
-          <p:cNvPr id="9" name="TextBox 8"/>
+        </p:spPr>
+      </p:pic>
+      <p:sp>
+        <p:nvSpPr>
+          <p:cNvPr id="8" name="TextBox 7"/>
           <p:cNvSpPr txBox="1"/>
           <p:nvPr/>
         </p:nvSpPr>
         <p:spPr>
           <a:xfrm>
-            <a:off x="914400" y="3200400"/>
-            <a:ext cx="2971800" cy="457200"/>
+            <a:off x="457200" y="6446520"/>
+            <a:ext cx="7315200" cy="320040"/>
           </a:xfrm>
           <a:prstGeom prst="rect">
             <a:avLst/>
@@ -6026,420 +6430,6 @@
               </a:lnSpc>
             </a:pPr>
             <a:r>
-              <a:rPr sz="1800" b="1">
-                <a:solidFill>
-                  <a:srgbClr val="0F766E"/>
-                </a:solidFill>
-                <a:latin typeface="Malgun Gothic"/>
-              </a:rPr>
-              <a:t>문제 정의</a:t>
-            </a:r>
-          </a:p>
-        </p:txBody>
-      </p:sp>
-      <p:sp>
-        <p:nvSpPr>
-          <p:cNvPr id="10" name="TextBox 9"/>
-          <p:cNvSpPr txBox="1"/>
-          <p:nvPr/>
-        </p:nvSpPr>
-        <p:spPr>
-          <a:xfrm>
-            <a:off x="914400" y="3703320"/>
-            <a:ext cx="2971800" cy="2011680"/>
-          </a:xfrm>
-          <a:prstGeom prst="rect">
-            <a:avLst/>
-          </a:prstGeom>
-          <a:noFill/>
-        </p:spPr>
-        <p:txBody>
-          <a:bodyPr wrap="square" anchor="t">
-            <a:spAutoFit/>
-          </a:bodyPr>
-          <a:lstStyle/>
-          <a:p>
-            <a:pPr algn="l">
-              <a:lnSpc>
-                <a:spcPct val="115000"/>
-              </a:lnSpc>
-            </a:pPr>
-            <a:r>
-              <a:rPr sz="1400" b="0">
-                <a:solidFill>
-                  <a:srgbClr val="4B6259"/>
-                </a:solidFill>
-                <a:latin typeface="Malgun Gothic"/>
-              </a:rPr>
-              <a:t>지출을 기록해도 흩어진 데이터라 카테고리별·월별 흐름을 한눈에 파악하기 어려움</a:t>
-            </a:r>
-          </a:p>
-        </p:txBody>
-      </p:sp>
-      <p:sp>
-        <p:nvSpPr>
-          <p:cNvPr id="11" name="Rectangle 10"/>
-          <p:cNvSpPr/>
-          <p:nvPr/>
-        </p:nvSpPr>
-        <p:spPr>
-          <a:xfrm>
-            <a:off x="4343400" y="2834640"/>
-            <a:ext cx="3520440" cy="3108960"/>
-          </a:xfrm>
-          <a:prstGeom prst="rect">
-            <a:avLst/>
-          </a:prstGeom>
-          <a:solidFill>
-            <a:srgbClr val="FFFFFF"/>
-          </a:solidFill>
-          <a:ln w="12700">
-            <a:solidFill>
-              <a:srgbClr val="DCEEE7"/>
-            </a:solidFill>
-          </a:ln>
-          <a:effectLst/>
-        </p:spPr>
-        <p:style>
-          <a:lnRef idx="1">
-            <a:schemeClr val="accent1"/>
-          </a:lnRef>
-          <a:fillRef idx="3">
-            <a:schemeClr val="accent1"/>
-          </a:fillRef>
-          <a:effectRef idx="2">
-            <a:schemeClr val="accent1"/>
-          </a:effectRef>
-          <a:fontRef idx="minor">
-            <a:schemeClr val="lt1"/>
-          </a:fontRef>
-        </p:style>
-        <p:txBody>
-          <a:bodyPr rtlCol="0" anchor="ctr"/>
-          <a:lstStyle/>
-          <a:p>
-            <a:pPr algn="ctr"/>
-          </a:p>
-        </p:txBody>
-      </p:sp>
-      <p:sp>
-        <p:nvSpPr>
-          <p:cNvPr id="12" name="Rectangle 11"/>
-          <p:cNvSpPr/>
-          <p:nvPr/>
-        </p:nvSpPr>
-        <p:spPr>
-          <a:xfrm>
-            <a:off x="4343400" y="2834640"/>
-            <a:ext cx="3520440" cy="109728"/>
-          </a:xfrm>
-          <a:prstGeom prst="rect">
-            <a:avLst/>
-          </a:prstGeom>
-          <a:solidFill>
-            <a:srgbClr val="34D399"/>
-          </a:solidFill>
-          <a:ln>
-            <a:noFill/>
-          </a:ln>
-          <a:effectLst/>
-        </p:spPr>
-        <p:style>
-          <a:lnRef idx="1">
-            <a:schemeClr val="accent1"/>
-          </a:lnRef>
-          <a:fillRef idx="3">
-            <a:schemeClr val="accent1"/>
-          </a:fillRef>
-          <a:effectRef idx="2">
-            <a:schemeClr val="accent1"/>
-          </a:effectRef>
-          <a:fontRef idx="minor">
-            <a:schemeClr val="lt1"/>
-          </a:fontRef>
-        </p:style>
-        <p:txBody>
-          <a:bodyPr rtlCol="0" anchor="ctr"/>
-          <a:lstStyle/>
-          <a:p>
-            <a:pPr algn="ctr"/>
-          </a:p>
-        </p:txBody>
-      </p:sp>
-      <p:sp>
-        <p:nvSpPr>
-          <p:cNvPr id="13" name="TextBox 12"/>
-          <p:cNvSpPr txBox="1"/>
-          <p:nvPr/>
-        </p:nvSpPr>
-        <p:spPr>
-          <a:xfrm>
-            <a:off x="4617720" y="3200400"/>
-            <a:ext cx="2971800" cy="457200"/>
-          </a:xfrm>
-          <a:prstGeom prst="rect">
-            <a:avLst/>
-          </a:prstGeom>
-          <a:noFill/>
-        </p:spPr>
-        <p:txBody>
-          <a:bodyPr wrap="square" anchor="t">
-            <a:spAutoFit/>
-          </a:bodyPr>
-          <a:lstStyle/>
-          <a:p>
-            <a:pPr algn="l">
-              <a:lnSpc>
-                <a:spcPct val="115000"/>
-              </a:lnSpc>
-            </a:pPr>
-            <a:r>
-              <a:rPr sz="1800" b="1">
-                <a:solidFill>
-                  <a:srgbClr val="0F766E"/>
-                </a:solidFill>
-                <a:latin typeface="Malgun Gothic"/>
-              </a:rPr>
-              <a:t>핵심 가치</a:t>
-            </a:r>
-          </a:p>
-        </p:txBody>
-      </p:sp>
-      <p:sp>
-        <p:nvSpPr>
-          <p:cNvPr id="14" name="TextBox 13"/>
-          <p:cNvSpPr txBox="1"/>
-          <p:nvPr/>
-        </p:nvSpPr>
-        <p:spPr>
-          <a:xfrm>
-            <a:off x="4617720" y="3703320"/>
-            <a:ext cx="2971800" cy="2011680"/>
-          </a:xfrm>
-          <a:prstGeom prst="rect">
-            <a:avLst/>
-          </a:prstGeom>
-          <a:noFill/>
-        </p:spPr>
-        <p:txBody>
-          <a:bodyPr wrap="square" anchor="t">
-            <a:spAutoFit/>
-          </a:bodyPr>
-          <a:lstStyle/>
-          <a:p>
-            <a:pPr algn="l">
-              <a:lnSpc>
-                <a:spcPct val="115000"/>
-              </a:lnSpc>
-            </a:pPr>
-            <a:r>
-              <a:rPr sz="1400" b="0">
-                <a:solidFill>
-                  <a:srgbClr val="4B6259"/>
-                </a:solidFill>
-                <a:latin typeface="Malgun Gothic"/>
-              </a:rPr>
-              <a:t>간편한 등록 흐름 + 시각적 통계(도넛/막대 차트)로 소비 패턴을 즉시 인지</a:t>
-            </a:r>
-          </a:p>
-        </p:txBody>
-      </p:sp>
-      <p:sp>
-        <p:nvSpPr>
-          <p:cNvPr id="15" name="Rectangle 14"/>
-          <p:cNvSpPr/>
-          <p:nvPr/>
-        </p:nvSpPr>
-        <p:spPr>
-          <a:xfrm>
-            <a:off x="8046720" y="2834640"/>
-            <a:ext cx="3520440" cy="3108960"/>
-          </a:xfrm>
-          <a:prstGeom prst="rect">
-            <a:avLst/>
-          </a:prstGeom>
-          <a:solidFill>
-            <a:srgbClr val="FFFFFF"/>
-          </a:solidFill>
-          <a:ln w="12700">
-            <a:solidFill>
-              <a:srgbClr val="DCEEE7"/>
-            </a:solidFill>
-          </a:ln>
-          <a:effectLst/>
-        </p:spPr>
-        <p:style>
-          <a:lnRef idx="1">
-            <a:schemeClr val="accent1"/>
-          </a:lnRef>
-          <a:fillRef idx="3">
-            <a:schemeClr val="accent1"/>
-          </a:fillRef>
-          <a:effectRef idx="2">
-            <a:schemeClr val="accent1"/>
-          </a:effectRef>
-          <a:fontRef idx="minor">
-            <a:schemeClr val="lt1"/>
-          </a:fontRef>
-        </p:style>
-        <p:txBody>
-          <a:bodyPr rtlCol="0" anchor="ctr"/>
-          <a:lstStyle/>
-          <a:p>
-            <a:pPr algn="ctr"/>
-          </a:p>
-        </p:txBody>
-      </p:sp>
-      <p:sp>
-        <p:nvSpPr>
-          <p:cNvPr id="16" name="Rectangle 15"/>
-          <p:cNvSpPr/>
-          <p:nvPr/>
-        </p:nvSpPr>
-        <p:spPr>
-          <a:xfrm>
-            <a:off x="8046720" y="2834640"/>
-            <a:ext cx="3520440" cy="109728"/>
-          </a:xfrm>
-          <a:prstGeom prst="rect">
-            <a:avLst/>
-          </a:prstGeom>
-          <a:solidFill>
-            <a:srgbClr val="34D399"/>
-          </a:solidFill>
-          <a:ln>
-            <a:noFill/>
-          </a:ln>
-          <a:effectLst/>
-        </p:spPr>
-        <p:style>
-          <a:lnRef idx="1">
-            <a:schemeClr val="accent1"/>
-          </a:lnRef>
-          <a:fillRef idx="3">
-            <a:schemeClr val="accent1"/>
-          </a:fillRef>
-          <a:effectRef idx="2">
-            <a:schemeClr val="accent1"/>
-          </a:effectRef>
-          <a:fontRef idx="minor">
-            <a:schemeClr val="lt1"/>
-          </a:fontRef>
-        </p:style>
-        <p:txBody>
-          <a:bodyPr rtlCol="0" anchor="ctr"/>
-          <a:lstStyle/>
-          <a:p>
-            <a:pPr algn="ctr"/>
-          </a:p>
-        </p:txBody>
-      </p:sp>
-      <p:sp>
-        <p:nvSpPr>
-          <p:cNvPr id="17" name="TextBox 16"/>
-          <p:cNvSpPr txBox="1"/>
-          <p:nvPr/>
-        </p:nvSpPr>
-        <p:spPr>
-          <a:xfrm>
-            <a:off x="8321040" y="3200400"/>
-            <a:ext cx="2971800" cy="457200"/>
-          </a:xfrm>
-          <a:prstGeom prst="rect">
-            <a:avLst/>
-          </a:prstGeom>
-          <a:noFill/>
-        </p:spPr>
-        <p:txBody>
-          <a:bodyPr wrap="square" anchor="t">
-            <a:spAutoFit/>
-          </a:bodyPr>
-          <a:lstStyle/>
-          <a:p>
-            <a:pPr algn="l">
-              <a:lnSpc>
-                <a:spcPct val="115000"/>
-              </a:lnSpc>
-            </a:pPr>
-            <a:r>
-              <a:rPr sz="1800" b="1">
-                <a:solidFill>
-                  <a:srgbClr val="0F766E"/>
-                </a:solidFill>
-                <a:latin typeface="Malgun Gothic"/>
-              </a:rPr>
-              <a:t>두 가지 역할</a:t>
-            </a:r>
-          </a:p>
-        </p:txBody>
-      </p:sp>
-      <p:sp>
-        <p:nvSpPr>
-          <p:cNvPr id="18" name="TextBox 17"/>
-          <p:cNvSpPr txBox="1"/>
-          <p:nvPr/>
-        </p:nvSpPr>
-        <p:spPr>
-          <a:xfrm>
-            <a:off x="8321040" y="3703320"/>
-            <a:ext cx="2971800" cy="2011680"/>
-          </a:xfrm>
-          <a:prstGeom prst="rect">
-            <a:avLst/>
-          </a:prstGeom>
-          <a:noFill/>
-        </p:spPr>
-        <p:txBody>
-          <a:bodyPr wrap="square" anchor="t">
-            <a:spAutoFit/>
-          </a:bodyPr>
-          <a:lstStyle/>
-          <a:p>
-            <a:pPr algn="l">
-              <a:lnSpc>
-                <a:spcPct val="115000"/>
-              </a:lnSpc>
-            </a:pPr>
-            <a:r>
-              <a:rPr sz="1400" b="0">
-                <a:solidFill>
-                  <a:srgbClr val="4B6259"/>
-                </a:solidFill>
-                <a:latin typeface="Malgun Gothic"/>
-              </a:rPr>
-              <a:t>고객은 본인 지출을 기록·조회, 관리자는 회원과 전체 서비스 통계를 관리</a:t>
-            </a:r>
-          </a:p>
-        </p:txBody>
-      </p:sp>
-      <p:sp>
-        <p:nvSpPr>
-          <p:cNvPr id="19" name="TextBox 18"/>
-          <p:cNvSpPr txBox="1"/>
-          <p:nvPr/>
-        </p:nvSpPr>
-        <p:spPr>
-          <a:xfrm>
-            <a:off x="457200" y="6446520"/>
-            <a:ext cx="7315200" cy="320040"/>
-          </a:xfrm>
-          <a:prstGeom prst="rect">
-            <a:avLst/>
-          </a:prstGeom>
-          <a:noFill/>
-        </p:spPr>
-        <p:txBody>
-          <a:bodyPr wrap="square" anchor="t">
-            <a:spAutoFit/>
-          </a:bodyPr>
-          <a:lstStyle/>
-          <a:p>
-            <a:pPr algn="l">
-              <a:lnSpc>
-                <a:spcPct val="115000"/>
-              </a:lnSpc>
-            </a:pPr>
-            <a:r>
               <a:rPr sz="1000" b="0">
                 <a:solidFill>
                   <a:srgbClr val="6E8880"/>
@@ -6453,7 +6443,7 @@
       </p:sp>
       <p:sp>
         <p:nvSpPr>
-          <p:cNvPr id="20" name="TextBox 19"/>
+          <p:cNvPr id="9" name="TextBox 8"/>
           <p:cNvSpPr txBox="1"/>
           <p:nvPr/>
         </p:nvSpPr>
@@ -6531,7 +6521,7 @@
             <a:avLst/>
           </a:prstGeom>
           <a:solidFill>
-            <a:srgbClr val="0F766E"/>
+            <a:srgbClr val="1E3A34"/>
           </a:solidFill>
           <a:ln>
             <a:noFill/>
@@ -6590,11 +6580,11 @@
             <a:r>
               <a:rPr sz="1300" b="1">
                 <a:solidFill>
-                  <a:srgbClr val="0F766E"/>
-                </a:solidFill>
-                <a:latin typeface="Malgun Gothic"/>
-              </a:rPr>
-              <a:t>FEATURES · CUSTOMER</a:t>
+                  <a:srgbClr val="1E3A34"/>
+                </a:solidFill>
+                <a:latin typeface="Malgun Gothic"/>
+              </a:rPr>
+              <a:t>FEATURES · ADMIN</a:t>
             </a:r>
           </a:p>
         </p:txBody>
@@ -6633,7 +6623,7 @@
                 </a:solidFill>
                 <a:latin typeface="Malgun Gothic"/>
               </a:rPr>
-              <a:t>핵심 기능 — 고객</a:t>
+              <a:t>핵심 기능 — 관리자</a:t>
             </a:r>
           </a:p>
         </p:txBody>
@@ -6713,13 +6703,13 @@
               </a:spcAft>
             </a:pPr>
             <a:r>
-              <a:rPr sz="1500" b="0">
+              <a:rPr sz="1600" b="0">
                 <a:solidFill>
                   <a:srgbClr val="1F2E2A"/>
                 </a:solidFill>
                 <a:latin typeface="Malgun Gothic"/>
               </a:rPr>
-              <a:t>•  회원가입 / 로그인</a:t>
+              <a:t>•  고정 계정 로그인</a:t>
             </a:r>
           </a:p>
           <a:p>
@@ -6729,13 +6719,13 @@
               </a:spcAft>
             </a:pPr>
             <a:r>
-              <a:rPr sz="1200">
+              <a:rPr sz="1300">
                 <a:solidFill>
                   <a:srgbClr val="6E8880"/>
                 </a:solidFill>
                 <a:latin typeface="Malgun Gothic"/>
               </a:rPr>
-              <a:t>     이메일·비밀번호 기반, 가입 즉시 자동 로그인</a:t>
+              <a:t>     회원가입 없이 지정된 관리자 계정으로만 접근</a:t>
             </a:r>
           </a:p>
           <a:p>
@@ -6748,13 +6738,13 @@
               </a:spcAft>
             </a:pPr>
             <a:r>
-              <a:rPr sz="1500" b="0">
+              <a:rPr sz="1600" b="0">
                 <a:solidFill>
                   <a:srgbClr val="1F2E2A"/>
                 </a:solidFill>
                 <a:latin typeface="Malgun Gothic"/>
               </a:rPr>
-              <a:t>•  지출 CRUD</a:t>
+              <a:t>•  전체 통계 대시보드</a:t>
             </a:r>
           </a:p>
           <a:p>
@@ -6764,13 +6754,13 @@
               </a:spcAft>
             </a:pPr>
             <a:r>
-              <a:rPr sz="1200">
+              <a:rPr sz="1300">
                 <a:solidFill>
                   <a:srgbClr val="6E8880"/>
                 </a:solidFill>
                 <a:latin typeface="Malgun Gothic"/>
               </a:rPr>
-              <a:t>     등록·조회·수정·삭제 — 기간·카테고리 필터 및 메모 검색 지원</a:t>
+              <a:t>     전체 회원 수 · 총 지출액 · 이번 달 지출 · 인기 카테고리 TOP 5</a:t>
             </a:r>
           </a:p>
           <a:p>
@@ -6783,13 +6773,13 @@
               </a:spcAft>
             </a:pPr>
             <a:r>
-              <a:rPr sz="1500" b="0">
+              <a:rPr sz="1600" b="0">
                 <a:solidFill>
                   <a:srgbClr val="1F2E2A"/>
                 </a:solidFill>
                 <a:latin typeface="Malgun Gothic"/>
               </a:rPr>
-              <a:t>•  페이지네이션</a:t>
+              <a:t>•  회원 관리</a:t>
             </a:r>
           </a:p>
           <a:p>
@@ -6799,13 +6789,13 @@
               </a:spcAft>
             </a:pPr>
             <a:r>
-              <a:rPr sz="1200">
+              <a:rPr sz="1300">
                 <a:solidFill>
                   <a:srgbClr val="6E8880"/>
                 </a:solidFill>
                 <a:latin typeface="Malgun Gothic"/>
               </a:rPr>
-              <a:t>     지출 내역이 쌓여도 페이지당 10건씩 표시, 필터 변경 시 1페이지로 자동 리셋</a:t>
+              <a:t>     이름/이메일 검색, 계정 정지·해제, 상세 화면에서 최근 지출 5건 확인</a:t>
             </a:r>
           </a:p>
           <a:p>
@@ -6818,13 +6808,13 @@
               </a:spcAft>
             </a:pPr>
             <a:r>
-              <a:rPr sz="1500" b="0">
+              <a:rPr sz="1600" b="0">
                 <a:solidFill>
                   <a:srgbClr val="1F2E2A"/>
                 </a:solidFill>
                 <a:latin typeface="Malgun Gothic"/>
               </a:rPr>
-              <a:t>•  개인 통계 대시보드</a:t>
+              <a:t>•  게시판 관리</a:t>
             </a:r>
           </a:p>
           <a:p>
@@ -6834,13 +6824,13 @@
               </a:spcAft>
             </a:pPr>
             <a:r>
-              <a:rPr sz="1200">
+              <a:rPr sz="1300">
                 <a:solidFill>
                   <a:srgbClr val="6E8880"/>
                 </a:solidFill>
                 <a:latin typeface="Malgun Gothic"/>
               </a:rPr>
-              <a:t>     월별/연별 합계, 카테고리 비중을 도넛·막대 차트 토글로 시각화</a:t>
+              <a:t>     게시글 검색, 부적절한 글 삭제 (모더레이션)</a:t>
             </a:r>
           </a:p>
           <a:p>
@@ -6853,13 +6843,13 @@
               </a:spcAft>
             </a:pPr>
             <a:r>
-              <a:rPr sz="1500" b="0">
+              <a:rPr sz="1600" b="0">
                 <a:solidFill>
                   <a:srgbClr val="1F2E2A"/>
                 </a:solidFill>
                 <a:latin typeface="Malgun Gothic"/>
               </a:rPr>
-              <a:t>•  고정 카테고리 8종</a:t>
+              <a:t>•  역할 분리</a:t>
             </a:r>
           </a:p>
           <a:p>
@@ -6869,55 +6859,20 @@
               </a:spcAft>
             </a:pPr>
             <a:r>
-              <a:rPr sz="1200">
+              <a:rPr sz="1300">
                 <a:solidFill>
                   <a:srgbClr val="6E8880"/>
                 </a:solidFill>
                 <a:latin typeface="Malgun Gothic"/>
               </a:rPr>
-              <a:t>     식비·교통·주거·문화/여가·쇼핑·의료·교육·기타 — 모든 사용자 공용</a:t>
-            </a:r>
-          </a:p>
-          <a:p>
-            <a:pPr>
-              <a:lnSpc>
-                <a:spcPct val="120000"/>
-              </a:lnSpc>
-              <a:spcAft>
-                <a:spcPts val="1000"/>
-              </a:spcAft>
-            </a:pPr>
-            <a:r>
-              <a:rPr sz="1500" b="0">
-                <a:solidFill>
-                  <a:srgbClr val="1F2E2A"/>
-                </a:solidFill>
-                <a:latin typeface="Malgun Gothic"/>
-              </a:rPr>
-              <a:t>•  게시판</a:t>
-            </a:r>
-          </a:p>
-          <a:p>
-            <a:pPr>
-              <a:spcAft>
-                <a:spcPts val="1000"/>
-              </a:spcAft>
-            </a:pPr>
-            <a:r>
-              <a:rPr sz="1200">
-                <a:solidFill>
-                  <a:srgbClr val="6E8880"/>
-                </a:solidFill>
-                <a:latin typeface="Malgun Gothic"/>
-              </a:rPr>
-              <a:t>     절약 팁을 자유롭게 작성·검색하고 댓글로 소통, 본인 글/댓글만 삭제 가능</a:t>
+              <a:t>     관리자는 지출 데이터를 직접 등록하지 않고 조회·관리만 수행</a:t>
             </a:r>
           </a:p>
         </p:txBody>
       </p:sp>
       <p:pic>
         <p:nvPicPr>
-          <p:cNvPr id="7" name="Picture 6" descr="dashboard.png"/>
+          <p:cNvPr id="7" name="Picture 6" descr="admin.png"/>
           <p:cNvPicPr>
             <a:picLocks noChangeAspect="1"/>
           </p:cNvPicPr>
@@ -7063,7 +7018,7 @@
             <a:avLst/>
           </a:prstGeom>
           <a:solidFill>
-            <a:srgbClr val="1E3A34"/>
+            <a:srgbClr val="0F766E"/>
           </a:solidFill>
           <a:ln>
             <a:noFill/>
@@ -7122,11 +7077,11 @@
             <a:r>
               <a:rPr sz="1300" b="1">
                 <a:solidFill>
-                  <a:srgbClr val="1E3A34"/>
-                </a:solidFill>
-                <a:latin typeface="Malgun Gothic"/>
-              </a:rPr>
-              <a:t>FEATURES · ADMIN</a:t>
+                  <a:srgbClr val="0F766E"/>
+                </a:solidFill>
+                <a:latin typeface="Malgun Gothic"/>
+              </a:rPr>
+              <a:t>SCREENSHOTS</a:t>
             </a:r>
           </a:p>
         </p:txBody>
@@ -7165,7 +7120,7 @@
                 </a:solidFill>
                 <a:latin typeface="Malgun Gothic"/>
               </a:rPr>
-              <a:t>핵심 기능 — 관리자</a:t>
+              <a:t>실제 화면</a:t>
             </a:r>
           </a:p>
         </p:txBody>
@@ -7223,7 +7178,7 @@
         <p:spPr>
           <a:xfrm>
             <a:off x="640080" y="1828800"/>
-            <a:ext cx="5486400" cy="4572000"/>
+            <a:ext cx="5394960" cy="274320"/>
           </a:xfrm>
           <a:prstGeom prst="rect">
             <a:avLst/>
@@ -7231,190 +7186,31 @@
           <a:noFill/>
         </p:spPr>
         <p:txBody>
-          <a:bodyPr wrap="square">
+          <a:bodyPr wrap="square" anchor="t">
             <a:spAutoFit/>
           </a:bodyPr>
           <a:lstStyle/>
           <a:p>
-            <a:pPr>
-              <a:lnSpc>
-                <a:spcPct val="120000"/>
-              </a:lnSpc>
-              <a:spcAft>
-                <a:spcPts val="1000"/>
-              </a:spcAft>
-            </a:pPr>
-            <a:r>
-              <a:rPr sz="1600" b="0">
-                <a:solidFill>
-                  <a:srgbClr val="1F2E2A"/>
-                </a:solidFill>
-                <a:latin typeface="Malgun Gothic"/>
-              </a:rPr>
-              <a:t>•  고정 계정 로그인</a:t>
-            </a:r>
-          </a:p>
-          <a:p>
-            <a:pPr>
-              <a:spcAft>
-                <a:spcPts val="1000"/>
-              </a:spcAft>
-            </a:pPr>
-            <a:r>
-              <a:rPr sz="1300">
-                <a:solidFill>
-                  <a:srgbClr val="6E8880"/>
-                </a:solidFill>
-                <a:latin typeface="Malgun Gothic"/>
-              </a:rPr>
-              <a:t>     회원가입 없이 지정된 관리자 계정으로만 접근</a:t>
-            </a:r>
-          </a:p>
-          <a:p>
-            <a:pPr>
-              <a:lnSpc>
-                <a:spcPct val="120000"/>
-              </a:lnSpc>
-              <a:spcAft>
-                <a:spcPts val="1000"/>
-              </a:spcAft>
-            </a:pPr>
-            <a:r>
-              <a:rPr sz="1600" b="0">
-                <a:solidFill>
-                  <a:srgbClr val="1F2E2A"/>
-                </a:solidFill>
-                <a:latin typeface="Malgun Gothic"/>
-              </a:rPr>
-              <a:t>•  전체 통계 대시보드</a:t>
-            </a:r>
-          </a:p>
-          <a:p>
-            <a:pPr>
-              <a:spcAft>
-                <a:spcPts val="1000"/>
-              </a:spcAft>
-            </a:pPr>
-            <a:r>
-              <a:rPr sz="1300">
-                <a:solidFill>
-                  <a:srgbClr val="6E8880"/>
-                </a:solidFill>
-                <a:latin typeface="Malgun Gothic"/>
-              </a:rPr>
-              <a:t>     전체 회원 수 · 총 지출액 · 이번 달 지출 · 인기 카테고리 TOP 5</a:t>
-            </a:r>
-          </a:p>
-          <a:p>
-            <a:pPr>
-              <a:lnSpc>
-                <a:spcPct val="120000"/>
-              </a:lnSpc>
-              <a:spcAft>
-                <a:spcPts val="1000"/>
-              </a:spcAft>
-            </a:pPr>
-            <a:r>
-              <a:rPr sz="1600" b="0">
-                <a:solidFill>
-                  <a:srgbClr val="1F2E2A"/>
-                </a:solidFill>
-                <a:latin typeface="Malgun Gothic"/>
-              </a:rPr>
-              <a:t>•  회원 관리</a:t>
-            </a:r>
-          </a:p>
-          <a:p>
-            <a:pPr>
-              <a:spcAft>
-                <a:spcPts val="1000"/>
-              </a:spcAft>
-            </a:pPr>
-            <a:r>
-              <a:rPr sz="1300">
-                <a:solidFill>
-                  <a:srgbClr val="6E8880"/>
-                </a:solidFill>
-                <a:latin typeface="Malgun Gothic"/>
-              </a:rPr>
-              <a:t>     이름/이메일 검색, 계정 정지·해제, 상세 화면에서 최근 지출 5건 확인</a:t>
-            </a:r>
-          </a:p>
-          <a:p>
-            <a:pPr>
-              <a:lnSpc>
-                <a:spcPct val="120000"/>
-              </a:lnSpc>
-              <a:spcAft>
-                <a:spcPts val="1000"/>
-              </a:spcAft>
-            </a:pPr>
-            <a:r>
-              <a:rPr sz="1600" b="0">
-                <a:solidFill>
-                  <a:srgbClr val="1F2E2A"/>
-                </a:solidFill>
-                <a:latin typeface="Malgun Gothic"/>
-              </a:rPr>
-              <a:t>•  게시판 관리</a:t>
-            </a:r>
-          </a:p>
-          <a:p>
-            <a:pPr>
-              <a:spcAft>
-                <a:spcPts val="1000"/>
-              </a:spcAft>
-            </a:pPr>
-            <a:r>
-              <a:rPr sz="1300">
-                <a:solidFill>
-                  <a:srgbClr val="6E8880"/>
-                </a:solidFill>
-                <a:latin typeface="Malgun Gothic"/>
-              </a:rPr>
-              <a:t>     게시글 검색, 부적절한 글 삭제 (모더레이션)</a:t>
-            </a:r>
-          </a:p>
-          <a:p>
-            <a:pPr>
-              <a:lnSpc>
-                <a:spcPct val="120000"/>
-              </a:lnSpc>
-              <a:spcAft>
-                <a:spcPts val="1000"/>
-              </a:spcAft>
-            </a:pPr>
-            <a:r>
-              <a:rPr sz="1600" b="0">
-                <a:solidFill>
-                  <a:srgbClr val="1F2E2A"/>
-                </a:solidFill>
-                <a:latin typeface="Malgun Gothic"/>
-              </a:rPr>
-              <a:t>•  역할 분리</a:t>
-            </a:r>
-          </a:p>
-          <a:p>
-            <a:pPr>
-              <a:spcAft>
-                <a:spcPts val="1000"/>
-              </a:spcAft>
-            </a:pPr>
-            <a:r>
-              <a:rPr sz="1300">
-                <a:solidFill>
-                  <a:srgbClr val="6E8880"/>
-                </a:solidFill>
-                <a:latin typeface="Malgun Gothic"/>
-              </a:rPr>
-              <a:t>     관리자는 지출 데이터를 직접 등록하지 않고 조회·관리만 수행</a:t>
+            <a:pPr algn="l">
+              <a:lnSpc>
+                <a:spcPct val="115000"/>
+              </a:lnSpc>
+            </a:pPr>
+            <a:r>
+              <a:rPr sz="1300" b="1">
+                <a:solidFill>
+                  <a:srgbClr val="0F766E"/>
+                </a:solidFill>
+                <a:latin typeface="Malgun Gothic"/>
+              </a:rPr>
+              <a:t>고객 대시보드</a:t>
             </a:r>
           </a:p>
         </p:txBody>
       </p:sp>
       <p:pic>
         <p:nvPicPr>
-          <p:cNvPr id="7" name="Picture 6" descr="admin.png"/>
+          <p:cNvPr id="7" name="Picture 6" descr="dashboard.png"/>
           <p:cNvPicPr>
             <a:picLocks noChangeAspect="1"/>
           </p:cNvPicPr>
@@ -7428,8 +7224,8 @@
         </p:blipFill>
         <p:spPr>
           <a:xfrm>
-            <a:off x="6492240" y="2255520"/>
-            <a:ext cx="5029200" cy="3352800"/>
+            <a:off x="1965960" y="2103120"/>
+            <a:ext cx="2743200" cy="1828800"/>
           </a:xfrm>
           <a:prstGeom prst="rect">
             <a:avLst/>
@@ -7449,8 +7245,8 @@
         </p:nvSpPr>
         <p:spPr>
           <a:xfrm>
-            <a:off x="457200" y="6446520"/>
-            <a:ext cx="7315200" cy="320040"/>
+            <a:off x="6217920" y="1828800"/>
+            <a:ext cx="5394960" cy="274320"/>
           </a:xfrm>
           <a:prstGeom prst="rect">
             <a:avLst/>
@@ -7469,6 +7265,210 @@
               </a:lnSpc>
             </a:pPr>
             <a:r>
+              <a:rPr sz="1300" b="1">
+                <a:solidFill>
+                  <a:srgbClr val="0F766E"/>
+                </a:solidFill>
+                <a:latin typeface="Malgun Gothic"/>
+              </a:rPr>
+              <a:t>지출 내역 (페이지네이션)</a:t>
+            </a:r>
+          </a:p>
+        </p:txBody>
+      </p:sp>
+      <p:pic>
+        <p:nvPicPr>
+          <p:cNvPr id="9" name="Picture 8" descr="expenses.png"/>
+          <p:cNvPicPr>
+            <a:picLocks noChangeAspect="1"/>
+          </p:cNvPicPr>
+          <p:nvPr/>
+        </p:nvPicPr>
+        <p:blipFill>
+          <a:blip r:embed="rId3"/>
+          <a:stretch>
+            <a:fillRect/>
+          </a:stretch>
+        </p:blipFill>
+        <p:spPr>
+          <a:xfrm>
+            <a:off x="7715093" y="2103120"/>
+            <a:ext cx="2400612" cy="1828800"/>
+          </a:xfrm>
+          <a:prstGeom prst="rect">
+            <a:avLst/>
+          </a:prstGeom>
+          <a:ln w="12700">
+            <a:solidFill>
+              <a:srgbClr val="DCEEE7"/>
+            </a:solidFill>
+          </a:ln>
+        </p:spPr>
+      </p:pic>
+      <p:sp>
+        <p:nvSpPr>
+          <p:cNvPr id="10" name="TextBox 9"/>
+          <p:cNvSpPr txBox="1"/>
+          <p:nvPr/>
+        </p:nvSpPr>
+        <p:spPr>
+          <a:xfrm>
+            <a:off x="640080" y="4114800"/>
+            <a:ext cx="5394960" cy="274320"/>
+          </a:xfrm>
+          <a:prstGeom prst="rect">
+            <a:avLst/>
+          </a:prstGeom>
+          <a:noFill/>
+        </p:spPr>
+        <p:txBody>
+          <a:bodyPr wrap="square" anchor="t">
+            <a:spAutoFit/>
+          </a:bodyPr>
+          <a:lstStyle/>
+          <a:p>
+            <a:pPr algn="l">
+              <a:lnSpc>
+                <a:spcPct val="115000"/>
+              </a:lnSpc>
+            </a:pPr>
+            <a:r>
+              <a:rPr sz="1300" b="1">
+                <a:solidFill>
+                  <a:srgbClr val="0F766E"/>
+                </a:solidFill>
+                <a:latin typeface="Malgun Gothic"/>
+              </a:rPr>
+              <a:t>통계</a:t>
+            </a:r>
+          </a:p>
+        </p:txBody>
+      </p:sp>
+      <p:pic>
+        <p:nvPicPr>
+          <p:cNvPr id="11" name="Picture 10" descr="stats.png"/>
+          <p:cNvPicPr>
+            <a:picLocks noChangeAspect="1"/>
+          </p:cNvPicPr>
+          <p:nvPr/>
+        </p:nvPicPr>
+        <p:blipFill>
+          <a:blip r:embed="rId4"/>
+          <a:stretch>
+            <a:fillRect/>
+          </a:stretch>
+        </p:blipFill>
+        <p:spPr>
+          <a:xfrm>
+            <a:off x="1965960" y="4389120"/>
+            <a:ext cx="2743200" cy="1828800"/>
+          </a:xfrm>
+          <a:prstGeom prst="rect">
+            <a:avLst/>
+          </a:prstGeom>
+          <a:ln w="12700">
+            <a:solidFill>
+              <a:srgbClr val="DCEEE7"/>
+            </a:solidFill>
+          </a:ln>
+        </p:spPr>
+      </p:pic>
+      <p:sp>
+        <p:nvSpPr>
+          <p:cNvPr id="12" name="TextBox 11"/>
+          <p:cNvSpPr txBox="1"/>
+          <p:nvPr/>
+        </p:nvSpPr>
+        <p:spPr>
+          <a:xfrm>
+            <a:off x="6217920" y="4114800"/>
+            <a:ext cx="5394960" cy="274320"/>
+          </a:xfrm>
+          <a:prstGeom prst="rect">
+            <a:avLst/>
+          </a:prstGeom>
+          <a:noFill/>
+        </p:spPr>
+        <p:txBody>
+          <a:bodyPr wrap="square" anchor="t">
+            <a:spAutoFit/>
+          </a:bodyPr>
+          <a:lstStyle/>
+          <a:p>
+            <a:pPr algn="l">
+              <a:lnSpc>
+                <a:spcPct val="115000"/>
+              </a:lnSpc>
+            </a:pPr>
+            <a:r>
+              <a:rPr sz="1300" b="1">
+                <a:solidFill>
+                  <a:srgbClr val="0F766E"/>
+                </a:solidFill>
+                <a:latin typeface="Malgun Gothic"/>
+              </a:rPr>
+              <a:t>관리자 대시보드</a:t>
+            </a:r>
+          </a:p>
+        </p:txBody>
+      </p:sp>
+      <p:pic>
+        <p:nvPicPr>
+          <p:cNvPr id="13" name="Picture 12" descr="admin.png"/>
+          <p:cNvPicPr>
+            <a:picLocks noChangeAspect="1"/>
+          </p:cNvPicPr>
+          <p:nvPr/>
+        </p:nvPicPr>
+        <p:blipFill>
+          <a:blip r:embed="rId5"/>
+          <a:stretch>
+            <a:fillRect/>
+          </a:stretch>
+        </p:blipFill>
+        <p:spPr>
+          <a:xfrm>
+            <a:off x="7543800" y="4389120"/>
+            <a:ext cx="2743200" cy="1828800"/>
+          </a:xfrm>
+          <a:prstGeom prst="rect">
+            <a:avLst/>
+          </a:prstGeom>
+          <a:ln w="12700">
+            <a:solidFill>
+              <a:srgbClr val="DCEEE7"/>
+            </a:solidFill>
+          </a:ln>
+        </p:spPr>
+      </p:pic>
+      <p:sp>
+        <p:nvSpPr>
+          <p:cNvPr id="14" name="TextBox 13"/>
+          <p:cNvSpPr txBox="1"/>
+          <p:nvPr/>
+        </p:nvSpPr>
+        <p:spPr>
+          <a:xfrm>
+            <a:off x="457200" y="6446520"/>
+            <a:ext cx="7315200" cy="320040"/>
+          </a:xfrm>
+          <a:prstGeom prst="rect">
+            <a:avLst/>
+          </a:prstGeom>
+          <a:noFill/>
+        </p:spPr>
+        <p:txBody>
+          <a:bodyPr wrap="square" anchor="t">
+            <a:spAutoFit/>
+          </a:bodyPr>
+          <a:lstStyle/>
+          <a:p>
+            <a:pPr algn="l">
+              <a:lnSpc>
+                <a:spcPct val="115000"/>
+              </a:lnSpc>
+            </a:pPr>
+            <a:r>
               <a:rPr sz="1000" b="0">
                 <a:solidFill>
                   <a:srgbClr val="6E8880"/>
@@ -7482,7 +7482,7 @@
       </p:sp>
       <p:sp>
         <p:nvSpPr>
-          <p:cNvPr id="9" name="TextBox 8"/>
+          <p:cNvPr id="15" name="TextBox 14"/>
           <p:cNvSpPr txBox="1"/>
           <p:nvPr/>
         </p:nvSpPr>

--- a/portfolio/expense-tracker-portfolio.pptx
+++ b/portfolio/expense-tracker-portfolio.pptx
@@ -17,6 +17,11 @@
     <p:sldId id="265" r:id="rId16"/>
     <p:sldId id="266" r:id="rId17"/>
     <p:sldId id="267" r:id="rId18"/>
+    <p:sldId id="268" r:id="rId19"/>
+    <p:sldId id="269" r:id="rId20"/>
+    <p:sldId id="270" r:id="rId21"/>
+    <p:sldId id="271" r:id="rId22"/>
+    <p:sldId id="272" r:id="rId23"/>
   </p:sldIdLst>
   <p:sldSz cx="12191695" cy="6858000" type="screen4x3"/>
   <p:notesSz cx="6858000" cy="9144000"/>
@@ -3720,7 +3725,7 @@
                 </a:solidFill>
                 <a:latin typeface="Malgun Gothic"/>
               </a:rPr>
-              <a:t>WORKFLOW</a:t>
+              <a:t>TECH EVOLUTION</a:t>
             </a:r>
           </a:p>
         </p:txBody>
@@ -3759,7 +3764,7 @@
                 </a:solidFill>
                 <a:latin typeface="Malgun Gothic"/>
               </a:rPr>
-              <a:t>협업 워크플로우</a:t>
+              <a:t>localStorage → Supabase</a:t>
             </a:r>
           </a:p>
         </p:txBody>
@@ -3810,16 +3815,220 @@
       </p:sp>
       <p:sp>
         <p:nvSpPr>
-          <p:cNvPr id="6" name="Rounded Rectangle 5"/>
+          <p:cNvPr id="6" name="Rectangle 5"/>
           <p:cNvSpPr/>
           <p:nvPr/>
         </p:nvSpPr>
         <p:spPr>
           <a:xfrm>
-            <a:off x="822960" y="2377440"/>
-            <a:ext cx="2377440" cy="822960"/>
-          </a:xfrm>
-          <a:prstGeom prst="roundRect">
+            <a:off x="640080" y="2011680"/>
+            <a:ext cx="4937760" cy="3291840"/>
+          </a:xfrm>
+          <a:prstGeom prst="rect">
+            <a:avLst/>
+          </a:prstGeom>
+          <a:solidFill>
+            <a:srgbClr val="FFFFFF"/>
+          </a:solidFill>
+          <a:ln w="12700">
+            <a:solidFill>
+              <a:srgbClr val="DCEEE7"/>
+            </a:solidFill>
+          </a:ln>
+          <a:effectLst/>
+        </p:spPr>
+        <p:style>
+          <a:lnRef idx="1">
+            <a:schemeClr val="accent1"/>
+          </a:lnRef>
+          <a:fillRef idx="3">
+            <a:schemeClr val="accent1"/>
+          </a:fillRef>
+          <a:effectRef idx="2">
+            <a:schemeClr val="accent1"/>
+          </a:effectRef>
+          <a:fontRef idx="minor">
+            <a:schemeClr val="lt1"/>
+          </a:fontRef>
+        </p:style>
+        <p:txBody>
+          <a:bodyPr rtlCol="0" anchor="ctr"/>
+          <a:lstStyle/>
+          <a:p>
+            <a:pPr algn="ctr"/>
+          </a:p>
+        </p:txBody>
+      </p:sp>
+      <p:sp>
+        <p:nvSpPr>
+          <p:cNvPr id="7" name="TextBox 6"/>
+          <p:cNvSpPr txBox="1"/>
+          <p:nvPr/>
+        </p:nvSpPr>
+        <p:spPr>
+          <a:xfrm>
+            <a:off x="914400" y="2240280"/>
+            <a:ext cx="4389120" cy="365760"/>
+          </a:xfrm>
+          <a:prstGeom prst="rect">
+            <a:avLst/>
+          </a:prstGeom>
+          <a:noFill/>
+        </p:spPr>
+        <p:txBody>
+          <a:bodyPr wrap="square" anchor="t">
+            <a:spAutoFit/>
+          </a:bodyPr>
+          <a:lstStyle/>
+          <a:p>
+            <a:pPr algn="l">
+              <a:lnSpc>
+                <a:spcPct val="115000"/>
+              </a:lnSpc>
+            </a:pPr>
+            <a:r>
+              <a:rPr sz="1300" b="1">
+                <a:solidFill>
+                  <a:srgbClr val="6E8880"/>
+                </a:solidFill>
+                <a:latin typeface="Malgun Gothic"/>
+              </a:rPr>
+              <a:t>BEFORE</a:t>
+            </a:r>
+          </a:p>
+        </p:txBody>
+      </p:sp>
+      <p:sp>
+        <p:nvSpPr>
+          <p:cNvPr id="8" name="TextBox 7"/>
+          <p:cNvSpPr txBox="1"/>
+          <p:nvPr/>
+        </p:nvSpPr>
+        <p:spPr>
+          <a:xfrm>
+            <a:off x="914400" y="2606040"/>
+            <a:ext cx="4389120" cy="457200"/>
+          </a:xfrm>
+          <a:prstGeom prst="rect">
+            <a:avLst/>
+          </a:prstGeom>
+          <a:noFill/>
+        </p:spPr>
+        <p:txBody>
+          <a:bodyPr wrap="square" anchor="t">
+            <a:spAutoFit/>
+          </a:bodyPr>
+          <a:lstStyle/>
+          <a:p>
+            <a:pPr algn="l">
+              <a:lnSpc>
+                <a:spcPct val="115000"/>
+              </a:lnSpc>
+            </a:pPr>
+            <a:r>
+              <a:rPr sz="1800" b="1">
+                <a:solidFill>
+                  <a:srgbClr val="1F2E2A"/>
+                </a:solidFill>
+                <a:latin typeface="Malgun Gothic"/>
+              </a:rPr>
+              <a:t>정적 사이트 + localStorage</a:t>
+            </a:r>
+          </a:p>
+        </p:txBody>
+      </p:sp>
+      <p:sp>
+        <p:nvSpPr>
+          <p:cNvPr id="9" name="TextBox 8"/>
+          <p:cNvSpPr txBox="1"/>
+          <p:nvPr/>
+        </p:nvSpPr>
+        <p:spPr>
+          <a:xfrm>
+            <a:off x="914400" y="3154680"/>
+            <a:ext cx="4389120" cy="2011680"/>
+          </a:xfrm>
+          <a:prstGeom prst="rect">
+            <a:avLst/>
+          </a:prstGeom>
+          <a:noFill/>
+        </p:spPr>
+        <p:txBody>
+          <a:bodyPr wrap="square">
+            <a:spAutoFit/>
+          </a:bodyPr>
+          <a:lstStyle/>
+          <a:p>
+            <a:pPr>
+              <a:lnSpc>
+                <a:spcPct val="120000"/>
+              </a:lnSpc>
+              <a:spcAft>
+                <a:spcPts val="1000"/>
+              </a:spcAft>
+            </a:pPr>
+            <a:r>
+              <a:rPr sz="1400" b="0">
+                <a:solidFill>
+                  <a:srgbClr val="1F2E2A"/>
+                </a:solidFill>
+                <a:latin typeface="Malgun Gothic"/>
+              </a:rPr>
+              <a:t>•  백엔드 서버 없이 브라우저에 데이터 저장</a:t>
+            </a:r>
+          </a:p>
+          <a:p>
+            <a:pPr>
+              <a:lnSpc>
+                <a:spcPct val="120000"/>
+              </a:lnSpc>
+              <a:spcAft>
+                <a:spcPts val="1000"/>
+              </a:spcAft>
+            </a:pPr>
+            <a:r>
+              <a:rPr sz="1400" b="0">
+                <a:solidFill>
+                  <a:srgbClr val="1F2E2A"/>
+                </a:solidFill>
+                <a:latin typeface="Malgun Gothic"/>
+              </a:rPr>
+              <a:t>•  비밀번호까지 평문으로 저장 (데모 목적)</a:t>
+            </a:r>
+          </a:p>
+          <a:p>
+            <a:pPr>
+              <a:lnSpc>
+                <a:spcPct val="120000"/>
+              </a:lnSpc>
+              <a:spcAft>
+                <a:spcPts val="1000"/>
+              </a:spcAft>
+            </a:pPr>
+            <a:r>
+              <a:rPr sz="1400" b="0">
+                <a:solidFill>
+                  <a:srgbClr val="1F2E2A"/>
+                </a:solidFill>
+                <a:latin typeface="Malgun Gothic"/>
+              </a:rPr>
+              <a:t>•  브라우저·기기 간 데이터 공유 불가</a:t>
+            </a:r>
+          </a:p>
+        </p:txBody>
+      </p:sp>
+      <p:sp>
+        <p:nvSpPr>
+          <p:cNvPr id="10" name="Rectangle 9"/>
+          <p:cNvSpPr/>
+          <p:nvPr/>
+        </p:nvSpPr>
+        <p:spPr>
+          <a:xfrm>
+            <a:off x="6583680" y="2011680"/>
+            <a:ext cx="4937760" cy="3291840"/>
+          </a:xfrm>
+          <a:prstGeom prst="rect">
             <a:avLst/>
           </a:prstGeom>
           <a:solidFill>
@@ -3854,14 +4063,14 @@
       </p:sp>
       <p:sp>
         <p:nvSpPr>
-          <p:cNvPr id="7" name="TextBox 6"/>
-          <p:cNvSpPr txBox="1"/>
-          <p:nvPr/>
-        </p:nvSpPr>
-        <p:spPr>
-          <a:xfrm>
-            <a:off x="822960" y="2624328"/>
-            <a:ext cx="2377440" cy="365760"/>
+          <p:cNvPr id="11" name="TextBox 10"/>
+          <p:cNvSpPr txBox="1"/>
+          <p:nvPr/>
+        </p:nvSpPr>
+        <p:spPr>
+          <a:xfrm>
+            <a:off x="6858000" y="2240280"/>
+            <a:ext cx="4389120" cy="365760"/>
           </a:xfrm>
           <a:prstGeom prst="rect">
             <a:avLst/>
@@ -3874,35 +4083,154 @@
           </a:bodyPr>
           <a:lstStyle/>
           <a:p>
-            <a:pPr algn="ctr">
+            <a:pPr algn="l">
               <a:lnSpc>
                 <a:spcPct val="115000"/>
               </a:lnSpc>
             </a:pPr>
             <a:r>
-              <a:rPr sz="1600" b="1">
+              <a:rPr sz="1300" b="1">
+                <a:solidFill>
+                  <a:srgbClr val="34D399"/>
+                </a:solidFill>
+                <a:latin typeface="Malgun Gothic"/>
+              </a:rPr>
+              <a:t>AFTER</a:t>
+            </a:r>
+          </a:p>
+        </p:txBody>
+      </p:sp>
+      <p:sp>
+        <p:nvSpPr>
+          <p:cNvPr id="12" name="TextBox 11"/>
+          <p:cNvSpPr txBox="1"/>
+          <p:nvPr/>
+        </p:nvSpPr>
+        <p:spPr>
+          <a:xfrm>
+            <a:off x="6858000" y="2606040"/>
+            <a:ext cx="4389120" cy="457200"/>
+          </a:xfrm>
+          <a:prstGeom prst="rect">
+            <a:avLst/>
+          </a:prstGeom>
+          <a:noFill/>
+        </p:spPr>
+        <p:txBody>
+          <a:bodyPr wrap="square" anchor="t">
+            <a:spAutoFit/>
+          </a:bodyPr>
+          <a:lstStyle/>
+          <a:p>
+            <a:pPr algn="l">
+              <a:lnSpc>
+                <a:spcPct val="115000"/>
+              </a:lnSpc>
+            </a:pPr>
+            <a:r>
+              <a:rPr sz="1800" b="1">
                 <a:solidFill>
                   <a:srgbClr val="FFFFFF"/>
                 </a:solidFill>
                 <a:latin typeface="Malgun Gothic"/>
               </a:rPr>
-              <a:t>feat/shared</a:t>
-            </a:r>
-          </a:p>
-        </p:txBody>
-      </p:sp>
-      <p:sp>
-        <p:nvSpPr>
-          <p:cNvPr id="8" name="Right Arrow 7"/>
+              <a:t>Supabase (PostgreSQL)</a:t>
+            </a:r>
+          </a:p>
+        </p:txBody>
+      </p:sp>
+      <p:sp>
+        <p:nvSpPr>
+          <p:cNvPr id="13" name="TextBox 12"/>
+          <p:cNvSpPr txBox="1"/>
+          <p:nvPr/>
+        </p:nvSpPr>
+        <p:spPr>
+          <a:xfrm>
+            <a:off x="6858000" y="3154680"/>
+            <a:ext cx="4389120" cy="2011680"/>
+          </a:xfrm>
+          <a:prstGeom prst="rect">
+            <a:avLst/>
+          </a:prstGeom>
+          <a:noFill/>
+        </p:spPr>
+        <p:txBody>
+          <a:bodyPr wrap="square">
+            <a:spAutoFit/>
+          </a:bodyPr>
+          <a:lstStyle/>
+          <a:p>
+            <a:pPr>
+              <a:lnSpc>
+                <a:spcPct val="120000"/>
+              </a:lnSpc>
+              <a:spcAft>
+                <a:spcPts val="1000"/>
+              </a:spcAft>
+            </a:pPr>
+            <a:r>
+              <a:rPr sz="1400" b="0">
+                <a:solidFill>
+                  <a:srgbClr val="E8F6F1"/>
+                </a:solidFill>
+                <a:latin typeface="Malgun Gothic"/>
+              </a:rPr>
+              <a:t>•  Supabase Auth로 인증 위임 (평문 비밀번호 제거)</a:t>
+            </a:r>
+          </a:p>
+          <a:p>
+            <a:pPr>
+              <a:lnSpc>
+                <a:spcPct val="120000"/>
+              </a:lnSpc>
+              <a:spcAft>
+                <a:spcPts val="1000"/>
+              </a:spcAft>
+            </a:pPr>
+            <a:r>
+              <a:rPr sz="1400" b="0">
+                <a:solidFill>
+                  <a:srgbClr val="E8F6F1"/>
+                </a:solidFill>
+                <a:latin typeface="Malgun Gothic"/>
+              </a:rPr>
+              <a:t>•  profiles / categories / expenses 3개 테이블 설계</a:t>
+            </a:r>
+          </a:p>
+          <a:p>
+            <a:pPr>
+              <a:lnSpc>
+                <a:spcPct val="120000"/>
+              </a:lnSpc>
+              <a:spcAft>
+                <a:spcPts val="1000"/>
+              </a:spcAft>
+            </a:pPr>
+            <a:r>
+              <a:rPr sz="1400" b="0">
+                <a:solidFill>
+                  <a:srgbClr val="E8F6F1"/>
+                </a:solidFill>
+                <a:latin typeface="Malgun Gothic"/>
+              </a:rPr>
+              <a:t>•  Row Level Security로 행 단위 접근 제어</a:t>
+            </a:r>
+          </a:p>
+        </p:txBody>
+      </p:sp>
+      <p:sp>
+        <p:nvSpPr>
+          <p:cNvPr id="14" name="Chevron 13"/>
           <p:cNvSpPr/>
           <p:nvPr/>
         </p:nvSpPr>
         <p:spPr>
           <a:xfrm>
-            <a:off x="3246120" y="2651760"/>
-            <a:ext cx="274320" cy="274320"/>
-          </a:xfrm>
-          <a:prstGeom prst="rightArrow">
+            <a:off x="5715000" y="3291840"/>
+            <a:ext cx="731520" cy="548640"/>
+          </a:xfrm>
+          <a:prstGeom prst="chevron">
             <a:avLst/>
           </a:prstGeom>
           <a:solidFill>
@@ -3936,435 +4264,7 @@
       </p:sp>
       <p:sp>
         <p:nvSpPr>
-          <p:cNvPr id="9" name="Rounded Rectangle 8"/>
-          <p:cNvSpPr/>
-          <p:nvPr/>
-        </p:nvSpPr>
-        <p:spPr>
-          <a:xfrm>
-            <a:off x="3520440" y="2377440"/>
-            <a:ext cx="2377440" cy="822960"/>
-          </a:xfrm>
-          <a:prstGeom prst="roundRect">
-            <a:avLst/>
-          </a:prstGeom>
-          <a:solidFill>
-            <a:srgbClr val="0F766E"/>
-          </a:solidFill>
-          <a:ln>
-            <a:noFill/>
-          </a:ln>
-          <a:effectLst/>
-        </p:spPr>
-        <p:style>
-          <a:lnRef idx="1">
-            <a:schemeClr val="accent1"/>
-          </a:lnRef>
-          <a:fillRef idx="3">
-            <a:schemeClr val="accent1"/>
-          </a:fillRef>
-          <a:effectRef idx="2">
-            <a:schemeClr val="accent1"/>
-          </a:effectRef>
-          <a:fontRef idx="minor">
-            <a:schemeClr val="lt1"/>
-          </a:fontRef>
-        </p:style>
-        <p:txBody>
-          <a:bodyPr rtlCol="0" anchor="ctr"/>
-          <a:lstStyle/>
-          <a:p>
-            <a:pPr algn="ctr"/>
-          </a:p>
-        </p:txBody>
-      </p:sp>
-      <p:sp>
-        <p:nvSpPr>
-          <p:cNvPr id="10" name="TextBox 9"/>
-          <p:cNvSpPr txBox="1"/>
-          <p:nvPr/>
-        </p:nvSpPr>
-        <p:spPr>
-          <a:xfrm>
-            <a:off x="3520440" y="2624328"/>
-            <a:ext cx="2377440" cy="365760"/>
-          </a:xfrm>
-          <a:prstGeom prst="rect">
-            <a:avLst/>
-          </a:prstGeom>
-          <a:noFill/>
-        </p:spPr>
-        <p:txBody>
-          <a:bodyPr wrap="square" anchor="t">
-            <a:spAutoFit/>
-          </a:bodyPr>
-          <a:lstStyle/>
-          <a:p>
-            <a:pPr algn="ctr">
-              <a:lnSpc>
-                <a:spcPct val="115000"/>
-              </a:lnSpc>
-            </a:pPr>
-            <a:r>
-              <a:rPr sz="1600" b="1">
-                <a:solidFill>
-                  <a:srgbClr val="FFFFFF"/>
-                </a:solidFill>
-                <a:latin typeface="Malgun Gothic"/>
-              </a:rPr>
-              <a:t>feat/auth</a:t>
-            </a:r>
-          </a:p>
-        </p:txBody>
-      </p:sp>
-      <p:sp>
-        <p:nvSpPr>
-          <p:cNvPr id="11" name="Right Arrow 10"/>
-          <p:cNvSpPr/>
-          <p:nvPr/>
-        </p:nvSpPr>
-        <p:spPr>
-          <a:xfrm>
-            <a:off x="5943600" y="2651760"/>
-            <a:ext cx="274320" cy="274320"/>
-          </a:xfrm>
-          <a:prstGeom prst="rightArrow">
-            <a:avLst/>
-          </a:prstGeom>
-          <a:solidFill>
-            <a:srgbClr val="34D399"/>
-          </a:solidFill>
-          <a:ln>
-            <a:noFill/>
-          </a:ln>
-        </p:spPr>
-        <p:style>
-          <a:lnRef idx="1">
-            <a:schemeClr val="accent1"/>
-          </a:lnRef>
-          <a:fillRef idx="3">
-            <a:schemeClr val="accent1"/>
-          </a:fillRef>
-          <a:effectRef idx="2">
-            <a:schemeClr val="accent1"/>
-          </a:effectRef>
-          <a:fontRef idx="minor">
-            <a:schemeClr val="lt1"/>
-          </a:fontRef>
-        </p:style>
-        <p:txBody>
-          <a:bodyPr rtlCol="0" anchor="ctr"/>
-          <a:lstStyle/>
-          <a:p>
-            <a:pPr algn="ctr"/>
-          </a:p>
-        </p:txBody>
-      </p:sp>
-      <p:sp>
-        <p:nvSpPr>
-          <p:cNvPr id="12" name="Rounded Rectangle 11"/>
-          <p:cNvSpPr/>
-          <p:nvPr/>
-        </p:nvSpPr>
-        <p:spPr>
-          <a:xfrm>
-            <a:off x="6217920" y="2377440"/>
-            <a:ext cx="2377440" cy="822960"/>
-          </a:xfrm>
-          <a:prstGeom prst="roundRect">
-            <a:avLst/>
-          </a:prstGeom>
-          <a:solidFill>
-            <a:srgbClr val="0F766E"/>
-          </a:solidFill>
-          <a:ln>
-            <a:noFill/>
-          </a:ln>
-          <a:effectLst/>
-        </p:spPr>
-        <p:style>
-          <a:lnRef idx="1">
-            <a:schemeClr val="accent1"/>
-          </a:lnRef>
-          <a:fillRef idx="3">
-            <a:schemeClr val="accent1"/>
-          </a:fillRef>
-          <a:effectRef idx="2">
-            <a:schemeClr val="accent1"/>
-          </a:effectRef>
-          <a:fontRef idx="minor">
-            <a:schemeClr val="lt1"/>
-          </a:fontRef>
-        </p:style>
-        <p:txBody>
-          <a:bodyPr rtlCol="0" anchor="ctr"/>
-          <a:lstStyle/>
-          <a:p>
-            <a:pPr algn="ctr"/>
-          </a:p>
-        </p:txBody>
-      </p:sp>
-      <p:sp>
-        <p:nvSpPr>
-          <p:cNvPr id="13" name="TextBox 12"/>
-          <p:cNvSpPr txBox="1"/>
-          <p:nvPr/>
-        </p:nvSpPr>
-        <p:spPr>
-          <a:xfrm>
-            <a:off x="6217920" y="2624328"/>
-            <a:ext cx="2377440" cy="365760"/>
-          </a:xfrm>
-          <a:prstGeom prst="rect">
-            <a:avLst/>
-          </a:prstGeom>
-          <a:noFill/>
-        </p:spPr>
-        <p:txBody>
-          <a:bodyPr wrap="square" anchor="t">
-            <a:spAutoFit/>
-          </a:bodyPr>
-          <a:lstStyle/>
-          <a:p>
-            <a:pPr algn="ctr">
-              <a:lnSpc>
-                <a:spcPct val="115000"/>
-              </a:lnSpc>
-            </a:pPr>
-            <a:r>
-              <a:rPr sz="1600" b="1">
-                <a:solidFill>
-                  <a:srgbClr val="FFFFFF"/>
-                </a:solidFill>
-                <a:latin typeface="Malgun Gothic"/>
-              </a:rPr>
-              <a:t>feat/core</a:t>
-            </a:r>
-          </a:p>
-        </p:txBody>
-      </p:sp>
-      <p:sp>
-        <p:nvSpPr>
-          <p:cNvPr id="14" name="Right Arrow 13"/>
-          <p:cNvSpPr/>
-          <p:nvPr/>
-        </p:nvSpPr>
-        <p:spPr>
-          <a:xfrm>
-            <a:off x="8641080" y="2651760"/>
-            <a:ext cx="274320" cy="274320"/>
-          </a:xfrm>
-          <a:prstGeom prst="rightArrow">
-            <a:avLst/>
-          </a:prstGeom>
-          <a:solidFill>
-            <a:srgbClr val="34D399"/>
-          </a:solidFill>
-          <a:ln>
-            <a:noFill/>
-          </a:ln>
-        </p:spPr>
-        <p:style>
-          <a:lnRef idx="1">
-            <a:schemeClr val="accent1"/>
-          </a:lnRef>
-          <a:fillRef idx="3">
-            <a:schemeClr val="accent1"/>
-          </a:fillRef>
-          <a:effectRef idx="2">
-            <a:schemeClr val="accent1"/>
-          </a:effectRef>
-          <a:fontRef idx="minor">
-            <a:schemeClr val="lt1"/>
-          </a:fontRef>
-        </p:style>
-        <p:txBody>
-          <a:bodyPr rtlCol="0" anchor="ctr"/>
-          <a:lstStyle/>
-          <a:p>
-            <a:pPr algn="ctr"/>
-          </a:p>
-        </p:txBody>
-      </p:sp>
-      <p:sp>
-        <p:nvSpPr>
-          <p:cNvPr id="15" name="Rounded Rectangle 14"/>
-          <p:cNvSpPr/>
-          <p:nvPr/>
-        </p:nvSpPr>
-        <p:spPr>
-          <a:xfrm>
-            <a:off x="8915400" y="2377440"/>
-            <a:ext cx="2377440" cy="822960"/>
-          </a:xfrm>
-          <a:prstGeom prst="roundRect">
-            <a:avLst/>
-          </a:prstGeom>
-          <a:solidFill>
-            <a:srgbClr val="1E3A34"/>
-          </a:solidFill>
-          <a:ln>
-            <a:noFill/>
-          </a:ln>
-          <a:effectLst/>
-        </p:spPr>
-        <p:style>
-          <a:lnRef idx="1">
-            <a:schemeClr val="accent1"/>
-          </a:lnRef>
-          <a:fillRef idx="3">
-            <a:schemeClr val="accent1"/>
-          </a:fillRef>
-          <a:effectRef idx="2">
-            <a:schemeClr val="accent1"/>
-          </a:effectRef>
-          <a:fontRef idx="minor">
-            <a:schemeClr val="lt1"/>
-          </a:fontRef>
-        </p:style>
-        <p:txBody>
-          <a:bodyPr rtlCol="0" anchor="ctr"/>
-          <a:lstStyle/>
-          <a:p>
-            <a:pPr algn="ctr"/>
-          </a:p>
-        </p:txBody>
-      </p:sp>
-      <p:sp>
-        <p:nvSpPr>
-          <p:cNvPr id="16" name="TextBox 15"/>
-          <p:cNvSpPr txBox="1"/>
-          <p:nvPr/>
-        </p:nvSpPr>
-        <p:spPr>
-          <a:xfrm>
-            <a:off x="8915400" y="2624328"/>
-            <a:ext cx="2377440" cy="365760"/>
-          </a:xfrm>
-          <a:prstGeom prst="rect">
-            <a:avLst/>
-          </a:prstGeom>
-          <a:noFill/>
-        </p:spPr>
-        <p:txBody>
-          <a:bodyPr wrap="square" anchor="t">
-            <a:spAutoFit/>
-          </a:bodyPr>
-          <a:lstStyle/>
-          <a:p>
-            <a:pPr algn="ctr">
-              <a:lnSpc>
-                <a:spcPct val="115000"/>
-              </a:lnSpc>
-            </a:pPr>
-            <a:r>
-              <a:rPr sz="1600" b="1">
-                <a:solidFill>
-                  <a:srgbClr val="FFFFFF"/>
-                </a:solidFill>
-                <a:latin typeface="Malgun Gothic"/>
-              </a:rPr>
-              <a:t>main</a:t>
-            </a:r>
-          </a:p>
-        </p:txBody>
-      </p:sp>
-      <p:sp>
-        <p:nvSpPr>
-          <p:cNvPr id="17" name="TextBox 16"/>
-          <p:cNvSpPr txBox="1"/>
-          <p:nvPr/>
-        </p:nvSpPr>
-        <p:spPr>
-          <a:xfrm>
-            <a:off x="822960" y="3657600"/>
-            <a:ext cx="10515600" cy="2560320"/>
-          </a:xfrm>
-          <a:prstGeom prst="rect">
-            <a:avLst/>
-          </a:prstGeom>
-          <a:noFill/>
-        </p:spPr>
-        <p:txBody>
-          <a:bodyPr wrap="square">
-            <a:spAutoFit/>
-          </a:bodyPr>
-          <a:lstStyle/>
-          <a:p>
-            <a:pPr>
-              <a:lnSpc>
-                <a:spcPct val="120000"/>
-              </a:lnSpc>
-              <a:spcAft>
-                <a:spcPts val="1000"/>
-              </a:spcAft>
-            </a:pPr>
-            <a:r>
-              <a:rPr sz="1500" b="0">
-                <a:solidFill>
-                  <a:srgbClr val="1F2E2A"/>
-                </a:solidFill>
-                <a:latin typeface="Malgun Gothic"/>
-              </a:rPr>
-              <a:t>•  PR 기반 병합</a:t>
-            </a:r>
-          </a:p>
-          <a:p>
-            <a:pPr>
-              <a:spcAft>
-                <a:spcPts val="1000"/>
-              </a:spcAft>
-            </a:pPr>
-            <a:r>
-              <a:rPr sz="1200">
-                <a:solidFill>
-                  <a:srgbClr val="6E8880"/>
-                </a:solidFill>
-                <a:latin typeface="Malgun Gothic"/>
-              </a:rPr>
-              <a:t>     공통 자원 → 인증 → 핵심 기능 순으로 브랜치를 나눠 작업 후 Pull Request로 main에 병합</a:t>
-            </a:r>
-          </a:p>
-          <a:p>
-            <a:pPr>
-              <a:lnSpc>
-                <a:spcPct val="120000"/>
-              </a:lnSpc>
-              <a:spcAft>
-                <a:spcPts val="1000"/>
-              </a:spcAft>
-            </a:pPr>
-            <a:r>
-              <a:rPr sz="1500" b="0">
-                <a:solidFill>
-                  <a:srgbClr val="1F2E2A"/>
-                </a:solidFill>
-                <a:latin typeface="Malgun Gothic"/>
-              </a:rPr>
-              <a:t>•  병합 후 브랜치 정리</a:t>
-            </a:r>
-          </a:p>
-          <a:p>
-            <a:pPr>
-              <a:spcAft>
-                <a:spcPts val="1000"/>
-              </a:spcAft>
-            </a:pPr>
-            <a:r>
-              <a:rPr sz="1200">
-                <a:solidFill>
-                  <a:srgbClr val="6E8880"/>
-                </a:solidFill>
-                <a:latin typeface="Malgun Gothic"/>
-              </a:rPr>
-              <a:t>     머지가 끝난 feat/* 브랜치와 사용하지 않는 master 브랜치를 삭제해 원격 저장소를 깔끔하게 유지</a:t>
-            </a:r>
-          </a:p>
-        </p:txBody>
-      </p:sp>
-      <p:sp>
-        <p:nvSpPr>
-          <p:cNvPr id="18" name="TextBox 17"/>
+          <p:cNvPr id="15" name="TextBox 14"/>
           <p:cNvSpPr txBox="1"/>
           <p:nvPr/>
         </p:nvSpPr>
@@ -4403,7 +4303,7 @@
       </p:sp>
       <p:sp>
         <p:nvSpPr>
-          <p:cNvPr id="19" name="TextBox 18"/>
+          <p:cNvPr id="16" name="TextBox 15"/>
           <p:cNvSpPr txBox="1"/>
           <p:nvPr/>
         </p:nvSpPr>
@@ -4544,7 +4444,7 @@
                 </a:solidFill>
                 <a:latin typeface="Malgun Gothic"/>
               </a:rPr>
-              <a:t>RETROSPECTIVE</a:t>
+              <a:t>SECURITY</a:t>
             </a:r>
           </a:p>
         </p:txBody>
@@ -4583,7 +4483,7 @@
                 </a:solidFill>
                 <a:latin typeface="Malgun Gothic"/>
               </a:rPr>
-              <a:t>회고 &amp; 다음 단계</a:t>
+              <a:t>보안 &amp; 데이터 무결성</a:t>
             </a:r>
           </a:p>
         </p:txBody>
@@ -4641,46 +4541,7 @@
         <p:spPr>
           <a:xfrm>
             <a:off x="640080" y="1828800"/>
-            <a:ext cx="5303520" cy="365760"/>
-          </a:xfrm>
-          <a:prstGeom prst="rect">
-            <a:avLst/>
-          </a:prstGeom>
-          <a:noFill/>
-        </p:spPr>
-        <p:txBody>
-          <a:bodyPr wrap="square" anchor="t">
-            <a:spAutoFit/>
-          </a:bodyPr>
-          <a:lstStyle/>
-          <a:p>
-            <a:pPr algn="l">
-              <a:lnSpc>
-                <a:spcPct val="115000"/>
-              </a:lnSpc>
-            </a:pPr>
-            <a:r>
-              <a:rPr sz="1600" b="1">
-                <a:solidFill>
-                  <a:srgbClr val="0F766E"/>
-                </a:solidFill>
-                <a:latin typeface="Malgun Gothic"/>
-              </a:rPr>
-              <a:t>배운 점</a:t>
-            </a:r>
-          </a:p>
-        </p:txBody>
-      </p:sp>
-      <p:sp>
-        <p:nvSpPr>
-          <p:cNvPr id="7" name="TextBox 6"/>
-          <p:cNvSpPr txBox="1"/>
-          <p:nvPr/>
-        </p:nvSpPr>
-        <p:spPr>
-          <a:xfrm>
-            <a:off x="640080" y="2240280"/>
-            <a:ext cx="5303520" cy="3657600"/>
+            <a:ext cx="10789920" cy="4572000"/>
           </a:xfrm>
           <a:prstGeom prst="rect">
             <a:avLst/>
@@ -4702,32 +4563,29 @@
               </a:spcAft>
             </a:pPr>
             <a:r>
-              <a:rPr sz="1400" b="0">
+              <a:rPr sz="1600" b="0">
                 <a:solidFill>
                   <a:srgbClr val="1F2E2A"/>
                 </a:solidFill>
                 <a:latin typeface="Malgun Gothic"/>
               </a:rPr>
-              <a:t>•  정적 데모(localStorage)에서 실제 백엔드(Supabase)로 옮기며 인증·보안을 다시 설계하는 경험</a:t>
+              <a:t>•  Row Level Security (RLS)</a:t>
             </a:r>
           </a:p>
           <a:p>
             <a:pPr>
-              <a:lnSpc>
-                <a:spcPct val="120000"/>
-              </a:lnSpc>
               <a:spcAft>
                 <a:spcPts val="1000"/>
               </a:spcAft>
             </a:pPr>
             <a:r>
-              <a:rPr sz="1400" b="0">
-                <a:solidFill>
-                  <a:srgbClr val="1F2E2A"/>
-                </a:solidFill>
-                <a:latin typeface="Malgun Gothic"/>
-              </a:rPr>
-              <a:t>•  RLS 정책의 재귀 문제를 SECURITY DEFINER 함수 패턴으로 해결</a:t>
+              <a:rPr sz="1300">
+                <a:solidFill>
+                  <a:srgbClr val="6E8880"/>
+                </a:solidFill>
+                <a:latin typeface="Malgun Gothic"/>
+              </a:rPr>
+              <a:t>     고객은 본인 소유 데이터(profiles/expenses)만 조회·수정 가능, 관리자는 role 기반으로 전체 접근</a:t>
             </a:r>
           </a:p>
           <a:p>
@@ -4740,94 +4598,29 @@
               </a:spcAft>
             </a:pPr>
             <a:r>
-              <a:rPr sz="1400" b="0">
+              <a:rPr sz="1600" b="0">
                 <a:solidFill>
                   <a:srgbClr val="1F2E2A"/>
                 </a:solidFill>
                 <a:latin typeface="Malgun Gothic"/>
               </a:rPr>
-              <a:t>•  Security Advisor로 보이지 않는 권한 노출까지 점검하는 습관</a:t>
-            </a:r>
-          </a:p>
-        </p:txBody>
-      </p:sp>
-      <p:sp>
-        <p:nvSpPr>
-          <p:cNvPr id="8" name="TextBox 7"/>
-          <p:cNvSpPr txBox="1"/>
-          <p:nvPr/>
-        </p:nvSpPr>
-        <p:spPr>
-          <a:xfrm>
-            <a:off x="6309360" y="1828800"/>
-            <a:ext cx="5303520" cy="365760"/>
-          </a:xfrm>
-          <a:prstGeom prst="rect">
-            <a:avLst/>
-          </a:prstGeom>
-          <a:noFill/>
-        </p:spPr>
-        <p:txBody>
-          <a:bodyPr wrap="square" anchor="t">
-            <a:spAutoFit/>
-          </a:bodyPr>
-          <a:lstStyle/>
-          <a:p>
-            <a:pPr algn="l">
-              <a:lnSpc>
-                <a:spcPct val="115000"/>
-              </a:lnSpc>
-            </a:pPr>
-            <a:r>
-              <a:rPr sz="1600" b="1">
-                <a:solidFill>
-                  <a:srgbClr val="0F766E"/>
-                </a:solidFill>
-                <a:latin typeface="Malgun Gothic"/>
-              </a:rPr>
-              <a:t>다음 단계</a:t>
-            </a:r>
-          </a:p>
-        </p:txBody>
-      </p:sp>
-      <p:sp>
-        <p:nvSpPr>
-          <p:cNvPr id="9" name="TextBox 8"/>
-          <p:cNvSpPr txBox="1"/>
-          <p:nvPr/>
-        </p:nvSpPr>
-        <p:spPr>
-          <a:xfrm>
-            <a:off x="6309360" y="2240280"/>
-            <a:ext cx="5303520" cy="3657600"/>
-          </a:xfrm>
-          <a:prstGeom prst="rect">
-            <a:avLst/>
-          </a:prstGeom>
-          <a:noFill/>
-        </p:spPr>
-        <p:txBody>
-          <a:bodyPr wrap="square">
-            <a:spAutoFit/>
-          </a:bodyPr>
-          <a:lstStyle/>
+              <a:t>•  재귀 없는 관리자 판별</a:t>
+            </a:r>
+          </a:p>
           <a:p>
             <a:pPr>
-              <a:lnSpc>
-                <a:spcPct val="120000"/>
-              </a:lnSpc>
               <a:spcAft>
                 <a:spcPts val="1000"/>
               </a:spcAft>
             </a:pPr>
             <a:r>
-              <a:rPr sz="1400" b="0">
-                <a:solidFill>
-                  <a:srgbClr val="1F2E2A"/>
-                </a:solidFill>
-                <a:latin typeface="Malgun Gothic"/>
-              </a:rPr>
-              <a:t>•  관리자 계정도 Supabase Auth 기반으로 전환 검토</a:t>
+              <a:rPr sz="1300">
+                <a:solidFill>
+                  <a:srgbClr val="6E8880"/>
+                </a:solidFill>
+                <a:latin typeface="Malgun Gothic"/>
+              </a:rPr>
+              <a:t>     profiles.role을 정책 안에서 직접 조회하면 무한 재귀가 발생 → SECURITY DEFINER 함수(is_admin())로 우회</a:t>
             </a:r>
           </a:p>
           <a:p>
@@ -4840,39 +4633,71 @@
               </a:spcAft>
             </a:pPr>
             <a:r>
-              <a:rPr sz="1400" b="0">
+              <a:rPr sz="1600" b="0">
                 <a:solidFill>
                   <a:srgbClr val="1F2E2A"/>
                 </a:solidFill>
                 <a:latin typeface="Malgun Gothic"/>
               </a:rPr>
-              <a:t>•  프론트엔드(js/utils.js)를 Supabase 클라이언트 호출로 교체</a:t>
+              <a:t>•  최소 권한 원칙</a:t>
             </a:r>
           </a:p>
           <a:p>
             <a:pPr>
-              <a:lnSpc>
-                <a:spcPct val="120000"/>
-              </a:lnSpc>
               <a:spcAft>
                 <a:spcPts val="1000"/>
               </a:spcAft>
             </a:pPr>
             <a:r>
-              <a:rPr sz="1400" b="0">
+              <a:rPr sz="1300">
+                <a:solidFill>
+                  <a:srgbClr val="6E8880"/>
+                </a:solidFill>
+                <a:latin typeface="Malgun Gothic"/>
+              </a:rPr>
+              <a:t>     Supabase Advisor로 내부 함수의 불필요한 RPC 노출을 점검 → anon/authenticated의 불필요한 EXECUTE 권한 회수</a:t>
+            </a:r>
+          </a:p>
+          <a:p>
+            <a:pPr>
+              <a:lnSpc>
+                <a:spcPct val="120000"/>
+              </a:lnSpc>
+              <a:spcAft>
+                <a:spcPts val="1000"/>
+              </a:spcAft>
+            </a:pPr>
+            <a:r>
+              <a:rPr sz="1600" b="0">
                 <a:solidFill>
                   <a:srgbClr val="1F2E2A"/>
                 </a:solidFill>
                 <a:latin typeface="Malgun Gothic"/>
               </a:rPr>
-              <a:t>•  관리자 페이지에 실시간 통계·알림 기능 확장</a:t>
-            </a:r>
-          </a:p>
-        </p:txBody>
-      </p:sp>
-      <p:sp>
-        <p:nvSpPr>
-          <p:cNvPr id="10" name="TextBox 9"/>
+              <a:t>•  인증 위임</a:t>
+            </a:r>
+          </a:p>
+          <a:p>
+            <a:pPr>
+              <a:spcAft>
+                <a:spcPts val="1000"/>
+              </a:spcAft>
+            </a:pPr>
+            <a:r>
+              <a:rPr sz="1300">
+                <a:solidFill>
+                  <a:srgbClr val="6E8880"/>
+                </a:solidFill>
+                <a:latin typeface="Malgun Gothic"/>
+              </a:rPr>
+              <a:t>     비밀번호 저장·검증을 직접 구현하지 않고 Supabase Auth에 위임해 자체 구현 리스크 제거</a:t>
+            </a:r>
+          </a:p>
+        </p:txBody>
+      </p:sp>
+      <p:sp>
+        <p:nvSpPr>
+          <p:cNvPr id="7" name="TextBox 6"/>
           <p:cNvSpPr txBox="1"/>
           <p:nvPr/>
         </p:nvSpPr>
@@ -4911,7 +4736,7 @@
       </p:sp>
       <p:sp>
         <p:nvSpPr>
-          <p:cNvPr id="11" name="TextBox 10"/>
+          <p:cNvPr id="8" name="TextBox 7"/>
           <p:cNvSpPr txBox="1"/>
           <p:nvPr/>
         </p:nvSpPr>
@@ -4957,6 +4782,3121 @@
 </file>
 
 <file path=ppt/slides/slide12.xml><?xml version="1.0" encoding="utf-8"?>
+<p:sld xmlns:a="http://schemas.openxmlformats.org/drawingml/2006/main" xmlns:p="http://schemas.openxmlformats.org/presentationml/2006/main" xmlns:r="http://schemas.openxmlformats.org/officeDocument/2006/relationships">
+  <p:cSld>
+    <p:bg>
+      <p:bgPr>
+        <a:solidFill>
+          <a:srgbClr val="F3FBF8"/>
+        </a:solidFill>
+        <a:effectLst/>
+      </p:bgPr>
+    </p:bg>
+    <p:spTree>
+      <p:nvGrpSpPr>
+        <p:cNvPr id="1" name=""/>
+        <p:cNvGrpSpPr/>
+        <p:nvPr/>
+      </p:nvGrpSpPr>
+      <p:grpSpPr/>
+      <p:sp>
+        <p:nvSpPr>
+          <p:cNvPr id="2" name="Rectangle 1"/>
+          <p:cNvSpPr/>
+          <p:nvPr/>
+        </p:nvSpPr>
+        <p:spPr>
+          <a:xfrm>
+            <a:off x="457200" y="502920"/>
+            <a:ext cx="109728" cy="457200"/>
+          </a:xfrm>
+          <a:prstGeom prst="rect">
+            <a:avLst/>
+          </a:prstGeom>
+          <a:solidFill>
+            <a:srgbClr val="0F766E"/>
+          </a:solidFill>
+          <a:ln>
+            <a:noFill/>
+          </a:ln>
+          <a:effectLst/>
+        </p:spPr>
+        <p:style>
+          <a:lnRef idx="1">
+            <a:schemeClr val="accent1"/>
+          </a:lnRef>
+          <a:fillRef idx="3">
+            <a:schemeClr val="accent1"/>
+          </a:fillRef>
+          <a:effectRef idx="2">
+            <a:schemeClr val="accent1"/>
+          </a:effectRef>
+          <a:fontRef idx="minor">
+            <a:schemeClr val="lt1"/>
+          </a:fontRef>
+        </p:style>
+        <p:txBody>
+          <a:bodyPr rtlCol="0" anchor="ctr"/>
+          <a:lstStyle/>
+          <a:p>
+            <a:pPr algn="ctr"/>
+          </a:p>
+        </p:txBody>
+      </p:sp>
+      <p:sp>
+        <p:nvSpPr>
+          <p:cNvPr id="3" name="TextBox 2"/>
+          <p:cNvSpPr txBox="1"/>
+          <p:nvPr/>
+        </p:nvSpPr>
+        <p:spPr>
+          <a:xfrm>
+            <a:off x="685800" y="411480"/>
+            <a:ext cx="9144000" cy="365760"/>
+          </a:xfrm>
+          <a:prstGeom prst="rect">
+            <a:avLst/>
+          </a:prstGeom>
+          <a:noFill/>
+        </p:spPr>
+        <p:txBody>
+          <a:bodyPr wrap="square" anchor="t">
+            <a:spAutoFit/>
+          </a:bodyPr>
+          <a:lstStyle/>
+          <a:p>
+            <a:pPr algn="l">
+              <a:lnSpc>
+                <a:spcPct val="115000"/>
+              </a:lnSpc>
+            </a:pPr>
+            <a:r>
+              <a:rPr sz="1300" b="1">
+                <a:solidFill>
+                  <a:srgbClr val="0F766E"/>
+                </a:solidFill>
+                <a:latin typeface="Malgun Gothic"/>
+              </a:rPr>
+              <a:t>WORKFLOW</a:t>
+            </a:r>
+          </a:p>
+        </p:txBody>
+      </p:sp>
+      <p:sp>
+        <p:nvSpPr>
+          <p:cNvPr id="4" name="TextBox 3"/>
+          <p:cNvSpPr txBox="1"/>
+          <p:nvPr/>
+        </p:nvSpPr>
+        <p:spPr>
+          <a:xfrm>
+            <a:off x="640080" y="777240"/>
+            <a:ext cx="10515600" cy="731520"/>
+          </a:xfrm>
+          <a:prstGeom prst="rect">
+            <a:avLst/>
+          </a:prstGeom>
+          <a:noFill/>
+        </p:spPr>
+        <p:txBody>
+          <a:bodyPr wrap="square" anchor="t">
+            <a:spAutoFit/>
+          </a:bodyPr>
+          <a:lstStyle/>
+          <a:p>
+            <a:pPr algn="l">
+              <a:lnSpc>
+                <a:spcPct val="115000"/>
+              </a:lnSpc>
+            </a:pPr>
+            <a:r>
+              <a:rPr sz="2800" b="1">
+                <a:solidFill>
+                  <a:srgbClr val="1F2E2A"/>
+                </a:solidFill>
+                <a:latin typeface="Malgun Gothic"/>
+              </a:rPr>
+              <a:t>협업 워크플로우</a:t>
+            </a:r>
+          </a:p>
+        </p:txBody>
+      </p:sp>
+      <p:sp>
+        <p:nvSpPr>
+          <p:cNvPr id="5" name="Rectangle 4"/>
+          <p:cNvSpPr/>
+          <p:nvPr/>
+        </p:nvSpPr>
+        <p:spPr>
+          <a:xfrm>
+            <a:off x="640080" y="1508760"/>
+            <a:ext cx="10972800" cy="25400"/>
+          </a:xfrm>
+          <a:prstGeom prst="rect">
+            <a:avLst/>
+          </a:prstGeom>
+          <a:solidFill>
+            <a:srgbClr val="DCEEE7"/>
+          </a:solidFill>
+          <a:ln>
+            <a:noFill/>
+          </a:ln>
+          <a:effectLst/>
+        </p:spPr>
+        <p:style>
+          <a:lnRef idx="1">
+            <a:schemeClr val="accent1"/>
+          </a:lnRef>
+          <a:fillRef idx="3">
+            <a:schemeClr val="accent1"/>
+          </a:fillRef>
+          <a:effectRef idx="2">
+            <a:schemeClr val="accent1"/>
+          </a:effectRef>
+          <a:fontRef idx="minor">
+            <a:schemeClr val="lt1"/>
+          </a:fontRef>
+        </p:style>
+        <p:txBody>
+          <a:bodyPr rtlCol="0" anchor="ctr"/>
+          <a:lstStyle/>
+          <a:p>
+            <a:pPr algn="ctr"/>
+          </a:p>
+        </p:txBody>
+      </p:sp>
+      <p:sp>
+        <p:nvSpPr>
+          <p:cNvPr id="6" name="Rounded Rectangle 5"/>
+          <p:cNvSpPr/>
+          <p:nvPr/>
+        </p:nvSpPr>
+        <p:spPr>
+          <a:xfrm>
+            <a:off x="822960" y="2377440"/>
+            <a:ext cx="2377440" cy="822960"/>
+          </a:xfrm>
+          <a:prstGeom prst="roundRect">
+            <a:avLst/>
+          </a:prstGeom>
+          <a:solidFill>
+            <a:srgbClr val="0F766E"/>
+          </a:solidFill>
+          <a:ln>
+            <a:noFill/>
+          </a:ln>
+          <a:effectLst/>
+        </p:spPr>
+        <p:style>
+          <a:lnRef idx="1">
+            <a:schemeClr val="accent1"/>
+          </a:lnRef>
+          <a:fillRef idx="3">
+            <a:schemeClr val="accent1"/>
+          </a:fillRef>
+          <a:effectRef idx="2">
+            <a:schemeClr val="accent1"/>
+          </a:effectRef>
+          <a:fontRef idx="minor">
+            <a:schemeClr val="lt1"/>
+          </a:fontRef>
+        </p:style>
+        <p:txBody>
+          <a:bodyPr rtlCol="0" anchor="ctr"/>
+          <a:lstStyle/>
+          <a:p>
+            <a:pPr algn="ctr"/>
+          </a:p>
+        </p:txBody>
+      </p:sp>
+      <p:sp>
+        <p:nvSpPr>
+          <p:cNvPr id="7" name="TextBox 6"/>
+          <p:cNvSpPr txBox="1"/>
+          <p:nvPr/>
+        </p:nvSpPr>
+        <p:spPr>
+          <a:xfrm>
+            <a:off x="822960" y="2624328"/>
+            <a:ext cx="2377440" cy="365760"/>
+          </a:xfrm>
+          <a:prstGeom prst="rect">
+            <a:avLst/>
+          </a:prstGeom>
+          <a:noFill/>
+        </p:spPr>
+        <p:txBody>
+          <a:bodyPr wrap="square" anchor="t">
+            <a:spAutoFit/>
+          </a:bodyPr>
+          <a:lstStyle/>
+          <a:p>
+            <a:pPr algn="ctr">
+              <a:lnSpc>
+                <a:spcPct val="115000"/>
+              </a:lnSpc>
+            </a:pPr>
+            <a:r>
+              <a:rPr sz="1600" b="1">
+                <a:solidFill>
+                  <a:srgbClr val="FFFFFF"/>
+                </a:solidFill>
+                <a:latin typeface="Malgun Gothic"/>
+              </a:rPr>
+              <a:t>feat/shared</a:t>
+            </a:r>
+          </a:p>
+        </p:txBody>
+      </p:sp>
+      <p:sp>
+        <p:nvSpPr>
+          <p:cNvPr id="8" name="Right Arrow 7"/>
+          <p:cNvSpPr/>
+          <p:nvPr/>
+        </p:nvSpPr>
+        <p:spPr>
+          <a:xfrm>
+            <a:off x="3246120" y="2651760"/>
+            <a:ext cx="274320" cy="274320"/>
+          </a:xfrm>
+          <a:prstGeom prst="rightArrow">
+            <a:avLst/>
+          </a:prstGeom>
+          <a:solidFill>
+            <a:srgbClr val="34D399"/>
+          </a:solidFill>
+          <a:ln>
+            <a:noFill/>
+          </a:ln>
+        </p:spPr>
+        <p:style>
+          <a:lnRef idx="1">
+            <a:schemeClr val="accent1"/>
+          </a:lnRef>
+          <a:fillRef idx="3">
+            <a:schemeClr val="accent1"/>
+          </a:fillRef>
+          <a:effectRef idx="2">
+            <a:schemeClr val="accent1"/>
+          </a:effectRef>
+          <a:fontRef idx="minor">
+            <a:schemeClr val="lt1"/>
+          </a:fontRef>
+        </p:style>
+        <p:txBody>
+          <a:bodyPr rtlCol="0" anchor="ctr"/>
+          <a:lstStyle/>
+          <a:p>
+            <a:pPr algn="ctr"/>
+          </a:p>
+        </p:txBody>
+      </p:sp>
+      <p:sp>
+        <p:nvSpPr>
+          <p:cNvPr id="9" name="Rounded Rectangle 8"/>
+          <p:cNvSpPr/>
+          <p:nvPr/>
+        </p:nvSpPr>
+        <p:spPr>
+          <a:xfrm>
+            <a:off x="3520440" y="2377440"/>
+            <a:ext cx="2377440" cy="822960"/>
+          </a:xfrm>
+          <a:prstGeom prst="roundRect">
+            <a:avLst/>
+          </a:prstGeom>
+          <a:solidFill>
+            <a:srgbClr val="0F766E"/>
+          </a:solidFill>
+          <a:ln>
+            <a:noFill/>
+          </a:ln>
+          <a:effectLst/>
+        </p:spPr>
+        <p:style>
+          <a:lnRef idx="1">
+            <a:schemeClr val="accent1"/>
+          </a:lnRef>
+          <a:fillRef idx="3">
+            <a:schemeClr val="accent1"/>
+          </a:fillRef>
+          <a:effectRef idx="2">
+            <a:schemeClr val="accent1"/>
+          </a:effectRef>
+          <a:fontRef idx="minor">
+            <a:schemeClr val="lt1"/>
+          </a:fontRef>
+        </p:style>
+        <p:txBody>
+          <a:bodyPr rtlCol="0" anchor="ctr"/>
+          <a:lstStyle/>
+          <a:p>
+            <a:pPr algn="ctr"/>
+          </a:p>
+        </p:txBody>
+      </p:sp>
+      <p:sp>
+        <p:nvSpPr>
+          <p:cNvPr id="10" name="TextBox 9"/>
+          <p:cNvSpPr txBox="1"/>
+          <p:nvPr/>
+        </p:nvSpPr>
+        <p:spPr>
+          <a:xfrm>
+            <a:off x="3520440" y="2624328"/>
+            <a:ext cx="2377440" cy="365760"/>
+          </a:xfrm>
+          <a:prstGeom prst="rect">
+            <a:avLst/>
+          </a:prstGeom>
+          <a:noFill/>
+        </p:spPr>
+        <p:txBody>
+          <a:bodyPr wrap="square" anchor="t">
+            <a:spAutoFit/>
+          </a:bodyPr>
+          <a:lstStyle/>
+          <a:p>
+            <a:pPr algn="ctr">
+              <a:lnSpc>
+                <a:spcPct val="115000"/>
+              </a:lnSpc>
+            </a:pPr>
+            <a:r>
+              <a:rPr sz="1600" b="1">
+                <a:solidFill>
+                  <a:srgbClr val="FFFFFF"/>
+                </a:solidFill>
+                <a:latin typeface="Malgun Gothic"/>
+              </a:rPr>
+              <a:t>feat/auth</a:t>
+            </a:r>
+          </a:p>
+        </p:txBody>
+      </p:sp>
+      <p:sp>
+        <p:nvSpPr>
+          <p:cNvPr id="11" name="Right Arrow 10"/>
+          <p:cNvSpPr/>
+          <p:nvPr/>
+        </p:nvSpPr>
+        <p:spPr>
+          <a:xfrm>
+            <a:off x="5943600" y="2651760"/>
+            <a:ext cx="274320" cy="274320"/>
+          </a:xfrm>
+          <a:prstGeom prst="rightArrow">
+            <a:avLst/>
+          </a:prstGeom>
+          <a:solidFill>
+            <a:srgbClr val="34D399"/>
+          </a:solidFill>
+          <a:ln>
+            <a:noFill/>
+          </a:ln>
+        </p:spPr>
+        <p:style>
+          <a:lnRef idx="1">
+            <a:schemeClr val="accent1"/>
+          </a:lnRef>
+          <a:fillRef idx="3">
+            <a:schemeClr val="accent1"/>
+          </a:fillRef>
+          <a:effectRef idx="2">
+            <a:schemeClr val="accent1"/>
+          </a:effectRef>
+          <a:fontRef idx="minor">
+            <a:schemeClr val="lt1"/>
+          </a:fontRef>
+        </p:style>
+        <p:txBody>
+          <a:bodyPr rtlCol="0" anchor="ctr"/>
+          <a:lstStyle/>
+          <a:p>
+            <a:pPr algn="ctr"/>
+          </a:p>
+        </p:txBody>
+      </p:sp>
+      <p:sp>
+        <p:nvSpPr>
+          <p:cNvPr id="12" name="Rounded Rectangle 11"/>
+          <p:cNvSpPr/>
+          <p:nvPr/>
+        </p:nvSpPr>
+        <p:spPr>
+          <a:xfrm>
+            <a:off x="6217920" y="2377440"/>
+            <a:ext cx="2377440" cy="822960"/>
+          </a:xfrm>
+          <a:prstGeom prst="roundRect">
+            <a:avLst/>
+          </a:prstGeom>
+          <a:solidFill>
+            <a:srgbClr val="0F766E"/>
+          </a:solidFill>
+          <a:ln>
+            <a:noFill/>
+          </a:ln>
+          <a:effectLst/>
+        </p:spPr>
+        <p:style>
+          <a:lnRef idx="1">
+            <a:schemeClr val="accent1"/>
+          </a:lnRef>
+          <a:fillRef idx="3">
+            <a:schemeClr val="accent1"/>
+          </a:fillRef>
+          <a:effectRef idx="2">
+            <a:schemeClr val="accent1"/>
+          </a:effectRef>
+          <a:fontRef idx="minor">
+            <a:schemeClr val="lt1"/>
+          </a:fontRef>
+        </p:style>
+        <p:txBody>
+          <a:bodyPr rtlCol="0" anchor="ctr"/>
+          <a:lstStyle/>
+          <a:p>
+            <a:pPr algn="ctr"/>
+          </a:p>
+        </p:txBody>
+      </p:sp>
+      <p:sp>
+        <p:nvSpPr>
+          <p:cNvPr id="13" name="TextBox 12"/>
+          <p:cNvSpPr txBox="1"/>
+          <p:nvPr/>
+        </p:nvSpPr>
+        <p:spPr>
+          <a:xfrm>
+            <a:off x="6217920" y="2624328"/>
+            <a:ext cx="2377440" cy="365760"/>
+          </a:xfrm>
+          <a:prstGeom prst="rect">
+            <a:avLst/>
+          </a:prstGeom>
+          <a:noFill/>
+        </p:spPr>
+        <p:txBody>
+          <a:bodyPr wrap="square" anchor="t">
+            <a:spAutoFit/>
+          </a:bodyPr>
+          <a:lstStyle/>
+          <a:p>
+            <a:pPr algn="ctr">
+              <a:lnSpc>
+                <a:spcPct val="115000"/>
+              </a:lnSpc>
+            </a:pPr>
+            <a:r>
+              <a:rPr sz="1600" b="1">
+                <a:solidFill>
+                  <a:srgbClr val="FFFFFF"/>
+                </a:solidFill>
+                <a:latin typeface="Malgun Gothic"/>
+              </a:rPr>
+              <a:t>feat/core</a:t>
+            </a:r>
+          </a:p>
+        </p:txBody>
+      </p:sp>
+      <p:sp>
+        <p:nvSpPr>
+          <p:cNvPr id="14" name="Right Arrow 13"/>
+          <p:cNvSpPr/>
+          <p:nvPr/>
+        </p:nvSpPr>
+        <p:spPr>
+          <a:xfrm>
+            <a:off x="8641080" y="2651760"/>
+            <a:ext cx="274320" cy="274320"/>
+          </a:xfrm>
+          <a:prstGeom prst="rightArrow">
+            <a:avLst/>
+          </a:prstGeom>
+          <a:solidFill>
+            <a:srgbClr val="34D399"/>
+          </a:solidFill>
+          <a:ln>
+            <a:noFill/>
+          </a:ln>
+        </p:spPr>
+        <p:style>
+          <a:lnRef idx="1">
+            <a:schemeClr val="accent1"/>
+          </a:lnRef>
+          <a:fillRef idx="3">
+            <a:schemeClr val="accent1"/>
+          </a:fillRef>
+          <a:effectRef idx="2">
+            <a:schemeClr val="accent1"/>
+          </a:effectRef>
+          <a:fontRef idx="minor">
+            <a:schemeClr val="lt1"/>
+          </a:fontRef>
+        </p:style>
+        <p:txBody>
+          <a:bodyPr rtlCol="0" anchor="ctr"/>
+          <a:lstStyle/>
+          <a:p>
+            <a:pPr algn="ctr"/>
+          </a:p>
+        </p:txBody>
+      </p:sp>
+      <p:sp>
+        <p:nvSpPr>
+          <p:cNvPr id="15" name="Rounded Rectangle 14"/>
+          <p:cNvSpPr/>
+          <p:nvPr/>
+        </p:nvSpPr>
+        <p:spPr>
+          <a:xfrm>
+            <a:off x="8915400" y="2377440"/>
+            <a:ext cx="2377440" cy="822960"/>
+          </a:xfrm>
+          <a:prstGeom prst="roundRect">
+            <a:avLst/>
+          </a:prstGeom>
+          <a:solidFill>
+            <a:srgbClr val="1E3A34"/>
+          </a:solidFill>
+          <a:ln>
+            <a:noFill/>
+          </a:ln>
+          <a:effectLst/>
+        </p:spPr>
+        <p:style>
+          <a:lnRef idx="1">
+            <a:schemeClr val="accent1"/>
+          </a:lnRef>
+          <a:fillRef idx="3">
+            <a:schemeClr val="accent1"/>
+          </a:fillRef>
+          <a:effectRef idx="2">
+            <a:schemeClr val="accent1"/>
+          </a:effectRef>
+          <a:fontRef idx="minor">
+            <a:schemeClr val="lt1"/>
+          </a:fontRef>
+        </p:style>
+        <p:txBody>
+          <a:bodyPr rtlCol="0" anchor="ctr"/>
+          <a:lstStyle/>
+          <a:p>
+            <a:pPr algn="ctr"/>
+          </a:p>
+        </p:txBody>
+      </p:sp>
+      <p:sp>
+        <p:nvSpPr>
+          <p:cNvPr id="16" name="TextBox 15"/>
+          <p:cNvSpPr txBox="1"/>
+          <p:nvPr/>
+        </p:nvSpPr>
+        <p:spPr>
+          <a:xfrm>
+            <a:off x="8915400" y="2624328"/>
+            <a:ext cx="2377440" cy="365760"/>
+          </a:xfrm>
+          <a:prstGeom prst="rect">
+            <a:avLst/>
+          </a:prstGeom>
+          <a:noFill/>
+        </p:spPr>
+        <p:txBody>
+          <a:bodyPr wrap="square" anchor="t">
+            <a:spAutoFit/>
+          </a:bodyPr>
+          <a:lstStyle/>
+          <a:p>
+            <a:pPr algn="ctr">
+              <a:lnSpc>
+                <a:spcPct val="115000"/>
+              </a:lnSpc>
+            </a:pPr>
+            <a:r>
+              <a:rPr sz="1600" b="1">
+                <a:solidFill>
+                  <a:srgbClr val="FFFFFF"/>
+                </a:solidFill>
+                <a:latin typeface="Malgun Gothic"/>
+              </a:rPr>
+              <a:t>main</a:t>
+            </a:r>
+          </a:p>
+        </p:txBody>
+      </p:sp>
+      <p:sp>
+        <p:nvSpPr>
+          <p:cNvPr id="17" name="TextBox 16"/>
+          <p:cNvSpPr txBox="1"/>
+          <p:nvPr/>
+        </p:nvSpPr>
+        <p:spPr>
+          <a:xfrm>
+            <a:off x="822960" y="3657600"/>
+            <a:ext cx="10515600" cy="2560320"/>
+          </a:xfrm>
+          <a:prstGeom prst="rect">
+            <a:avLst/>
+          </a:prstGeom>
+          <a:noFill/>
+        </p:spPr>
+        <p:txBody>
+          <a:bodyPr wrap="square">
+            <a:spAutoFit/>
+          </a:bodyPr>
+          <a:lstStyle/>
+          <a:p>
+            <a:pPr>
+              <a:lnSpc>
+                <a:spcPct val="120000"/>
+              </a:lnSpc>
+              <a:spcAft>
+                <a:spcPts val="1000"/>
+              </a:spcAft>
+            </a:pPr>
+            <a:r>
+              <a:rPr sz="1500" b="0">
+                <a:solidFill>
+                  <a:srgbClr val="1F2E2A"/>
+                </a:solidFill>
+                <a:latin typeface="Malgun Gothic"/>
+              </a:rPr>
+              <a:t>•  PR 기반 병합</a:t>
+            </a:r>
+          </a:p>
+          <a:p>
+            <a:pPr>
+              <a:spcAft>
+                <a:spcPts val="1000"/>
+              </a:spcAft>
+            </a:pPr>
+            <a:r>
+              <a:rPr sz="1200">
+                <a:solidFill>
+                  <a:srgbClr val="6E8880"/>
+                </a:solidFill>
+                <a:latin typeface="Malgun Gothic"/>
+              </a:rPr>
+              <a:t>     공통 자원 → 인증 → 핵심 기능 순으로 브랜치를 나눠 작업 후 Pull Request로 main에 병합</a:t>
+            </a:r>
+          </a:p>
+          <a:p>
+            <a:pPr>
+              <a:lnSpc>
+                <a:spcPct val="120000"/>
+              </a:lnSpc>
+              <a:spcAft>
+                <a:spcPts val="1000"/>
+              </a:spcAft>
+            </a:pPr>
+            <a:r>
+              <a:rPr sz="1500" b="0">
+                <a:solidFill>
+                  <a:srgbClr val="1F2E2A"/>
+                </a:solidFill>
+                <a:latin typeface="Malgun Gothic"/>
+              </a:rPr>
+              <a:t>•  병합 후 브랜치 정리</a:t>
+            </a:r>
+          </a:p>
+          <a:p>
+            <a:pPr>
+              <a:spcAft>
+                <a:spcPts val="1000"/>
+              </a:spcAft>
+            </a:pPr>
+            <a:r>
+              <a:rPr sz="1200">
+                <a:solidFill>
+                  <a:srgbClr val="6E8880"/>
+                </a:solidFill>
+                <a:latin typeface="Malgun Gothic"/>
+              </a:rPr>
+              <a:t>     머지가 끝난 feat/* 브랜치와 사용하지 않는 master 브랜치를 삭제해 원격 저장소를 깔끔하게 유지</a:t>
+            </a:r>
+          </a:p>
+        </p:txBody>
+      </p:sp>
+      <p:sp>
+        <p:nvSpPr>
+          <p:cNvPr id="18" name="TextBox 17"/>
+          <p:cNvSpPr txBox="1"/>
+          <p:nvPr/>
+        </p:nvSpPr>
+        <p:spPr>
+          <a:xfrm>
+            <a:off x="457200" y="6446520"/>
+            <a:ext cx="7315200" cy="320040"/>
+          </a:xfrm>
+          <a:prstGeom prst="rect">
+            <a:avLst/>
+          </a:prstGeom>
+          <a:noFill/>
+        </p:spPr>
+        <p:txBody>
+          <a:bodyPr wrap="square" anchor="t">
+            <a:spAutoFit/>
+          </a:bodyPr>
+          <a:lstStyle/>
+          <a:p>
+            <a:pPr algn="l">
+              <a:lnSpc>
+                <a:spcPct val="115000"/>
+              </a:lnSpc>
+            </a:pPr>
+            <a:r>
+              <a:rPr sz="1000" b="0">
+                <a:solidFill>
+                  <a:srgbClr val="6E8880"/>
+                </a:solidFill>
+                <a:latin typeface="Malgun Gothic"/>
+              </a:rPr>
+              <a:t>EXPENSE TRACKER · PORTFOLIO</a:t>
+            </a:r>
+          </a:p>
+        </p:txBody>
+      </p:sp>
+      <p:sp>
+        <p:nvSpPr>
+          <p:cNvPr id="19" name="TextBox 18"/>
+          <p:cNvSpPr txBox="1"/>
+          <p:nvPr/>
+        </p:nvSpPr>
+        <p:spPr>
+          <a:xfrm>
+            <a:off x="11002975" y="6446520"/>
+            <a:ext cx="822960" cy="320040"/>
+          </a:xfrm>
+          <a:prstGeom prst="rect">
+            <a:avLst/>
+          </a:prstGeom>
+          <a:noFill/>
+        </p:spPr>
+        <p:txBody>
+          <a:bodyPr wrap="square" anchor="t">
+            <a:spAutoFit/>
+          </a:bodyPr>
+          <a:lstStyle/>
+          <a:p>
+            <a:pPr algn="r">
+              <a:lnSpc>
+                <a:spcPct val="115000"/>
+              </a:lnSpc>
+            </a:pPr>
+            <a:r>
+              <a:rPr sz="1000" b="0">
+                <a:solidFill>
+                  <a:srgbClr val="6E8880"/>
+                </a:solidFill>
+                <a:latin typeface="Malgun Gothic"/>
+              </a:rPr>
+              <a:t>12</a:t>
+            </a:r>
+          </a:p>
+        </p:txBody>
+      </p:sp>
+    </p:spTree>
+  </p:cSld>
+  <p:clrMapOvr>
+    <a:masterClrMapping/>
+  </p:clrMapOvr>
+</p:sld>
+</file>
+
+<file path=ppt/slides/slide13.xml><?xml version="1.0" encoding="utf-8"?>
+<p:sld xmlns:a="http://schemas.openxmlformats.org/drawingml/2006/main" xmlns:p="http://schemas.openxmlformats.org/presentationml/2006/main" xmlns:r="http://schemas.openxmlformats.org/officeDocument/2006/relationships">
+  <p:cSld>
+    <p:bg>
+      <p:bgPr>
+        <a:solidFill>
+          <a:srgbClr val="F3FBF8"/>
+        </a:solidFill>
+        <a:effectLst/>
+      </p:bgPr>
+    </p:bg>
+    <p:spTree>
+      <p:nvGrpSpPr>
+        <p:cNvPr id="1" name=""/>
+        <p:cNvGrpSpPr/>
+        <p:nvPr/>
+      </p:nvGrpSpPr>
+      <p:grpSpPr/>
+      <p:sp>
+        <p:nvSpPr>
+          <p:cNvPr id="2" name="Rectangle 1"/>
+          <p:cNvSpPr/>
+          <p:nvPr/>
+        </p:nvSpPr>
+        <p:spPr>
+          <a:xfrm>
+            <a:off x="457200" y="502920"/>
+            <a:ext cx="109728" cy="457200"/>
+          </a:xfrm>
+          <a:prstGeom prst="rect">
+            <a:avLst/>
+          </a:prstGeom>
+          <a:solidFill>
+            <a:srgbClr val="0F766E"/>
+          </a:solidFill>
+          <a:ln>
+            <a:noFill/>
+          </a:ln>
+          <a:effectLst/>
+        </p:spPr>
+        <p:style>
+          <a:lnRef idx="1">
+            <a:schemeClr val="accent1"/>
+          </a:lnRef>
+          <a:fillRef idx="3">
+            <a:schemeClr val="accent1"/>
+          </a:fillRef>
+          <a:effectRef idx="2">
+            <a:schemeClr val="accent1"/>
+          </a:effectRef>
+          <a:fontRef idx="minor">
+            <a:schemeClr val="lt1"/>
+          </a:fontRef>
+        </p:style>
+        <p:txBody>
+          <a:bodyPr rtlCol="0" anchor="ctr"/>
+          <a:lstStyle/>
+          <a:p>
+            <a:pPr algn="ctr"/>
+          </a:p>
+        </p:txBody>
+      </p:sp>
+      <p:sp>
+        <p:nvSpPr>
+          <p:cNvPr id="3" name="TextBox 2"/>
+          <p:cNvSpPr txBox="1"/>
+          <p:nvPr/>
+        </p:nvSpPr>
+        <p:spPr>
+          <a:xfrm>
+            <a:off x="685800" y="411480"/>
+            <a:ext cx="9144000" cy="365760"/>
+          </a:xfrm>
+          <a:prstGeom prst="rect">
+            <a:avLst/>
+          </a:prstGeom>
+          <a:noFill/>
+        </p:spPr>
+        <p:txBody>
+          <a:bodyPr wrap="square" anchor="t">
+            <a:spAutoFit/>
+          </a:bodyPr>
+          <a:lstStyle/>
+          <a:p>
+            <a:pPr algn="l">
+              <a:lnSpc>
+                <a:spcPct val="115000"/>
+              </a:lnSpc>
+            </a:pPr>
+            <a:r>
+              <a:rPr sz="1300" b="1">
+                <a:solidFill>
+                  <a:srgbClr val="0F766E"/>
+                </a:solidFill>
+                <a:latin typeface="Malgun Gothic"/>
+              </a:rPr>
+              <a:t>DEMO</a:t>
+            </a:r>
+          </a:p>
+        </p:txBody>
+      </p:sp>
+      <p:sp>
+        <p:nvSpPr>
+          <p:cNvPr id="4" name="TextBox 3"/>
+          <p:cNvSpPr txBox="1"/>
+          <p:nvPr/>
+        </p:nvSpPr>
+        <p:spPr>
+          <a:xfrm>
+            <a:off x="640080" y="777240"/>
+            <a:ext cx="10515600" cy="731520"/>
+          </a:xfrm>
+          <a:prstGeom prst="rect">
+            <a:avLst/>
+          </a:prstGeom>
+          <a:noFill/>
+        </p:spPr>
+        <p:txBody>
+          <a:bodyPr wrap="square" anchor="t">
+            <a:spAutoFit/>
+          </a:bodyPr>
+          <a:lstStyle/>
+          <a:p>
+            <a:pPr algn="l">
+              <a:lnSpc>
+                <a:spcPct val="115000"/>
+              </a:lnSpc>
+            </a:pPr>
+            <a:r>
+              <a:rPr sz="2800" b="1">
+                <a:solidFill>
+                  <a:srgbClr val="1F2E2A"/>
+                </a:solidFill>
+                <a:latin typeface="Malgun Gothic"/>
+              </a:rPr>
+              <a:t>시연</a:t>
+            </a:r>
+          </a:p>
+        </p:txBody>
+      </p:sp>
+      <p:sp>
+        <p:nvSpPr>
+          <p:cNvPr id="5" name="Rectangle 4"/>
+          <p:cNvSpPr/>
+          <p:nvPr/>
+        </p:nvSpPr>
+        <p:spPr>
+          <a:xfrm>
+            <a:off x="640080" y="1508760"/>
+            <a:ext cx="10972800" cy="25400"/>
+          </a:xfrm>
+          <a:prstGeom prst="rect">
+            <a:avLst/>
+          </a:prstGeom>
+          <a:solidFill>
+            <a:srgbClr val="DCEEE7"/>
+          </a:solidFill>
+          <a:ln>
+            <a:noFill/>
+          </a:ln>
+          <a:effectLst/>
+        </p:spPr>
+        <p:style>
+          <a:lnRef idx="1">
+            <a:schemeClr val="accent1"/>
+          </a:lnRef>
+          <a:fillRef idx="3">
+            <a:schemeClr val="accent1"/>
+          </a:fillRef>
+          <a:effectRef idx="2">
+            <a:schemeClr val="accent1"/>
+          </a:effectRef>
+          <a:fontRef idx="minor">
+            <a:schemeClr val="lt1"/>
+          </a:fontRef>
+        </p:style>
+        <p:txBody>
+          <a:bodyPr rtlCol="0" anchor="ctr"/>
+          <a:lstStyle/>
+          <a:p>
+            <a:pPr algn="ctr"/>
+          </a:p>
+        </p:txBody>
+      </p:sp>
+      <p:sp>
+        <p:nvSpPr>
+          <p:cNvPr id="6" name="Oval 5"/>
+          <p:cNvSpPr/>
+          <p:nvPr/>
+        </p:nvSpPr>
+        <p:spPr>
+          <a:xfrm>
+            <a:off x="640080" y="1874519"/>
+            <a:ext cx="411480" cy="411480"/>
+          </a:xfrm>
+          <a:prstGeom prst="ellipse">
+            <a:avLst/>
+          </a:prstGeom>
+          <a:solidFill>
+            <a:srgbClr val="34D399"/>
+          </a:solidFill>
+          <a:ln>
+            <a:noFill/>
+          </a:ln>
+          <a:effectLst/>
+        </p:spPr>
+        <p:style>
+          <a:lnRef idx="1">
+            <a:schemeClr val="accent1"/>
+          </a:lnRef>
+          <a:fillRef idx="3">
+            <a:schemeClr val="accent1"/>
+          </a:fillRef>
+          <a:effectRef idx="2">
+            <a:schemeClr val="accent1"/>
+          </a:effectRef>
+          <a:fontRef idx="minor">
+            <a:schemeClr val="lt1"/>
+          </a:fontRef>
+        </p:style>
+        <p:txBody>
+          <a:bodyPr rtlCol="0" anchor="ctr"/>
+          <a:lstStyle/>
+          <a:p>
+            <a:pPr algn="ctr"/>
+          </a:p>
+        </p:txBody>
+      </p:sp>
+      <p:sp>
+        <p:nvSpPr>
+          <p:cNvPr id="7" name="TextBox 6"/>
+          <p:cNvSpPr txBox="1"/>
+          <p:nvPr/>
+        </p:nvSpPr>
+        <p:spPr>
+          <a:xfrm>
+            <a:off x="640080" y="1892807"/>
+            <a:ext cx="411480" cy="365760"/>
+          </a:xfrm>
+          <a:prstGeom prst="rect">
+            <a:avLst/>
+          </a:prstGeom>
+          <a:noFill/>
+        </p:spPr>
+        <p:txBody>
+          <a:bodyPr wrap="square" anchor="t">
+            <a:spAutoFit/>
+          </a:bodyPr>
+          <a:lstStyle/>
+          <a:p>
+            <a:pPr algn="ctr">
+              <a:lnSpc>
+                <a:spcPct val="115000"/>
+              </a:lnSpc>
+            </a:pPr>
+            <a:r>
+              <a:rPr sz="1600" b="1">
+                <a:solidFill>
+                  <a:srgbClr val="FFFFFF"/>
+                </a:solidFill>
+                <a:latin typeface="Malgun Gothic"/>
+              </a:rPr>
+              <a:t>1</a:t>
+            </a:r>
+          </a:p>
+        </p:txBody>
+      </p:sp>
+      <p:sp>
+        <p:nvSpPr>
+          <p:cNvPr id="8" name="TextBox 7"/>
+          <p:cNvSpPr txBox="1"/>
+          <p:nvPr/>
+        </p:nvSpPr>
+        <p:spPr>
+          <a:xfrm>
+            <a:off x="1234440" y="1847087"/>
+            <a:ext cx="3840480" cy="457200"/>
+          </a:xfrm>
+          <a:prstGeom prst="rect">
+            <a:avLst/>
+          </a:prstGeom>
+          <a:noFill/>
+        </p:spPr>
+        <p:txBody>
+          <a:bodyPr wrap="square" anchor="t">
+            <a:spAutoFit/>
+          </a:bodyPr>
+          <a:lstStyle/>
+          <a:p>
+            <a:pPr algn="l">
+              <a:lnSpc>
+                <a:spcPct val="115000"/>
+              </a:lnSpc>
+            </a:pPr>
+            <a:r>
+              <a:rPr sz="1600" b="1">
+                <a:solidFill>
+                  <a:srgbClr val="0F766E"/>
+                </a:solidFill>
+                <a:latin typeface="Malgun Gothic"/>
+              </a:rPr>
+              <a:t>회원가입 → 로그인</a:t>
+            </a:r>
+          </a:p>
+        </p:txBody>
+      </p:sp>
+      <p:sp>
+        <p:nvSpPr>
+          <p:cNvPr id="9" name="TextBox 8"/>
+          <p:cNvSpPr txBox="1"/>
+          <p:nvPr/>
+        </p:nvSpPr>
+        <p:spPr>
+          <a:xfrm>
+            <a:off x="1234440" y="2258567"/>
+            <a:ext cx="10241280" cy="640080"/>
+          </a:xfrm>
+          <a:prstGeom prst="rect">
+            <a:avLst/>
+          </a:prstGeom>
+          <a:noFill/>
+        </p:spPr>
+        <p:txBody>
+          <a:bodyPr wrap="square" anchor="t">
+            <a:spAutoFit/>
+          </a:bodyPr>
+          <a:lstStyle/>
+          <a:p>
+            <a:pPr algn="l">
+              <a:lnSpc>
+                <a:spcPct val="115000"/>
+              </a:lnSpc>
+            </a:pPr>
+            <a:r>
+              <a:rPr sz="1300" b="0">
+                <a:solidFill>
+                  <a:srgbClr val="4B6259"/>
+                </a:solidFill>
+                <a:latin typeface="Malgun Gothic"/>
+              </a:rPr>
+              <a:t>이메일/비밀번호로 가입 후 즉시 자동 로그인</a:t>
+            </a:r>
+          </a:p>
+        </p:txBody>
+      </p:sp>
+      <p:sp>
+        <p:nvSpPr>
+          <p:cNvPr id="10" name="Oval 9"/>
+          <p:cNvSpPr/>
+          <p:nvPr/>
+        </p:nvSpPr>
+        <p:spPr>
+          <a:xfrm>
+            <a:off x="640080" y="2788919"/>
+            <a:ext cx="411480" cy="411480"/>
+          </a:xfrm>
+          <a:prstGeom prst="ellipse">
+            <a:avLst/>
+          </a:prstGeom>
+          <a:solidFill>
+            <a:srgbClr val="34D399"/>
+          </a:solidFill>
+          <a:ln>
+            <a:noFill/>
+          </a:ln>
+          <a:effectLst/>
+        </p:spPr>
+        <p:style>
+          <a:lnRef idx="1">
+            <a:schemeClr val="accent1"/>
+          </a:lnRef>
+          <a:fillRef idx="3">
+            <a:schemeClr val="accent1"/>
+          </a:fillRef>
+          <a:effectRef idx="2">
+            <a:schemeClr val="accent1"/>
+          </a:effectRef>
+          <a:fontRef idx="minor">
+            <a:schemeClr val="lt1"/>
+          </a:fontRef>
+        </p:style>
+        <p:txBody>
+          <a:bodyPr rtlCol="0" anchor="ctr"/>
+          <a:lstStyle/>
+          <a:p>
+            <a:pPr algn="ctr"/>
+          </a:p>
+        </p:txBody>
+      </p:sp>
+      <p:sp>
+        <p:nvSpPr>
+          <p:cNvPr id="11" name="TextBox 10"/>
+          <p:cNvSpPr txBox="1"/>
+          <p:nvPr/>
+        </p:nvSpPr>
+        <p:spPr>
+          <a:xfrm>
+            <a:off x="640080" y="2807207"/>
+            <a:ext cx="411480" cy="365760"/>
+          </a:xfrm>
+          <a:prstGeom prst="rect">
+            <a:avLst/>
+          </a:prstGeom>
+          <a:noFill/>
+        </p:spPr>
+        <p:txBody>
+          <a:bodyPr wrap="square" anchor="t">
+            <a:spAutoFit/>
+          </a:bodyPr>
+          <a:lstStyle/>
+          <a:p>
+            <a:pPr algn="ctr">
+              <a:lnSpc>
+                <a:spcPct val="115000"/>
+              </a:lnSpc>
+            </a:pPr>
+            <a:r>
+              <a:rPr sz="1600" b="1">
+                <a:solidFill>
+                  <a:srgbClr val="FFFFFF"/>
+                </a:solidFill>
+                <a:latin typeface="Malgun Gothic"/>
+              </a:rPr>
+              <a:t>2</a:t>
+            </a:r>
+          </a:p>
+        </p:txBody>
+      </p:sp>
+      <p:sp>
+        <p:nvSpPr>
+          <p:cNvPr id="12" name="TextBox 11"/>
+          <p:cNvSpPr txBox="1"/>
+          <p:nvPr/>
+        </p:nvSpPr>
+        <p:spPr>
+          <a:xfrm>
+            <a:off x="1234440" y="2761487"/>
+            <a:ext cx="3840480" cy="457200"/>
+          </a:xfrm>
+          <a:prstGeom prst="rect">
+            <a:avLst/>
+          </a:prstGeom>
+          <a:noFill/>
+        </p:spPr>
+        <p:txBody>
+          <a:bodyPr wrap="square" anchor="t">
+            <a:spAutoFit/>
+          </a:bodyPr>
+          <a:lstStyle/>
+          <a:p>
+            <a:pPr algn="l">
+              <a:lnSpc>
+                <a:spcPct val="115000"/>
+              </a:lnSpc>
+            </a:pPr>
+            <a:r>
+              <a:rPr sz="1600" b="1">
+                <a:solidFill>
+                  <a:srgbClr val="0F766E"/>
+                </a:solidFill>
+                <a:latin typeface="Malgun Gothic"/>
+              </a:rPr>
+              <a:t>지출 등록 → 목록 확인</a:t>
+            </a:r>
+          </a:p>
+        </p:txBody>
+      </p:sp>
+      <p:sp>
+        <p:nvSpPr>
+          <p:cNvPr id="13" name="TextBox 12"/>
+          <p:cNvSpPr txBox="1"/>
+          <p:nvPr/>
+        </p:nvSpPr>
+        <p:spPr>
+          <a:xfrm>
+            <a:off x="1234440" y="3172967"/>
+            <a:ext cx="10241280" cy="640080"/>
+          </a:xfrm>
+          <a:prstGeom prst="rect">
+            <a:avLst/>
+          </a:prstGeom>
+          <a:noFill/>
+        </p:spPr>
+        <p:txBody>
+          <a:bodyPr wrap="square" anchor="t">
+            <a:spAutoFit/>
+          </a:bodyPr>
+          <a:lstStyle/>
+          <a:p>
+            <a:pPr algn="l">
+              <a:lnSpc>
+                <a:spcPct val="115000"/>
+              </a:lnSpc>
+            </a:pPr>
+            <a:r>
+              <a:rPr sz="1300" b="0">
+                <a:solidFill>
+                  <a:srgbClr val="4B6259"/>
+                </a:solidFill>
+                <a:latin typeface="Malgun Gothic"/>
+              </a:rPr>
+              <a:t>지출을 등록하고 목록에서 기간·카테고리 필터, 페이지네이션 확인</a:t>
+            </a:r>
+          </a:p>
+        </p:txBody>
+      </p:sp>
+      <p:sp>
+        <p:nvSpPr>
+          <p:cNvPr id="14" name="Oval 13"/>
+          <p:cNvSpPr/>
+          <p:nvPr/>
+        </p:nvSpPr>
+        <p:spPr>
+          <a:xfrm>
+            <a:off x="640080" y="3703319"/>
+            <a:ext cx="411480" cy="411480"/>
+          </a:xfrm>
+          <a:prstGeom prst="ellipse">
+            <a:avLst/>
+          </a:prstGeom>
+          <a:solidFill>
+            <a:srgbClr val="34D399"/>
+          </a:solidFill>
+          <a:ln>
+            <a:noFill/>
+          </a:ln>
+          <a:effectLst/>
+        </p:spPr>
+        <p:style>
+          <a:lnRef idx="1">
+            <a:schemeClr val="accent1"/>
+          </a:lnRef>
+          <a:fillRef idx="3">
+            <a:schemeClr val="accent1"/>
+          </a:fillRef>
+          <a:effectRef idx="2">
+            <a:schemeClr val="accent1"/>
+          </a:effectRef>
+          <a:fontRef idx="minor">
+            <a:schemeClr val="lt1"/>
+          </a:fontRef>
+        </p:style>
+        <p:txBody>
+          <a:bodyPr rtlCol="0" anchor="ctr"/>
+          <a:lstStyle/>
+          <a:p>
+            <a:pPr algn="ctr"/>
+          </a:p>
+        </p:txBody>
+      </p:sp>
+      <p:sp>
+        <p:nvSpPr>
+          <p:cNvPr id="15" name="TextBox 14"/>
+          <p:cNvSpPr txBox="1"/>
+          <p:nvPr/>
+        </p:nvSpPr>
+        <p:spPr>
+          <a:xfrm>
+            <a:off x="640080" y="3721607"/>
+            <a:ext cx="411480" cy="365760"/>
+          </a:xfrm>
+          <a:prstGeom prst="rect">
+            <a:avLst/>
+          </a:prstGeom>
+          <a:noFill/>
+        </p:spPr>
+        <p:txBody>
+          <a:bodyPr wrap="square" anchor="t">
+            <a:spAutoFit/>
+          </a:bodyPr>
+          <a:lstStyle/>
+          <a:p>
+            <a:pPr algn="ctr">
+              <a:lnSpc>
+                <a:spcPct val="115000"/>
+              </a:lnSpc>
+            </a:pPr>
+            <a:r>
+              <a:rPr sz="1600" b="1">
+                <a:solidFill>
+                  <a:srgbClr val="FFFFFF"/>
+                </a:solidFill>
+                <a:latin typeface="Malgun Gothic"/>
+              </a:rPr>
+              <a:t>3</a:t>
+            </a:r>
+          </a:p>
+        </p:txBody>
+      </p:sp>
+      <p:sp>
+        <p:nvSpPr>
+          <p:cNvPr id="16" name="TextBox 15"/>
+          <p:cNvSpPr txBox="1"/>
+          <p:nvPr/>
+        </p:nvSpPr>
+        <p:spPr>
+          <a:xfrm>
+            <a:off x="1234440" y="3675887"/>
+            <a:ext cx="3840480" cy="457200"/>
+          </a:xfrm>
+          <a:prstGeom prst="rect">
+            <a:avLst/>
+          </a:prstGeom>
+          <a:noFill/>
+        </p:spPr>
+        <p:txBody>
+          <a:bodyPr wrap="square" anchor="t">
+            <a:spAutoFit/>
+          </a:bodyPr>
+          <a:lstStyle/>
+          <a:p>
+            <a:pPr algn="l">
+              <a:lnSpc>
+                <a:spcPct val="115000"/>
+              </a:lnSpc>
+            </a:pPr>
+            <a:r>
+              <a:rPr sz="1600" b="1">
+                <a:solidFill>
+                  <a:srgbClr val="0F766E"/>
+                </a:solidFill>
+                <a:latin typeface="Malgun Gothic"/>
+              </a:rPr>
+              <a:t>통계 확인</a:t>
+            </a:r>
+          </a:p>
+        </p:txBody>
+      </p:sp>
+      <p:sp>
+        <p:nvSpPr>
+          <p:cNvPr id="17" name="TextBox 16"/>
+          <p:cNvSpPr txBox="1"/>
+          <p:nvPr/>
+        </p:nvSpPr>
+        <p:spPr>
+          <a:xfrm>
+            <a:off x="1234440" y="4087367"/>
+            <a:ext cx="10241280" cy="640080"/>
+          </a:xfrm>
+          <a:prstGeom prst="rect">
+            <a:avLst/>
+          </a:prstGeom>
+          <a:noFill/>
+        </p:spPr>
+        <p:txBody>
+          <a:bodyPr wrap="square" anchor="t">
+            <a:spAutoFit/>
+          </a:bodyPr>
+          <a:lstStyle/>
+          <a:p>
+            <a:pPr algn="l">
+              <a:lnSpc>
+                <a:spcPct val="115000"/>
+              </a:lnSpc>
+            </a:pPr>
+            <a:r>
+              <a:rPr sz="1300" b="0">
+                <a:solidFill>
+                  <a:srgbClr val="4B6259"/>
+                </a:solidFill>
+                <a:latin typeface="Malgun Gothic"/>
+              </a:rPr>
+              <a:t>통계 페이지에서 카테고리 비중을 도넛·막대 차트로 토글</a:t>
+            </a:r>
+          </a:p>
+        </p:txBody>
+      </p:sp>
+      <p:sp>
+        <p:nvSpPr>
+          <p:cNvPr id="18" name="Oval 17"/>
+          <p:cNvSpPr/>
+          <p:nvPr/>
+        </p:nvSpPr>
+        <p:spPr>
+          <a:xfrm>
+            <a:off x="640080" y="4617719"/>
+            <a:ext cx="411480" cy="411480"/>
+          </a:xfrm>
+          <a:prstGeom prst="ellipse">
+            <a:avLst/>
+          </a:prstGeom>
+          <a:solidFill>
+            <a:srgbClr val="34D399"/>
+          </a:solidFill>
+          <a:ln>
+            <a:noFill/>
+          </a:ln>
+          <a:effectLst/>
+        </p:spPr>
+        <p:style>
+          <a:lnRef idx="1">
+            <a:schemeClr val="accent1"/>
+          </a:lnRef>
+          <a:fillRef idx="3">
+            <a:schemeClr val="accent1"/>
+          </a:fillRef>
+          <a:effectRef idx="2">
+            <a:schemeClr val="accent1"/>
+          </a:effectRef>
+          <a:fontRef idx="minor">
+            <a:schemeClr val="lt1"/>
+          </a:fontRef>
+        </p:style>
+        <p:txBody>
+          <a:bodyPr rtlCol="0" anchor="ctr"/>
+          <a:lstStyle/>
+          <a:p>
+            <a:pPr algn="ctr"/>
+          </a:p>
+        </p:txBody>
+      </p:sp>
+      <p:sp>
+        <p:nvSpPr>
+          <p:cNvPr id="19" name="TextBox 18"/>
+          <p:cNvSpPr txBox="1"/>
+          <p:nvPr/>
+        </p:nvSpPr>
+        <p:spPr>
+          <a:xfrm>
+            <a:off x="640080" y="4636007"/>
+            <a:ext cx="411480" cy="365760"/>
+          </a:xfrm>
+          <a:prstGeom prst="rect">
+            <a:avLst/>
+          </a:prstGeom>
+          <a:noFill/>
+        </p:spPr>
+        <p:txBody>
+          <a:bodyPr wrap="square" anchor="t">
+            <a:spAutoFit/>
+          </a:bodyPr>
+          <a:lstStyle/>
+          <a:p>
+            <a:pPr algn="ctr">
+              <a:lnSpc>
+                <a:spcPct val="115000"/>
+              </a:lnSpc>
+            </a:pPr>
+            <a:r>
+              <a:rPr sz="1600" b="1">
+                <a:solidFill>
+                  <a:srgbClr val="FFFFFF"/>
+                </a:solidFill>
+                <a:latin typeface="Malgun Gothic"/>
+              </a:rPr>
+              <a:t>4</a:t>
+            </a:r>
+          </a:p>
+        </p:txBody>
+      </p:sp>
+      <p:sp>
+        <p:nvSpPr>
+          <p:cNvPr id="20" name="TextBox 19"/>
+          <p:cNvSpPr txBox="1"/>
+          <p:nvPr/>
+        </p:nvSpPr>
+        <p:spPr>
+          <a:xfrm>
+            <a:off x="1234440" y="4590287"/>
+            <a:ext cx="3840480" cy="457200"/>
+          </a:xfrm>
+          <a:prstGeom prst="rect">
+            <a:avLst/>
+          </a:prstGeom>
+          <a:noFill/>
+        </p:spPr>
+        <p:txBody>
+          <a:bodyPr wrap="square" anchor="t">
+            <a:spAutoFit/>
+          </a:bodyPr>
+          <a:lstStyle/>
+          <a:p>
+            <a:pPr algn="l">
+              <a:lnSpc>
+                <a:spcPct val="115000"/>
+              </a:lnSpc>
+            </a:pPr>
+            <a:r>
+              <a:rPr sz="1600" b="1">
+                <a:solidFill>
+                  <a:srgbClr val="0F766E"/>
+                </a:solidFill>
+                <a:latin typeface="Malgun Gothic"/>
+              </a:rPr>
+              <a:t>게시판 이용</a:t>
+            </a:r>
+          </a:p>
+        </p:txBody>
+      </p:sp>
+      <p:sp>
+        <p:nvSpPr>
+          <p:cNvPr id="21" name="TextBox 20"/>
+          <p:cNvSpPr txBox="1"/>
+          <p:nvPr/>
+        </p:nvSpPr>
+        <p:spPr>
+          <a:xfrm>
+            <a:off x="1234440" y="5001767"/>
+            <a:ext cx="10241280" cy="640080"/>
+          </a:xfrm>
+          <a:prstGeom prst="rect">
+            <a:avLst/>
+          </a:prstGeom>
+          <a:noFill/>
+        </p:spPr>
+        <p:txBody>
+          <a:bodyPr wrap="square" anchor="t">
+            <a:spAutoFit/>
+          </a:bodyPr>
+          <a:lstStyle/>
+          <a:p>
+            <a:pPr algn="l">
+              <a:lnSpc>
+                <a:spcPct val="115000"/>
+              </a:lnSpc>
+            </a:pPr>
+            <a:r>
+              <a:rPr sz="1300" b="0">
+                <a:solidFill>
+                  <a:srgbClr val="4B6259"/>
+                </a:solidFill>
+                <a:latin typeface="Malgun Gothic"/>
+              </a:rPr>
+              <a:t>절약 팁 글쓰기 → 댓글 작성, 본인 글/댓글만 삭제 가능한지 확인</a:t>
+            </a:r>
+          </a:p>
+        </p:txBody>
+      </p:sp>
+      <p:sp>
+        <p:nvSpPr>
+          <p:cNvPr id="22" name="Oval 21"/>
+          <p:cNvSpPr/>
+          <p:nvPr/>
+        </p:nvSpPr>
+        <p:spPr>
+          <a:xfrm>
+            <a:off x="640080" y="5532119"/>
+            <a:ext cx="411480" cy="411480"/>
+          </a:xfrm>
+          <a:prstGeom prst="ellipse">
+            <a:avLst/>
+          </a:prstGeom>
+          <a:solidFill>
+            <a:srgbClr val="34D399"/>
+          </a:solidFill>
+          <a:ln>
+            <a:noFill/>
+          </a:ln>
+          <a:effectLst/>
+        </p:spPr>
+        <p:style>
+          <a:lnRef idx="1">
+            <a:schemeClr val="accent1"/>
+          </a:lnRef>
+          <a:fillRef idx="3">
+            <a:schemeClr val="accent1"/>
+          </a:fillRef>
+          <a:effectRef idx="2">
+            <a:schemeClr val="accent1"/>
+          </a:effectRef>
+          <a:fontRef idx="minor">
+            <a:schemeClr val="lt1"/>
+          </a:fontRef>
+        </p:style>
+        <p:txBody>
+          <a:bodyPr rtlCol="0" anchor="ctr"/>
+          <a:lstStyle/>
+          <a:p>
+            <a:pPr algn="ctr"/>
+          </a:p>
+        </p:txBody>
+      </p:sp>
+      <p:sp>
+        <p:nvSpPr>
+          <p:cNvPr id="23" name="TextBox 22"/>
+          <p:cNvSpPr txBox="1"/>
+          <p:nvPr/>
+        </p:nvSpPr>
+        <p:spPr>
+          <a:xfrm>
+            <a:off x="640080" y="5550407"/>
+            <a:ext cx="411480" cy="365760"/>
+          </a:xfrm>
+          <a:prstGeom prst="rect">
+            <a:avLst/>
+          </a:prstGeom>
+          <a:noFill/>
+        </p:spPr>
+        <p:txBody>
+          <a:bodyPr wrap="square" anchor="t">
+            <a:spAutoFit/>
+          </a:bodyPr>
+          <a:lstStyle/>
+          <a:p>
+            <a:pPr algn="ctr">
+              <a:lnSpc>
+                <a:spcPct val="115000"/>
+              </a:lnSpc>
+            </a:pPr>
+            <a:r>
+              <a:rPr sz="1600" b="1">
+                <a:solidFill>
+                  <a:srgbClr val="FFFFFF"/>
+                </a:solidFill>
+                <a:latin typeface="Malgun Gothic"/>
+              </a:rPr>
+              <a:t>5</a:t>
+            </a:r>
+          </a:p>
+        </p:txBody>
+      </p:sp>
+      <p:sp>
+        <p:nvSpPr>
+          <p:cNvPr id="24" name="TextBox 23"/>
+          <p:cNvSpPr txBox="1"/>
+          <p:nvPr/>
+        </p:nvSpPr>
+        <p:spPr>
+          <a:xfrm>
+            <a:off x="1234440" y="5504687"/>
+            <a:ext cx="3840480" cy="457200"/>
+          </a:xfrm>
+          <a:prstGeom prst="rect">
+            <a:avLst/>
+          </a:prstGeom>
+          <a:noFill/>
+        </p:spPr>
+        <p:txBody>
+          <a:bodyPr wrap="square" anchor="t">
+            <a:spAutoFit/>
+          </a:bodyPr>
+          <a:lstStyle/>
+          <a:p>
+            <a:pPr algn="l">
+              <a:lnSpc>
+                <a:spcPct val="115000"/>
+              </a:lnSpc>
+            </a:pPr>
+            <a:r>
+              <a:rPr sz="1600" b="1">
+                <a:solidFill>
+                  <a:srgbClr val="0F766E"/>
+                </a:solidFill>
+                <a:latin typeface="Malgun Gothic"/>
+              </a:rPr>
+              <a:t>관리자 기능</a:t>
+            </a:r>
+          </a:p>
+        </p:txBody>
+      </p:sp>
+      <p:sp>
+        <p:nvSpPr>
+          <p:cNvPr id="25" name="TextBox 24"/>
+          <p:cNvSpPr txBox="1"/>
+          <p:nvPr/>
+        </p:nvSpPr>
+        <p:spPr>
+          <a:xfrm>
+            <a:off x="1234440" y="5916167"/>
+            <a:ext cx="10241280" cy="640080"/>
+          </a:xfrm>
+          <a:prstGeom prst="rect">
+            <a:avLst/>
+          </a:prstGeom>
+          <a:noFill/>
+        </p:spPr>
+        <p:txBody>
+          <a:bodyPr wrap="square" anchor="t">
+            <a:spAutoFit/>
+          </a:bodyPr>
+          <a:lstStyle/>
+          <a:p>
+            <a:pPr algn="l">
+              <a:lnSpc>
+                <a:spcPct val="115000"/>
+              </a:lnSpc>
+            </a:pPr>
+            <a:r>
+              <a:rPr sz="1300" b="0">
+                <a:solidFill>
+                  <a:srgbClr val="4B6259"/>
+                </a:solidFill>
+                <a:latin typeface="Malgun Gothic"/>
+              </a:rPr>
+              <a:t>관리자 로그인 → 전체 통계 → 회원 정지/해제 → 게시판 모더레이션</a:t>
+            </a:r>
+          </a:p>
+        </p:txBody>
+      </p:sp>
+      <p:sp>
+        <p:nvSpPr>
+          <p:cNvPr id="26" name="TextBox 25"/>
+          <p:cNvSpPr txBox="1"/>
+          <p:nvPr/>
+        </p:nvSpPr>
+        <p:spPr>
+          <a:xfrm>
+            <a:off x="457200" y="6446520"/>
+            <a:ext cx="7315200" cy="320040"/>
+          </a:xfrm>
+          <a:prstGeom prst="rect">
+            <a:avLst/>
+          </a:prstGeom>
+          <a:noFill/>
+        </p:spPr>
+        <p:txBody>
+          <a:bodyPr wrap="square" anchor="t">
+            <a:spAutoFit/>
+          </a:bodyPr>
+          <a:lstStyle/>
+          <a:p>
+            <a:pPr algn="l">
+              <a:lnSpc>
+                <a:spcPct val="115000"/>
+              </a:lnSpc>
+            </a:pPr>
+            <a:r>
+              <a:rPr sz="1000" b="0">
+                <a:solidFill>
+                  <a:srgbClr val="6E8880"/>
+                </a:solidFill>
+                <a:latin typeface="Malgun Gothic"/>
+              </a:rPr>
+              <a:t>EXPENSE TRACKER · PORTFOLIO</a:t>
+            </a:r>
+          </a:p>
+        </p:txBody>
+      </p:sp>
+      <p:sp>
+        <p:nvSpPr>
+          <p:cNvPr id="27" name="TextBox 26"/>
+          <p:cNvSpPr txBox="1"/>
+          <p:nvPr/>
+        </p:nvSpPr>
+        <p:spPr>
+          <a:xfrm>
+            <a:off x="11002975" y="6446520"/>
+            <a:ext cx="822960" cy="320040"/>
+          </a:xfrm>
+          <a:prstGeom prst="rect">
+            <a:avLst/>
+          </a:prstGeom>
+          <a:noFill/>
+        </p:spPr>
+        <p:txBody>
+          <a:bodyPr wrap="square" anchor="t">
+            <a:spAutoFit/>
+          </a:bodyPr>
+          <a:lstStyle/>
+          <a:p>
+            <a:pPr algn="r">
+              <a:lnSpc>
+                <a:spcPct val="115000"/>
+              </a:lnSpc>
+            </a:pPr>
+            <a:r>
+              <a:rPr sz="1000" b="0">
+                <a:solidFill>
+                  <a:srgbClr val="6E8880"/>
+                </a:solidFill>
+                <a:latin typeface="Malgun Gothic"/>
+              </a:rPr>
+              <a:t>13</a:t>
+            </a:r>
+          </a:p>
+        </p:txBody>
+      </p:sp>
+    </p:spTree>
+  </p:cSld>
+  <p:clrMapOvr>
+    <a:masterClrMapping/>
+  </p:clrMapOvr>
+</p:sld>
+</file>
+
+<file path=ppt/slides/slide14.xml><?xml version="1.0" encoding="utf-8"?>
+<p:sld xmlns:a="http://schemas.openxmlformats.org/drawingml/2006/main" xmlns:p="http://schemas.openxmlformats.org/presentationml/2006/main" xmlns:r="http://schemas.openxmlformats.org/officeDocument/2006/relationships">
+  <p:cSld>
+    <p:bg>
+      <p:bgPr>
+        <a:solidFill>
+          <a:srgbClr val="F3FBF8"/>
+        </a:solidFill>
+        <a:effectLst/>
+      </p:bgPr>
+    </p:bg>
+    <p:spTree>
+      <p:nvGrpSpPr>
+        <p:cNvPr id="1" name=""/>
+        <p:cNvGrpSpPr/>
+        <p:nvPr/>
+      </p:nvGrpSpPr>
+      <p:grpSpPr/>
+      <p:sp>
+        <p:nvSpPr>
+          <p:cNvPr id="2" name="Rectangle 1"/>
+          <p:cNvSpPr/>
+          <p:nvPr/>
+        </p:nvSpPr>
+        <p:spPr>
+          <a:xfrm>
+            <a:off x="457200" y="502920"/>
+            <a:ext cx="109728" cy="457200"/>
+          </a:xfrm>
+          <a:prstGeom prst="rect">
+            <a:avLst/>
+          </a:prstGeom>
+          <a:solidFill>
+            <a:srgbClr val="0F766E"/>
+          </a:solidFill>
+          <a:ln>
+            <a:noFill/>
+          </a:ln>
+          <a:effectLst/>
+        </p:spPr>
+        <p:style>
+          <a:lnRef idx="1">
+            <a:schemeClr val="accent1"/>
+          </a:lnRef>
+          <a:fillRef idx="3">
+            <a:schemeClr val="accent1"/>
+          </a:fillRef>
+          <a:effectRef idx="2">
+            <a:schemeClr val="accent1"/>
+          </a:effectRef>
+          <a:fontRef idx="minor">
+            <a:schemeClr val="lt1"/>
+          </a:fontRef>
+        </p:style>
+        <p:txBody>
+          <a:bodyPr rtlCol="0" anchor="ctr"/>
+          <a:lstStyle/>
+          <a:p>
+            <a:pPr algn="ctr"/>
+          </a:p>
+        </p:txBody>
+      </p:sp>
+      <p:sp>
+        <p:nvSpPr>
+          <p:cNvPr id="3" name="TextBox 2"/>
+          <p:cNvSpPr txBox="1"/>
+          <p:nvPr/>
+        </p:nvSpPr>
+        <p:spPr>
+          <a:xfrm>
+            <a:off x="685800" y="411480"/>
+            <a:ext cx="9144000" cy="365760"/>
+          </a:xfrm>
+          <a:prstGeom prst="rect">
+            <a:avLst/>
+          </a:prstGeom>
+          <a:noFill/>
+        </p:spPr>
+        <p:txBody>
+          <a:bodyPr wrap="square" anchor="t">
+            <a:spAutoFit/>
+          </a:bodyPr>
+          <a:lstStyle/>
+          <a:p>
+            <a:pPr algn="l">
+              <a:lnSpc>
+                <a:spcPct val="115000"/>
+              </a:lnSpc>
+            </a:pPr>
+            <a:r>
+              <a:rPr sz="1300" b="1">
+                <a:solidFill>
+                  <a:srgbClr val="0F766E"/>
+                </a:solidFill>
+                <a:latin typeface="Malgun Gothic"/>
+              </a:rPr>
+              <a:t>TROUBLESHOOTING</a:t>
+            </a:r>
+          </a:p>
+        </p:txBody>
+      </p:sp>
+      <p:sp>
+        <p:nvSpPr>
+          <p:cNvPr id="4" name="TextBox 3"/>
+          <p:cNvSpPr txBox="1"/>
+          <p:nvPr/>
+        </p:nvSpPr>
+        <p:spPr>
+          <a:xfrm>
+            <a:off x="640080" y="777240"/>
+            <a:ext cx="10515600" cy="731520"/>
+          </a:xfrm>
+          <a:prstGeom prst="rect">
+            <a:avLst/>
+          </a:prstGeom>
+          <a:noFill/>
+        </p:spPr>
+        <p:txBody>
+          <a:bodyPr wrap="square" anchor="t">
+            <a:spAutoFit/>
+          </a:bodyPr>
+          <a:lstStyle/>
+          <a:p>
+            <a:pPr algn="l">
+              <a:lnSpc>
+                <a:spcPct val="115000"/>
+              </a:lnSpc>
+            </a:pPr>
+            <a:r>
+              <a:rPr sz="2800" b="1">
+                <a:solidFill>
+                  <a:srgbClr val="1F2E2A"/>
+                </a:solidFill>
+                <a:latin typeface="Malgun Gothic"/>
+              </a:rPr>
+              <a:t>문제 해결</a:t>
+            </a:r>
+          </a:p>
+        </p:txBody>
+      </p:sp>
+      <p:sp>
+        <p:nvSpPr>
+          <p:cNvPr id="5" name="Rectangle 4"/>
+          <p:cNvSpPr/>
+          <p:nvPr/>
+        </p:nvSpPr>
+        <p:spPr>
+          <a:xfrm>
+            <a:off x="640080" y="1508760"/>
+            <a:ext cx="10972800" cy="25400"/>
+          </a:xfrm>
+          <a:prstGeom prst="rect">
+            <a:avLst/>
+          </a:prstGeom>
+          <a:solidFill>
+            <a:srgbClr val="DCEEE7"/>
+          </a:solidFill>
+          <a:ln>
+            <a:noFill/>
+          </a:ln>
+          <a:effectLst/>
+        </p:spPr>
+        <p:style>
+          <a:lnRef idx="1">
+            <a:schemeClr val="accent1"/>
+          </a:lnRef>
+          <a:fillRef idx="3">
+            <a:schemeClr val="accent1"/>
+          </a:fillRef>
+          <a:effectRef idx="2">
+            <a:schemeClr val="accent1"/>
+          </a:effectRef>
+          <a:fontRef idx="minor">
+            <a:schemeClr val="lt1"/>
+          </a:fontRef>
+        </p:style>
+        <p:txBody>
+          <a:bodyPr rtlCol="0" anchor="ctr"/>
+          <a:lstStyle/>
+          <a:p>
+            <a:pPr algn="ctr"/>
+          </a:p>
+        </p:txBody>
+      </p:sp>
+      <p:sp>
+        <p:nvSpPr>
+          <p:cNvPr id="6" name="TextBox 5"/>
+          <p:cNvSpPr txBox="1"/>
+          <p:nvPr/>
+        </p:nvSpPr>
+        <p:spPr>
+          <a:xfrm>
+            <a:off x="640080" y="1828800"/>
+            <a:ext cx="10789920" cy="4572000"/>
+          </a:xfrm>
+          <a:prstGeom prst="rect">
+            <a:avLst/>
+          </a:prstGeom>
+          <a:noFill/>
+        </p:spPr>
+        <p:txBody>
+          <a:bodyPr wrap="square">
+            <a:spAutoFit/>
+          </a:bodyPr>
+          <a:lstStyle/>
+          <a:p>
+            <a:pPr>
+              <a:lnSpc>
+                <a:spcPct val="120000"/>
+              </a:lnSpc>
+              <a:spcAft>
+                <a:spcPts val="1000"/>
+              </a:spcAft>
+            </a:pPr>
+            <a:r>
+              <a:rPr sz="1500" b="0">
+                <a:solidFill>
+                  <a:srgbClr val="1F2E2A"/>
+                </a:solidFill>
+                <a:latin typeface="Malgun Gothic"/>
+              </a:rPr>
+              <a:t>•  RLS 무한 재귀</a:t>
+            </a:r>
+          </a:p>
+          <a:p>
+            <a:pPr>
+              <a:spcAft>
+                <a:spcPts val="1000"/>
+              </a:spcAft>
+            </a:pPr>
+            <a:r>
+              <a:rPr sz="1200">
+                <a:solidFill>
+                  <a:srgbClr val="6E8880"/>
+                </a:solidFill>
+                <a:latin typeface="Malgun Gothic"/>
+              </a:rPr>
+              <a:t>     원인: profiles 정책 안에서 profiles.role을 다시 조회하며 재귀 발생 → 해결: SECURITY DEFINER 함수 is_admin()으로 우회</a:t>
+            </a:r>
+          </a:p>
+          <a:p>
+            <a:pPr>
+              <a:lnSpc>
+                <a:spcPct val="120000"/>
+              </a:lnSpc>
+              <a:spcAft>
+                <a:spcPts val="1000"/>
+              </a:spcAft>
+            </a:pPr>
+            <a:r>
+              <a:rPr sz="1500" b="0">
+                <a:solidFill>
+                  <a:srgbClr val="1F2E2A"/>
+                </a:solidFill>
+                <a:latin typeface="Malgun Gothic"/>
+              </a:rPr>
+              <a:t>•  내부 함수의 의도치 않은 RPC 노출</a:t>
+            </a:r>
+          </a:p>
+          <a:p>
+            <a:pPr>
+              <a:spcAft>
+                <a:spcPts val="1000"/>
+              </a:spcAft>
+            </a:pPr>
+            <a:r>
+              <a:rPr sz="1200">
+                <a:solidFill>
+                  <a:srgbClr val="6E8880"/>
+                </a:solidFill>
+                <a:latin typeface="Malgun Gothic"/>
+              </a:rPr>
+              <a:t>     원인: handle_new_user·is_admin이 anon/authenticated에서 직접 호출 가능 (Security Advisor 경고) → 해결: REVOKE EXECUTE로 불필요한 권한 회수</a:t>
+            </a:r>
+          </a:p>
+          <a:p>
+            <a:pPr>
+              <a:lnSpc>
+                <a:spcPct val="120000"/>
+              </a:lnSpc>
+              <a:spcAft>
+                <a:spcPts val="1000"/>
+              </a:spcAft>
+            </a:pPr>
+            <a:r>
+              <a:rPr sz="1500" b="0">
+                <a:solidFill>
+                  <a:srgbClr val="1F2E2A"/>
+                </a:solidFill>
+                <a:latin typeface="Malgun Gothic"/>
+              </a:rPr>
+              <a:t>•  스크린샷 데이터 "0원" 표시 버그</a:t>
+            </a:r>
+          </a:p>
+          <a:p>
+            <a:pPr>
+              <a:spcAft>
+                <a:spcPts val="1000"/>
+              </a:spcAft>
+            </a:pPr>
+            <a:r>
+              <a:rPr sz="1200">
+                <a:solidFill>
+                  <a:srgbClr val="6E8880"/>
+                </a:solidFill>
+                <a:latin typeface="Malgun Gothic"/>
+              </a:rPr>
+              <a:t>     원인: 시드 스크립트의 월 계산 로직 오류로 "이번 달" 데이터가 비어 보임 → 해결: 날짜 생성 로직을 오늘 날짜 기준으로 수정 후 Playwright로 재검증</a:t>
+            </a:r>
+          </a:p>
+          <a:p>
+            <a:pPr>
+              <a:lnSpc>
+                <a:spcPct val="120000"/>
+              </a:lnSpc>
+              <a:spcAft>
+                <a:spcPts val="1000"/>
+              </a:spcAft>
+            </a:pPr>
+            <a:r>
+              <a:rPr sz="1500" b="0">
+                <a:solidFill>
+                  <a:srgbClr val="1F2E2A"/>
+                </a:solidFill>
+                <a:latin typeface="Malgun Gothic"/>
+              </a:rPr>
+              <a:t>•  백그라운드 로컬 서버 연결 끊김</a:t>
+            </a:r>
+          </a:p>
+          <a:p>
+            <a:pPr>
+              <a:spcAft>
+                <a:spcPts val="1000"/>
+              </a:spcAft>
+            </a:pPr>
+            <a:r>
+              <a:rPr sz="1200">
+                <a:solidFill>
+                  <a:srgbClr val="6E8880"/>
+                </a:solidFill>
+                <a:latin typeface="Malgun Gothic"/>
+              </a:rPr>
+              <a:t>     원인: 서브셸에서 띄운 서버가 셸 종료와 함께 죽어 다음 명령에서 연결 거부 → 해결: nohup + disown으로 셸과 분리해 지속 실행</a:t>
+            </a:r>
+          </a:p>
+        </p:txBody>
+      </p:sp>
+      <p:sp>
+        <p:nvSpPr>
+          <p:cNvPr id="7" name="TextBox 6"/>
+          <p:cNvSpPr txBox="1"/>
+          <p:nvPr/>
+        </p:nvSpPr>
+        <p:spPr>
+          <a:xfrm>
+            <a:off x="457200" y="6446520"/>
+            <a:ext cx="7315200" cy="320040"/>
+          </a:xfrm>
+          <a:prstGeom prst="rect">
+            <a:avLst/>
+          </a:prstGeom>
+          <a:noFill/>
+        </p:spPr>
+        <p:txBody>
+          <a:bodyPr wrap="square" anchor="t">
+            <a:spAutoFit/>
+          </a:bodyPr>
+          <a:lstStyle/>
+          <a:p>
+            <a:pPr algn="l">
+              <a:lnSpc>
+                <a:spcPct val="115000"/>
+              </a:lnSpc>
+            </a:pPr>
+            <a:r>
+              <a:rPr sz="1000" b="0">
+                <a:solidFill>
+                  <a:srgbClr val="6E8880"/>
+                </a:solidFill>
+                <a:latin typeface="Malgun Gothic"/>
+              </a:rPr>
+              <a:t>EXPENSE TRACKER · PORTFOLIO</a:t>
+            </a:r>
+          </a:p>
+        </p:txBody>
+      </p:sp>
+      <p:sp>
+        <p:nvSpPr>
+          <p:cNvPr id="8" name="TextBox 7"/>
+          <p:cNvSpPr txBox="1"/>
+          <p:nvPr/>
+        </p:nvSpPr>
+        <p:spPr>
+          <a:xfrm>
+            <a:off x="11002975" y="6446520"/>
+            <a:ext cx="822960" cy="320040"/>
+          </a:xfrm>
+          <a:prstGeom prst="rect">
+            <a:avLst/>
+          </a:prstGeom>
+          <a:noFill/>
+        </p:spPr>
+        <p:txBody>
+          <a:bodyPr wrap="square" anchor="t">
+            <a:spAutoFit/>
+          </a:bodyPr>
+          <a:lstStyle/>
+          <a:p>
+            <a:pPr algn="r">
+              <a:lnSpc>
+                <a:spcPct val="115000"/>
+              </a:lnSpc>
+            </a:pPr>
+            <a:r>
+              <a:rPr sz="1000" b="0">
+                <a:solidFill>
+                  <a:srgbClr val="6E8880"/>
+                </a:solidFill>
+                <a:latin typeface="Malgun Gothic"/>
+              </a:rPr>
+              <a:t>14</a:t>
+            </a:r>
+          </a:p>
+        </p:txBody>
+      </p:sp>
+    </p:spTree>
+  </p:cSld>
+  <p:clrMapOvr>
+    <a:masterClrMapping/>
+  </p:clrMapOvr>
+</p:sld>
+</file>
+
+<file path=ppt/slides/slide15.xml><?xml version="1.0" encoding="utf-8"?>
+<p:sld xmlns:a="http://schemas.openxmlformats.org/drawingml/2006/main" xmlns:p="http://schemas.openxmlformats.org/presentationml/2006/main" xmlns:r="http://schemas.openxmlformats.org/officeDocument/2006/relationships">
+  <p:cSld>
+    <p:bg>
+      <p:bgPr>
+        <a:solidFill>
+          <a:srgbClr val="F3FBF8"/>
+        </a:solidFill>
+        <a:effectLst/>
+      </p:bgPr>
+    </p:bg>
+    <p:spTree>
+      <p:nvGrpSpPr>
+        <p:cNvPr id="1" name=""/>
+        <p:cNvGrpSpPr/>
+        <p:nvPr/>
+      </p:nvGrpSpPr>
+      <p:grpSpPr/>
+      <p:sp>
+        <p:nvSpPr>
+          <p:cNvPr id="2" name="Rectangle 1"/>
+          <p:cNvSpPr/>
+          <p:nvPr/>
+        </p:nvSpPr>
+        <p:spPr>
+          <a:xfrm>
+            <a:off x="457200" y="502920"/>
+            <a:ext cx="109728" cy="457200"/>
+          </a:xfrm>
+          <a:prstGeom prst="rect">
+            <a:avLst/>
+          </a:prstGeom>
+          <a:solidFill>
+            <a:srgbClr val="0F766E"/>
+          </a:solidFill>
+          <a:ln>
+            <a:noFill/>
+          </a:ln>
+          <a:effectLst/>
+        </p:spPr>
+        <p:style>
+          <a:lnRef idx="1">
+            <a:schemeClr val="accent1"/>
+          </a:lnRef>
+          <a:fillRef idx="3">
+            <a:schemeClr val="accent1"/>
+          </a:fillRef>
+          <a:effectRef idx="2">
+            <a:schemeClr val="accent1"/>
+          </a:effectRef>
+          <a:fontRef idx="minor">
+            <a:schemeClr val="lt1"/>
+          </a:fontRef>
+        </p:style>
+        <p:txBody>
+          <a:bodyPr rtlCol="0" anchor="ctr"/>
+          <a:lstStyle/>
+          <a:p>
+            <a:pPr algn="ctr"/>
+          </a:p>
+        </p:txBody>
+      </p:sp>
+      <p:sp>
+        <p:nvSpPr>
+          <p:cNvPr id="3" name="TextBox 2"/>
+          <p:cNvSpPr txBox="1"/>
+          <p:nvPr/>
+        </p:nvSpPr>
+        <p:spPr>
+          <a:xfrm>
+            <a:off x="685800" y="411480"/>
+            <a:ext cx="9144000" cy="365760"/>
+          </a:xfrm>
+          <a:prstGeom prst="rect">
+            <a:avLst/>
+          </a:prstGeom>
+          <a:noFill/>
+        </p:spPr>
+        <p:txBody>
+          <a:bodyPr wrap="square" anchor="t">
+            <a:spAutoFit/>
+          </a:bodyPr>
+          <a:lstStyle/>
+          <a:p>
+            <a:pPr algn="l">
+              <a:lnSpc>
+                <a:spcPct val="115000"/>
+              </a:lnSpc>
+            </a:pPr>
+            <a:r>
+              <a:rPr sz="1300" b="1">
+                <a:solidFill>
+                  <a:srgbClr val="0F766E"/>
+                </a:solidFill>
+                <a:latin typeface="Malgun Gothic"/>
+              </a:rPr>
+              <a:t>NEXT STEPS</a:t>
+            </a:r>
+          </a:p>
+        </p:txBody>
+      </p:sp>
+      <p:sp>
+        <p:nvSpPr>
+          <p:cNvPr id="4" name="TextBox 3"/>
+          <p:cNvSpPr txBox="1"/>
+          <p:nvPr/>
+        </p:nvSpPr>
+        <p:spPr>
+          <a:xfrm>
+            <a:off x="640080" y="777240"/>
+            <a:ext cx="10515600" cy="731520"/>
+          </a:xfrm>
+          <a:prstGeom prst="rect">
+            <a:avLst/>
+          </a:prstGeom>
+          <a:noFill/>
+        </p:spPr>
+        <p:txBody>
+          <a:bodyPr wrap="square" anchor="t">
+            <a:spAutoFit/>
+          </a:bodyPr>
+          <a:lstStyle/>
+          <a:p>
+            <a:pPr algn="l">
+              <a:lnSpc>
+                <a:spcPct val="115000"/>
+              </a:lnSpc>
+            </a:pPr>
+            <a:r>
+              <a:rPr sz="2800" b="1">
+                <a:solidFill>
+                  <a:srgbClr val="1F2E2A"/>
+                </a:solidFill>
+                <a:latin typeface="Malgun Gothic"/>
+              </a:rPr>
+              <a:t>개선점</a:t>
+            </a:r>
+          </a:p>
+        </p:txBody>
+      </p:sp>
+      <p:sp>
+        <p:nvSpPr>
+          <p:cNvPr id="5" name="Rectangle 4"/>
+          <p:cNvSpPr/>
+          <p:nvPr/>
+        </p:nvSpPr>
+        <p:spPr>
+          <a:xfrm>
+            <a:off x="640080" y="1508760"/>
+            <a:ext cx="10972800" cy="25400"/>
+          </a:xfrm>
+          <a:prstGeom prst="rect">
+            <a:avLst/>
+          </a:prstGeom>
+          <a:solidFill>
+            <a:srgbClr val="DCEEE7"/>
+          </a:solidFill>
+          <a:ln>
+            <a:noFill/>
+          </a:ln>
+          <a:effectLst/>
+        </p:spPr>
+        <p:style>
+          <a:lnRef idx="1">
+            <a:schemeClr val="accent1"/>
+          </a:lnRef>
+          <a:fillRef idx="3">
+            <a:schemeClr val="accent1"/>
+          </a:fillRef>
+          <a:effectRef idx="2">
+            <a:schemeClr val="accent1"/>
+          </a:effectRef>
+          <a:fontRef idx="minor">
+            <a:schemeClr val="lt1"/>
+          </a:fontRef>
+        </p:style>
+        <p:txBody>
+          <a:bodyPr rtlCol="0" anchor="ctr"/>
+          <a:lstStyle/>
+          <a:p>
+            <a:pPr algn="ctr"/>
+          </a:p>
+        </p:txBody>
+      </p:sp>
+      <p:sp>
+        <p:nvSpPr>
+          <p:cNvPr id="6" name="TextBox 5"/>
+          <p:cNvSpPr txBox="1"/>
+          <p:nvPr/>
+        </p:nvSpPr>
+        <p:spPr>
+          <a:xfrm>
+            <a:off x="640080" y="1828800"/>
+            <a:ext cx="10789920" cy="4572000"/>
+          </a:xfrm>
+          <a:prstGeom prst="rect">
+            <a:avLst/>
+          </a:prstGeom>
+          <a:noFill/>
+        </p:spPr>
+        <p:txBody>
+          <a:bodyPr wrap="square">
+            <a:spAutoFit/>
+          </a:bodyPr>
+          <a:lstStyle/>
+          <a:p>
+            <a:pPr>
+              <a:lnSpc>
+                <a:spcPct val="120000"/>
+              </a:lnSpc>
+              <a:spcAft>
+                <a:spcPts val="1000"/>
+              </a:spcAft>
+            </a:pPr>
+            <a:r>
+              <a:rPr sz="1600" b="0">
+                <a:solidFill>
+                  <a:srgbClr val="1F2E2A"/>
+                </a:solidFill>
+                <a:latin typeface="Malgun Gothic"/>
+              </a:rPr>
+              <a:t>•  관리자 인증 전환</a:t>
+            </a:r>
+          </a:p>
+          <a:p>
+            <a:pPr>
+              <a:spcAft>
+                <a:spcPts val="1000"/>
+              </a:spcAft>
+            </a:pPr>
+            <a:r>
+              <a:rPr sz="1300">
+                <a:solidFill>
+                  <a:srgbClr val="6E8880"/>
+                </a:solidFill>
+                <a:latin typeface="Malgun Gothic"/>
+              </a:rPr>
+              <a:t>     하드코딩된 관리자 계정도 Supabase Auth 기반으로 전환 검토</a:t>
+            </a:r>
+          </a:p>
+          <a:p>
+            <a:pPr>
+              <a:lnSpc>
+                <a:spcPct val="120000"/>
+              </a:lnSpc>
+              <a:spcAft>
+                <a:spcPts val="1000"/>
+              </a:spcAft>
+            </a:pPr>
+            <a:r>
+              <a:rPr sz="1600" b="0">
+                <a:solidFill>
+                  <a:srgbClr val="1F2E2A"/>
+                </a:solidFill>
+                <a:latin typeface="Malgun Gothic"/>
+              </a:rPr>
+              <a:t>•  프론트엔드 연동</a:t>
+            </a:r>
+          </a:p>
+          <a:p>
+            <a:pPr>
+              <a:spcAft>
+                <a:spcPts val="1000"/>
+              </a:spcAft>
+            </a:pPr>
+            <a:r>
+              <a:rPr sz="1300">
+                <a:solidFill>
+                  <a:srgbClr val="6E8880"/>
+                </a:solidFill>
+                <a:latin typeface="Malgun Gothic"/>
+              </a:rPr>
+              <a:t>     현재 localStorage로 유지 중인 js/utils.js를 Supabase 클라이언트 호출로 교체</a:t>
+            </a:r>
+          </a:p>
+          <a:p>
+            <a:pPr>
+              <a:lnSpc>
+                <a:spcPct val="120000"/>
+              </a:lnSpc>
+              <a:spcAft>
+                <a:spcPts val="1000"/>
+              </a:spcAft>
+            </a:pPr>
+            <a:r>
+              <a:rPr sz="1600" b="0">
+                <a:solidFill>
+                  <a:srgbClr val="1F2E2A"/>
+                </a:solidFill>
+                <a:latin typeface="Malgun Gothic"/>
+              </a:rPr>
+              <a:t>•  게시판 모더레이션 강화</a:t>
+            </a:r>
+          </a:p>
+          <a:p>
+            <a:pPr>
+              <a:spcAft>
+                <a:spcPts val="1000"/>
+              </a:spcAft>
+            </a:pPr>
+            <a:r>
+              <a:rPr sz="1300">
+                <a:solidFill>
+                  <a:srgbClr val="6E8880"/>
+                </a:solidFill>
+                <a:latin typeface="Malgun Gothic"/>
+              </a:rPr>
+              <a:t>     신고/차단 기능을 추가해 커뮤니티 관리 수준을 높임</a:t>
+            </a:r>
+          </a:p>
+          <a:p>
+            <a:pPr>
+              <a:lnSpc>
+                <a:spcPct val="120000"/>
+              </a:lnSpc>
+              <a:spcAft>
+                <a:spcPts val="1000"/>
+              </a:spcAft>
+            </a:pPr>
+            <a:r>
+              <a:rPr sz="1600" b="0">
+                <a:solidFill>
+                  <a:srgbClr val="1F2E2A"/>
+                </a:solidFill>
+                <a:latin typeface="Malgun Gothic"/>
+              </a:rPr>
+              <a:t>•  관리자 대시보드 확장</a:t>
+            </a:r>
+          </a:p>
+          <a:p>
+            <a:pPr>
+              <a:spcAft>
+                <a:spcPts val="1000"/>
+              </a:spcAft>
+            </a:pPr>
+            <a:r>
+              <a:rPr sz="1300">
+                <a:solidFill>
+                  <a:srgbClr val="6E8880"/>
+                </a:solidFill>
+                <a:latin typeface="Malgun Gothic"/>
+              </a:rPr>
+              <a:t>     실시간 통계·알림 기능 추가</a:t>
+            </a:r>
+          </a:p>
+        </p:txBody>
+      </p:sp>
+      <p:sp>
+        <p:nvSpPr>
+          <p:cNvPr id="7" name="TextBox 6"/>
+          <p:cNvSpPr txBox="1"/>
+          <p:nvPr/>
+        </p:nvSpPr>
+        <p:spPr>
+          <a:xfrm>
+            <a:off x="457200" y="6446520"/>
+            <a:ext cx="7315200" cy="320040"/>
+          </a:xfrm>
+          <a:prstGeom prst="rect">
+            <a:avLst/>
+          </a:prstGeom>
+          <a:noFill/>
+        </p:spPr>
+        <p:txBody>
+          <a:bodyPr wrap="square" anchor="t">
+            <a:spAutoFit/>
+          </a:bodyPr>
+          <a:lstStyle/>
+          <a:p>
+            <a:pPr algn="l">
+              <a:lnSpc>
+                <a:spcPct val="115000"/>
+              </a:lnSpc>
+            </a:pPr>
+            <a:r>
+              <a:rPr sz="1000" b="0">
+                <a:solidFill>
+                  <a:srgbClr val="6E8880"/>
+                </a:solidFill>
+                <a:latin typeface="Malgun Gothic"/>
+              </a:rPr>
+              <a:t>EXPENSE TRACKER · PORTFOLIO</a:t>
+            </a:r>
+          </a:p>
+        </p:txBody>
+      </p:sp>
+      <p:sp>
+        <p:nvSpPr>
+          <p:cNvPr id="8" name="TextBox 7"/>
+          <p:cNvSpPr txBox="1"/>
+          <p:nvPr/>
+        </p:nvSpPr>
+        <p:spPr>
+          <a:xfrm>
+            <a:off x="11002975" y="6446520"/>
+            <a:ext cx="822960" cy="320040"/>
+          </a:xfrm>
+          <a:prstGeom prst="rect">
+            <a:avLst/>
+          </a:prstGeom>
+          <a:noFill/>
+        </p:spPr>
+        <p:txBody>
+          <a:bodyPr wrap="square" anchor="t">
+            <a:spAutoFit/>
+          </a:bodyPr>
+          <a:lstStyle/>
+          <a:p>
+            <a:pPr algn="r">
+              <a:lnSpc>
+                <a:spcPct val="115000"/>
+              </a:lnSpc>
+            </a:pPr>
+            <a:r>
+              <a:rPr sz="1000" b="0">
+                <a:solidFill>
+                  <a:srgbClr val="6E8880"/>
+                </a:solidFill>
+                <a:latin typeface="Malgun Gothic"/>
+              </a:rPr>
+              <a:t>15</a:t>
+            </a:r>
+          </a:p>
+        </p:txBody>
+      </p:sp>
+    </p:spTree>
+  </p:cSld>
+  <p:clrMapOvr>
+    <a:masterClrMapping/>
+  </p:clrMapOvr>
+</p:sld>
+</file>
+
+<file path=ppt/slides/slide16.xml><?xml version="1.0" encoding="utf-8"?>
+<p:sld xmlns:a="http://schemas.openxmlformats.org/drawingml/2006/main" xmlns:p="http://schemas.openxmlformats.org/presentationml/2006/main" xmlns:r="http://schemas.openxmlformats.org/officeDocument/2006/relationships">
+  <p:cSld>
+    <p:bg>
+      <p:bgPr>
+        <a:solidFill>
+          <a:srgbClr val="F3FBF8"/>
+        </a:solidFill>
+        <a:effectLst/>
+      </p:bgPr>
+    </p:bg>
+    <p:spTree>
+      <p:nvGrpSpPr>
+        <p:cNvPr id="1" name=""/>
+        <p:cNvGrpSpPr/>
+        <p:nvPr/>
+      </p:nvGrpSpPr>
+      <p:grpSpPr/>
+      <p:sp>
+        <p:nvSpPr>
+          <p:cNvPr id="2" name="Rectangle 1"/>
+          <p:cNvSpPr/>
+          <p:nvPr/>
+        </p:nvSpPr>
+        <p:spPr>
+          <a:xfrm>
+            <a:off x="457200" y="502920"/>
+            <a:ext cx="109728" cy="457200"/>
+          </a:xfrm>
+          <a:prstGeom prst="rect">
+            <a:avLst/>
+          </a:prstGeom>
+          <a:solidFill>
+            <a:srgbClr val="0F766E"/>
+          </a:solidFill>
+          <a:ln>
+            <a:noFill/>
+          </a:ln>
+          <a:effectLst/>
+        </p:spPr>
+        <p:style>
+          <a:lnRef idx="1">
+            <a:schemeClr val="accent1"/>
+          </a:lnRef>
+          <a:fillRef idx="3">
+            <a:schemeClr val="accent1"/>
+          </a:fillRef>
+          <a:effectRef idx="2">
+            <a:schemeClr val="accent1"/>
+          </a:effectRef>
+          <a:fontRef idx="minor">
+            <a:schemeClr val="lt1"/>
+          </a:fontRef>
+        </p:style>
+        <p:txBody>
+          <a:bodyPr rtlCol="0" anchor="ctr"/>
+          <a:lstStyle/>
+          <a:p>
+            <a:pPr algn="ctr"/>
+          </a:p>
+        </p:txBody>
+      </p:sp>
+      <p:sp>
+        <p:nvSpPr>
+          <p:cNvPr id="3" name="TextBox 2"/>
+          <p:cNvSpPr txBox="1"/>
+          <p:nvPr/>
+        </p:nvSpPr>
+        <p:spPr>
+          <a:xfrm>
+            <a:off x="685800" y="411480"/>
+            <a:ext cx="9144000" cy="365760"/>
+          </a:xfrm>
+          <a:prstGeom prst="rect">
+            <a:avLst/>
+          </a:prstGeom>
+          <a:noFill/>
+        </p:spPr>
+        <p:txBody>
+          <a:bodyPr wrap="square" anchor="t">
+            <a:spAutoFit/>
+          </a:bodyPr>
+          <a:lstStyle/>
+          <a:p>
+            <a:pPr algn="l">
+              <a:lnSpc>
+                <a:spcPct val="115000"/>
+              </a:lnSpc>
+            </a:pPr>
+            <a:r>
+              <a:rPr sz="1300" b="1">
+                <a:solidFill>
+                  <a:srgbClr val="0F766E"/>
+                </a:solidFill>
+                <a:latin typeface="Malgun Gothic"/>
+              </a:rPr>
+              <a:t>RETROSPECTIVE</a:t>
+            </a:r>
+          </a:p>
+        </p:txBody>
+      </p:sp>
+      <p:sp>
+        <p:nvSpPr>
+          <p:cNvPr id="4" name="TextBox 3"/>
+          <p:cNvSpPr txBox="1"/>
+          <p:nvPr/>
+        </p:nvSpPr>
+        <p:spPr>
+          <a:xfrm>
+            <a:off x="640080" y="777240"/>
+            <a:ext cx="10515600" cy="731520"/>
+          </a:xfrm>
+          <a:prstGeom prst="rect">
+            <a:avLst/>
+          </a:prstGeom>
+          <a:noFill/>
+        </p:spPr>
+        <p:txBody>
+          <a:bodyPr wrap="square" anchor="t">
+            <a:spAutoFit/>
+          </a:bodyPr>
+          <a:lstStyle/>
+          <a:p>
+            <a:pPr algn="l">
+              <a:lnSpc>
+                <a:spcPct val="115000"/>
+              </a:lnSpc>
+            </a:pPr>
+            <a:r>
+              <a:rPr sz="2800" b="1">
+                <a:solidFill>
+                  <a:srgbClr val="1F2E2A"/>
+                </a:solidFill>
+                <a:latin typeface="Malgun Gothic"/>
+              </a:rPr>
+              <a:t>회고 — 배운 점</a:t>
+            </a:r>
+          </a:p>
+        </p:txBody>
+      </p:sp>
+      <p:sp>
+        <p:nvSpPr>
+          <p:cNvPr id="5" name="Rectangle 4"/>
+          <p:cNvSpPr/>
+          <p:nvPr/>
+        </p:nvSpPr>
+        <p:spPr>
+          <a:xfrm>
+            <a:off x="640080" y="1508760"/>
+            <a:ext cx="10972800" cy="25400"/>
+          </a:xfrm>
+          <a:prstGeom prst="rect">
+            <a:avLst/>
+          </a:prstGeom>
+          <a:solidFill>
+            <a:srgbClr val="DCEEE7"/>
+          </a:solidFill>
+          <a:ln>
+            <a:noFill/>
+          </a:ln>
+          <a:effectLst/>
+        </p:spPr>
+        <p:style>
+          <a:lnRef idx="1">
+            <a:schemeClr val="accent1"/>
+          </a:lnRef>
+          <a:fillRef idx="3">
+            <a:schemeClr val="accent1"/>
+          </a:fillRef>
+          <a:effectRef idx="2">
+            <a:schemeClr val="accent1"/>
+          </a:effectRef>
+          <a:fontRef idx="minor">
+            <a:schemeClr val="lt1"/>
+          </a:fontRef>
+        </p:style>
+        <p:txBody>
+          <a:bodyPr rtlCol="0" anchor="ctr"/>
+          <a:lstStyle/>
+          <a:p>
+            <a:pPr algn="ctr"/>
+          </a:p>
+        </p:txBody>
+      </p:sp>
+      <p:sp>
+        <p:nvSpPr>
+          <p:cNvPr id="6" name="TextBox 5"/>
+          <p:cNvSpPr txBox="1"/>
+          <p:nvPr/>
+        </p:nvSpPr>
+        <p:spPr>
+          <a:xfrm>
+            <a:off x="640080" y="1828800"/>
+            <a:ext cx="10789920" cy="4572000"/>
+          </a:xfrm>
+          <a:prstGeom prst="rect">
+            <a:avLst/>
+          </a:prstGeom>
+          <a:noFill/>
+        </p:spPr>
+        <p:txBody>
+          <a:bodyPr wrap="square">
+            <a:spAutoFit/>
+          </a:bodyPr>
+          <a:lstStyle/>
+          <a:p>
+            <a:pPr>
+              <a:lnSpc>
+                <a:spcPct val="120000"/>
+              </a:lnSpc>
+              <a:spcAft>
+                <a:spcPts val="1000"/>
+              </a:spcAft>
+            </a:pPr>
+            <a:r>
+              <a:rPr sz="1700" b="0">
+                <a:solidFill>
+                  <a:srgbClr val="1F2E2A"/>
+                </a:solidFill>
+                <a:latin typeface="Malgun Gothic"/>
+              </a:rPr>
+              <a:t>•  정적 데모(localStorage)에서 실제 백엔드(Supabase)로 옮기며 인증·보안을 다시 설계하는 경험</a:t>
+            </a:r>
+          </a:p>
+          <a:p>
+            <a:pPr>
+              <a:lnSpc>
+                <a:spcPct val="120000"/>
+              </a:lnSpc>
+              <a:spcAft>
+                <a:spcPts val="1000"/>
+              </a:spcAft>
+            </a:pPr>
+            <a:r>
+              <a:rPr sz="1700" b="0">
+                <a:solidFill>
+                  <a:srgbClr val="1F2E2A"/>
+                </a:solidFill>
+                <a:latin typeface="Malgun Gothic"/>
+              </a:rPr>
+              <a:t>•  RLS 정책의 재귀 문제를 SECURITY DEFINER 함수 패턴으로 해결</a:t>
+            </a:r>
+          </a:p>
+          <a:p>
+            <a:pPr>
+              <a:lnSpc>
+                <a:spcPct val="120000"/>
+              </a:lnSpc>
+              <a:spcAft>
+                <a:spcPts val="1000"/>
+              </a:spcAft>
+            </a:pPr>
+            <a:r>
+              <a:rPr sz="1700" b="0">
+                <a:solidFill>
+                  <a:srgbClr val="1F2E2A"/>
+                </a:solidFill>
+                <a:latin typeface="Malgun Gothic"/>
+              </a:rPr>
+              <a:t>•  Security Advisor로 보이지 않는 권한 노출까지 점검하는 습관</a:t>
+            </a:r>
+          </a:p>
+        </p:txBody>
+      </p:sp>
+      <p:sp>
+        <p:nvSpPr>
+          <p:cNvPr id="7" name="TextBox 6"/>
+          <p:cNvSpPr txBox="1"/>
+          <p:nvPr/>
+        </p:nvSpPr>
+        <p:spPr>
+          <a:xfrm>
+            <a:off x="457200" y="6446520"/>
+            <a:ext cx="7315200" cy="320040"/>
+          </a:xfrm>
+          <a:prstGeom prst="rect">
+            <a:avLst/>
+          </a:prstGeom>
+          <a:noFill/>
+        </p:spPr>
+        <p:txBody>
+          <a:bodyPr wrap="square" anchor="t">
+            <a:spAutoFit/>
+          </a:bodyPr>
+          <a:lstStyle/>
+          <a:p>
+            <a:pPr algn="l">
+              <a:lnSpc>
+                <a:spcPct val="115000"/>
+              </a:lnSpc>
+            </a:pPr>
+            <a:r>
+              <a:rPr sz="1000" b="0">
+                <a:solidFill>
+                  <a:srgbClr val="6E8880"/>
+                </a:solidFill>
+                <a:latin typeface="Malgun Gothic"/>
+              </a:rPr>
+              <a:t>EXPENSE TRACKER · PORTFOLIO</a:t>
+            </a:r>
+          </a:p>
+        </p:txBody>
+      </p:sp>
+      <p:sp>
+        <p:nvSpPr>
+          <p:cNvPr id="8" name="TextBox 7"/>
+          <p:cNvSpPr txBox="1"/>
+          <p:nvPr/>
+        </p:nvSpPr>
+        <p:spPr>
+          <a:xfrm>
+            <a:off x="11002975" y="6446520"/>
+            <a:ext cx="822960" cy="320040"/>
+          </a:xfrm>
+          <a:prstGeom prst="rect">
+            <a:avLst/>
+          </a:prstGeom>
+          <a:noFill/>
+        </p:spPr>
+        <p:txBody>
+          <a:bodyPr wrap="square" anchor="t">
+            <a:spAutoFit/>
+          </a:bodyPr>
+          <a:lstStyle/>
+          <a:p>
+            <a:pPr algn="r">
+              <a:lnSpc>
+                <a:spcPct val="115000"/>
+              </a:lnSpc>
+            </a:pPr>
+            <a:r>
+              <a:rPr sz="1000" b="0">
+                <a:solidFill>
+                  <a:srgbClr val="6E8880"/>
+                </a:solidFill>
+                <a:latin typeface="Malgun Gothic"/>
+              </a:rPr>
+              <a:t>16</a:t>
+            </a:r>
+          </a:p>
+        </p:txBody>
+      </p:sp>
+    </p:spTree>
+  </p:cSld>
+  <p:clrMapOvr>
+    <a:masterClrMapping/>
+  </p:clrMapOvr>
+</p:sld>
+</file>
+
+<file path=ppt/slides/slide17.xml><?xml version="1.0" encoding="utf-8"?>
 <p:sld xmlns:a="http://schemas.openxmlformats.org/drawingml/2006/main" xmlns:p="http://schemas.openxmlformats.org/presentationml/2006/main" xmlns:r="http://schemas.openxmlformats.org/officeDocument/2006/relationships">
   <p:cSld>
     <p:bg>
@@ -5239,7 +8179,7 @@
                 </a:solidFill>
                 <a:latin typeface="Malgun Gothic"/>
               </a:rPr>
-              <a:t>OVERVIEW</a:t>
+              <a:t>MOTIVATION</a:t>
             </a:r>
           </a:p>
         </p:txBody>
@@ -5278,7 +8218,7 @@
                 </a:solidFill>
                 <a:latin typeface="Malgun Gothic"/>
               </a:rPr>
-              <a:t>프로젝트 개요</a:t>
+              <a:t>기획 의도</a:t>
             </a:r>
           </a:p>
         </p:txBody>
@@ -5329,101 +8269,16 @@
       </p:sp>
       <p:sp>
         <p:nvSpPr>
-          <p:cNvPr id="6" name="TextBox 5"/>
-          <p:cNvSpPr txBox="1"/>
-          <p:nvPr/>
-        </p:nvSpPr>
-        <p:spPr>
-          <a:xfrm>
-            <a:off x="640080" y="1828800"/>
-            <a:ext cx="10789920" cy="731520"/>
-          </a:xfrm>
-          <a:prstGeom prst="rect">
-            <a:avLst/>
-          </a:prstGeom>
-          <a:noFill/>
-        </p:spPr>
-        <p:txBody>
-          <a:bodyPr wrap="square" anchor="t">
-            <a:spAutoFit/>
-          </a:bodyPr>
-          <a:lstStyle/>
-          <a:p>
-            <a:pPr algn="l">
-              <a:lnSpc>
-                <a:spcPct val="115000"/>
-              </a:lnSpc>
-            </a:pPr>
-            <a:r>
-              <a:rPr sz="1700" b="0">
-                <a:solidFill>
-                  <a:srgbClr val="4B6259"/>
-                </a:solidFill>
-                <a:latin typeface="Malgun Gothic"/>
-              </a:rPr>
-              <a:t>개인의 지출을 손쉽게 기록하고, 카테고리별·기간별 통계로 소비 패턴을 파악할 수 있는 지출 관리 서비스</a:t>
-            </a:r>
-          </a:p>
-        </p:txBody>
-      </p:sp>
-      <p:sp>
-        <p:nvSpPr>
-          <p:cNvPr id="7" name="Rectangle 6"/>
+          <p:cNvPr id="6" name="Oval 5"/>
           <p:cNvSpPr/>
           <p:nvPr/>
         </p:nvSpPr>
         <p:spPr>
           <a:xfrm>
-            <a:off x="640080" y="2834640"/>
-            <a:ext cx="3520440" cy="3108960"/>
-          </a:xfrm>
-          <a:prstGeom prst="rect">
-            <a:avLst/>
-          </a:prstGeom>
-          <a:solidFill>
-            <a:srgbClr val="FFFFFF"/>
-          </a:solidFill>
-          <a:ln w="12700">
-            <a:solidFill>
-              <a:srgbClr val="DCEEE7"/>
-            </a:solidFill>
-          </a:ln>
-          <a:effectLst/>
-        </p:spPr>
-        <p:style>
-          <a:lnRef idx="1">
-            <a:schemeClr val="accent1"/>
-          </a:lnRef>
-          <a:fillRef idx="3">
-            <a:schemeClr val="accent1"/>
-          </a:fillRef>
-          <a:effectRef idx="2">
-            <a:schemeClr val="accent1"/>
-          </a:effectRef>
-          <a:fontRef idx="minor">
-            <a:schemeClr val="lt1"/>
-          </a:fontRef>
-        </p:style>
-        <p:txBody>
-          <a:bodyPr rtlCol="0" anchor="ctr"/>
-          <a:lstStyle/>
-          <a:p>
-            <a:pPr algn="ctr"/>
-          </a:p>
-        </p:txBody>
-      </p:sp>
-      <p:sp>
-        <p:nvSpPr>
-          <p:cNvPr id="8" name="Rectangle 7"/>
-          <p:cNvSpPr/>
-          <p:nvPr/>
-        </p:nvSpPr>
-        <p:spPr>
-          <a:xfrm>
-            <a:off x="640080" y="2834640"/>
-            <a:ext cx="3520440" cy="109728"/>
-          </a:xfrm>
-          <a:prstGeom prst="rect">
+            <a:off x="640080" y="1874519"/>
+            <a:ext cx="411480" cy="411480"/>
+          </a:xfrm>
+          <a:prstGeom prst="ellipse">
             <a:avLst/>
           </a:prstGeom>
           <a:solidFill>
@@ -5458,14 +8313,92 @@
       </p:sp>
       <p:sp>
         <p:nvSpPr>
+          <p:cNvPr id="7" name="TextBox 6"/>
+          <p:cNvSpPr txBox="1"/>
+          <p:nvPr/>
+        </p:nvSpPr>
+        <p:spPr>
+          <a:xfrm>
+            <a:off x="640080" y="1892807"/>
+            <a:ext cx="411480" cy="365760"/>
+          </a:xfrm>
+          <a:prstGeom prst="rect">
+            <a:avLst/>
+          </a:prstGeom>
+          <a:noFill/>
+        </p:spPr>
+        <p:txBody>
+          <a:bodyPr wrap="square" anchor="t">
+            <a:spAutoFit/>
+          </a:bodyPr>
+          <a:lstStyle/>
+          <a:p>
+            <a:pPr algn="ctr">
+              <a:lnSpc>
+                <a:spcPct val="115000"/>
+              </a:lnSpc>
+            </a:pPr>
+            <a:r>
+              <a:rPr sz="1600" b="1">
+                <a:solidFill>
+                  <a:srgbClr val="FFFFFF"/>
+                </a:solidFill>
+                <a:latin typeface="Malgun Gothic"/>
+              </a:rPr>
+              <a:t>1</a:t>
+            </a:r>
+          </a:p>
+        </p:txBody>
+      </p:sp>
+      <p:sp>
+        <p:nvSpPr>
+          <p:cNvPr id="8" name="TextBox 7"/>
+          <p:cNvSpPr txBox="1"/>
+          <p:nvPr/>
+        </p:nvSpPr>
+        <p:spPr>
+          <a:xfrm>
+            <a:off x="1234440" y="1847087"/>
+            <a:ext cx="3840480" cy="457200"/>
+          </a:xfrm>
+          <a:prstGeom prst="rect">
+            <a:avLst/>
+          </a:prstGeom>
+          <a:noFill/>
+        </p:spPr>
+        <p:txBody>
+          <a:bodyPr wrap="square" anchor="t">
+            <a:spAutoFit/>
+          </a:bodyPr>
+          <a:lstStyle/>
+          <a:p>
+            <a:pPr algn="l">
+              <a:lnSpc>
+                <a:spcPct val="115000"/>
+              </a:lnSpc>
+            </a:pPr>
+            <a:r>
+              <a:rPr sz="1600" b="1">
+                <a:solidFill>
+                  <a:srgbClr val="0F766E"/>
+                </a:solidFill>
+                <a:latin typeface="Malgun Gothic"/>
+              </a:rPr>
+              <a:t>배경</a:t>
+            </a:r>
+          </a:p>
+        </p:txBody>
+      </p:sp>
+      <p:sp>
+        <p:nvSpPr>
           <p:cNvPr id="9" name="TextBox 8"/>
           <p:cNvSpPr txBox="1"/>
           <p:nvPr/>
         </p:nvSpPr>
         <p:spPr>
           <a:xfrm>
-            <a:off x="914400" y="3200400"/>
-            <a:ext cx="2971800" cy="457200"/>
+            <a:off x="1234440" y="2258567"/>
+            <a:ext cx="10241280" cy="640080"/>
           </a:xfrm>
           <a:prstGeom prst="rect">
             <a:avLst/>
@@ -5484,114 +8417,29 @@
               </a:lnSpc>
             </a:pPr>
             <a:r>
-              <a:rPr sz="1800" b="1">
-                <a:solidFill>
-                  <a:srgbClr val="0F766E"/>
-                </a:solidFill>
-                <a:latin typeface="Malgun Gothic"/>
-              </a:rPr>
-              <a:t>문제 정의</a:t>
-            </a:r>
-          </a:p>
-        </p:txBody>
-      </p:sp>
-      <p:sp>
-        <p:nvSpPr>
-          <p:cNvPr id="10" name="TextBox 9"/>
-          <p:cNvSpPr txBox="1"/>
-          <p:nvPr/>
-        </p:nvSpPr>
-        <p:spPr>
-          <a:xfrm>
-            <a:off x="914400" y="3703320"/>
-            <a:ext cx="2971800" cy="2011680"/>
-          </a:xfrm>
-          <a:prstGeom prst="rect">
-            <a:avLst/>
-          </a:prstGeom>
-          <a:noFill/>
-        </p:spPr>
-        <p:txBody>
-          <a:bodyPr wrap="square" anchor="t">
-            <a:spAutoFit/>
-          </a:bodyPr>
-          <a:lstStyle/>
-          <a:p>
-            <a:pPr algn="l">
-              <a:lnSpc>
-                <a:spcPct val="115000"/>
-              </a:lnSpc>
-            </a:pPr>
-            <a:r>
-              <a:rPr sz="1400" b="0">
+              <a:rPr sz="1300" b="0">
                 <a:solidFill>
                   <a:srgbClr val="4B6259"/>
                 </a:solidFill>
                 <a:latin typeface="Malgun Gothic"/>
               </a:rPr>
-              <a:t>지출을 기록해도 흩어진 데이터라 카테고리별·월별 흐름을 한눈에 파악하기 어려움</a:t>
-            </a:r>
-          </a:p>
-        </p:txBody>
-      </p:sp>
-      <p:sp>
-        <p:nvSpPr>
-          <p:cNvPr id="11" name="Rectangle 10"/>
+              <a:t>지출을 기록해도 흩어진 데이터라 카테고리별·월별 소비 패턴을 파악하기 어렵다는 문제를 실제 서비스로 풀어보고 싶었음</a:t>
+            </a:r>
+          </a:p>
+        </p:txBody>
+      </p:sp>
+      <p:sp>
+        <p:nvSpPr>
+          <p:cNvPr id="10" name="Oval 9"/>
           <p:cNvSpPr/>
           <p:nvPr/>
         </p:nvSpPr>
         <p:spPr>
           <a:xfrm>
-            <a:off x="4343400" y="2834640"/>
-            <a:ext cx="3520440" cy="3108960"/>
-          </a:xfrm>
-          <a:prstGeom prst="rect">
-            <a:avLst/>
-          </a:prstGeom>
-          <a:solidFill>
-            <a:srgbClr val="FFFFFF"/>
-          </a:solidFill>
-          <a:ln w="12700">
-            <a:solidFill>
-              <a:srgbClr val="DCEEE7"/>
-            </a:solidFill>
-          </a:ln>
-          <a:effectLst/>
-        </p:spPr>
-        <p:style>
-          <a:lnRef idx="1">
-            <a:schemeClr val="accent1"/>
-          </a:lnRef>
-          <a:fillRef idx="3">
-            <a:schemeClr val="accent1"/>
-          </a:fillRef>
-          <a:effectRef idx="2">
-            <a:schemeClr val="accent1"/>
-          </a:effectRef>
-          <a:fontRef idx="minor">
-            <a:schemeClr val="lt1"/>
-          </a:fontRef>
-        </p:style>
-        <p:txBody>
-          <a:bodyPr rtlCol="0" anchor="ctr"/>
-          <a:lstStyle/>
-          <a:p>
-            <a:pPr algn="ctr"/>
-          </a:p>
-        </p:txBody>
-      </p:sp>
-      <p:sp>
-        <p:nvSpPr>
-          <p:cNvPr id="12" name="Rectangle 11"/>
-          <p:cNvSpPr/>
-          <p:nvPr/>
-        </p:nvSpPr>
-        <p:spPr>
-          <a:xfrm>
-            <a:off x="4343400" y="2834640"/>
-            <a:ext cx="3520440" cy="109728"/>
-          </a:xfrm>
-          <a:prstGeom prst="rect">
+            <a:off x="640080" y="2926079"/>
+            <a:ext cx="411480" cy="411480"/>
+          </a:xfrm>
+          <a:prstGeom prst="ellipse">
             <a:avLst/>
           </a:prstGeom>
           <a:solidFill>
@@ -5626,14 +8474,92 @@
       </p:sp>
       <p:sp>
         <p:nvSpPr>
+          <p:cNvPr id="11" name="TextBox 10"/>
+          <p:cNvSpPr txBox="1"/>
+          <p:nvPr/>
+        </p:nvSpPr>
+        <p:spPr>
+          <a:xfrm>
+            <a:off x="640080" y="2944367"/>
+            <a:ext cx="411480" cy="365760"/>
+          </a:xfrm>
+          <a:prstGeom prst="rect">
+            <a:avLst/>
+          </a:prstGeom>
+          <a:noFill/>
+        </p:spPr>
+        <p:txBody>
+          <a:bodyPr wrap="square" anchor="t">
+            <a:spAutoFit/>
+          </a:bodyPr>
+          <a:lstStyle/>
+          <a:p>
+            <a:pPr algn="ctr">
+              <a:lnSpc>
+                <a:spcPct val="115000"/>
+              </a:lnSpc>
+            </a:pPr>
+            <a:r>
+              <a:rPr sz="1600" b="1">
+                <a:solidFill>
+                  <a:srgbClr val="FFFFFF"/>
+                </a:solidFill>
+                <a:latin typeface="Malgun Gothic"/>
+              </a:rPr>
+              <a:t>2</a:t>
+            </a:r>
+          </a:p>
+        </p:txBody>
+      </p:sp>
+      <p:sp>
+        <p:nvSpPr>
+          <p:cNvPr id="12" name="TextBox 11"/>
+          <p:cNvSpPr txBox="1"/>
+          <p:nvPr/>
+        </p:nvSpPr>
+        <p:spPr>
+          <a:xfrm>
+            <a:off x="1234440" y="2898647"/>
+            <a:ext cx="3840480" cy="457200"/>
+          </a:xfrm>
+          <a:prstGeom prst="rect">
+            <a:avLst/>
+          </a:prstGeom>
+          <a:noFill/>
+        </p:spPr>
+        <p:txBody>
+          <a:bodyPr wrap="square" anchor="t">
+            <a:spAutoFit/>
+          </a:bodyPr>
+          <a:lstStyle/>
+          <a:p>
+            <a:pPr algn="l">
+              <a:lnSpc>
+                <a:spcPct val="115000"/>
+              </a:lnSpc>
+            </a:pPr>
+            <a:r>
+              <a:rPr sz="1600" b="1">
+                <a:solidFill>
+                  <a:srgbClr val="0F766E"/>
+                </a:solidFill>
+                <a:latin typeface="Malgun Gothic"/>
+              </a:rPr>
+              <a:t>목표 1 — 풀사이클 경험</a:t>
+            </a:r>
+          </a:p>
+        </p:txBody>
+      </p:sp>
+      <p:sp>
+        <p:nvSpPr>
           <p:cNvPr id="13" name="TextBox 12"/>
           <p:cNvSpPr txBox="1"/>
           <p:nvPr/>
         </p:nvSpPr>
         <p:spPr>
           <a:xfrm>
-            <a:off x="4617720" y="3200400"/>
-            <a:ext cx="2971800" cy="457200"/>
+            <a:off x="1234440" y="3310127"/>
+            <a:ext cx="10241280" cy="640080"/>
           </a:xfrm>
           <a:prstGeom prst="rect">
             <a:avLst/>
@@ -5652,114 +8578,29 @@
               </a:lnSpc>
             </a:pPr>
             <a:r>
-              <a:rPr sz="1800" b="1">
-                <a:solidFill>
-                  <a:srgbClr val="0F766E"/>
-                </a:solidFill>
-                <a:latin typeface="Malgun Gothic"/>
-              </a:rPr>
-              <a:t>핵심 가치</a:t>
-            </a:r>
-          </a:p>
-        </p:txBody>
-      </p:sp>
-      <p:sp>
-        <p:nvSpPr>
-          <p:cNvPr id="14" name="TextBox 13"/>
-          <p:cNvSpPr txBox="1"/>
-          <p:nvPr/>
-        </p:nvSpPr>
-        <p:spPr>
-          <a:xfrm>
-            <a:off x="4617720" y="3703320"/>
-            <a:ext cx="2971800" cy="2011680"/>
-          </a:xfrm>
-          <a:prstGeom prst="rect">
-            <a:avLst/>
-          </a:prstGeom>
-          <a:noFill/>
-        </p:spPr>
-        <p:txBody>
-          <a:bodyPr wrap="square" anchor="t">
-            <a:spAutoFit/>
-          </a:bodyPr>
-          <a:lstStyle/>
-          <a:p>
-            <a:pPr algn="l">
-              <a:lnSpc>
-                <a:spcPct val="115000"/>
-              </a:lnSpc>
-            </a:pPr>
-            <a:r>
-              <a:rPr sz="1400" b="0">
+              <a:rPr sz="1300" b="0">
                 <a:solidFill>
                   <a:srgbClr val="4B6259"/>
                 </a:solidFill>
                 <a:latin typeface="Malgun Gothic"/>
               </a:rPr>
-              <a:t>간편한 등록 흐름 + 시각적 통계(도넛/막대 차트)로 소비 패턴을 즉시 인지</a:t>
-            </a:r>
-          </a:p>
-        </p:txBody>
-      </p:sp>
-      <p:sp>
-        <p:nvSpPr>
-          <p:cNvPr id="15" name="Rectangle 14"/>
+              <a:t>기획 → 설계 → 구현 → 배포까지, 정적 프로토타입(localStorage)에서 실제 백엔드(Supabase) 연동까지 전 과정을 직접 다뤄보기</a:t>
+            </a:r>
+          </a:p>
+        </p:txBody>
+      </p:sp>
+      <p:sp>
+        <p:nvSpPr>
+          <p:cNvPr id="14" name="Oval 13"/>
           <p:cNvSpPr/>
           <p:nvPr/>
         </p:nvSpPr>
         <p:spPr>
           <a:xfrm>
-            <a:off x="8046720" y="2834640"/>
-            <a:ext cx="3520440" cy="3108960"/>
-          </a:xfrm>
-          <a:prstGeom prst="rect">
-            <a:avLst/>
-          </a:prstGeom>
-          <a:solidFill>
-            <a:srgbClr val="FFFFFF"/>
-          </a:solidFill>
-          <a:ln w="12700">
-            <a:solidFill>
-              <a:srgbClr val="DCEEE7"/>
-            </a:solidFill>
-          </a:ln>
-          <a:effectLst/>
-        </p:spPr>
-        <p:style>
-          <a:lnRef idx="1">
-            <a:schemeClr val="accent1"/>
-          </a:lnRef>
-          <a:fillRef idx="3">
-            <a:schemeClr val="accent1"/>
-          </a:fillRef>
-          <a:effectRef idx="2">
-            <a:schemeClr val="accent1"/>
-          </a:effectRef>
-          <a:fontRef idx="minor">
-            <a:schemeClr val="lt1"/>
-          </a:fontRef>
-        </p:style>
-        <p:txBody>
-          <a:bodyPr rtlCol="0" anchor="ctr"/>
-          <a:lstStyle/>
-          <a:p>
-            <a:pPr algn="ctr"/>
-          </a:p>
-        </p:txBody>
-      </p:sp>
-      <p:sp>
-        <p:nvSpPr>
-          <p:cNvPr id="16" name="Rectangle 15"/>
-          <p:cNvSpPr/>
-          <p:nvPr/>
-        </p:nvSpPr>
-        <p:spPr>
-          <a:xfrm>
-            <a:off x="8046720" y="2834640"/>
-            <a:ext cx="3520440" cy="109728"/>
-          </a:xfrm>
-          <a:prstGeom prst="rect">
+            <a:off x="640080" y="3977639"/>
+            <a:ext cx="411480" cy="411480"/>
+          </a:xfrm>
+          <a:prstGeom prst="ellipse">
             <a:avLst/>
           </a:prstGeom>
           <a:solidFill>
@@ -5794,14 +8635,92 @@
       </p:sp>
       <p:sp>
         <p:nvSpPr>
+          <p:cNvPr id="15" name="TextBox 14"/>
+          <p:cNvSpPr txBox="1"/>
+          <p:nvPr/>
+        </p:nvSpPr>
+        <p:spPr>
+          <a:xfrm>
+            <a:off x="640080" y="3995927"/>
+            <a:ext cx="411480" cy="365760"/>
+          </a:xfrm>
+          <a:prstGeom prst="rect">
+            <a:avLst/>
+          </a:prstGeom>
+          <a:noFill/>
+        </p:spPr>
+        <p:txBody>
+          <a:bodyPr wrap="square" anchor="t">
+            <a:spAutoFit/>
+          </a:bodyPr>
+          <a:lstStyle/>
+          <a:p>
+            <a:pPr algn="ctr">
+              <a:lnSpc>
+                <a:spcPct val="115000"/>
+              </a:lnSpc>
+            </a:pPr>
+            <a:r>
+              <a:rPr sz="1600" b="1">
+                <a:solidFill>
+                  <a:srgbClr val="FFFFFF"/>
+                </a:solidFill>
+                <a:latin typeface="Malgun Gothic"/>
+              </a:rPr>
+              <a:t>3</a:t>
+            </a:r>
+          </a:p>
+        </p:txBody>
+      </p:sp>
+      <p:sp>
+        <p:nvSpPr>
+          <p:cNvPr id="16" name="TextBox 15"/>
+          <p:cNvSpPr txBox="1"/>
+          <p:nvPr/>
+        </p:nvSpPr>
+        <p:spPr>
+          <a:xfrm>
+            <a:off x="1234440" y="3950207"/>
+            <a:ext cx="3840480" cy="457200"/>
+          </a:xfrm>
+          <a:prstGeom prst="rect">
+            <a:avLst/>
+          </a:prstGeom>
+          <a:noFill/>
+        </p:spPr>
+        <p:txBody>
+          <a:bodyPr wrap="square" anchor="t">
+            <a:spAutoFit/>
+          </a:bodyPr>
+          <a:lstStyle/>
+          <a:p>
+            <a:pPr algn="l">
+              <a:lnSpc>
+                <a:spcPct val="115000"/>
+              </a:lnSpc>
+            </a:pPr>
+            <a:r>
+              <a:rPr sz="1600" b="1">
+                <a:solidFill>
+                  <a:srgbClr val="0F766E"/>
+                </a:solidFill>
+                <a:latin typeface="Malgun Gothic"/>
+              </a:rPr>
+              <a:t>목표 2 — 역할 기반 서비스 설계</a:t>
+            </a:r>
+          </a:p>
+        </p:txBody>
+      </p:sp>
+      <p:sp>
+        <p:nvSpPr>
           <p:cNvPr id="17" name="TextBox 16"/>
           <p:cNvSpPr txBox="1"/>
           <p:nvPr/>
         </p:nvSpPr>
         <p:spPr>
           <a:xfrm>
-            <a:off x="8321040" y="3200400"/>
-            <a:ext cx="2971800" cy="457200"/>
+            <a:off x="1234440" y="4361687"/>
+            <a:ext cx="10241280" cy="640080"/>
           </a:xfrm>
           <a:prstGeom prst="rect">
             <a:avLst/>
@@ -5820,27 +8739,149 @@
               </a:lnSpc>
             </a:pPr>
             <a:r>
-              <a:rPr sz="1800" b="1">
+              <a:rPr sz="1300" b="0">
+                <a:solidFill>
+                  <a:srgbClr val="4B6259"/>
+                </a:solidFill>
+                <a:latin typeface="Malgun Gothic"/>
+              </a:rPr>
+              <a:t>고객/관리자 역할을 분리하고, 권한에 따라 다른 화면·데이터 접근을 설계하는 연습 (RLS 기반 인가 포함)</a:t>
+            </a:r>
+          </a:p>
+        </p:txBody>
+      </p:sp>
+      <p:sp>
+        <p:nvSpPr>
+          <p:cNvPr id="18" name="Oval 17"/>
+          <p:cNvSpPr/>
+          <p:nvPr/>
+        </p:nvSpPr>
+        <p:spPr>
+          <a:xfrm>
+            <a:off x="640080" y="5029198"/>
+            <a:ext cx="411480" cy="411480"/>
+          </a:xfrm>
+          <a:prstGeom prst="ellipse">
+            <a:avLst/>
+          </a:prstGeom>
+          <a:solidFill>
+            <a:srgbClr val="34D399"/>
+          </a:solidFill>
+          <a:ln>
+            <a:noFill/>
+          </a:ln>
+          <a:effectLst/>
+        </p:spPr>
+        <p:style>
+          <a:lnRef idx="1">
+            <a:schemeClr val="accent1"/>
+          </a:lnRef>
+          <a:fillRef idx="3">
+            <a:schemeClr val="accent1"/>
+          </a:fillRef>
+          <a:effectRef idx="2">
+            <a:schemeClr val="accent1"/>
+          </a:effectRef>
+          <a:fontRef idx="minor">
+            <a:schemeClr val="lt1"/>
+          </a:fontRef>
+        </p:style>
+        <p:txBody>
+          <a:bodyPr rtlCol="0" anchor="ctr"/>
+          <a:lstStyle/>
+          <a:p>
+            <a:pPr algn="ctr"/>
+          </a:p>
+        </p:txBody>
+      </p:sp>
+      <p:sp>
+        <p:nvSpPr>
+          <p:cNvPr id="19" name="TextBox 18"/>
+          <p:cNvSpPr txBox="1"/>
+          <p:nvPr/>
+        </p:nvSpPr>
+        <p:spPr>
+          <a:xfrm>
+            <a:off x="640080" y="5047486"/>
+            <a:ext cx="411480" cy="365760"/>
+          </a:xfrm>
+          <a:prstGeom prst="rect">
+            <a:avLst/>
+          </a:prstGeom>
+          <a:noFill/>
+        </p:spPr>
+        <p:txBody>
+          <a:bodyPr wrap="square" anchor="t">
+            <a:spAutoFit/>
+          </a:bodyPr>
+          <a:lstStyle/>
+          <a:p>
+            <a:pPr algn="ctr">
+              <a:lnSpc>
+                <a:spcPct val="115000"/>
+              </a:lnSpc>
+            </a:pPr>
+            <a:r>
+              <a:rPr sz="1600" b="1">
+                <a:solidFill>
+                  <a:srgbClr val="FFFFFF"/>
+                </a:solidFill>
+                <a:latin typeface="Malgun Gothic"/>
+              </a:rPr>
+              <a:t>4</a:t>
+            </a:r>
+          </a:p>
+        </p:txBody>
+      </p:sp>
+      <p:sp>
+        <p:nvSpPr>
+          <p:cNvPr id="20" name="TextBox 19"/>
+          <p:cNvSpPr txBox="1"/>
+          <p:nvPr/>
+        </p:nvSpPr>
+        <p:spPr>
+          <a:xfrm>
+            <a:off x="1234440" y="5001766"/>
+            <a:ext cx="3840480" cy="457200"/>
+          </a:xfrm>
+          <a:prstGeom prst="rect">
+            <a:avLst/>
+          </a:prstGeom>
+          <a:noFill/>
+        </p:spPr>
+        <p:txBody>
+          <a:bodyPr wrap="square" anchor="t">
+            <a:spAutoFit/>
+          </a:bodyPr>
+          <a:lstStyle/>
+          <a:p>
+            <a:pPr algn="l">
+              <a:lnSpc>
+                <a:spcPct val="115000"/>
+              </a:lnSpc>
+            </a:pPr>
+            <a:r>
+              <a:rPr sz="1600" b="1">
                 <a:solidFill>
                   <a:srgbClr val="0F766E"/>
                 </a:solidFill>
                 <a:latin typeface="Malgun Gothic"/>
               </a:rPr>
-              <a:t>두 가지 역할</a:t>
-            </a:r>
-          </a:p>
-        </p:txBody>
-      </p:sp>
-      <p:sp>
-        <p:nvSpPr>
-          <p:cNvPr id="18" name="TextBox 17"/>
-          <p:cNvSpPr txBox="1"/>
-          <p:nvPr/>
-        </p:nvSpPr>
-        <p:spPr>
-          <a:xfrm>
-            <a:off x="8321040" y="3703320"/>
-            <a:ext cx="2971800" cy="2011680"/>
+              <a:t>목표 3 — 커뮤니티로 기능 확장</a:t>
+            </a:r>
+          </a:p>
+        </p:txBody>
+      </p:sp>
+      <p:sp>
+        <p:nvSpPr>
+          <p:cNvPr id="21" name="TextBox 20"/>
+          <p:cNvSpPr txBox="1"/>
+          <p:nvPr/>
+        </p:nvSpPr>
+        <p:spPr>
+          <a:xfrm>
+            <a:off x="1234440" y="5413246"/>
+            <a:ext cx="10241280" cy="640080"/>
           </a:xfrm>
           <a:prstGeom prst="rect">
             <a:avLst/>
@@ -5859,20 +8900,20 @@
               </a:lnSpc>
             </a:pPr>
             <a:r>
-              <a:rPr sz="1400" b="0">
+              <a:rPr sz="1300" b="0">
                 <a:solidFill>
                   <a:srgbClr val="4B6259"/>
                 </a:solidFill>
                 <a:latin typeface="Malgun Gothic"/>
               </a:rPr>
-              <a:t>고객은 본인 지출을 기록·조회, 관리자는 회원과 전체 서비스 통계를 관리</a:t>
-            </a:r>
-          </a:p>
-        </p:txBody>
-      </p:sp>
-      <p:sp>
-        <p:nvSpPr>
-          <p:cNvPr id="19" name="TextBox 18"/>
+              <a:t>지출 관리라는 단일 기능에서 게시판을 더해, 사용자 리텐션까지 고려한 기능 확장을 연습</a:t>
+            </a:r>
+          </a:p>
+        </p:txBody>
+      </p:sp>
+      <p:sp>
+        <p:nvSpPr>
+          <p:cNvPr id="22" name="TextBox 21"/>
           <p:cNvSpPr txBox="1"/>
           <p:nvPr/>
         </p:nvSpPr>
@@ -5911,7 +8952,7 @@
       </p:sp>
       <p:sp>
         <p:nvSpPr>
-          <p:cNvPr id="20" name="TextBox 19"/>
+          <p:cNvPr id="23" name="TextBox 22"/>
           <p:cNvSpPr txBox="1"/>
           <p:nvPr/>
         </p:nvSpPr>
@@ -6052,7 +9093,7 @@
                 </a:solidFill>
                 <a:latin typeface="Malgun Gothic"/>
               </a:rPr>
-              <a:t>FEATURES · CUSTOMER</a:t>
+              <a:t>OVERVIEW</a:t>
             </a:r>
           </a:p>
         </p:txBody>
@@ -6091,7 +9132,7 @@
                 </a:solidFill>
                 <a:latin typeface="Malgun Gothic"/>
               </a:rPr>
-              <a:t>핵심 기능 — 고객</a:t>
+              <a:t>프로젝트 개요</a:t>
             </a:r>
           </a:p>
         </p:txBody>
@@ -6149,262 +9190,543 @@
         <p:spPr>
           <a:xfrm>
             <a:off x="640080" y="1828800"/>
-            <a:ext cx="5486400" cy="4572000"/>
-          </a:xfrm>
-          <a:prstGeom prst="rect">
-            <a:avLst/>
-          </a:prstGeom>
-          <a:noFill/>
-        </p:spPr>
-        <p:txBody>
-          <a:bodyPr wrap="square">
-            <a:spAutoFit/>
-          </a:bodyPr>
-          <a:lstStyle/>
-          <a:p>
-            <a:pPr>
-              <a:lnSpc>
-                <a:spcPct val="120000"/>
-              </a:lnSpc>
-              <a:spcAft>
-                <a:spcPts val="1000"/>
-              </a:spcAft>
-            </a:pPr>
-            <a:r>
-              <a:rPr sz="1500" b="0">
-                <a:solidFill>
-                  <a:srgbClr val="1F2E2A"/>
-                </a:solidFill>
-                <a:latin typeface="Malgun Gothic"/>
-              </a:rPr>
-              <a:t>•  회원가입 / 로그인</a:t>
-            </a:r>
-          </a:p>
-          <a:p>
-            <a:pPr>
-              <a:spcAft>
-                <a:spcPts val="1000"/>
-              </a:spcAft>
-            </a:pPr>
-            <a:r>
-              <a:rPr sz="1200">
-                <a:solidFill>
-                  <a:srgbClr val="6E8880"/>
-                </a:solidFill>
-                <a:latin typeface="Malgun Gothic"/>
-              </a:rPr>
-              <a:t>     이메일·비밀번호 기반, 가입 즉시 자동 로그인</a:t>
-            </a:r>
-          </a:p>
-          <a:p>
-            <a:pPr>
-              <a:lnSpc>
-                <a:spcPct val="120000"/>
-              </a:lnSpc>
-              <a:spcAft>
-                <a:spcPts val="1000"/>
-              </a:spcAft>
-            </a:pPr>
-            <a:r>
-              <a:rPr sz="1500" b="0">
-                <a:solidFill>
-                  <a:srgbClr val="1F2E2A"/>
-                </a:solidFill>
-                <a:latin typeface="Malgun Gothic"/>
-              </a:rPr>
-              <a:t>•  지출 CRUD</a:t>
-            </a:r>
-          </a:p>
-          <a:p>
-            <a:pPr>
-              <a:spcAft>
-                <a:spcPts val="1000"/>
-              </a:spcAft>
-            </a:pPr>
-            <a:r>
-              <a:rPr sz="1200">
-                <a:solidFill>
-                  <a:srgbClr val="6E8880"/>
-                </a:solidFill>
-                <a:latin typeface="Malgun Gothic"/>
-              </a:rPr>
-              <a:t>     등록·조회·수정·삭제 — 기간·카테고리 필터 및 메모 검색 지원</a:t>
-            </a:r>
-          </a:p>
-          <a:p>
-            <a:pPr>
-              <a:lnSpc>
-                <a:spcPct val="120000"/>
-              </a:lnSpc>
-              <a:spcAft>
-                <a:spcPts val="1000"/>
-              </a:spcAft>
-            </a:pPr>
-            <a:r>
-              <a:rPr sz="1500" b="0">
-                <a:solidFill>
-                  <a:srgbClr val="1F2E2A"/>
-                </a:solidFill>
-                <a:latin typeface="Malgun Gothic"/>
-              </a:rPr>
-              <a:t>•  페이지네이션</a:t>
-            </a:r>
-          </a:p>
-          <a:p>
-            <a:pPr>
-              <a:spcAft>
-                <a:spcPts val="1000"/>
-              </a:spcAft>
-            </a:pPr>
-            <a:r>
-              <a:rPr sz="1200">
-                <a:solidFill>
-                  <a:srgbClr val="6E8880"/>
-                </a:solidFill>
-                <a:latin typeface="Malgun Gothic"/>
-              </a:rPr>
-              <a:t>     지출 내역이 쌓여도 페이지당 10건씩 표시, 필터 변경 시 1페이지로 자동 리셋</a:t>
-            </a:r>
-          </a:p>
-          <a:p>
-            <a:pPr>
-              <a:lnSpc>
-                <a:spcPct val="120000"/>
-              </a:lnSpc>
-              <a:spcAft>
-                <a:spcPts val="1000"/>
-              </a:spcAft>
-            </a:pPr>
-            <a:r>
-              <a:rPr sz="1500" b="0">
-                <a:solidFill>
-                  <a:srgbClr val="1F2E2A"/>
-                </a:solidFill>
-                <a:latin typeface="Malgun Gothic"/>
-              </a:rPr>
-              <a:t>•  개인 통계 대시보드</a:t>
-            </a:r>
-          </a:p>
-          <a:p>
-            <a:pPr>
-              <a:spcAft>
-                <a:spcPts val="1000"/>
-              </a:spcAft>
-            </a:pPr>
-            <a:r>
-              <a:rPr sz="1200">
-                <a:solidFill>
-                  <a:srgbClr val="6E8880"/>
-                </a:solidFill>
-                <a:latin typeface="Malgun Gothic"/>
-              </a:rPr>
-              <a:t>     월별/연별 합계, 카테고리 비중을 도넛·막대 차트 토글로 시각화</a:t>
-            </a:r>
-          </a:p>
-          <a:p>
-            <a:pPr>
-              <a:lnSpc>
-                <a:spcPct val="120000"/>
-              </a:lnSpc>
-              <a:spcAft>
-                <a:spcPts val="1000"/>
-              </a:spcAft>
-            </a:pPr>
-            <a:r>
-              <a:rPr sz="1500" b="0">
-                <a:solidFill>
-                  <a:srgbClr val="1F2E2A"/>
-                </a:solidFill>
-                <a:latin typeface="Malgun Gothic"/>
-              </a:rPr>
-              <a:t>•  고정 카테고리 8종</a:t>
-            </a:r>
-          </a:p>
-          <a:p>
-            <a:pPr>
-              <a:spcAft>
-                <a:spcPts val="1000"/>
-              </a:spcAft>
-            </a:pPr>
-            <a:r>
-              <a:rPr sz="1200">
-                <a:solidFill>
-                  <a:srgbClr val="6E8880"/>
-                </a:solidFill>
-                <a:latin typeface="Malgun Gothic"/>
-              </a:rPr>
-              <a:t>     식비·교통·주거·문화/여가·쇼핑·의료·교육·기타 — 모든 사용자 공용</a:t>
-            </a:r>
-          </a:p>
-          <a:p>
-            <a:pPr>
-              <a:lnSpc>
-                <a:spcPct val="120000"/>
-              </a:lnSpc>
-              <a:spcAft>
-                <a:spcPts val="1000"/>
-              </a:spcAft>
-            </a:pPr>
-            <a:r>
-              <a:rPr sz="1500" b="0">
-                <a:solidFill>
-                  <a:srgbClr val="1F2E2A"/>
-                </a:solidFill>
-                <a:latin typeface="Malgun Gothic"/>
-              </a:rPr>
-              <a:t>•  게시판</a:t>
-            </a:r>
-          </a:p>
-          <a:p>
-            <a:pPr>
-              <a:spcAft>
-                <a:spcPts val="1000"/>
-              </a:spcAft>
-            </a:pPr>
-            <a:r>
-              <a:rPr sz="1200">
-                <a:solidFill>
-                  <a:srgbClr val="6E8880"/>
-                </a:solidFill>
-                <a:latin typeface="Malgun Gothic"/>
-              </a:rPr>
-              <a:t>     절약 팁을 자유롭게 작성·검색하고 댓글로 소통, 본인 글/댓글만 삭제 가능</a:t>
-            </a:r>
-          </a:p>
-        </p:txBody>
-      </p:sp>
-      <p:pic>
-        <p:nvPicPr>
-          <p:cNvPr id="7" name="Picture 6" descr="dashboard.png"/>
-          <p:cNvPicPr>
-            <a:picLocks noChangeAspect="1"/>
-          </p:cNvPicPr>
-          <p:nvPr/>
-        </p:nvPicPr>
-        <p:blipFill>
-          <a:blip r:embed="rId2"/>
-          <a:stretch>
-            <a:fillRect/>
-          </a:stretch>
-        </p:blipFill>
-        <p:spPr>
-          <a:xfrm>
-            <a:off x="6492240" y="2255520"/>
-            <a:ext cx="5029200" cy="3352800"/>
-          </a:xfrm>
-          <a:prstGeom prst="rect">
-            <a:avLst/>
-          </a:prstGeom>
+            <a:ext cx="10789920" cy="731520"/>
+          </a:xfrm>
+          <a:prstGeom prst="rect">
+            <a:avLst/>
+          </a:prstGeom>
+          <a:noFill/>
+        </p:spPr>
+        <p:txBody>
+          <a:bodyPr wrap="square" anchor="t">
+            <a:spAutoFit/>
+          </a:bodyPr>
+          <a:lstStyle/>
+          <a:p>
+            <a:pPr algn="l">
+              <a:lnSpc>
+                <a:spcPct val="115000"/>
+              </a:lnSpc>
+            </a:pPr>
+            <a:r>
+              <a:rPr sz="1700" b="0">
+                <a:solidFill>
+                  <a:srgbClr val="4B6259"/>
+                </a:solidFill>
+                <a:latin typeface="Malgun Gothic"/>
+              </a:rPr>
+              <a:t>개인의 지출을 손쉽게 기록하고, 카테고리별·기간별 통계로 소비 패턴을 파악할 수 있는 지출 관리 서비스</a:t>
+            </a:r>
+          </a:p>
+        </p:txBody>
+      </p:sp>
+      <p:sp>
+        <p:nvSpPr>
+          <p:cNvPr id="7" name="Rectangle 6"/>
+          <p:cNvSpPr/>
+          <p:nvPr/>
+        </p:nvSpPr>
+        <p:spPr>
+          <a:xfrm>
+            <a:off x="640080" y="2834640"/>
+            <a:ext cx="3520440" cy="3108960"/>
+          </a:xfrm>
+          <a:prstGeom prst="rect">
+            <a:avLst/>
+          </a:prstGeom>
+          <a:solidFill>
+            <a:srgbClr val="FFFFFF"/>
+          </a:solidFill>
           <a:ln w="12700">
             <a:solidFill>
               <a:srgbClr val="DCEEE7"/>
             </a:solidFill>
           </a:ln>
-        </p:spPr>
-      </p:pic>
-      <p:sp>
-        <p:nvSpPr>
-          <p:cNvPr id="8" name="TextBox 7"/>
+          <a:effectLst/>
+        </p:spPr>
+        <p:style>
+          <a:lnRef idx="1">
+            <a:schemeClr val="accent1"/>
+          </a:lnRef>
+          <a:fillRef idx="3">
+            <a:schemeClr val="accent1"/>
+          </a:fillRef>
+          <a:effectRef idx="2">
+            <a:schemeClr val="accent1"/>
+          </a:effectRef>
+          <a:fontRef idx="minor">
+            <a:schemeClr val="lt1"/>
+          </a:fontRef>
+        </p:style>
+        <p:txBody>
+          <a:bodyPr rtlCol="0" anchor="ctr"/>
+          <a:lstStyle/>
+          <a:p>
+            <a:pPr algn="ctr"/>
+          </a:p>
+        </p:txBody>
+      </p:sp>
+      <p:sp>
+        <p:nvSpPr>
+          <p:cNvPr id="8" name="Rectangle 7"/>
+          <p:cNvSpPr/>
+          <p:nvPr/>
+        </p:nvSpPr>
+        <p:spPr>
+          <a:xfrm>
+            <a:off x="640080" y="2834640"/>
+            <a:ext cx="3520440" cy="109728"/>
+          </a:xfrm>
+          <a:prstGeom prst="rect">
+            <a:avLst/>
+          </a:prstGeom>
+          <a:solidFill>
+            <a:srgbClr val="34D399"/>
+          </a:solidFill>
+          <a:ln>
+            <a:noFill/>
+          </a:ln>
+          <a:effectLst/>
+        </p:spPr>
+        <p:style>
+          <a:lnRef idx="1">
+            <a:schemeClr val="accent1"/>
+          </a:lnRef>
+          <a:fillRef idx="3">
+            <a:schemeClr val="accent1"/>
+          </a:fillRef>
+          <a:effectRef idx="2">
+            <a:schemeClr val="accent1"/>
+          </a:effectRef>
+          <a:fontRef idx="minor">
+            <a:schemeClr val="lt1"/>
+          </a:fontRef>
+        </p:style>
+        <p:txBody>
+          <a:bodyPr rtlCol="0" anchor="ctr"/>
+          <a:lstStyle/>
+          <a:p>
+            <a:pPr algn="ctr"/>
+          </a:p>
+        </p:txBody>
+      </p:sp>
+      <p:sp>
+        <p:nvSpPr>
+          <p:cNvPr id="9" name="TextBox 8"/>
+          <p:cNvSpPr txBox="1"/>
+          <p:nvPr/>
+        </p:nvSpPr>
+        <p:spPr>
+          <a:xfrm>
+            <a:off x="914400" y="3200400"/>
+            <a:ext cx="2971800" cy="457200"/>
+          </a:xfrm>
+          <a:prstGeom prst="rect">
+            <a:avLst/>
+          </a:prstGeom>
+          <a:noFill/>
+        </p:spPr>
+        <p:txBody>
+          <a:bodyPr wrap="square" anchor="t">
+            <a:spAutoFit/>
+          </a:bodyPr>
+          <a:lstStyle/>
+          <a:p>
+            <a:pPr algn="l">
+              <a:lnSpc>
+                <a:spcPct val="115000"/>
+              </a:lnSpc>
+            </a:pPr>
+            <a:r>
+              <a:rPr sz="1800" b="1">
+                <a:solidFill>
+                  <a:srgbClr val="0F766E"/>
+                </a:solidFill>
+                <a:latin typeface="Malgun Gothic"/>
+              </a:rPr>
+              <a:t>문제 정의</a:t>
+            </a:r>
+          </a:p>
+        </p:txBody>
+      </p:sp>
+      <p:sp>
+        <p:nvSpPr>
+          <p:cNvPr id="10" name="TextBox 9"/>
+          <p:cNvSpPr txBox="1"/>
+          <p:nvPr/>
+        </p:nvSpPr>
+        <p:spPr>
+          <a:xfrm>
+            <a:off x="914400" y="3703320"/>
+            <a:ext cx="2971800" cy="2011680"/>
+          </a:xfrm>
+          <a:prstGeom prst="rect">
+            <a:avLst/>
+          </a:prstGeom>
+          <a:noFill/>
+        </p:spPr>
+        <p:txBody>
+          <a:bodyPr wrap="square" anchor="t">
+            <a:spAutoFit/>
+          </a:bodyPr>
+          <a:lstStyle/>
+          <a:p>
+            <a:pPr algn="l">
+              <a:lnSpc>
+                <a:spcPct val="115000"/>
+              </a:lnSpc>
+            </a:pPr>
+            <a:r>
+              <a:rPr sz="1400" b="0">
+                <a:solidFill>
+                  <a:srgbClr val="4B6259"/>
+                </a:solidFill>
+                <a:latin typeface="Malgun Gothic"/>
+              </a:rPr>
+              <a:t>지출을 기록해도 흩어진 데이터라 카테고리별·월별 흐름을 한눈에 파악하기 어려움</a:t>
+            </a:r>
+          </a:p>
+        </p:txBody>
+      </p:sp>
+      <p:sp>
+        <p:nvSpPr>
+          <p:cNvPr id="11" name="Rectangle 10"/>
+          <p:cNvSpPr/>
+          <p:nvPr/>
+        </p:nvSpPr>
+        <p:spPr>
+          <a:xfrm>
+            <a:off x="4343400" y="2834640"/>
+            <a:ext cx="3520440" cy="3108960"/>
+          </a:xfrm>
+          <a:prstGeom prst="rect">
+            <a:avLst/>
+          </a:prstGeom>
+          <a:solidFill>
+            <a:srgbClr val="FFFFFF"/>
+          </a:solidFill>
+          <a:ln w="12700">
+            <a:solidFill>
+              <a:srgbClr val="DCEEE7"/>
+            </a:solidFill>
+          </a:ln>
+          <a:effectLst/>
+        </p:spPr>
+        <p:style>
+          <a:lnRef idx="1">
+            <a:schemeClr val="accent1"/>
+          </a:lnRef>
+          <a:fillRef idx="3">
+            <a:schemeClr val="accent1"/>
+          </a:fillRef>
+          <a:effectRef idx="2">
+            <a:schemeClr val="accent1"/>
+          </a:effectRef>
+          <a:fontRef idx="minor">
+            <a:schemeClr val="lt1"/>
+          </a:fontRef>
+        </p:style>
+        <p:txBody>
+          <a:bodyPr rtlCol="0" anchor="ctr"/>
+          <a:lstStyle/>
+          <a:p>
+            <a:pPr algn="ctr"/>
+          </a:p>
+        </p:txBody>
+      </p:sp>
+      <p:sp>
+        <p:nvSpPr>
+          <p:cNvPr id="12" name="Rectangle 11"/>
+          <p:cNvSpPr/>
+          <p:nvPr/>
+        </p:nvSpPr>
+        <p:spPr>
+          <a:xfrm>
+            <a:off x="4343400" y="2834640"/>
+            <a:ext cx="3520440" cy="109728"/>
+          </a:xfrm>
+          <a:prstGeom prst="rect">
+            <a:avLst/>
+          </a:prstGeom>
+          <a:solidFill>
+            <a:srgbClr val="34D399"/>
+          </a:solidFill>
+          <a:ln>
+            <a:noFill/>
+          </a:ln>
+          <a:effectLst/>
+        </p:spPr>
+        <p:style>
+          <a:lnRef idx="1">
+            <a:schemeClr val="accent1"/>
+          </a:lnRef>
+          <a:fillRef idx="3">
+            <a:schemeClr val="accent1"/>
+          </a:fillRef>
+          <a:effectRef idx="2">
+            <a:schemeClr val="accent1"/>
+          </a:effectRef>
+          <a:fontRef idx="minor">
+            <a:schemeClr val="lt1"/>
+          </a:fontRef>
+        </p:style>
+        <p:txBody>
+          <a:bodyPr rtlCol="0" anchor="ctr"/>
+          <a:lstStyle/>
+          <a:p>
+            <a:pPr algn="ctr"/>
+          </a:p>
+        </p:txBody>
+      </p:sp>
+      <p:sp>
+        <p:nvSpPr>
+          <p:cNvPr id="13" name="TextBox 12"/>
+          <p:cNvSpPr txBox="1"/>
+          <p:nvPr/>
+        </p:nvSpPr>
+        <p:spPr>
+          <a:xfrm>
+            <a:off x="4617720" y="3200400"/>
+            <a:ext cx="2971800" cy="457200"/>
+          </a:xfrm>
+          <a:prstGeom prst="rect">
+            <a:avLst/>
+          </a:prstGeom>
+          <a:noFill/>
+        </p:spPr>
+        <p:txBody>
+          <a:bodyPr wrap="square" anchor="t">
+            <a:spAutoFit/>
+          </a:bodyPr>
+          <a:lstStyle/>
+          <a:p>
+            <a:pPr algn="l">
+              <a:lnSpc>
+                <a:spcPct val="115000"/>
+              </a:lnSpc>
+            </a:pPr>
+            <a:r>
+              <a:rPr sz="1800" b="1">
+                <a:solidFill>
+                  <a:srgbClr val="0F766E"/>
+                </a:solidFill>
+                <a:latin typeface="Malgun Gothic"/>
+              </a:rPr>
+              <a:t>핵심 가치</a:t>
+            </a:r>
+          </a:p>
+        </p:txBody>
+      </p:sp>
+      <p:sp>
+        <p:nvSpPr>
+          <p:cNvPr id="14" name="TextBox 13"/>
+          <p:cNvSpPr txBox="1"/>
+          <p:nvPr/>
+        </p:nvSpPr>
+        <p:spPr>
+          <a:xfrm>
+            <a:off x="4617720" y="3703320"/>
+            <a:ext cx="2971800" cy="2011680"/>
+          </a:xfrm>
+          <a:prstGeom prst="rect">
+            <a:avLst/>
+          </a:prstGeom>
+          <a:noFill/>
+        </p:spPr>
+        <p:txBody>
+          <a:bodyPr wrap="square" anchor="t">
+            <a:spAutoFit/>
+          </a:bodyPr>
+          <a:lstStyle/>
+          <a:p>
+            <a:pPr algn="l">
+              <a:lnSpc>
+                <a:spcPct val="115000"/>
+              </a:lnSpc>
+            </a:pPr>
+            <a:r>
+              <a:rPr sz="1400" b="0">
+                <a:solidFill>
+                  <a:srgbClr val="4B6259"/>
+                </a:solidFill>
+                <a:latin typeface="Malgun Gothic"/>
+              </a:rPr>
+              <a:t>간편한 등록 흐름 + 시각적 통계(도넛/막대 차트)로 소비 패턴을 즉시 인지</a:t>
+            </a:r>
+          </a:p>
+        </p:txBody>
+      </p:sp>
+      <p:sp>
+        <p:nvSpPr>
+          <p:cNvPr id="15" name="Rectangle 14"/>
+          <p:cNvSpPr/>
+          <p:nvPr/>
+        </p:nvSpPr>
+        <p:spPr>
+          <a:xfrm>
+            <a:off x="8046720" y="2834640"/>
+            <a:ext cx="3520440" cy="3108960"/>
+          </a:xfrm>
+          <a:prstGeom prst="rect">
+            <a:avLst/>
+          </a:prstGeom>
+          <a:solidFill>
+            <a:srgbClr val="FFFFFF"/>
+          </a:solidFill>
+          <a:ln w="12700">
+            <a:solidFill>
+              <a:srgbClr val="DCEEE7"/>
+            </a:solidFill>
+          </a:ln>
+          <a:effectLst/>
+        </p:spPr>
+        <p:style>
+          <a:lnRef idx="1">
+            <a:schemeClr val="accent1"/>
+          </a:lnRef>
+          <a:fillRef idx="3">
+            <a:schemeClr val="accent1"/>
+          </a:fillRef>
+          <a:effectRef idx="2">
+            <a:schemeClr val="accent1"/>
+          </a:effectRef>
+          <a:fontRef idx="minor">
+            <a:schemeClr val="lt1"/>
+          </a:fontRef>
+        </p:style>
+        <p:txBody>
+          <a:bodyPr rtlCol="0" anchor="ctr"/>
+          <a:lstStyle/>
+          <a:p>
+            <a:pPr algn="ctr"/>
+          </a:p>
+        </p:txBody>
+      </p:sp>
+      <p:sp>
+        <p:nvSpPr>
+          <p:cNvPr id="16" name="Rectangle 15"/>
+          <p:cNvSpPr/>
+          <p:nvPr/>
+        </p:nvSpPr>
+        <p:spPr>
+          <a:xfrm>
+            <a:off x="8046720" y="2834640"/>
+            <a:ext cx="3520440" cy="109728"/>
+          </a:xfrm>
+          <a:prstGeom prst="rect">
+            <a:avLst/>
+          </a:prstGeom>
+          <a:solidFill>
+            <a:srgbClr val="34D399"/>
+          </a:solidFill>
+          <a:ln>
+            <a:noFill/>
+          </a:ln>
+          <a:effectLst/>
+        </p:spPr>
+        <p:style>
+          <a:lnRef idx="1">
+            <a:schemeClr val="accent1"/>
+          </a:lnRef>
+          <a:fillRef idx="3">
+            <a:schemeClr val="accent1"/>
+          </a:fillRef>
+          <a:effectRef idx="2">
+            <a:schemeClr val="accent1"/>
+          </a:effectRef>
+          <a:fontRef idx="minor">
+            <a:schemeClr val="lt1"/>
+          </a:fontRef>
+        </p:style>
+        <p:txBody>
+          <a:bodyPr rtlCol="0" anchor="ctr"/>
+          <a:lstStyle/>
+          <a:p>
+            <a:pPr algn="ctr"/>
+          </a:p>
+        </p:txBody>
+      </p:sp>
+      <p:sp>
+        <p:nvSpPr>
+          <p:cNvPr id="17" name="TextBox 16"/>
+          <p:cNvSpPr txBox="1"/>
+          <p:nvPr/>
+        </p:nvSpPr>
+        <p:spPr>
+          <a:xfrm>
+            <a:off x="8321040" y="3200400"/>
+            <a:ext cx="2971800" cy="457200"/>
+          </a:xfrm>
+          <a:prstGeom prst="rect">
+            <a:avLst/>
+          </a:prstGeom>
+          <a:noFill/>
+        </p:spPr>
+        <p:txBody>
+          <a:bodyPr wrap="square" anchor="t">
+            <a:spAutoFit/>
+          </a:bodyPr>
+          <a:lstStyle/>
+          <a:p>
+            <a:pPr algn="l">
+              <a:lnSpc>
+                <a:spcPct val="115000"/>
+              </a:lnSpc>
+            </a:pPr>
+            <a:r>
+              <a:rPr sz="1800" b="1">
+                <a:solidFill>
+                  <a:srgbClr val="0F766E"/>
+                </a:solidFill>
+                <a:latin typeface="Malgun Gothic"/>
+              </a:rPr>
+              <a:t>두 가지 역할</a:t>
+            </a:r>
+          </a:p>
+        </p:txBody>
+      </p:sp>
+      <p:sp>
+        <p:nvSpPr>
+          <p:cNvPr id="18" name="TextBox 17"/>
+          <p:cNvSpPr txBox="1"/>
+          <p:nvPr/>
+        </p:nvSpPr>
+        <p:spPr>
+          <a:xfrm>
+            <a:off x="8321040" y="3703320"/>
+            <a:ext cx="2971800" cy="2011680"/>
+          </a:xfrm>
+          <a:prstGeom prst="rect">
+            <a:avLst/>
+          </a:prstGeom>
+          <a:noFill/>
+        </p:spPr>
+        <p:txBody>
+          <a:bodyPr wrap="square" anchor="t">
+            <a:spAutoFit/>
+          </a:bodyPr>
+          <a:lstStyle/>
+          <a:p>
+            <a:pPr algn="l">
+              <a:lnSpc>
+                <a:spcPct val="115000"/>
+              </a:lnSpc>
+            </a:pPr>
+            <a:r>
+              <a:rPr sz="1400" b="0">
+                <a:solidFill>
+                  <a:srgbClr val="4B6259"/>
+                </a:solidFill>
+                <a:latin typeface="Malgun Gothic"/>
+              </a:rPr>
+              <a:t>고객은 본인 지출을 기록·조회, 관리자는 회원과 전체 서비스 통계를 관리</a:t>
+            </a:r>
+          </a:p>
+        </p:txBody>
+      </p:sp>
+      <p:sp>
+        <p:nvSpPr>
+          <p:cNvPr id="19" name="TextBox 18"/>
           <p:cNvSpPr txBox="1"/>
           <p:nvPr/>
         </p:nvSpPr>
@@ -6443,7 +9765,7 @@
       </p:sp>
       <p:sp>
         <p:nvSpPr>
-          <p:cNvPr id="9" name="TextBox 8"/>
+          <p:cNvPr id="20" name="TextBox 19"/>
           <p:cNvSpPr txBox="1"/>
           <p:nvPr/>
         </p:nvSpPr>
@@ -6521,7 +9843,7 @@
             <a:avLst/>
           </a:prstGeom>
           <a:solidFill>
-            <a:srgbClr val="1E3A34"/>
+            <a:srgbClr val="0F766E"/>
           </a:solidFill>
           <a:ln>
             <a:noFill/>
@@ -6580,11 +9902,11 @@
             <a:r>
               <a:rPr sz="1300" b="1">
                 <a:solidFill>
-                  <a:srgbClr val="1E3A34"/>
-                </a:solidFill>
-                <a:latin typeface="Malgun Gothic"/>
-              </a:rPr>
-              <a:t>FEATURES · ADMIN</a:t>
+                  <a:srgbClr val="0F766E"/>
+                </a:solidFill>
+                <a:latin typeface="Malgun Gothic"/>
+              </a:rPr>
+              <a:t>FEATURES · CUSTOMER</a:t>
             </a:r>
           </a:p>
         </p:txBody>
@@ -6623,7 +9945,7 @@
                 </a:solidFill>
                 <a:latin typeface="Malgun Gothic"/>
               </a:rPr>
-              <a:t>핵심 기능 — 관리자</a:t>
+              <a:t>핵심 기능 — 고객</a:t>
             </a:r>
           </a:p>
         </p:txBody>
@@ -6703,13 +10025,13 @@
               </a:spcAft>
             </a:pPr>
             <a:r>
-              <a:rPr sz="1600" b="0">
+              <a:rPr sz="1500" b="0">
                 <a:solidFill>
                   <a:srgbClr val="1F2E2A"/>
                 </a:solidFill>
                 <a:latin typeface="Malgun Gothic"/>
               </a:rPr>
-              <a:t>•  고정 계정 로그인</a:t>
+              <a:t>•  회원가입 / 로그인</a:t>
             </a:r>
           </a:p>
           <a:p>
@@ -6719,13 +10041,13 @@
               </a:spcAft>
             </a:pPr>
             <a:r>
-              <a:rPr sz="1300">
+              <a:rPr sz="1200">
                 <a:solidFill>
                   <a:srgbClr val="6E8880"/>
                 </a:solidFill>
                 <a:latin typeface="Malgun Gothic"/>
               </a:rPr>
-              <a:t>     회원가입 없이 지정된 관리자 계정으로만 접근</a:t>
+              <a:t>     이메일·비밀번호 기반, 가입 즉시 자동 로그인</a:t>
             </a:r>
           </a:p>
           <a:p>
@@ -6738,13 +10060,13 @@
               </a:spcAft>
             </a:pPr>
             <a:r>
-              <a:rPr sz="1600" b="0">
+              <a:rPr sz="1500" b="0">
                 <a:solidFill>
                   <a:srgbClr val="1F2E2A"/>
                 </a:solidFill>
                 <a:latin typeface="Malgun Gothic"/>
               </a:rPr>
-              <a:t>•  전체 통계 대시보드</a:t>
+              <a:t>•  지출 CRUD</a:t>
             </a:r>
           </a:p>
           <a:p>
@@ -6754,13 +10076,13 @@
               </a:spcAft>
             </a:pPr>
             <a:r>
-              <a:rPr sz="1300">
+              <a:rPr sz="1200">
                 <a:solidFill>
                   <a:srgbClr val="6E8880"/>
                 </a:solidFill>
                 <a:latin typeface="Malgun Gothic"/>
               </a:rPr>
-              <a:t>     전체 회원 수 · 총 지출액 · 이번 달 지출 · 인기 카테고리 TOP 5</a:t>
+              <a:t>     등록·조회·수정·삭제 — 기간·카테고리 필터 및 메모 검색 지원</a:t>
             </a:r>
           </a:p>
           <a:p>
@@ -6773,13 +10095,13 @@
               </a:spcAft>
             </a:pPr>
             <a:r>
-              <a:rPr sz="1600" b="0">
+              <a:rPr sz="1500" b="0">
                 <a:solidFill>
                   <a:srgbClr val="1F2E2A"/>
                 </a:solidFill>
                 <a:latin typeface="Malgun Gothic"/>
               </a:rPr>
-              <a:t>•  회원 관리</a:t>
+              <a:t>•  페이지네이션</a:t>
             </a:r>
           </a:p>
           <a:p>
@@ -6789,13 +10111,13 @@
               </a:spcAft>
             </a:pPr>
             <a:r>
-              <a:rPr sz="1300">
+              <a:rPr sz="1200">
                 <a:solidFill>
                   <a:srgbClr val="6E8880"/>
                 </a:solidFill>
                 <a:latin typeface="Malgun Gothic"/>
               </a:rPr>
-              <a:t>     이름/이메일 검색, 계정 정지·해제, 상세 화면에서 최근 지출 5건 확인</a:t>
+              <a:t>     지출 내역이 쌓여도 페이지당 10건씩 표시, 필터 변경 시 1페이지로 자동 리셋</a:t>
             </a:r>
           </a:p>
           <a:p>
@@ -6808,13 +10130,13 @@
               </a:spcAft>
             </a:pPr>
             <a:r>
-              <a:rPr sz="1600" b="0">
+              <a:rPr sz="1500" b="0">
                 <a:solidFill>
                   <a:srgbClr val="1F2E2A"/>
                 </a:solidFill>
                 <a:latin typeface="Malgun Gothic"/>
               </a:rPr>
-              <a:t>•  게시판 관리</a:t>
+              <a:t>•  개인 통계 대시보드</a:t>
             </a:r>
           </a:p>
           <a:p>
@@ -6824,13 +10146,13 @@
               </a:spcAft>
             </a:pPr>
             <a:r>
-              <a:rPr sz="1300">
+              <a:rPr sz="1200">
                 <a:solidFill>
                   <a:srgbClr val="6E8880"/>
                 </a:solidFill>
                 <a:latin typeface="Malgun Gothic"/>
               </a:rPr>
-              <a:t>     게시글 검색, 부적절한 글 삭제 (모더레이션)</a:t>
+              <a:t>     월별/연별 합계, 카테고리 비중을 도넛·막대 차트 토글로 시각화</a:t>
             </a:r>
           </a:p>
           <a:p>
@@ -6843,13 +10165,13 @@
               </a:spcAft>
             </a:pPr>
             <a:r>
-              <a:rPr sz="1600" b="0">
+              <a:rPr sz="1500" b="0">
                 <a:solidFill>
                   <a:srgbClr val="1F2E2A"/>
                 </a:solidFill>
                 <a:latin typeface="Malgun Gothic"/>
               </a:rPr>
-              <a:t>•  역할 분리</a:t>
+              <a:t>•  고정 카테고리 8종</a:t>
             </a:r>
           </a:p>
           <a:p>
@@ -6859,20 +10181,55 @@
               </a:spcAft>
             </a:pPr>
             <a:r>
-              <a:rPr sz="1300">
+              <a:rPr sz="1200">
                 <a:solidFill>
                   <a:srgbClr val="6E8880"/>
                 </a:solidFill>
                 <a:latin typeface="Malgun Gothic"/>
               </a:rPr>
-              <a:t>     관리자는 지출 데이터를 직접 등록하지 않고 조회·관리만 수행</a:t>
+              <a:t>     식비·교통·주거·문화/여가·쇼핑·의료·교육·기타 — 모든 사용자 공용</a:t>
+            </a:r>
+          </a:p>
+          <a:p>
+            <a:pPr>
+              <a:lnSpc>
+                <a:spcPct val="120000"/>
+              </a:lnSpc>
+              <a:spcAft>
+                <a:spcPts val="1000"/>
+              </a:spcAft>
+            </a:pPr>
+            <a:r>
+              <a:rPr sz="1500" b="0">
+                <a:solidFill>
+                  <a:srgbClr val="1F2E2A"/>
+                </a:solidFill>
+                <a:latin typeface="Malgun Gothic"/>
+              </a:rPr>
+              <a:t>•  게시판</a:t>
+            </a:r>
+          </a:p>
+          <a:p>
+            <a:pPr>
+              <a:spcAft>
+                <a:spcPts val="1000"/>
+              </a:spcAft>
+            </a:pPr>
+            <a:r>
+              <a:rPr sz="1200">
+                <a:solidFill>
+                  <a:srgbClr val="6E8880"/>
+                </a:solidFill>
+                <a:latin typeface="Malgun Gothic"/>
+              </a:rPr>
+              <a:t>     절약 팁을 자유롭게 작성·검색하고 댓글로 소통, 본인 글/댓글만 삭제 가능</a:t>
             </a:r>
           </a:p>
         </p:txBody>
       </p:sp>
       <p:pic>
         <p:nvPicPr>
-          <p:cNvPr id="7" name="Picture 6" descr="admin.png"/>
+          <p:cNvPr id="7" name="Picture 6" descr="dashboard.png"/>
           <p:cNvPicPr>
             <a:picLocks noChangeAspect="1"/>
           </p:cNvPicPr>
@@ -7018,7 +10375,7 @@
             <a:avLst/>
           </a:prstGeom>
           <a:solidFill>
-            <a:srgbClr val="0F766E"/>
+            <a:srgbClr val="1E3A34"/>
           </a:solidFill>
           <a:ln>
             <a:noFill/>
@@ -7077,11 +10434,11 @@
             <a:r>
               <a:rPr sz="1300" b="1">
                 <a:solidFill>
-                  <a:srgbClr val="0F766E"/>
-                </a:solidFill>
-                <a:latin typeface="Malgun Gothic"/>
-              </a:rPr>
-              <a:t>SCREENSHOTS</a:t>
+                  <a:srgbClr val="1E3A34"/>
+                </a:solidFill>
+                <a:latin typeface="Malgun Gothic"/>
+              </a:rPr>
+              <a:t>FEATURES · ADMIN</a:t>
             </a:r>
           </a:p>
         </p:txBody>
@@ -7120,7 +10477,7 @@
                 </a:solidFill>
                 <a:latin typeface="Malgun Gothic"/>
               </a:rPr>
-              <a:t>실제 화면</a:t>
+              <a:t>핵심 기능 — 관리자</a:t>
             </a:r>
           </a:p>
         </p:txBody>
@@ -7178,39 +10535,198 @@
         <p:spPr>
           <a:xfrm>
             <a:off x="640080" y="1828800"/>
-            <a:ext cx="5394960" cy="274320"/>
-          </a:xfrm>
-          <a:prstGeom prst="rect">
-            <a:avLst/>
-          </a:prstGeom>
-          <a:noFill/>
-        </p:spPr>
-        <p:txBody>
-          <a:bodyPr wrap="square" anchor="t">
-            <a:spAutoFit/>
-          </a:bodyPr>
-          <a:lstStyle/>
-          <a:p>
-            <a:pPr algn="l">
-              <a:lnSpc>
-                <a:spcPct val="115000"/>
-              </a:lnSpc>
-            </a:pPr>
-            <a:r>
-              <a:rPr sz="1300" b="1">
-                <a:solidFill>
-                  <a:srgbClr val="0F766E"/>
-                </a:solidFill>
-                <a:latin typeface="Malgun Gothic"/>
-              </a:rPr>
-              <a:t>고객 대시보드</a:t>
+            <a:ext cx="5486400" cy="4572000"/>
+          </a:xfrm>
+          <a:prstGeom prst="rect">
+            <a:avLst/>
+          </a:prstGeom>
+          <a:noFill/>
+        </p:spPr>
+        <p:txBody>
+          <a:bodyPr wrap="square">
+            <a:spAutoFit/>
+          </a:bodyPr>
+          <a:lstStyle/>
+          <a:p>
+            <a:pPr>
+              <a:lnSpc>
+                <a:spcPct val="120000"/>
+              </a:lnSpc>
+              <a:spcAft>
+                <a:spcPts val="1000"/>
+              </a:spcAft>
+            </a:pPr>
+            <a:r>
+              <a:rPr sz="1600" b="0">
+                <a:solidFill>
+                  <a:srgbClr val="1F2E2A"/>
+                </a:solidFill>
+                <a:latin typeface="Malgun Gothic"/>
+              </a:rPr>
+              <a:t>•  고정 계정 로그인</a:t>
+            </a:r>
+          </a:p>
+          <a:p>
+            <a:pPr>
+              <a:spcAft>
+                <a:spcPts val="1000"/>
+              </a:spcAft>
+            </a:pPr>
+            <a:r>
+              <a:rPr sz="1300">
+                <a:solidFill>
+                  <a:srgbClr val="6E8880"/>
+                </a:solidFill>
+                <a:latin typeface="Malgun Gothic"/>
+              </a:rPr>
+              <a:t>     회원가입 없이 지정된 관리자 계정으로만 접근</a:t>
+            </a:r>
+          </a:p>
+          <a:p>
+            <a:pPr>
+              <a:lnSpc>
+                <a:spcPct val="120000"/>
+              </a:lnSpc>
+              <a:spcAft>
+                <a:spcPts val="1000"/>
+              </a:spcAft>
+            </a:pPr>
+            <a:r>
+              <a:rPr sz="1600" b="0">
+                <a:solidFill>
+                  <a:srgbClr val="1F2E2A"/>
+                </a:solidFill>
+                <a:latin typeface="Malgun Gothic"/>
+              </a:rPr>
+              <a:t>•  전체 통계 대시보드</a:t>
+            </a:r>
+          </a:p>
+          <a:p>
+            <a:pPr>
+              <a:spcAft>
+                <a:spcPts val="1000"/>
+              </a:spcAft>
+            </a:pPr>
+            <a:r>
+              <a:rPr sz="1300">
+                <a:solidFill>
+                  <a:srgbClr val="6E8880"/>
+                </a:solidFill>
+                <a:latin typeface="Malgun Gothic"/>
+              </a:rPr>
+              <a:t>     전체 회원 수 · 총 지출액 · 이번 달 지출 · 인기 카테고리 TOP 5</a:t>
+            </a:r>
+          </a:p>
+          <a:p>
+            <a:pPr>
+              <a:lnSpc>
+                <a:spcPct val="120000"/>
+              </a:lnSpc>
+              <a:spcAft>
+                <a:spcPts val="1000"/>
+              </a:spcAft>
+            </a:pPr>
+            <a:r>
+              <a:rPr sz="1600" b="0">
+                <a:solidFill>
+                  <a:srgbClr val="1F2E2A"/>
+                </a:solidFill>
+                <a:latin typeface="Malgun Gothic"/>
+              </a:rPr>
+              <a:t>•  회원 관리</a:t>
+            </a:r>
+          </a:p>
+          <a:p>
+            <a:pPr>
+              <a:spcAft>
+                <a:spcPts val="1000"/>
+              </a:spcAft>
+            </a:pPr>
+            <a:r>
+              <a:rPr sz="1300">
+                <a:solidFill>
+                  <a:srgbClr val="6E8880"/>
+                </a:solidFill>
+                <a:latin typeface="Malgun Gothic"/>
+              </a:rPr>
+              <a:t>     이름/이메일 검색, 계정 정지·해제, 상세 화면에서 최근 지출 5건 확인</a:t>
+            </a:r>
+          </a:p>
+          <a:p>
+            <a:pPr>
+              <a:lnSpc>
+                <a:spcPct val="120000"/>
+              </a:lnSpc>
+              <a:spcAft>
+                <a:spcPts val="1000"/>
+              </a:spcAft>
+            </a:pPr>
+            <a:r>
+              <a:rPr sz="1600" b="0">
+                <a:solidFill>
+                  <a:srgbClr val="1F2E2A"/>
+                </a:solidFill>
+                <a:latin typeface="Malgun Gothic"/>
+              </a:rPr>
+              <a:t>•  게시판 관리</a:t>
+            </a:r>
+          </a:p>
+          <a:p>
+            <a:pPr>
+              <a:spcAft>
+                <a:spcPts val="1000"/>
+              </a:spcAft>
+            </a:pPr>
+            <a:r>
+              <a:rPr sz="1300">
+                <a:solidFill>
+                  <a:srgbClr val="6E8880"/>
+                </a:solidFill>
+                <a:latin typeface="Malgun Gothic"/>
+              </a:rPr>
+              <a:t>     게시글 검색, 부적절한 글 삭제 (모더레이션)</a:t>
+            </a:r>
+          </a:p>
+          <a:p>
+            <a:pPr>
+              <a:lnSpc>
+                <a:spcPct val="120000"/>
+              </a:lnSpc>
+              <a:spcAft>
+                <a:spcPts val="1000"/>
+              </a:spcAft>
+            </a:pPr>
+            <a:r>
+              <a:rPr sz="1600" b="0">
+                <a:solidFill>
+                  <a:srgbClr val="1F2E2A"/>
+                </a:solidFill>
+                <a:latin typeface="Malgun Gothic"/>
+              </a:rPr>
+              <a:t>•  역할 분리</a:t>
+            </a:r>
+          </a:p>
+          <a:p>
+            <a:pPr>
+              <a:spcAft>
+                <a:spcPts val="1000"/>
+              </a:spcAft>
+            </a:pPr>
+            <a:r>
+              <a:rPr sz="1300">
+                <a:solidFill>
+                  <a:srgbClr val="6E8880"/>
+                </a:solidFill>
+                <a:latin typeface="Malgun Gothic"/>
+              </a:rPr>
+              <a:t>     관리자는 지출 데이터를 직접 등록하지 않고 조회·관리만 수행</a:t>
             </a:r>
           </a:p>
         </p:txBody>
       </p:sp>
       <p:pic>
         <p:nvPicPr>
-          <p:cNvPr id="7" name="Picture 6" descr="dashboard.png"/>
+          <p:cNvPr id="7" name="Picture 6" descr="admin.png"/>
           <p:cNvPicPr>
             <a:picLocks noChangeAspect="1"/>
           </p:cNvPicPr>
@@ -7224,8 +10740,8 @@
         </p:blipFill>
         <p:spPr>
           <a:xfrm>
-            <a:off x="1965960" y="2103120"/>
-            <a:ext cx="2743200" cy="1828800"/>
+            <a:off x="6492240" y="2255520"/>
+            <a:ext cx="5029200" cy="3352800"/>
           </a:xfrm>
           <a:prstGeom prst="rect">
             <a:avLst/>
@@ -7245,210 +10761,6 @@
         </p:nvSpPr>
         <p:spPr>
           <a:xfrm>
-            <a:off x="6217920" y="1828800"/>
-            <a:ext cx="5394960" cy="274320"/>
-          </a:xfrm>
-          <a:prstGeom prst="rect">
-            <a:avLst/>
-          </a:prstGeom>
-          <a:noFill/>
-        </p:spPr>
-        <p:txBody>
-          <a:bodyPr wrap="square" anchor="t">
-            <a:spAutoFit/>
-          </a:bodyPr>
-          <a:lstStyle/>
-          <a:p>
-            <a:pPr algn="l">
-              <a:lnSpc>
-                <a:spcPct val="115000"/>
-              </a:lnSpc>
-            </a:pPr>
-            <a:r>
-              <a:rPr sz="1300" b="1">
-                <a:solidFill>
-                  <a:srgbClr val="0F766E"/>
-                </a:solidFill>
-                <a:latin typeface="Malgun Gothic"/>
-              </a:rPr>
-              <a:t>지출 내역 (페이지네이션)</a:t>
-            </a:r>
-          </a:p>
-        </p:txBody>
-      </p:sp>
-      <p:pic>
-        <p:nvPicPr>
-          <p:cNvPr id="9" name="Picture 8" descr="expenses.png"/>
-          <p:cNvPicPr>
-            <a:picLocks noChangeAspect="1"/>
-          </p:cNvPicPr>
-          <p:nvPr/>
-        </p:nvPicPr>
-        <p:blipFill>
-          <a:blip r:embed="rId3"/>
-          <a:stretch>
-            <a:fillRect/>
-          </a:stretch>
-        </p:blipFill>
-        <p:spPr>
-          <a:xfrm>
-            <a:off x="7715093" y="2103120"/>
-            <a:ext cx="2400612" cy="1828800"/>
-          </a:xfrm>
-          <a:prstGeom prst="rect">
-            <a:avLst/>
-          </a:prstGeom>
-          <a:ln w="12700">
-            <a:solidFill>
-              <a:srgbClr val="DCEEE7"/>
-            </a:solidFill>
-          </a:ln>
-        </p:spPr>
-      </p:pic>
-      <p:sp>
-        <p:nvSpPr>
-          <p:cNvPr id="10" name="TextBox 9"/>
-          <p:cNvSpPr txBox="1"/>
-          <p:nvPr/>
-        </p:nvSpPr>
-        <p:spPr>
-          <a:xfrm>
-            <a:off x="640080" y="4114800"/>
-            <a:ext cx="5394960" cy="274320"/>
-          </a:xfrm>
-          <a:prstGeom prst="rect">
-            <a:avLst/>
-          </a:prstGeom>
-          <a:noFill/>
-        </p:spPr>
-        <p:txBody>
-          <a:bodyPr wrap="square" anchor="t">
-            <a:spAutoFit/>
-          </a:bodyPr>
-          <a:lstStyle/>
-          <a:p>
-            <a:pPr algn="l">
-              <a:lnSpc>
-                <a:spcPct val="115000"/>
-              </a:lnSpc>
-            </a:pPr>
-            <a:r>
-              <a:rPr sz="1300" b="1">
-                <a:solidFill>
-                  <a:srgbClr val="0F766E"/>
-                </a:solidFill>
-                <a:latin typeface="Malgun Gothic"/>
-              </a:rPr>
-              <a:t>통계</a:t>
-            </a:r>
-          </a:p>
-        </p:txBody>
-      </p:sp>
-      <p:pic>
-        <p:nvPicPr>
-          <p:cNvPr id="11" name="Picture 10" descr="stats.png"/>
-          <p:cNvPicPr>
-            <a:picLocks noChangeAspect="1"/>
-          </p:cNvPicPr>
-          <p:nvPr/>
-        </p:nvPicPr>
-        <p:blipFill>
-          <a:blip r:embed="rId4"/>
-          <a:stretch>
-            <a:fillRect/>
-          </a:stretch>
-        </p:blipFill>
-        <p:spPr>
-          <a:xfrm>
-            <a:off x="1965960" y="4389120"/>
-            <a:ext cx="2743200" cy="1828800"/>
-          </a:xfrm>
-          <a:prstGeom prst="rect">
-            <a:avLst/>
-          </a:prstGeom>
-          <a:ln w="12700">
-            <a:solidFill>
-              <a:srgbClr val="DCEEE7"/>
-            </a:solidFill>
-          </a:ln>
-        </p:spPr>
-      </p:pic>
-      <p:sp>
-        <p:nvSpPr>
-          <p:cNvPr id="12" name="TextBox 11"/>
-          <p:cNvSpPr txBox="1"/>
-          <p:nvPr/>
-        </p:nvSpPr>
-        <p:spPr>
-          <a:xfrm>
-            <a:off x="6217920" y="4114800"/>
-            <a:ext cx="5394960" cy="274320"/>
-          </a:xfrm>
-          <a:prstGeom prst="rect">
-            <a:avLst/>
-          </a:prstGeom>
-          <a:noFill/>
-        </p:spPr>
-        <p:txBody>
-          <a:bodyPr wrap="square" anchor="t">
-            <a:spAutoFit/>
-          </a:bodyPr>
-          <a:lstStyle/>
-          <a:p>
-            <a:pPr algn="l">
-              <a:lnSpc>
-                <a:spcPct val="115000"/>
-              </a:lnSpc>
-            </a:pPr>
-            <a:r>
-              <a:rPr sz="1300" b="1">
-                <a:solidFill>
-                  <a:srgbClr val="0F766E"/>
-                </a:solidFill>
-                <a:latin typeface="Malgun Gothic"/>
-              </a:rPr>
-              <a:t>관리자 대시보드</a:t>
-            </a:r>
-          </a:p>
-        </p:txBody>
-      </p:sp>
-      <p:pic>
-        <p:nvPicPr>
-          <p:cNvPr id="13" name="Picture 12" descr="admin.png"/>
-          <p:cNvPicPr>
-            <a:picLocks noChangeAspect="1"/>
-          </p:cNvPicPr>
-          <p:nvPr/>
-        </p:nvPicPr>
-        <p:blipFill>
-          <a:blip r:embed="rId5"/>
-          <a:stretch>
-            <a:fillRect/>
-          </a:stretch>
-        </p:blipFill>
-        <p:spPr>
-          <a:xfrm>
-            <a:off x="7543800" y="4389120"/>
-            <a:ext cx="2743200" cy="1828800"/>
-          </a:xfrm>
-          <a:prstGeom prst="rect">
-            <a:avLst/>
-          </a:prstGeom>
-          <a:ln w="12700">
-            <a:solidFill>
-              <a:srgbClr val="DCEEE7"/>
-            </a:solidFill>
-          </a:ln>
-        </p:spPr>
-      </p:pic>
-      <p:sp>
-        <p:nvSpPr>
-          <p:cNvPr id="14" name="TextBox 13"/>
-          <p:cNvSpPr txBox="1"/>
-          <p:nvPr/>
-        </p:nvSpPr>
-        <p:spPr>
-          <a:xfrm>
             <a:off x="457200" y="6446520"/>
             <a:ext cx="7315200" cy="320040"/>
           </a:xfrm>
@@ -7482,7 +10794,7 @@
       </p:sp>
       <p:sp>
         <p:nvSpPr>
-          <p:cNvPr id="15" name="TextBox 14"/>
+          <p:cNvPr id="9" name="TextBox 8"/>
           <p:cNvSpPr txBox="1"/>
           <p:nvPr/>
         </p:nvSpPr>
@@ -7623,7 +10935,7 @@
                 </a:solidFill>
                 <a:latin typeface="Malgun Gothic"/>
               </a:rPr>
-              <a:t>ARCHITECTURE</a:t>
+              <a:t>SCREENSHOTS</a:t>
             </a:r>
           </a:p>
         </p:txBody>
@@ -7662,7 +10974,7 @@
                 </a:solidFill>
                 <a:latin typeface="Malgun Gothic"/>
               </a:rPr>
-              <a:t>설계 원칙</a:t>
+              <a:t>실제 화면</a:t>
             </a:r>
           </a:p>
         </p:txBody>
@@ -7713,58 +11025,82 @@
       </p:sp>
       <p:sp>
         <p:nvSpPr>
-          <p:cNvPr id="6" name="Oval 5"/>
-          <p:cNvSpPr/>
-          <p:nvPr/>
-        </p:nvSpPr>
-        <p:spPr>
-          <a:xfrm>
-            <a:off x="640080" y="1874519"/>
-            <a:ext cx="411480" cy="411480"/>
-          </a:xfrm>
-          <a:prstGeom prst="ellipse">
-            <a:avLst/>
-          </a:prstGeom>
-          <a:solidFill>
-            <a:srgbClr val="34D399"/>
-          </a:solidFill>
-          <a:ln>
-            <a:noFill/>
+          <p:cNvPr id="6" name="TextBox 5"/>
+          <p:cNvSpPr txBox="1"/>
+          <p:nvPr/>
+        </p:nvSpPr>
+        <p:spPr>
+          <a:xfrm>
+            <a:off x="640080" y="1828800"/>
+            <a:ext cx="5394960" cy="274320"/>
+          </a:xfrm>
+          <a:prstGeom prst="rect">
+            <a:avLst/>
+          </a:prstGeom>
+          <a:noFill/>
+        </p:spPr>
+        <p:txBody>
+          <a:bodyPr wrap="square" anchor="t">
+            <a:spAutoFit/>
+          </a:bodyPr>
+          <a:lstStyle/>
+          <a:p>
+            <a:pPr algn="l">
+              <a:lnSpc>
+                <a:spcPct val="115000"/>
+              </a:lnSpc>
+            </a:pPr>
+            <a:r>
+              <a:rPr sz="1300" b="1">
+                <a:solidFill>
+                  <a:srgbClr val="0F766E"/>
+                </a:solidFill>
+                <a:latin typeface="Malgun Gothic"/>
+              </a:rPr>
+              <a:t>고객 대시보드</a:t>
+            </a:r>
+          </a:p>
+        </p:txBody>
+      </p:sp>
+      <p:pic>
+        <p:nvPicPr>
+          <p:cNvPr id="7" name="Picture 6" descr="dashboard.png"/>
+          <p:cNvPicPr>
+            <a:picLocks noChangeAspect="1"/>
+          </p:cNvPicPr>
+          <p:nvPr/>
+        </p:nvPicPr>
+        <p:blipFill>
+          <a:blip r:embed="rId2"/>
+          <a:stretch>
+            <a:fillRect/>
+          </a:stretch>
+        </p:blipFill>
+        <p:spPr>
+          <a:xfrm>
+            <a:off x="1965960" y="2103120"/>
+            <a:ext cx="2743200" cy="1828800"/>
+          </a:xfrm>
+          <a:prstGeom prst="rect">
+            <a:avLst/>
+          </a:prstGeom>
+          <a:ln w="12700">
+            <a:solidFill>
+              <a:srgbClr val="DCEEE7"/>
+            </a:solidFill>
           </a:ln>
-          <a:effectLst/>
-        </p:spPr>
-        <p:style>
-          <a:lnRef idx="1">
-            <a:schemeClr val="accent1"/>
-          </a:lnRef>
-          <a:fillRef idx="3">
-            <a:schemeClr val="accent1"/>
-          </a:fillRef>
-          <a:effectRef idx="2">
-            <a:schemeClr val="accent1"/>
-          </a:effectRef>
-          <a:fontRef idx="minor">
-            <a:schemeClr val="lt1"/>
-          </a:fontRef>
-        </p:style>
-        <p:txBody>
-          <a:bodyPr rtlCol="0" anchor="ctr"/>
-          <a:lstStyle/>
-          <a:p>
-            <a:pPr algn="ctr"/>
-          </a:p>
-        </p:txBody>
-      </p:sp>
-      <p:sp>
-        <p:nvSpPr>
-          <p:cNvPr id="7" name="TextBox 6"/>
-          <p:cNvSpPr txBox="1"/>
-          <p:nvPr/>
-        </p:nvSpPr>
-        <p:spPr>
-          <a:xfrm>
-            <a:off x="640080" y="1892807"/>
-            <a:ext cx="411480" cy="365760"/>
+        </p:spPr>
+      </p:pic>
+      <p:sp>
+        <p:nvSpPr>
+          <p:cNvPr id="8" name="TextBox 7"/>
+          <p:cNvSpPr txBox="1"/>
+          <p:nvPr/>
+        </p:nvSpPr>
+        <p:spPr>
+          <a:xfrm>
+            <a:off x="6217920" y="1828800"/>
+            <a:ext cx="5394960" cy="274320"/>
           </a:xfrm>
           <a:prstGeom prst="rect">
             <a:avLst/>
@@ -7777,33 +11113,62 @@
           </a:bodyPr>
           <a:lstStyle/>
           <a:p>
-            <a:pPr algn="ctr">
+            <a:pPr algn="l">
               <a:lnSpc>
                 <a:spcPct val="115000"/>
               </a:lnSpc>
             </a:pPr>
             <a:r>
-              <a:rPr sz="1600" b="1">
-                <a:solidFill>
-                  <a:srgbClr val="FFFFFF"/>
-                </a:solidFill>
-                <a:latin typeface="Malgun Gothic"/>
-              </a:rPr>
-              <a:t>1</a:t>
-            </a:r>
-          </a:p>
-        </p:txBody>
-      </p:sp>
-      <p:sp>
-        <p:nvSpPr>
-          <p:cNvPr id="8" name="TextBox 7"/>
-          <p:cNvSpPr txBox="1"/>
-          <p:nvPr/>
-        </p:nvSpPr>
-        <p:spPr>
-          <a:xfrm>
-            <a:off x="1234440" y="1847087"/>
-            <a:ext cx="3840480" cy="457200"/>
+              <a:rPr sz="1300" b="1">
+                <a:solidFill>
+                  <a:srgbClr val="0F766E"/>
+                </a:solidFill>
+                <a:latin typeface="Malgun Gothic"/>
+              </a:rPr>
+              <a:t>지출 내역 (페이지네이션)</a:t>
+            </a:r>
+          </a:p>
+        </p:txBody>
+      </p:sp>
+      <p:pic>
+        <p:nvPicPr>
+          <p:cNvPr id="9" name="Picture 8" descr="expenses.png"/>
+          <p:cNvPicPr>
+            <a:picLocks noChangeAspect="1"/>
+          </p:cNvPicPr>
+          <p:nvPr/>
+        </p:nvPicPr>
+        <p:blipFill>
+          <a:blip r:embed="rId3"/>
+          <a:stretch>
+            <a:fillRect/>
+          </a:stretch>
+        </p:blipFill>
+        <p:spPr>
+          <a:xfrm>
+            <a:off x="7715093" y="2103120"/>
+            <a:ext cx="2400612" cy="1828800"/>
+          </a:xfrm>
+          <a:prstGeom prst="rect">
+            <a:avLst/>
+          </a:prstGeom>
+          <a:ln w="12700">
+            <a:solidFill>
+              <a:srgbClr val="DCEEE7"/>
+            </a:solidFill>
+          </a:ln>
+        </p:spPr>
+      </p:pic>
+      <p:sp>
+        <p:nvSpPr>
+          <p:cNvPr id="10" name="TextBox 9"/>
+          <p:cNvSpPr txBox="1"/>
+          <p:nvPr/>
+        </p:nvSpPr>
+        <p:spPr>
+          <a:xfrm>
+            <a:off x="640080" y="4114800"/>
+            <a:ext cx="5394960" cy="274320"/>
           </a:xfrm>
           <a:prstGeom prst="rect">
             <a:avLst/>
@@ -7822,27 +11187,56 @@
               </a:lnSpc>
             </a:pPr>
             <a:r>
-              <a:rPr sz="1600" b="1">
+              <a:rPr sz="1300" b="1">
                 <a:solidFill>
                   <a:srgbClr val="0F766E"/>
                 </a:solidFill>
                 <a:latin typeface="Malgun Gothic"/>
               </a:rPr>
-              <a:t>코로케이션 (Colocation)</a:t>
-            </a:r>
-          </a:p>
-        </p:txBody>
-      </p:sp>
-      <p:sp>
-        <p:nvSpPr>
-          <p:cNvPr id="9" name="TextBox 8"/>
-          <p:cNvSpPr txBox="1"/>
-          <p:nvPr/>
-        </p:nvSpPr>
-        <p:spPr>
-          <a:xfrm>
-            <a:off x="1234440" y="2258567"/>
-            <a:ext cx="10241280" cy="640080"/>
+              <a:t>통계</a:t>
+            </a:r>
+          </a:p>
+        </p:txBody>
+      </p:sp>
+      <p:pic>
+        <p:nvPicPr>
+          <p:cNvPr id="11" name="Picture 10" descr="stats.png"/>
+          <p:cNvPicPr>
+            <a:picLocks noChangeAspect="1"/>
+          </p:cNvPicPr>
+          <p:nvPr/>
+        </p:nvPicPr>
+        <p:blipFill>
+          <a:blip r:embed="rId4"/>
+          <a:stretch>
+            <a:fillRect/>
+          </a:stretch>
+        </p:blipFill>
+        <p:spPr>
+          <a:xfrm>
+            <a:off x="1965960" y="4389120"/>
+            <a:ext cx="2743200" cy="1828800"/>
+          </a:xfrm>
+          <a:prstGeom prst="rect">
+            <a:avLst/>
+          </a:prstGeom>
+          <a:ln w="12700">
+            <a:solidFill>
+              <a:srgbClr val="DCEEE7"/>
+            </a:solidFill>
+          </a:ln>
+        </p:spPr>
+      </p:pic>
+      <p:sp>
+        <p:nvSpPr>
+          <p:cNvPr id="12" name="TextBox 11"/>
+          <p:cNvSpPr txBox="1"/>
+          <p:nvPr/>
+        </p:nvSpPr>
+        <p:spPr>
+          <a:xfrm>
+            <a:off x="6217920" y="4114800"/>
+            <a:ext cx="5394960" cy="274320"/>
           </a:xfrm>
           <a:prstGeom prst="rect">
             <a:avLst/>
@@ -7861,503 +11255,49 @@
               </a:lnSpc>
             </a:pPr>
             <a:r>
-              <a:rPr sz="1300" b="0">
-                <a:solidFill>
-                  <a:srgbClr val="4B6259"/>
-                </a:solidFill>
-                <a:latin typeface="Malgun Gothic"/>
-              </a:rPr>
-              <a:t>각 페이지의 HTML·CSS·JS를 같은 디렉토리에 평탄하게 배치 — "이 기능을 고치려면 어느 폴더를 보면 되는가?"에 즉시 답할 수 있는 구조</a:t>
-            </a:r>
-          </a:p>
-        </p:txBody>
-      </p:sp>
-      <p:sp>
-        <p:nvSpPr>
-          <p:cNvPr id="10" name="Oval 9"/>
-          <p:cNvSpPr/>
-          <p:nvPr/>
-        </p:nvSpPr>
-        <p:spPr>
-          <a:xfrm>
-            <a:off x="640080" y="2990087"/>
-            <a:ext cx="411480" cy="411480"/>
-          </a:xfrm>
-          <a:prstGeom prst="ellipse">
-            <a:avLst/>
-          </a:prstGeom>
-          <a:solidFill>
-            <a:srgbClr val="34D399"/>
-          </a:solidFill>
-          <a:ln>
-            <a:noFill/>
+              <a:rPr sz="1300" b="1">
+                <a:solidFill>
+                  <a:srgbClr val="0F766E"/>
+                </a:solidFill>
+                <a:latin typeface="Malgun Gothic"/>
+              </a:rPr>
+              <a:t>관리자 대시보드</a:t>
+            </a:r>
+          </a:p>
+        </p:txBody>
+      </p:sp>
+      <p:pic>
+        <p:nvPicPr>
+          <p:cNvPr id="13" name="Picture 12" descr="admin.png"/>
+          <p:cNvPicPr>
+            <a:picLocks noChangeAspect="1"/>
+          </p:cNvPicPr>
+          <p:nvPr/>
+        </p:nvPicPr>
+        <p:blipFill>
+          <a:blip r:embed="rId5"/>
+          <a:stretch>
+            <a:fillRect/>
+          </a:stretch>
+        </p:blipFill>
+        <p:spPr>
+          <a:xfrm>
+            <a:off x="7543800" y="4389120"/>
+            <a:ext cx="2743200" cy="1828800"/>
+          </a:xfrm>
+          <a:prstGeom prst="rect">
+            <a:avLst/>
+          </a:prstGeom>
+          <a:ln w="12700">
+            <a:solidFill>
+              <a:srgbClr val="DCEEE7"/>
+            </a:solidFill>
           </a:ln>
-          <a:effectLst/>
-        </p:spPr>
-        <p:style>
-          <a:lnRef idx="1">
-            <a:schemeClr val="accent1"/>
-          </a:lnRef>
-          <a:fillRef idx="3">
-            <a:schemeClr val="accent1"/>
-          </a:fillRef>
-          <a:effectRef idx="2">
-            <a:schemeClr val="accent1"/>
-          </a:effectRef>
-          <a:fontRef idx="minor">
-            <a:schemeClr val="lt1"/>
-          </a:fontRef>
-        </p:style>
-        <p:txBody>
-          <a:bodyPr rtlCol="0" anchor="ctr"/>
-          <a:lstStyle/>
-          <a:p>
-            <a:pPr algn="ctr"/>
-          </a:p>
-        </p:txBody>
-      </p:sp>
-      <p:sp>
-        <p:nvSpPr>
-          <p:cNvPr id="11" name="TextBox 10"/>
-          <p:cNvSpPr txBox="1"/>
-          <p:nvPr/>
-        </p:nvSpPr>
-        <p:spPr>
-          <a:xfrm>
-            <a:off x="640080" y="3008375"/>
-            <a:ext cx="411480" cy="365760"/>
-          </a:xfrm>
-          <a:prstGeom prst="rect">
-            <a:avLst/>
-          </a:prstGeom>
-          <a:noFill/>
-        </p:spPr>
-        <p:txBody>
-          <a:bodyPr wrap="square" anchor="t">
-            <a:spAutoFit/>
-          </a:bodyPr>
-          <a:lstStyle/>
-          <a:p>
-            <a:pPr algn="ctr">
-              <a:lnSpc>
-                <a:spcPct val="115000"/>
-              </a:lnSpc>
-            </a:pPr>
-            <a:r>
-              <a:rPr sz="1600" b="1">
-                <a:solidFill>
-                  <a:srgbClr val="FFFFFF"/>
-                </a:solidFill>
-                <a:latin typeface="Malgun Gothic"/>
-              </a:rPr>
-              <a:t>2</a:t>
-            </a:r>
-          </a:p>
-        </p:txBody>
-      </p:sp>
-      <p:sp>
-        <p:nvSpPr>
-          <p:cNvPr id="12" name="TextBox 11"/>
-          <p:cNvSpPr txBox="1"/>
-          <p:nvPr/>
-        </p:nvSpPr>
-        <p:spPr>
-          <a:xfrm>
-            <a:off x="1234440" y="2962655"/>
-            <a:ext cx="3840480" cy="457200"/>
-          </a:xfrm>
-          <a:prstGeom prst="rect">
-            <a:avLst/>
-          </a:prstGeom>
-          <a:noFill/>
-        </p:spPr>
-        <p:txBody>
-          <a:bodyPr wrap="square" anchor="t">
-            <a:spAutoFit/>
-          </a:bodyPr>
-          <a:lstStyle/>
-          <a:p>
-            <a:pPr algn="l">
-              <a:lnSpc>
-                <a:spcPct val="115000"/>
-              </a:lnSpc>
-            </a:pPr>
-            <a:r>
-              <a:rPr sz="1600" b="1">
-                <a:solidFill>
-                  <a:srgbClr val="0F766E"/>
-                </a:solidFill>
-                <a:latin typeface="Malgun Gothic"/>
-              </a:rPr>
-              <a:t>역할별 분리</a:t>
-            </a:r>
-          </a:p>
-        </p:txBody>
-      </p:sp>
-      <p:sp>
-        <p:nvSpPr>
-          <p:cNvPr id="13" name="TextBox 12"/>
-          <p:cNvSpPr txBox="1"/>
-          <p:nvPr/>
-        </p:nvSpPr>
-        <p:spPr>
-          <a:xfrm>
-            <a:off x="1234440" y="3374135"/>
-            <a:ext cx="10241280" cy="640080"/>
-          </a:xfrm>
-          <a:prstGeom prst="rect">
-            <a:avLst/>
-          </a:prstGeom>
-          <a:noFill/>
-        </p:spPr>
-        <p:txBody>
-          <a:bodyPr wrap="square" anchor="t">
-            <a:spAutoFit/>
-          </a:bodyPr>
-          <a:lstStyle/>
-          <a:p>
-            <a:pPr algn="l">
-              <a:lnSpc>
-                <a:spcPct val="115000"/>
-              </a:lnSpc>
-            </a:pPr>
-            <a:r>
-              <a:rPr sz="1300" b="0">
-                <a:solidFill>
-                  <a:srgbClr val="4B6259"/>
-                </a:solidFill>
-                <a:latin typeface="Malgun Gothic"/>
-              </a:rPr>
-              <a:t>고객은 루트(/, /auth, /expenses, /stats), 관리자는 /admin 하위로 완전히 분리하되 동일한 데이터 계층(js/utils.js)을 공유</a:t>
-            </a:r>
-          </a:p>
-        </p:txBody>
-      </p:sp>
-      <p:sp>
-        <p:nvSpPr>
-          <p:cNvPr id="14" name="Oval 13"/>
-          <p:cNvSpPr/>
-          <p:nvPr/>
-        </p:nvSpPr>
-        <p:spPr>
-          <a:xfrm>
-            <a:off x="640080" y="4105655"/>
-            <a:ext cx="411480" cy="411480"/>
-          </a:xfrm>
-          <a:prstGeom prst="ellipse">
-            <a:avLst/>
-          </a:prstGeom>
-          <a:solidFill>
-            <a:srgbClr val="34D399"/>
-          </a:solidFill>
-          <a:ln>
-            <a:noFill/>
-          </a:ln>
-          <a:effectLst/>
-        </p:spPr>
-        <p:style>
-          <a:lnRef idx="1">
-            <a:schemeClr val="accent1"/>
-          </a:lnRef>
-          <a:fillRef idx="3">
-            <a:schemeClr val="accent1"/>
-          </a:fillRef>
-          <a:effectRef idx="2">
-            <a:schemeClr val="accent1"/>
-          </a:effectRef>
-          <a:fontRef idx="minor">
-            <a:schemeClr val="lt1"/>
-          </a:fontRef>
-        </p:style>
-        <p:txBody>
-          <a:bodyPr rtlCol="0" anchor="ctr"/>
-          <a:lstStyle/>
-          <a:p>
-            <a:pPr algn="ctr"/>
-          </a:p>
-        </p:txBody>
-      </p:sp>
-      <p:sp>
-        <p:nvSpPr>
-          <p:cNvPr id="15" name="TextBox 14"/>
-          <p:cNvSpPr txBox="1"/>
-          <p:nvPr/>
-        </p:nvSpPr>
-        <p:spPr>
-          <a:xfrm>
-            <a:off x="640080" y="4123943"/>
-            <a:ext cx="411480" cy="365760"/>
-          </a:xfrm>
-          <a:prstGeom prst="rect">
-            <a:avLst/>
-          </a:prstGeom>
-          <a:noFill/>
-        </p:spPr>
-        <p:txBody>
-          <a:bodyPr wrap="square" anchor="t">
-            <a:spAutoFit/>
-          </a:bodyPr>
-          <a:lstStyle/>
-          <a:p>
-            <a:pPr algn="ctr">
-              <a:lnSpc>
-                <a:spcPct val="115000"/>
-              </a:lnSpc>
-            </a:pPr>
-            <a:r>
-              <a:rPr sz="1600" b="1">
-                <a:solidFill>
-                  <a:srgbClr val="FFFFFF"/>
-                </a:solidFill>
-                <a:latin typeface="Malgun Gothic"/>
-              </a:rPr>
-              <a:t>3</a:t>
-            </a:r>
-          </a:p>
-        </p:txBody>
-      </p:sp>
-      <p:sp>
-        <p:nvSpPr>
-          <p:cNvPr id="16" name="TextBox 15"/>
-          <p:cNvSpPr txBox="1"/>
-          <p:nvPr/>
-        </p:nvSpPr>
-        <p:spPr>
-          <a:xfrm>
-            <a:off x="1234440" y="4078223"/>
-            <a:ext cx="3840480" cy="457200"/>
-          </a:xfrm>
-          <a:prstGeom prst="rect">
-            <a:avLst/>
-          </a:prstGeom>
-          <a:noFill/>
-        </p:spPr>
-        <p:txBody>
-          <a:bodyPr wrap="square" anchor="t">
-            <a:spAutoFit/>
-          </a:bodyPr>
-          <a:lstStyle/>
-          <a:p>
-            <a:pPr algn="l">
-              <a:lnSpc>
-                <a:spcPct val="115000"/>
-              </a:lnSpc>
-            </a:pPr>
-            <a:r>
-              <a:rPr sz="1600" b="1">
-                <a:solidFill>
-                  <a:srgbClr val="0F766E"/>
-                </a:solidFill>
-                <a:latin typeface="Malgun Gothic"/>
-              </a:rPr>
-              <a:t>클린 URL</a:t>
-            </a:r>
-          </a:p>
-        </p:txBody>
-      </p:sp>
-      <p:sp>
-        <p:nvSpPr>
-          <p:cNvPr id="17" name="TextBox 16"/>
-          <p:cNvSpPr txBox="1"/>
-          <p:nvPr/>
-        </p:nvSpPr>
-        <p:spPr>
-          <a:xfrm>
-            <a:off x="1234440" y="4489703"/>
-            <a:ext cx="10241280" cy="640080"/>
-          </a:xfrm>
-          <a:prstGeom prst="rect">
-            <a:avLst/>
-          </a:prstGeom>
-          <a:noFill/>
-        </p:spPr>
-        <p:txBody>
-          <a:bodyPr wrap="square" anchor="t">
-            <a:spAutoFit/>
-          </a:bodyPr>
-          <a:lstStyle/>
-          <a:p>
-            <a:pPr algn="l">
-              <a:lnSpc>
-                <a:spcPct val="115000"/>
-              </a:lnSpc>
-            </a:pPr>
-            <a:r>
-              <a:rPr sz="1300" b="0">
-                <a:solidFill>
-                  <a:srgbClr val="4B6259"/>
-                </a:solidFill>
-                <a:latin typeface="Malgun Gothic"/>
-              </a:rPr>
-              <a:t>list / create / edit / index 등 목적이 드러나는 명확한 경로 설계</a:t>
-            </a:r>
-          </a:p>
-        </p:txBody>
-      </p:sp>
-      <p:sp>
-        <p:nvSpPr>
-          <p:cNvPr id="18" name="Oval 17"/>
-          <p:cNvSpPr/>
-          <p:nvPr/>
-        </p:nvSpPr>
-        <p:spPr>
-          <a:xfrm>
-            <a:off x="640080" y="5221223"/>
-            <a:ext cx="411480" cy="411480"/>
-          </a:xfrm>
-          <a:prstGeom prst="ellipse">
-            <a:avLst/>
-          </a:prstGeom>
-          <a:solidFill>
-            <a:srgbClr val="34D399"/>
-          </a:solidFill>
-          <a:ln>
-            <a:noFill/>
-          </a:ln>
-          <a:effectLst/>
-        </p:spPr>
-        <p:style>
-          <a:lnRef idx="1">
-            <a:schemeClr val="accent1"/>
-          </a:lnRef>
-          <a:fillRef idx="3">
-            <a:schemeClr val="accent1"/>
-          </a:fillRef>
-          <a:effectRef idx="2">
-            <a:schemeClr val="accent1"/>
-          </a:effectRef>
-          <a:fontRef idx="minor">
-            <a:schemeClr val="lt1"/>
-          </a:fontRef>
-        </p:style>
-        <p:txBody>
-          <a:bodyPr rtlCol="0" anchor="ctr"/>
-          <a:lstStyle/>
-          <a:p>
-            <a:pPr algn="ctr"/>
-          </a:p>
-        </p:txBody>
-      </p:sp>
-      <p:sp>
-        <p:nvSpPr>
-          <p:cNvPr id="19" name="TextBox 18"/>
-          <p:cNvSpPr txBox="1"/>
-          <p:nvPr/>
-        </p:nvSpPr>
-        <p:spPr>
-          <a:xfrm>
-            <a:off x="640080" y="5239511"/>
-            <a:ext cx="411480" cy="365760"/>
-          </a:xfrm>
-          <a:prstGeom prst="rect">
-            <a:avLst/>
-          </a:prstGeom>
-          <a:noFill/>
-        </p:spPr>
-        <p:txBody>
-          <a:bodyPr wrap="square" anchor="t">
-            <a:spAutoFit/>
-          </a:bodyPr>
-          <a:lstStyle/>
-          <a:p>
-            <a:pPr algn="ctr">
-              <a:lnSpc>
-                <a:spcPct val="115000"/>
-              </a:lnSpc>
-            </a:pPr>
-            <a:r>
-              <a:rPr sz="1600" b="1">
-                <a:solidFill>
-                  <a:srgbClr val="FFFFFF"/>
-                </a:solidFill>
-                <a:latin typeface="Malgun Gothic"/>
-              </a:rPr>
-              <a:t>4</a:t>
-            </a:r>
-          </a:p>
-        </p:txBody>
-      </p:sp>
-      <p:sp>
-        <p:nvSpPr>
-          <p:cNvPr id="20" name="TextBox 19"/>
-          <p:cNvSpPr txBox="1"/>
-          <p:nvPr/>
-        </p:nvSpPr>
-        <p:spPr>
-          <a:xfrm>
-            <a:off x="1234440" y="5193791"/>
-            <a:ext cx="3840480" cy="457200"/>
-          </a:xfrm>
-          <a:prstGeom prst="rect">
-            <a:avLst/>
-          </a:prstGeom>
-          <a:noFill/>
-        </p:spPr>
-        <p:txBody>
-          <a:bodyPr wrap="square" anchor="t">
-            <a:spAutoFit/>
-          </a:bodyPr>
-          <a:lstStyle/>
-          <a:p>
-            <a:pPr algn="l">
-              <a:lnSpc>
-                <a:spcPct val="115000"/>
-              </a:lnSpc>
-            </a:pPr>
-            <a:r>
-              <a:rPr sz="1600" b="1">
-                <a:solidFill>
-                  <a:srgbClr val="0F766E"/>
-                </a:solidFill>
-                <a:latin typeface="Malgun Gothic"/>
-              </a:rPr>
-              <a:t>고정 공통 데이터</a:t>
-            </a:r>
-          </a:p>
-        </p:txBody>
-      </p:sp>
-      <p:sp>
-        <p:nvSpPr>
-          <p:cNvPr id="21" name="TextBox 20"/>
-          <p:cNvSpPr txBox="1"/>
-          <p:nvPr/>
-        </p:nvSpPr>
-        <p:spPr>
-          <a:xfrm>
-            <a:off x="1234440" y="5605271"/>
-            <a:ext cx="10241280" cy="640080"/>
-          </a:xfrm>
-          <a:prstGeom prst="rect">
-            <a:avLst/>
-          </a:prstGeom>
-          <a:noFill/>
-        </p:spPr>
-        <p:txBody>
-          <a:bodyPr wrap="square" anchor="t">
-            <a:spAutoFit/>
-          </a:bodyPr>
-          <a:lstStyle/>
-          <a:p>
-            <a:pPr algn="l">
-              <a:lnSpc>
-                <a:spcPct val="115000"/>
-              </a:lnSpc>
-            </a:pPr>
-            <a:r>
-              <a:rPr sz="1300" b="0">
-                <a:solidFill>
-                  <a:srgbClr val="4B6259"/>
-                </a:solidFill>
-                <a:latin typeface="Malgun Gothic"/>
-              </a:rPr>
-              <a:t>카테고리는 CRUD 대상이 아닌 고정 참조 데이터로 취급해 데이터 일관성 보장</a:t>
-            </a:r>
-          </a:p>
-        </p:txBody>
-      </p:sp>
-      <p:sp>
-        <p:nvSpPr>
-          <p:cNvPr id="22" name="TextBox 21"/>
+        </p:spPr>
+      </p:pic>
+      <p:sp>
+        <p:nvSpPr>
+          <p:cNvPr id="14" name="TextBox 13"/>
           <p:cNvSpPr txBox="1"/>
           <p:nvPr/>
         </p:nvSpPr>
@@ -8396,7 +11336,7 @@
       </p:sp>
       <p:sp>
         <p:nvSpPr>
-          <p:cNvPr id="23" name="TextBox 22"/>
+          <p:cNvPr id="15" name="TextBox 14"/>
           <p:cNvSpPr txBox="1"/>
           <p:nvPr/>
         </p:nvSpPr>
@@ -8537,7 +11477,7 @@
                 </a:solidFill>
                 <a:latin typeface="Malgun Gothic"/>
               </a:rPr>
-              <a:t>DATA MODEL</a:t>
+              <a:t>TECH STACK</a:t>
             </a:r>
           </a:p>
         </p:txBody>
@@ -8576,7 +11516,7 @@
                 </a:solidFill>
                 <a:latin typeface="Malgun Gothic"/>
               </a:rPr>
-              <a:t>데이터 모델 (ERD)</a:t>
+              <a:t>기술 스택</a:t>
             </a:r>
           </a:p>
         </p:txBody>
@@ -8625,33 +11565,993 @@
           </a:p>
         </p:txBody>
       </p:sp>
-      <p:pic>
-        <p:nvPicPr>
-          <p:cNvPr id="6" name="Picture 5" descr="erd.png"/>
-          <p:cNvPicPr>
-            <a:picLocks noChangeAspect="1"/>
-          </p:cNvPicPr>
-          <p:nvPr/>
-        </p:nvPicPr>
-        <p:blipFill>
-          <a:blip r:embed="rId2"/>
-          <a:stretch>
-            <a:fillRect/>
-          </a:stretch>
-        </p:blipFill>
-        <p:spPr>
-          <a:xfrm>
-            <a:off x="4198494" y="1600200"/>
-            <a:ext cx="3855971" cy="4709160"/>
-          </a:xfrm>
-          <a:prstGeom prst="rect">
-            <a:avLst/>
-          </a:prstGeom>
-        </p:spPr>
-      </p:pic>
-      <p:sp>
-        <p:nvSpPr>
-          <p:cNvPr id="7" name="TextBox 6"/>
+      <p:sp>
+        <p:nvSpPr>
+          <p:cNvPr id="6" name="Rectangle 5"/>
+          <p:cNvSpPr/>
+          <p:nvPr/>
+        </p:nvSpPr>
+        <p:spPr>
+          <a:xfrm>
+            <a:off x="640080" y="1828800"/>
+            <a:ext cx="2606040" cy="4023360"/>
+          </a:xfrm>
+          <a:prstGeom prst="rect">
+            <a:avLst/>
+          </a:prstGeom>
+          <a:solidFill>
+            <a:srgbClr val="FFFFFF"/>
+          </a:solidFill>
+          <a:ln w="12700">
+            <a:solidFill>
+              <a:srgbClr val="DCEEE7"/>
+            </a:solidFill>
+          </a:ln>
+          <a:effectLst/>
+        </p:spPr>
+        <p:style>
+          <a:lnRef idx="1">
+            <a:schemeClr val="accent1"/>
+          </a:lnRef>
+          <a:fillRef idx="3">
+            <a:schemeClr val="accent1"/>
+          </a:fillRef>
+          <a:effectRef idx="2">
+            <a:schemeClr val="accent1"/>
+          </a:effectRef>
+          <a:fontRef idx="minor">
+            <a:schemeClr val="lt1"/>
+          </a:fontRef>
+        </p:style>
+        <p:txBody>
+          <a:bodyPr rtlCol="0" anchor="ctr"/>
+          <a:lstStyle/>
+          <a:p>
+            <a:pPr algn="ctr"/>
+          </a:p>
+        </p:txBody>
+      </p:sp>
+      <p:sp>
+        <p:nvSpPr>
+          <p:cNvPr id="7" name="Rectangle 6"/>
+          <p:cNvSpPr/>
+          <p:nvPr/>
+        </p:nvSpPr>
+        <p:spPr>
+          <a:xfrm>
+            <a:off x="640080" y="1828800"/>
+            <a:ext cx="2606040" cy="502920"/>
+          </a:xfrm>
+          <a:prstGeom prst="rect">
+            <a:avLst/>
+          </a:prstGeom>
+          <a:solidFill>
+            <a:srgbClr val="0F766E"/>
+          </a:solidFill>
+          <a:ln>
+            <a:noFill/>
+          </a:ln>
+          <a:effectLst/>
+        </p:spPr>
+        <p:style>
+          <a:lnRef idx="1">
+            <a:schemeClr val="accent1"/>
+          </a:lnRef>
+          <a:fillRef idx="3">
+            <a:schemeClr val="accent1"/>
+          </a:fillRef>
+          <a:effectRef idx="2">
+            <a:schemeClr val="accent1"/>
+          </a:effectRef>
+          <a:fontRef idx="minor">
+            <a:schemeClr val="lt1"/>
+          </a:fontRef>
+        </p:style>
+        <p:txBody>
+          <a:bodyPr rtlCol="0" anchor="ctr"/>
+          <a:lstStyle/>
+          <a:p>
+            <a:pPr algn="ctr"/>
+          </a:p>
+        </p:txBody>
+      </p:sp>
+      <p:sp>
+        <p:nvSpPr>
+          <p:cNvPr id="8" name="TextBox 7"/>
+          <p:cNvSpPr txBox="1"/>
+          <p:nvPr/>
+        </p:nvSpPr>
+        <p:spPr>
+          <a:xfrm>
+            <a:off x="640080" y="1947672"/>
+            <a:ext cx="2606040" cy="365760"/>
+          </a:xfrm>
+          <a:prstGeom prst="rect">
+            <a:avLst/>
+          </a:prstGeom>
+          <a:noFill/>
+        </p:spPr>
+        <p:txBody>
+          <a:bodyPr wrap="square" anchor="t">
+            <a:spAutoFit/>
+          </a:bodyPr>
+          <a:lstStyle/>
+          <a:p>
+            <a:pPr algn="ctr">
+              <a:lnSpc>
+                <a:spcPct val="115000"/>
+              </a:lnSpc>
+            </a:pPr>
+            <a:r>
+              <a:rPr sz="1500" b="1">
+                <a:solidFill>
+                  <a:srgbClr val="FFFFFF"/>
+                </a:solidFill>
+                <a:latin typeface="Malgun Gothic"/>
+              </a:rPr>
+              <a:t>Frontend</a:t>
+            </a:r>
+          </a:p>
+        </p:txBody>
+      </p:sp>
+      <p:sp>
+        <p:nvSpPr>
+          <p:cNvPr id="9" name="TextBox 8"/>
+          <p:cNvSpPr txBox="1"/>
+          <p:nvPr/>
+        </p:nvSpPr>
+        <p:spPr>
+          <a:xfrm>
+            <a:off x="822960" y="2560320"/>
+            <a:ext cx="2240280" cy="822960"/>
+          </a:xfrm>
+          <a:prstGeom prst="rect">
+            <a:avLst/>
+          </a:prstGeom>
+          <a:noFill/>
+        </p:spPr>
+        <p:txBody>
+          <a:bodyPr wrap="square" anchor="t">
+            <a:spAutoFit/>
+          </a:bodyPr>
+          <a:lstStyle/>
+          <a:p>
+            <a:pPr algn="l">
+              <a:lnSpc>
+                <a:spcPct val="115000"/>
+              </a:lnSpc>
+            </a:pPr>
+            <a:r>
+              <a:rPr sz="1250" b="0">
+                <a:solidFill>
+                  <a:srgbClr val="4B6259"/>
+                </a:solidFill>
+                <a:latin typeface="Malgun Gothic"/>
+              </a:rPr>
+              <a:t>• HTML5</a:t>
+            </a:r>
+          </a:p>
+        </p:txBody>
+      </p:sp>
+      <p:sp>
+        <p:nvSpPr>
+          <p:cNvPr id="10" name="TextBox 9"/>
+          <p:cNvSpPr txBox="1"/>
+          <p:nvPr/>
+        </p:nvSpPr>
+        <p:spPr>
+          <a:xfrm>
+            <a:off x="822960" y="3337560"/>
+            <a:ext cx="2240280" cy="822960"/>
+          </a:xfrm>
+          <a:prstGeom prst="rect">
+            <a:avLst/>
+          </a:prstGeom>
+          <a:noFill/>
+        </p:spPr>
+        <p:txBody>
+          <a:bodyPr wrap="square" anchor="t">
+            <a:spAutoFit/>
+          </a:bodyPr>
+          <a:lstStyle/>
+          <a:p>
+            <a:pPr algn="l">
+              <a:lnSpc>
+                <a:spcPct val="115000"/>
+              </a:lnSpc>
+            </a:pPr>
+            <a:r>
+              <a:rPr sz="1250" b="0">
+                <a:solidFill>
+                  <a:srgbClr val="4B6259"/>
+                </a:solidFill>
+                <a:latin typeface="Malgun Gothic"/>
+              </a:rPr>
+              <a:t>• CSS3 (변수 기반 디자인 시스템)</a:t>
+            </a:r>
+          </a:p>
+        </p:txBody>
+      </p:sp>
+      <p:sp>
+        <p:nvSpPr>
+          <p:cNvPr id="11" name="TextBox 10"/>
+          <p:cNvSpPr txBox="1"/>
+          <p:nvPr/>
+        </p:nvSpPr>
+        <p:spPr>
+          <a:xfrm>
+            <a:off x="822960" y="4114800"/>
+            <a:ext cx="2240280" cy="822960"/>
+          </a:xfrm>
+          <a:prstGeom prst="rect">
+            <a:avLst/>
+          </a:prstGeom>
+          <a:noFill/>
+        </p:spPr>
+        <p:txBody>
+          <a:bodyPr wrap="square" anchor="t">
+            <a:spAutoFit/>
+          </a:bodyPr>
+          <a:lstStyle/>
+          <a:p>
+            <a:pPr algn="l">
+              <a:lnSpc>
+                <a:spcPct val="115000"/>
+              </a:lnSpc>
+            </a:pPr>
+            <a:r>
+              <a:rPr sz="1250" b="0">
+                <a:solidFill>
+                  <a:srgbClr val="4B6259"/>
+                </a:solidFill>
+                <a:latin typeface="Malgun Gothic"/>
+              </a:rPr>
+              <a:t>• Vanilla JavaScript (프레임워크 없음)</a:t>
+            </a:r>
+          </a:p>
+        </p:txBody>
+      </p:sp>
+      <p:sp>
+        <p:nvSpPr>
+          <p:cNvPr id="12" name="Rectangle 11"/>
+          <p:cNvSpPr/>
+          <p:nvPr/>
+        </p:nvSpPr>
+        <p:spPr>
+          <a:xfrm>
+            <a:off x="3429000" y="1828800"/>
+            <a:ext cx="2606040" cy="4023360"/>
+          </a:xfrm>
+          <a:prstGeom prst="rect">
+            <a:avLst/>
+          </a:prstGeom>
+          <a:solidFill>
+            <a:srgbClr val="FFFFFF"/>
+          </a:solidFill>
+          <a:ln w="12700">
+            <a:solidFill>
+              <a:srgbClr val="DCEEE7"/>
+            </a:solidFill>
+          </a:ln>
+          <a:effectLst/>
+        </p:spPr>
+        <p:style>
+          <a:lnRef idx="1">
+            <a:schemeClr val="accent1"/>
+          </a:lnRef>
+          <a:fillRef idx="3">
+            <a:schemeClr val="accent1"/>
+          </a:fillRef>
+          <a:effectRef idx="2">
+            <a:schemeClr val="accent1"/>
+          </a:effectRef>
+          <a:fontRef idx="minor">
+            <a:schemeClr val="lt1"/>
+          </a:fontRef>
+        </p:style>
+        <p:txBody>
+          <a:bodyPr rtlCol="0" anchor="ctr"/>
+          <a:lstStyle/>
+          <a:p>
+            <a:pPr algn="ctr"/>
+          </a:p>
+        </p:txBody>
+      </p:sp>
+      <p:sp>
+        <p:nvSpPr>
+          <p:cNvPr id="13" name="Rectangle 12"/>
+          <p:cNvSpPr/>
+          <p:nvPr/>
+        </p:nvSpPr>
+        <p:spPr>
+          <a:xfrm>
+            <a:off x="3429000" y="1828800"/>
+            <a:ext cx="2606040" cy="502920"/>
+          </a:xfrm>
+          <a:prstGeom prst="rect">
+            <a:avLst/>
+          </a:prstGeom>
+          <a:solidFill>
+            <a:srgbClr val="0F766E"/>
+          </a:solidFill>
+          <a:ln>
+            <a:noFill/>
+          </a:ln>
+          <a:effectLst/>
+        </p:spPr>
+        <p:style>
+          <a:lnRef idx="1">
+            <a:schemeClr val="accent1"/>
+          </a:lnRef>
+          <a:fillRef idx="3">
+            <a:schemeClr val="accent1"/>
+          </a:fillRef>
+          <a:effectRef idx="2">
+            <a:schemeClr val="accent1"/>
+          </a:effectRef>
+          <a:fontRef idx="minor">
+            <a:schemeClr val="lt1"/>
+          </a:fontRef>
+        </p:style>
+        <p:txBody>
+          <a:bodyPr rtlCol="0" anchor="ctr"/>
+          <a:lstStyle/>
+          <a:p>
+            <a:pPr algn="ctr"/>
+          </a:p>
+        </p:txBody>
+      </p:sp>
+      <p:sp>
+        <p:nvSpPr>
+          <p:cNvPr id="14" name="TextBox 13"/>
+          <p:cNvSpPr txBox="1"/>
+          <p:nvPr/>
+        </p:nvSpPr>
+        <p:spPr>
+          <a:xfrm>
+            <a:off x="3429000" y="1947672"/>
+            <a:ext cx="2606040" cy="365760"/>
+          </a:xfrm>
+          <a:prstGeom prst="rect">
+            <a:avLst/>
+          </a:prstGeom>
+          <a:noFill/>
+        </p:spPr>
+        <p:txBody>
+          <a:bodyPr wrap="square" anchor="t">
+            <a:spAutoFit/>
+          </a:bodyPr>
+          <a:lstStyle/>
+          <a:p>
+            <a:pPr algn="ctr">
+              <a:lnSpc>
+                <a:spcPct val="115000"/>
+              </a:lnSpc>
+            </a:pPr>
+            <a:r>
+              <a:rPr sz="1500" b="1">
+                <a:solidFill>
+                  <a:srgbClr val="FFFFFF"/>
+                </a:solidFill>
+                <a:latin typeface="Malgun Gothic"/>
+              </a:rPr>
+              <a:t>Backend &amp; DB</a:t>
+            </a:r>
+          </a:p>
+        </p:txBody>
+      </p:sp>
+      <p:sp>
+        <p:nvSpPr>
+          <p:cNvPr id="15" name="TextBox 14"/>
+          <p:cNvSpPr txBox="1"/>
+          <p:nvPr/>
+        </p:nvSpPr>
+        <p:spPr>
+          <a:xfrm>
+            <a:off x="3611880" y="2560320"/>
+            <a:ext cx="2240280" cy="822960"/>
+          </a:xfrm>
+          <a:prstGeom prst="rect">
+            <a:avLst/>
+          </a:prstGeom>
+          <a:noFill/>
+        </p:spPr>
+        <p:txBody>
+          <a:bodyPr wrap="square" anchor="t">
+            <a:spAutoFit/>
+          </a:bodyPr>
+          <a:lstStyle/>
+          <a:p>
+            <a:pPr algn="l">
+              <a:lnSpc>
+                <a:spcPct val="115000"/>
+              </a:lnSpc>
+            </a:pPr>
+            <a:r>
+              <a:rPr sz="1250" b="0">
+                <a:solidFill>
+                  <a:srgbClr val="4B6259"/>
+                </a:solidFill>
+                <a:latin typeface="Malgun Gothic"/>
+              </a:rPr>
+              <a:t>• Supabase (PostgreSQL 17)</a:t>
+            </a:r>
+          </a:p>
+        </p:txBody>
+      </p:sp>
+      <p:sp>
+        <p:nvSpPr>
+          <p:cNvPr id="16" name="TextBox 15"/>
+          <p:cNvSpPr txBox="1"/>
+          <p:nvPr/>
+        </p:nvSpPr>
+        <p:spPr>
+          <a:xfrm>
+            <a:off x="3611880" y="3337560"/>
+            <a:ext cx="2240280" cy="822960"/>
+          </a:xfrm>
+          <a:prstGeom prst="rect">
+            <a:avLst/>
+          </a:prstGeom>
+          <a:noFill/>
+        </p:spPr>
+        <p:txBody>
+          <a:bodyPr wrap="square" anchor="t">
+            <a:spAutoFit/>
+          </a:bodyPr>
+          <a:lstStyle/>
+          <a:p>
+            <a:pPr algn="l">
+              <a:lnSpc>
+                <a:spcPct val="115000"/>
+              </a:lnSpc>
+            </a:pPr>
+            <a:r>
+              <a:rPr sz="1250" b="0">
+                <a:solidFill>
+                  <a:srgbClr val="4B6259"/>
+                </a:solidFill>
+                <a:latin typeface="Malgun Gothic"/>
+              </a:rPr>
+              <a:t>• Supabase Auth</a:t>
+            </a:r>
+          </a:p>
+        </p:txBody>
+      </p:sp>
+      <p:sp>
+        <p:nvSpPr>
+          <p:cNvPr id="17" name="TextBox 16"/>
+          <p:cNvSpPr txBox="1"/>
+          <p:nvPr/>
+        </p:nvSpPr>
+        <p:spPr>
+          <a:xfrm>
+            <a:off x="3611880" y="4114800"/>
+            <a:ext cx="2240280" cy="822960"/>
+          </a:xfrm>
+          <a:prstGeom prst="rect">
+            <a:avLst/>
+          </a:prstGeom>
+          <a:noFill/>
+        </p:spPr>
+        <p:txBody>
+          <a:bodyPr wrap="square" anchor="t">
+            <a:spAutoFit/>
+          </a:bodyPr>
+          <a:lstStyle/>
+          <a:p>
+            <a:pPr algn="l">
+              <a:lnSpc>
+                <a:spcPct val="115000"/>
+              </a:lnSpc>
+            </a:pPr>
+            <a:r>
+              <a:rPr sz="1250" b="0">
+                <a:solidFill>
+                  <a:srgbClr val="4B6259"/>
+                </a:solidFill>
+                <a:latin typeface="Malgun Gothic"/>
+              </a:rPr>
+              <a:t>• Row Level Security</a:t>
+            </a:r>
+          </a:p>
+        </p:txBody>
+      </p:sp>
+      <p:sp>
+        <p:nvSpPr>
+          <p:cNvPr id="18" name="Rectangle 17"/>
+          <p:cNvSpPr/>
+          <p:nvPr/>
+        </p:nvSpPr>
+        <p:spPr>
+          <a:xfrm>
+            <a:off x="6217920" y="1828800"/>
+            <a:ext cx="2606040" cy="4023360"/>
+          </a:xfrm>
+          <a:prstGeom prst="rect">
+            <a:avLst/>
+          </a:prstGeom>
+          <a:solidFill>
+            <a:srgbClr val="FFFFFF"/>
+          </a:solidFill>
+          <a:ln w="12700">
+            <a:solidFill>
+              <a:srgbClr val="DCEEE7"/>
+            </a:solidFill>
+          </a:ln>
+          <a:effectLst/>
+        </p:spPr>
+        <p:style>
+          <a:lnRef idx="1">
+            <a:schemeClr val="accent1"/>
+          </a:lnRef>
+          <a:fillRef idx="3">
+            <a:schemeClr val="accent1"/>
+          </a:fillRef>
+          <a:effectRef idx="2">
+            <a:schemeClr val="accent1"/>
+          </a:effectRef>
+          <a:fontRef idx="minor">
+            <a:schemeClr val="lt1"/>
+          </a:fontRef>
+        </p:style>
+        <p:txBody>
+          <a:bodyPr rtlCol="0" anchor="ctr"/>
+          <a:lstStyle/>
+          <a:p>
+            <a:pPr algn="ctr"/>
+          </a:p>
+        </p:txBody>
+      </p:sp>
+      <p:sp>
+        <p:nvSpPr>
+          <p:cNvPr id="19" name="Rectangle 18"/>
+          <p:cNvSpPr/>
+          <p:nvPr/>
+        </p:nvSpPr>
+        <p:spPr>
+          <a:xfrm>
+            <a:off x="6217920" y="1828800"/>
+            <a:ext cx="2606040" cy="502920"/>
+          </a:xfrm>
+          <a:prstGeom prst="rect">
+            <a:avLst/>
+          </a:prstGeom>
+          <a:solidFill>
+            <a:srgbClr val="0F766E"/>
+          </a:solidFill>
+          <a:ln>
+            <a:noFill/>
+          </a:ln>
+          <a:effectLst/>
+        </p:spPr>
+        <p:style>
+          <a:lnRef idx="1">
+            <a:schemeClr val="accent1"/>
+          </a:lnRef>
+          <a:fillRef idx="3">
+            <a:schemeClr val="accent1"/>
+          </a:fillRef>
+          <a:effectRef idx="2">
+            <a:schemeClr val="accent1"/>
+          </a:effectRef>
+          <a:fontRef idx="minor">
+            <a:schemeClr val="lt1"/>
+          </a:fontRef>
+        </p:style>
+        <p:txBody>
+          <a:bodyPr rtlCol="0" anchor="ctr"/>
+          <a:lstStyle/>
+          <a:p>
+            <a:pPr algn="ctr"/>
+          </a:p>
+        </p:txBody>
+      </p:sp>
+      <p:sp>
+        <p:nvSpPr>
+          <p:cNvPr id="20" name="TextBox 19"/>
+          <p:cNvSpPr txBox="1"/>
+          <p:nvPr/>
+        </p:nvSpPr>
+        <p:spPr>
+          <a:xfrm>
+            <a:off x="6217920" y="1947672"/>
+            <a:ext cx="2606040" cy="365760"/>
+          </a:xfrm>
+          <a:prstGeom prst="rect">
+            <a:avLst/>
+          </a:prstGeom>
+          <a:noFill/>
+        </p:spPr>
+        <p:txBody>
+          <a:bodyPr wrap="square" anchor="t">
+            <a:spAutoFit/>
+          </a:bodyPr>
+          <a:lstStyle/>
+          <a:p>
+            <a:pPr algn="ctr">
+              <a:lnSpc>
+                <a:spcPct val="115000"/>
+              </a:lnSpc>
+            </a:pPr>
+            <a:r>
+              <a:rPr sz="1500" b="1">
+                <a:solidFill>
+                  <a:srgbClr val="FFFFFF"/>
+                </a:solidFill>
+                <a:latin typeface="Malgun Gothic"/>
+              </a:rPr>
+              <a:t>협업 &amp; 배포</a:t>
+            </a:r>
+          </a:p>
+        </p:txBody>
+      </p:sp>
+      <p:sp>
+        <p:nvSpPr>
+          <p:cNvPr id="21" name="TextBox 20"/>
+          <p:cNvSpPr txBox="1"/>
+          <p:nvPr/>
+        </p:nvSpPr>
+        <p:spPr>
+          <a:xfrm>
+            <a:off x="6400800" y="2560320"/>
+            <a:ext cx="2240280" cy="822960"/>
+          </a:xfrm>
+          <a:prstGeom prst="rect">
+            <a:avLst/>
+          </a:prstGeom>
+          <a:noFill/>
+        </p:spPr>
+        <p:txBody>
+          <a:bodyPr wrap="square" anchor="t">
+            <a:spAutoFit/>
+          </a:bodyPr>
+          <a:lstStyle/>
+          <a:p>
+            <a:pPr algn="l">
+              <a:lnSpc>
+                <a:spcPct val="115000"/>
+              </a:lnSpc>
+            </a:pPr>
+            <a:r>
+              <a:rPr sz="1250" b="0">
+                <a:solidFill>
+                  <a:srgbClr val="4B6259"/>
+                </a:solidFill>
+                <a:latin typeface="Malgun Gothic"/>
+              </a:rPr>
+              <a:t>• Git / GitHub</a:t>
+            </a:r>
+          </a:p>
+        </p:txBody>
+      </p:sp>
+      <p:sp>
+        <p:nvSpPr>
+          <p:cNvPr id="22" name="TextBox 21"/>
+          <p:cNvSpPr txBox="1"/>
+          <p:nvPr/>
+        </p:nvSpPr>
+        <p:spPr>
+          <a:xfrm>
+            <a:off x="6400800" y="3337560"/>
+            <a:ext cx="2240280" cy="822960"/>
+          </a:xfrm>
+          <a:prstGeom prst="rect">
+            <a:avLst/>
+          </a:prstGeom>
+          <a:noFill/>
+        </p:spPr>
+        <p:txBody>
+          <a:bodyPr wrap="square" anchor="t">
+            <a:spAutoFit/>
+          </a:bodyPr>
+          <a:lstStyle/>
+          <a:p>
+            <a:pPr algn="l">
+              <a:lnSpc>
+                <a:spcPct val="115000"/>
+              </a:lnSpc>
+            </a:pPr>
+            <a:r>
+              <a:rPr sz="1250" b="0">
+                <a:solidFill>
+                  <a:srgbClr val="4B6259"/>
+                </a:solidFill>
+                <a:latin typeface="Malgun Gothic"/>
+              </a:rPr>
+              <a:t>• GitHub CLI (gh)</a:t>
+            </a:r>
+          </a:p>
+        </p:txBody>
+      </p:sp>
+      <p:sp>
+        <p:nvSpPr>
+          <p:cNvPr id="23" name="TextBox 22"/>
+          <p:cNvSpPr txBox="1"/>
+          <p:nvPr/>
+        </p:nvSpPr>
+        <p:spPr>
+          <a:xfrm>
+            <a:off x="6400800" y="4114800"/>
+            <a:ext cx="2240280" cy="822960"/>
+          </a:xfrm>
+          <a:prstGeom prst="rect">
+            <a:avLst/>
+          </a:prstGeom>
+          <a:noFill/>
+        </p:spPr>
+        <p:txBody>
+          <a:bodyPr wrap="square" anchor="t">
+            <a:spAutoFit/>
+          </a:bodyPr>
+          <a:lstStyle/>
+          <a:p>
+            <a:pPr algn="l">
+              <a:lnSpc>
+                <a:spcPct val="115000"/>
+              </a:lnSpc>
+            </a:pPr>
+            <a:r>
+              <a:rPr sz="1250" b="0">
+                <a:solidFill>
+                  <a:srgbClr val="4B6259"/>
+                </a:solidFill>
+                <a:latin typeface="Malgun Gothic"/>
+              </a:rPr>
+              <a:t>• PR 기반 브랜치 전략</a:t>
+            </a:r>
+          </a:p>
+        </p:txBody>
+      </p:sp>
+      <p:sp>
+        <p:nvSpPr>
+          <p:cNvPr id="24" name="Rectangle 23"/>
+          <p:cNvSpPr/>
+          <p:nvPr/>
+        </p:nvSpPr>
+        <p:spPr>
+          <a:xfrm>
+            <a:off x="9006840" y="1828800"/>
+            <a:ext cx="2606040" cy="4023360"/>
+          </a:xfrm>
+          <a:prstGeom prst="rect">
+            <a:avLst/>
+          </a:prstGeom>
+          <a:solidFill>
+            <a:srgbClr val="FFFFFF"/>
+          </a:solidFill>
+          <a:ln w="12700">
+            <a:solidFill>
+              <a:srgbClr val="DCEEE7"/>
+            </a:solidFill>
+          </a:ln>
+          <a:effectLst/>
+        </p:spPr>
+        <p:style>
+          <a:lnRef idx="1">
+            <a:schemeClr val="accent1"/>
+          </a:lnRef>
+          <a:fillRef idx="3">
+            <a:schemeClr val="accent1"/>
+          </a:fillRef>
+          <a:effectRef idx="2">
+            <a:schemeClr val="accent1"/>
+          </a:effectRef>
+          <a:fontRef idx="minor">
+            <a:schemeClr val="lt1"/>
+          </a:fontRef>
+        </p:style>
+        <p:txBody>
+          <a:bodyPr rtlCol="0" anchor="ctr"/>
+          <a:lstStyle/>
+          <a:p>
+            <a:pPr algn="ctr"/>
+          </a:p>
+        </p:txBody>
+      </p:sp>
+      <p:sp>
+        <p:nvSpPr>
+          <p:cNvPr id="25" name="Rectangle 24"/>
+          <p:cNvSpPr/>
+          <p:nvPr/>
+        </p:nvSpPr>
+        <p:spPr>
+          <a:xfrm>
+            <a:off x="9006840" y="1828800"/>
+            <a:ext cx="2606040" cy="502920"/>
+          </a:xfrm>
+          <a:prstGeom prst="rect">
+            <a:avLst/>
+          </a:prstGeom>
+          <a:solidFill>
+            <a:srgbClr val="0F766E"/>
+          </a:solidFill>
+          <a:ln>
+            <a:noFill/>
+          </a:ln>
+          <a:effectLst/>
+        </p:spPr>
+        <p:style>
+          <a:lnRef idx="1">
+            <a:schemeClr val="accent1"/>
+          </a:lnRef>
+          <a:fillRef idx="3">
+            <a:schemeClr val="accent1"/>
+          </a:fillRef>
+          <a:effectRef idx="2">
+            <a:schemeClr val="accent1"/>
+          </a:effectRef>
+          <a:fontRef idx="minor">
+            <a:schemeClr val="lt1"/>
+          </a:fontRef>
+        </p:style>
+        <p:txBody>
+          <a:bodyPr rtlCol="0" anchor="ctr"/>
+          <a:lstStyle/>
+          <a:p>
+            <a:pPr algn="ctr"/>
+          </a:p>
+        </p:txBody>
+      </p:sp>
+      <p:sp>
+        <p:nvSpPr>
+          <p:cNvPr id="26" name="TextBox 25"/>
+          <p:cNvSpPr txBox="1"/>
+          <p:nvPr/>
+        </p:nvSpPr>
+        <p:spPr>
+          <a:xfrm>
+            <a:off x="9006840" y="1947672"/>
+            <a:ext cx="2606040" cy="365760"/>
+          </a:xfrm>
+          <a:prstGeom prst="rect">
+            <a:avLst/>
+          </a:prstGeom>
+          <a:noFill/>
+        </p:spPr>
+        <p:txBody>
+          <a:bodyPr wrap="square" anchor="t">
+            <a:spAutoFit/>
+          </a:bodyPr>
+          <a:lstStyle/>
+          <a:p>
+            <a:pPr algn="ctr">
+              <a:lnSpc>
+                <a:spcPct val="115000"/>
+              </a:lnSpc>
+            </a:pPr>
+            <a:r>
+              <a:rPr sz="1500" b="1">
+                <a:solidFill>
+                  <a:srgbClr val="FFFFFF"/>
+                </a:solidFill>
+                <a:latin typeface="Malgun Gothic"/>
+              </a:rPr>
+              <a:t>검증 &amp; 문서화</a:t>
+            </a:r>
+          </a:p>
+        </p:txBody>
+      </p:sp>
+      <p:sp>
+        <p:nvSpPr>
+          <p:cNvPr id="27" name="TextBox 26"/>
+          <p:cNvSpPr txBox="1"/>
+          <p:nvPr/>
+        </p:nvSpPr>
+        <p:spPr>
+          <a:xfrm>
+            <a:off x="9189720" y="2560320"/>
+            <a:ext cx="2240280" cy="822960"/>
+          </a:xfrm>
+          <a:prstGeom prst="rect">
+            <a:avLst/>
+          </a:prstGeom>
+          <a:noFill/>
+        </p:spPr>
+        <p:txBody>
+          <a:bodyPr wrap="square" anchor="t">
+            <a:spAutoFit/>
+          </a:bodyPr>
+          <a:lstStyle/>
+          <a:p>
+            <a:pPr algn="l">
+              <a:lnSpc>
+                <a:spcPct val="115000"/>
+              </a:lnSpc>
+            </a:pPr>
+            <a:r>
+              <a:rPr sz="1250" b="0">
+                <a:solidFill>
+                  <a:srgbClr val="4B6259"/>
+                </a:solidFill>
+                <a:latin typeface="Malgun Gothic"/>
+              </a:rPr>
+              <a:t>• Playwright (E2E 검증)</a:t>
+            </a:r>
+          </a:p>
+        </p:txBody>
+      </p:sp>
+      <p:sp>
+        <p:nvSpPr>
+          <p:cNvPr id="28" name="TextBox 27"/>
+          <p:cNvSpPr txBox="1"/>
+          <p:nvPr/>
+        </p:nvSpPr>
+        <p:spPr>
+          <a:xfrm>
+            <a:off x="9189720" y="3337560"/>
+            <a:ext cx="2240280" cy="822960"/>
+          </a:xfrm>
+          <a:prstGeom prst="rect">
+            <a:avLst/>
+          </a:prstGeom>
+          <a:noFill/>
+        </p:spPr>
+        <p:txBody>
+          <a:bodyPr wrap="square" anchor="t">
+            <a:spAutoFit/>
+          </a:bodyPr>
+          <a:lstStyle/>
+          <a:p>
+            <a:pPr algn="l">
+              <a:lnSpc>
+                <a:spcPct val="115000"/>
+              </a:lnSpc>
+            </a:pPr>
+            <a:r>
+              <a:rPr sz="1250" b="0">
+                <a:solidFill>
+                  <a:srgbClr val="4B6259"/>
+                </a:solidFill>
+                <a:latin typeface="Malgun Gothic"/>
+              </a:rPr>
+              <a:t>• python-pptx (발표자료 자동화)</a:t>
+            </a:r>
+          </a:p>
+        </p:txBody>
+      </p:sp>
+      <p:sp>
+        <p:nvSpPr>
+          <p:cNvPr id="29" name="TextBox 28"/>
+          <p:cNvSpPr txBox="1"/>
+          <p:nvPr/>
+        </p:nvSpPr>
+        <p:spPr>
+          <a:xfrm>
+            <a:off x="9189720" y="4114800"/>
+            <a:ext cx="2240280" cy="822960"/>
+          </a:xfrm>
+          <a:prstGeom prst="rect">
+            <a:avLst/>
+          </a:prstGeom>
+          <a:noFill/>
+        </p:spPr>
+        <p:txBody>
+          <a:bodyPr wrap="square" anchor="t">
+            <a:spAutoFit/>
+          </a:bodyPr>
+          <a:lstStyle/>
+          <a:p>
+            <a:pPr algn="l">
+              <a:lnSpc>
+                <a:spcPct val="115000"/>
+              </a:lnSpc>
+            </a:pPr>
+            <a:r>
+              <a:rPr sz="1250" b="0">
+                <a:solidFill>
+                  <a:srgbClr val="4B6259"/>
+                </a:solidFill>
+                <a:latin typeface="Malgun Gothic"/>
+              </a:rPr>
+              <a:t>• Mermaid (ERD 다이어그램)</a:t>
+            </a:r>
+          </a:p>
+        </p:txBody>
+      </p:sp>
+      <p:sp>
+        <p:nvSpPr>
+          <p:cNvPr id="30" name="TextBox 29"/>
           <p:cNvSpPr txBox="1"/>
           <p:nvPr/>
         </p:nvSpPr>
@@ -8690,7 +12590,7 @@
       </p:sp>
       <p:sp>
         <p:nvSpPr>
-          <p:cNvPr id="8" name="TextBox 7"/>
+          <p:cNvPr id="31" name="TextBox 30"/>
           <p:cNvSpPr txBox="1"/>
           <p:nvPr/>
         </p:nvSpPr>
@@ -8831,7 +12731,7 @@
                 </a:solidFill>
                 <a:latin typeface="Malgun Gothic"/>
               </a:rPr>
-              <a:t>TECH EVOLUTION</a:t>
+              <a:t>ARCHITECTURE</a:t>
             </a:r>
           </a:p>
         </p:txBody>
@@ -8870,7 +12770,7 @@
                 </a:solidFill>
                 <a:latin typeface="Malgun Gothic"/>
               </a:rPr>
-              <a:t>localStorage → Supabase</a:t>
+              <a:t>설계 원칙</a:t>
             </a:r>
           </a:p>
         </p:txBody>
@@ -8921,422 +12821,16 @@
       </p:sp>
       <p:sp>
         <p:nvSpPr>
-          <p:cNvPr id="6" name="Rectangle 5"/>
+          <p:cNvPr id="6" name="Oval 5"/>
           <p:cNvSpPr/>
           <p:nvPr/>
         </p:nvSpPr>
         <p:spPr>
           <a:xfrm>
-            <a:off x="640080" y="2011680"/>
-            <a:ext cx="4937760" cy="3291840"/>
-          </a:xfrm>
-          <a:prstGeom prst="rect">
-            <a:avLst/>
-          </a:prstGeom>
-          <a:solidFill>
-            <a:srgbClr val="FFFFFF"/>
-          </a:solidFill>
-          <a:ln w="12700">
-            <a:solidFill>
-              <a:srgbClr val="DCEEE7"/>
-            </a:solidFill>
-          </a:ln>
-          <a:effectLst/>
-        </p:spPr>
-        <p:style>
-          <a:lnRef idx="1">
-            <a:schemeClr val="accent1"/>
-          </a:lnRef>
-          <a:fillRef idx="3">
-            <a:schemeClr val="accent1"/>
-          </a:fillRef>
-          <a:effectRef idx="2">
-            <a:schemeClr val="accent1"/>
-          </a:effectRef>
-          <a:fontRef idx="minor">
-            <a:schemeClr val="lt1"/>
-          </a:fontRef>
-        </p:style>
-        <p:txBody>
-          <a:bodyPr rtlCol="0" anchor="ctr"/>
-          <a:lstStyle/>
-          <a:p>
-            <a:pPr algn="ctr"/>
-          </a:p>
-        </p:txBody>
-      </p:sp>
-      <p:sp>
-        <p:nvSpPr>
-          <p:cNvPr id="7" name="TextBox 6"/>
-          <p:cNvSpPr txBox="1"/>
-          <p:nvPr/>
-        </p:nvSpPr>
-        <p:spPr>
-          <a:xfrm>
-            <a:off x="914400" y="2240280"/>
-            <a:ext cx="4389120" cy="365760"/>
-          </a:xfrm>
-          <a:prstGeom prst="rect">
-            <a:avLst/>
-          </a:prstGeom>
-          <a:noFill/>
-        </p:spPr>
-        <p:txBody>
-          <a:bodyPr wrap="square" anchor="t">
-            <a:spAutoFit/>
-          </a:bodyPr>
-          <a:lstStyle/>
-          <a:p>
-            <a:pPr algn="l">
-              <a:lnSpc>
-                <a:spcPct val="115000"/>
-              </a:lnSpc>
-            </a:pPr>
-            <a:r>
-              <a:rPr sz="1300" b="1">
-                <a:solidFill>
-                  <a:srgbClr val="6E8880"/>
-                </a:solidFill>
-                <a:latin typeface="Malgun Gothic"/>
-              </a:rPr>
-              <a:t>BEFORE</a:t>
-            </a:r>
-          </a:p>
-        </p:txBody>
-      </p:sp>
-      <p:sp>
-        <p:nvSpPr>
-          <p:cNvPr id="8" name="TextBox 7"/>
-          <p:cNvSpPr txBox="1"/>
-          <p:nvPr/>
-        </p:nvSpPr>
-        <p:spPr>
-          <a:xfrm>
-            <a:off x="914400" y="2606040"/>
-            <a:ext cx="4389120" cy="457200"/>
-          </a:xfrm>
-          <a:prstGeom prst="rect">
-            <a:avLst/>
-          </a:prstGeom>
-          <a:noFill/>
-        </p:spPr>
-        <p:txBody>
-          <a:bodyPr wrap="square" anchor="t">
-            <a:spAutoFit/>
-          </a:bodyPr>
-          <a:lstStyle/>
-          <a:p>
-            <a:pPr algn="l">
-              <a:lnSpc>
-                <a:spcPct val="115000"/>
-              </a:lnSpc>
-            </a:pPr>
-            <a:r>
-              <a:rPr sz="1800" b="1">
-                <a:solidFill>
-                  <a:srgbClr val="1F2E2A"/>
-                </a:solidFill>
-                <a:latin typeface="Malgun Gothic"/>
-              </a:rPr>
-              <a:t>정적 사이트 + localStorage</a:t>
-            </a:r>
-          </a:p>
-        </p:txBody>
-      </p:sp>
-      <p:sp>
-        <p:nvSpPr>
-          <p:cNvPr id="9" name="TextBox 8"/>
-          <p:cNvSpPr txBox="1"/>
-          <p:nvPr/>
-        </p:nvSpPr>
-        <p:spPr>
-          <a:xfrm>
-            <a:off x="914400" y="3154680"/>
-            <a:ext cx="4389120" cy="2011680"/>
-          </a:xfrm>
-          <a:prstGeom prst="rect">
-            <a:avLst/>
-          </a:prstGeom>
-          <a:noFill/>
-        </p:spPr>
-        <p:txBody>
-          <a:bodyPr wrap="square">
-            <a:spAutoFit/>
-          </a:bodyPr>
-          <a:lstStyle/>
-          <a:p>
-            <a:pPr>
-              <a:lnSpc>
-                <a:spcPct val="120000"/>
-              </a:lnSpc>
-              <a:spcAft>
-                <a:spcPts val="1000"/>
-              </a:spcAft>
-            </a:pPr>
-            <a:r>
-              <a:rPr sz="1400" b="0">
-                <a:solidFill>
-                  <a:srgbClr val="1F2E2A"/>
-                </a:solidFill>
-                <a:latin typeface="Malgun Gothic"/>
-              </a:rPr>
-              <a:t>•  백엔드 서버 없이 브라우저에 데이터 저장</a:t>
-            </a:r>
-          </a:p>
-          <a:p>
-            <a:pPr>
-              <a:lnSpc>
-                <a:spcPct val="120000"/>
-              </a:lnSpc>
-              <a:spcAft>
-                <a:spcPts val="1000"/>
-              </a:spcAft>
-            </a:pPr>
-            <a:r>
-              <a:rPr sz="1400" b="0">
-                <a:solidFill>
-                  <a:srgbClr val="1F2E2A"/>
-                </a:solidFill>
-                <a:latin typeface="Malgun Gothic"/>
-              </a:rPr>
-              <a:t>•  비밀번호까지 평문으로 저장 (데모 목적)</a:t>
-            </a:r>
-          </a:p>
-          <a:p>
-            <a:pPr>
-              <a:lnSpc>
-                <a:spcPct val="120000"/>
-              </a:lnSpc>
-              <a:spcAft>
-                <a:spcPts val="1000"/>
-              </a:spcAft>
-            </a:pPr>
-            <a:r>
-              <a:rPr sz="1400" b="0">
-                <a:solidFill>
-                  <a:srgbClr val="1F2E2A"/>
-                </a:solidFill>
-                <a:latin typeface="Malgun Gothic"/>
-              </a:rPr>
-              <a:t>•  브라우저·기기 간 데이터 공유 불가</a:t>
-            </a:r>
-          </a:p>
-        </p:txBody>
-      </p:sp>
-      <p:sp>
-        <p:nvSpPr>
-          <p:cNvPr id="10" name="Rectangle 9"/>
-          <p:cNvSpPr/>
-          <p:nvPr/>
-        </p:nvSpPr>
-        <p:spPr>
-          <a:xfrm>
-            <a:off x="6583680" y="2011680"/>
-            <a:ext cx="4937760" cy="3291840"/>
-          </a:xfrm>
-          <a:prstGeom prst="rect">
-            <a:avLst/>
-          </a:prstGeom>
-          <a:solidFill>
-            <a:srgbClr val="0F766E"/>
-          </a:solidFill>
-          <a:ln>
-            <a:noFill/>
-          </a:ln>
-          <a:effectLst/>
-        </p:spPr>
-        <p:style>
-          <a:lnRef idx="1">
-            <a:schemeClr val="accent1"/>
-          </a:lnRef>
-          <a:fillRef idx="3">
-            <a:schemeClr val="accent1"/>
-          </a:fillRef>
-          <a:effectRef idx="2">
-            <a:schemeClr val="accent1"/>
-          </a:effectRef>
-          <a:fontRef idx="minor">
-            <a:schemeClr val="lt1"/>
-          </a:fontRef>
-        </p:style>
-        <p:txBody>
-          <a:bodyPr rtlCol="0" anchor="ctr"/>
-          <a:lstStyle/>
-          <a:p>
-            <a:pPr algn="ctr"/>
-          </a:p>
-        </p:txBody>
-      </p:sp>
-      <p:sp>
-        <p:nvSpPr>
-          <p:cNvPr id="11" name="TextBox 10"/>
-          <p:cNvSpPr txBox="1"/>
-          <p:nvPr/>
-        </p:nvSpPr>
-        <p:spPr>
-          <a:xfrm>
-            <a:off x="6858000" y="2240280"/>
-            <a:ext cx="4389120" cy="365760"/>
-          </a:xfrm>
-          <a:prstGeom prst="rect">
-            <a:avLst/>
-          </a:prstGeom>
-          <a:noFill/>
-        </p:spPr>
-        <p:txBody>
-          <a:bodyPr wrap="square" anchor="t">
-            <a:spAutoFit/>
-          </a:bodyPr>
-          <a:lstStyle/>
-          <a:p>
-            <a:pPr algn="l">
-              <a:lnSpc>
-                <a:spcPct val="115000"/>
-              </a:lnSpc>
-            </a:pPr>
-            <a:r>
-              <a:rPr sz="1300" b="1">
-                <a:solidFill>
-                  <a:srgbClr val="34D399"/>
-                </a:solidFill>
-                <a:latin typeface="Malgun Gothic"/>
-              </a:rPr>
-              <a:t>AFTER</a:t>
-            </a:r>
-          </a:p>
-        </p:txBody>
-      </p:sp>
-      <p:sp>
-        <p:nvSpPr>
-          <p:cNvPr id="12" name="TextBox 11"/>
-          <p:cNvSpPr txBox="1"/>
-          <p:nvPr/>
-        </p:nvSpPr>
-        <p:spPr>
-          <a:xfrm>
-            <a:off x="6858000" y="2606040"/>
-            <a:ext cx="4389120" cy="457200"/>
-          </a:xfrm>
-          <a:prstGeom prst="rect">
-            <a:avLst/>
-          </a:prstGeom>
-          <a:noFill/>
-        </p:spPr>
-        <p:txBody>
-          <a:bodyPr wrap="square" anchor="t">
-            <a:spAutoFit/>
-          </a:bodyPr>
-          <a:lstStyle/>
-          <a:p>
-            <a:pPr algn="l">
-              <a:lnSpc>
-                <a:spcPct val="115000"/>
-              </a:lnSpc>
-            </a:pPr>
-            <a:r>
-              <a:rPr sz="1800" b="1">
-                <a:solidFill>
-                  <a:srgbClr val="FFFFFF"/>
-                </a:solidFill>
-                <a:latin typeface="Malgun Gothic"/>
-              </a:rPr>
-              <a:t>Supabase (PostgreSQL)</a:t>
-            </a:r>
-          </a:p>
-        </p:txBody>
-      </p:sp>
-      <p:sp>
-        <p:nvSpPr>
-          <p:cNvPr id="13" name="TextBox 12"/>
-          <p:cNvSpPr txBox="1"/>
-          <p:nvPr/>
-        </p:nvSpPr>
-        <p:spPr>
-          <a:xfrm>
-            <a:off x="6858000" y="3154680"/>
-            <a:ext cx="4389120" cy="2011680"/>
-          </a:xfrm>
-          <a:prstGeom prst="rect">
-            <a:avLst/>
-          </a:prstGeom>
-          <a:noFill/>
-        </p:spPr>
-        <p:txBody>
-          <a:bodyPr wrap="square">
-            <a:spAutoFit/>
-          </a:bodyPr>
-          <a:lstStyle/>
-          <a:p>
-            <a:pPr>
-              <a:lnSpc>
-                <a:spcPct val="120000"/>
-              </a:lnSpc>
-              <a:spcAft>
-                <a:spcPts val="1000"/>
-              </a:spcAft>
-            </a:pPr>
-            <a:r>
-              <a:rPr sz="1400" b="0">
-                <a:solidFill>
-                  <a:srgbClr val="E8F6F1"/>
-                </a:solidFill>
-                <a:latin typeface="Malgun Gothic"/>
-              </a:rPr>
-              <a:t>•  Supabase Auth로 인증 위임 (평문 비밀번호 제거)</a:t>
-            </a:r>
-          </a:p>
-          <a:p>
-            <a:pPr>
-              <a:lnSpc>
-                <a:spcPct val="120000"/>
-              </a:lnSpc>
-              <a:spcAft>
-                <a:spcPts val="1000"/>
-              </a:spcAft>
-            </a:pPr>
-            <a:r>
-              <a:rPr sz="1400" b="0">
-                <a:solidFill>
-                  <a:srgbClr val="E8F6F1"/>
-                </a:solidFill>
-                <a:latin typeface="Malgun Gothic"/>
-              </a:rPr>
-              <a:t>•  profiles / categories / expenses 3개 테이블 설계</a:t>
-            </a:r>
-          </a:p>
-          <a:p>
-            <a:pPr>
-              <a:lnSpc>
-                <a:spcPct val="120000"/>
-              </a:lnSpc>
-              <a:spcAft>
-                <a:spcPts val="1000"/>
-              </a:spcAft>
-            </a:pPr>
-            <a:r>
-              <a:rPr sz="1400" b="0">
-                <a:solidFill>
-                  <a:srgbClr val="E8F6F1"/>
-                </a:solidFill>
-                <a:latin typeface="Malgun Gothic"/>
-              </a:rPr>
-              <a:t>•  Row Level Security로 행 단위 접근 제어</a:t>
-            </a:r>
-          </a:p>
-        </p:txBody>
-      </p:sp>
-      <p:sp>
-        <p:nvSpPr>
-          <p:cNvPr id="14" name="Chevron 13"/>
-          <p:cNvSpPr/>
-          <p:nvPr/>
-        </p:nvSpPr>
-        <p:spPr>
-          <a:xfrm>
-            <a:off x="5715000" y="3291840"/>
-            <a:ext cx="731520" cy="548640"/>
-          </a:xfrm>
-          <a:prstGeom prst="chevron">
+            <a:off x="640080" y="1874519"/>
+            <a:ext cx="411480" cy="411480"/>
+          </a:xfrm>
+          <a:prstGeom prst="ellipse">
             <a:avLst/>
           </a:prstGeom>
           <a:solidFill>
@@ -9345,6 +12839,7 @@
           <a:ln>
             <a:noFill/>
           </a:ln>
+          <a:effectLst/>
         </p:spPr>
         <p:style>
           <a:lnRef idx="1">
@@ -9370,7 +12865,607 @@
       </p:sp>
       <p:sp>
         <p:nvSpPr>
+          <p:cNvPr id="7" name="TextBox 6"/>
+          <p:cNvSpPr txBox="1"/>
+          <p:nvPr/>
+        </p:nvSpPr>
+        <p:spPr>
+          <a:xfrm>
+            <a:off x="640080" y="1892807"/>
+            <a:ext cx="411480" cy="365760"/>
+          </a:xfrm>
+          <a:prstGeom prst="rect">
+            <a:avLst/>
+          </a:prstGeom>
+          <a:noFill/>
+        </p:spPr>
+        <p:txBody>
+          <a:bodyPr wrap="square" anchor="t">
+            <a:spAutoFit/>
+          </a:bodyPr>
+          <a:lstStyle/>
+          <a:p>
+            <a:pPr algn="ctr">
+              <a:lnSpc>
+                <a:spcPct val="115000"/>
+              </a:lnSpc>
+            </a:pPr>
+            <a:r>
+              <a:rPr sz="1600" b="1">
+                <a:solidFill>
+                  <a:srgbClr val="FFFFFF"/>
+                </a:solidFill>
+                <a:latin typeface="Malgun Gothic"/>
+              </a:rPr>
+              <a:t>1</a:t>
+            </a:r>
+          </a:p>
+        </p:txBody>
+      </p:sp>
+      <p:sp>
+        <p:nvSpPr>
+          <p:cNvPr id="8" name="TextBox 7"/>
+          <p:cNvSpPr txBox="1"/>
+          <p:nvPr/>
+        </p:nvSpPr>
+        <p:spPr>
+          <a:xfrm>
+            <a:off x="1234440" y="1847087"/>
+            <a:ext cx="3840480" cy="457200"/>
+          </a:xfrm>
+          <a:prstGeom prst="rect">
+            <a:avLst/>
+          </a:prstGeom>
+          <a:noFill/>
+        </p:spPr>
+        <p:txBody>
+          <a:bodyPr wrap="square" anchor="t">
+            <a:spAutoFit/>
+          </a:bodyPr>
+          <a:lstStyle/>
+          <a:p>
+            <a:pPr algn="l">
+              <a:lnSpc>
+                <a:spcPct val="115000"/>
+              </a:lnSpc>
+            </a:pPr>
+            <a:r>
+              <a:rPr sz="1600" b="1">
+                <a:solidFill>
+                  <a:srgbClr val="0F766E"/>
+                </a:solidFill>
+                <a:latin typeface="Malgun Gothic"/>
+              </a:rPr>
+              <a:t>코로케이션 (Colocation)</a:t>
+            </a:r>
+          </a:p>
+        </p:txBody>
+      </p:sp>
+      <p:sp>
+        <p:nvSpPr>
+          <p:cNvPr id="9" name="TextBox 8"/>
+          <p:cNvSpPr txBox="1"/>
+          <p:nvPr/>
+        </p:nvSpPr>
+        <p:spPr>
+          <a:xfrm>
+            <a:off x="1234440" y="2258567"/>
+            <a:ext cx="10241280" cy="640080"/>
+          </a:xfrm>
+          <a:prstGeom prst="rect">
+            <a:avLst/>
+          </a:prstGeom>
+          <a:noFill/>
+        </p:spPr>
+        <p:txBody>
+          <a:bodyPr wrap="square" anchor="t">
+            <a:spAutoFit/>
+          </a:bodyPr>
+          <a:lstStyle/>
+          <a:p>
+            <a:pPr algn="l">
+              <a:lnSpc>
+                <a:spcPct val="115000"/>
+              </a:lnSpc>
+            </a:pPr>
+            <a:r>
+              <a:rPr sz="1300" b="0">
+                <a:solidFill>
+                  <a:srgbClr val="4B6259"/>
+                </a:solidFill>
+                <a:latin typeface="Malgun Gothic"/>
+              </a:rPr>
+              <a:t>각 페이지의 HTML·CSS·JS를 같은 디렉토리에 평탄하게 배치 — "이 기능을 고치려면 어느 폴더를 보면 되는가?"에 즉시 답할 수 있는 구조</a:t>
+            </a:r>
+          </a:p>
+        </p:txBody>
+      </p:sp>
+      <p:sp>
+        <p:nvSpPr>
+          <p:cNvPr id="10" name="Oval 9"/>
+          <p:cNvSpPr/>
+          <p:nvPr/>
+        </p:nvSpPr>
+        <p:spPr>
+          <a:xfrm>
+            <a:off x="640080" y="2990087"/>
+            <a:ext cx="411480" cy="411480"/>
+          </a:xfrm>
+          <a:prstGeom prst="ellipse">
+            <a:avLst/>
+          </a:prstGeom>
+          <a:solidFill>
+            <a:srgbClr val="34D399"/>
+          </a:solidFill>
+          <a:ln>
+            <a:noFill/>
+          </a:ln>
+          <a:effectLst/>
+        </p:spPr>
+        <p:style>
+          <a:lnRef idx="1">
+            <a:schemeClr val="accent1"/>
+          </a:lnRef>
+          <a:fillRef idx="3">
+            <a:schemeClr val="accent1"/>
+          </a:fillRef>
+          <a:effectRef idx="2">
+            <a:schemeClr val="accent1"/>
+          </a:effectRef>
+          <a:fontRef idx="minor">
+            <a:schemeClr val="lt1"/>
+          </a:fontRef>
+        </p:style>
+        <p:txBody>
+          <a:bodyPr rtlCol="0" anchor="ctr"/>
+          <a:lstStyle/>
+          <a:p>
+            <a:pPr algn="ctr"/>
+          </a:p>
+        </p:txBody>
+      </p:sp>
+      <p:sp>
+        <p:nvSpPr>
+          <p:cNvPr id="11" name="TextBox 10"/>
+          <p:cNvSpPr txBox="1"/>
+          <p:nvPr/>
+        </p:nvSpPr>
+        <p:spPr>
+          <a:xfrm>
+            <a:off x="640080" y="3008375"/>
+            <a:ext cx="411480" cy="365760"/>
+          </a:xfrm>
+          <a:prstGeom prst="rect">
+            <a:avLst/>
+          </a:prstGeom>
+          <a:noFill/>
+        </p:spPr>
+        <p:txBody>
+          <a:bodyPr wrap="square" anchor="t">
+            <a:spAutoFit/>
+          </a:bodyPr>
+          <a:lstStyle/>
+          <a:p>
+            <a:pPr algn="ctr">
+              <a:lnSpc>
+                <a:spcPct val="115000"/>
+              </a:lnSpc>
+            </a:pPr>
+            <a:r>
+              <a:rPr sz="1600" b="1">
+                <a:solidFill>
+                  <a:srgbClr val="FFFFFF"/>
+                </a:solidFill>
+                <a:latin typeface="Malgun Gothic"/>
+              </a:rPr>
+              <a:t>2</a:t>
+            </a:r>
+          </a:p>
+        </p:txBody>
+      </p:sp>
+      <p:sp>
+        <p:nvSpPr>
+          <p:cNvPr id="12" name="TextBox 11"/>
+          <p:cNvSpPr txBox="1"/>
+          <p:nvPr/>
+        </p:nvSpPr>
+        <p:spPr>
+          <a:xfrm>
+            <a:off x="1234440" y="2962655"/>
+            <a:ext cx="3840480" cy="457200"/>
+          </a:xfrm>
+          <a:prstGeom prst="rect">
+            <a:avLst/>
+          </a:prstGeom>
+          <a:noFill/>
+        </p:spPr>
+        <p:txBody>
+          <a:bodyPr wrap="square" anchor="t">
+            <a:spAutoFit/>
+          </a:bodyPr>
+          <a:lstStyle/>
+          <a:p>
+            <a:pPr algn="l">
+              <a:lnSpc>
+                <a:spcPct val="115000"/>
+              </a:lnSpc>
+            </a:pPr>
+            <a:r>
+              <a:rPr sz="1600" b="1">
+                <a:solidFill>
+                  <a:srgbClr val="0F766E"/>
+                </a:solidFill>
+                <a:latin typeface="Malgun Gothic"/>
+              </a:rPr>
+              <a:t>역할별 분리</a:t>
+            </a:r>
+          </a:p>
+        </p:txBody>
+      </p:sp>
+      <p:sp>
+        <p:nvSpPr>
+          <p:cNvPr id="13" name="TextBox 12"/>
+          <p:cNvSpPr txBox="1"/>
+          <p:nvPr/>
+        </p:nvSpPr>
+        <p:spPr>
+          <a:xfrm>
+            <a:off x="1234440" y="3374135"/>
+            <a:ext cx="10241280" cy="640080"/>
+          </a:xfrm>
+          <a:prstGeom prst="rect">
+            <a:avLst/>
+          </a:prstGeom>
+          <a:noFill/>
+        </p:spPr>
+        <p:txBody>
+          <a:bodyPr wrap="square" anchor="t">
+            <a:spAutoFit/>
+          </a:bodyPr>
+          <a:lstStyle/>
+          <a:p>
+            <a:pPr algn="l">
+              <a:lnSpc>
+                <a:spcPct val="115000"/>
+              </a:lnSpc>
+            </a:pPr>
+            <a:r>
+              <a:rPr sz="1300" b="0">
+                <a:solidFill>
+                  <a:srgbClr val="4B6259"/>
+                </a:solidFill>
+                <a:latin typeface="Malgun Gothic"/>
+              </a:rPr>
+              <a:t>고객은 루트(/, /auth, /expenses, /stats), 관리자는 /admin 하위로 완전히 분리하되 동일한 데이터 계층(js/utils.js)을 공유</a:t>
+            </a:r>
+          </a:p>
+        </p:txBody>
+      </p:sp>
+      <p:sp>
+        <p:nvSpPr>
+          <p:cNvPr id="14" name="Oval 13"/>
+          <p:cNvSpPr/>
+          <p:nvPr/>
+        </p:nvSpPr>
+        <p:spPr>
+          <a:xfrm>
+            <a:off x="640080" y="4105655"/>
+            <a:ext cx="411480" cy="411480"/>
+          </a:xfrm>
+          <a:prstGeom prst="ellipse">
+            <a:avLst/>
+          </a:prstGeom>
+          <a:solidFill>
+            <a:srgbClr val="34D399"/>
+          </a:solidFill>
+          <a:ln>
+            <a:noFill/>
+          </a:ln>
+          <a:effectLst/>
+        </p:spPr>
+        <p:style>
+          <a:lnRef idx="1">
+            <a:schemeClr val="accent1"/>
+          </a:lnRef>
+          <a:fillRef idx="3">
+            <a:schemeClr val="accent1"/>
+          </a:fillRef>
+          <a:effectRef idx="2">
+            <a:schemeClr val="accent1"/>
+          </a:effectRef>
+          <a:fontRef idx="minor">
+            <a:schemeClr val="lt1"/>
+          </a:fontRef>
+        </p:style>
+        <p:txBody>
+          <a:bodyPr rtlCol="0" anchor="ctr"/>
+          <a:lstStyle/>
+          <a:p>
+            <a:pPr algn="ctr"/>
+          </a:p>
+        </p:txBody>
+      </p:sp>
+      <p:sp>
+        <p:nvSpPr>
           <p:cNvPr id="15" name="TextBox 14"/>
+          <p:cNvSpPr txBox="1"/>
+          <p:nvPr/>
+        </p:nvSpPr>
+        <p:spPr>
+          <a:xfrm>
+            <a:off x="640080" y="4123943"/>
+            <a:ext cx="411480" cy="365760"/>
+          </a:xfrm>
+          <a:prstGeom prst="rect">
+            <a:avLst/>
+          </a:prstGeom>
+          <a:noFill/>
+        </p:spPr>
+        <p:txBody>
+          <a:bodyPr wrap="square" anchor="t">
+            <a:spAutoFit/>
+          </a:bodyPr>
+          <a:lstStyle/>
+          <a:p>
+            <a:pPr algn="ctr">
+              <a:lnSpc>
+                <a:spcPct val="115000"/>
+              </a:lnSpc>
+            </a:pPr>
+            <a:r>
+              <a:rPr sz="1600" b="1">
+                <a:solidFill>
+                  <a:srgbClr val="FFFFFF"/>
+                </a:solidFill>
+                <a:latin typeface="Malgun Gothic"/>
+              </a:rPr>
+              <a:t>3</a:t>
+            </a:r>
+          </a:p>
+        </p:txBody>
+      </p:sp>
+      <p:sp>
+        <p:nvSpPr>
+          <p:cNvPr id="16" name="TextBox 15"/>
+          <p:cNvSpPr txBox="1"/>
+          <p:nvPr/>
+        </p:nvSpPr>
+        <p:spPr>
+          <a:xfrm>
+            <a:off x="1234440" y="4078223"/>
+            <a:ext cx="3840480" cy="457200"/>
+          </a:xfrm>
+          <a:prstGeom prst="rect">
+            <a:avLst/>
+          </a:prstGeom>
+          <a:noFill/>
+        </p:spPr>
+        <p:txBody>
+          <a:bodyPr wrap="square" anchor="t">
+            <a:spAutoFit/>
+          </a:bodyPr>
+          <a:lstStyle/>
+          <a:p>
+            <a:pPr algn="l">
+              <a:lnSpc>
+                <a:spcPct val="115000"/>
+              </a:lnSpc>
+            </a:pPr>
+            <a:r>
+              <a:rPr sz="1600" b="1">
+                <a:solidFill>
+                  <a:srgbClr val="0F766E"/>
+                </a:solidFill>
+                <a:latin typeface="Malgun Gothic"/>
+              </a:rPr>
+              <a:t>클린 URL</a:t>
+            </a:r>
+          </a:p>
+        </p:txBody>
+      </p:sp>
+      <p:sp>
+        <p:nvSpPr>
+          <p:cNvPr id="17" name="TextBox 16"/>
+          <p:cNvSpPr txBox="1"/>
+          <p:nvPr/>
+        </p:nvSpPr>
+        <p:spPr>
+          <a:xfrm>
+            <a:off x="1234440" y="4489703"/>
+            <a:ext cx="10241280" cy="640080"/>
+          </a:xfrm>
+          <a:prstGeom prst="rect">
+            <a:avLst/>
+          </a:prstGeom>
+          <a:noFill/>
+        </p:spPr>
+        <p:txBody>
+          <a:bodyPr wrap="square" anchor="t">
+            <a:spAutoFit/>
+          </a:bodyPr>
+          <a:lstStyle/>
+          <a:p>
+            <a:pPr algn="l">
+              <a:lnSpc>
+                <a:spcPct val="115000"/>
+              </a:lnSpc>
+            </a:pPr>
+            <a:r>
+              <a:rPr sz="1300" b="0">
+                <a:solidFill>
+                  <a:srgbClr val="4B6259"/>
+                </a:solidFill>
+                <a:latin typeface="Malgun Gothic"/>
+              </a:rPr>
+              <a:t>list / create / edit / index 등 목적이 드러나는 명확한 경로 설계</a:t>
+            </a:r>
+          </a:p>
+        </p:txBody>
+      </p:sp>
+      <p:sp>
+        <p:nvSpPr>
+          <p:cNvPr id="18" name="Oval 17"/>
+          <p:cNvSpPr/>
+          <p:nvPr/>
+        </p:nvSpPr>
+        <p:spPr>
+          <a:xfrm>
+            <a:off x="640080" y="5221223"/>
+            <a:ext cx="411480" cy="411480"/>
+          </a:xfrm>
+          <a:prstGeom prst="ellipse">
+            <a:avLst/>
+          </a:prstGeom>
+          <a:solidFill>
+            <a:srgbClr val="34D399"/>
+          </a:solidFill>
+          <a:ln>
+            <a:noFill/>
+          </a:ln>
+          <a:effectLst/>
+        </p:spPr>
+        <p:style>
+          <a:lnRef idx="1">
+            <a:schemeClr val="accent1"/>
+          </a:lnRef>
+          <a:fillRef idx="3">
+            <a:schemeClr val="accent1"/>
+          </a:fillRef>
+          <a:effectRef idx="2">
+            <a:schemeClr val="accent1"/>
+          </a:effectRef>
+          <a:fontRef idx="minor">
+            <a:schemeClr val="lt1"/>
+          </a:fontRef>
+        </p:style>
+        <p:txBody>
+          <a:bodyPr rtlCol="0" anchor="ctr"/>
+          <a:lstStyle/>
+          <a:p>
+            <a:pPr algn="ctr"/>
+          </a:p>
+        </p:txBody>
+      </p:sp>
+      <p:sp>
+        <p:nvSpPr>
+          <p:cNvPr id="19" name="TextBox 18"/>
+          <p:cNvSpPr txBox="1"/>
+          <p:nvPr/>
+        </p:nvSpPr>
+        <p:spPr>
+          <a:xfrm>
+            <a:off x="640080" y="5239511"/>
+            <a:ext cx="411480" cy="365760"/>
+          </a:xfrm>
+          <a:prstGeom prst="rect">
+            <a:avLst/>
+          </a:prstGeom>
+          <a:noFill/>
+        </p:spPr>
+        <p:txBody>
+          <a:bodyPr wrap="square" anchor="t">
+            <a:spAutoFit/>
+          </a:bodyPr>
+          <a:lstStyle/>
+          <a:p>
+            <a:pPr algn="ctr">
+              <a:lnSpc>
+                <a:spcPct val="115000"/>
+              </a:lnSpc>
+            </a:pPr>
+            <a:r>
+              <a:rPr sz="1600" b="1">
+                <a:solidFill>
+                  <a:srgbClr val="FFFFFF"/>
+                </a:solidFill>
+                <a:latin typeface="Malgun Gothic"/>
+              </a:rPr>
+              <a:t>4</a:t>
+            </a:r>
+          </a:p>
+        </p:txBody>
+      </p:sp>
+      <p:sp>
+        <p:nvSpPr>
+          <p:cNvPr id="20" name="TextBox 19"/>
+          <p:cNvSpPr txBox="1"/>
+          <p:nvPr/>
+        </p:nvSpPr>
+        <p:spPr>
+          <a:xfrm>
+            <a:off x="1234440" y="5193791"/>
+            <a:ext cx="3840480" cy="457200"/>
+          </a:xfrm>
+          <a:prstGeom prst="rect">
+            <a:avLst/>
+          </a:prstGeom>
+          <a:noFill/>
+        </p:spPr>
+        <p:txBody>
+          <a:bodyPr wrap="square" anchor="t">
+            <a:spAutoFit/>
+          </a:bodyPr>
+          <a:lstStyle/>
+          <a:p>
+            <a:pPr algn="l">
+              <a:lnSpc>
+                <a:spcPct val="115000"/>
+              </a:lnSpc>
+            </a:pPr>
+            <a:r>
+              <a:rPr sz="1600" b="1">
+                <a:solidFill>
+                  <a:srgbClr val="0F766E"/>
+                </a:solidFill>
+                <a:latin typeface="Malgun Gothic"/>
+              </a:rPr>
+              <a:t>고정 공통 데이터</a:t>
+            </a:r>
+          </a:p>
+        </p:txBody>
+      </p:sp>
+      <p:sp>
+        <p:nvSpPr>
+          <p:cNvPr id="21" name="TextBox 20"/>
+          <p:cNvSpPr txBox="1"/>
+          <p:nvPr/>
+        </p:nvSpPr>
+        <p:spPr>
+          <a:xfrm>
+            <a:off x="1234440" y="5605271"/>
+            <a:ext cx="10241280" cy="640080"/>
+          </a:xfrm>
+          <a:prstGeom prst="rect">
+            <a:avLst/>
+          </a:prstGeom>
+          <a:noFill/>
+        </p:spPr>
+        <p:txBody>
+          <a:bodyPr wrap="square" anchor="t">
+            <a:spAutoFit/>
+          </a:bodyPr>
+          <a:lstStyle/>
+          <a:p>
+            <a:pPr algn="l">
+              <a:lnSpc>
+                <a:spcPct val="115000"/>
+              </a:lnSpc>
+            </a:pPr>
+            <a:r>
+              <a:rPr sz="1300" b="0">
+                <a:solidFill>
+                  <a:srgbClr val="4B6259"/>
+                </a:solidFill>
+                <a:latin typeface="Malgun Gothic"/>
+              </a:rPr>
+              <a:t>카테고리는 CRUD 대상이 아닌 고정 참조 데이터로 취급해 데이터 일관성 보장</a:t>
+            </a:r>
+          </a:p>
+        </p:txBody>
+      </p:sp>
+      <p:sp>
+        <p:nvSpPr>
+          <p:cNvPr id="22" name="TextBox 21"/>
           <p:cNvSpPr txBox="1"/>
           <p:nvPr/>
         </p:nvSpPr>
@@ -9409,7 +13504,7 @@
       </p:sp>
       <p:sp>
         <p:nvSpPr>
-          <p:cNvPr id="16" name="TextBox 15"/>
+          <p:cNvPr id="23" name="TextBox 22"/>
           <p:cNvSpPr txBox="1"/>
           <p:nvPr/>
         </p:nvSpPr>
@@ -9550,7 +13645,7 @@
                 </a:solidFill>
                 <a:latin typeface="Malgun Gothic"/>
               </a:rPr>
-              <a:t>SECURITY</a:t>
+              <a:t>DATA MODEL</a:t>
             </a:r>
           </a:p>
         </p:txBody>
@@ -9589,7 +13684,7 @@
                 </a:solidFill>
                 <a:latin typeface="Malgun Gothic"/>
               </a:rPr>
-              <a:t>보안 &amp; 데이터 무결성</a:t>
+              <a:t>데이터 모델 (ERD)</a:t>
             </a:r>
           </a:p>
         </p:txBody>
@@ -9638,169 +13733,30 @@
           </a:p>
         </p:txBody>
       </p:sp>
-      <p:sp>
-        <p:nvSpPr>
-          <p:cNvPr id="6" name="TextBox 5"/>
-          <p:cNvSpPr txBox="1"/>
-          <p:nvPr/>
-        </p:nvSpPr>
-        <p:spPr>
-          <a:xfrm>
-            <a:off x="640080" y="1828800"/>
-            <a:ext cx="10789920" cy="4572000"/>
-          </a:xfrm>
-          <a:prstGeom prst="rect">
-            <a:avLst/>
-          </a:prstGeom>
-          <a:noFill/>
-        </p:spPr>
-        <p:txBody>
-          <a:bodyPr wrap="square">
-            <a:spAutoFit/>
-          </a:bodyPr>
-          <a:lstStyle/>
-          <a:p>
-            <a:pPr>
-              <a:lnSpc>
-                <a:spcPct val="120000"/>
-              </a:lnSpc>
-              <a:spcAft>
-                <a:spcPts val="1000"/>
-              </a:spcAft>
-            </a:pPr>
-            <a:r>
-              <a:rPr sz="1600" b="0">
-                <a:solidFill>
-                  <a:srgbClr val="1F2E2A"/>
-                </a:solidFill>
-                <a:latin typeface="Malgun Gothic"/>
-              </a:rPr>
-              <a:t>•  Row Level Security (RLS)</a:t>
-            </a:r>
-          </a:p>
-          <a:p>
-            <a:pPr>
-              <a:spcAft>
-                <a:spcPts val="1000"/>
-              </a:spcAft>
-            </a:pPr>
-            <a:r>
-              <a:rPr sz="1300">
-                <a:solidFill>
-                  <a:srgbClr val="6E8880"/>
-                </a:solidFill>
-                <a:latin typeface="Malgun Gothic"/>
-              </a:rPr>
-              <a:t>     고객은 본인 소유 데이터(profiles/expenses)만 조회·수정 가능, 관리자는 role 기반으로 전체 접근</a:t>
-            </a:r>
-          </a:p>
-          <a:p>
-            <a:pPr>
-              <a:lnSpc>
-                <a:spcPct val="120000"/>
-              </a:lnSpc>
-              <a:spcAft>
-                <a:spcPts val="1000"/>
-              </a:spcAft>
-            </a:pPr>
-            <a:r>
-              <a:rPr sz="1600" b="0">
-                <a:solidFill>
-                  <a:srgbClr val="1F2E2A"/>
-                </a:solidFill>
-                <a:latin typeface="Malgun Gothic"/>
-              </a:rPr>
-              <a:t>•  재귀 없는 관리자 판별</a:t>
-            </a:r>
-          </a:p>
-          <a:p>
-            <a:pPr>
-              <a:spcAft>
-                <a:spcPts val="1000"/>
-              </a:spcAft>
-            </a:pPr>
-            <a:r>
-              <a:rPr sz="1300">
-                <a:solidFill>
-                  <a:srgbClr val="6E8880"/>
-                </a:solidFill>
-                <a:latin typeface="Malgun Gothic"/>
-              </a:rPr>
-              <a:t>     profiles.role을 정책 안에서 직접 조회하면 무한 재귀가 발생 → SECURITY DEFINER 함수(is_admin())로 우회</a:t>
-            </a:r>
-          </a:p>
-          <a:p>
-            <a:pPr>
-              <a:lnSpc>
-                <a:spcPct val="120000"/>
-              </a:lnSpc>
-              <a:spcAft>
-                <a:spcPts val="1000"/>
-              </a:spcAft>
-            </a:pPr>
-            <a:r>
-              <a:rPr sz="1600" b="0">
-                <a:solidFill>
-                  <a:srgbClr val="1F2E2A"/>
-                </a:solidFill>
-                <a:latin typeface="Malgun Gothic"/>
-              </a:rPr>
-              <a:t>•  최소 권한 원칙</a:t>
-            </a:r>
-          </a:p>
-          <a:p>
-            <a:pPr>
-              <a:spcAft>
-                <a:spcPts val="1000"/>
-              </a:spcAft>
-            </a:pPr>
-            <a:r>
-              <a:rPr sz="1300">
-                <a:solidFill>
-                  <a:srgbClr val="6E8880"/>
-                </a:solidFill>
-                <a:latin typeface="Malgun Gothic"/>
-              </a:rPr>
-              <a:t>     Supabase Advisor로 내부 함수의 불필요한 RPC 노출을 점검 → anon/authenticated의 불필요한 EXECUTE 권한 회수</a:t>
-            </a:r>
-          </a:p>
-          <a:p>
-            <a:pPr>
-              <a:lnSpc>
-                <a:spcPct val="120000"/>
-              </a:lnSpc>
-              <a:spcAft>
-                <a:spcPts val="1000"/>
-              </a:spcAft>
-            </a:pPr>
-            <a:r>
-              <a:rPr sz="1600" b="0">
-                <a:solidFill>
-                  <a:srgbClr val="1F2E2A"/>
-                </a:solidFill>
-                <a:latin typeface="Malgun Gothic"/>
-              </a:rPr>
-              <a:t>•  인증 위임</a:t>
-            </a:r>
-          </a:p>
-          <a:p>
-            <a:pPr>
-              <a:spcAft>
-                <a:spcPts val="1000"/>
-              </a:spcAft>
-            </a:pPr>
-            <a:r>
-              <a:rPr sz="1300">
-                <a:solidFill>
-                  <a:srgbClr val="6E8880"/>
-                </a:solidFill>
-                <a:latin typeface="Malgun Gothic"/>
-              </a:rPr>
-              <a:t>     비밀번호 저장·검증을 직접 구현하지 않고 Supabase Auth에 위임해 자체 구현 리스크 제거</a:t>
-            </a:r>
-          </a:p>
-        </p:txBody>
-      </p:sp>
+      <p:pic>
+        <p:nvPicPr>
+          <p:cNvPr id="6" name="Picture 5" descr="erd.png"/>
+          <p:cNvPicPr>
+            <a:picLocks noChangeAspect="1"/>
+          </p:cNvPicPr>
+          <p:nvPr/>
+        </p:nvPicPr>
+        <p:blipFill>
+          <a:blip r:embed="rId2"/>
+          <a:stretch>
+            <a:fillRect/>
+          </a:stretch>
+        </p:blipFill>
+        <p:spPr>
+          <a:xfrm>
+            <a:off x="4198494" y="1600200"/>
+            <a:ext cx="3855971" cy="4709160"/>
+          </a:xfrm>
+          <a:prstGeom prst="rect">
+            <a:avLst/>
+          </a:prstGeom>
+        </p:spPr>
+      </p:pic>
       <p:sp>
         <p:nvSpPr>
           <p:cNvPr id="7" name="TextBox 6"/>

--- a/portfolio/expense-tracker-portfolio.pptx
+++ b/portfolio/expense-tracker-portfolio.pptx
@@ -1,27 +1,27 @@
 
 <file path=ppt/presentation.xml><?xml version="1.0" encoding="utf-8"?>
-<p:presentation xmlns:a="http://schemas.openxmlformats.org/drawingml/2006/main" xmlns:r="http://schemas.openxmlformats.org/officeDocument/2006/relationships" xmlns:p="http://schemas.openxmlformats.org/presentationml/2006/main" saveSubsetFonts="1" autoCompressPictures="0">
+<p:presentation xmlns:r="http://schemas.openxmlformats.org/officeDocument/2006/relationships" xmlns:c="http://schemas.openxmlformats.org/drawingml/2006/chart" xmlns:a="http://schemas.openxmlformats.org/drawingml/2006/main" xmlns:dgm="http://schemas.openxmlformats.org/drawingml/2006/diagram" xmlns:dsp="http://schemas.microsoft.com/office/drawing/2008/diagram" xmlns:p="http://schemas.openxmlformats.org/presentationml/2006/main" autoCompressPictures="0">
   <p:sldMasterIdLst>
     <p:sldMasterId id="2147483648" r:id="rId1"/>
   </p:sldMasterIdLst>
   <p:sldIdLst>
-    <p:sldId id="256" r:id="rId7"/>
-    <p:sldId id="257" r:id="rId8"/>
-    <p:sldId id="258" r:id="rId9"/>
-    <p:sldId id="259" r:id="rId10"/>
-    <p:sldId id="260" r:id="rId11"/>
-    <p:sldId id="261" r:id="rId12"/>
-    <p:sldId id="262" r:id="rId13"/>
-    <p:sldId id="263" r:id="rId14"/>
-    <p:sldId id="264" r:id="rId15"/>
-    <p:sldId id="265" r:id="rId16"/>
-    <p:sldId id="266" r:id="rId17"/>
-    <p:sldId id="267" r:id="rId18"/>
-    <p:sldId id="268" r:id="rId19"/>
-    <p:sldId id="269" r:id="rId20"/>
-    <p:sldId id="270" r:id="rId21"/>
-    <p:sldId id="271" r:id="rId22"/>
-    <p:sldId id="272" r:id="rId23"/>
+    <p:sldId id="256" r:id="rId2"/>
+    <p:sldId id="257" r:id="rId3"/>
+    <p:sldId id="258" r:id="rId4"/>
+    <p:sldId id="259" r:id="rId5"/>
+    <p:sldId id="260" r:id="rId6"/>
+    <p:sldId id="261" r:id="rId7"/>
+    <p:sldId id="262" r:id="rId8"/>
+    <p:sldId id="263" r:id="rId9"/>
+    <p:sldId id="264" r:id="rId10"/>
+    <p:sldId id="265" r:id="rId11"/>
+    <p:sldId id="266" r:id="rId12"/>
+    <p:sldId id="267" r:id="rId13"/>
+    <p:sldId id="268" r:id="rId14"/>
+    <p:sldId id="269" r:id="rId15"/>
+    <p:sldId id="270" r:id="rId16"/>
+    <p:sldId id="271" r:id="rId17"/>
+    <p:sldId id="272" r:id="rId18"/>
   </p:sldIdLst>
   <p:sldSz cx="12191695" cy="6858000" type="screen4x3"/>
   <p:notesSz cx="6858000" cy="9144000"/>
@@ -11382,14 +11382,13 @@
 </file>
 
 <file path=ppt/slides/slide7.xml><?xml version="1.0" encoding="utf-8"?>
-<p:sld xmlns:a="http://schemas.openxmlformats.org/drawingml/2006/main" xmlns:p="http://schemas.openxmlformats.org/presentationml/2006/main" xmlns:r="http://schemas.openxmlformats.org/officeDocument/2006/relationships">
+<p:sld xmlns:r="http://schemas.openxmlformats.org/officeDocument/2006/relationships" xmlns:c="http://schemas.openxmlformats.org/drawingml/2006/chart" xmlns:a="http://schemas.openxmlformats.org/drawingml/2006/main" xmlns:dgm="http://schemas.openxmlformats.org/drawingml/2006/diagram" xmlns:dsp="http://schemas.microsoft.com/office/drawing/2008/diagram" xmlns:p="http://schemas.openxmlformats.org/presentationml/2006/main">
   <p:cSld>
     <p:bg>
-      <p:bgPr>
+      <p:bgPr shadeToTitle="0">
         <a:solidFill>
-          <a:srgbClr val="F3FBF8"/>
+          <a:srgbClr val="f3fbf8"/>
         </a:solidFill>
-        <a:effectLst/>
       </p:bgPr>
     </p:bg>
     <p:spTree>
@@ -11398,7 +11397,14 @@
         <p:cNvGrpSpPr/>
         <p:nvPr/>
       </p:nvGrpSpPr>
-      <p:grpSpPr/>
+      <p:grpSpPr>
+        <a:xfrm>
+          <a:off x="0" y="0"/>
+          <a:ext cx="0" cy="0"/>
+          <a:chOff x="0" y="0"/>
+          <a:chExt cx="0" cy="0"/>
+        </a:xfrm>
+      </p:grpSpPr>
       <p:sp>
         <p:nvSpPr>
           <p:cNvPr id="2" name="Rectangle 1"/>
@@ -11414,7 +11420,7 @@
             <a:avLst/>
           </a:prstGeom>
           <a:solidFill>
-            <a:srgbClr val="0F766E"/>
+            <a:srgbClr val="0f766e"/>
           </a:solidFill>
           <a:ln>
             <a:noFill/>
@@ -11436,10 +11442,13 @@
           </a:fontRef>
         </p:style>
         <p:txBody>
-          <a:bodyPr rtlCol="0" anchor="ctr"/>
-          <a:lstStyle/>
-          <a:p>
-            <a:pPr algn="ctr"/>
+          <a:bodyPr anchor="ctr"/>
+          <a:lstStyle/>
+          <a:p>
+            <a:pPr lvl="0" algn="ctr">
+              <a:defRPr/>
+            </a:pPr>
+            <a:endParaRPr lang="ko-KR" altLang="en-US"/>
           </a:p>
         </p:txBody>
       </p:sp>
@@ -11465,20 +11474,27 @@
           </a:bodyPr>
           <a:lstStyle/>
           <a:p>
-            <a:pPr algn="l">
+            <a:pPr lvl="0" algn="l">
               <a:lnSpc>
                 <a:spcPct val="115000"/>
               </a:lnSpc>
+              <a:defRPr/>
             </a:pPr>
             <a:r>
               <a:rPr sz="1300" b="1">
                 <a:solidFill>
-                  <a:srgbClr val="0F766E"/>
-                </a:solidFill>
-                <a:latin typeface="Malgun Gothic"/>
+                  <a:srgbClr val="0f766e"/>
+                </a:solidFill>
+                <a:latin typeface="맑은 고딕"/>
               </a:rPr>
               <a:t>TECH STACK</a:t>
             </a:r>
+            <a:endParaRPr sz="1300" b="1">
+              <a:solidFill>
+                <a:srgbClr val="0f766e"/>
+              </a:solidFill>
+              <a:latin typeface="맑은 고딕"/>
+            </a:endParaRPr>
           </a:p>
         </p:txBody>
       </p:sp>
@@ -11504,20 +11520,27 @@
           </a:bodyPr>
           <a:lstStyle/>
           <a:p>
-            <a:pPr algn="l">
+            <a:pPr lvl="0" algn="l">
               <a:lnSpc>
                 <a:spcPct val="115000"/>
               </a:lnSpc>
+              <a:defRPr/>
             </a:pPr>
             <a:r>
               <a:rPr sz="2800" b="1">
                 <a:solidFill>
-                  <a:srgbClr val="1F2E2A"/>
-                </a:solidFill>
-                <a:latin typeface="Malgun Gothic"/>
+                  <a:srgbClr val="1f2e2a"/>
+                </a:solidFill>
+                <a:latin typeface="맑은 고딕"/>
               </a:rPr>
               <a:t>기술 스택</a:t>
             </a:r>
+            <a:endParaRPr sz="2800" b="1">
+              <a:solidFill>
+                <a:srgbClr val="1f2e2a"/>
+              </a:solidFill>
+              <a:latin typeface="맑은 고딕"/>
+            </a:endParaRPr>
           </a:p>
         </p:txBody>
       </p:sp>
@@ -11536,7 +11559,7 @@
             <a:avLst/>
           </a:prstGeom>
           <a:solidFill>
-            <a:srgbClr val="DCEEE7"/>
+            <a:srgbClr val="dceee7"/>
           </a:solidFill>
           <a:ln>
             <a:noFill/>
@@ -11558,10 +11581,13 @@
           </a:fontRef>
         </p:style>
         <p:txBody>
-          <a:bodyPr rtlCol="0" anchor="ctr"/>
-          <a:lstStyle/>
-          <a:p>
-            <a:pPr algn="ctr"/>
+          <a:bodyPr anchor="ctr"/>
+          <a:lstStyle/>
+          <a:p>
+            <a:pPr lvl="0" algn="ctr">
+              <a:defRPr/>
+            </a:pPr>
+            <a:endParaRPr lang="ko-KR" altLang="en-US"/>
           </a:p>
         </p:txBody>
       </p:sp>
@@ -11580,11 +11606,11 @@
             <a:avLst/>
           </a:prstGeom>
           <a:solidFill>
-            <a:srgbClr val="FFFFFF"/>
+            <a:srgbClr val="ffffff"/>
           </a:solidFill>
           <a:ln w="12700">
             <a:solidFill>
-              <a:srgbClr val="DCEEE7"/>
+              <a:srgbClr val="dceee7"/>
             </a:solidFill>
           </a:ln>
           <a:effectLst/>
@@ -11604,10 +11630,13 @@
           </a:fontRef>
         </p:style>
         <p:txBody>
-          <a:bodyPr rtlCol="0" anchor="ctr"/>
-          <a:lstStyle/>
-          <a:p>
-            <a:pPr algn="ctr"/>
+          <a:bodyPr anchor="ctr"/>
+          <a:lstStyle/>
+          <a:p>
+            <a:pPr lvl="0" algn="ctr">
+              <a:defRPr/>
+            </a:pPr>
+            <a:endParaRPr lang="ko-KR" altLang="en-US"/>
           </a:p>
         </p:txBody>
       </p:sp>
@@ -11626,7 +11655,7 @@
             <a:avLst/>
           </a:prstGeom>
           <a:solidFill>
-            <a:srgbClr val="0F766E"/>
+            <a:srgbClr val="0f766e"/>
           </a:solidFill>
           <a:ln>
             <a:noFill/>
@@ -11648,10 +11677,13 @@
           </a:fontRef>
         </p:style>
         <p:txBody>
-          <a:bodyPr rtlCol="0" anchor="ctr"/>
-          <a:lstStyle/>
-          <a:p>
-            <a:pPr algn="ctr"/>
+          <a:bodyPr anchor="ctr"/>
+          <a:lstStyle/>
+          <a:p>
+            <a:pPr lvl="0" algn="ctr">
+              <a:defRPr/>
+            </a:pPr>
+            <a:endParaRPr lang="ko-KR" altLang="en-US"/>
           </a:p>
         </p:txBody>
       </p:sp>
@@ -11677,20 +11709,27 @@
           </a:bodyPr>
           <a:lstStyle/>
           <a:p>
-            <a:pPr algn="ctr">
+            <a:pPr lvl="0" algn="ctr">
               <a:lnSpc>
                 <a:spcPct val="115000"/>
               </a:lnSpc>
+              <a:defRPr/>
             </a:pPr>
             <a:r>
               <a:rPr sz="1500" b="1">
                 <a:solidFill>
-                  <a:srgbClr val="FFFFFF"/>
-                </a:solidFill>
-                <a:latin typeface="Malgun Gothic"/>
+                  <a:srgbClr val="ffffff"/>
+                </a:solidFill>
+                <a:latin typeface="맑은 고딕"/>
               </a:rPr>
               <a:t>Frontend</a:t>
             </a:r>
+            <a:endParaRPr sz="1500" b="1">
+              <a:solidFill>
+                <a:srgbClr val="ffffff"/>
+              </a:solidFill>
+              <a:latin typeface="맑은 고딕"/>
+            </a:endParaRPr>
           </a:p>
         </p:txBody>
       </p:sp>
@@ -11716,20 +11755,27 @@
           </a:bodyPr>
           <a:lstStyle/>
           <a:p>
-            <a:pPr algn="l">
+            <a:pPr lvl="0" algn="l">
               <a:lnSpc>
                 <a:spcPct val="115000"/>
               </a:lnSpc>
+              <a:defRPr/>
             </a:pPr>
             <a:r>
               <a:rPr sz="1250" b="0">
                 <a:solidFill>
-                  <a:srgbClr val="4B6259"/>
-                </a:solidFill>
-                <a:latin typeface="Malgun Gothic"/>
+                  <a:srgbClr val="4b6259"/>
+                </a:solidFill>
+                <a:latin typeface="맑은 고딕"/>
               </a:rPr>
               <a:t>• HTML5</a:t>
             </a:r>
+            <a:endParaRPr sz="1250" b="0">
+              <a:solidFill>
+                <a:srgbClr val="4b6259"/>
+              </a:solidFill>
+              <a:latin typeface="맑은 고딕"/>
+            </a:endParaRPr>
           </a:p>
         </p:txBody>
       </p:sp>
@@ -11742,7 +11788,7 @@
         <p:spPr>
           <a:xfrm>
             <a:off x="822960" y="3337560"/>
-            <a:ext cx="2240280" cy="822960"/>
+            <a:ext cx="2240280" cy="308610"/>
           </a:xfrm>
           <a:prstGeom prst="rect">
             <a:avLst/>
@@ -11755,20 +11801,27 @@
           </a:bodyPr>
           <a:lstStyle/>
           <a:p>
-            <a:pPr algn="l">
+            <a:pPr lvl="0" algn="l">
               <a:lnSpc>
                 <a:spcPct val="115000"/>
               </a:lnSpc>
+              <a:defRPr/>
             </a:pPr>
             <a:r>
               <a:rPr sz="1250" b="0">
                 <a:solidFill>
-                  <a:srgbClr val="4B6259"/>
-                </a:solidFill>
-                <a:latin typeface="Malgun Gothic"/>
-              </a:rPr>
-              <a:t>• CSS3 (변수 기반 디자인 시스템)</a:t>
-            </a:r>
+                  <a:srgbClr val="4b6259"/>
+                </a:solidFill>
+                <a:latin typeface="맑은 고딕"/>
+              </a:rPr>
+              <a:t>• CSS3</a:t>
+            </a:r>
+            <a:endParaRPr sz="1250" b="0">
+              <a:solidFill>
+                <a:srgbClr val="4b6259"/>
+              </a:solidFill>
+              <a:latin typeface="맑은 고딕"/>
+            </a:endParaRPr>
           </a:p>
         </p:txBody>
       </p:sp>
@@ -11781,7 +11834,7 @@
         <p:spPr>
           <a:xfrm>
             <a:off x="822960" y="4114800"/>
-            <a:ext cx="2240280" cy="822960"/>
+            <a:ext cx="2240280" cy="302895"/>
           </a:xfrm>
           <a:prstGeom prst="rect">
             <a:avLst/>
@@ -11794,20 +11847,27 @@
           </a:bodyPr>
           <a:lstStyle/>
           <a:p>
-            <a:pPr algn="l">
+            <a:pPr lvl="0" algn="l">
               <a:lnSpc>
                 <a:spcPct val="115000"/>
               </a:lnSpc>
+              <a:defRPr/>
             </a:pPr>
             <a:r>
               <a:rPr sz="1250" b="0">
                 <a:solidFill>
-                  <a:srgbClr val="4B6259"/>
-                </a:solidFill>
-                <a:latin typeface="Malgun Gothic"/>
-              </a:rPr>
-              <a:t>• Vanilla JavaScript (프레임워크 없음)</a:t>
-            </a:r>
+                  <a:srgbClr val="4b6259"/>
+                </a:solidFill>
+                <a:latin typeface="맑은 고딕"/>
+              </a:rPr>
+              <a:t>• Vanilla JavaScript </a:t>
+            </a:r>
+            <a:endParaRPr sz="1250" b="0">
+              <a:solidFill>
+                <a:srgbClr val="4b6259"/>
+              </a:solidFill>
+              <a:latin typeface="맑은 고딕"/>
+            </a:endParaRPr>
           </a:p>
         </p:txBody>
       </p:sp>
@@ -11826,11 +11886,11 @@
             <a:avLst/>
           </a:prstGeom>
           <a:solidFill>
-            <a:srgbClr val="FFFFFF"/>
+            <a:srgbClr val="ffffff"/>
           </a:solidFill>
           <a:ln w="12700">
             <a:solidFill>
-              <a:srgbClr val="DCEEE7"/>
+              <a:srgbClr val="dceee7"/>
             </a:solidFill>
           </a:ln>
           <a:effectLst/>
@@ -11850,10 +11910,13 @@
           </a:fontRef>
         </p:style>
         <p:txBody>
-          <a:bodyPr rtlCol="0" anchor="ctr"/>
-          <a:lstStyle/>
-          <a:p>
-            <a:pPr algn="ctr"/>
+          <a:bodyPr anchor="ctr"/>
+          <a:lstStyle/>
+          <a:p>
+            <a:pPr lvl="0" algn="ctr">
+              <a:defRPr/>
+            </a:pPr>
+            <a:endParaRPr lang="ko-KR" altLang="en-US"/>
           </a:p>
         </p:txBody>
       </p:sp>
@@ -11872,7 +11935,7 @@
             <a:avLst/>
           </a:prstGeom>
           <a:solidFill>
-            <a:srgbClr val="0F766E"/>
+            <a:srgbClr val="0f766e"/>
           </a:solidFill>
           <a:ln>
             <a:noFill/>
@@ -11894,10 +11957,13 @@
           </a:fontRef>
         </p:style>
         <p:txBody>
-          <a:bodyPr rtlCol="0" anchor="ctr"/>
-          <a:lstStyle/>
-          <a:p>
-            <a:pPr algn="ctr"/>
+          <a:bodyPr anchor="ctr"/>
+          <a:lstStyle/>
+          <a:p>
+            <a:pPr lvl="0" algn="ctr">
+              <a:defRPr/>
+            </a:pPr>
+            <a:endParaRPr lang="ko-KR" altLang="en-US"/>
           </a:p>
         </p:txBody>
       </p:sp>
@@ -11923,20 +11989,27 @@
           </a:bodyPr>
           <a:lstStyle/>
           <a:p>
-            <a:pPr algn="ctr">
+            <a:pPr lvl="0" algn="ctr">
               <a:lnSpc>
                 <a:spcPct val="115000"/>
               </a:lnSpc>
+              <a:defRPr/>
             </a:pPr>
             <a:r>
               <a:rPr sz="1500" b="1">
                 <a:solidFill>
-                  <a:srgbClr val="FFFFFF"/>
-                </a:solidFill>
-                <a:latin typeface="Malgun Gothic"/>
+                  <a:srgbClr val="ffffff"/>
+                </a:solidFill>
+                <a:latin typeface="맑은 고딕"/>
               </a:rPr>
               <a:t>Backend &amp; DB</a:t>
             </a:r>
+            <a:endParaRPr sz="1500" b="1">
+              <a:solidFill>
+                <a:srgbClr val="ffffff"/>
+              </a:solidFill>
+              <a:latin typeface="맑은 고딕"/>
+            </a:endParaRPr>
           </a:p>
         </p:txBody>
       </p:sp>
@@ -11962,20 +12035,27 @@
           </a:bodyPr>
           <a:lstStyle/>
           <a:p>
-            <a:pPr algn="l">
+            <a:pPr lvl="0" algn="l">
               <a:lnSpc>
                 <a:spcPct val="115000"/>
               </a:lnSpc>
+              <a:defRPr/>
             </a:pPr>
             <a:r>
               <a:rPr sz="1250" b="0">
                 <a:solidFill>
-                  <a:srgbClr val="4B6259"/>
-                </a:solidFill>
-                <a:latin typeface="Malgun Gothic"/>
+                  <a:srgbClr val="4b6259"/>
+                </a:solidFill>
+                <a:latin typeface="맑은 고딕"/>
               </a:rPr>
               <a:t>• Supabase (PostgreSQL 17)</a:t>
             </a:r>
+            <a:endParaRPr sz="1250" b="0">
+              <a:solidFill>
+                <a:srgbClr val="4b6259"/>
+              </a:solidFill>
+              <a:latin typeface="맑은 고딕"/>
+            </a:endParaRPr>
           </a:p>
         </p:txBody>
       </p:sp>
@@ -12001,20 +12081,27 @@
           </a:bodyPr>
           <a:lstStyle/>
           <a:p>
-            <a:pPr algn="l">
+            <a:pPr lvl="0" algn="l">
               <a:lnSpc>
                 <a:spcPct val="115000"/>
               </a:lnSpc>
+              <a:defRPr/>
             </a:pPr>
             <a:r>
               <a:rPr sz="1250" b="0">
                 <a:solidFill>
-                  <a:srgbClr val="4B6259"/>
-                </a:solidFill>
-                <a:latin typeface="Malgun Gothic"/>
+                  <a:srgbClr val="4b6259"/>
+                </a:solidFill>
+                <a:latin typeface="맑은 고딕"/>
               </a:rPr>
               <a:t>• Supabase Auth</a:t>
             </a:r>
+            <a:endParaRPr sz="1250" b="0">
+              <a:solidFill>
+                <a:srgbClr val="4b6259"/>
+              </a:solidFill>
+              <a:latin typeface="맑은 고딕"/>
+            </a:endParaRPr>
           </a:p>
         </p:txBody>
       </p:sp>
@@ -12040,20 +12127,27 @@
           </a:bodyPr>
           <a:lstStyle/>
           <a:p>
-            <a:pPr algn="l">
+            <a:pPr lvl="0" algn="l">
               <a:lnSpc>
                 <a:spcPct val="115000"/>
               </a:lnSpc>
+              <a:defRPr/>
             </a:pPr>
             <a:r>
               <a:rPr sz="1250" b="0">
                 <a:solidFill>
-                  <a:srgbClr val="4B6259"/>
-                </a:solidFill>
-                <a:latin typeface="Malgun Gothic"/>
+                  <a:srgbClr val="4b6259"/>
+                </a:solidFill>
+                <a:latin typeface="맑은 고딕"/>
               </a:rPr>
               <a:t>• Row Level Security</a:t>
             </a:r>
+            <a:endParaRPr sz="1250" b="0">
+              <a:solidFill>
+                <a:srgbClr val="4b6259"/>
+              </a:solidFill>
+              <a:latin typeface="맑은 고딕"/>
+            </a:endParaRPr>
           </a:p>
         </p:txBody>
       </p:sp>
@@ -12072,11 +12166,11 @@
             <a:avLst/>
           </a:prstGeom>
           <a:solidFill>
-            <a:srgbClr val="FFFFFF"/>
+            <a:srgbClr val="ffffff"/>
           </a:solidFill>
           <a:ln w="12700">
             <a:solidFill>
-              <a:srgbClr val="DCEEE7"/>
+              <a:srgbClr val="dceee7"/>
             </a:solidFill>
           </a:ln>
           <a:effectLst/>
@@ -12096,10 +12190,13 @@
           </a:fontRef>
         </p:style>
         <p:txBody>
-          <a:bodyPr rtlCol="0" anchor="ctr"/>
-          <a:lstStyle/>
-          <a:p>
-            <a:pPr algn="ctr"/>
+          <a:bodyPr anchor="ctr"/>
+          <a:lstStyle/>
+          <a:p>
+            <a:pPr lvl="0" algn="ctr">
+              <a:defRPr/>
+            </a:pPr>
+            <a:endParaRPr lang="ko-KR" altLang="en-US"/>
           </a:p>
         </p:txBody>
       </p:sp>
@@ -12118,7 +12215,7 @@
             <a:avLst/>
           </a:prstGeom>
           <a:solidFill>
-            <a:srgbClr val="0F766E"/>
+            <a:srgbClr val="0f766e"/>
           </a:solidFill>
           <a:ln>
             <a:noFill/>
@@ -12140,10 +12237,13 @@
           </a:fontRef>
         </p:style>
         <p:txBody>
-          <a:bodyPr rtlCol="0" anchor="ctr"/>
-          <a:lstStyle/>
-          <a:p>
-            <a:pPr algn="ctr"/>
+          <a:bodyPr anchor="ctr"/>
+          <a:lstStyle/>
+          <a:p>
+            <a:pPr lvl="0" algn="ctr">
+              <a:defRPr/>
+            </a:pPr>
+            <a:endParaRPr lang="ko-KR" altLang="en-US"/>
           </a:p>
         </p:txBody>
       </p:sp>
@@ -12169,20 +12269,27 @@
           </a:bodyPr>
           <a:lstStyle/>
           <a:p>
-            <a:pPr algn="ctr">
+            <a:pPr lvl="0" algn="ctr">
               <a:lnSpc>
                 <a:spcPct val="115000"/>
               </a:lnSpc>
+              <a:defRPr/>
             </a:pPr>
             <a:r>
               <a:rPr sz="1500" b="1">
                 <a:solidFill>
-                  <a:srgbClr val="FFFFFF"/>
-                </a:solidFill>
-                <a:latin typeface="Malgun Gothic"/>
+                  <a:srgbClr val="ffffff"/>
+                </a:solidFill>
+                <a:latin typeface="맑은 고딕"/>
               </a:rPr>
               <a:t>협업 &amp; 배포</a:t>
             </a:r>
+            <a:endParaRPr sz="1500" b="1">
+              <a:solidFill>
+                <a:srgbClr val="ffffff"/>
+              </a:solidFill>
+              <a:latin typeface="맑은 고딕"/>
+            </a:endParaRPr>
           </a:p>
         </p:txBody>
       </p:sp>
@@ -12208,20 +12315,27 @@
           </a:bodyPr>
           <a:lstStyle/>
           <a:p>
-            <a:pPr algn="l">
+            <a:pPr lvl="0" algn="l">
               <a:lnSpc>
                 <a:spcPct val="115000"/>
               </a:lnSpc>
+              <a:defRPr/>
             </a:pPr>
             <a:r>
               <a:rPr sz="1250" b="0">
                 <a:solidFill>
-                  <a:srgbClr val="4B6259"/>
-                </a:solidFill>
-                <a:latin typeface="Malgun Gothic"/>
+                  <a:srgbClr val="4b6259"/>
+                </a:solidFill>
+                <a:latin typeface="맑은 고딕"/>
               </a:rPr>
               <a:t>• Git / GitHub</a:t>
             </a:r>
+            <a:endParaRPr sz="1250" b="0">
+              <a:solidFill>
+                <a:srgbClr val="4b6259"/>
+              </a:solidFill>
+              <a:latin typeface="맑은 고딕"/>
+            </a:endParaRPr>
           </a:p>
         </p:txBody>
       </p:sp>
@@ -12247,20 +12361,27 @@
           </a:bodyPr>
           <a:lstStyle/>
           <a:p>
-            <a:pPr algn="l">
+            <a:pPr lvl="0" algn="l">
               <a:lnSpc>
                 <a:spcPct val="115000"/>
               </a:lnSpc>
+              <a:defRPr/>
             </a:pPr>
             <a:r>
               <a:rPr sz="1250" b="0">
                 <a:solidFill>
-                  <a:srgbClr val="4B6259"/>
-                </a:solidFill>
-                <a:latin typeface="Malgun Gothic"/>
+                  <a:srgbClr val="4b6259"/>
+                </a:solidFill>
+                <a:latin typeface="맑은 고딕"/>
               </a:rPr>
               <a:t>• GitHub CLI (gh)</a:t>
             </a:r>
+            <a:endParaRPr sz="1250" b="0">
+              <a:solidFill>
+                <a:srgbClr val="4b6259"/>
+              </a:solidFill>
+              <a:latin typeface="맑은 고딕"/>
+            </a:endParaRPr>
           </a:p>
         </p:txBody>
       </p:sp>
@@ -12286,20 +12407,27 @@
           </a:bodyPr>
           <a:lstStyle/>
           <a:p>
-            <a:pPr algn="l">
+            <a:pPr lvl="0" algn="l">
               <a:lnSpc>
                 <a:spcPct val="115000"/>
               </a:lnSpc>
+              <a:defRPr/>
             </a:pPr>
             <a:r>
               <a:rPr sz="1250" b="0">
                 <a:solidFill>
-                  <a:srgbClr val="4B6259"/>
-                </a:solidFill>
-                <a:latin typeface="Malgun Gothic"/>
+                  <a:srgbClr val="4b6259"/>
+                </a:solidFill>
+                <a:latin typeface="맑은 고딕"/>
               </a:rPr>
               <a:t>• PR 기반 브랜치 전략</a:t>
             </a:r>
+            <a:endParaRPr sz="1250" b="0">
+              <a:solidFill>
+                <a:srgbClr val="4b6259"/>
+              </a:solidFill>
+              <a:latin typeface="맑은 고딕"/>
+            </a:endParaRPr>
           </a:p>
         </p:txBody>
       </p:sp>
@@ -12318,11 +12446,11 @@
             <a:avLst/>
           </a:prstGeom>
           <a:solidFill>
-            <a:srgbClr val="FFFFFF"/>
+            <a:srgbClr val="ffffff"/>
           </a:solidFill>
           <a:ln w="12700">
             <a:solidFill>
-              <a:srgbClr val="DCEEE7"/>
+              <a:srgbClr val="dceee7"/>
             </a:solidFill>
           </a:ln>
           <a:effectLst/>
@@ -12342,10 +12470,13 @@
           </a:fontRef>
         </p:style>
         <p:txBody>
-          <a:bodyPr rtlCol="0" anchor="ctr"/>
-          <a:lstStyle/>
-          <a:p>
-            <a:pPr algn="ctr"/>
+          <a:bodyPr anchor="ctr"/>
+          <a:lstStyle/>
+          <a:p>
+            <a:pPr lvl="0" algn="ctr">
+              <a:defRPr/>
+            </a:pPr>
+            <a:endParaRPr lang="ko-KR" altLang="en-US"/>
           </a:p>
         </p:txBody>
       </p:sp>
@@ -12364,7 +12495,7 @@
             <a:avLst/>
           </a:prstGeom>
           <a:solidFill>
-            <a:srgbClr val="0F766E"/>
+            <a:srgbClr val="0f766e"/>
           </a:solidFill>
           <a:ln>
             <a:noFill/>
@@ -12386,10 +12517,13 @@
           </a:fontRef>
         </p:style>
         <p:txBody>
-          <a:bodyPr rtlCol="0" anchor="ctr"/>
-          <a:lstStyle/>
-          <a:p>
-            <a:pPr algn="ctr"/>
+          <a:bodyPr anchor="ctr"/>
+          <a:lstStyle/>
+          <a:p>
+            <a:pPr lvl="0" algn="ctr">
+              <a:defRPr/>
+            </a:pPr>
+            <a:endParaRPr lang="ko-KR" altLang="en-US"/>
           </a:p>
         </p:txBody>
       </p:sp>
@@ -12415,20 +12549,27 @@
           </a:bodyPr>
           <a:lstStyle/>
           <a:p>
-            <a:pPr algn="ctr">
+            <a:pPr lvl="0" algn="ctr">
               <a:lnSpc>
                 <a:spcPct val="115000"/>
               </a:lnSpc>
+              <a:defRPr/>
             </a:pPr>
             <a:r>
               <a:rPr sz="1500" b="1">
                 <a:solidFill>
-                  <a:srgbClr val="FFFFFF"/>
-                </a:solidFill>
-                <a:latin typeface="Malgun Gothic"/>
+                  <a:srgbClr val="ffffff"/>
+                </a:solidFill>
+                <a:latin typeface="맑은 고딕"/>
               </a:rPr>
               <a:t>검증 &amp; 문서화</a:t>
             </a:r>
+            <a:endParaRPr sz="1500" b="1">
+              <a:solidFill>
+                <a:srgbClr val="ffffff"/>
+              </a:solidFill>
+              <a:latin typeface="맑은 고딕"/>
+            </a:endParaRPr>
           </a:p>
         </p:txBody>
       </p:sp>
@@ -12454,20 +12595,27 @@
           </a:bodyPr>
           <a:lstStyle/>
           <a:p>
-            <a:pPr algn="l">
+            <a:pPr lvl="0" algn="l">
               <a:lnSpc>
                 <a:spcPct val="115000"/>
               </a:lnSpc>
+              <a:defRPr/>
             </a:pPr>
             <a:r>
               <a:rPr sz="1250" b="0">
                 <a:solidFill>
-                  <a:srgbClr val="4B6259"/>
-                </a:solidFill>
-                <a:latin typeface="Malgun Gothic"/>
+                  <a:srgbClr val="4b6259"/>
+                </a:solidFill>
+                <a:latin typeface="맑은 고딕"/>
               </a:rPr>
               <a:t>• Playwright (E2E 검증)</a:t>
             </a:r>
+            <a:endParaRPr sz="1250" b="0">
+              <a:solidFill>
+                <a:srgbClr val="4b6259"/>
+              </a:solidFill>
+              <a:latin typeface="맑은 고딕"/>
+            </a:endParaRPr>
           </a:p>
         </p:txBody>
       </p:sp>
@@ -12493,20 +12641,27 @@
           </a:bodyPr>
           <a:lstStyle/>
           <a:p>
-            <a:pPr algn="l">
+            <a:pPr lvl="0" algn="l">
               <a:lnSpc>
                 <a:spcPct val="115000"/>
               </a:lnSpc>
+              <a:defRPr/>
             </a:pPr>
             <a:r>
               <a:rPr sz="1250" b="0">
                 <a:solidFill>
-                  <a:srgbClr val="4B6259"/>
-                </a:solidFill>
-                <a:latin typeface="Malgun Gothic"/>
+                  <a:srgbClr val="4b6259"/>
+                </a:solidFill>
+                <a:latin typeface="맑은 고딕"/>
               </a:rPr>
               <a:t>• python-pptx (발표자료 자동화)</a:t>
             </a:r>
+            <a:endParaRPr sz="1250" b="0">
+              <a:solidFill>
+                <a:srgbClr val="4b6259"/>
+              </a:solidFill>
+              <a:latin typeface="맑은 고딕"/>
+            </a:endParaRPr>
           </a:p>
         </p:txBody>
       </p:sp>
@@ -12532,20 +12687,27 @@
           </a:bodyPr>
           <a:lstStyle/>
           <a:p>
-            <a:pPr algn="l">
+            <a:pPr lvl="0" algn="l">
               <a:lnSpc>
                 <a:spcPct val="115000"/>
               </a:lnSpc>
+              <a:defRPr/>
             </a:pPr>
             <a:r>
               <a:rPr sz="1250" b="0">
                 <a:solidFill>
-                  <a:srgbClr val="4B6259"/>
-                </a:solidFill>
-                <a:latin typeface="Malgun Gothic"/>
+                  <a:srgbClr val="4b6259"/>
+                </a:solidFill>
+                <a:latin typeface="맑은 고딕"/>
               </a:rPr>
               <a:t>• Mermaid (ERD 다이어그램)</a:t>
             </a:r>
+            <a:endParaRPr sz="1250" b="0">
+              <a:solidFill>
+                <a:srgbClr val="4b6259"/>
+              </a:solidFill>
+              <a:latin typeface="맑은 고딕"/>
+            </a:endParaRPr>
           </a:p>
         </p:txBody>
       </p:sp>
@@ -12571,20 +12733,27 @@
           </a:bodyPr>
           <a:lstStyle/>
           <a:p>
-            <a:pPr algn="l">
+            <a:pPr lvl="0" algn="l">
               <a:lnSpc>
                 <a:spcPct val="115000"/>
               </a:lnSpc>
+              <a:defRPr/>
             </a:pPr>
             <a:r>
               <a:rPr sz="1000" b="0">
                 <a:solidFill>
-                  <a:srgbClr val="6E8880"/>
-                </a:solidFill>
-                <a:latin typeface="Malgun Gothic"/>
+                  <a:srgbClr val="6e8880"/>
+                </a:solidFill>
+                <a:latin typeface="맑은 고딕"/>
               </a:rPr>
               <a:t>EXPENSE TRACKER · PORTFOLIO</a:t>
             </a:r>
+            <a:endParaRPr sz="1000" b="0">
+              <a:solidFill>
+                <a:srgbClr val="6e8880"/>
+              </a:solidFill>
+              <a:latin typeface="맑은 고딕"/>
+            </a:endParaRPr>
           </a:p>
         </p:txBody>
       </p:sp>
@@ -12610,20 +12779,27 @@
           </a:bodyPr>
           <a:lstStyle/>
           <a:p>
-            <a:pPr algn="r">
+            <a:pPr lvl="0" algn="r">
               <a:lnSpc>
                 <a:spcPct val="115000"/>
               </a:lnSpc>
+              <a:defRPr/>
             </a:pPr>
             <a:r>
               <a:rPr sz="1000" b="0">
                 <a:solidFill>
-                  <a:srgbClr val="6E8880"/>
-                </a:solidFill>
-                <a:latin typeface="Malgun Gothic"/>
+                  <a:srgbClr val="6e8880"/>
+                </a:solidFill>
+                <a:latin typeface="맑은 고딕"/>
               </a:rPr>
               <a:t>7</a:t>
             </a:r>
+            <a:endParaRPr sz="1000" b="0">
+              <a:solidFill>
+                <a:srgbClr val="6e8880"/>
+              </a:solidFill>
+              <a:latin typeface="맑은 고딕"/>
+            </a:endParaRPr>
           </a:p>
         </p:txBody>
       </p:sp>
@@ -12632,6 +12808,14 @@
   <p:clrMapOvr>
     <a:masterClrMapping/>
   </p:clrMapOvr>
+  <mc:AlternateContent xmlns:mc="http://schemas.openxmlformats.org/markup-compatibility/2006">
+    <mc:Choice xmlns:p14="http://schemas.microsoft.com/office/powerpoint/2010/main" Requires="p14">
+      <p:transition xmlns:mc="http://schemas.openxmlformats.org/markup-compatibility/2006" xmlns:p14="http://schemas.microsoft.com/office/powerpoint/2010/main" mc:Ignorable="p14" p14:dur="500"/>
+    </mc:Choice>
+    <mc:Fallback>
+      <p:transition/>
+    </mc:Fallback>
+  </mc:AlternateContent>
 </p:sld>
 </file>
 
@@ -13844,41 +14028,41 @@
 </file>
 
 <file path=ppt/theme/theme1.xml><?xml version="1.0" encoding="utf-8"?>
-<a:theme xmlns:a="http://schemas.openxmlformats.org/drawingml/2006/main" name="Office Theme">
+<a:theme xmlns:r="http://schemas.openxmlformats.org/officeDocument/2006/relationships" xmlns:c="http://schemas.openxmlformats.org/drawingml/2006/chart" xmlns:dgm="http://schemas.openxmlformats.org/drawingml/2006/diagram" xmlns:dsp="http://schemas.microsoft.com/office/drawing/2008/diagram" xmlns:a="http://schemas.openxmlformats.org/drawingml/2006/main" xmlns:pic="http://schemas.openxmlformats.org/drawingml/2006/picture" xmlns:wp="http://schemas.openxmlformats.org/drawingml/2006/wordprocessingDrawing" xmlns:xdr="http://schemas.openxmlformats.org/drawingml/2006/spreadsheetDrawing" xmlns:lc="http://schemas.openxmlformats.org/drawingml/2006/lockedCanvas" xmlns:p="http://schemas.openxmlformats.org/presentationml/2006/main" name="Office Theme">
   <a:themeElements>
     <a:clrScheme name="Office">
       <a:dk1>
         <a:sysClr val="windowText" lastClr="000000"/>
       </a:dk1>
       <a:lt1>
-        <a:sysClr val="window" lastClr="FFFFFF"/>
+        <a:sysClr val="window" lastClr="ffffff"/>
       </a:lt1>
       <a:dk2>
-        <a:srgbClr val="1F497D"/>
+        <a:srgbClr val="1f497d"/>
       </a:dk2>
       <a:lt2>
-        <a:srgbClr val="EEECE1"/>
+        <a:srgbClr val="eeece1"/>
       </a:lt2>
       <a:accent1>
-        <a:srgbClr val="4F81BD"/>
+        <a:srgbClr val="4f81bd"/>
       </a:accent1>
       <a:accent2>
-        <a:srgbClr val="C0504D"/>
+        <a:srgbClr val="c0504d"/>
       </a:accent2>
       <a:accent3>
-        <a:srgbClr val="9BBB59"/>
+        <a:srgbClr val="9bbb59"/>
       </a:accent3>
       <a:accent4>
-        <a:srgbClr val="8064A2"/>
+        <a:srgbClr val="8064a2"/>
       </a:accent4>
       <a:accent5>
-        <a:srgbClr val="4BACC6"/>
+        <a:srgbClr val="4bacc6"/>
       </a:accent5>
       <a:accent6>
-        <a:srgbClr val="F79646"/>
+        <a:srgbClr val="f79646"/>
       </a:accent6>
       <a:hlink>
-        <a:srgbClr val="0000FF"/>
+        <a:srgbClr val="0000ff"/>
       </a:hlink>
       <a:folHlink>
         <a:srgbClr val="800080"/>
@@ -13889,9 +14073,9 @@
         <a:latin typeface="Calibri"/>
         <a:ea typeface=""/>
         <a:cs typeface=""/>
-        <a:font script="Jpan" typeface="ＭＳ Ｐゴシック"/>
+        <a:font script="Jpan" typeface="MS PGothic"/>
         <a:font script="Hang" typeface="맑은 고딕"/>
-        <a:font script="Hans" typeface="宋体"/>
+        <a:font script="Hans" typeface="SimSun"/>
         <a:font script="Hant" typeface="新細明體"/>
         <a:font script="Arab" typeface="Times New Roman"/>
         <a:font script="Hebr" typeface="Times New Roman"/>
@@ -13924,9 +14108,9 @@
         <a:latin typeface="Calibri"/>
         <a:ea typeface=""/>
         <a:cs typeface=""/>
-        <a:font script="Jpan" typeface="ＭＳ Ｐゴシック"/>
+        <a:font script="Jpan" typeface="MS PGothic"/>
         <a:font script="Hang" typeface="맑은 고딕"/>
-        <a:font script="Hans" typeface="宋体"/>
+        <a:font script="Hans" typeface="SimSun"/>
         <a:font script="Hant" typeface="新細明體"/>
         <a:font script="Arab" typeface="Arial"/>
         <a:font script="Hebr" typeface="Arial"/>
@@ -14158,7 +14342,11 @@
         </a:fontRef>
       </a:style>
     </a:lnDef>
+    <a:txDef>
+      <a:spPr/>
+      <a:bodyPr/>
+      <a:lstStyle/>
+    </a:txDef>
   </a:objectDefaults>
-  <a:extraClrSchemeLst/>
 </a:theme>
 </file>